--- a/Relatorio_Atividade_2_Slides.pptx
+++ b/Relatorio_Atividade_2_Slides.pptx
@@ -5099,6 +5099,20 @@
               </a:defRPr>
             </a:pPr>
             <a:r>
+              <a:t>• LENNON, John. Imagine. In: Imagine. Produção: John Lennon, Yoko Ono, Phil Spector. Ascot Sound Studios: Apple Records, 1971. 1 faixa musical (3 min 3 s). Uso pedagógico e cultural.</a:t>
+            </a:r>
+          </a:p>
+          <a:p>
+            <a:br/>
+            <a:pPr>
+              <a:defRPr sz="950">
+                <a:solidFill>
+                  <a:srgbClr val="64748B"/>
+                </a:solidFill>
+                <a:latin typeface="Arial"/>
+              </a:defRPr>
+            </a:pPr>
+            <a:r>
               <a:t>• MDN WEB DOCS. Fetch API. Mozilla Developer Network, 2026. Disponível em: &lt;https://developer.mozilla.org/pt-BR/docs/Web/API/Fetch_API&gt;. Acesso em: 17 set. 2026.</a:t>
             </a:r>
           </a:p>
@@ -6558,7 +6572,7 @@
               </a:defRPr>
             </a:pPr>
             <a:r>
-              <a:t>A Música que Conecta Gerações</a:t>
+              <a:t>A Música que Conecta Gerações (Imagine — John Lennon, 1971)</a:t>
             </a:r>
           </a:p>
           <a:p>
@@ -6572,7 +6586,7 @@
               </a:defRPr>
             </a:pPr>
             <a:r>
-              <a:t>Nenhum projeto comunitário vive só de botões; ele vive de sentimento. O componente PlayerAudio.jsx traz a música 'Imagine' como pano de fundo de esperança.</a:t>
+              <a:t>Nenhum projeto comunitário vive só de botões; ele vive de sentimento. O componente PlayerAudio.jsx traz a clássica canção 'Imagine' de John Lennon (1971) como trilha sonora de paz e união, executada para fins pedagógicos e culturais.</a:t>
             </a:r>
           </a:p>
           <a:p>

--- a/Relatorio_Atividade_2_Slides.pptx
+++ b/Relatorio_Atividade_2_Slides.pptx
@@ -3151,8 +3151,8 @@
         </p:nvSpPr>
         <p:spPr>
           <a:xfrm>
-            <a:off x="1371600" y="731520"/>
-            <a:ext cx="9448495" cy="457200"/>
+            <a:off x="2011680" y="685800"/>
+            <a:ext cx="8168335" cy="438912"/>
           </a:xfrm>
           <a:prstGeom prst="roundRect">
             <a:avLst/>
@@ -3160,7 +3160,7 @@
           <a:solidFill>
             <a:srgbClr val="0F3D24"/>
           </a:solidFill>
-          <a:ln>
+          <a:ln w="15240">
             <a:solidFill>
               <a:srgbClr val="10B981"/>
             </a:solidFill>
@@ -3181,7 +3181,7 @@
           </a:fontRef>
         </p:style>
         <p:txBody>
-          <a:bodyPr rtlCol="0" anchor="ctr"/>
+          <a:bodyPr rtlCol="0" anchor="ctr" tIns="73152"/>
           <a:lstStyle/>
           <a:p>
             <a:pPr algn="ctr">
@@ -3189,11 +3189,11 @@
                 <a:solidFill>
                   <a:srgbClr val="10B981"/>
                 </a:solidFill>
-                <a:latin typeface="Arial"/>
-              </a:defRPr>
-            </a:pPr>
-            <a:r>
-              <a:t>UNIVERSIDADE ESTADUAL DO MARANHÃO — UEMA | POLO DE TIMBIRAS</a:t>
+                <a:latin typeface="Segoe UI"/>
+              </a:defRPr>
+            </a:pPr>
+            <a:r>
+              <a:t>UNIVERSIDADE ESTADUAL DO MARANHÃO — UEMA</a:t>
             </a:r>
           </a:p>
         </p:txBody>
@@ -3206,7 +3206,7 @@
         </p:nvSpPr>
         <p:spPr>
           <a:xfrm>
-            <a:off x="1371600" y="1280160"/>
+            <a:off x="1371600" y="1234440"/>
             <a:ext cx="9448495" cy="457200"/>
           </a:xfrm>
           <a:prstGeom prst="rect">
@@ -3225,11 +3225,11 @@
                 <a:solidFill>
                   <a:srgbClr val="CBD5E1"/>
                 </a:solidFill>
-                <a:latin typeface="Arial"/>
-              </a:defRPr>
-            </a:pPr>
-            <a:r>
-              <a:t>CST em Análise e Desenvolvimento de Sistemas | Disciplina: Desenvolvimento Web | Nota 2</a:t>
+                <a:latin typeface="Segoe UI"/>
+              </a:defRPr>
+            </a:pPr>
+            <a:r>
+              <a:t>CST em Análise e Desenvolvimento de Sistemas  |  Desenvolvimento Web  |  Nota 2</a:t>
             </a:r>
           </a:p>
         </p:txBody>
@@ -3242,8 +3242,8 @@
         </p:nvSpPr>
         <p:spPr>
           <a:xfrm>
-            <a:off x="1371600" y="1920240"/>
-            <a:ext cx="9448495" cy="1280160"/>
+            <a:off x="1371600" y="1874519"/>
+            <a:ext cx="9448495" cy="1188720"/>
           </a:xfrm>
           <a:prstGeom prst="rect">
             <a:avLst/>
@@ -3257,11 +3257,11 @@
           <a:lstStyle/>
           <a:p>
             <a:pPr algn="ctr">
-              <a:defRPr sz="4400" b="1">
-                <a:solidFill>
-                  <a:srgbClr val="10B981"/>
-                </a:solidFill>
-                <a:latin typeface="Arial"/>
+              <a:defRPr sz="4600" b="1">
+                <a:solidFill>
+                  <a:srgbClr val="4ADE80"/>
+                </a:solidFill>
+                <a:latin typeface="Segoe UI"/>
               </a:defRPr>
             </a:pPr>
             <a:r>
@@ -3278,8 +3278,8 @@
         </p:nvSpPr>
         <p:spPr>
           <a:xfrm>
-            <a:off x="1371600" y="3291840"/>
-            <a:ext cx="9448495" cy="914400"/>
+            <a:off x="1645920" y="3154680"/>
+            <a:ext cx="8899855" cy="1005840"/>
           </a:xfrm>
           <a:prstGeom prst="rect">
             <a:avLst/>
@@ -3293,11 +3293,11 @@
           <a:lstStyle/>
           <a:p>
             <a:pPr algn="ctr">
-              <a:defRPr sz="1800">
-                <a:solidFill>
-                  <a:srgbClr val="FFFFFF"/>
-                </a:solidFill>
-                <a:latin typeface="Arial"/>
+              <a:defRPr sz="1700">
+                <a:solidFill>
+                  <a:srgbClr val="F1F5F9"/>
+                </a:solidFill>
+                <a:latin typeface="Segoe UI"/>
               </a:defRPr>
             </a:pPr>
             <a:r>
@@ -3314,8 +3314,8 @@
         </p:nvSpPr>
         <p:spPr>
           <a:xfrm>
-            <a:off x="1371600" y="4572000"/>
-            <a:ext cx="9448495" cy="1463040"/>
+            <a:off x="1645920" y="4434840"/>
+            <a:ext cx="8899855" cy="1600200"/>
           </a:xfrm>
           <a:prstGeom prst="roundRect">
             <a:avLst/>
@@ -3323,9 +3323,9 @@
           <a:solidFill>
             <a:srgbClr val="0C321D"/>
           </a:solidFill>
-          <a:ln>
+          <a:ln w="19050">
             <a:solidFill>
-              <a:srgbClr val="14532D"/>
+              <a:srgbClr val="166534"/>
             </a:solidFill>
           </a:ln>
         </p:spPr>
@@ -3344,19 +3344,19 @@
           </a:fontRef>
         </p:style>
         <p:txBody>
-          <a:bodyPr rtlCol="0" anchor="ctr"/>
+          <a:bodyPr rtlCol="0" anchor="ctr" tIns="182880"/>
           <a:lstStyle/>
           <a:p>
             <a:pPr algn="ctr">
-              <a:defRPr sz="1400" b="1">
-                <a:solidFill>
-                  <a:srgbClr val="10B981"/>
-                </a:solidFill>
-                <a:latin typeface="Arial"/>
-              </a:defRPr>
-            </a:pPr>
-            <a:r>
-              <a:t>EQUIPE TIMBIRANOS:</a:t>
+              <a:defRPr sz="1300" b="1">
+                <a:solidFill>
+                  <a:srgbClr val="4ADE80"/>
+                </a:solidFill>
+                <a:latin typeface="Segoe UI"/>
+              </a:defRPr>
+            </a:pPr>
+            <a:r>
+              <a:t>EQUIPE TIMBIRANOS</a:t>
             </a:r>
           </a:p>
           <a:p>
@@ -3365,7 +3365,7 @@
                 <a:solidFill>
                   <a:srgbClr val="FFFFFF"/>
                 </a:solidFill>
-                <a:latin typeface="Arial"/>
+                <a:latin typeface="Segoe UI"/>
               </a:defRPr>
             </a:pPr>
             <a:r>
@@ -3376,13 +3376,13 @@
             <a:pPr algn="ctr">
               <a:defRPr sz="1200">
                 <a:solidFill>
-                  <a:srgbClr val="CBD5E1"/>
-                </a:solidFill>
-                <a:latin typeface="Arial"/>
-              </a:defRPr>
-            </a:pPr>
-            <a:r>
-              <a:t>Polo Universitário de Timbiras — Maranhão | 2026</a:t>
+                  <a:srgbClr val="94A3B8"/>
+                </a:solidFill>
+                <a:latin typeface="Segoe UI"/>
+              </a:defRPr>
+            </a:pPr>
+            <a:r>
+              <a:t>Polo Universitário de Timbiras — Maranhão  |  2026</a:t>
             </a:r>
           </a:p>
         </p:txBody>
@@ -3413,8 +3413,8 @@
         </p:nvSpPr>
         <p:spPr>
           <a:xfrm>
-            <a:off x="548640" y="365760"/>
-            <a:ext cx="8686800" cy="731520"/>
+            <a:off x="731520" y="365760"/>
+            <a:ext cx="8412480" cy="685800"/>
           </a:xfrm>
           <a:prstGeom prst="rect">
             <a:avLst/>
@@ -3428,11 +3428,11 @@
           <a:lstStyle/>
           <a:p>
             <a:pPr>
-              <a:defRPr sz="2200" b="1">
+              <a:defRPr sz="2100" b="1">
                 <a:solidFill>
                   <a:srgbClr val="00873E"/>
                 </a:solidFill>
-                <a:latin typeface="Arial"/>
+                <a:latin typeface="Segoe UI"/>
               </a:defRPr>
             </a:pPr>
             <a:r>
@@ -3449,8 +3449,8 @@
         </p:nvSpPr>
         <p:spPr>
           <a:xfrm>
-            <a:off x="9326880" y="411480"/>
-            <a:ext cx="2286000" cy="365760"/>
+            <a:off x="9235440" y="411480"/>
+            <a:ext cx="2194560" cy="347472"/>
           </a:xfrm>
           <a:prstGeom prst="roundRect">
             <a:avLst/>
@@ -3458,7 +3458,7 @@
           <a:solidFill>
             <a:srgbClr val="F8FAFC"/>
           </a:solidFill>
-          <a:ln>
+          <a:ln w="12700">
             <a:solidFill>
               <a:srgbClr val="E2E8F0"/>
             </a:solidFill>
@@ -3479,19 +3479,19 @@
           </a:fontRef>
         </p:style>
         <p:txBody>
-          <a:bodyPr rtlCol="0" anchor="ctr" wrap="none"/>
+          <a:bodyPr rtlCol="0" anchor="ctr" tIns="54864"/>
           <a:lstStyle/>
           <a:p>
             <a:pPr algn="ctr">
-              <a:defRPr sz="1100" b="1">
+              <a:defRPr sz="1000" b="1">
                 <a:solidFill>
                   <a:srgbClr val="64748B"/>
                 </a:solidFill>
-                <a:latin typeface="Arial"/>
-              </a:defRPr>
-            </a:pPr>
-            <a:r>
-              <a:t>Evidências Reais</a:t>
+                <a:latin typeface="Segoe UI"/>
+              </a:defRPr>
+            </a:pPr>
+            <a:r>
+              <a:t>EVIDÊNCIAS REAIS</a:t>
             </a:r>
           </a:p>
         </p:txBody>
@@ -3504,8 +3504,8 @@
         </p:nvSpPr>
         <p:spPr>
           <a:xfrm>
-            <a:off x="548640" y="1097280"/>
-            <a:ext cx="11094415" cy="18288"/>
+            <a:off x="731520" y="1051560"/>
+            <a:ext cx="10728655" cy="13716"/>
           </a:xfrm>
           <a:prstGeom prst="rect">
             <a:avLst/>
@@ -3514,9 +3514,7 @@
             <a:srgbClr val="E2E8F0"/>
           </a:solidFill>
           <a:ln>
-            <a:solidFill>
-              <a:srgbClr val="E2E8F0"/>
-            </a:solidFill>
+            <a:noFill/>
           </a:ln>
         </p:spPr>
         <p:style>
@@ -3549,8 +3547,8 @@
         </p:nvSpPr>
         <p:spPr>
           <a:xfrm>
-            <a:off x="548640" y="6263640"/>
-            <a:ext cx="11094415" cy="18288"/>
+            <a:off x="731520" y="6263640"/>
+            <a:ext cx="10728655" cy="13716"/>
           </a:xfrm>
           <a:prstGeom prst="rect">
             <a:avLst/>
@@ -3559,9 +3557,7 @@
             <a:srgbClr val="E2E8F0"/>
           </a:solidFill>
           <a:ln>
-            <a:solidFill>
-              <a:srgbClr val="E2E8F0"/>
-            </a:solidFill>
+            <a:noFill/>
           </a:ln>
         </p:spPr>
         <p:style>
@@ -3594,7 +3590,7 @@
         </p:nvSpPr>
         <p:spPr>
           <a:xfrm>
-            <a:off x="548640" y="6327648"/>
+            <a:off x="731520" y="6327648"/>
             <a:ext cx="5486400" cy="320040"/>
           </a:xfrm>
           <a:prstGeom prst="rect">
@@ -3609,15 +3605,15 @@
           <a:lstStyle/>
           <a:p>
             <a:pPr>
-              <a:defRPr sz="1000">
+              <a:defRPr sz="950">
                 <a:solidFill>
                   <a:srgbClr val="64748B"/>
                 </a:solidFill>
-                <a:latin typeface="Arial"/>
-              </a:defRPr>
-            </a:pPr>
-            <a:r>
-              <a:t>Timbiras Solidária — ADS UEMA 2026 | Polo Timbiras</a:t>
+                <a:latin typeface="Segoe UI"/>
+              </a:defRPr>
+            </a:pPr>
+            <a:r>
+              <a:t>Timbiras Solidária — ADS UEMA 2026 | Polo Universitário de Timbiras</a:t>
             </a:r>
           </a:p>
         </p:txBody>
@@ -3630,8 +3626,8 @@
         </p:nvSpPr>
         <p:spPr>
           <a:xfrm>
-            <a:off x="9144000" y="6327648"/>
-            <a:ext cx="2499055" cy="320040"/>
+            <a:off x="8686800" y="6327648"/>
+            <a:ext cx="2773375" cy="320040"/>
           </a:xfrm>
           <a:prstGeom prst="rect">
             <a:avLst/>
@@ -3645,22 +3641,103 @@
           <a:lstStyle/>
           <a:p>
             <a:pPr algn="r">
-              <a:defRPr sz="1000" b="1">
+              <a:defRPr sz="950" b="1">
                 <a:solidFill>
                   <a:srgbClr val="64748B"/>
                 </a:solidFill>
-                <a:latin typeface="Arial"/>
+                <a:latin typeface="Segoe UI"/>
               </a:defRPr>
             </a:pPr>
             <a:r>
               <a:t>Slide 10 / 13</a:t>
+            </a:r>
+          </a:p>
+        </p:txBody>
+      </p:sp>
+      <p:sp>
+        <p:nvSpPr>
+          <p:cNvPr id="8" name="Rounded Rectangle 7"/>
+          <p:cNvSpPr/>
+          <p:nvPr/>
+        </p:nvSpPr>
+        <p:spPr>
+          <a:xfrm>
+            <a:off x="731520" y="1234440"/>
+            <a:ext cx="5166360" cy="4800600"/>
+          </a:xfrm>
+          <a:prstGeom prst="roundRect">
+            <a:avLst/>
+          </a:prstGeom>
+          <a:solidFill>
+            <a:srgbClr val="F8FAFC"/>
+          </a:solidFill>
+          <a:ln w="12700">
+            <a:solidFill>
+              <a:srgbClr val="E2E8F0"/>
+            </a:solidFill>
+          </a:ln>
+        </p:spPr>
+        <p:style>
+          <a:lnRef idx="1">
+            <a:schemeClr val="accent1"/>
+          </a:lnRef>
+          <a:fillRef idx="3">
+            <a:schemeClr val="accent1"/>
+          </a:fillRef>
+          <a:effectRef idx="2">
+            <a:schemeClr val="accent1"/>
+          </a:effectRef>
+          <a:fontRef idx="minor">
+            <a:schemeClr val="lt1"/>
+          </a:fontRef>
+        </p:style>
+        <p:txBody>
+          <a:bodyPr rtlCol="0" anchor="ctr"/>
+          <a:lstStyle/>
+          <a:p>
+            <a:pPr algn="ctr"/>
+          </a:p>
+        </p:txBody>
+      </p:sp>
+      <p:sp>
+        <p:nvSpPr>
+          <p:cNvPr id="9" name="TextBox 8"/>
+          <p:cNvSpPr txBox="1"/>
+          <p:nvPr/>
+        </p:nvSpPr>
+        <p:spPr>
+          <a:xfrm>
+            <a:off x="868680" y="1325880"/>
+            <a:ext cx="4892040" cy="365760"/>
+          </a:xfrm>
+          <a:prstGeom prst="rect">
+            <a:avLst/>
+          </a:prstGeom>
+          <a:noFill/>
+        </p:spPr>
+        <p:txBody>
+          <a:bodyPr wrap="none">
+            <a:spAutoFit/>
+          </a:bodyPr>
+          <a:lstStyle/>
+          <a:p>
+            <a:pPr>
+              <a:defRPr sz="1200" b="1">
+                <a:solidFill>
+                  <a:srgbClr val="00873E"/>
+                </a:solidFill>
+                <a:latin typeface="Segoe UI"/>
+              </a:defRPr>
+            </a:pPr>
+            <a:r>
+              <a:t>1. Tela Inicial &amp; Painel de Metas Comunitárias</a:t>
             </a:r>
           </a:p>
         </p:txBody>
       </p:sp>
       <p:pic>
         <p:nvPicPr>
-          <p:cNvPr id="8" name="Picture 7" descr="captura_desktop.png"/>
+          <p:cNvPr id="10" name="Picture 9" descr="captura_desktop.png"/>
           <p:cNvPicPr>
             <a:picLocks noChangeAspect="1"/>
           </p:cNvPicPr>
@@ -3674,8 +3751,8 @@
         </p:blipFill>
         <p:spPr>
           <a:xfrm>
-            <a:off x="548640" y="1371600"/>
-            <a:ext cx="5394960" cy="2926549"/>
+            <a:off x="868680" y="1737360"/>
+            <a:ext cx="4892040" cy="2653735"/>
           </a:xfrm>
           <a:prstGeom prst="rect">
             <a:avLst/>
@@ -3684,14 +3761,14 @@
       </p:pic>
       <p:sp>
         <p:nvSpPr>
-          <p:cNvPr id="9" name="TextBox 8"/>
+          <p:cNvPr id="11" name="TextBox 10"/>
           <p:cNvSpPr txBox="1"/>
           <p:nvPr/>
         </p:nvSpPr>
         <p:spPr>
           <a:xfrm>
-            <a:off x="548640" y="4663440"/>
-            <a:ext cx="5394960" cy="1280160"/>
+            <a:off x="868680" y="4892040"/>
+            <a:ext cx="4892040" cy="1051560"/>
           </a:xfrm>
           <a:prstGeom prst="rect">
             <a:avLst/>
@@ -3705,35 +3782,103 @@
           <a:lstStyle/>
           <a:p>
             <a:pPr>
-              <a:defRPr sz="1300" b="1">
-                <a:solidFill>
-                  <a:srgbClr val="00873E"/>
-                </a:solidFill>
-                <a:latin typeface="Arial"/>
-              </a:defRPr>
-            </a:pPr>
-            <a:r>
-              <a:t>1. Tela Inicial &amp; Painel de Metas (Desktop)</a:t>
-            </a:r>
-          </a:p>
-          <a:p>
-            <a:pPr>
-              <a:defRPr sz="1100">
+              <a:defRPr sz="1000">
                 <a:solidFill>
                   <a:srgbClr val="64748B"/>
                 </a:solidFill>
-                <a:latin typeface="Arial"/>
-              </a:defRPr>
-            </a:pPr>
-            <a:r>
-              <a:t>Destaque para o acolhimento visual, imagem real da agricultura familiar, contador reativo de 12 cestas e barra de progresso da meta comunitária.</a:t>
+                <a:latin typeface="Segoe UI"/>
+              </a:defRPr>
+            </a:pPr>
+            <a:r>
+              <a:t>Destaque para o acolhimento visual, foto real da agricultura familiar, contador reativo de 12 cestas e barra de progresso da meta comunitária.</a:t>
+            </a:r>
+          </a:p>
+        </p:txBody>
+      </p:sp>
+      <p:sp>
+        <p:nvSpPr>
+          <p:cNvPr id="12" name="Rounded Rectangle 11"/>
+          <p:cNvSpPr/>
+          <p:nvPr/>
+        </p:nvSpPr>
+        <p:spPr>
+          <a:xfrm>
+            <a:off x="6263640" y="1234440"/>
+            <a:ext cx="5166360" cy="4800600"/>
+          </a:xfrm>
+          <a:prstGeom prst="roundRect">
+            <a:avLst/>
+          </a:prstGeom>
+          <a:solidFill>
+            <a:srgbClr val="F8FAFC"/>
+          </a:solidFill>
+          <a:ln w="12700">
+            <a:solidFill>
+              <a:srgbClr val="E2E8F0"/>
+            </a:solidFill>
+          </a:ln>
+        </p:spPr>
+        <p:style>
+          <a:lnRef idx="1">
+            <a:schemeClr val="accent1"/>
+          </a:lnRef>
+          <a:fillRef idx="3">
+            <a:schemeClr val="accent1"/>
+          </a:fillRef>
+          <a:effectRef idx="2">
+            <a:schemeClr val="accent1"/>
+          </a:effectRef>
+          <a:fontRef idx="minor">
+            <a:schemeClr val="lt1"/>
+          </a:fontRef>
+        </p:style>
+        <p:txBody>
+          <a:bodyPr rtlCol="0" anchor="ctr"/>
+          <a:lstStyle/>
+          <a:p>
+            <a:pPr algn="ctr"/>
+          </a:p>
+        </p:txBody>
+      </p:sp>
+      <p:sp>
+        <p:nvSpPr>
+          <p:cNvPr id="13" name="TextBox 12"/>
+          <p:cNvSpPr txBox="1"/>
+          <p:nvPr/>
+        </p:nvSpPr>
+        <p:spPr>
+          <a:xfrm>
+            <a:off x="6400800" y="1325880"/>
+            <a:ext cx="4892040" cy="365760"/>
+          </a:xfrm>
+          <a:prstGeom prst="rect">
+            <a:avLst/>
+          </a:prstGeom>
+          <a:noFill/>
+        </p:spPr>
+        <p:txBody>
+          <a:bodyPr wrap="none">
+            <a:spAutoFit/>
+          </a:bodyPr>
+          <a:lstStyle/>
+          <a:p>
+            <a:pPr>
+              <a:defRPr sz="1200" b="1">
+                <a:solidFill>
+                  <a:srgbClr val="0284C7"/>
+                </a:solidFill>
+                <a:latin typeface="Segoe UI"/>
+              </a:defRPr>
+            </a:pPr>
+            <a:r>
+              <a:t>2. Rota Solidária &amp; Dados Oficiais do IBGE</a:t>
             </a:r>
           </a:p>
         </p:txBody>
       </p:sp>
       <p:pic>
         <p:nvPicPr>
-          <p:cNvPr id="10" name="Picture 9" descr="captura_api_ibge.png"/>
+          <p:cNvPr id="14" name="Picture 13" descr="captura_api_ibge.png"/>
           <p:cNvPicPr>
             <a:picLocks noChangeAspect="1"/>
           </p:cNvPicPr>
@@ -3747,8 +3892,8 @@
         </p:blipFill>
         <p:spPr>
           <a:xfrm>
-            <a:off x="6217920" y="1371600"/>
-            <a:ext cx="5394960" cy="4273314"/>
+            <a:off x="6400800" y="1737360"/>
+            <a:ext cx="4892040" cy="3874954"/>
           </a:xfrm>
           <a:prstGeom prst="rect">
             <a:avLst/>
@@ -3757,14 +3902,14 @@
       </p:pic>
       <p:sp>
         <p:nvSpPr>
-          <p:cNvPr id="11" name="TextBox 10"/>
+          <p:cNvPr id="15" name="TextBox 14"/>
           <p:cNvSpPr txBox="1"/>
           <p:nvPr/>
         </p:nvSpPr>
         <p:spPr>
           <a:xfrm>
-            <a:off x="6217920" y="4663440"/>
-            <a:ext cx="5394960" cy="1280160"/>
+            <a:off x="6400800" y="4892040"/>
+            <a:ext cx="4892040" cy="1051560"/>
           </a:xfrm>
           <a:prstGeom prst="rect">
             <a:avLst/>
@@ -3778,28 +3923,15 @@
           <a:lstStyle/>
           <a:p>
             <a:pPr>
-              <a:defRPr sz="1300" b="1">
-                <a:solidFill>
-                  <a:srgbClr val="0284C7"/>
-                </a:solidFill>
-                <a:latin typeface="Arial"/>
-              </a:defRPr>
-            </a:pPr>
-            <a:r>
-              <a:t>2. Rota Solidária &amp; Dados Oficiais do IBGE</a:t>
-            </a:r>
-          </a:p>
-          <a:p>
-            <a:pPr>
-              <a:defRPr sz="1100">
+              <a:defRPr sz="1000">
                 <a:solidFill>
                   <a:srgbClr val="64748B"/>
                 </a:solidFill>
-                <a:latin typeface="Arial"/>
-              </a:defRPr>
-            </a:pPr>
-            <a:r>
-              <a:t>Cards gerados do JSON da API do IBGE, exibindo código oficial (Timbiras 2112307, Codó 2103307), microrregião e mapa interativo Leaflet.</a:t>
+                <a:latin typeface="Segoe UI"/>
+              </a:defRPr>
+            </a:pPr>
+            <a:r>
+              <a:t>Cards gerados diretamente do JSON da API pública do IBGE, exibindo código oficial de 7 dígitos (ex: Timbiras 2112307, Codó 2103307), microrregião e mapa interativo Leaflet.</a:t>
             </a:r>
           </a:p>
         </p:txBody>
@@ -3830,8 +3962,8 @@
         </p:nvSpPr>
         <p:spPr>
           <a:xfrm>
-            <a:off x="548640" y="365760"/>
-            <a:ext cx="8686800" cy="731520"/>
+            <a:off x="731520" y="365760"/>
+            <a:ext cx="8412480" cy="685800"/>
           </a:xfrm>
           <a:prstGeom prst="rect">
             <a:avLst/>
@@ -3845,11 +3977,11 @@
           <a:lstStyle/>
           <a:p>
             <a:pPr>
-              <a:defRPr sz="2200" b="1">
+              <a:defRPr sz="2100" b="1">
                 <a:solidFill>
                   <a:srgbClr val="00873E"/>
                 </a:solidFill>
-                <a:latin typeface="Arial"/>
+                <a:latin typeface="Segoe UI"/>
               </a:defRPr>
             </a:pPr>
             <a:r>
@@ -3866,8 +3998,8 @@
         </p:nvSpPr>
         <p:spPr>
           <a:xfrm>
-            <a:off x="9326880" y="411480"/>
-            <a:ext cx="2286000" cy="365760"/>
+            <a:off x="9235440" y="411480"/>
+            <a:ext cx="2194560" cy="347472"/>
           </a:xfrm>
           <a:prstGeom prst="roundRect">
             <a:avLst/>
@@ -3875,7 +4007,7 @@
           <a:solidFill>
             <a:srgbClr val="F8FAFC"/>
           </a:solidFill>
-          <a:ln>
+          <a:ln w="12700">
             <a:solidFill>
               <a:srgbClr val="E2E8F0"/>
             </a:solidFill>
@@ -3896,19 +4028,19 @@
           </a:fontRef>
         </p:style>
         <p:txBody>
-          <a:bodyPr rtlCol="0" anchor="ctr" wrap="none"/>
+          <a:bodyPr rtlCol="0" anchor="ctr" tIns="54864"/>
           <a:lstStyle/>
           <a:p>
             <a:pPr algn="ctr">
-              <a:defRPr sz="1100" b="1">
+              <a:defRPr sz="1000" b="1">
                 <a:solidFill>
                   <a:srgbClr val="64748B"/>
                 </a:solidFill>
-                <a:latin typeface="Arial"/>
-              </a:defRPr>
-            </a:pPr>
-            <a:r>
-              <a:t>Evidências Reais</a:t>
+                <a:latin typeface="Segoe UI"/>
+              </a:defRPr>
+            </a:pPr>
+            <a:r>
+              <a:t>EVIDÊNCIAS REAIS</a:t>
             </a:r>
           </a:p>
         </p:txBody>
@@ -3921,8 +4053,8 @@
         </p:nvSpPr>
         <p:spPr>
           <a:xfrm>
-            <a:off x="548640" y="1097280"/>
-            <a:ext cx="11094415" cy="18288"/>
+            <a:off x="731520" y="1051560"/>
+            <a:ext cx="10728655" cy="13716"/>
           </a:xfrm>
           <a:prstGeom prst="rect">
             <a:avLst/>
@@ -3931,9 +4063,7 @@
             <a:srgbClr val="E2E8F0"/>
           </a:solidFill>
           <a:ln>
-            <a:solidFill>
-              <a:srgbClr val="E2E8F0"/>
-            </a:solidFill>
+            <a:noFill/>
           </a:ln>
         </p:spPr>
         <p:style>
@@ -3966,8 +4096,8 @@
         </p:nvSpPr>
         <p:spPr>
           <a:xfrm>
-            <a:off x="548640" y="6263640"/>
-            <a:ext cx="11094415" cy="18288"/>
+            <a:off x="731520" y="6263640"/>
+            <a:ext cx="10728655" cy="13716"/>
           </a:xfrm>
           <a:prstGeom prst="rect">
             <a:avLst/>
@@ -3976,9 +4106,7 @@
             <a:srgbClr val="E2E8F0"/>
           </a:solidFill>
           <a:ln>
-            <a:solidFill>
-              <a:srgbClr val="E2E8F0"/>
-            </a:solidFill>
+            <a:noFill/>
           </a:ln>
         </p:spPr>
         <p:style>
@@ -4011,7 +4139,7 @@
         </p:nvSpPr>
         <p:spPr>
           <a:xfrm>
-            <a:off x="548640" y="6327648"/>
+            <a:off x="731520" y="6327648"/>
             <a:ext cx="5486400" cy="320040"/>
           </a:xfrm>
           <a:prstGeom prst="rect">
@@ -4026,15 +4154,15 @@
           <a:lstStyle/>
           <a:p>
             <a:pPr>
-              <a:defRPr sz="1000">
+              <a:defRPr sz="950">
                 <a:solidFill>
                   <a:srgbClr val="64748B"/>
                 </a:solidFill>
-                <a:latin typeface="Arial"/>
-              </a:defRPr>
-            </a:pPr>
-            <a:r>
-              <a:t>Timbiras Solidária — ADS UEMA 2026 | Polo Timbiras</a:t>
+                <a:latin typeface="Segoe UI"/>
+              </a:defRPr>
+            </a:pPr>
+            <a:r>
+              <a:t>Timbiras Solidária — ADS UEMA 2026 | Polo Universitário de Timbiras</a:t>
             </a:r>
           </a:p>
         </p:txBody>
@@ -4047,8 +4175,8 @@
         </p:nvSpPr>
         <p:spPr>
           <a:xfrm>
-            <a:off x="9144000" y="6327648"/>
-            <a:ext cx="2499055" cy="320040"/>
+            <a:off x="8686800" y="6327648"/>
+            <a:ext cx="2773375" cy="320040"/>
           </a:xfrm>
           <a:prstGeom prst="rect">
             <a:avLst/>
@@ -4062,22 +4190,103 @@
           <a:lstStyle/>
           <a:p>
             <a:pPr algn="r">
-              <a:defRPr sz="1000" b="1">
+              <a:defRPr sz="950" b="1">
                 <a:solidFill>
                   <a:srgbClr val="64748B"/>
                 </a:solidFill>
-                <a:latin typeface="Arial"/>
+                <a:latin typeface="Segoe UI"/>
               </a:defRPr>
             </a:pPr>
             <a:r>
               <a:t>Slide 11 / 13</a:t>
+            </a:r>
+          </a:p>
+        </p:txBody>
+      </p:sp>
+      <p:sp>
+        <p:nvSpPr>
+          <p:cNvPr id="8" name="Rounded Rectangle 7"/>
+          <p:cNvSpPr/>
+          <p:nvPr/>
+        </p:nvSpPr>
+        <p:spPr>
+          <a:xfrm>
+            <a:off x="731520" y="1234440"/>
+            <a:ext cx="5166360" cy="4800600"/>
+          </a:xfrm>
+          <a:prstGeom prst="roundRect">
+            <a:avLst/>
+          </a:prstGeom>
+          <a:solidFill>
+            <a:srgbClr val="F8FAFC"/>
+          </a:solidFill>
+          <a:ln w="12700">
+            <a:solidFill>
+              <a:srgbClr val="E2E8F0"/>
+            </a:solidFill>
+          </a:ln>
+        </p:spPr>
+        <p:style>
+          <a:lnRef idx="1">
+            <a:schemeClr val="accent1"/>
+          </a:lnRef>
+          <a:fillRef idx="3">
+            <a:schemeClr val="accent1"/>
+          </a:fillRef>
+          <a:effectRef idx="2">
+            <a:schemeClr val="accent1"/>
+          </a:effectRef>
+          <a:fontRef idx="minor">
+            <a:schemeClr val="lt1"/>
+          </a:fontRef>
+        </p:style>
+        <p:txBody>
+          <a:bodyPr rtlCol="0" anchor="ctr"/>
+          <a:lstStyle/>
+          <a:p>
+            <a:pPr algn="ctr"/>
+          </a:p>
+        </p:txBody>
+      </p:sp>
+      <p:sp>
+        <p:nvSpPr>
+          <p:cNvPr id="9" name="TextBox 8"/>
+          <p:cNvSpPr txBox="1"/>
+          <p:nvPr/>
+        </p:nvSpPr>
+        <p:spPr>
+          <a:xfrm>
+            <a:off x="868680" y="1325880"/>
+            <a:ext cx="4892040" cy="365760"/>
+          </a:xfrm>
+          <a:prstGeom prst="rect">
+            <a:avLst/>
+          </a:prstGeom>
+          <a:noFill/>
+        </p:spPr>
+        <p:txBody>
+          <a:bodyPr wrap="none">
+            <a:spAutoFit/>
+          </a:bodyPr>
+          <a:lstStyle/>
+          <a:p>
+            <a:pPr>
+              <a:defRPr sz="1200" b="1">
+                <a:solidFill>
+                  <a:srgbClr val="B45309"/>
+                </a:solidFill>
+                <a:latin typeface="Segoe UI"/>
+              </a:defRPr>
+            </a:pPr>
+            <a:r>
+              <a:t>3. Formulário de Doação &amp; Cópia do PIX</a:t>
             </a:r>
           </a:p>
         </p:txBody>
       </p:sp>
       <p:pic>
         <p:nvPicPr>
-          <p:cNvPr id="8" name="Picture 7" descr="captura_doacao.png"/>
+          <p:cNvPr id="10" name="Picture 9" descr="captura_doacao.png"/>
           <p:cNvPicPr>
             <a:picLocks noChangeAspect="1"/>
           </p:cNvPicPr>
@@ -4091,8 +4300,8 @@
         </p:blipFill>
         <p:spPr>
           <a:xfrm>
-            <a:off x="548640" y="1371600"/>
-            <a:ext cx="5394960" cy="3676946"/>
+            <a:off x="868680" y="1737360"/>
+            <a:ext cx="4892040" cy="3334180"/>
           </a:xfrm>
           <a:prstGeom prst="rect">
             <a:avLst/>
@@ -4101,14 +4310,14 @@
       </p:pic>
       <p:sp>
         <p:nvSpPr>
-          <p:cNvPr id="9" name="TextBox 8"/>
+          <p:cNvPr id="11" name="TextBox 10"/>
           <p:cNvSpPr txBox="1"/>
           <p:nvPr/>
         </p:nvSpPr>
         <p:spPr>
           <a:xfrm>
-            <a:off x="548640" y="4663440"/>
-            <a:ext cx="5394960" cy="1280160"/>
+            <a:off x="868680" y="4892040"/>
+            <a:ext cx="4892040" cy="1051560"/>
           </a:xfrm>
           <a:prstGeom prst="rect">
             <a:avLst/>
@@ -4122,35 +4331,103 @@
           <a:lstStyle/>
           <a:p>
             <a:pPr>
-              <a:defRPr sz="1300" b="1">
-                <a:solidFill>
-                  <a:srgbClr val="B45309"/>
-                </a:solidFill>
-                <a:latin typeface="Arial"/>
-              </a:defRPr>
-            </a:pPr>
-            <a:r>
-              <a:t>3. Formulário de Doação &amp; PIX Instantâneo</a:t>
-            </a:r>
-          </a:p>
-          <a:p>
-            <a:pPr>
-              <a:defRPr sz="1100">
+              <a:defRPr sz="1000">
                 <a:solidFill>
                   <a:srgbClr val="64748B"/>
                 </a:solidFill>
-                <a:latin typeface="Arial"/>
-              </a:defRPr>
-            </a:pPr>
-            <a:r>
-              <a:t>Seleção facilitada por chips ('1 Cesta', '2 Cestas', '5 Cestas'), chave PIX com botão de cópia instantânea e validação nativa de formulário.</a:t>
+                <a:latin typeface="Segoe UI"/>
+              </a:defRPr>
+            </a:pPr>
+            <a:r>
+              <a:t>Seleção facilitada por chips ('1 Cesta', '2 Cestas', '5 Cestas'), chave PIX com botão de cópia instantânea e formulário completo com validação nativa.</a:t>
+            </a:r>
+          </a:p>
+        </p:txBody>
+      </p:sp>
+      <p:sp>
+        <p:nvSpPr>
+          <p:cNvPr id="12" name="Rounded Rectangle 11"/>
+          <p:cNvSpPr/>
+          <p:nvPr/>
+        </p:nvSpPr>
+        <p:spPr>
+          <a:xfrm>
+            <a:off x="6263640" y="1234440"/>
+            <a:ext cx="5166360" cy="4800600"/>
+          </a:xfrm>
+          <a:prstGeom prst="roundRect">
+            <a:avLst/>
+          </a:prstGeom>
+          <a:solidFill>
+            <a:srgbClr val="F8FAFC"/>
+          </a:solidFill>
+          <a:ln w="12700">
+            <a:solidFill>
+              <a:srgbClr val="E2E8F0"/>
+            </a:solidFill>
+          </a:ln>
+        </p:spPr>
+        <p:style>
+          <a:lnRef idx="1">
+            <a:schemeClr val="accent1"/>
+          </a:lnRef>
+          <a:fillRef idx="3">
+            <a:schemeClr val="accent1"/>
+          </a:fillRef>
+          <a:effectRef idx="2">
+            <a:schemeClr val="accent1"/>
+          </a:effectRef>
+          <a:fontRef idx="minor">
+            <a:schemeClr val="lt1"/>
+          </a:fontRef>
+        </p:style>
+        <p:txBody>
+          <a:bodyPr rtlCol="0" anchor="ctr"/>
+          <a:lstStyle/>
+          <a:p>
+            <a:pPr algn="ctr"/>
+          </a:p>
+        </p:txBody>
+      </p:sp>
+      <p:sp>
+        <p:nvSpPr>
+          <p:cNvPr id="13" name="TextBox 12"/>
+          <p:cNvSpPr txBox="1"/>
+          <p:nvPr/>
+        </p:nvSpPr>
+        <p:spPr>
+          <a:xfrm>
+            <a:off x="6400800" y="1325880"/>
+            <a:ext cx="4892040" cy="365760"/>
+          </a:xfrm>
+          <a:prstGeom prst="rect">
+            <a:avLst/>
+          </a:prstGeom>
+          <a:noFill/>
+        </p:spPr>
+        <p:txBody>
+          <a:bodyPr wrap="none">
+            <a:spAutoFit/>
+          </a:bodyPr>
+          <a:lstStyle/>
+          <a:p>
+            <a:pPr>
+              <a:defRPr sz="1200" b="1">
+                <a:solidFill>
+                  <a:srgbClr val="00873E"/>
+                </a:solidFill>
+                <a:latin typeface="Segoe UI"/>
+              </a:defRPr>
+            </a:pPr>
+            <a:r>
+              <a:t>4. Transparência por Bairro e Zona Rural</a:t>
             </a:r>
           </a:p>
         </p:txBody>
       </p:sp>
       <p:pic>
         <p:nvPicPr>
-          <p:cNvPr id="10" name="Picture 9" descr="captura_prestacao_contas.png"/>
+          <p:cNvPr id="14" name="Picture 13" descr="captura_prestacao_contas.png"/>
           <p:cNvPicPr>
             <a:picLocks noChangeAspect="1"/>
           </p:cNvPicPr>
@@ -4164,8 +4441,8 @@
         </p:blipFill>
         <p:spPr>
           <a:xfrm>
-            <a:off x="6217920" y="1371600"/>
-            <a:ext cx="5394960" cy="4067942"/>
+            <a:off x="6400800" y="1737360"/>
+            <a:ext cx="4892040" cy="3688727"/>
           </a:xfrm>
           <a:prstGeom prst="rect">
             <a:avLst/>
@@ -4174,14 +4451,14 @@
       </p:pic>
       <p:sp>
         <p:nvSpPr>
-          <p:cNvPr id="11" name="TextBox 10"/>
+          <p:cNvPr id="15" name="TextBox 14"/>
           <p:cNvSpPr txBox="1"/>
           <p:nvPr/>
         </p:nvSpPr>
         <p:spPr>
           <a:xfrm>
-            <a:off x="6217920" y="4663440"/>
-            <a:ext cx="5394960" cy="1280160"/>
+            <a:off x="6400800" y="4892040"/>
+            <a:ext cx="4892040" cy="1051560"/>
           </a:xfrm>
           <a:prstGeom prst="rect">
             <a:avLst/>
@@ -4195,28 +4472,15 @@
           <a:lstStyle/>
           <a:p>
             <a:pPr>
-              <a:defRPr sz="1300" b="1">
-                <a:solidFill>
-                  <a:srgbClr val="00873E"/>
-                </a:solidFill>
-                <a:latin typeface="Arial"/>
-              </a:defRPr>
-            </a:pPr>
-            <a:r>
-              <a:t>4. Transparência Pública por Bairro</a:t>
-            </a:r>
-          </a:p>
-          <a:p>
-            <a:pPr>
-              <a:defRPr sz="1100">
+              <a:defRPr sz="1000">
                 <a:solidFill>
                   <a:srgbClr val="64748B"/>
                 </a:solidFill>
-                <a:latin typeface="Arial"/>
-              </a:defRPr>
-            </a:pPr>
-            <a:r>
-              <a:t>Busca instantânea por bairros (Mutirão, Centro, Olaria, etc.), destaque para a Zona Rural (35 cestas) e somatório oficial de 215 cestas entregues.</a:t>
+                <a:latin typeface="Segoe UI"/>
+              </a:defRPr>
+            </a:pPr>
+            <a:r>
+              <a:t>Busca instantânea por bairros (Mutirão, Centro, Olaria, etc.), destaque para a Zona Rural (35 cestas) e somatório oficial transparente (215 cestas entregues).</a:t>
             </a:r>
           </a:p>
         </p:txBody>
@@ -4247,8 +4511,8 @@
         </p:nvSpPr>
         <p:spPr>
           <a:xfrm>
-            <a:off x="548640" y="365760"/>
-            <a:ext cx="8686800" cy="731520"/>
+            <a:off x="731520" y="365760"/>
+            <a:ext cx="8412480" cy="685800"/>
           </a:xfrm>
           <a:prstGeom prst="rect">
             <a:avLst/>
@@ -4262,11 +4526,11 @@
           <a:lstStyle/>
           <a:p>
             <a:pPr>
-              <a:defRPr sz="2200" b="1">
+              <a:defRPr sz="2100" b="1">
                 <a:solidFill>
                   <a:srgbClr val="00873E"/>
                 </a:solidFill>
-                <a:latin typeface="Arial"/>
+                <a:latin typeface="Segoe UI"/>
               </a:defRPr>
             </a:pPr>
             <a:r>
@@ -4283,8 +4547,8 @@
         </p:nvSpPr>
         <p:spPr>
           <a:xfrm>
-            <a:off x="9326880" y="411480"/>
-            <a:ext cx="2286000" cy="365760"/>
+            <a:off x="9235440" y="411480"/>
+            <a:ext cx="2194560" cy="347472"/>
           </a:xfrm>
           <a:prstGeom prst="roundRect">
             <a:avLst/>
@@ -4292,7 +4556,7 @@
           <a:solidFill>
             <a:srgbClr val="F8FAFC"/>
           </a:solidFill>
-          <a:ln>
+          <a:ln w="12700">
             <a:solidFill>
               <a:srgbClr val="E2E8F0"/>
             </a:solidFill>
@@ -4313,19 +4577,19 @@
           </a:fontRef>
         </p:style>
         <p:txBody>
-          <a:bodyPr rtlCol="0" anchor="ctr" wrap="none"/>
+          <a:bodyPr rtlCol="0" anchor="ctr" tIns="54864"/>
           <a:lstStyle/>
           <a:p>
             <a:pPr algn="ctr">
-              <a:defRPr sz="1100" b="1">
+              <a:defRPr sz="1000" b="1">
                 <a:solidFill>
                   <a:srgbClr val="64748B"/>
                 </a:solidFill>
-                <a:latin typeface="Arial"/>
-              </a:defRPr>
-            </a:pPr>
-            <a:r>
-              <a:t>Responsividade Real</a:t>
+                <a:latin typeface="Segoe UI"/>
+              </a:defRPr>
+            </a:pPr>
+            <a:r>
+              <a:t>RESPONSIVIDADE REAL</a:t>
             </a:r>
           </a:p>
         </p:txBody>
@@ -4338,8 +4602,8 @@
         </p:nvSpPr>
         <p:spPr>
           <a:xfrm>
-            <a:off x="548640" y="1097280"/>
-            <a:ext cx="11094415" cy="18288"/>
+            <a:off x="731520" y="1051560"/>
+            <a:ext cx="10728655" cy="13716"/>
           </a:xfrm>
           <a:prstGeom prst="rect">
             <a:avLst/>
@@ -4348,9 +4612,7 @@
             <a:srgbClr val="E2E8F0"/>
           </a:solidFill>
           <a:ln>
-            <a:solidFill>
-              <a:srgbClr val="E2E8F0"/>
-            </a:solidFill>
+            <a:noFill/>
           </a:ln>
         </p:spPr>
         <p:style>
@@ -4383,8 +4645,8 @@
         </p:nvSpPr>
         <p:spPr>
           <a:xfrm>
-            <a:off x="548640" y="6263640"/>
-            <a:ext cx="11094415" cy="18288"/>
+            <a:off x="731520" y="6263640"/>
+            <a:ext cx="10728655" cy="13716"/>
           </a:xfrm>
           <a:prstGeom prst="rect">
             <a:avLst/>
@@ -4393,9 +4655,7 @@
             <a:srgbClr val="E2E8F0"/>
           </a:solidFill>
           <a:ln>
-            <a:solidFill>
-              <a:srgbClr val="E2E8F0"/>
-            </a:solidFill>
+            <a:noFill/>
           </a:ln>
         </p:spPr>
         <p:style>
@@ -4428,7 +4688,7 @@
         </p:nvSpPr>
         <p:spPr>
           <a:xfrm>
-            <a:off x="548640" y="6327648"/>
+            <a:off x="731520" y="6327648"/>
             <a:ext cx="5486400" cy="320040"/>
           </a:xfrm>
           <a:prstGeom prst="rect">
@@ -4443,15 +4703,15 @@
           <a:lstStyle/>
           <a:p>
             <a:pPr>
-              <a:defRPr sz="1000">
+              <a:defRPr sz="950">
                 <a:solidFill>
                   <a:srgbClr val="64748B"/>
                 </a:solidFill>
-                <a:latin typeface="Arial"/>
-              </a:defRPr>
-            </a:pPr>
-            <a:r>
-              <a:t>Timbiras Solidária — ADS UEMA 2026 | Polo Timbiras</a:t>
+                <a:latin typeface="Segoe UI"/>
+              </a:defRPr>
+            </a:pPr>
+            <a:r>
+              <a:t>Timbiras Solidária — ADS UEMA 2026 | Polo Universitário de Timbiras</a:t>
             </a:r>
           </a:p>
         </p:txBody>
@@ -4464,8 +4724,8 @@
         </p:nvSpPr>
         <p:spPr>
           <a:xfrm>
-            <a:off x="9144000" y="6327648"/>
-            <a:ext cx="2499055" cy="320040"/>
+            <a:off x="8686800" y="6327648"/>
+            <a:ext cx="2773375" cy="320040"/>
           </a:xfrm>
           <a:prstGeom prst="rect">
             <a:avLst/>
@@ -4479,22 +4739,103 @@
           <a:lstStyle/>
           <a:p>
             <a:pPr algn="r">
-              <a:defRPr sz="1000" b="1">
+              <a:defRPr sz="950" b="1">
                 <a:solidFill>
                   <a:srgbClr val="64748B"/>
                 </a:solidFill>
-                <a:latin typeface="Arial"/>
+                <a:latin typeface="Segoe UI"/>
               </a:defRPr>
             </a:pPr>
             <a:r>
               <a:t>Slide 12 / 13</a:t>
+            </a:r>
+          </a:p>
+        </p:txBody>
+      </p:sp>
+      <p:sp>
+        <p:nvSpPr>
+          <p:cNvPr id="8" name="Rounded Rectangle 7"/>
+          <p:cNvSpPr/>
+          <p:nvPr/>
+        </p:nvSpPr>
+        <p:spPr>
+          <a:xfrm>
+            <a:off x="731520" y="1234440"/>
+            <a:ext cx="3291840" cy="4800600"/>
+          </a:xfrm>
+          <a:prstGeom prst="roundRect">
+            <a:avLst/>
+          </a:prstGeom>
+          <a:solidFill>
+            <a:srgbClr val="F8FAFC"/>
+          </a:solidFill>
+          <a:ln w="12700">
+            <a:solidFill>
+              <a:srgbClr val="E2E8F0"/>
+            </a:solidFill>
+          </a:ln>
+        </p:spPr>
+        <p:style>
+          <a:lnRef idx="1">
+            <a:schemeClr val="accent1"/>
+          </a:lnRef>
+          <a:fillRef idx="3">
+            <a:schemeClr val="accent1"/>
+          </a:fillRef>
+          <a:effectRef idx="2">
+            <a:schemeClr val="accent1"/>
+          </a:effectRef>
+          <a:fontRef idx="minor">
+            <a:schemeClr val="lt1"/>
+          </a:fontRef>
+        </p:style>
+        <p:txBody>
+          <a:bodyPr rtlCol="0" anchor="ctr"/>
+          <a:lstStyle/>
+          <a:p>
+            <a:pPr algn="ctr"/>
+          </a:p>
+        </p:txBody>
+      </p:sp>
+      <p:sp>
+        <p:nvSpPr>
+          <p:cNvPr id="9" name="TextBox 8"/>
+          <p:cNvSpPr txBox="1"/>
+          <p:nvPr/>
+        </p:nvSpPr>
+        <p:spPr>
+          <a:xfrm>
+            <a:off x="822960" y="1325880"/>
+            <a:ext cx="3108960" cy="320040"/>
+          </a:xfrm>
+          <a:prstGeom prst="rect">
+            <a:avLst/>
+          </a:prstGeom>
+          <a:noFill/>
+        </p:spPr>
+        <p:txBody>
+          <a:bodyPr wrap="none">
+            <a:spAutoFit/>
+          </a:bodyPr>
+          <a:lstStyle/>
+          <a:p>
+            <a:pPr algn="ctr">
+              <a:defRPr sz="1100" b="1">
+                <a:solidFill>
+                  <a:srgbClr val="00873E"/>
+                </a:solidFill>
+                <a:latin typeface="Segoe UI"/>
+              </a:defRPr>
+            </a:pPr>
+            <a:r>
+              <a:t>Menu Hambúrguer Aberto</a:t>
             </a:r>
           </a:p>
         </p:txBody>
       </p:sp>
       <p:pic>
         <p:nvPicPr>
-          <p:cNvPr id="8" name="Picture 7" descr="captura_mobile_menu.png"/>
+          <p:cNvPr id="10" name="Picture 9" descr="captura_mobile_menu.png"/>
           <p:cNvPicPr>
             <a:picLocks noChangeAspect="1"/>
           </p:cNvPicPr>
@@ -4508,8 +4849,8 @@
         </p:blipFill>
         <p:spPr>
           <a:xfrm>
-            <a:off x="731520" y="1371600"/>
-            <a:ext cx="2070401" cy="4480560"/>
+            <a:off x="1188720" y="1691640"/>
+            <a:ext cx="1774629" cy="3840480"/>
           </a:xfrm>
           <a:prstGeom prst="rect">
             <a:avLst/>
@@ -4518,14 +4859,99 @@
       </p:pic>
       <p:sp>
         <p:nvSpPr>
-          <p:cNvPr id="9" name="Rounded Rectangle 8"/>
+          <p:cNvPr id="11" name="TextBox 10"/>
+          <p:cNvSpPr txBox="1"/>
+          <p:nvPr/>
+        </p:nvSpPr>
+        <p:spPr>
+          <a:xfrm>
+            <a:off x="822960" y="5623560"/>
+            <a:ext cx="3108960" cy="320040"/>
+          </a:xfrm>
+          <a:prstGeom prst="rect">
+            <a:avLst/>
+          </a:prstGeom>
+          <a:noFill/>
+        </p:spPr>
+        <p:txBody>
+          <a:bodyPr wrap="none">
+            <a:spAutoFit/>
+          </a:bodyPr>
+          <a:lstStyle/>
+          <a:p>
+            <a:pPr algn="ctr">
+              <a:defRPr sz="950">
+                <a:solidFill>
+                  <a:srgbClr val="64748B"/>
+                </a:solidFill>
+                <a:latin typeface="Segoe UI"/>
+              </a:defRPr>
+            </a:pPr>
+            <a:r>
+              <a:t>Smartphone (390x844px)</a:t>
+            </a:r>
+          </a:p>
+        </p:txBody>
+      </p:sp>
+      <p:sp>
+        <p:nvSpPr>
+          <p:cNvPr id="12" name="TextBox 11"/>
+          <p:cNvSpPr txBox="1"/>
+          <p:nvPr/>
+        </p:nvSpPr>
+        <p:spPr>
+          <a:xfrm>
+            <a:off x="4297680" y="1234440"/>
+            <a:ext cx="7162495" cy="731520"/>
+          </a:xfrm>
+          <a:prstGeom prst="rect">
+            <a:avLst/>
+          </a:prstGeom>
+          <a:noFill/>
+        </p:spPr>
+        <p:txBody>
+          <a:bodyPr wrap="none">
+            <a:spAutoFit/>
+          </a:bodyPr>
+          <a:lstStyle/>
+          <a:p>
+            <a:pPr>
+              <a:defRPr sz="1600" b="1">
+                <a:solidFill>
+                  <a:srgbClr val="00873E"/>
+                </a:solidFill>
+                <a:latin typeface="Segoe UI"/>
+              </a:defRPr>
+            </a:pPr>
+            <a:r>
+              <a:t>Pensado para a Realidade de Quem Acessa pelo Celular</a:t>
+            </a:r>
+          </a:p>
+          <a:p>
+            <a:pPr>
+              <a:defRPr sz="1150">
+                <a:solidFill>
+                  <a:srgbClr val="64748B"/>
+                </a:solidFill>
+                <a:latin typeface="Segoe UI"/>
+              </a:defRPr>
+            </a:pPr>
+            <a:r>
+              <a:t>No Maranhão, a grande maioria acessa a internet exclusivamente pelo smartphone. Por isso, a adaptação mobile foi prioridade técnica e humana:</a:t>
+            </a:r>
+          </a:p>
+        </p:txBody>
+      </p:sp>
+      <p:sp>
+        <p:nvSpPr>
+          <p:cNvPr id="13" name="Rounded Rectangle 12"/>
           <p:cNvSpPr/>
           <p:nvPr/>
         </p:nvSpPr>
         <p:spPr>
           <a:xfrm>
-            <a:off x="4114800" y="1371600"/>
-            <a:ext cx="7498079" cy="4572000"/>
+            <a:off x="4297680" y="2103120"/>
+            <a:ext cx="7162495" cy="868680"/>
           </a:xfrm>
           <a:prstGeom prst="roundRect">
             <a:avLst/>
@@ -4533,7 +4959,7 @@
           <a:solidFill>
             <a:srgbClr val="F8FAFC"/>
           </a:solidFill>
-          <a:ln>
+          <a:ln w="12700">
             <a:solidFill>
               <a:srgbClr val="E2E8F0"/>
             </a:solidFill>
@@ -4554,89 +4980,512 @@
           </a:fontRef>
         </p:style>
         <p:txBody>
-          <a:bodyPr rtlCol="0" anchor="ctr" wrap="square" lIns="365760" tIns="365760" rIns="365760" bIns="365760"/>
-          <a:lstStyle/>
-          <a:p>
-            <a:pPr algn="ctr">
-              <a:defRPr sz="1800" b="1">
-                <a:solidFill>
-                  <a:srgbClr val="00873E"/>
-                </a:solidFill>
-                <a:latin typeface="Arial"/>
-              </a:defRPr>
-            </a:pPr>
-            <a:r>
-              <a:t>Pensado para a Realidade de Quem Acessa pelo Celular</a:t>
-            </a:r>
-          </a:p>
-          <a:p>
-            <a:br/>
-            <a:pPr>
-              <a:defRPr sz="1300">
+          <a:bodyPr rtlCol="0" anchor="ctr"/>
+          <a:lstStyle/>
+          <a:p>
+            <a:pPr algn="ctr"/>
+          </a:p>
+        </p:txBody>
+      </p:sp>
+      <p:sp>
+        <p:nvSpPr>
+          <p:cNvPr id="14" name="Rectangle 13"/>
+          <p:cNvSpPr/>
+          <p:nvPr/>
+        </p:nvSpPr>
+        <p:spPr>
+          <a:xfrm>
+            <a:off x="4297680" y="2103120"/>
+            <a:ext cx="73152" cy="868680"/>
+          </a:xfrm>
+          <a:prstGeom prst="rect">
+            <a:avLst/>
+          </a:prstGeom>
+          <a:solidFill>
+            <a:srgbClr val="00873E"/>
+          </a:solidFill>
+          <a:ln>
+            <a:noFill/>
+          </a:ln>
+        </p:spPr>
+        <p:style>
+          <a:lnRef idx="1">
+            <a:schemeClr val="accent1"/>
+          </a:lnRef>
+          <a:fillRef idx="3">
+            <a:schemeClr val="accent1"/>
+          </a:fillRef>
+          <a:effectRef idx="2">
+            <a:schemeClr val="accent1"/>
+          </a:effectRef>
+          <a:fontRef idx="minor">
+            <a:schemeClr val="lt1"/>
+          </a:fontRef>
+        </p:style>
+        <p:txBody>
+          <a:bodyPr rtlCol="0" anchor="ctr"/>
+          <a:lstStyle/>
+          <a:p>
+            <a:pPr algn="ctr"/>
+          </a:p>
+        </p:txBody>
+      </p:sp>
+      <p:sp>
+        <p:nvSpPr>
+          <p:cNvPr id="15" name="TextBox 14"/>
+          <p:cNvSpPr txBox="1"/>
+          <p:nvPr/>
+        </p:nvSpPr>
+        <p:spPr>
+          <a:xfrm>
+            <a:off x="4526280" y="2176272"/>
+            <a:ext cx="6766560" cy="731520"/>
+          </a:xfrm>
+          <a:prstGeom prst="rect">
+            <a:avLst/>
+          </a:prstGeom>
+          <a:noFill/>
+        </p:spPr>
+        <p:txBody>
+          <a:bodyPr wrap="square" lIns="0" tIns="0" rIns="0" bIns="0">
+            <a:spAutoFit/>
+          </a:bodyPr>
+          <a:lstStyle/>
+          <a:p>
+            <a:pPr>
+              <a:defRPr sz="1150" b="1">
                 <a:solidFill>
                   <a:srgbClr val="1E293B"/>
                 </a:solidFill>
-                <a:latin typeface="Arial"/>
-              </a:defRPr>
-            </a:pPr>
-            <a:r>
-              <a:t>No interior do Maranhão, a esmagadora maioria das pessoas navega exclusivamente pelo smartphone. Por isso, a adaptação mobile foi prioridade técnica e humana:</a:t>
-            </a:r>
-          </a:p>
-          <a:p>
-            <a:br/>
-            <a:pPr>
-              <a:defRPr sz="1200">
+                <a:latin typeface="Segoe UI"/>
+              </a:defRPr>
+            </a:pPr>
+            <a:r>
+              <a:t>Menu Retrátil Acessível:</a:t>
+            </a:r>
+          </a:p>
+          <a:p>
+            <a:pPr>
+              <a:defRPr sz="1050">
+                <a:solidFill>
+                  <a:srgbClr val="64748B"/>
+                </a:solidFill>
+                <a:latin typeface="Segoe UI"/>
+              </a:defRPr>
+            </a:pPr>
+            <a:r>
+              <a:t> O botão hambúrguer é fácil de tocar com o polegar, não polui a visão inicial e recolhe sozinho assim que o usuário clica na seção.</a:t>
+            </a:r>
+          </a:p>
+        </p:txBody>
+      </p:sp>
+      <p:sp>
+        <p:nvSpPr>
+          <p:cNvPr id="16" name="Rounded Rectangle 15"/>
+          <p:cNvSpPr/>
+          <p:nvPr/>
+        </p:nvSpPr>
+        <p:spPr>
+          <a:xfrm>
+            <a:off x="4297680" y="3063240"/>
+            <a:ext cx="7162495" cy="868680"/>
+          </a:xfrm>
+          <a:prstGeom prst="roundRect">
+            <a:avLst/>
+          </a:prstGeom>
+          <a:solidFill>
+            <a:srgbClr val="F8FAFC"/>
+          </a:solidFill>
+          <a:ln w="12700">
+            <a:solidFill>
+              <a:srgbClr val="E2E8F0"/>
+            </a:solidFill>
+          </a:ln>
+        </p:spPr>
+        <p:style>
+          <a:lnRef idx="1">
+            <a:schemeClr val="accent1"/>
+          </a:lnRef>
+          <a:fillRef idx="3">
+            <a:schemeClr val="accent1"/>
+          </a:fillRef>
+          <a:effectRef idx="2">
+            <a:schemeClr val="accent1"/>
+          </a:effectRef>
+          <a:fontRef idx="minor">
+            <a:schemeClr val="lt1"/>
+          </a:fontRef>
+        </p:style>
+        <p:txBody>
+          <a:bodyPr rtlCol="0" anchor="ctr"/>
+          <a:lstStyle/>
+          <a:p>
+            <a:pPr algn="ctr"/>
+          </a:p>
+        </p:txBody>
+      </p:sp>
+      <p:sp>
+        <p:nvSpPr>
+          <p:cNvPr id="17" name="Rectangle 16"/>
+          <p:cNvSpPr/>
+          <p:nvPr/>
+        </p:nvSpPr>
+        <p:spPr>
+          <a:xfrm>
+            <a:off x="4297680" y="3063240"/>
+            <a:ext cx="73152" cy="868680"/>
+          </a:xfrm>
+          <a:prstGeom prst="rect">
+            <a:avLst/>
+          </a:prstGeom>
+          <a:solidFill>
+            <a:srgbClr val="00873E"/>
+          </a:solidFill>
+          <a:ln>
+            <a:noFill/>
+          </a:ln>
+        </p:spPr>
+        <p:style>
+          <a:lnRef idx="1">
+            <a:schemeClr val="accent1"/>
+          </a:lnRef>
+          <a:fillRef idx="3">
+            <a:schemeClr val="accent1"/>
+          </a:fillRef>
+          <a:effectRef idx="2">
+            <a:schemeClr val="accent1"/>
+          </a:effectRef>
+          <a:fontRef idx="minor">
+            <a:schemeClr val="lt1"/>
+          </a:fontRef>
+        </p:style>
+        <p:txBody>
+          <a:bodyPr rtlCol="0" anchor="ctr"/>
+          <a:lstStyle/>
+          <a:p>
+            <a:pPr algn="ctr"/>
+          </a:p>
+        </p:txBody>
+      </p:sp>
+      <p:sp>
+        <p:nvSpPr>
+          <p:cNvPr id="18" name="TextBox 17"/>
+          <p:cNvSpPr txBox="1"/>
+          <p:nvPr/>
+        </p:nvSpPr>
+        <p:spPr>
+          <a:xfrm>
+            <a:off x="4526280" y="3136392"/>
+            <a:ext cx="6766560" cy="731520"/>
+          </a:xfrm>
+          <a:prstGeom prst="rect">
+            <a:avLst/>
+          </a:prstGeom>
+          <a:noFill/>
+        </p:spPr>
+        <p:txBody>
+          <a:bodyPr wrap="square" lIns="0" tIns="0" rIns="0" bIns="0">
+            <a:spAutoFit/>
+          </a:bodyPr>
+          <a:lstStyle/>
+          <a:p>
+            <a:pPr>
+              <a:defRPr sz="1150" b="1">
                 <a:solidFill>
                   <a:srgbClr val="1E293B"/>
                 </a:solidFill>
-                <a:latin typeface="Arial"/>
-              </a:defRPr>
-            </a:pPr>
-            <a:r>
-              <a:t>• Menu Retrátil Acessível: O botão hambúrguer é fácil de tocar com o polegar, não polui a visão inicial e recolhe sozinho assim que o usuário clica na seção.</a:t>
-            </a:r>
-          </a:p>
-          <a:p>
-            <a:br/>
-            <a:pPr>
-              <a:defRPr sz="1200">
+                <a:latin typeface="Segoe UI"/>
+              </a:defRPr>
+            </a:pPr>
+            <a:r>
+              <a:t>Cards em Coluna Única:</a:t>
+            </a:r>
+          </a:p>
+          <a:p>
+            <a:pPr>
+              <a:defRPr sz="1050">
+                <a:solidFill>
+                  <a:srgbClr val="64748B"/>
+                </a:solidFill>
+                <a:latin typeface="Segoe UI"/>
+              </a:defRPr>
+            </a:pPr>
+            <a:r>
+              <a:t> Os 13 bairros e os municípios do IBGE se reorganizam automaticamente em cascata vertical, sem barra de rolagem horizontal quebrada.</a:t>
+            </a:r>
+          </a:p>
+        </p:txBody>
+      </p:sp>
+      <p:sp>
+        <p:nvSpPr>
+          <p:cNvPr id="19" name="Rounded Rectangle 18"/>
+          <p:cNvSpPr/>
+          <p:nvPr/>
+        </p:nvSpPr>
+        <p:spPr>
+          <a:xfrm>
+            <a:off x="4297680" y="4023360"/>
+            <a:ext cx="7162495" cy="868680"/>
+          </a:xfrm>
+          <a:prstGeom prst="roundRect">
+            <a:avLst/>
+          </a:prstGeom>
+          <a:solidFill>
+            <a:srgbClr val="F8FAFC"/>
+          </a:solidFill>
+          <a:ln w="12700">
+            <a:solidFill>
+              <a:srgbClr val="E2E8F0"/>
+            </a:solidFill>
+          </a:ln>
+        </p:spPr>
+        <p:style>
+          <a:lnRef idx="1">
+            <a:schemeClr val="accent1"/>
+          </a:lnRef>
+          <a:fillRef idx="3">
+            <a:schemeClr val="accent1"/>
+          </a:fillRef>
+          <a:effectRef idx="2">
+            <a:schemeClr val="accent1"/>
+          </a:effectRef>
+          <a:fontRef idx="minor">
+            <a:schemeClr val="lt1"/>
+          </a:fontRef>
+        </p:style>
+        <p:txBody>
+          <a:bodyPr rtlCol="0" anchor="ctr"/>
+          <a:lstStyle/>
+          <a:p>
+            <a:pPr algn="ctr"/>
+          </a:p>
+        </p:txBody>
+      </p:sp>
+      <p:sp>
+        <p:nvSpPr>
+          <p:cNvPr id="20" name="Rectangle 19"/>
+          <p:cNvSpPr/>
+          <p:nvPr/>
+        </p:nvSpPr>
+        <p:spPr>
+          <a:xfrm>
+            <a:off x="4297680" y="4023360"/>
+            <a:ext cx="73152" cy="868680"/>
+          </a:xfrm>
+          <a:prstGeom prst="rect">
+            <a:avLst/>
+          </a:prstGeom>
+          <a:solidFill>
+            <a:srgbClr val="00873E"/>
+          </a:solidFill>
+          <a:ln>
+            <a:noFill/>
+          </a:ln>
+        </p:spPr>
+        <p:style>
+          <a:lnRef idx="1">
+            <a:schemeClr val="accent1"/>
+          </a:lnRef>
+          <a:fillRef idx="3">
+            <a:schemeClr val="accent1"/>
+          </a:fillRef>
+          <a:effectRef idx="2">
+            <a:schemeClr val="accent1"/>
+          </a:effectRef>
+          <a:fontRef idx="minor">
+            <a:schemeClr val="lt1"/>
+          </a:fontRef>
+        </p:style>
+        <p:txBody>
+          <a:bodyPr rtlCol="0" anchor="ctr"/>
+          <a:lstStyle/>
+          <a:p>
+            <a:pPr algn="ctr"/>
+          </a:p>
+        </p:txBody>
+      </p:sp>
+      <p:sp>
+        <p:nvSpPr>
+          <p:cNvPr id="21" name="TextBox 20"/>
+          <p:cNvSpPr txBox="1"/>
+          <p:nvPr/>
+        </p:nvSpPr>
+        <p:spPr>
+          <a:xfrm>
+            <a:off x="4526280" y="4096512"/>
+            <a:ext cx="6766560" cy="731520"/>
+          </a:xfrm>
+          <a:prstGeom prst="rect">
+            <a:avLst/>
+          </a:prstGeom>
+          <a:noFill/>
+        </p:spPr>
+        <p:txBody>
+          <a:bodyPr wrap="square" lIns="0" tIns="0" rIns="0" bIns="0">
+            <a:spAutoFit/>
+          </a:bodyPr>
+          <a:lstStyle/>
+          <a:p>
+            <a:pPr>
+              <a:defRPr sz="1150" b="1">
                 <a:solidFill>
                   <a:srgbClr val="1E293B"/>
                 </a:solidFill>
-                <a:latin typeface="Arial"/>
-              </a:defRPr>
-            </a:pPr>
-            <a:r>
-              <a:t>• Cards em Coluna Única: Os 13 bairros e os municípios do IBGE se reorganizam automaticamente em cascata vertical, sem barra de rolagem horizontal quebrada.</a:t>
-            </a:r>
-          </a:p>
-          <a:p>
-            <a:br/>
-            <a:pPr>
-              <a:defRPr sz="1200">
+                <a:latin typeface="Segoe UI"/>
+              </a:defRPr>
+            </a:pPr>
+            <a:r>
+              <a:t>Player Compacto:</a:t>
+            </a:r>
+          </a:p>
+          <a:p>
+            <a:pPr>
+              <a:defRPr sz="1050">
+                <a:solidFill>
+                  <a:srgbClr val="64748B"/>
+                </a:solidFill>
+                <a:latin typeface="Segoe UI"/>
+              </a:defRPr>
+            </a:pPr>
+            <a:r>
+              <a:t> A trilha sonora fica ancorada no canto inferior direito sem atrapalhar a leitura dos formulários.</a:t>
+            </a:r>
+          </a:p>
+        </p:txBody>
+      </p:sp>
+      <p:sp>
+        <p:nvSpPr>
+          <p:cNvPr id="22" name="Rounded Rectangle 21"/>
+          <p:cNvSpPr/>
+          <p:nvPr/>
+        </p:nvSpPr>
+        <p:spPr>
+          <a:xfrm>
+            <a:off x="4297680" y="4983480"/>
+            <a:ext cx="7162495" cy="868680"/>
+          </a:xfrm>
+          <a:prstGeom prst="roundRect">
+            <a:avLst/>
+          </a:prstGeom>
+          <a:solidFill>
+            <a:srgbClr val="F8FAFC"/>
+          </a:solidFill>
+          <a:ln w="12700">
+            <a:solidFill>
+              <a:srgbClr val="E2E8F0"/>
+            </a:solidFill>
+          </a:ln>
+        </p:spPr>
+        <p:style>
+          <a:lnRef idx="1">
+            <a:schemeClr val="accent1"/>
+          </a:lnRef>
+          <a:fillRef idx="3">
+            <a:schemeClr val="accent1"/>
+          </a:fillRef>
+          <a:effectRef idx="2">
+            <a:schemeClr val="accent1"/>
+          </a:effectRef>
+          <a:fontRef idx="minor">
+            <a:schemeClr val="lt1"/>
+          </a:fontRef>
+        </p:style>
+        <p:txBody>
+          <a:bodyPr rtlCol="0" anchor="ctr"/>
+          <a:lstStyle/>
+          <a:p>
+            <a:pPr algn="ctr"/>
+          </a:p>
+        </p:txBody>
+      </p:sp>
+      <p:sp>
+        <p:nvSpPr>
+          <p:cNvPr id="23" name="Rectangle 22"/>
+          <p:cNvSpPr/>
+          <p:nvPr/>
+        </p:nvSpPr>
+        <p:spPr>
+          <a:xfrm>
+            <a:off x="4297680" y="4983480"/>
+            <a:ext cx="73152" cy="868680"/>
+          </a:xfrm>
+          <a:prstGeom prst="rect">
+            <a:avLst/>
+          </a:prstGeom>
+          <a:solidFill>
+            <a:srgbClr val="00873E"/>
+          </a:solidFill>
+          <a:ln>
+            <a:noFill/>
+          </a:ln>
+        </p:spPr>
+        <p:style>
+          <a:lnRef idx="1">
+            <a:schemeClr val="accent1"/>
+          </a:lnRef>
+          <a:fillRef idx="3">
+            <a:schemeClr val="accent1"/>
+          </a:fillRef>
+          <a:effectRef idx="2">
+            <a:schemeClr val="accent1"/>
+          </a:effectRef>
+          <a:fontRef idx="minor">
+            <a:schemeClr val="lt1"/>
+          </a:fontRef>
+        </p:style>
+        <p:txBody>
+          <a:bodyPr rtlCol="0" anchor="ctr"/>
+          <a:lstStyle/>
+          <a:p>
+            <a:pPr algn="ctr"/>
+          </a:p>
+        </p:txBody>
+      </p:sp>
+      <p:sp>
+        <p:nvSpPr>
+          <p:cNvPr id="24" name="TextBox 23"/>
+          <p:cNvSpPr txBox="1"/>
+          <p:nvPr/>
+        </p:nvSpPr>
+        <p:spPr>
+          <a:xfrm>
+            <a:off x="4526280" y="5056632"/>
+            <a:ext cx="6766560" cy="731520"/>
+          </a:xfrm>
+          <a:prstGeom prst="rect">
+            <a:avLst/>
+          </a:prstGeom>
+          <a:noFill/>
+        </p:spPr>
+        <p:txBody>
+          <a:bodyPr wrap="square" lIns="0" tIns="0" rIns="0" bIns="0">
+            <a:spAutoFit/>
+          </a:bodyPr>
+          <a:lstStyle/>
+          <a:p>
+            <a:pPr>
+              <a:defRPr sz="1150" b="1">
                 <a:solidFill>
                   <a:srgbClr val="1E293B"/>
                 </a:solidFill>
-                <a:latin typeface="Arial"/>
-              </a:defRPr>
-            </a:pPr>
-            <a:r>
-              <a:t>• Player Compacto: A trilha sonora fica ancorada no canto inferior sem atrapalhar a leitura nem os formulários.</a:t>
-            </a:r>
-          </a:p>
-          <a:p>
-            <a:br/>
-            <a:pPr>
-              <a:defRPr sz="1200">
-                <a:solidFill>
-                  <a:srgbClr val="1E293B"/>
-                </a:solidFill>
-                <a:latin typeface="Arial"/>
-              </a:defRPr>
-            </a:pPr>
-            <a:r>
-              <a:t>• Teclado Numérico Otimizado: Campos de quantidade e valores abrem o teclado numérico nativo do celular.</a:t>
+                <a:latin typeface="Segoe UI"/>
+              </a:defRPr>
+            </a:pPr>
+            <a:r>
+              <a:t>Teclado Numérico Otimizado:</a:t>
+            </a:r>
+          </a:p>
+          <a:p>
+            <a:pPr>
+              <a:defRPr sz="1050">
+                <a:solidFill>
+                  <a:srgbClr val="64748B"/>
+                </a:solidFill>
+                <a:latin typeface="Segoe UI"/>
+              </a:defRPr>
+            </a:pPr>
+            <a:r>
+              <a:t> Campos de quantidade e valores abrem automaticamente o teclado numérico nativo do celular.</a:t>
             </a:r>
           </a:p>
         </p:txBody>
@@ -4667,8 +5516,8 @@
         </p:nvSpPr>
         <p:spPr>
           <a:xfrm>
-            <a:off x="548640" y="365760"/>
-            <a:ext cx="8686800" cy="731520"/>
+            <a:off x="731520" y="365760"/>
+            <a:ext cx="8412480" cy="685800"/>
           </a:xfrm>
           <a:prstGeom prst="rect">
             <a:avLst/>
@@ -4682,11 +5531,11 @@
           <a:lstStyle/>
           <a:p>
             <a:pPr>
-              <a:defRPr sz="2200" b="1">
+              <a:defRPr sz="2100" b="1">
                 <a:solidFill>
                   <a:srgbClr val="00873E"/>
                 </a:solidFill>
-                <a:latin typeface="Arial"/>
+                <a:latin typeface="Segoe UI"/>
               </a:defRPr>
             </a:pPr>
             <a:r>
@@ -4703,8 +5552,8 @@
         </p:nvSpPr>
         <p:spPr>
           <a:xfrm>
-            <a:off x="9326880" y="411480"/>
-            <a:ext cx="2286000" cy="365760"/>
+            <a:off x="9235440" y="411480"/>
+            <a:ext cx="2194560" cy="347472"/>
           </a:xfrm>
           <a:prstGeom prst="roundRect">
             <a:avLst/>
@@ -4712,7 +5561,7 @@
           <a:solidFill>
             <a:srgbClr val="F8FAFC"/>
           </a:solidFill>
-          <a:ln>
+          <a:ln w="12700">
             <a:solidFill>
               <a:srgbClr val="E2E8F0"/>
             </a:solidFill>
@@ -4733,19 +5582,19 @@
           </a:fontRef>
         </p:style>
         <p:txBody>
-          <a:bodyPr rtlCol="0" anchor="ctr" wrap="none"/>
+          <a:bodyPr rtlCol="0" anchor="ctr" tIns="54864"/>
           <a:lstStyle/>
           <a:p>
             <a:pPr algn="ctr">
-              <a:defRPr sz="1100" b="1">
+              <a:defRPr sz="1000" b="1">
                 <a:solidFill>
                   <a:srgbClr val="64748B"/>
                 </a:solidFill>
-                <a:latin typeface="Arial"/>
-              </a:defRPr>
-            </a:pPr>
-            <a:r>
-              <a:t>6. Aprendizados &amp; ABNT</a:t>
+                <a:latin typeface="Segoe UI"/>
+              </a:defRPr>
+            </a:pPr>
+            <a:r>
+              <a:t>6. APRENDIZADOS &amp; ABNT</a:t>
             </a:r>
           </a:p>
         </p:txBody>
@@ -4758,8 +5607,8 @@
         </p:nvSpPr>
         <p:spPr>
           <a:xfrm>
-            <a:off x="548640" y="1097280"/>
-            <a:ext cx="11094415" cy="18288"/>
+            <a:off x="731520" y="1051560"/>
+            <a:ext cx="10728655" cy="13716"/>
           </a:xfrm>
           <a:prstGeom prst="rect">
             <a:avLst/>
@@ -4768,9 +5617,7 @@
             <a:srgbClr val="E2E8F0"/>
           </a:solidFill>
           <a:ln>
-            <a:solidFill>
-              <a:srgbClr val="E2E8F0"/>
-            </a:solidFill>
+            <a:noFill/>
           </a:ln>
         </p:spPr>
         <p:style>
@@ -4803,8 +5650,8 @@
         </p:nvSpPr>
         <p:spPr>
           <a:xfrm>
-            <a:off x="548640" y="6263640"/>
-            <a:ext cx="11094415" cy="18288"/>
+            <a:off x="731520" y="6263640"/>
+            <a:ext cx="10728655" cy="13716"/>
           </a:xfrm>
           <a:prstGeom prst="rect">
             <a:avLst/>
@@ -4813,9 +5660,7 @@
             <a:srgbClr val="E2E8F0"/>
           </a:solidFill>
           <a:ln>
-            <a:solidFill>
-              <a:srgbClr val="E2E8F0"/>
-            </a:solidFill>
+            <a:noFill/>
           </a:ln>
         </p:spPr>
         <p:style>
@@ -4848,7 +5693,7 @@
         </p:nvSpPr>
         <p:spPr>
           <a:xfrm>
-            <a:off x="548640" y="6327648"/>
+            <a:off x="731520" y="6327648"/>
             <a:ext cx="5486400" cy="320040"/>
           </a:xfrm>
           <a:prstGeom prst="rect">
@@ -4863,15 +5708,15 @@
           <a:lstStyle/>
           <a:p>
             <a:pPr>
-              <a:defRPr sz="1000">
+              <a:defRPr sz="950">
                 <a:solidFill>
                   <a:srgbClr val="64748B"/>
                 </a:solidFill>
-                <a:latin typeface="Arial"/>
-              </a:defRPr>
-            </a:pPr>
-            <a:r>
-              <a:t>Timbiras Solidária — ADS UEMA 2026 | Polo Timbiras</a:t>
+                <a:latin typeface="Segoe UI"/>
+              </a:defRPr>
+            </a:pPr>
+            <a:r>
+              <a:t>Timbiras Solidária — ADS UEMA 2026 | Polo Universitário de Timbiras</a:t>
             </a:r>
           </a:p>
         </p:txBody>
@@ -4884,8 +5729,8 @@
         </p:nvSpPr>
         <p:spPr>
           <a:xfrm>
-            <a:off x="9144000" y="6327648"/>
-            <a:ext cx="2499055" cy="320040"/>
+            <a:off x="8686800" y="6327648"/>
+            <a:ext cx="2773375" cy="320040"/>
           </a:xfrm>
           <a:prstGeom prst="rect">
             <a:avLst/>
@@ -4899,11 +5744,11 @@
           <a:lstStyle/>
           <a:p>
             <a:pPr algn="r">
-              <a:defRPr sz="1000" b="1">
+              <a:defRPr sz="950" b="1">
                 <a:solidFill>
                   <a:srgbClr val="64748B"/>
                 </a:solidFill>
-                <a:latin typeface="Arial"/>
+                <a:latin typeface="Segoe UI"/>
               </a:defRPr>
             </a:pPr>
             <a:r>
@@ -4920,18 +5765,18 @@
         </p:nvSpPr>
         <p:spPr>
           <a:xfrm>
-            <a:off x="548640" y="1371600"/>
-            <a:ext cx="5394960" cy="4572000"/>
+            <a:off x="731520" y="1234440"/>
+            <a:ext cx="5166360" cy="2286000"/>
           </a:xfrm>
           <a:prstGeom prst="roundRect">
             <a:avLst/>
           </a:prstGeom>
           <a:solidFill>
-            <a:srgbClr val="F0FDF4"/>
+            <a:srgbClr val="FEFCE8"/>
           </a:solidFill>
-          <a:ln>
+          <a:ln w="12700">
             <a:solidFill>
-              <a:srgbClr val="10B981"/>
+              <a:srgbClr val="FEF08A"/>
             </a:solidFill>
           </a:ln>
         </p:spPr>
@@ -4950,98 +5795,32 @@
           </a:fontRef>
         </p:style>
         <p:txBody>
-          <a:bodyPr rtlCol="0" anchor="ctr" wrap="square" lIns="274320" tIns="274320" rIns="274320" bIns="274320"/>
-          <a:lstStyle/>
-          <a:p>
-            <a:pPr algn="ctr">
-              <a:defRPr sz="1600" b="1">
-                <a:solidFill>
-                  <a:srgbClr val="00873E"/>
-                </a:solidFill>
-                <a:latin typeface="Arial"/>
-              </a:defRPr>
-            </a:pPr>
-            <a:r>
-              <a:t>Muito Além de Linhas de Código</a:t>
-            </a:r>
-          </a:p>
-          <a:p>
-            <a:br/>
-            <a:pPr>
-              <a:defRPr sz="1400" b="1">
-                <a:solidFill>
-                  <a:srgbClr val="00873E"/>
-                </a:solidFill>
-                <a:latin typeface="Arial"/>
-              </a:defRPr>
-            </a:pPr>
-            <a:r>
-              <a:t>Tecnologia Feita por Pessoas, Para Pessoas:</a:t>
-            </a:r>
-          </a:p>
-          <a:p>
-            <a:pPr>
-              <a:defRPr sz="1200">
-                <a:solidFill>
-                  <a:srgbClr val="1E293B"/>
-                </a:solidFill>
-                <a:latin typeface="Arial"/>
-              </a:defRPr>
-            </a:pPr>
-            <a:r>
-              <a:t>Aprendemos que um framework moderno como o React ou uma API governamental só têm valor quando resolvem um problema humano real. O código ganha vida quando serve para combater a fome e valorizar a nossa terra.</a:t>
-            </a:r>
-          </a:p>
-          <a:p>
-            <a:br/>
-            <a:pPr>
-              <a:defRPr sz="1400" b="1">
-                <a:solidFill>
-                  <a:srgbClr val="00873E"/>
-                </a:solidFill>
-                <a:latin typeface="Arial"/>
-              </a:defRPr>
-            </a:pPr>
-            <a:r>
-              <a:t>Prontos para a Nota 3:</a:t>
-            </a:r>
-          </a:p>
-          <a:p>
-            <a:pPr>
-              <a:defRPr sz="1200">
-                <a:solidFill>
-                  <a:srgbClr val="1E293B"/>
-                </a:solidFill>
-                <a:latin typeface="Arial"/>
-              </a:defRPr>
-            </a:pPr>
-            <a:r>
-              <a:t>A equipe conclui esta etapa com o sistema no ar, dados reais integrados e muito orgulho do que construímos. Estamos preparados e entusiasmados para a apresentação presencial no polo de Timbiras!</a:t>
-            </a:r>
-          </a:p>
-        </p:txBody>
-      </p:sp>
-      <p:sp>
-        <p:nvSpPr>
-          <p:cNvPr id="9" name="Rounded Rectangle 8"/>
+          <a:bodyPr rtlCol="0" anchor="ctr"/>
+          <a:lstStyle/>
+          <a:p>
+            <a:pPr algn="ctr"/>
+          </a:p>
+        </p:txBody>
+      </p:sp>
+      <p:sp>
+        <p:nvSpPr>
+          <p:cNvPr id="9" name="Rectangle 8"/>
           <p:cNvSpPr/>
           <p:nvPr/>
         </p:nvSpPr>
         <p:spPr>
           <a:xfrm>
-            <a:off x="6217920" y="1371600"/>
-            <a:ext cx="5394960" cy="4572000"/>
-          </a:xfrm>
-          <a:prstGeom prst="roundRect">
+            <a:off x="731520" y="1234440"/>
+            <a:ext cx="73152" cy="2286000"/>
+          </a:xfrm>
+          <a:prstGeom prst="rect">
             <a:avLst/>
           </a:prstGeom>
           <a:solidFill>
-            <a:srgbClr val="F8FAFC"/>
+            <a:srgbClr val="F59E0B"/>
           </a:solidFill>
           <a:ln>
-            <a:solidFill>
-              <a:srgbClr val="E2E8F0"/>
-            </a:solidFill>
+            <a:noFill/>
           </a:ln>
         </p:spPr>
         <p:style>
@@ -5059,15 +5838,274 @@
           </a:fontRef>
         </p:style>
         <p:txBody>
-          <a:bodyPr rtlCol="0" anchor="ctr" wrap="square" lIns="274320" tIns="274320" rIns="274320" bIns="274320"/>
-          <a:lstStyle/>
-          <a:p>
-            <a:pPr algn="ctr">
-              <a:defRPr sz="1500" b="1">
+          <a:bodyPr rtlCol="0" anchor="ctr"/>
+          <a:lstStyle/>
+          <a:p>
+            <a:pPr algn="ctr"/>
+          </a:p>
+        </p:txBody>
+      </p:sp>
+      <p:sp>
+        <p:nvSpPr>
+          <p:cNvPr id="10" name="TextBox 9"/>
+          <p:cNvSpPr txBox="1"/>
+          <p:nvPr/>
+        </p:nvSpPr>
+        <p:spPr>
+          <a:xfrm>
+            <a:off x="960120" y="1371600"/>
+            <a:ext cx="4754880" cy="1965960"/>
+          </a:xfrm>
+          <a:prstGeom prst="rect">
+            <a:avLst/>
+          </a:prstGeom>
+          <a:noFill/>
+        </p:spPr>
+        <p:txBody>
+          <a:bodyPr wrap="square" lIns="0" tIns="0" rIns="0" bIns="0">
+            <a:spAutoFit/>
+          </a:bodyPr>
+          <a:lstStyle/>
+          <a:p>
+            <a:pPr>
+              <a:defRPr sz="1350" b="1">
+                <a:solidFill>
+                  <a:srgbClr val="B45309"/>
+                </a:solidFill>
+                <a:latin typeface="Segoe UI"/>
+              </a:defRPr>
+            </a:pPr>
+            <a:r>
+              <a:t>Tecnologia Feita por Pessoas, Para Pessoas:</a:t>
+            </a:r>
+          </a:p>
+          <a:p>
+            <a:br/>
+            <a:pPr>
+              <a:defRPr sz="1150">
+                <a:solidFill>
+                  <a:srgbClr val="1E293B"/>
+                </a:solidFill>
+                <a:latin typeface="Segoe UI"/>
+              </a:defRPr>
+            </a:pPr>
+            <a:r>
+              <a:t>Aprendemos que um framework moderno como o React ou uma API do governo só têm valor quando resolvem um problema humano real. O código ganha vida quando serve para combater a fome e valorizar a nossa terra.</a:t>
+            </a:r>
+          </a:p>
+        </p:txBody>
+      </p:sp>
+      <p:sp>
+        <p:nvSpPr>
+          <p:cNvPr id="11" name="Rounded Rectangle 10"/>
+          <p:cNvSpPr/>
+          <p:nvPr/>
+        </p:nvSpPr>
+        <p:spPr>
+          <a:xfrm>
+            <a:off x="731520" y="3749039"/>
+            <a:ext cx="5166360" cy="2286000"/>
+          </a:xfrm>
+          <a:prstGeom prst="roundRect">
+            <a:avLst/>
+          </a:prstGeom>
+          <a:solidFill>
+            <a:srgbClr val="F8FAFC"/>
+          </a:solidFill>
+          <a:ln w="12700">
+            <a:solidFill>
+              <a:srgbClr val="E2E8F0"/>
+            </a:solidFill>
+          </a:ln>
+        </p:spPr>
+        <p:style>
+          <a:lnRef idx="1">
+            <a:schemeClr val="accent1"/>
+          </a:lnRef>
+          <a:fillRef idx="3">
+            <a:schemeClr val="accent1"/>
+          </a:fillRef>
+          <a:effectRef idx="2">
+            <a:schemeClr val="accent1"/>
+          </a:effectRef>
+          <a:fontRef idx="minor">
+            <a:schemeClr val="lt1"/>
+          </a:fontRef>
+        </p:style>
+        <p:txBody>
+          <a:bodyPr rtlCol="0" anchor="ctr"/>
+          <a:lstStyle/>
+          <a:p>
+            <a:pPr algn="ctr"/>
+          </a:p>
+        </p:txBody>
+      </p:sp>
+      <p:sp>
+        <p:nvSpPr>
+          <p:cNvPr id="12" name="Rectangle 11"/>
+          <p:cNvSpPr/>
+          <p:nvPr/>
+        </p:nvSpPr>
+        <p:spPr>
+          <a:xfrm>
+            <a:off x="731520" y="3749039"/>
+            <a:ext cx="73152" cy="2286000"/>
+          </a:xfrm>
+          <a:prstGeom prst="rect">
+            <a:avLst/>
+          </a:prstGeom>
+          <a:solidFill>
+            <a:srgbClr val="00873E"/>
+          </a:solidFill>
+          <a:ln>
+            <a:noFill/>
+          </a:ln>
+        </p:spPr>
+        <p:style>
+          <a:lnRef idx="1">
+            <a:schemeClr val="accent1"/>
+          </a:lnRef>
+          <a:fillRef idx="3">
+            <a:schemeClr val="accent1"/>
+          </a:fillRef>
+          <a:effectRef idx="2">
+            <a:schemeClr val="accent1"/>
+          </a:effectRef>
+          <a:fontRef idx="minor">
+            <a:schemeClr val="lt1"/>
+          </a:fontRef>
+        </p:style>
+        <p:txBody>
+          <a:bodyPr rtlCol="0" anchor="ctr"/>
+          <a:lstStyle/>
+          <a:p>
+            <a:pPr algn="ctr"/>
+          </a:p>
+        </p:txBody>
+      </p:sp>
+      <p:sp>
+        <p:nvSpPr>
+          <p:cNvPr id="13" name="TextBox 12"/>
+          <p:cNvSpPr txBox="1"/>
+          <p:nvPr/>
+        </p:nvSpPr>
+        <p:spPr>
+          <a:xfrm>
+            <a:off x="960120" y="3886200"/>
+            <a:ext cx="4754880" cy="1965960"/>
+          </a:xfrm>
+          <a:prstGeom prst="rect">
+            <a:avLst/>
+          </a:prstGeom>
+          <a:noFill/>
+        </p:spPr>
+        <p:txBody>
+          <a:bodyPr wrap="square" lIns="0" tIns="0" rIns="0" bIns="0">
+            <a:spAutoFit/>
+          </a:bodyPr>
+          <a:lstStyle/>
+          <a:p>
+            <a:pPr>
+              <a:defRPr sz="1350" b="1">
                 <a:solidFill>
                   <a:srgbClr val="00873E"/>
                 </a:solidFill>
-                <a:latin typeface="Arial"/>
+                <a:latin typeface="Segoe UI"/>
+              </a:defRPr>
+            </a:pPr>
+            <a:r>
+              <a:t>Prontos para a Nota 3:</a:t>
+            </a:r>
+          </a:p>
+          <a:p>
+            <a:br/>
+            <a:pPr>
+              <a:defRPr sz="1150">
+                <a:solidFill>
+                  <a:srgbClr val="1E293B"/>
+                </a:solidFill>
+                <a:latin typeface="Segoe UI"/>
+              </a:defRPr>
+            </a:pPr>
+            <a:r>
+              <a:t>A equipe conclui esta etapa com o sistema no ar, dados reais integrados e muito orgulho do que construímos. Estamos preparados e entusiasmados para a apresentação presencial no polo de Timbiras!</a:t>
+            </a:r>
+          </a:p>
+        </p:txBody>
+      </p:sp>
+      <p:sp>
+        <p:nvSpPr>
+          <p:cNvPr id="14" name="Rounded Rectangle 13"/>
+          <p:cNvSpPr/>
+          <p:nvPr/>
+        </p:nvSpPr>
+        <p:spPr>
+          <a:xfrm>
+            <a:off x="6263640" y="1234440"/>
+            <a:ext cx="5166360" cy="4800600"/>
+          </a:xfrm>
+          <a:prstGeom prst="roundRect">
+            <a:avLst/>
+          </a:prstGeom>
+          <a:solidFill>
+            <a:srgbClr val="F8FAFC"/>
+          </a:solidFill>
+          <a:ln w="12700">
+            <a:solidFill>
+              <a:srgbClr val="E2E8F0"/>
+            </a:solidFill>
+          </a:ln>
+        </p:spPr>
+        <p:style>
+          <a:lnRef idx="1">
+            <a:schemeClr val="accent1"/>
+          </a:lnRef>
+          <a:fillRef idx="3">
+            <a:schemeClr val="accent1"/>
+          </a:fillRef>
+          <a:effectRef idx="2">
+            <a:schemeClr val="accent1"/>
+          </a:effectRef>
+          <a:fontRef idx="minor">
+            <a:schemeClr val="lt1"/>
+          </a:fontRef>
+        </p:style>
+        <p:txBody>
+          <a:bodyPr rtlCol="0" anchor="ctr"/>
+          <a:lstStyle/>
+          <a:p>
+            <a:pPr algn="ctr"/>
+          </a:p>
+        </p:txBody>
+      </p:sp>
+      <p:sp>
+        <p:nvSpPr>
+          <p:cNvPr id="15" name="TextBox 14"/>
+          <p:cNvSpPr txBox="1"/>
+          <p:nvPr/>
+        </p:nvSpPr>
+        <p:spPr>
+          <a:xfrm>
+            <a:off x="6492240" y="1417320"/>
+            <a:ext cx="4709160" cy="4434840"/>
+          </a:xfrm>
+          <a:prstGeom prst="rect">
+            <a:avLst/>
+          </a:prstGeom>
+          <a:noFill/>
+        </p:spPr>
+        <p:txBody>
+          <a:bodyPr wrap="square" lIns="0" tIns="0" rIns="0" bIns="0">
+            <a:spAutoFit/>
+          </a:bodyPr>
+          <a:lstStyle/>
+          <a:p>
+            <a:pPr>
+              <a:defRPr sz="1400" b="1">
+                <a:solidFill>
+                  <a:srgbClr val="00873E"/>
+                </a:solidFill>
+                <a:latin typeface="Segoe UI"/>
               </a:defRPr>
             </a:pPr>
             <a:r>
@@ -5077,11 +6115,11 @@
           <a:p>
             <a:br/>
             <a:pPr>
-              <a:defRPr sz="950">
+              <a:defRPr sz="900">
                 <a:solidFill>
                   <a:srgbClr val="64748B"/>
                 </a:solidFill>
-                <a:latin typeface="Arial"/>
+                <a:latin typeface="Segoe UI"/>
               </a:defRPr>
             </a:pPr>
             <a:r>
@@ -5091,11 +6129,11 @@
           <a:p>
             <a:br/>
             <a:pPr>
-              <a:defRPr sz="950">
+              <a:defRPr sz="900">
                 <a:solidFill>
                   <a:srgbClr val="64748B"/>
                 </a:solidFill>
-                <a:latin typeface="Arial"/>
+                <a:latin typeface="Segoe UI"/>
               </a:defRPr>
             </a:pPr>
             <a:r>
@@ -5105,11 +6143,11 @@
           <a:p>
             <a:br/>
             <a:pPr>
-              <a:defRPr sz="950">
+              <a:defRPr sz="900">
                 <a:solidFill>
                   <a:srgbClr val="64748B"/>
                 </a:solidFill>
-                <a:latin typeface="Arial"/>
+                <a:latin typeface="Segoe UI"/>
               </a:defRPr>
             </a:pPr>
             <a:r>
@@ -5119,11 +6157,11 @@
           <a:p>
             <a:br/>
             <a:pPr>
-              <a:defRPr sz="950">
+              <a:defRPr sz="900">
                 <a:solidFill>
                   <a:srgbClr val="64748B"/>
                 </a:solidFill>
-                <a:latin typeface="Arial"/>
+                <a:latin typeface="Segoe UI"/>
               </a:defRPr>
             </a:pPr>
             <a:r>
@@ -5133,11 +6171,11 @@
           <a:p>
             <a:br/>
             <a:pPr>
-              <a:defRPr sz="950">
+              <a:defRPr sz="900">
                 <a:solidFill>
                   <a:srgbClr val="64748B"/>
                 </a:solidFill>
-                <a:latin typeface="Arial"/>
+                <a:latin typeface="Segoe UI"/>
               </a:defRPr>
             </a:pPr>
             <a:r>
@@ -5147,11 +6185,11 @@
           <a:p>
             <a:br/>
             <a:pPr>
-              <a:defRPr sz="950">
+              <a:defRPr sz="900">
                 <a:solidFill>
                   <a:srgbClr val="64748B"/>
                 </a:solidFill>
-                <a:latin typeface="Arial"/>
+                <a:latin typeface="Segoe UI"/>
               </a:defRPr>
             </a:pPr>
             <a:r>
@@ -5186,8 +6224,8 @@
         </p:nvSpPr>
         <p:spPr>
           <a:xfrm>
-            <a:off x="548640" y="365760"/>
-            <a:ext cx="8686800" cy="731520"/>
+            <a:off x="731520" y="365760"/>
+            <a:ext cx="8412480" cy="685800"/>
           </a:xfrm>
           <a:prstGeom prst="rect">
             <a:avLst/>
@@ -5201,11 +6239,11 @@
           <a:lstStyle/>
           <a:p>
             <a:pPr>
-              <a:defRPr sz="2200" b="1">
+              <a:defRPr sz="2100" b="1">
                 <a:solidFill>
                   <a:srgbClr val="00873E"/>
                 </a:solidFill>
-                <a:latin typeface="Arial"/>
+                <a:latin typeface="Segoe UI"/>
               </a:defRPr>
             </a:pPr>
             <a:r>
@@ -5222,8 +6260,8 @@
         </p:nvSpPr>
         <p:spPr>
           <a:xfrm>
-            <a:off x="9326880" y="411480"/>
-            <a:ext cx="2286000" cy="365760"/>
+            <a:off x="9235440" y="411480"/>
+            <a:ext cx="2194560" cy="347472"/>
           </a:xfrm>
           <a:prstGeom prst="roundRect">
             <a:avLst/>
@@ -5231,7 +6269,7 @@
           <a:solidFill>
             <a:srgbClr val="F8FAFC"/>
           </a:solidFill>
-          <a:ln>
+          <a:ln w="12700">
             <a:solidFill>
               <a:srgbClr val="E2E8F0"/>
             </a:solidFill>
@@ -5252,19 +6290,19 @@
           </a:fontRef>
         </p:style>
         <p:txBody>
-          <a:bodyPr rtlCol="0" anchor="ctr" wrap="none"/>
+          <a:bodyPr rtlCol="0" anchor="ctr" tIns="54864"/>
           <a:lstStyle/>
           <a:p>
             <a:pPr algn="ctr">
-              <a:defRPr sz="1100" b="1">
+              <a:defRPr sz="1000" b="1">
                 <a:solidFill>
                   <a:srgbClr val="64748B"/>
                 </a:solidFill>
-                <a:latin typeface="Arial"/>
-              </a:defRPr>
-            </a:pPr>
-            <a:r>
-              <a:t>1. Introdução</a:t>
+                <a:latin typeface="Segoe UI"/>
+              </a:defRPr>
+            </a:pPr>
+            <a:r>
+              <a:t>1. INTRODUÇÃO</a:t>
             </a:r>
           </a:p>
         </p:txBody>
@@ -5277,8 +6315,8 @@
         </p:nvSpPr>
         <p:spPr>
           <a:xfrm>
-            <a:off x="548640" y="1097280"/>
-            <a:ext cx="11094415" cy="18288"/>
+            <a:off x="731520" y="1051560"/>
+            <a:ext cx="10728655" cy="13716"/>
           </a:xfrm>
           <a:prstGeom prst="rect">
             <a:avLst/>
@@ -5287,9 +6325,7 @@
             <a:srgbClr val="E2E8F0"/>
           </a:solidFill>
           <a:ln>
-            <a:solidFill>
-              <a:srgbClr val="E2E8F0"/>
-            </a:solidFill>
+            <a:noFill/>
           </a:ln>
         </p:spPr>
         <p:style>
@@ -5322,8 +6358,8 @@
         </p:nvSpPr>
         <p:spPr>
           <a:xfrm>
-            <a:off x="548640" y="6263640"/>
-            <a:ext cx="11094415" cy="18288"/>
+            <a:off x="731520" y="6263640"/>
+            <a:ext cx="10728655" cy="13716"/>
           </a:xfrm>
           <a:prstGeom prst="rect">
             <a:avLst/>
@@ -5332,9 +6368,7 @@
             <a:srgbClr val="E2E8F0"/>
           </a:solidFill>
           <a:ln>
-            <a:solidFill>
-              <a:srgbClr val="E2E8F0"/>
-            </a:solidFill>
+            <a:noFill/>
           </a:ln>
         </p:spPr>
         <p:style>
@@ -5367,7 +6401,7 @@
         </p:nvSpPr>
         <p:spPr>
           <a:xfrm>
-            <a:off x="548640" y="6327648"/>
+            <a:off x="731520" y="6327648"/>
             <a:ext cx="5486400" cy="320040"/>
           </a:xfrm>
           <a:prstGeom prst="rect">
@@ -5382,15 +6416,15 @@
           <a:lstStyle/>
           <a:p>
             <a:pPr>
-              <a:defRPr sz="1000">
+              <a:defRPr sz="950">
                 <a:solidFill>
                   <a:srgbClr val="64748B"/>
                 </a:solidFill>
-                <a:latin typeface="Arial"/>
-              </a:defRPr>
-            </a:pPr>
-            <a:r>
-              <a:t>Timbiras Solidária — ADS UEMA 2026 | Polo Timbiras</a:t>
+                <a:latin typeface="Segoe UI"/>
+              </a:defRPr>
+            </a:pPr>
+            <a:r>
+              <a:t>Timbiras Solidária — ADS UEMA 2026 | Polo Universitário de Timbiras</a:t>
             </a:r>
           </a:p>
         </p:txBody>
@@ -5403,8 +6437,8 @@
         </p:nvSpPr>
         <p:spPr>
           <a:xfrm>
-            <a:off x="9144000" y="6327648"/>
-            <a:ext cx="2499055" cy="320040"/>
+            <a:off x="8686800" y="6327648"/>
+            <a:ext cx="2773375" cy="320040"/>
           </a:xfrm>
           <a:prstGeom prst="rect">
             <a:avLst/>
@@ -5418,11 +6452,11 @@
           <a:lstStyle/>
           <a:p>
             <a:pPr algn="r">
-              <a:defRPr sz="1000" b="1">
+              <a:defRPr sz="950" b="1">
                 <a:solidFill>
                   <a:srgbClr val="64748B"/>
                 </a:solidFill>
-                <a:latin typeface="Arial"/>
+                <a:latin typeface="Segoe UI"/>
               </a:defRPr>
             </a:pPr>
             <a:r>
@@ -5433,14 +6467,64 @@
       </p:sp>
       <p:sp>
         <p:nvSpPr>
-          <p:cNvPr id="8" name="Rounded Rectangle 7"/>
+          <p:cNvPr id="8" name="TextBox 7"/>
+          <p:cNvSpPr txBox="1"/>
+          <p:nvPr/>
+        </p:nvSpPr>
+        <p:spPr>
+          <a:xfrm>
+            <a:off x="731520" y="1234440"/>
+            <a:ext cx="5943600" cy="2377440"/>
+          </a:xfrm>
+          <a:prstGeom prst="rect">
+            <a:avLst/>
+          </a:prstGeom>
+          <a:noFill/>
+        </p:spPr>
+        <p:txBody>
+          <a:bodyPr wrap="square" lIns="0" tIns="0" rIns="0" bIns="0">
+            <a:spAutoFit/>
+          </a:bodyPr>
+          <a:lstStyle/>
+          <a:p>
+            <a:pPr>
+              <a:defRPr sz="1550" b="1">
+                <a:solidFill>
+                  <a:srgbClr val="1E293B"/>
+                </a:solidFill>
+                <a:latin typeface="Segoe UI"/>
+              </a:defRPr>
+            </a:pPr>
+            <a:r>
+              <a:t>A fome não é um número abstrato: ela tem nome, endereço e rosto nos bairros e na zona rural da nossa cidade.</a:t>
+            </a:r>
+          </a:p>
+          <a:p>
+            <a:br/>
+            <a:pPr>
+              <a:defRPr sz="1250">
+                <a:solidFill>
+                  <a:srgbClr val="64748B"/>
+                </a:solidFill>
+                <a:latin typeface="Segoe UI"/>
+              </a:defRPr>
+            </a:pPr>
+            <a:r>
+              <a:t>Timbiras é uma cidade acolhedora, forte e trabalhadora, banhada pelas águas do Rio Itapecuru. Mas, como tantas cidades do interior do Maranhão, muitas famílias de bairros como Forquilha, Mutirão, Alto Fogoso, Olaria e povoados rurais distantes enfrentam dias difíceis para garantir o básico na mesa.</a:t>
+            </a:r>
+          </a:p>
+        </p:txBody>
+      </p:sp>
+      <p:sp>
+        <p:nvSpPr>
+          <p:cNvPr id="9" name="Rounded Rectangle 8"/>
           <p:cNvSpPr/>
           <p:nvPr/>
         </p:nvSpPr>
         <p:spPr>
           <a:xfrm>
-            <a:off x="548640" y="1371600"/>
-            <a:ext cx="6217920" cy="4572000"/>
+            <a:off x="731520" y="3840480"/>
+            <a:ext cx="5943600" cy="2194560"/>
           </a:xfrm>
           <a:prstGeom prst="roundRect">
             <a:avLst/>
@@ -5448,7 +6532,7 @@
           <a:solidFill>
             <a:srgbClr val="F8FAFC"/>
           </a:solidFill>
-          <a:ln>
+          <a:ln w="12700">
             <a:solidFill>
               <a:srgbClr val="E2E8F0"/>
             </a:solidFill>
@@ -5469,85 +6553,32 @@
           </a:fontRef>
         </p:style>
         <p:txBody>
-          <a:bodyPr rtlCol="0" anchor="ctr" wrap="square" lIns="274320" tIns="274320" rIns="274320" bIns="274320"/>
-          <a:lstStyle/>
-          <a:p>
-            <a:pPr algn="ctr">
-              <a:defRPr sz="1600" b="1">
-                <a:solidFill>
-                  <a:srgbClr val="00873E"/>
-                </a:solidFill>
-                <a:latin typeface="Arial"/>
-              </a:defRPr>
-            </a:pPr>
-            <a:r>
-              <a:t>A fome não é um número abstrato: ela tem nome, endereço e rosto.</a:t>
-            </a:r>
-          </a:p>
-          <a:p>
-            <a:br/>
-            <a:pPr>
-              <a:defRPr sz="1300">
-                <a:solidFill>
-                  <a:srgbClr val="1E293B"/>
-                </a:solidFill>
-                <a:latin typeface="Arial"/>
-              </a:defRPr>
-            </a:pPr>
-            <a:r>
-              <a:t>Timbiras é uma cidade acolhedora, forte e trabalhadora, banhada pelas águas do Rio Itapecuru. Mas, como tantas cidades do interior do Maranhão, muitas famílias de bairros como Forquilha, Mutirão, Alto Fogoso, Olaria e de povoados rurais distantes enfrentam dias difíceis para garantir o básico na mesa.</a:t>
-            </a:r>
-          </a:p>
-          <a:p>
-            <a:br/>
-            <a:pPr>
-              <a:defRPr sz="1400" b="1">
-                <a:solidFill>
-                  <a:srgbClr val="00873E"/>
-                </a:solidFill>
-                <a:latin typeface="Arial"/>
-              </a:defRPr>
-            </a:pPr>
-            <a:r>
-              <a:t>O Encontro de Duas Realidades:</a:t>
-            </a:r>
-          </a:p>
-          <a:p>
-            <a:pPr>
-              <a:defRPr sz="1300">
-                <a:solidFill>
-                  <a:srgbClr val="1E293B"/>
-                </a:solidFill>
-                <a:latin typeface="Arial"/>
-              </a:defRPr>
-            </a:pPr>
-            <a:r>
-              <a:t>De um lado, pequenos produtores rurais e comerciantes com vontade de ajudar e excedentes de produção. Do outro, famílias precisando de amparo imediato. O projeto Timbiras Solidária nasceu para ser a ponte digital entre a generosidade de quem pode doar e a dignidade de quem precisa receber.</a:t>
-            </a:r>
-          </a:p>
-        </p:txBody>
-      </p:sp>
-      <p:sp>
-        <p:nvSpPr>
-          <p:cNvPr id="9" name="Rounded Rectangle 8"/>
+          <a:bodyPr rtlCol="0" anchor="ctr"/>
+          <a:lstStyle/>
+          <a:p>
+            <a:pPr algn="ctr"/>
+          </a:p>
+        </p:txBody>
+      </p:sp>
+      <p:sp>
+        <p:nvSpPr>
+          <p:cNvPr id="10" name="Rectangle 9"/>
           <p:cNvSpPr/>
           <p:nvPr/>
         </p:nvSpPr>
         <p:spPr>
           <a:xfrm>
-            <a:off x="7040880" y="1371600"/>
-            <a:ext cx="4572000" cy="4572000"/>
-          </a:xfrm>
-          <a:prstGeom prst="roundRect">
+            <a:off x="731520" y="3840480"/>
+            <a:ext cx="73152" cy="2194560"/>
+          </a:xfrm>
+          <a:prstGeom prst="rect">
             <a:avLst/>
           </a:prstGeom>
           <a:solidFill>
-            <a:srgbClr val="F0FDF4"/>
+            <a:srgbClr val="00873E"/>
           </a:solidFill>
           <a:ln>
-            <a:solidFill>
-              <a:srgbClr val="10B981"/>
-            </a:solidFill>
+            <a:noFill/>
           </a:ln>
         </p:spPr>
         <p:style>
@@ -5565,42 +6596,163 @@
           </a:fontRef>
         </p:style>
         <p:txBody>
-          <a:bodyPr rtlCol="0" anchor="ctr" wrap="square" lIns="274320" tIns="274320" rIns="274320" bIns="274320"/>
-          <a:lstStyle/>
-          <a:p>
-            <a:pPr algn="ctr">
-              <a:defRPr sz="1600" b="1">
+          <a:bodyPr rtlCol="0" anchor="ctr"/>
+          <a:lstStyle/>
+          <a:p>
+            <a:pPr algn="ctr"/>
+          </a:p>
+        </p:txBody>
+      </p:sp>
+      <p:sp>
+        <p:nvSpPr>
+          <p:cNvPr id="11" name="TextBox 10"/>
+          <p:cNvSpPr txBox="1"/>
+          <p:nvPr/>
+        </p:nvSpPr>
+        <p:spPr>
+          <a:xfrm>
+            <a:off x="960120" y="3977639"/>
+            <a:ext cx="5577840" cy="1920240"/>
+          </a:xfrm>
+          <a:prstGeom prst="rect">
+            <a:avLst/>
+          </a:prstGeom>
+          <a:noFill/>
+        </p:spPr>
+        <p:txBody>
+          <a:bodyPr wrap="square" lIns="0" tIns="0" rIns="0" bIns="0">
+            <a:spAutoFit/>
+          </a:bodyPr>
+          <a:lstStyle/>
+          <a:p>
+            <a:pPr>
+              <a:defRPr sz="1400" b="1">
                 <a:solidFill>
                   <a:srgbClr val="00873E"/>
                 </a:solidFill>
-                <a:latin typeface="Arial"/>
-              </a:defRPr>
-            </a:pPr>
-            <a:r>
-              <a:t>Compromisso Real com o ODS 2 da ONU</a:t>
-            </a:r>
-          </a:p>
-          <a:p>
-            <a:pPr>
-              <a:defRPr sz="1200">
+                <a:latin typeface="Segoe UI"/>
+              </a:defRPr>
+            </a:pPr>
+            <a:r>
+              <a:t>O Encontro de Duas Realidades</a:t>
+            </a:r>
+          </a:p>
+          <a:p>
+            <a:br/>
+            <a:pPr>
+              <a:defRPr sz="1150">
                 <a:solidFill>
                   <a:srgbClr val="1E293B"/>
                 </a:solidFill>
-                <a:latin typeface="Arial"/>
-              </a:defRPr>
-            </a:pPr>
-            <a:r>
-              <a:t>Fome Zero e Agricultura Sustentável: foco na mobilização comunitária com valorização do agricultor familiar local.</a:t>
-            </a:r>
+                <a:latin typeface="Segoe UI"/>
+              </a:defRPr>
+            </a:pPr>
+            <a:r>
+              <a:t>De um lado, pequenos agricultores e comerciantes com vontade de ajudar e excedentes de colheita. Do outro, famílias precisando de auxílio imediato. O Timbiras Solidária nasceu para ser a ponte digital entre a generosidade de quem pode doar e a dignidade de quem precisa receber.</a:t>
+            </a:r>
+          </a:p>
+        </p:txBody>
+      </p:sp>
+      <p:sp>
+        <p:nvSpPr>
+          <p:cNvPr id="12" name="Rounded Rectangle 11"/>
+          <p:cNvSpPr/>
+          <p:nvPr/>
+        </p:nvSpPr>
+        <p:spPr>
+          <a:xfrm>
+            <a:off x="6949440" y="1234440"/>
+            <a:ext cx="4510735" cy="4800600"/>
+          </a:xfrm>
+          <a:prstGeom prst="roundRect">
+            <a:avLst/>
+          </a:prstGeom>
+          <a:solidFill>
+            <a:srgbClr val="F0FDF4"/>
+          </a:solidFill>
+          <a:ln w="12700">
+            <a:solidFill>
+              <a:srgbClr val="BBF7D0"/>
+            </a:solidFill>
+          </a:ln>
+        </p:spPr>
+        <p:style>
+          <a:lnRef idx="1">
+            <a:schemeClr val="accent1"/>
+          </a:lnRef>
+          <a:fillRef idx="3">
+            <a:schemeClr val="accent1"/>
+          </a:fillRef>
+          <a:effectRef idx="2">
+            <a:schemeClr val="accent1"/>
+          </a:effectRef>
+          <a:fontRef idx="minor">
+            <a:schemeClr val="lt1"/>
+          </a:fontRef>
+        </p:style>
+        <p:txBody>
+          <a:bodyPr rtlCol="0" anchor="ctr"/>
+          <a:lstStyle/>
+          <a:p>
+            <a:pPr algn="ctr"/>
+          </a:p>
+        </p:txBody>
+      </p:sp>
+      <p:sp>
+        <p:nvSpPr>
+          <p:cNvPr id="13" name="TextBox 12"/>
+          <p:cNvSpPr txBox="1"/>
+          <p:nvPr/>
+        </p:nvSpPr>
+        <p:spPr>
+          <a:xfrm>
+            <a:off x="7223760" y="1417320"/>
+            <a:ext cx="3977639" cy="4434840"/>
+          </a:xfrm>
+          <a:prstGeom prst="rect">
+            <a:avLst/>
+          </a:prstGeom>
+          <a:noFill/>
+        </p:spPr>
+        <p:txBody>
+          <a:bodyPr wrap="square" lIns="0" tIns="0" rIns="0" bIns="0">
+            <a:spAutoFit/>
+          </a:bodyPr>
+          <a:lstStyle/>
+          <a:p>
+            <a:pPr>
+              <a:defRPr sz="1550" b="1">
+                <a:solidFill>
+                  <a:srgbClr val="00873E"/>
+                </a:solidFill>
+                <a:latin typeface="Segoe UI"/>
+              </a:defRPr>
+            </a:pPr>
+            <a:r>
+              <a:t>Compromisso Real com o ODS 2</a:t>
+            </a:r>
+          </a:p>
+          <a:p>
+            <a:pPr>
+              <a:defRPr sz="1150">
+                <a:solidFill>
+                  <a:srgbClr val="1E293B"/>
+                </a:solidFill>
+                <a:latin typeface="Segoe UI"/>
+              </a:defRPr>
+            </a:pPr>
+            <a:r>
+              <a:t>Fome Zero e Agricultura Sustentável: nosso foco não é assistencialismo frio, mas mobilização comunitária com valorização do agricultor familiar local.</a:t>
+            </a:r>
+          </a:p>
+          <a:p>
             <a:br/>
-          </a:p>
-          <a:p>
-            <a:pPr>
-              <a:defRPr sz="1400" b="1">
+            <a:pPr>
+              <a:defRPr sz="1300" b="1">
                 <a:solidFill>
                   <a:srgbClr val="00873E"/>
                 </a:solidFill>
-                <a:latin typeface="Arial"/>
+                <a:latin typeface="Segoe UI"/>
               </a:defRPr>
             </a:pPr>
             <a:r>
@@ -5609,54 +6761,54 @@
           </a:p>
           <a:p>
             <a:pPr>
-              <a:defRPr sz="1200">
+              <a:defRPr sz="1100">
                 <a:solidFill>
                   <a:srgbClr val="1E293B"/>
                 </a:solidFill>
-                <a:latin typeface="Arial"/>
-              </a:defRPr>
-            </a:pPr>
-            <a:r>
-              <a:t>• Cidadãos comuns: Que desejam doar 1 cesta ou 1 kg de alimento;</a:t>
-            </a:r>
-          </a:p>
-          <a:p>
-            <a:pPr>
-              <a:defRPr sz="1200">
+                <a:latin typeface="Segoe UI"/>
+              </a:defRPr>
+            </a:pPr>
+            <a:r>
+              <a:t>• Cidadãos comuns:  Que querem doar 1 cesta ou 1 kg de alimento;</a:t>
+            </a:r>
+          </a:p>
+          <a:p>
+            <a:pPr>
+              <a:defRPr sz="1100">
                 <a:solidFill>
                   <a:srgbClr val="1E293B"/>
                 </a:solidFill>
-                <a:latin typeface="Arial"/>
-              </a:defRPr>
-            </a:pPr>
-            <a:r>
-              <a:t>• Comércio e feirantes: Que exercem cidadania e responsabilidade social;</a:t>
-            </a:r>
-          </a:p>
-          <a:p>
-            <a:pPr>
-              <a:defRPr sz="1200">
+                <a:latin typeface="Segoe UI"/>
+              </a:defRPr>
+            </a:pPr>
+            <a:r>
+              <a:t>• Comércio e feirantes:  Que exercem cidadania ativa;</a:t>
+            </a:r>
+          </a:p>
+          <a:p>
+            <a:pPr>
+              <a:defRPr sz="1100">
                 <a:solidFill>
                   <a:srgbClr val="1E293B"/>
                 </a:solidFill>
-                <a:latin typeface="Arial"/>
-              </a:defRPr>
-            </a:pPr>
-            <a:r>
-              <a:t>• Agricultura familiar: Que abastece a cidade com alimentos frescos;</a:t>
-            </a:r>
-          </a:p>
-          <a:p>
-            <a:pPr>
-              <a:defRPr sz="1200">
+                <a:latin typeface="Segoe UI"/>
+              </a:defRPr>
+            </a:pPr>
+            <a:r>
+              <a:t>• Agricultura familiar:  Que abastece a cidade com alimentos frescos;</a:t>
+            </a:r>
+          </a:p>
+          <a:p>
+            <a:pPr>
+              <a:defRPr sz="1100">
                 <a:solidFill>
                   <a:srgbClr val="1E293B"/>
                 </a:solidFill>
-                <a:latin typeface="Arial"/>
-              </a:defRPr>
-            </a:pPr>
-            <a:r>
-              <a:t>• Poder público e voluntários: Para transparência e distribuição ágil.</a:t>
+                <a:latin typeface="Segoe UI"/>
+              </a:defRPr>
+            </a:pPr>
+            <a:r>
+              <a:t>• Poder público &amp; voluntários:  Para transparência e logística.</a:t>
             </a:r>
           </a:p>
         </p:txBody>
@@ -5687,8 +6839,8 @@
         </p:nvSpPr>
         <p:spPr>
           <a:xfrm>
-            <a:off x="548640" y="365760"/>
-            <a:ext cx="8686800" cy="731520"/>
+            <a:off x="731520" y="365760"/>
+            <a:ext cx="8412480" cy="685800"/>
           </a:xfrm>
           <a:prstGeom prst="rect">
             <a:avLst/>
@@ -5702,11 +6854,11 @@
           <a:lstStyle/>
           <a:p>
             <a:pPr>
-              <a:defRPr sz="2200" b="1">
+              <a:defRPr sz="2100" b="1">
                 <a:solidFill>
                   <a:srgbClr val="00873E"/>
                 </a:solidFill>
-                <a:latin typeface="Arial"/>
+                <a:latin typeface="Segoe UI"/>
               </a:defRPr>
             </a:pPr>
             <a:r>
@@ -5723,8 +6875,8 @@
         </p:nvSpPr>
         <p:spPr>
           <a:xfrm>
-            <a:off x="9326880" y="411480"/>
-            <a:ext cx="2286000" cy="365760"/>
+            <a:off x="9235440" y="411480"/>
+            <a:ext cx="2194560" cy="347472"/>
           </a:xfrm>
           <a:prstGeom prst="roundRect">
             <a:avLst/>
@@ -5732,7 +6884,7 @@
           <a:solidFill>
             <a:srgbClr val="F8FAFC"/>
           </a:solidFill>
-          <a:ln>
+          <a:ln w="12700">
             <a:solidFill>
               <a:srgbClr val="E2E8F0"/>
             </a:solidFill>
@@ -5753,19 +6905,19 @@
           </a:fontRef>
         </p:style>
         <p:txBody>
-          <a:bodyPr rtlCol="0" anchor="ctr" wrap="none"/>
+          <a:bodyPr rtlCol="0" anchor="ctr" tIns="54864"/>
           <a:lstStyle/>
           <a:p>
             <a:pPr algn="ctr">
-              <a:defRPr sz="1100" b="1">
+              <a:defRPr sz="1000" b="1">
                 <a:solidFill>
                   <a:srgbClr val="64748B"/>
                 </a:solidFill>
-                <a:latin typeface="Arial"/>
-              </a:defRPr>
-            </a:pPr>
-            <a:r>
-              <a:t>2. Desenvolvimento</a:t>
+                <a:latin typeface="Segoe UI"/>
+              </a:defRPr>
+            </a:pPr>
+            <a:r>
+              <a:t>2. DESENVOLVIMENTO</a:t>
             </a:r>
           </a:p>
         </p:txBody>
@@ -5778,8 +6930,8 @@
         </p:nvSpPr>
         <p:spPr>
           <a:xfrm>
-            <a:off x="548640" y="1097280"/>
-            <a:ext cx="11094415" cy="18288"/>
+            <a:off x="731520" y="1051560"/>
+            <a:ext cx="10728655" cy="13716"/>
           </a:xfrm>
           <a:prstGeom prst="rect">
             <a:avLst/>
@@ -5788,9 +6940,7 @@
             <a:srgbClr val="E2E8F0"/>
           </a:solidFill>
           <a:ln>
-            <a:solidFill>
-              <a:srgbClr val="E2E8F0"/>
-            </a:solidFill>
+            <a:noFill/>
           </a:ln>
         </p:spPr>
         <p:style>
@@ -5823,8 +6973,8 @@
         </p:nvSpPr>
         <p:spPr>
           <a:xfrm>
-            <a:off x="548640" y="6263640"/>
-            <a:ext cx="11094415" cy="18288"/>
+            <a:off x="731520" y="6263640"/>
+            <a:ext cx="10728655" cy="13716"/>
           </a:xfrm>
           <a:prstGeom prst="rect">
             <a:avLst/>
@@ -5833,9 +6983,7 @@
             <a:srgbClr val="E2E8F0"/>
           </a:solidFill>
           <a:ln>
-            <a:solidFill>
-              <a:srgbClr val="E2E8F0"/>
-            </a:solidFill>
+            <a:noFill/>
           </a:ln>
         </p:spPr>
         <p:style>
@@ -5868,7 +7016,7 @@
         </p:nvSpPr>
         <p:spPr>
           <a:xfrm>
-            <a:off x="548640" y="6327648"/>
+            <a:off x="731520" y="6327648"/>
             <a:ext cx="5486400" cy="320040"/>
           </a:xfrm>
           <a:prstGeom prst="rect">
@@ -5883,15 +7031,15 @@
           <a:lstStyle/>
           <a:p>
             <a:pPr>
-              <a:defRPr sz="1000">
+              <a:defRPr sz="950">
                 <a:solidFill>
                   <a:srgbClr val="64748B"/>
                 </a:solidFill>
-                <a:latin typeface="Arial"/>
-              </a:defRPr>
-            </a:pPr>
-            <a:r>
-              <a:t>Timbiras Solidária — ADS UEMA 2026 | Polo Timbiras</a:t>
+                <a:latin typeface="Segoe UI"/>
+              </a:defRPr>
+            </a:pPr>
+            <a:r>
+              <a:t>Timbiras Solidária — ADS UEMA 2026 | Polo Universitário de Timbiras</a:t>
             </a:r>
           </a:p>
         </p:txBody>
@@ -5904,8 +7052,8 @@
         </p:nvSpPr>
         <p:spPr>
           <a:xfrm>
-            <a:off x="9144000" y="6327648"/>
-            <a:ext cx="2499055" cy="320040"/>
+            <a:off x="8686800" y="6327648"/>
+            <a:ext cx="2773375" cy="320040"/>
           </a:xfrm>
           <a:prstGeom prst="rect">
             <a:avLst/>
@@ -5919,11 +7067,11 @@
           <a:lstStyle/>
           <a:p>
             <a:pPr algn="r">
-              <a:defRPr sz="1000" b="1">
+              <a:defRPr sz="950" b="1">
                 <a:solidFill>
                   <a:srgbClr val="64748B"/>
                 </a:solidFill>
-                <a:latin typeface="Arial"/>
+                <a:latin typeface="Segoe UI"/>
               </a:defRPr>
             </a:pPr>
             <a:r>
@@ -5934,24 +7082,88 @@
       </p:sp>
       <p:sp>
         <p:nvSpPr>
-          <p:cNvPr id="8" name="Rounded Rectangle 7"/>
+          <p:cNvPr id="8" name="TextBox 7"/>
+          <p:cNvSpPr txBox="1"/>
+          <p:nvPr/>
+        </p:nvSpPr>
+        <p:spPr>
+          <a:xfrm>
+            <a:off x="731520" y="1234440"/>
+            <a:ext cx="5166360" cy="2743200"/>
+          </a:xfrm>
+          <a:prstGeom prst="rect">
+            <a:avLst/>
+          </a:prstGeom>
+          <a:noFill/>
+        </p:spPr>
+        <p:txBody>
+          <a:bodyPr wrap="square" lIns="0" tIns="0" rIns="0" bIns="0">
+            <a:spAutoFit/>
+          </a:bodyPr>
+          <a:lstStyle/>
+          <a:p>
+            <a:pPr>
+              <a:defRPr sz="1550" b="1">
+                <a:solidFill>
+                  <a:srgbClr val="00873E"/>
+                </a:solidFill>
+                <a:latin typeface="Segoe UI"/>
+              </a:defRPr>
+            </a:pPr>
+            <a:r>
+              <a:t>O Salto da Primeira para a Segunda Etapa</a:t>
+            </a:r>
+          </a:p>
+          <a:p>
+            <a:br/>
+            <a:pPr>
+              <a:defRPr sz="1200">
+                <a:solidFill>
+                  <a:srgbClr val="64748B"/>
+                </a:solidFill>
+                <a:latin typeface="Segoe UI"/>
+              </a:defRPr>
+            </a:pPr>
+            <a:r>
+              <a:t>Na Nota 1, criamos uma interface estática em HTML5, CSS3 e Bootstrap. Era bonita e organizada, mas funcionava como um panfleto digital: parada, passiva e sem diálogo direto com quem acessava.</a:t>
+            </a:r>
+          </a:p>
+          <a:p>
+            <a:br/>
+            <a:pPr>
+              <a:defRPr sz="1200">
+                <a:solidFill>
+                  <a:srgbClr val="64748B"/>
+                </a:solidFill>
+                <a:latin typeface="Segoe UI"/>
+              </a:defRPr>
+            </a:pPr>
+            <a:r>
+              <a:t>Na Nota 2, nossa missão foi dar vida e coração ao projeto: quando alguém preenche uma doação, precisa sentir que aquele ato gerou uma resposta no mundo real.</a:t>
+            </a:r>
+          </a:p>
+        </p:txBody>
+      </p:sp>
+      <p:sp>
+        <p:nvSpPr>
+          <p:cNvPr id="9" name="Rounded Rectangle 8"/>
           <p:cNvSpPr/>
           <p:nvPr/>
         </p:nvSpPr>
         <p:spPr>
           <a:xfrm>
-            <a:off x="548640" y="1371600"/>
-            <a:ext cx="5394960" cy="4572000"/>
+            <a:off x="731520" y="4160520"/>
+            <a:ext cx="5166360" cy="1874519"/>
           </a:xfrm>
           <a:prstGeom prst="roundRect">
             <a:avLst/>
           </a:prstGeom>
           <a:solidFill>
-            <a:srgbClr val="F8FAFC"/>
+            <a:srgbClr val="FEFCE8"/>
           </a:solidFill>
-          <a:ln>
+          <a:ln w="12700">
             <a:solidFill>
-              <a:srgbClr val="E2E8F0"/>
+              <a:srgbClr val="FEF08A"/>
             </a:solidFill>
           </a:ln>
         </p:spPr>
@@ -5970,86 +7182,32 @@
           </a:fontRef>
         </p:style>
         <p:txBody>
-          <a:bodyPr rtlCol="0" anchor="ctr" wrap="square" lIns="274320" tIns="274320" rIns="274320" bIns="274320"/>
-          <a:lstStyle/>
-          <a:p>
-            <a:pPr algn="ctr">
-              <a:defRPr sz="1600" b="1">
-                <a:solidFill>
-                  <a:srgbClr val="00873E"/>
-                </a:solidFill>
-                <a:latin typeface="Arial"/>
-              </a:defRPr>
-            </a:pPr>
-            <a:r>
-              <a:t>O Salto da Primeira para a Segunda Etapa</a:t>
-            </a:r>
-          </a:p>
-          <a:p>
-            <a:br/>
-            <a:pPr>
-              <a:defRPr sz="1300">
-                <a:solidFill>
-                  <a:srgbClr val="1E293B"/>
-                </a:solidFill>
-                <a:latin typeface="Arial"/>
-              </a:defRPr>
-            </a:pPr>
-            <a:r>
-              <a:t>Na Nota 1, criamos uma interface estática em HTML5, CSS3 e Bootstrap. Era organizada e responsiva, mas funcionava como um panfleto digital: passiva e sem diálogo direto com quem acessava.</a:t>
-            </a:r>
-          </a:p>
-          <a:p>
-            <a:br/>
-            <a:pPr>
-              <a:defRPr sz="1300">
-                <a:solidFill>
-                  <a:srgbClr val="1E293B"/>
-                </a:solidFill>
-                <a:latin typeface="Arial"/>
-              </a:defRPr>
-            </a:pPr>
-            <a:r>
-              <a:t>Na Nota 2, nossa missão foi dar vida e coração a esse projeto. Uma causa comunitária precisa de calor humano, resposta imediata e acolhimento.</a:t>
-            </a:r>
-          </a:p>
-          <a:p>
-            <a:br/>
-            <a:pPr>
-              <a:defRPr sz="1300">
-                <a:solidFill>
-                  <a:srgbClr val="1E293B"/>
-                </a:solidFill>
-                <a:latin typeface="Arial"/>
-              </a:defRPr>
-            </a:pPr>
-            <a:r>
-              <a:t>Adotamos o React 19 para que cada elemento na tela reaja instantaneamente aos sentimentos e intenções do usuário, sem scripts soltos ou telas quebradas.</a:t>
-            </a:r>
-          </a:p>
-        </p:txBody>
-      </p:sp>
-      <p:sp>
-        <p:nvSpPr>
-          <p:cNvPr id="9" name="Rounded Rectangle 8"/>
+          <a:bodyPr rtlCol="0" anchor="ctr"/>
+          <a:lstStyle/>
+          <a:p>
+            <a:pPr algn="ctr"/>
+          </a:p>
+        </p:txBody>
+      </p:sp>
+      <p:sp>
+        <p:nvSpPr>
+          <p:cNvPr id="10" name="Rectangle 9"/>
           <p:cNvSpPr/>
           <p:nvPr/>
         </p:nvSpPr>
         <p:spPr>
           <a:xfrm>
-            <a:off x="6217920" y="1371600"/>
-            <a:ext cx="5394960" cy="4572000"/>
-          </a:xfrm>
-          <a:prstGeom prst="roundRect">
+            <a:off x="731520" y="4160520"/>
+            <a:ext cx="73152" cy="1874519"/>
+          </a:xfrm>
+          <a:prstGeom prst="rect">
             <a:avLst/>
           </a:prstGeom>
           <a:solidFill>
-            <a:srgbClr val="FEFCE8"/>
+            <a:srgbClr val="F59E0B"/>
           </a:solidFill>
           <a:ln>
-            <a:solidFill>
-              <a:srgbClr val="F59E0B"/>
-            </a:solidFill>
+            <a:noFill/>
           </a:ln>
         </p:spPr>
         <p:style>
@@ -6067,15 +7225,136 @@
           </a:fontRef>
         </p:style>
         <p:txBody>
-          <a:bodyPr rtlCol="0" anchor="ctr" wrap="square" lIns="274320" tIns="274320" rIns="274320" bIns="274320"/>
-          <a:lstStyle/>
-          <a:p>
-            <a:pPr algn="ctr">
-              <a:defRPr sz="1600" b="1">
+          <a:bodyPr rtlCol="0" anchor="ctr"/>
+          <a:lstStyle/>
+          <a:p>
+            <a:pPr algn="ctr"/>
+          </a:p>
+        </p:txBody>
+      </p:sp>
+      <p:sp>
+        <p:nvSpPr>
+          <p:cNvPr id="11" name="TextBox 10"/>
+          <p:cNvSpPr txBox="1"/>
+          <p:nvPr/>
+        </p:nvSpPr>
+        <p:spPr>
+          <a:xfrm>
+            <a:off x="960120" y="4297680"/>
+            <a:ext cx="4800600" cy="1600200"/>
+          </a:xfrm>
+          <a:prstGeom prst="rect">
+            <a:avLst/>
+          </a:prstGeom>
+          <a:noFill/>
+        </p:spPr>
+        <p:txBody>
+          <a:bodyPr wrap="square" lIns="0" tIns="0" rIns="0" bIns="0">
+            <a:spAutoFit/>
+          </a:bodyPr>
+          <a:lstStyle/>
+          <a:p>
+            <a:pPr>
+              <a:defRPr sz="1400" b="1">
                 <a:solidFill>
                   <a:srgbClr val="B45309"/>
                 </a:solidFill>
-                <a:latin typeface="Arial"/>
+                <a:latin typeface="Segoe UI"/>
+              </a:defRPr>
+            </a:pPr>
+            <a:r>
+              <a:t>Interação que Acolhe</a:t>
+            </a:r>
+          </a:p>
+          <a:p>
+            <a:br/>
+            <a:pPr>
+              <a:defRPr sz="1150">
+                <a:solidFill>
+                  <a:srgbClr val="1E293B"/>
+                </a:solidFill>
+                <a:latin typeface="Segoe UI"/>
+              </a:defRPr>
+            </a:pPr>
+            <a:r>
+              <a:t>Abraçamos o React 19 para que cada elemento na tela reaja imediatamente aos sentimentos e intenções do usuário, sem recarregar a página e sem travar a navegação.</a:t>
+            </a:r>
+          </a:p>
+        </p:txBody>
+      </p:sp>
+      <p:sp>
+        <p:nvSpPr>
+          <p:cNvPr id="12" name="Rounded Rectangle 11"/>
+          <p:cNvSpPr/>
+          <p:nvPr/>
+        </p:nvSpPr>
+        <p:spPr>
+          <a:xfrm>
+            <a:off x="6263640" y="1234440"/>
+            <a:ext cx="5166360" cy="4800600"/>
+          </a:xfrm>
+          <a:prstGeom prst="roundRect">
+            <a:avLst/>
+          </a:prstGeom>
+          <a:solidFill>
+            <a:srgbClr val="F8FAFC"/>
+          </a:solidFill>
+          <a:ln w="12700">
+            <a:solidFill>
+              <a:srgbClr val="E2E8F0"/>
+            </a:solidFill>
+          </a:ln>
+        </p:spPr>
+        <p:style>
+          <a:lnRef idx="1">
+            <a:schemeClr val="accent1"/>
+          </a:lnRef>
+          <a:fillRef idx="3">
+            <a:schemeClr val="accent1"/>
+          </a:fillRef>
+          <a:effectRef idx="2">
+            <a:schemeClr val="accent1"/>
+          </a:effectRef>
+          <a:fontRef idx="minor">
+            <a:schemeClr val="lt1"/>
+          </a:fontRef>
+        </p:style>
+        <p:txBody>
+          <a:bodyPr rtlCol="0" anchor="ctr"/>
+          <a:lstStyle/>
+          <a:p>
+            <a:pPr algn="ctr"/>
+          </a:p>
+        </p:txBody>
+      </p:sp>
+      <p:sp>
+        <p:nvSpPr>
+          <p:cNvPr id="13" name="TextBox 12"/>
+          <p:cNvSpPr txBox="1"/>
+          <p:nvPr/>
+        </p:nvSpPr>
+        <p:spPr>
+          <a:xfrm>
+            <a:off x="6537960" y="1417320"/>
+            <a:ext cx="4617720" cy="4434840"/>
+          </a:xfrm>
+          <a:prstGeom prst="rect">
+            <a:avLst/>
+          </a:prstGeom>
+          <a:noFill/>
+        </p:spPr>
+        <p:txBody>
+          <a:bodyPr wrap="square" lIns="0" tIns="0" rIns="0" bIns="0">
+            <a:spAutoFit/>
+          </a:bodyPr>
+          <a:lstStyle/>
+          <a:p>
+            <a:pPr>
+              <a:defRPr sz="1550" b="1">
+                <a:solidFill>
+                  <a:srgbClr val="00873E"/>
+                </a:solidFill>
+                <a:latin typeface="Segoe UI"/>
               </a:defRPr>
             </a:pPr>
             <a:r>
@@ -6085,25 +7364,25 @@
           <a:p>
             <a:br/>
             <a:pPr>
-              <a:defRPr sz="1200">
+              <a:defRPr sz="1150">
                 <a:solidFill>
                   <a:srgbClr val="1E293B"/>
                 </a:solidFill>
-                <a:latin typeface="Arial"/>
-              </a:defRPr>
-            </a:pPr>
-            <a:r>
-              <a:t>• Retorno Imediato: Ao enviar uma doação, a meta comunitária sobe na mesma hora no topo do site e um Recibo Solidário com código exclusivo surge na tela.</a:t>
+                <a:latin typeface="Segoe UI"/>
+              </a:defRPr>
+            </a:pPr>
+            <a:r>
+              <a:t>• Retorno Imediato: Ao enviar uma doação, a meta comunitária sobe na mesma hora no topo do site e um Recibo Solidário com código único surge na tela.</a:t>
             </a:r>
           </a:p>
           <a:p>
             <a:br/>
             <a:pPr>
-              <a:defRPr sz="1200">
+              <a:defRPr sz="1150">
                 <a:solidFill>
                   <a:srgbClr val="1E293B"/>
                 </a:solidFill>
-                <a:latin typeface="Arial"/>
+                <a:latin typeface="Segoe UI"/>
               </a:defRPr>
             </a:pPr>
             <a:r>
@@ -6113,29 +7392,29 @@
           <a:p>
             <a:br/>
             <a:pPr>
-              <a:defRPr sz="1200">
+              <a:defRPr sz="1150">
                 <a:solidFill>
                   <a:srgbClr val="1E293B"/>
                 </a:solidFill>
-                <a:latin typeface="Arial"/>
-              </a:defRPr>
-            </a:pPr>
-            <a:r>
-              <a:t>• Chave PIX com 1 Toque: Cópia instantânea da chave institucional com aviso de confirmação na tela.</a:t>
+                <a:latin typeface="Segoe UI"/>
+              </a:defRPr>
+            </a:pPr>
+            <a:r>
+              <a:t>• Chave PIX com 1 Toque: Cópia instantânea da chave institucional com aviso de confirmação na tela via Clipboard API.</a:t>
             </a:r>
           </a:p>
           <a:p>
             <a:br/>
             <a:pPr>
-              <a:defRPr sz="1200">
+              <a:defRPr sz="1150">
                 <a:solidFill>
                   <a:srgbClr val="1E293B"/>
                 </a:solidFill>
-                <a:latin typeface="Arial"/>
-              </a:defRPr>
-            </a:pPr>
-            <a:r>
-              <a:t>• Trilha Sonora Acolhedora: Player com a canção 'Imagine', que respeita o usuário e pode ser pausado, mutado ou recolhido a qualquer momento.</a:t>
+                <a:latin typeface="Segoe UI"/>
+              </a:defRPr>
+            </a:pPr>
+            <a:r>
+              <a:t>• Trilha Sonora Emocionante: Player com a canção 'Imagine' (John Lennon, 1971), que respeita a privacidade do usuário e pode ser pausado, mutado ou recolhido a qualquer momento.</a:t>
             </a:r>
           </a:p>
         </p:txBody>
@@ -6166,8 +7445,8 @@
         </p:nvSpPr>
         <p:spPr>
           <a:xfrm>
-            <a:off x="548640" y="365760"/>
-            <a:ext cx="8686800" cy="731520"/>
+            <a:off x="731520" y="365760"/>
+            <a:ext cx="8412480" cy="685800"/>
           </a:xfrm>
           <a:prstGeom prst="rect">
             <a:avLst/>
@@ -6181,11 +7460,11 @@
           <a:lstStyle/>
           <a:p>
             <a:pPr>
-              <a:defRPr sz="2200" b="1">
+              <a:defRPr sz="2100" b="1">
                 <a:solidFill>
                   <a:srgbClr val="00873E"/>
                 </a:solidFill>
-                <a:latin typeface="Arial"/>
+                <a:latin typeface="Segoe UI"/>
               </a:defRPr>
             </a:pPr>
             <a:r>
@@ -6202,8 +7481,8 @@
         </p:nvSpPr>
         <p:spPr>
           <a:xfrm>
-            <a:off x="9326880" y="411480"/>
-            <a:ext cx="2286000" cy="365760"/>
+            <a:off x="9235440" y="411480"/>
+            <a:ext cx="2194560" cy="347472"/>
           </a:xfrm>
           <a:prstGeom prst="roundRect">
             <a:avLst/>
@@ -6211,7 +7490,7 @@
           <a:solidFill>
             <a:srgbClr val="F8FAFC"/>
           </a:solidFill>
-          <a:ln>
+          <a:ln w="12700">
             <a:solidFill>
               <a:srgbClr val="E2E8F0"/>
             </a:solidFill>
@@ -6232,19 +7511,19 @@
           </a:fontRef>
         </p:style>
         <p:txBody>
-          <a:bodyPr rtlCol="0" anchor="ctr" wrap="none"/>
+          <a:bodyPr rtlCol="0" anchor="ctr" tIns="54864"/>
           <a:lstStyle/>
           <a:p>
             <a:pPr algn="ctr">
-              <a:defRPr sz="1100" b="1">
+              <a:defRPr sz="1000" b="1">
                 <a:solidFill>
                   <a:srgbClr val="64748B"/>
                 </a:solidFill>
-                <a:latin typeface="Arial"/>
-              </a:defRPr>
-            </a:pPr>
-            <a:r>
-              <a:t>2. Desenvolvimento</a:t>
+                <a:latin typeface="Segoe UI"/>
+              </a:defRPr>
+            </a:pPr>
+            <a:r>
+              <a:t>2. DESENVOLVIMENTO</a:t>
             </a:r>
           </a:p>
         </p:txBody>
@@ -6257,8 +7536,8 @@
         </p:nvSpPr>
         <p:spPr>
           <a:xfrm>
-            <a:off x="548640" y="1097280"/>
-            <a:ext cx="11094415" cy="18288"/>
+            <a:off x="731520" y="1051560"/>
+            <a:ext cx="10728655" cy="13716"/>
           </a:xfrm>
           <a:prstGeom prst="rect">
             <a:avLst/>
@@ -6267,9 +7546,7 @@
             <a:srgbClr val="E2E8F0"/>
           </a:solidFill>
           <a:ln>
-            <a:solidFill>
-              <a:srgbClr val="E2E8F0"/>
-            </a:solidFill>
+            <a:noFill/>
           </a:ln>
         </p:spPr>
         <p:style>
@@ -6302,8 +7579,8 @@
         </p:nvSpPr>
         <p:spPr>
           <a:xfrm>
-            <a:off x="548640" y="6263640"/>
-            <a:ext cx="11094415" cy="18288"/>
+            <a:off x="731520" y="6263640"/>
+            <a:ext cx="10728655" cy="13716"/>
           </a:xfrm>
           <a:prstGeom prst="rect">
             <a:avLst/>
@@ -6312,9 +7589,7 @@
             <a:srgbClr val="E2E8F0"/>
           </a:solidFill>
           <a:ln>
-            <a:solidFill>
-              <a:srgbClr val="E2E8F0"/>
-            </a:solidFill>
+            <a:noFill/>
           </a:ln>
         </p:spPr>
         <p:style>
@@ -6347,7 +7622,7 @@
         </p:nvSpPr>
         <p:spPr>
           <a:xfrm>
-            <a:off x="548640" y="6327648"/>
+            <a:off x="731520" y="6327648"/>
             <a:ext cx="5486400" cy="320040"/>
           </a:xfrm>
           <a:prstGeom prst="rect">
@@ -6362,15 +7637,15 @@
           <a:lstStyle/>
           <a:p>
             <a:pPr>
-              <a:defRPr sz="1000">
+              <a:defRPr sz="950">
                 <a:solidFill>
                   <a:srgbClr val="64748B"/>
                 </a:solidFill>
-                <a:latin typeface="Arial"/>
-              </a:defRPr>
-            </a:pPr>
-            <a:r>
-              <a:t>Timbiras Solidária — ADS UEMA 2026 | Polo Timbiras</a:t>
+                <a:latin typeface="Segoe UI"/>
+              </a:defRPr>
+            </a:pPr>
+            <a:r>
+              <a:t>Timbiras Solidária — ADS UEMA 2026 | Polo Universitário de Timbiras</a:t>
             </a:r>
           </a:p>
         </p:txBody>
@@ -6383,8 +7658,8 @@
         </p:nvSpPr>
         <p:spPr>
           <a:xfrm>
-            <a:off x="9144000" y="6327648"/>
-            <a:ext cx="2499055" cy="320040"/>
+            <a:off x="8686800" y="6327648"/>
+            <a:ext cx="2773375" cy="320040"/>
           </a:xfrm>
           <a:prstGeom prst="rect">
             <a:avLst/>
@@ -6398,11 +7673,11 @@
           <a:lstStyle/>
           <a:p>
             <a:pPr algn="r">
-              <a:defRPr sz="1000" b="1">
+              <a:defRPr sz="950" b="1">
                 <a:solidFill>
                   <a:srgbClr val="64748B"/>
                 </a:solidFill>
-                <a:latin typeface="Arial"/>
+                <a:latin typeface="Segoe UI"/>
               </a:defRPr>
             </a:pPr>
             <a:r>
@@ -6413,14 +7688,63 @@
       </p:sp>
       <p:sp>
         <p:nvSpPr>
-          <p:cNvPr id="8" name="Rounded Rectangle 7"/>
+          <p:cNvPr id="8" name="TextBox 7"/>
+          <p:cNvSpPr txBox="1"/>
+          <p:nvPr/>
+        </p:nvSpPr>
+        <p:spPr>
+          <a:xfrm>
+            <a:off x="731520" y="1234440"/>
+            <a:ext cx="5166360" cy="1188720"/>
+          </a:xfrm>
+          <a:prstGeom prst="rect">
+            <a:avLst/>
+          </a:prstGeom>
+          <a:noFill/>
+        </p:spPr>
+        <p:txBody>
+          <a:bodyPr wrap="square" lIns="0" tIns="0" rIns="0" bIns="0">
+            <a:spAutoFit/>
+          </a:bodyPr>
+          <a:lstStyle/>
+          <a:p>
+            <a:pPr>
+              <a:defRPr sz="1550" b="1">
+                <a:solidFill>
+                  <a:srgbClr val="00873E"/>
+                </a:solidFill>
+                <a:latin typeface="Segoe UI"/>
+              </a:defRPr>
+            </a:pPr>
+            <a:r>
+              <a:t>Os Sentidos da Aplicação (Eventos JavaScript)</a:t>
+            </a:r>
+          </a:p>
+          <a:p>
+            <a:pPr>
+              <a:defRPr sz="1200">
+                <a:solidFill>
+                  <a:srgbClr val="64748B"/>
+                </a:solidFill>
+                <a:latin typeface="Segoe UI"/>
+              </a:defRPr>
+            </a:pPr>
+            <a:r>
+              <a:t>Tratamento de eventos pensado para ser acolhedor e intuitivo, sem burocracias:</a:t>
+            </a:r>
+          </a:p>
+        </p:txBody>
+      </p:sp>
+      <p:sp>
+        <p:nvSpPr>
+          <p:cNvPr id="9" name="Rounded Rectangle 8"/>
           <p:cNvSpPr/>
           <p:nvPr/>
         </p:nvSpPr>
         <p:spPr>
           <a:xfrm>
-            <a:off x="548640" y="1371600"/>
-            <a:ext cx="5394960" cy="4572000"/>
+            <a:off x="731520" y="2514600"/>
+            <a:ext cx="5166360" cy="3520440"/>
           </a:xfrm>
           <a:prstGeom prst="roundRect">
             <a:avLst/>
@@ -6428,7 +7752,7 @@
           <a:solidFill>
             <a:srgbClr val="F8FAFC"/>
           </a:solidFill>
-          <a:ln>
+          <a:ln w="12700">
             <a:solidFill>
               <a:srgbClr val="E2E8F0"/>
             </a:solidFill>
@@ -6449,100 +7773,32 @@
           </a:fontRef>
         </p:style>
         <p:txBody>
-          <a:bodyPr rtlCol="0" anchor="ctr" wrap="square" lIns="274320" tIns="274320" rIns="274320" bIns="274320"/>
-          <a:lstStyle/>
-          <a:p>
-            <a:pPr algn="ctr">
-              <a:defRPr sz="1600" b="1">
-                <a:solidFill>
-                  <a:srgbClr val="00873E"/>
-                </a:solidFill>
-                <a:latin typeface="Arial"/>
-              </a:defRPr>
-            </a:pPr>
-            <a:r>
-              <a:t>Os Sentidos da Aplicação (Eventos JavaScript)</a:t>
-            </a:r>
-          </a:p>
-          <a:p>
-            <a:br/>
-            <a:pPr>
-              <a:defRPr sz="1200">
-                <a:solidFill>
-                  <a:srgbClr val="1E293B"/>
-                </a:solidFill>
-                <a:latin typeface="Arial"/>
-              </a:defRPr>
-            </a:pPr>
-            <a:r>
-              <a:t>• onSubmit (Doar.jsx): Interrompe o recarregamento brusco da página, confere se os campos estão corretos, grava no localStorage e avisa que a ajuda está a caminho.</a:t>
-            </a:r>
-          </a:p>
-          <a:p>
-            <a:br/>
-            <a:pPr>
-              <a:defRPr sz="1200">
-                <a:solidFill>
-                  <a:srgbClr val="1E293B"/>
-                </a:solidFill>
-                <a:latin typeface="Arial"/>
-              </a:defRPr>
-            </a:pPr>
-            <a:r>
-              <a:t>• onChange (PrestacaoContas.jsx): Filtra os bairros de Timbiras enquanto o morador digita, com busca inteligente sem travar.</a:t>
-            </a:r>
-          </a:p>
-          <a:p>
-            <a:br/>
-            <a:pPr>
-              <a:defRPr sz="1200">
-                <a:solidFill>
-                  <a:srgbClr val="1E293B"/>
-                </a:solidFill>
-                <a:latin typeface="Arial"/>
-              </a:defRPr>
-            </a:pPr>
-            <a:r>
-              <a:t>• onClick na Navbar: Menu hambúrguer no celular que abre suavemente e fecha sozinho ao tocar em qualquer link.</a:t>
-            </a:r>
-          </a:p>
-          <a:p>
-            <a:br/>
-            <a:pPr>
-              <a:defRPr sz="1200">
-                <a:solidFill>
-                  <a:srgbClr val="1E293B"/>
-                </a:solidFill>
-                <a:latin typeface="Arial"/>
-              </a:defRPr>
-            </a:pPr>
-            <a:r>
-              <a:t>• Clipboard API: Cópia suave da chave PIX sem selecionar texto.</a:t>
-            </a:r>
-          </a:p>
-        </p:txBody>
-      </p:sp>
-      <p:sp>
-        <p:nvSpPr>
-          <p:cNvPr id="9" name="Rounded Rectangle 8"/>
+          <a:bodyPr rtlCol="0" anchor="ctr"/>
+          <a:lstStyle/>
+          <a:p>
+            <a:pPr algn="ctr"/>
+          </a:p>
+        </p:txBody>
+      </p:sp>
+      <p:sp>
+        <p:nvSpPr>
+          <p:cNvPr id="10" name="Rectangle 9"/>
           <p:cNvSpPr/>
           <p:nvPr/>
         </p:nvSpPr>
         <p:spPr>
           <a:xfrm>
-            <a:off x="6217920" y="1371600"/>
-            <a:ext cx="5394960" cy="4572000"/>
-          </a:xfrm>
-          <a:prstGeom prst="roundRect">
+            <a:off x="731520" y="2514600"/>
+            <a:ext cx="73152" cy="3520440"/>
+          </a:xfrm>
+          <a:prstGeom prst="rect">
             <a:avLst/>
           </a:prstGeom>
           <a:solidFill>
-            <a:srgbClr val="F0FDF4"/>
+            <a:srgbClr val="00873E"/>
           </a:solidFill>
           <a:ln>
-            <a:solidFill>
-              <a:srgbClr val="10B981"/>
-            </a:solidFill>
+            <a:noFill/>
           </a:ln>
         </p:spPr>
         <p:style>
@@ -6560,15 +7816,129 @@
           </a:fontRef>
         </p:style>
         <p:txBody>
-          <a:bodyPr rtlCol="0" anchor="ctr" wrap="square" lIns="274320" tIns="274320" rIns="274320" bIns="274320"/>
-          <a:lstStyle/>
-          <a:p>
-            <a:pPr algn="ctr">
-              <a:defRPr sz="1600" b="1">
+          <a:bodyPr rtlCol="0" anchor="ctr"/>
+          <a:lstStyle/>
+          <a:p>
+            <a:pPr algn="ctr"/>
+          </a:p>
+        </p:txBody>
+      </p:sp>
+      <p:sp>
+        <p:nvSpPr>
+          <p:cNvPr id="11" name="TextBox 10"/>
+          <p:cNvSpPr txBox="1"/>
+          <p:nvPr/>
+        </p:nvSpPr>
+        <p:spPr>
+          <a:xfrm>
+            <a:off x="960120" y="2651760"/>
+            <a:ext cx="4800600" cy="3246120"/>
+          </a:xfrm>
+          <a:prstGeom prst="rect">
+            <a:avLst/>
+          </a:prstGeom>
+          <a:noFill/>
+        </p:spPr>
+        <p:txBody>
+          <a:bodyPr wrap="square" lIns="0" tIns="0" rIns="0" bIns="0">
+            <a:spAutoFit/>
+          </a:bodyPr>
+          <a:lstStyle/>
+          <a:p>
+            <a:pPr>
+              <a:defRPr sz="1300" b="1">
                 <a:solidFill>
                   <a:srgbClr val="00873E"/>
                 </a:solidFill>
-                <a:latin typeface="Arial"/>
+                <a:latin typeface="Segoe UI"/>
+              </a:defRPr>
+            </a:pPr>
+            <a:r>
+              <a:t>Eventos Centrais Implementados:</a:t>
+            </a:r>
+          </a:p>
+          <a:p>
+            <a:pPr>
+              <a:defRPr sz="1050">
+                <a:solidFill>
+                  <a:srgbClr val="1E293B"/>
+                </a:solidFill>
+                <a:latin typeface="Segoe UI"/>
+              </a:defRPr>
+            </a:pPr>
+            <a:r>
+              <a:t>• onSubmit (Doar.jsx): Interrompe o recarregamento brusco, valida campos, grava no localStorage e emite Recibo Solidário com código rastreável (REC-XXXXXX).</a:t>
+            </a:r>
+          </a:p>
+          <a:p>
+            <a:pPr>
+              <a:defRPr sz="1050">
+                <a:solidFill>
+                  <a:srgbClr val="1E293B"/>
+                </a:solidFill>
+                <a:latin typeface="Segoe UI"/>
+              </a:defRPr>
+            </a:pPr>
+            <a:r>
+              <a:t>• onChange (PrestacaoContas.jsx): Filtra os 13 bairros e a Zona Rural enquanto o morador digita, normalizando acentos sem travamentos.</a:t>
+            </a:r>
+          </a:p>
+          <a:p>
+            <a:pPr>
+              <a:defRPr sz="1050">
+                <a:solidFill>
+                  <a:srgbClr val="1E293B"/>
+                </a:solidFill>
+                <a:latin typeface="Segoe UI"/>
+              </a:defRPr>
+            </a:pPr>
+            <a:r>
+              <a:t>• onClick na Navbar: Menu móvel que abre e fecha sozinho ao tocar em qualquer link.</a:t>
+            </a:r>
+          </a:p>
+          <a:p>
+            <a:pPr>
+              <a:defRPr sz="1050">
+                <a:solidFill>
+                  <a:srgbClr val="1E293B"/>
+                </a:solidFill>
+                <a:latin typeface="Segoe UI"/>
+              </a:defRPr>
+            </a:pPr>
+            <a:r>
+              <a:t>• Clipboard API: Cópia suave da chave PIX sem selecionar texto.</a:t>
+            </a:r>
+          </a:p>
+        </p:txBody>
+      </p:sp>
+      <p:sp>
+        <p:nvSpPr>
+          <p:cNvPr id="12" name="TextBox 11"/>
+          <p:cNvSpPr txBox="1"/>
+          <p:nvPr/>
+        </p:nvSpPr>
+        <p:spPr>
+          <a:xfrm>
+            <a:off x="6263640" y="1234440"/>
+            <a:ext cx="5166360" cy="1188720"/>
+          </a:xfrm>
+          <a:prstGeom prst="rect">
+            <a:avLst/>
+          </a:prstGeom>
+          <a:noFill/>
+        </p:spPr>
+        <p:txBody>
+          <a:bodyPr wrap="square" lIns="0" tIns="0" rIns="0" bIns="0">
+            <a:spAutoFit/>
+          </a:bodyPr>
+          <a:lstStyle/>
+          <a:p>
+            <a:pPr>
+              <a:defRPr sz="1500" b="1">
+                <a:solidFill>
+                  <a:srgbClr val="00873E"/>
+                </a:solidFill>
+                <a:latin typeface="Segoe UI"/>
               </a:defRPr>
             </a:pPr>
             <a:r>
@@ -6576,48 +7946,125 @@
             </a:r>
           </a:p>
           <a:p>
+            <a:pPr>
+              <a:defRPr sz="1150">
+                <a:solidFill>
+                  <a:srgbClr val="64748B"/>
+                </a:solidFill>
+                <a:latin typeface="Segoe UI"/>
+              </a:defRPr>
+            </a:pPr>
+            <a:r>
+              <a:t>Nenhum projeto comunitário vive só de botões; ele vive de sentimento. A trilha sonora traz a clássica canção 'Imagine' para sensibilização pedagógica e acolhimento.</a:t>
+            </a:r>
+          </a:p>
+        </p:txBody>
+      </p:sp>
+      <p:sp>
+        <p:nvSpPr>
+          <p:cNvPr id="13" name="Rounded Rectangle 12"/>
+          <p:cNvSpPr/>
+          <p:nvPr/>
+        </p:nvSpPr>
+        <p:spPr>
+          <a:xfrm>
+            <a:off x="6263640" y="2514600"/>
+            <a:ext cx="5166360" cy="3520440"/>
+          </a:xfrm>
+          <a:prstGeom prst="roundRect">
+            <a:avLst/>
+          </a:prstGeom>
+          <a:solidFill>
+            <a:srgbClr val="F0FDF4"/>
+          </a:solidFill>
+          <a:ln w="12700">
+            <a:solidFill>
+              <a:srgbClr val="BBF7D0"/>
+            </a:solidFill>
+          </a:ln>
+        </p:spPr>
+        <p:style>
+          <a:lnRef idx="1">
+            <a:schemeClr val="accent1"/>
+          </a:lnRef>
+          <a:fillRef idx="3">
+            <a:schemeClr val="accent1"/>
+          </a:fillRef>
+          <a:effectRef idx="2">
+            <a:schemeClr val="accent1"/>
+          </a:effectRef>
+          <a:fontRef idx="minor">
+            <a:schemeClr val="lt1"/>
+          </a:fontRef>
+        </p:style>
+        <p:txBody>
+          <a:bodyPr rtlCol="0" anchor="ctr"/>
+          <a:lstStyle/>
+          <a:p>
+            <a:pPr algn="ctr"/>
+          </a:p>
+        </p:txBody>
+      </p:sp>
+      <p:sp>
+        <p:nvSpPr>
+          <p:cNvPr id="14" name="TextBox 13"/>
+          <p:cNvSpPr txBox="1"/>
+          <p:nvPr/>
+        </p:nvSpPr>
+        <p:spPr>
+          <a:xfrm>
+            <a:off x="6537960" y="2651760"/>
+            <a:ext cx="4663440" cy="3246120"/>
+          </a:xfrm>
+          <a:prstGeom prst="rect">
+            <a:avLst/>
+          </a:prstGeom>
+          <a:noFill/>
+        </p:spPr>
+        <p:txBody>
+          <a:bodyPr wrap="square" lIns="0" tIns="0" rIns="0" bIns="0">
+            <a:spAutoFit/>
+          </a:bodyPr>
+          <a:lstStyle/>
+          <a:p>
+            <a:pPr>
+              <a:defRPr sz="1300" b="1">
+                <a:solidFill>
+                  <a:srgbClr val="00873E"/>
+                </a:solidFill>
+                <a:latin typeface="Segoe UI"/>
+              </a:defRPr>
+            </a:pPr>
+            <a:r>
+              <a:t>Tratamento Cuidadoso de Áudio:</a:t>
+            </a:r>
+          </a:p>
+          <a:p>
             <a:br/>
             <a:pPr>
-              <a:defRPr sz="1300">
+              <a:defRPr sz="1100">
                 <a:solidFill>
                   <a:srgbClr val="1E293B"/>
                 </a:solidFill>
-                <a:latin typeface="Arial"/>
-              </a:defRPr>
-            </a:pPr>
-            <a:r>
-              <a:t>Nenhum projeto comunitário vive só de botões; ele vive de sentimento. O componente PlayerAudio.jsx traz a clássica canção 'Imagine' de John Lennon (1971) como trilha sonora de paz e união, executada para fins pedagógicos e culturais.</a:t>
+                <a:latin typeface="Segoe UI"/>
+              </a:defRPr>
+            </a:pPr>
+            <a:r>
+              <a:t>• Respeito ao Usuário (Anti-Autoplay Invasivo): Navegadores modernos bloqueiam reprodução automática. Criamos escutadores de evento (window.addEventListener('click') e rolagem) para iniciar suavemente quando o visitante demonstra interesse pelo site.</a:t>
             </a:r>
           </a:p>
           <a:p>
             <a:br/>
             <a:pPr>
-              <a:defRPr sz="1400" b="1">
-                <a:solidFill>
-                  <a:srgbClr val="00873E"/>
-                </a:solidFill>
-                <a:latin typeface="Arial"/>
-              </a:defRPr>
-            </a:pPr>
-            <a:r>
-              <a:t>Tratamento Cuidadoso de Áudio:</a:t>
-            </a:r>
-          </a:p>
-          <a:p>
-            <a:pPr>
-              <a:defRPr sz="1200">
+              <a:defRPr sz="1100">
                 <a:solidFill>
                   <a:srgbClr val="1E293B"/>
                 </a:solidFill>
-                <a:latin typeface="Arial"/>
-              </a:defRPr>
-            </a:pPr>
-            <a:r>
-              <a:t>• Respeito à política de autoplay: A música não assusta o usuário; ela inicia suavemente apenas quando há interação voluntária do visitante com a página.</a:t>
-            </a:r>
-            <a:br/>
-            <a:r>
-              <a:t>• Controles completos: Controle deslizante de volume, botão mudo, equalizador com barras animadas em CSS e botão para minimizar o tocador para o canto da tela.</a:t>
+                <a:latin typeface="Segoe UI"/>
+              </a:defRPr>
+            </a:pPr>
+            <a:r>
+              <a:t>• Controles Completos: Slider de volume contínuo, botão de silenciar (mute), equalizador com 3 barras animadas em CSS e botão para recolher o tocador para um canto discreto da tela.</a:t>
             </a:r>
           </a:p>
         </p:txBody>
@@ -6648,8 +8095,8 @@
         </p:nvSpPr>
         <p:spPr>
           <a:xfrm>
-            <a:off x="548640" y="365760"/>
-            <a:ext cx="8686800" cy="731520"/>
+            <a:off x="731520" y="365760"/>
+            <a:ext cx="8412480" cy="685800"/>
           </a:xfrm>
           <a:prstGeom prst="rect">
             <a:avLst/>
@@ -6663,11 +8110,11 @@
           <a:lstStyle/>
           <a:p>
             <a:pPr>
-              <a:defRPr sz="2200" b="1">
+              <a:defRPr sz="2100" b="1">
                 <a:solidFill>
                   <a:srgbClr val="00873E"/>
                 </a:solidFill>
-                <a:latin typeface="Arial"/>
+                <a:latin typeface="Segoe UI"/>
               </a:defRPr>
             </a:pPr>
             <a:r>
@@ -6684,8 +8131,8 @@
         </p:nvSpPr>
         <p:spPr>
           <a:xfrm>
-            <a:off x="9326880" y="411480"/>
-            <a:ext cx="2286000" cy="365760"/>
+            <a:off x="9235440" y="411480"/>
+            <a:ext cx="2194560" cy="347472"/>
           </a:xfrm>
           <a:prstGeom prst="roundRect">
             <a:avLst/>
@@ -6693,7 +8140,7 @@
           <a:solidFill>
             <a:srgbClr val="F8FAFC"/>
           </a:solidFill>
-          <a:ln>
+          <a:ln w="12700">
             <a:solidFill>
               <a:srgbClr val="E2E8F0"/>
             </a:solidFill>
@@ -6714,19 +8161,19 @@
           </a:fontRef>
         </p:style>
         <p:txBody>
-          <a:bodyPr rtlCol="0" anchor="ctr" wrap="none"/>
+          <a:bodyPr rtlCol="0" anchor="ctr" tIns="54864"/>
           <a:lstStyle/>
           <a:p>
             <a:pPr algn="ctr">
-              <a:defRPr sz="1100" b="1">
+              <a:defRPr sz="1000" b="1">
                 <a:solidFill>
                   <a:srgbClr val="64748B"/>
                 </a:solidFill>
-                <a:latin typeface="Arial"/>
-              </a:defRPr>
-            </a:pPr>
-            <a:r>
-              <a:t>3. Consumo de API</a:t>
+                <a:latin typeface="Segoe UI"/>
+              </a:defRPr>
+            </a:pPr>
+            <a:r>
+              <a:t>3. CONSUMO DE API</a:t>
             </a:r>
           </a:p>
         </p:txBody>
@@ -6739,8 +8186,8 @@
         </p:nvSpPr>
         <p:spPr>
           <a:xfrm>
-            <a:off x="548640" y="1097280"/>
-            <a:ext cx="11094415" cy="18288"/>
+            <a:off x="731520" y="1051560"/>
+            <a:ext cx="10728655" cy="13716"/>
           </a:xfrm>
           <a:prstGeom prst="rect">
             <a:avLst/>
@@ -6749,9 +8196,7 @@
             <a:srgbClr val="E2E8F0"/>
           </a:solidFill>
           <a:ln>
-            <a:solidFill>
-              <a:srgbClr val="E2E8F0"/>
-            </a:solidFill>
+            <a:noFill/>
           </a:ln>
         </p:spPr>
         <p:style>
@@ -6784,8 +8229,8 @@
         </p:nvSpPr>
         <p:spPr>
           <a:xfrm>
-            <a:off x="548640" y="6263640"/>
-            <a:ext cx="11094415" cy="18288"/>
+            <a:off x="731520" y="6263640"/>
+            <a:ext cx="10728655" cy="13716"/>
           </a:xfrm>
           <a:prstGeom prst="rect">
             <a:avLst/>
@@ -6794,9 +8239,7 @@
             <a:srgbClr val="E2E8F0"/>
           </a:solidFill>
           <a:ln>
-            <a:solidFill>
-              <a:srgbClr val="E2E8F0"/>
-            </a:solidFill>
+            <a:noFill/>
           </a:ln>
         </p:spPr>
         <p:style>
@@ -6829,7 +8272,7 @@
         </p:nvSpPr>
         <p:spPr>
           <a:xfrm>
-            <a:off x="548640" y="6327648"/>
+            <a:off x="731520" y="6327648"/>
             <a:ext cx="5486400" cy="320040"/>
           </a:xfrm>
           <a:prstGeom prst="rect">
@@ -6844,15 +8287,15 @@
           <a:lstStyle/>
           <a:p>
             <a:pPr>
-              <a:defRPr sz="1000">
+              <a:defRPr sz="950">
                 <a:solidFill>
                   <a:srgbClr val="64748B"/>
                 </a:solidFill>
-                <a:latin typeface="Arial"/>
-              </a:defRPr>
-            </a:pPr>
-            <a:r>
-              <a:t>Timbiras Solidária — ADS UEMA 2026 | Polo Timbiras</a:t>
+                <a:latin typeface="Segoe UI"/>
+              </a:defRPr>
+            </a:pPr>
+            <a:r>
+              <a:t>Timbiras Solidária — ADS UEMA 2026 | Polo Universitário de Timbiras</a:t>
             </a:r>
           </a:p>
         </p:txBody>
@@ -6865,8 +8308,8 @@
         </p:nvSpPr>
         <p:spPr>
           <a:xfrm>
-            <a:off x="9144000" y="6327648"/>
-            <a:ext cx="2499055" cy="320040"/>
+            <a:off x="8686800" y="6327648"/>
+            <a:ext cx="2773375" cy="320040"/>
           </a:xfrm>
           <a:prstGeom prst="rect">
             <a:avLst/>
@@ -6880,11 +8323,11 @@
           <a:lstStyle/>
           <a:p>
             <a:pPr algn="r">
-              <a:defRPr sz="1000" b="1">
+              <a:defRPr sz="950" b="1">
                 <a:solidFill>
                   <a:srgbClr val="64748B"/>
                 </a:solidFill>
-                <a:latin typeface="Arial"/>
+                <a:latin typeface="Segoe UI"/>
               </a:defRPr>
             </a:pPr>
             <a:r>
@@ -6895,24 +8338,74 @@
       </p:sp>
       <p:sp>
         <p:nvSpPr>
-          <p:cNvPr id="8" name="Rounded Rectangle 7"/>
+          <p:cNvPr id="8" name="TextBox 7"/>
+          <p:cNvSpPr txBox="1"/>
+          <p:nvPr/>
+        </p:nvSpPr>
+        <p:spPr>
+          <a:xfrm>
+            <a:off x="731520" y="1234440"/>
+            <a:ext cx="5166360" cy="2103120"/>
+          </a:xfrm>
+          <a:prstGeom prst="rect">
+            <a:avLst/>
+          </a:prstGeom>
+          <a:noFill/>
+        </p:spPr>
+        <p:txBody>
+          <a:bodyPr wrap="square" lIns="0" tIns="0" rIns="0" bIns="0">
+            <a:spAutoFit/>
+          </a:bodyPr>
+          <a:lstStyle/>
+          <a:p>
+            <a:pPr>
+              <a:defRPr sz="1550" b="1">
+                <a:solidFill>
+                  <a:srgbClr val="00873E"/>
+                </a:solidFill>
+                <a:latin typeface="Segoe UI"/>
+              </a:defRPr>
+            </a:pPr>
+            <a:r>
+              <a:t>Por Que Usar a API do IBGE?</a:t>
+            </a:r>
+          </a:p>
+          <a:p>
+            <a:br/>
+            <a:pPr>
+              <a:defRPr sz="1200">
+                <a:solidFill>
+                  <a:srgbClr val="64748B"/>
+                </a:solidFill>
+                <a:latin typeface="Segoe UI"/>
+              </a:defRPr>
+            </a:pPr>
+            <a:r>
+              <a:t>Poderíamos ter inventado nomes em um arquivo fixo, mas a disciplina nos desafiou a trabalhar como desenvolvedores profissionais trabalham: consumindo dados reais de servidores públicos em tempo real.</a:t>
+            </a:r>
+          </a:p>
+        </p:txBody>
+      </p:sp>
+      <p:sp>
+        <p:nvSpPr>
+          <p:cNvPr id="9" name="Rounded Rectangle 8"/>
           <p:cNvSpPr/>
           <p:nvPr/>
         </p:nvSpPr>
         <p:spPr>
           <a:xfrm>
-            <a:off x="548640" y="1371600"/>
-            <a:ext cx="5394960" cy="4572000"/>
+            <a:off x="731520" y="3429000"/>
+            <a:ext cx="5166360" cy="1051560"/>
           </a:xfrm>
           <a:prstGeom prst="roundRect">
             <a:avLst/>
           </a:prstGeom>
           <a:solidFill>
-            <a:srgbClr val="F8FAFC"/>
+            <a:srgbClr val="0F172A"/>
           </a:solidFill>
-          <a:ln>
+          <a:ln w="12700">
             <a:solidFill>
-              <a:srgbClr val="E2E8F0"/>
+              <a:srgbClr val="334155"/>
             </a:solidFill>
           </a:ln>
         </p:spPr>
@@ -6931,88 +8424,95 @@
           </a:fontRef>
         </p:style>
         <p:txBody>
-          <a:bodyPr rtlCol="0" anchor="ctr" wrap="square" lIns="274320" tIns="274320" rIns="274320" bIns="274320"/>
-          <a:lstStyle/>
-          <a:p>
-            <a:pPr algn="ctr">
-              <a:defRPr sz="1600" b="1">
-                <a:solidFill>
-                  <a:srgbClr val="00873E"/>
-                </a:solidFill>
-                <a:latin typeface="Arial"/>
-              </a:defRPr>
-            </a:pPr>
-            <a:r>
-              <a:t>Por Que Usar a API do IBGE?</a:t>
-            </a:r>
-          </a:p>
-          <a:p>
-            <a:br/>
-            <a:pPr>
-              <a:defRPr sz="1300">
+          <a:bodyPr rtlCol="0" anchor="ctr"/>
+          <a:lstStyle/>
+          <a:p>
+            <a:pPr algn="ctr"/>
+          </a:p>
+        </p:txBody>
+      </p:sp>
+      <p:sp>
+        <p:nvSpPr>
+          <p:cNvPr id="10" name="TextBox 9"/>
+          <p:cNvSpPr txBox="1"/>
+          <p:nvPr/>
+        </p:nvSpPr>
+        <p:spPr>
+          <a:xfrm>
+            <a:off x="914400" y="3520440"/>
+            <a:ext cx="4800600" cy="868680"/>
+          </a:xfrm>
+          <a:prstGeom prst="rect">
+            <a:avLst/>
+          </a:prstGeom>
+          <a:noFill/>
+        </p:spPr>
+        <p:txBody>
+          <a:bodyPr wrap="square" lIns="0" tIns="0" rIns="0" bIns="0">
+            <a:spAutoFit/>
+          </a:bodyPr>
+          <a:lstStyle/>
+          <a:p>
+            <a:pPr>
+              <a:defRPr sz="1050" b="1">
+                <a:solidFill>
+                  <a:srgbClr val="38BDF8"/>
+                </a:solidFill>
+                <a:latin typeface="Consolas"/>
+              </a:defRPr>
+            </a:pPr>
+            <a:r>
+              <a:t>GET https://servicodados.ibge.gov.br/api/v1/localidades/estados/MA/municipios</a:t>
+            </a:r>
+          </a:p>
+        </p:txBody>
+      </p:sp>
+      <p:sp>
+        <p:nvSpPr>
+          <p:cNvPr id="11" name="TextBox 10"/>
+          <p:cNvSpPr txBox="1"/>
+          <p:nvPr/>
+        </p:nvSpPr>
+        <p:spPr>
+          <a:xfrm>
+            <a:off x="731520" y="4617720"/>
+            <a:ext cx="5166360" cy="1371600"/>
+          </a:xfrm>
+          <a:prstGeom prst="rect">
+            <a:avLst/>
+          </a:prstGeom>
+          <a:noFill/>
+        </p:spPr>
+        <p:txBody>
+          <a:bodyPr wrap="square">
+            <a:spAutoFit/>
+          </a:bodyPr>
+          <a:lstStyle/>
+          <a:p>
+            <a:pPr>
+              <a:defRPr sz="1150">
                 <a:solidFill>
                   <a:srgbClr val="1E293B"/>
                 </a:solidFill>
-                <a:latin typeface="Arial"/>
-              </a:defRPr>
-            </a:pPr>
-            <a:r>
-              <a:t>Poderíamos ter inventado nomes em um arquivo fixo, mas a disciplina nos desafiou a trabalhar como profissionais da web trabalham: consumindo dados reais de servidores públicos em tempo real.</a:t>
-            </a:r>
-          </a:p>
-          <a:p>
-            <a:br/>
-            <a:pPr>
-              <a:defRPr sz="1300" b="1">
-                <a:solidFill>
-                  <a:srgbClr val="0284C7"/>
-                </a:solidFill>
-                <a:latin typeface="Arial"/>
-              </a:defRPr>
-            </a:pPr>
-            <a:r>
-              <a:t>Endpoint Oficial Consultado:</a:t>
-            </a:r>
-          </a:p>
-          <a:p>
-            <a:pPr>
-              <a:defRPr sz="1100" b="1">
-                <a:solidFill>
-                  <a:srgbClr val="0284C7"/>
-                </a:solidFill>
-                <a:latin typeface="Courier New"/>
-              </a:defRPr>
-            </a:pPr>
-            <a:r>
-              <a:t>https://servicodados.ibge.gov.br/api/v1/localidades/estados/MA/municipios</a:t>
-            </a:r>
-          </a:p>
-          <a:p>
-            <a:br/>
-            <a:pPr>
-              <a:defRPr sz="1200">
-                <a:solidFill>
-                  <a:srgbClr val="1E293B"/>
-                </a:solidFill>
-                <a:latin typeface="Arial"/>
-              </a:defRPr>
-            </a:pPr>
-            <a:r>
-              <a:t>Obtivemos com precisão o Código Oficial do IBGE (ID de 7 dígitos), a Microrregião e a Mesorregião de Timbiras e cidades parceiras da Região dos Cocais.</a:t>
-            </a:r>
-          </a:p>
-        </p:txBody>
-      </p:sp>
-      <p:sp>
-        <p:nvSpPr>
-          <p:cNvPr id="9" name="Rounded Rectangle 8"/>
+                <a:latin typeface="Segoe UI"/>
+              </a:defRPr>
+            </a:pPr>
+            <a:r>
+              <a:t>Obtivemos com total precisão o Código Oficial do IBGE (ID de 7 dígitos), a Microrregião e a Mesorregião de Timbiras e cidades vizinhas da Região dos Cocais.</a:t>
+            </a:r>
+          </a:p>
+        </p:txBody>
+      </p:sp>
+      <p:sp>
+        <p:nvSpPr>
+          <p:cNvPr id="12" name="Rounded Rectangle 11"/>
           <p:cNvSpPr/>
           <p:nvPr/>
         </p:nvSpPr>
         <p:spPr>
           <a:xfrm>
-            <a:off x="6217920" y="1371600"/>
-            <a:ext cx="5394960" cy="4572000"/>
+            <a:off x="6263640" y="1234440"/>
+            <a:ext cx="5166360" cy="4800600"/>
           </a:xfrm>
           <a:prstGeom prst="roundRect">
             <a:avLst/>
@@ -7020,9 +8520,9 @@
           <a:solidFill>
             <a:srgbClr val="F0F9FF"/>
           </a:solidFill>
-          <a:ln>
+          <a:ln w="12700">
             <a:solidFill>
-              <a:srgbClr val="0284C7"/>
+              <a:srgbClr val="BAE6FD"/>
             </a:solidFill>
           </a:ln>
         </p:spPr>
@@ -7041,15 +8541,41 @@
           </a:fontRef>
         </p:style>
         <p:txBody>
-          <a:bodyPr rtlCol="0" anchor="ctr" wrap="square" lIns="274320" tIns="274320" rIns="274320" bIns="274320"/>
-          <a:lstStyle/>
-          <a:p>
-            <a:pPr algn="ctr">
-              <a:defRPr sz="1600" b="1">
+          <a:bodyPr rtlCol="0" anchor="ctr"/>
+          <a:lstStyle/>
+          <a:p>
+            <a:pPr algn="ctr"/>
+          </a:p>
+        </p:txBody>
+      </p:sp>
+      <p:sp>
+        <p:nvSpPr>
+          <p:cNvPr id="13" name="TextBox 12"/>
+          <p:cNvSpPr txBox="1"/>
+          <p:nvPr/>
+        </p:nvSpPr>
+        <p:spPr>
+          <a:xfrm>
+            <a:off x="6537960" y="1417320"/>
+            <a:ext cx="4617720" cy="4434840"/>
+          </a:xfrm>
+          <a:prstGeom prst="rect">
+            <a:avLst/>
+          </a:prstGeom>
+          <a:noFill/>
+        </p:spPr>
+        <p:txBody>
+          <a:bodyPr wrap="square" lIns="0" tIns="0" rIns="0" bIns="0">
+            <a:spAutoFit/>
+          </a:bodyPr>
+          <a:lstStyle/>
+          <a:p>
+            <a:pPr>
+              <a:defRPr sz="1550" b="1">
                 <a:solidFill>
                   <a:srgbClr val="0284C7"/>
                 </a:solidFill>
-                <a:latin typeface="Arial"/>
+                <a:latin typeface="Segoe UI"/>
               </a:defRPr>
             </a:pPr>
             <a:r>
@@ -7059,11 +8585,11 @@
           <a:p>
             <a:br/>
             <a:pPr>
-              <a:defRPr sz="1200">
+              <a:defRPr sz="1100">
                 <a:solidFill>
                   <a:srgbClr val="1E293B"/>
                 </a:solidFill>
-                <a:latin typeface="Arial"/>
+                <a:latin typeface="Segoe UI"/>
               </a:defRPr>
             </a:pPr>
             <a:r>
@@ -7071,17 +8597,17 @@
             </a:r>
             <a:br/>
             <a:r>
-              <a:t> Em conexões 3G ou 4G do interior, a resposta pode demorar. Exibimos um spinner amigável com a mensagem: 'Consultando base pública do IBGE...'</a:t>
+              <a:t> Em conexões 3G ou 4G comuns no interior, a requisição pode demorar. Exibimos um spinner amigável com a mensagem: 'Consultando base pública do IBGE...'</a:t>
             </a:r>
           </a:p>
           <a:p>
             <a:br/>
             <a:pPr>
-              <a:defRPr sz="1200">
+              <a:defRPr sz="1100">
                 <a:solidFill>
                   <a:srgbClr val="1E293B"/>
                 </a:solidFill>
-                <a:latin typeface="Arial"/>
+                <a:latin typeface="Segoe UI"/>
               </a:defRPr>
             </a:pPr>
             <a:r>
@@ -7089,17 +8615,17 @@
             </a:r>
             <a:br/>
             <a:r>
-              <a:t> A vida real tem quedas de sinal. Em vez de tela branca ou quebra do sistema, exibimos um aviso explicativo e o botão 'Recarregar API'.</a:t>
+              <a:t> A vida real tem quedas de sinal. Em vez de tela branca ou travamento, exibimos um painel explicativo e o botão 'Recarregar API'.</a:t>
             </a:r>
           </a:p>
           <a:p>
             <a:br/>
             <a:pPr>
-              <a:defRPr sz="1200">
+              <a:defRPr sz="1100">
                 <a:solidFill>
                   <a:srgbClr val="1E293B"/>
                 </a:solidFill>
-                <a:latin typeface="Arial"/>
+                <a:latin typeface="Segoe UI"/>
               </a:defRPr>
             </a:pPr>
             <a:r>
@@ -7138,8 +8664,8 @@
         </p:nvSpPr>
         <p:spPr>
           <a:xfrm>
-            <a:off x="548640" y="365760"/>
-            <a:ext cx="8686800" cy="731520"/>
+            <a:off x="731520" y="365760"/>
+            <a:ext cx="8412480" cy="685800"/>
           </a:xfrm>
           <a:prstGeom prst="rect">
             <a:avLst/>
@@ -7153,11 +8679,11 @@
           <a:lstStyle/>
           <a:p>
             <a:pPr>
-              <a:defRPr sz="2200" b="1">
+              <a:defRPr sz="2100" b="1">
                 <a:solidFill>
                   <a:srgbClr val="00873E"/>
                 </a:solidFill>
-                <a:latin typeface="Arial"/>
+                <a:latin typeface="Segoe UI"/>
               </a:defRPr>
             </a:pPr>
             <a:r>
@@ -7174,8 +8700,8 @@
         </p:nvSpPr>
         <p:spPr>
           <a:xfrm>
-            <a:off x="9326880" y="411480"/>
-            <a:ext cx="2286000" cy="365760"/>
+            <a:off x="9235440" y="411480"/>
+            <a:ext cx="2194560" cy="347472"/>
           </a:xfrm>
           <a:prstGeom prst="roundRect">
             <a:avLst/>
@@ -7183,7 +8709,7 @@
           <a:solidFill>
             <a:srgbClr val="F8FAFC"/>
           </a:solidFill>
-          <a:ln>
+          <a:ln w="12700">
             <a:solidFill>
               <a:srgbClr val="E2E8F0"/>
             </a:solidFill>
@@ -7204,19 +8730,19 @@
           </a:fontRef>
         </p:style>
         <p:txBody>
-          <a:bodyPr rtlCol="0" anchor="ctr" wrap="none"/>
+          <a:bodyPr rtlCol="0" anchor="ctr" tIns="54864"/>
           <a:lstStyle/>
           <a:p>
             <a:pPr algn="ctr">
-              <a:defRPr sz="1100" b="1">
+              <a:defRPr sz="1000" b="1">
                 <a:solidFill>
                   <a:srgbClr val="64748B"/>
                 </a:solidFill>
-                <a:latin typeface="Arial"/>
-              </a:defRPr>
-            </a:pPr>
-            <a:r>
-              <a:t>3. Consumo de API &amp; Leaflet</a:t>
+                <a:latin typeface="Segoe UI"/>
+              </a:defRPr>
+            </a:pPr>
+            <a:r>
+              <a:t>3. CONSUMO DE API &amp; LEAFLET</a:t>
             </a:r>
           </a:p>
         </p:txBody>
@@ -7229,8 +8755,8 @@
         </p:nvSpPr>
         <p:spPr>
           <a:xfrm>
-            <a:off x="548640" y="1097280"/>
-            <a:ext cx="11094415" cy="18288"/>
+            <a:off x="731520" y="1051560"/>
+            <a:ext cx="10728655" cy="13716"/>
           </a:xfrm>
           <a:prstGeom prst="rect">
             <a:avLst/>
@@ -7239,9 +8765,7 @@
             <a:srgbClr val="E2E8F0"/>
           </a:solidFill>
           <a:ln>
-            <a:solidFill>
-              <a:srgbClr val="E2E8F0"/>
-            </a:solidFill>
+            <a:noFill/>
           </a:ln>
         </p:spPr>
         <p:style>
@@ -7274,8 +8798,8 @@
         </p:nvSpPr>
         <p:spPr>
           <a:xfrm>
-            <a:off x="548640" y="6263640"/>
-            <a:ext cx="11094415" cy="18288"/>
+            <a:off x="731520" y="6263640"/>
+            <a:ext cx="10728655" cy="13716"/>
           </a:xfrm>
           <a:prstGeom prst="rect">
             <a:avLst/>
@@ -7284,9 +8808,7 @@
             <a:srgbClr val="E2E8F0"/>
           </a:solidFill>
           <a:ln>
-            <a:solidFill>
-              <a:srgbClr val="E2E8F0"/>
-            </a:solidFill>
+            <a:noFill/>
           </a:ln>
         </p:spPr>
         <p:style>
@@ -7319,7 +8841,7 @@
         </p:nvSpPr>
         <p:spPr>
           <a:xfrm>
-            <a:off x="548640" y="6327648"/>
+            <a:off x="731520" y="6327648"/>
             <a:ext cx="5486400" cy="320040"/>
           </a:xfrm>
           <a:prstGeom prst="rect">
@@ -7334,15 +8856,15 @@
           <a:lstStyle/>
           <a:p>
             <a:pPr>
-              <a:defRPr sz="1000">
+              <a:defRPr sz="950">
                 <a:solidFill>
                   <a:srgbClr val="64748B"/>
                 </a:solidFill>
-                <a:latin typeface="Arial"/>
-              </a:defRPr>
-            </a:pPr>
-            <a:r>
-              <a:t>Timbiras Solidária — ADS UEMA 2026 | Polo Timbiras</a:t>
+                <a:latin typeface="Segoe UI"/>
+              </a:defRPr>
+            </a:pPr>
+            <a:r>
+              <a:t>Timbiras Solidária — ADS UEMA 2026 | Polo Universitário de Timbiras</a:t>
             </a:r>
           </a:p>
         </p:txBody>
@@ -7355,8 +8877,8 @@
         </p:nvSpPr>
         <p:spPr>
           <a:xfrm>
-            <a:off x="9144000" y="6327648"/>
-            <a:ext cx="2499055" cy="320040"/>
+            <a:off x="8686800" y="6327648"/>
+            <a:ext cx="2773375" cy="320040"/>
           </a:xfrm>
           <a:prstGeom prst="rect">
             <a:avLst/>
@@ -7370,11 +8892,11 @@
           <a:lstStyle/>
           <a:p>
             <a:pPr algn="r">
-              <a:defRPr sz="1000" b="1">
+              <a:defRPr sz="950" b="1">
                 <a:solidFill>
                   <a:srgbClr val="64748B"/>
                 </a:solidFill>
-                <a:latin typeface="Arial"/>
+                <a:latin typeface="Segoe UI"/>
               </a:defRPr>
             </a:pPr>
             <a:r>
@@ -7391,8 +8913,8 @@
         </p:nvSpPr>
         <p:spPr>
           <a:xfrm>
-            <a:off x="548640" y="1371600"/>
-            <a:ext cx="5394960" cy="4572000"/>
+            <a:off x="731520" y="1234440"/>
+            <a:ext cx="5166360" cy="4800600"/>
           </a:xfrm>
           <a:prstGeom prst="roundRect">
             <a:avLst/>
@@ -7400,7 +8922,7 @@
           <a:solidFill>
             <a:srgbClr val="0F172A"/>
           </a:solidFill>
-          <a:ln>
+          <a:ln w="12700">
             <a:solidFill>
               <a:srgbClr val="334155"/>
             </a:solidFill>
@@ -7421,15 +8943,41 @@
           </a:fontRef>
         </p:style>
         <p:txBody>
-          <a:bodyPr rtlCol="0" anchor="ctr" wrap="square" lIns="274320" tIns="274320" rIns="274320" bIns="274320"/>
-          <a:lstStyle/>
-          <a:p>
-            <a:pPr algn="ctr">
-              <a:defRPr sz="1600" b="1">
+          <a:bodyPr rtlCol="0" anchor="ctr"/>
+          <a:lstStyle/>
+          <a:p>
+            <a:pPr algn="ctr"/>
+          </a:p>
+        </p:txBody>
+      </p:sp>
+      <p:sp>
+        <p:nvSpPr>
+          <p:cNvPr id="9" name="TextBox 8"/>
+          <p:cNvSpPr txBox="1"/>
+          <p:nvPr/>
+        </p:nvSpPr>
+        <p:spPr>
+          <a:xfrm>
+            <a:off x="960120" y="1417320"/>
+            <a:ext cx="4709160" cy="4434840"/>
+          </a:xfrm>
+          <a:prstGeom prst="rect">
+            <a:avLst/>
+          </a:prstGeom>
+          <a:noFill/>
+        </p:spPr>
+        <p:txBody>
+          <a:bodyPr wrap="square" lIns="0" tIns="0" rIns="0" bIns="0">
+            <a:spAutoFit/>
+          </a:bodyPr>
+          <a:lstStyle/>
+          <a:p>
+            <a:pPr>
+              <a:defRPr sz="1400" b="1">
                 <a:solidFill>
                   <a:srgbClr val="38BDF8"/>
                 </a:solidFill>
-                <a:latin typeface="Arial"/>
+                <a:latin typeface="Segoe UI"/>
               </a:defRPr>
             </a:pPr>
             <a:r>
@@ -7439,11 +8987,11 @@
           <a:p>
             <a:br/>
             <a:pPr>
-              <a:defRPr sz="1100">
+              <a:defRPr sz="1050">
                 <a:solidFill>
                   <a:srgbClr val="E2E8F0"/>
                 </a:solidFill>
-                <a:latin typeface="Courier New"/>
+                <a:latin typeface="Consolas"/>
               </a:defRPr>
             </a:pPr>
             <a:r>
@@ -7460,7 +9008,7 @@
             </a:r>
             <a:br/>
             <a:r>
-              <a:t>    signal: controlador.signal // Previne memory leak</a:t>
+              <a:t>    signal: controlador.signal // Evita memory leak</a:t>
             </a:r>
             <a:br/>
             <a:r>
@@ -7472,7 +9020,7 @@
             </a:r>
             <a:br/>
             <a:r>
-              <a:t>      if (!res.ok) throw new Error('Falha na API');</a:t>
+              <a:t>      if (!res.ok) throw new Error('Falha na resposta');</a:t>
             </a:r>
             <a:br/>
             <a:r>
@@ -7520,24 +9068,24 @@
       </p:sp>
       <p:sp>
         <p:nvSpPr>
-          <p:cNvPr id="9" name="Rounded Rectangle 8"/>
+          <p:cNvPr id="10" name="Rounded Rectangle 9"/>
           <p:cNvSpPr/>
           <p:nvPr/>
         </p:nvSpPr>
         <p:spPr>
           <a:xfrm>
-            <a:off x="6217920" y="1371600"/>
-            <a:ext cx="5394960" cy="4572000"/>
+            <a:off x="6263640" y="1234440"/>
+            <a:ext cx="5166360" cy="2286000"/>
           </a:xfrm>
           <a:prstGeom prst="roundRect">
             <a:avLst/>
           </a:prstGeom>
           <a:solidFill>
-            <a:srgbClr val="F0FDF4"/>
+            <a:srgbClr val="F8FAFC"/>
           </a:solidFill>
-          <a:ln>
+          <a:ln w="12700">
             <a:solidFill>
-              <a:srgbClr val="10B981"/>
+              <a:srgbClr val="E2E8F0"/>
             </a:solidFill>
           </a:ln>
         </p:spPr>
@@ -7556,73 +9104,240 @@
           </a:fontRef>
         </p:style>
         <p:txBody>
-          <a:bodyPr rtlCol="0" anchor="ctr" wrap="square" lIns="274320" tIns="274320" rIns="274320" bIns="274320"/>
-          <a:lstStyle/>
-          <a:p>
-            <a:pPr algn="ctr">
-              <a:defRPr sz="1600" b="1">
+          <a:bodyPr rtlCol="0" anchor="ctr"/>
+          <a:lstStyle/>
+          <a:p>
+            <a:pPr algn="ctr"/>
+          </a:p>
+        </p:txBody>
+      </p:sp>
+      <p:sp>
+        <p:nvSpPr>
+          <p:cNvPr id="11" name="Rectangle 10"/>
+          <p:cNvSpPr/>
+          <p:nvPr/>
+        </p:nvSpPr>
+        <p:spPr>
+          <a:xfrm>
+            <a:off x="6263640" y="1234440"/>
+            <a:ext cx="73152" cy="2286000"/>
+          </a:xfrm>
+          <a:prstGeom prst="rect">
+            <a:avLst/>
+          </a:prstGeom>
+          <a:solidFill>
+            <a:srgbClr val="00873E"/>
+          </a:solidFill>
+          <a:ln>
+            <a:noFill/>
+          </a:ln>
+        </p:spPr>
+        <p:style>
+          <a:lnRef idx="1">
+            <a:schemeClr val="accent1"/>
+          </a:lnRef>
+          <a:fillRef idx="3">
+            <a:schemeClr val="accent1"/>
+          </a:fillRef>
+          <a:effectRef idx="2">
+            <a:schemeClr val="accent1"/>
+          </a:effectRef>
+          <a:fontRef idx="minor">
+            <a:schemeClr val="lt1"/>
+          </a:fontRef>
+        </p:style>
+        <p:txBody>
+          <a:bodyPr rtlCol="0" anchor="ctr"/>
+          <a:lstStyle/>
+          <a:p>
+            <a:pPr algn="ctr"/>
+          </a:p>
+        </p:txBody>
+      </p:sp>
+      <p:sp>
+        <p:nvSpPr>
+          <p:cNvPr id="12" name="TextBox 11"/>
+          <p:cNvSpPr txBox="1"/>
+          <p:nvPr/>
+        </p:nvSpPr>
+        <p:spPr>
+          <a:xfrm>
+            <a:off x="6537960" y="1417320"/>
+            <a:ext cx="4663440" cy="1920240"/>
+          </a:xfrm>
+          <a:prstGeom prst="rect">
+            <a:avLst/>
+          </a:prstGeom>
+          <a:noFill/>
+        </p:spPr>
+        <p:txBody>
+          <a:bodyPr wrap="square" lIns="0" tIns="0" rIns="0" bIns="0">
+            <a:spAutoFit/>
+          </a:bodyPr>
+          <a:lstStyle/>
+          <a:p>
+            <a:pPr>
+              <a:defRPr sz="1400" b="1">
                 <a:solidFill>
                   <a:srgbClr val="00873E"/>
                 </a:solidFill>
-                <a:latin typeface="Arial"/>
-              </a:defRPr>
-            </a:pPr>
-            <a:r>
-              <a:t>Cruzando Dados do IBGE com o Mapa Leaflet</a:t>
+                <a:latin typeface="Segoe UI"/>
+              </a:defRPr>
+            </a:pPr>
+            <a:r>
+              <a:t>O Voo da Esperança (mapa.flyTo)</a:t>
             </a:r>
           </a:p>
           <a:p>
             <a:br/>
             <a:pPr>
+              <a:defRPr sz="1150">
+                <a:solidFill>
+                  <a:srgbClr val="1E293B"/>
+                </a:solidFill>
+                <a:latin typeface="Segoe UI"/>
+              </a:defRPr>
+            </a:pPr>
+            <a:r>
+              <a:t>Usamos o hook useMemo para cruzar a lista oficial do IBGE com as coordenadas geográficas de cada cidade parceira. Ao clicar no card de Coroatá ou Codó, o mapa faz uma transição suave de câmera até a cidade, com marcador e detalhes da distância de Timbiras.</a:t>
+            </a:r>
+          </a:p>
+        </p:txBody>
+      </p:sp>
+      <p:sp>
+        <p:nvSpPr>
+          <p:cNvPr id="13" name="Rounded Rectangle 12"/>
+          <p:cNvSpPr/>
+          <p:nvPr/>
+        </p:nvSpPr>
+        <p:spPr>
+          <a:xfrm>
+            <a:off x="6263640" y="3749039"/>
+            <a:ext cx="5166360" cy="2286000"/>
+          </a:xfrm>
+          <a:prstGeom prst="roundRect">
+            <a:avLst/>
+          </a:prstGeom>
+          <a:solidFill>
+            <a:srgbClr val="FEFCE8"/>
+          </a:solidFill>
+          <a:ln w="12700">
+            <a:solidFill>
+              <a:srgbClr val="FEF08A"/>
+            </a:solidFill>
+          </a:ln>
+        </p:spPr>
+        <p:style>
+          <a:lnRef idx="1">
+            <a:schemeClr val="accent1"/>
+          </a:lnRef>
+          <a:fillRef idx="3">
+            <a:schemeClr val="accent1"/>
+          </a:fillRef>
+          <a:effectRef idx="2">
+            <a:schemeClr val="accent1"/>
+          </a:effectRef>
+          <a:fontRef idx="minor">
+            <a:schemeClr val="lt1"/>
+          </a:fontRef>
+        </p:style>
+        <p:txBody>
+          <a:bodyPr rtlCol="0" anchor="ctr"/>
+          <a:lstStyle/>
+          <a:p>
+            <a:pPr algn="ctr"/>
+          </a:p>
+        </p:txBody>
+      </p:sp>
+      <p:sp>
+        <p:nvSpPr>
+          <p:cNvPr id="14" name="Rectangle 13"/>
+          <p:cNvSpPr/>
+          <p:nvPr/>
+        </p:nvSpPr>
+        <p:spPr>
+          <a:xfrm>
+            <a:off x="6263640" y="3749039"/>
+            <a:ext cx="73152" cy="2286000"/>
+          </a:xfrm>
+          <a:prstGeom prst="rect">
+            <a:avLst/>
+          </a:prstGeom>
+          <a:solidFill>
+            <a:srgbClr val="F59E0B"/>
+          </a:solidFill>
+          <a:ln>
+            <a:noFill/>
+          </a:ln>
+        </p:spPr>
+        <p:style>
+          <a:lnRef idx="1">
+            <a:schemeClr val="accent1"/>
+          </a:lnRef>
+          <a:fillRef idx="3">
+            <a:schemeClr val="accent1"/>
+          </a:fillRef>
+          <a:effectRef idx="2">
+            <a:schemeClr val="accent1"/>
+          </a:effectRef>
+          <a:fontRef idx="minor">
+            <a:schemeClr val="lt1"/>
+          </a:fontRef>
+        </p:style>
+        <p:txBody>
+          <a:bodyPr rtlCol="0" anchor="ctr"/>
+          <a:lstStyle/>
+          <a:p>
+            <a:pPr algn="ctr"/>
+          </a:p>
+        </p:txBody>
+      </p:sp>
+      <p:sp>
+        <p:nvSpPr>
+          <p:cNvPr id="15" name="TextBox 14"/>
+          <p:cNvSpPr txBox="1"/>
+          <p:nvPr/>
+        </p:nvSpPr>
+        <p:spPr>
+          <a:xfrm>
+            <a:off x="6537960" y="3931920"/>
+            <a:ext cx="4663440" cy="1920240"/>
+          </a:xfrm>
+          <a:prstGeom prst="rect">
+            <a:avLst/>
+          </a:prstGeom>
+          <a:noFill/>
+        </p:spPr>
+        <p:txBody>
+          <a:bodyPr wrap="square" lIns="0" tIns="0" rIns="0" bIns="0">
+            <a:spAutoFit/>
+          </a:bodyPr>
+          <a:lstStyle/>
+          <a:p>
+            <a:pPr>
               <a:defRPr sz="1400" b="1">
                 <a:solidFill>
-                  <a:srgbClr val="00873E"/>
-                </a:solidFill>
-                <a:latin typeface="Arial"/>
-              </a:defRPr>
-            </a:pPr>
-            <a:r>
-              <a:t>O Voo da Esperança (mapa.flyTo):</a:t>
-            </a:r>
-          </a:p>
-          <a:p>
-            <a:pPr>
-              <a:defRPr sz="1200">
+                  <a:srgbClr val="B45309"/>
+                </a:solidFill>
+                <a:latin typeface="Segoe UI"/>
+              </a:defRPr>
+            </a:pPr>
+            <a:r>
+              <a:t>Busca Ampla por Qualquer Cidade</a:t>
+            </a:r>
+          </a:p>
+          <a:p>
+            <a:br/>
+            <a:pPr>
+              <a:defRPr sz="1150">
                 <a:solidFill>
                   <a:srgbClr val="1E293B"/>
                 </a:solidFill>
-                <a:latin typeface="Arial"/>
-              </a:defRPr>
-            </a:pPr>
-            <a:r>
-              <a:t>Usamos o hook useMemo para cruzar a lista oficial do IBGE com as coordenadas geográficas de cada cidade parceira. Quando o morador clica no card de Coroatá ou Codó, o mapa faz uma transição suave de câmera até a cidade, com marcador e detalhes da distância rodoviária até Timbiras.</a:t>
-            </a:r>
-          </a:p>
-          <a:p>
-            <a:br/>
-            <a:pPr>
-              <a:defRPr sz="1400" b="1">
-                <a:solidFill>
-                  <a:srgbClr val="00873E"/>
-                </a:solidFill>
-                <a:latin typeface="Arial"/>
-              </a:defRPr>
-            </a:pPr>
-            <a:r>
-              <a:t>Busca Ampla por Qualquer Cidade:</a:t>
-            </a:r>
-          </a:p>
-          <a:p>
-            <a:pPr>
-              <a:defRPr sz="1200">
-                <a:solidFill>
-                  <a:srgbClr val="1E293B"/>
-                </a:solidFill>
-                <a:latin typeface="Arial"/>
-              </a:defRPr>
-            </a:pPr>
-            <a:r>
-              <a:t>Além das cidades dos Cocais, o usuário pode selecionar qualquer município do Maranhão no dropdown dinâmico para planejar novos polos solidários.</a:t>
+                <a:latin typeface="Segoe UI"/>
+              </a:defRPr>
+            </a:pPr>
+            <a:r>
+              <a:t>Além das cidades dos Cocais, o usuário pode selecionar qualquer município do Maranhão no dropdown dinâmico para localizar e planejar novos polos de expansão solidária.</a:t>
             </a:r>
           </a:p>
         </p:txBody>
@@ -7653,8 +9368,8 @@
         </p:nvSpPr>
         <p:spPr>
           <a:xfrm>
-            <a:off x="548640" y="365760"/>
-            <a:ext cx="8686800" cy="731520"/>
+            <a:off x="731520" y="365760"/>
+            <a:ext cx="8412480" cy="685800"/>
           </a:xfrm>
           <a:prstGeom prst="rect">
             <a:avLst/>
@@ -7668,11 +9383,11 @@
           <a:lstStyle/>
           <a:p>
             <a:pPr>
-              <a:defRPr sz="2200" b="1">
+              <a:defRPr sz="2100" b="1">
                 <a:solidFill>
                   <a:srgbClr val="00873E"/>
                 </a:solidFill>
-                <a:latin typeface="Arial"/>
+                <a:latin typeface="Segoe UI"/>
               </a:defRPr>
             </a:pPr>
             <a:r>
@@ -7689,8 +9404,8 @@
         </p:nvSpPr>
         <p:spPr>
           <a:xfrm>
-            <a:off x="9326880" y="411480"/>
-            <a:ext cx="2286000" cy="365760"/>
+            <a:off x="9235440" y="411480"/>
+            <a:ext cx="2194560" cy="347472"/>
           </a:xfrm>
           <a:prstGeom prst="roundRect">
             <a:avLst/>
@@ -7698,7 +9413,7 @@
           <a:solidFill>
             <a:srgbClr val="F8FAFC"/>
           </a:solidFill>
-          <a:ln>
+          <a:ln w="12700">
             <a:solidFill>
               <a:srgbClr val="E2E8F0"/>
             </a:solidFill>
@@ -7719,19 +9434,19 @@
           </a:fontRef>
         </p:style>
         <p:txBody>
-          <a:bodyPr rtlCol="0" anchor="ctr" wrap="none"/>
+          <a:bodyPr rtlCol="0" anchor="ctr" tIns="54864"/>
           <a:lstStyle/>
           <a:p>
             <a:pPr algn="ctr">
-              <a:defRPr sz="1100" b="1">
+              <a:defRPr sz="1000" b="1">
                 <a:solidFill>
                   <a:srgbClr val="64748B"/>
                 </a:solidFill>
-                <a:latin typeface="Arial"/>
-              </a:defRPr>
-            </a:pPr>
-            <a:r>
-              <a:t>4. Framework &amp; SPA</a:t>
+                <a:latin typeface="Segoe UI"/>
+              </a:defRPr>
+            </a:pPr>
+            <a:r>
+              <a:t>4. FRAMEWORK &amp; SPA</a:t>
             </a:r>
           </a:p>
         </p:txBody>
@@ -7744,8 +9459,8 @@
         </p:nvSpPr>
         <p:spPr>
           <a:xfrm>
-            <a:off x="548640" y="1097280"/>
-            <a:ext cx="11094415" cy="18288"/>
+            <a:off x="731520" y="1051560"/>
+            <a:ext cx="10728655" cy="13716"/>
           </a:xfrm>
           <a:prstGeom prst="rect">
             <a:avLst/>
@@ -7754,9 +9469,7 @@
             <a:srgbClr val="E2E8F0"/>
           </a:solidFill>
           <a:ln>
-            <a:solidFill>
-              <a:srgbClr val="E2E8F0"/>
-            </a:solidFill>
+            <a:noFill/>
           </a:ln>
         </p:spPr>
         <p:style>
@@ -7789,8 +9502,8 @@
         </p:nvSpPr>
         <p:spPr>
           <a:xfrm>
-            <a:off x="548640" y="6263640"/>
-            <a:ext cx="11094415" cy="18288"/>
+            <a:off x="731520" y="6263640"/>
+            <a:ext cx="10728655" cy="13716"/>
           </a:xfrm>
           <a:prstGeom prst="rect">
             <a:avLst/>
@@ -7799,9 +9512,7 @@
             <a:srgbClr val="E2E8F0"/>
           </a:solidFill>
           <a:ln>
-            <a:solidFill>
-              <a:srgbClr val="E2E8F0"/>
-            </a:solidFill>
+            <a:noFill/>
           </a:ln>
         </p:spPr>
         <p:style>
@@ -7834,7 +9545,7 @@
         </p:nvSpPr>
         <p:spPr>
           <a:xfrm>
-            <a:off x="548640" y="6327648"/>
+            <a:off x="731520" y="6327648"/>
             <a:ext cx="5486400" cy="320040"/>
           </a:xfrm>
           <a:prstGeom prst="rect">
@@ -7849,15 +9560,15 @@
           <a:lstStyle/>
           <a:p>
             <a:pPr>
-              <a:defRPr sz="1000">
+              <a:defRPr sz="950">
                 <a:solidFill>
                   <a:srgbClr val="64748B"/>
                 </a:solidFill>
-                <a:latin typeface="Arial"/>
-              </a:defRPr>
-            </a:pPr>
-            <a:r>
-              <a:t>Timbiras Solidária — ADS UEMA 2026 | Polo Timbiras</a:t>
+                <a:latin typeface="Segoe UI"/>
+              </a:defRPr>
+            </a:pPr>
+            <a:r>
+              <a:t>Timbiras Solidária — ADS UEMA 2026 | Polo Universitário de Timbiras</a:t>
             </a:r>
           </a:p>
         </p:txBody>
@@ -7870,8 +9581,8 @@
         </p:nvSpPr>
         <p:spPr>
           <a:xfrm>
-            <a:off x="9144000" y="6327648"/>
-            <a:ext cx="2499055" cy="320040"/>
+            <a:off x="8686800" y="6327648"/>
+            <a:ext cx="2773375" cy="320040"/>
           </a:xfrm>
           <a:prstGeom prst="rect">
             <a:avLst/>
@@ -7885,11 +9596,11 @@
           <a:lstStyle/>
           <a:p>
             <a:pPr algn="r">
-              <a:defRPr sz="1000" b="1">
+              <a:defRPr sz="950" b="1">
                 <a:solidFill>
                   <a:srgbClr val="64748B"/>
                 </a:solidFill>
-                <a:latin typeface="Arial"/>
+                <a:latin typeface="Segoe UI"/>
               </a:defRPr>
             </a:pPr>
             <a:r>
@@ -7906,8 +9617,8 @@
         </p:nvSpPr>
         <p:spPr>
           <a:xfrm>
-            <a:off x="548640" y="1371600"/>
-            <a:ext cx="4754880" cy="4572000"/>
+            <a:off x="731520" y="1234440"/>
+            <a:ext cx="4572000" cy="4800600"/>
           </a:xfrm>
           <a:prstGeom prst="roundRect">
             <a:avLst/>
@@ -7915,7 +9626,7 @@
           <a:solidFill>
             <a:srgbClr val="F8FAFC"/>
           </a:solidFill>
-          <a:ln>
+          <a:ln w="12700">
             <a:solidFill>
               <a:srgbClr val="E2E8F0"/>
             </a:solidFill>
@@ -7936,15 +9647,41 @@
           </a:fontRef>
         </p:style>
         <p:txBody>
-          <a:bodyPr rtlCol="0" anchor="ctr" wrap="square" lIns="274320" tIns="274320" rIns="274320" bIns="274320"/>
-          <a:lstStyle/>
-          <a:p>
-            <a:pPr algn="ctr">
-              <a:defRPr sz="1500" b="1">
+          <a:bodyPr rtlCol="0" anchor="ctr"/>
+          <a:lstStyle/>
+          <a:p>
+            <a:pPr algn="ctr"/>
+          </a:p>
+        </p:txBody>
+      </p:sp>
+      <p:sp>
+        <p:nvSpPr>
+          <p:cNvPr id="9" name="TextBox 8"/>
+          <p:cNvSpPr txBox="1"/>
+          <p:nvPr/>
+        </p:nvSpPr>
+        <p:spPr>
+          <a:xfrm>
+            <a:off x="960120" y="1417320"/>
+            <a:ext cx="4114800" cy="4434840"/>
+          </a:xfrm>
+          <a:prstGeom prst="rect">
+            <a:avLst/>
+          </a:prstGeom>
+          <a:noFill/>
+        </p:spPr>
+        <p:txBody>
+          <a:bodyPr wrap="square" lIns="0" tIns="0" rIns="0" bIns="0">
+            <a:spAutoFit/>
+          </a:bodyPr>
+          <a:lstStyle/>
+          <a:p>
+            <a:pPr>
+              <a:defRPr sz="1450" b="1">
                 <a:solidFill>
                   <a:srgbClr val="00873E"/>
                 </a:solidFill>
-                <a:latin typeface="Arial"/>
+                <a:latin typeface="Segoe UI"/>
               </a:defRPr>
             </a:pPr>
             <a:r>
@@ -7954,11 +9691,11 @@
           <a:p>
             <a:br/>
             <a:pPr>
-              <a:defRPr sz="1100">
+              <a:defRPr sz="1000">
                 <a:solidFill>
                   <a:srgbClr val="1E293B"/>
                 </a:solidFill>
-                <a:latin typeface="Courier New"/>
+                <a:latin typeface="Consolas"/>
               </a:defRPr>
             </a:pPr>
             <a:r>
@@ -7978,7 +9715,7 @@
             </a:r>
             <a:br/>
             <a:r>
-              <a:t>├── SobreCompleto.jsx (História &amp; Ação)</a:t>
+              <a:t>├── SobreCompleto.jsx (História)</a:t>
             </a:r>
             <a:br/>
             <a:r>
@@ -8006,31 +9743,31 @@
             </a:r>
             <a:br/>
             <a:r>
-              <a:t>└── Footer.jsx (Créditos &amp; Acessos)</a:t>
-            </a:r>
-          </a:p>
-        </p:txBody>
-      </p:sp>
-      <p:sp>
-        <p:nvSpPr>
-          <p:cNvPr id="9" name="Rounded Rectangle 8"/>
+              <a:t>└── Footer.jsx (Créditos &amp; Links)</a:t>
+            </a:r>
+          </a:p>
+        </p:txBody>
+      </p:sp>
+      <p:sp>
+        <p:nvSpPr>
+          <p:cNvPr id="10" name="Rounded Rectangle 9"/>
           <p:cNvSpPr/>
           <p:nvPr/>
         </p:nvSpPr>
         <p:spPr>
           <a:xfrm>
-            <a:off x="5577840" y="1371600"/>
-            <a:ext cx="6035040" cy="4572000"/>
+            <a:off x="5623560" y="1234440"/>
+            <a:ext cx="5836615" cy="2011680"/>
           </a:xfrm>
           <a:prstGeom prst="roundRect">
             <a:avLst/>
           </a:prstGeom>
           <a:solidFill>
-            <a:srgbClr val="F0FDF4"/>
+            <a:srgbClr val="F8FAFC"/>
           </a:solidFill>
-          <a:ln>
+          <a:ln w="12700">
             <a:solidFill>
-              <a:srgbClr val="10B981"/>
+              <a:srgbClr val="E2E8F0"/>
             </a:solidFill>
           </a:ln>
         </p:spPr>
@@ -8049,112 +9786,235 @@
           </a:fontRef>
         </p:style>
         <p:txBody>
-          <a:bodyPr rtlCol="0" anchor="ctr" wrap="square" lIns="274320" tIns="274320" rIns="274320" bIns="274320"/>
-          <a:lstStyle/>
-          <a:p>
-            <a:pPr algn="ctr">
-              <a:defRPr sz="1600" b="1">
+          <a:bodyPr rtlCol="0" anchor="ctr"/>
+          <a:lstStyle/>
+          <a:p>
+            <a:pPr algn="ctr"/>
+          </a:p>
+        </p:txBody>
+      </p:sp>
+      <p:sp>
+        <p:nvSpPr>
+          <p:cNvPr id="11" name="Rectangle 10"/>
+          <p:cNvSpPr/>
+          <p:nvPr/>
+        </p:nvSpPr>
+        <p:spPr>
+          <a:xfrm>
+            <a:off x="5623560" y="1234440"/>
+            <a:ext cx="73152" cy="2011680"/>
+          </a:xfrm>
+          <a:prstGeom prst="rect">
+            <a:avLst/>
+          </a:prstGeom>
+          <a:solidFill>
+            <a:srgbClr val="00873E"/>
+          </a:solidFill>
+          <a:ln>
+            <a:noFill/>
+          </a:ln>
+        </p:spPr>
+        <p:style>
+          <a:lnRef idx="1">
+            <a:schemeClr val="accent1"/>
+          </a:lnRef>
+          <a:fillRef idx="3">
+            <a:schemeClr val="accent1"/>
+          </a:fillRef>
+          <a:effectRef idx="2">
+            <a:schemeClr val="accent1"/>
+          </a:effectRef>
+          <a:fontRef idx="minor">
+            <a:schemeClr val="lt1"/>
+          </a:fontRef>
+        </p:style>
+        <p:txBody>
+          <a:bodyPr rtlCol="0" anchor="ctr"/>
+          <a:lstStyle/>
+          <a:p>
+            <a:pPr algn="ctr"/>
+          </a:p>
+        </p:txBody>
+      </p:sp>
+      <p:sp>
+        <p:nvSpPr>
+          <p:cNvPr id="12" name="TextBox 11"/>
+          <p:cNvSpPr txBox="1"/>
+          <p:nvPr/>
+        </p:nvSpPr>
+        <p:spPr>
+          <a:xfrm>
+            <a:off x="5897880" y="1371600"/>
+            <a:ext cx="5303520" cy="1737360"/>
+          </a:xfrm>
+          <a:prstGeom prst="rect">
+            <a:avLst/>
+          </a:prstGeom>
+          <a:noFill/>
+        </p:spPr>
+        <p:txBody>
+          <a:bodyPr wrap="square" lIns="0" tIns="0" rIns="0" bIns="0">
+            <a:spAutoFit/>
+          </a:bodyPr>
+          <a:lstStyle/>
+          <a:p>
+            <a:pPr>
+              <a:defRPr sz="1400" b="1">
                 <a:solidFill>
                   <a:srgbClr val="00873E"/>
                 </a:solidFill>
-                <a:latin typeface="Arial"/>
-              </a:defRPr>
-            </a:pPr>
-            <a:r>
-              <a:t>Navegação SPA &amp; Hooks Utilizados</a:t>
+                <a:latin typeface="Segoe UI"/>
+              </a:defRPr>
+            </a:pPr>
+            <a:r>
+              <a:t>Sem Aquele 'Piscar Branco' do Navegador</a:t>
             </a:r>
           </a:p>
           <a:p>
             <a:br/>
             <a:pPr>
+              <a:defRPr sz="1150">
+                <a:solidFill>
+                  <a:srgbClr val="1E293B"/>
+                </a:solidFill>
+                <a:latin typeface="Segoe UI"/>
+              </a:defRPr>
+            </a:pPr>
+            <a:r>
+              <a:t>Como uma Single Page Application (SPA), a navegação ocorre por rolagem suave (smooth scroll), mantendo a música tocando sem cortes e os dados preenchidos no formulário preservados.</a:t>
+            </a:r>
+          </a:p>
+        </p:txBody>
+      </p:sp>
+      <p:sp>
+        <p:nvSpPr>
+          <p:cNvPr id="13" name="Rounded Rectangle 12"/>
+          <p:cNvSpPr/>
+          <p:nvPr/>
+        </p:nvSpPr>
+        <p:spPr>
+          <a:xfrm>
+            <a:off x="5623560" y="3474720"/>
+            <a:ext cx="5836615" cy="2560320"/>
+          </a:xfrm>
+          <a:prstGeom prst="roundRect">
+            <a:avLst/>
+          </a:prstGeom>
+          <a:solidFill>
+            <a:srgbClr val="F0FDF4"/>
+          </a:solidFill>
+          <a:ln w="12700">
+            <a:solidFill>
+              <a:srgbClr val="BBF7D0"/>
+            </a:solidFill>
+          </a:ln>
+        </p:spPr>
+        <p:style>
+          <a:lnRef idx="1">
+            <a:schemeClr val="accent1"/>
+          </a:lnRef>
+          <a:fillRef idx="3">
+            <a:schemeClr val="accent1"/>
+          </a:fillRef>
+          <a:effectRef idx="2">
+            <a:schemeClr val="accent1"/>
+          </a:effectRef>
+          <a:fontRef idx="minor">
+            <a:schemeClr val="lt1"/>
+          </a:fontRef>
+        </p:style>
+        <p:txBody>
+          <a:bodyPr rtlCol="0" anchor="ctr"/>
+          <a:lstStyle/>
+          <a:p>
+            <a:pPr algn="ctr"/>
+          </a:p>
+        </p:txBody>
+      </p:sp>
+      <p:sp>
+        <p:nvSpPr>
+          <p:cNvPr id="14" name="TextBox 13"/>
+          <p:cNvSpPr txBox="1"/>
+          <p:nvPr/>
+        </p:nvSpPr>
+        <p:spPr>
+          <a:xfrm>
+            <a:off x="5897880" y="3611880"/>
+            <a:ext cx="5303520" cy="2286000"/>
+          </a:xfrm>
+          <a:prstGeom prst="rect">
+            <a:avLst/>
+          </a:prstGeom>
+          <a:noFill/>
+        </p:spPr>
+        <p:txBody>
+          <a:bodyPr wrap="square" lIns="0" tIns="0" rIns="0" bIns="0">
+            <a:spAutoFit/>
+          </a:bodyPr>
+          <a:lstStyle/>
+          <a:p>
+            <a:pPr>
               <a:defRPr sz="1300" b="1">
                 <a:solidFill>
                   <a:srgbClr val="00873E"/>
                 </a:solidFill>
-                <a:latin typeface="Arial"/>
-              </a:defRPr>
-            </a:pPr>
-            <a:r>
-              <a:t>Sem Aquele 'Piscar Branco' do Navegador:</a:t>
-            </a:r>
-          </a:p>
-          <a:p>
-            <a:pPr>
-              <a:defRPr sz="1200">
+                <a:latin typeface="Segoe UI"/>
+              </a:defRPr>
+            </a:pPr>
+            <a:r>
+              <a:t>Hooks do React que Deram Vida à Aplicação:</a:t>
+            </a:r>
+          </a:p>
+          <a:p>
+            <a:pPr>
+              <a:defRPr sz="1100">
                 <a:solidFill>
                   <a:srgbClr val="1E293B"/>
                 </a:solidFill>
-                <a:latin typeface="Arial"/>
-              </a:defRPr>
-            </a:pPr>
-            <a:r>
-              <a:t>Em sites antigos, cada clique recarregava toda a página, perdendo os formulários e parando a música. Como uma Single Page Application (SPA), a navegação ocorre por rolagem suave (smooth scroll), mantendo o áudio tocando e os dados preservados.</a:t>
-            </a:r>
-          </a:p>
-          <a:p>
-            <a:br/>
-            <a:pPr>
-              <a:defRPr sz="1300" b="1">
-                <a:solidFill>
-                  <a:srgbClr val="00873E"/>
-                </a:solidFill>
-                <a:latin typeface="Arial"/>
-              </a:defRPr>
-            </a:pPr>
-            <a:r>
-              <a:t>Hooks que Deram Vida à Aplicação:</a:t>
-            </a:r>
-          </a:p>
-          <a:p>
-            <a:pPr>
-              <a:defRPr sz="1200">
+                <a:latin typeface="Segoe UI"/>
+              </a:defRPr>
+            </a:pPr>
+            <a:r>
+              <a:t>• useState:  Guarda o total arrecadado, filtro de bairros e menu aberto;</a:t>
+            </a:r>
+          </a:p>
+          <a:p>
+            <a:pPr>
+              <a:defRPr sz="1100">
                 <a:solidFill>
                   <a:srgbClr val="1E293B"/>
                 </a:solidFill>
-                <a:latin typeface="Arial"/>
-              </a:defRPr>
-            </a:pPr>
-            <a:r>
-              <a:t>• useState: Guarda o total arrecadado, a busca por bairros e o menu aberto;</a:t>
-            </a:r>
-          </a:p>
-          <a:p>
-            <a:pPr>
-              <a:defRPr sz="1200">
+                <a:latin typeface="Segoe UI"/>
+              </a:defRPr>
+            </a:pPr>
+            <a:r>
+              <a:t>• useEffect:  Busca dados no IBGE e escuta eventos de clique para o som;</a:t>
+            </a:r>
+          </a:p>
+          <a:p>
+            <a:pPr>
+              <a:defRPr sz="1100">
                 <a:solidFill>
                   <a:srgbClr val="1E293B"/>
                 </a:solidFill>
-                <a:latin typeface="Arial"/>
-              </a:defRPr>
-            </a:pPr>
-            <a:r>
-              <a:t>• useEffect: Conecta à API do IBGE e escuta cliques para ativar o áudio;</a:t>
-            </a:r>
-          </a:p>
-          <a:p>
-            <a:pPr>
-              <a:defRPr sz="1200">
+                <a:latin typeface="Segoe UI"/>
+              </a:defRPr>
+            </a:pPr>
+            <a:r>
+              <a:t>• useRef:  Controla a tag HTML5 audio sem re-renderizar a tela inteira;</a:t>
+            </a:r>
+          </a:p>
+          <a:p>
+            <a:pPr>
+              <a:defRPr sz="1100">
                 <a:solidFill>
                   <a:srgbClr val="1E293B"/>
                 </a:solidFill>
-                <a:latin typeface="Arial"/>
-              </a:defRPr>
-            </a:pPr>
-            <a:r>
-              <a:t>• useRef: Controla o som sem precisar redesenhar a tela inteira;</a:t>
-            </a:r>
-          </a:p>
-          <a:p>
-            <a:pPr>
-              <a:defRPr sz="1200">
-                <a:solidFill>
-                  <a:srgbClr val="1E293B"/>
-                </a:solidFill>
-                <a:latin typeface="Arial"/>
-              </a:defRPr>
-            </a:pPr>
-            <a:r>
-              <a:t>• localStorage: Preserva as doações cadastradas mesmo fechando o navegador.</a:t>
+                <a:latin typeface="Segoe UI"/>
+              </a:defRPr>
+            </a:pPr>
+            <a:r>
+              <a:t>• localStorage:  Preserva as doações mesmo fechando o navegador.</a:t>
             </a:r>
           </a:p>
         </p:txBody>
@@ -8185,8 +10045,8 @@
         </p:nvSpPr>
         <p:spPr>
           <a:xfrm>
-            <a:off x="548640" y="365760"/>
-            <a:ext cx="8686800" cy="731520"/>
+            <a:off x="731520" y="365760"/>
+            <a:ext cx="8412480" cy="685800"/>
           </a:xfrm>
           <a:prstGeom prst="rect">
             <a:avLst/>
@@ -8200,11 +10060,11 @@
           <a:lstStyle/>
           <a:p>
             <a:pPr>
-              <a:defRPr sz="2200" b="1">
+              <a:defRPr sz="2100" b="1">
                 <a:solidFill>
                   <a:srgbClr val="00873E"/>
                 </a:solidFill>
-                <a:latin typeface="Arial"/>
+                <a:latin typeface="Segoe UI"/>
               </a:defRPr>
             </a:pPr>
             <a:r>
@@ -8221,8 +10081,8 @@
         </p:nvSpPr>
         <p:spPr>
           <a:xfrm>
-            <a:off x="9326880" y="411480"/>
-            <a:ext cx="2286000" cy="365760"/>
+            <a:off x="9235440" y="411480"/>
+            <a:ext cx="2194560" cy="347472"/>
           </a:xfrm>
           <a:prstGeom prst="roundRect">
             <a:avLst/>
@@ -8230,7 +10090,7 @@
           <a:solidFill>
             <a:srgbClr val="F8FAFC"/>
           </a:solidFill>
-          <a:ln>
+          <a:ln w="12700">
             <a:solidFill>
               <a:srgbClr val="E2E8F0"/>
             </a:solidFill>
@@ -8251,19 +10111,19 @@
           </a:fontRef>
         </p:style>
         <p:txBody>
-          <a:bodyPr rtlCol="0" anchor="ctr" wrap="none"/>
+          <a:bodyPr rtlCol="0" anchor="ctr" tIns="54864"/>
           <a:lstStyle/>
           <a:p>
             <a:pPr algn="ctr">
-              <a:defRPr sz="1100" b="1">
+              <a:defRPr sz="1000" b="1">
                 <a:solidFill>
                   <a:srgbClr val="64748B"/>
                 </a:solidFill>
-                <a:latin typeface="Arial"/>
-              </a:defRPr>
-            </a:pPr>
-            <a:r>
-              <a:t>5. Testes &amp; Qualidade</a:t>
+                <a:latin typeface="Segoe UI"/>
+              </a:defRPr>
+            </a:pPr>
+            <a:r>
+              <a:t>5. TESTES &amp; QUALIDADE</a:t>
             </a:r>
           </a:p>
         </p:txBody>
@@ -8276,8 +10136,8 @@
         </p:nvSpPr>
         <p:spPr>
           <a:xfrm>
-            <a:off x="548640" y="1097280"/>
-            <a:ext cx="11094415" cy="18288"/>
+            <a:off x="731520" y="1051560"/>
+            <a:ext cx="10728655" cy="13716"/>
           </a:xfrm>
           <a:prstGeom prst="rect">
             <a:avLst/>
@@ -8286,9 +10146,7 @@
             <a:srgbClr val="E2E8F0"/>
           </a:solidFill>
           <a:ln>
-            <a:solidFill>
-              <a:srgbClr val="E2E8F0"/>
-            </a:solidFill>
+            <a:noFill/>
           </a:ln>
         </p:spPr>
         <p:style>
@@ -8321,8 +10179,8 @@
         </p:nvSpPr>
         <p:spPr>
           <a:xfrm>
-            <a:off x="548640" y="6263640"/>
-            <a:ext cx="11094415" cy="18288"/>
+            <a:off x="731520" y="6263640"/>
+            <a:ext cx="10728655" cy="13716"/>
           </a:xfrm>
           <a:prstGeom prst="rect">
             <a:avLst/>
@@ -8331,9 +10189,7 @@
             <a:srgbClr val="E2E8F0"/>
           </a:solidFill>
           <a:ln>
-            <a:solidFill>
-              <a:srgbClr val="E2E8F0"/>
-            </a:solidFill>
+            <a:noFill/>
           </a:ln>
         </p:spPr>
         <p:style>
@@ -8366,7 +10222,7 @@
         </p:nvSpPr>
         <p:spPr>
           <a:xfrm>
-            <a:off x="548640" y="6327648"/>
+            <a:off x="731520" y="6327648"/>
             <a:ext cx="5486400" cy="320040"/>
           </a:xfrm>
           <a:prstGeom prst="rect">
@@ -8381,15 +10237,15 @@
           <a:lstStyle/>
           <a:p>
             <a:pPr>
-              <a:defRPr sz="1000">
+              <a:defRPr sz="950">
                 <a:solidFill>
                   <a:srgbClr val="64748B"/>
                 </a:solidFill>
-                <a:latin typeface="Arial"/>
-              </a:defRPr>
-            </a:pPr>
-            <a:r>
-              <a:t>Timbiras Solidária — ADS UEMA 2026 | Polo Timbiras</a:t>
+                <a:latin typeface="Segoe UI"/>
+              </a:defRPr>
+            </a:pPr>
+            <a:r>
+              <a:t>Timbiras Solidária — ADS UEMA 2026 | Polo Universitário de Timbiras</a:t>
             </a:r>
           </a:p>
         </p:txBody>
@@ -8402,8 +10258,8 @@
         </p:nvSpPr>
         <p:spPr>
           <a:xfrm>
-            <a:off x="9144000" y="6327648"/>
-            <a:ext cx="2499055" cy="320040"/>
+            <a:off x="8686800" y="6327648"/>
+            <a:ext cx="2773375" cy="320040"/>
           </a:xfrm>
           <a:prstGeom prst="rect">
             <a:avLst/>
@@ -8417,11 +10273,11 @@
           <a:lstStyle/>
           <a:p>
             <a:pPr algn="r">
-              <a:defRPr sz="1000" b="1">
+              <a:defRPr sz="950" b="1">
                 <a:solidFill>
                   <a:srgbClr val="64748B"/>
                 </a:solidFill>
-                <a:latin typeface="Arial"/>
+                <a:latin typeface="Segoe UI"/>
               </a:defRPr>
             </a:pPr>
             <a:r>
@@ -8432,14 +10288,50 @@
       </p:sp>
       <p:sp>
         <p:nvSpPr>
-          <p:cNvPr id="8" name="Rounded Rectangle 7"/>
+          <p:cNvPr id="8" name="TextBox 7"/>
+          <p:cNvSpPr txBox="1"/>
+          <p:nvPr/>
+        </p:nvSpPr>
+        <p:spPr>
+          <a:xfrm>
+            <a:off x="731520" y="1234440"/>
+            <a:ext cx="5166360" cy="457200"/>
+          </a:xfrm>
+          <a:prstGeom prst="rect">
+            <a:avLst/>
+          </a:prstGeom>
+          <a:noFill/>
+        </p:spPr>
+        <p:txBody>
+          <a:bodyPr wrap="none">
+            <a:spAutoFit/>
+          </a:bodyPr>
+          <a:lstStyle/>
+          <a:p>
+            <a:pPr>
+              <a:defRPr sz="1550" b="1">
+                <a:solidFill>
+                  <a:srgbClr val="00873E"/>
+                </a:solidFill>
+                <a:latin typeface="Segoe UI"/>
+              </a:defRPr>
+            </a:pPr>
+            <a:r>
+              <a:t>O Que Deu Errado e Como Consertamos</a:t>
+            </a:r>
+          </a:p>
+        </p:txBody>
+      </p:sp>
+      <p:sp>
+        <p:nvSpPr>
+          <p:cNvPr id="9" name="Rounded Rectangle 8"/>
           <p:cNvSpPr/>
           <p:nvPr/>
         </p:nvSpPr>
         <p:spPr>
           <a:xfrm>
-            <a:off x="548640" y="1371600"/>
-            <a:ext cx="5394960" cy="4572000"/>
+            <a:off x="731520" y="1783080"/>
+            <a:ext cx="5166360" cy="1371600"/>
           </a:xfrm>
           <a:prstGeom prst="roundRect">
             <a:avLst/>
@@ -8447,7 +10339,7 @@
           <a:solidFill>
             <a:srgbClr val="F8FAFC"/>
           </a:solidFill>
-          <a:ln>
+          <a:ln w="12700">
             <a:solidFill>
               <a:srgbClr val="E2E8F0"/>
             </a:solidFill>
@@ -8468,98 +10360,32 @@
           </a:fontRef>
         </p:style>
         <p:txBody>
-          <a:bodyPr rtlCol="0" anchor="ctr" wrap="square" lIns="274320" tIns="274320" rIns="274320" bIns="274320"/>
-          <a:lstStyle/>
-          <a:p>
-            <a:pPr algn="ctr">
-              <a:defRPr sz="1600" b="1">
-                <a:solidFill>
-                  <a:srgbClr val="00873E"/>
-                </a:solidFill>
-                <a:latin typeface="Arial"/>
-              </a:defRPr>
-            </a:pPr>
-            <a:r>
-              <a:t>O Que Deu Errado e Como Consertamos</a:t>
-            </a:r>
-          </a:p>
-          <a:p>
-            <a:br/>
-            <a:pPr>
-              <a:defRPr sz="1200">
-                <a:solidFill>
-                  <a:srgbClr val="1E293B"/>
-                </a:solidFill>
-                <a:latin typeface="Arial"/>
-              </a:defRPr>
-            </a:pPr>
-            <a:r>
-              <a:t>1. O Desafio do Menu no Celular:</a:t>
-            </a:r>
-            <a:br/>
-            <a:r>
-              <a:t> Em telas pequenas os botões quebravam em várias linhas. Criamos um menu hambúrguer com estado React que se recolhe perfeitamente.</a:t>
-            </a:r>
-          </a:p>
-          <a:p>
-            <a:br/>
-            <a:pPr>
-              <a:defRPr sz="1200">
-                <a:solidFill>
-                  <a:srgbClr val="1E293B"/>
-                </a:solidFill>
-                <a:latin typeface="Arial"/>
-              </a:defRPr>
-            </a:pPr>
-            <a:r>
-              <a:t>2. O Dado da API Visível na Interface:</a:t>
-            </a:r>
-            <a:br/>
-            <a:r>
-              <a:t> Inicialmente usávamos a API apenas internamente. O professor pontuou que precisava ser visual. Criamos os cards com código IBGE de 7 dígitos e microrregião.</a:t>
-            </a:r>
-          </a:p>
-          <a:p>
-            <a:br/>
-            <a:pPr>
-              <a:defRPr sz="1200">
-                <a:solidFill>
-                  <a:srgbClr val="1E293B"/>
-                </a:solidFill>
-                <a:latin typeface="Arial"/>
-              </a:defRPr>
-            </a:pPr>
-            <a:r>
-              <a:t>3. Aviso de Re-renderização no Linter:</a:t>
-            </a:r>
-            <a:br/>
-            <a:r>
-              <a:t> O linter apontava risco de loop com setState síncrono. Refatoramos a inicialização e limpamos o fluxo.</a:t>
-            </a:r>
-          </a:p>
-        </p:txBody>
-      </p:sp>
-      <p:sp>
-        <p:nvSpPr>
-          <p:cNvPr id="9" name="Rounded Rectangle 8"/>
+          <a:bodyPr rtlCol="0" anchor="ctr"/>
+          <a:lstStyle/>
+          <a:p>
+            <a:pPr algn="ctr"/>
+          </a:p>
+        </p:txBody>
+      </p:sp>
+      <p:sp>
+        <p:nvSpPr>
+          <p:cNvPr id="10" name="Rectangle 9"/>
           <p:cNvSpPr/>
           <p:nvPr/>
         </p:nvSpPr>
         <p:spPr>
           <a:xfrm>
-            <a:off x="6217920" y="1371600"/>
-            <a:ext cx="5394960" cy="4572000"/>
-          </a:xfrm>
-          <a:prstGeom prst="roundRect">
+            <a:off x="731520" y="1783080"/>
+            <a:ext cx="73152" cy="1371600"/>
+          </a:xfrm>
+          <a:prstGeom prst="rect">
             <a:avLst/>
           </a:prstGeom>
           <a:solidFill>
-            <a:srgbClr val="F0FDF4"/>
+            <a:srgbClr val="00873E"/>
           </a:solidFill>
           <a:ln>
-            <a:solidFill>
-              <a:srgbClr val="10B981"/>
-            </a:solidFill>
+            <a:noFill/>
           </a:ln>
         </p:spPr>
         <p:style>
@@ -8577,15 +10403,409 @@
           </a:fontRef>
         </p:style>
         <p:txBody>
-          <a:bodyPr rtlCol="0" anchor="ctr" wrap="square" lIns="274320" tIns="274320" rIns="274320" bIns="274320"/>
-          <a:lstStyle/>
-          <a:p>
-            <a:pPr algn="ctr">
-              <a:defRPr sz="1600" b="1">
+          <a:bodyPr rtlCol="0" anchor="ctr"/>
+          <a:lstStyle/>
+          <a:p>
+            <a:pPr algn="ctr"/>
+          </a:p>
+        </p:txBody>
+      </p:sp>
+      <p:sp>
+        <p:nvSpPr>
+          <p:cNvPr id="11" name="TextBox 10"/>
+          <p:cNvSpPr txBox="1"/>
+          <p:nvPr/>
+        </p:nvSpPr>
+        <p:spPr>
+          <a:xfrm>
+            <a:off x="960120" y="1892808"/>
+            <a:ext cx="4800600" cy="1143000"/>
+          </a:xfrm>
+          <a:prstGeom prst="rect">
+            <a:avLst/>
+          </a:prstGeom>
+          <a:noFill/>
+        </p:spPr>
+        <p:txBody>
+          <a:bodyPr wrap="square" lIns="0" tIns="0" rIns="0" bIns="0">
+            <a:spAutoFit/>
+          </a:bodyPr>
+          <a:lstStyle/>
+          <a:p>
+            <a:pPr>
+              <a:defRPr sz="1250" b="1">
+                <a:solidFill>
+                  <a:srgbClr val="1E293B"/>
+                </a:solidFill>
+                <a:latin typeface="Segoe UI"/>
+              </a:defRPr>
+            </a:pPr>
+            <a:r>
+              <a:t>1. O Desafio do Menu no Celular</a:t>
+            </a:r>
+          </a:p>
+          <a:p>
+            <a:pPr>
+              <a:defRPr sz="1050">
+                <a:solidFill>
+                  <a:srgbClr val="64748B"/>
+                </a:solidFill>
+                <a:latin typeface="Segoe UI"/>
+              </a:defRPr>
+            </a:pPr>
+            <a:r>
+              <a:t>Nos primeiros testes em telas pequenas, os botões quebravam e ocupavam metade da tela. Criamos um menu hambúrguer com estado React que se recolhe perfeitamente.</a:t>
+            </a:r>
+          </a:p>
+        </p:txBody>
+      </p:sp>
+      <p:sp>
+        <p:nvSpPr>
+          <p:cNvPr id="12" name="Rounded Rectangle 11"/>
+          <p:cNvSpPr/>
+          <p:nvPr/>
+        </p:nvSpPr>
+        <p:spPr>
+          <a:xfrm>
+            <a:off x="731520" y="3337560"/>
+            <a:ext cx="5166360" cy="1371600"/>
+          </a:xfrm>
+          <a:prstGeom prst="roundRect">
+            <a:avLst/>
+          </a:prstGeom>
+          <a:solidFill>
+            <a:srgbClr val="F8FAFC"/>
+          </a:solidFill>
+          <a:ln w="12700">
+            <a:solidFill>
+              <a:srgbClr val="E2E8F0"/>
+            </a:solidFill>
+          </a:ln>
+        </p:spPr>
+        <p:style>
+          <a:lnRef idx="1">
+            <a:schemeClr val="accent1"/>
+          </a:lnRef>
+          <a:fillRef idx="3">
+            <a:schemeClr val="accent1"/>
+          </a:fillRef>
+          <a:effectRef idx="2">
+            <a:schemeClr val="accent1"/>
+          </a:effectRef>
+          <a:fontRef idx="minor">
+            <a:schemeClr val="lt1"/>
+          </a:fontRef>
+        </p:style>
+        <p:txBody>
+          <a:bodyPr rtlCol="0" anchor="ctr"/>
+          <a:lstStyle/>
+          <a:p>
+            <a:pPr algn="ctr"/>
+          </a:p>
+        </p:txBody>
+      </p:sp>
+      <p:sp>
+        <p:nvSpPr>
+          <p:cNvPr id="13" name="Rectangle 12"/>
+          <p:cNvSpPr/>
+          <p:nvPr/>
+        </p:nvSpPr>
+        <p:spPr>
+          <a:xfrm>
+            <a:off x="731520" y="3337560"/>
+            <a:ext cx="73152" cy="1371600"/>
+          </a:xfrm>
+          <a:prstGeom prst="rect">
+            <a:avLst/>
+          </a:prstGeom>
+          <a:solidFill>
+            <a:srgbClr val="00873E"/>
+          </a:solidFill>
+          <a:ln>
+            <a:noFill/>
+          </a:ln>
+        </p:spPr>
+        <p:style>
+          <a:lnRef idx="1">
+            <a:schemeClr val="accent1"/>
+          </a:lnRef>
+          <a:fillRef idx="3">
+            <a:schemeClr val="accent1"/>
+          </a:fillRef>
+          <a:effectRef idx="2">
+            <a:schemeClr val="accent1"/>
+          </a:effectRef>
+          <a:fontRef idx="minor">
+            <a:schemeClr val="lt1"/>
+          </a:fontRef>
+        </p:style>
+        <p:txBody>
+          <a:bodyPr rtlCol="0" anchor="ctr"/>
+          <a:lstStyle/>
+          <a:p>
+            <a:pPr algn="ctr"/>
+          </a:p>
+        </p:txBody>
+      </p:sp>
+      <p:sp>
+        <p:nvSpPr>
+          <p:cNvPr id="14" name="TextBox 13"/>
+          <p:cNvSpPr txBox="1"/>
+          <p:nvPr/>
+        </p:nvSpPr>
+        <p:spPr>
+          <a:xfrm>
+            <a:off x="960120" y="3447288"/>
+            <a:ext cx="4800600" cy="1143000"/>
+          </a:xfrm>
+          <a:prstGeom prst="rect">
+            <a:avLst/>
+          </a:prstGeom>
+          <a:noFill/>
+        </p:spPr>
+        <p:txBody>
+          <a:bodyPr wrap="square" lIns="0" tIns="0" rIns="0" bIns="0">
+            <a:spAutoFit/>
+          </a:bodyPr>
+          <a:lstStyle/>
+          <a:p>
+            <a:pPr>
+              <a:defRPr sz="1250" b="1">
+                <a:solidFill>
+                  <a:srgbClr val="1E293B"/>
+                </a:solidFill>
+                <a:latin typeface="Segoe UI"/>
+              </a:defRPr>
+            </a:pPr>
+            <a:r>
+              <a:t>2. O Dado da API Visível na Tela</a:t>
+            </a:r>
+          </a:p>
+          <a:p>
+            <a:pPr>
+              <a:defRPr sz="1050">
+                <a:solidFill>
+                  <a:srgbClr val="64748B"/>
+                </a:solidFill>
+                <a:latin typeface="Segoe UI"/>
+              </a:defRPr>
+            </a:pPr>
+            <a:r>
+              <a:t>Inicialmente fazíamos a busca no IBGE apenas para validar nomes internamente. O professor pontuou que o dado precisava ser visual. Criamos os cards com código IBGE de 7 dígitos e microrregião.</a:t>
+            </a:r>
+          </a:p>
+        </p:txBody>
+      </p:sp>
+      <p:sp>
+        <p:nvSpPr>
+          <p:cNvPr id="15" name="Rounded Rectangle 14"/>
+          <p:cNvSpPr/>
+          <p:nvPr/>
+        </p:nvSpPr>
+        <p:spPr>
+          <a:xfrm>
+            <a:off x="731520" y="4892040"/>
+            <a:ext cx="5166360" cy="1371600"/>
+          </a:xfrm>
+          <a:prstGeom prst="roundRect">
+            <a:avLst/>
+          </a:prstGeom>
+          <a:solidFill>
+            <a:srgbClr val="F8FAFC"/>
+          </a:solidFill>
+          <a:ln w="12700">
+            <a:solidFill>
+              <a:srgbClr val="E2E8F0"/>
+            </a:solidFill>
+          </a:ln>
+        </p:spPr>
+        <p:style>
+          <a:lnRef idx="1">
+            <a:schemeClr val="accent1"/>
+          </a:lnRef>
+          <a:fillRef idx="3">
+            <a:schemeClr val="accent1"/>
+          </a:fillRef>
+          <a:effectRef idx="2">
+            <a:schemeClr val="accent1"/>
+          </a:effectRef>
+          <a:fontRef idx="minor">
+            <a:schemeClr val="lt1"/>
+          </a:fontRef>
+        </p:style>
+        <p:txBody>
+          <a:bodyPr rtlCol="0" anchor="ctr"/>
+          <a:lstStyle/>
+          <a:p>
+            <a:pPr algn="ctr"/>
+          </a:p>
+        </p:txBody>
+      </p:sp>
+      <p:sp>
+        <p:nvSpPr>
+          <p:cNvPr id="16" name="Rectangle 15"/>
+          <p:cNvSpPr/>
+          <p:nvPr/>
+        </p:nvSpPr>
+        <p:spPr>
+          <a:xfrm>
+            <a:off x="731520" y="4892040"/>
+            <a:ext cx="73152" cy="1371600"/>
+          </a:xfrm>
+          <a:prstGeom prst="rect">
+            <a:avLst/>
+          </a:prstGeom>
+          <a:solidFill>
+            <a:srgbClr val="00873E"/>
+          </a:solidFill>
+          <a:ln>
+            <a:noFill/>
+          </a:ln>
+        </p:spPr>
+        <p:style>
+          <a:lnRef idx="1">
+            <a:schemeClr val="accent1"/>
+          </a:lnRef>
+          <a:fillRef idx="3">
+            <a:schemeClr val="accent1"/>
+          </a:fillRef>
+          <a:effectRef idx="2">
+            <a:schemeClr val="accent1"/>
+          </a:effectRef>
+          <a:fontRef idx="minor">
+            <a:schemeClr val="lt1"/>
+          </a:fontRef>
+        </p:style>
+        <p:txBody>
+          <a:bodyPr rtlCol="0" anchor="ctr"/>
+          <a:lstStyle/>
+          <a:p>
+            <a:pPr algn="ctr"/>
+          </a:p>
+        </p:txBody>
+      </p:sp>
+      <p:sp>
+        <p:nvSpPr>
+          <p:cNvPr id="17" name="TextBox 16"/>
+          <p:cNvSpPr txBox="1"/>
+          <p:nvPr/>
+        </p:nvSpPr>
+        <p:spPr>
+          <a:xfrm>
+            <a:off x="960120" y="5001768"/>
+            <a:ext cx="4800600" cy="1143000"/>
+          </a:xfrm>
+          <a:prstGeom prst="rect">
+            <a:avLst/>
+          </a:prstGeom>
+          <a:noFill/>
+        </p:spPr>
+        <p:txBody>
+          <a:bodyPr wrap="square" lIns="0" tIns="0" rIns="0" bIns="0">
+            <a:spAutoFit/>
+          </a:bodyPr>
+          <a:lstStyle/>
+          <a:p>
+            <a:pPr>
+              <a:defRPr sz="1250" b="1">
+                <a:solidFill>
+                  <a:srgbClr val="1E293B"/>
+                </a:solidFill>
+                <a:latin typeface="Segoe UI"/>
+              </a:defRPr>
+            </a:pPr>
+            <a:r>
+              <a:t>3. Aviso de Renderização em Cascata</a:t>
+            </a:r>
+          </a:p>
+          <a:p>
+            <a:pPr>
+              <a:defRPr sz="1050">
+                <a:solidFill>
+                  <a:srgbClr val="64748B"/>
+                </a:solidFill>
+                <a:latin typeface="Segoe UI"/>
+              </a:defRPr>
+            </a:pPr>
+            <a:r>
+              <a:t>O linter acusava risco com setState síncrono no efeito inicial. Reorganizamos a montagem dos componentes deixando o fluxo limpo.</a:t>
+            </a:r>
+          </a:p>
+        </p:txBody>
+      </p:sp>
+      <p:sp>
+        <p:nvSpPr>
+          <p:cNvPr id="18" name="Rounded Rectangle 17"/>
+          <p:cNvSpPr/>
+          <p:nvPr/>
+        </p:nvSpPr>
+        <p:spPr>
+          <a:xfrm>
+            <a:off x="6263640" y="1234440"/>
+            <a:ext cx="5166360" cy="4800600"/>
+          </a:xfrm>
+          <a:prstGeom prst="roundRect">
+            <a:avLst/>
+          </a:prstGeom>
+          <a:solidFill>
+            <a:srgbClr val="F0FDF4"/>
+          </a:solidFill>
+          <a:ln w="12700">
+            <a:solidFill>
+              <a:srgbClr val="BBF7D0"/>
+            </a:solidFill>
+          </a:ln>
+        </p:spPr>
+        <p:style>
+          <a:lnRef idx="1">
+            <a:schemeClr val="accent1"/>
+          </a:lnRef>
+          <a:fillRef idx="3">
+            <a:schemeClr val="accent1"/>
+          </a:fillRef>
+          <a:effectRef idx="2">
+            <a:schemeClr val="accent1"/>
+          </a:effectRef>
+          <a:fontRef idx="minor">
+            <a:schemeClr val="lt1"/>
+          </a:fontRef>
+        </p:style>
+        <p:txBody>
+          <a:bodyPr rtlCol="0" anchor="ctr"/>
+          <a:lstStyle/>
+          <a:p>
+            <a:pPr algn="ctr"/>
+          </a:p>
+        </p:txBody>
+      </p:sp>
+      <p:sp>
+        <p:nvSpPr>
+          <p:cNvPr id="19" name="TextBox 18"/>
+          <p:cNvSpPr txBox="1"/>
+          <p:nvPr/>
+        </p:nvSpPr>
+        <p:spPr>
+          <a:xfrm>
+            <a:off x="6537960" y="1417320"/>
+            <a:ext cx="4617720" cy="4434840"/>
+          </a:xfrm>
+          <a:prstGeom prst="rect">
+            <a:avLst/>
+          </a:prstGeom>
+          <a:noFill/>
+        </p:spPr>
+        <p:txBody>
+          <a:bodyPr wrap="square" lIns="0" tIns="0" rIns="0" bIns="0">
+            <a:spAutoFit/>
+          </a:bodyPr>
+          <a:lstStyle/>
+          <a:p>
+            <a:pPr>
+              <a:defRPr sz="1550" b="1">
                 <a:solidFill>
                   <a:srgbClr val="00873E"/>
                 </a:solidFill>
-                <a:latin typeface="Arial"/>
+                <a:latin typeface="Segoe UI"/>
               </a:defRPr>
             </a:pPr>
             <a:r>
@@ -8595,73 +10815,57 @@
           <a:p>
             <a:br/>
             <a:pPr>
-              <a:defRPr sz="1200">
+              <a:defRPr sz="1150">
                 <a:solidFill>
                   <a:srgbClr val="1E293B"/>
                 </a:solidFill>
-                <a:latin typeface="Arial"/>
-              </a:defRPr>
-            </a:pPr>
-            <a:r>
-              <a:t>• Build de Produção (Vite):</a:t>
-            </a:r>
+                <a:latin typeface="Segoe UI"/>
+              </a:defRPr>
+            </a:pPr>
+            <a:r>
+              <a:t>• Build de Produção com Vite: Compilado em menos de 800ms, gerando código minificado e assets otimizados na pasta dist/.</a:t>
+            </a:r>
+          </a:p>
+          <a:p>
             <a:br/>
-            <a:r>
-              <a:t> Compilado em menos de 800ms gerando pacotes minificados em dist/.</a:t>
+            <a:pPr>
+              <a:defRPr sz="1150">
+                <a:solidFill>
+                  <a:srgbClr val="1E293B"/>
+                </a:solidFill>
+                <a:latin typeface="Segoe UI"/>
+              </a:defRPr>
+            </a:pPr>
+            <a:r>
+              <a:t>• Análise Estática com Oxlint: Zero erros de sintaxe, zero alertas de React e conformidade estrita com padrões modernos de código.</a:t>
             </a:r>
           </a:p>
           <a:p>
             <a:br/>
             <a:pPr>
-              <a:defRPr sz="1200">
+              <a:defRPr sz="1150">
                 <a:solidFill>
                   <a:srgbClr val="1E293B"/>
                 </a:solidFill>
-                <a:latin typeface="Arial"/>
-              </a:defRPr>
-            </a:pPr>
-            <a:r>
-              <a:t>• Análise Estática (Oxlint):</a:t>
-            </a:r>
+                <a:latin typeface="Segoe UI"/>
+              </a:defRPr>
+            </a:pPr>
+            <a:r>
+              <a:t>• Teste de Formulários em Branco: O navegador bloqueia submissão vazia e orienta o usuário de forma amigável.</a:t>
+            </a:r>
+          </a:p>
+          <a:p>
             <a:br/>
-            <a:r>
-              <a:t> 0 erros de sintaxe e 0 alertas de React em todo o projeto.</a:t>
-            </a:r>
-          </a:p>
-          <a:p>
-            <a:br/>
-            <a:pPr>
-              <a:defRPr sz="1200">
+            <a:pPr>
+              <a:defRPr sz="1150">
                 <a:solidFill>
                   <a:srgbClr val="1E293B"/>
                 </a:solidFill>
-                <a:latin typeface="Arial"/>
-              </a:defRPr>
-            </a:pPr>
-            <a:r>
-              <a:t>• Validação de Formulários:</a:t>
-            </a:r>
-            <a:br/>
-            <a:r>
-              <a:t> Bloqueio de campos em branco com alertas nativos amigáveis.</a:t>
-            </a:r>
-          </a:p>
-          <a:p>
-            <a:br/>
-            <a:pPr>
-              <a:defRPr sz="1200">
-                <a:solidFill>
-                  <a:srgbClr val="1E293B"/>
-                </a:solidFill>
-                <a:latin typeface="Arial"/>
-              </a:defRPr>
-            </a:pPr>
-            <a:r>
-              <a:t>• Teste em Celulares Reais:</a:t>
-            </a:r>
-            <a:br/>
-            <a:r>
-              <a:t> Testado em smartphones Android e iOS dos integrantes, avaliando toque, rolagem e botão PIX.</a:t>
+                <a:latin typeface="Segoe UI"/>
+              </a:defRPr>
+            </a:pPr>
+            <a:r>
+              <a:t>• Teste em Celulares Reais: Testamos botões de toque, teclado numérico e rolagem suave em dispositivos Android e iOS dos membros da equipe.</a:t>
             </a:r>
           </a:p>
         </p:txBody>
@@ -8692,8 +10896,8 @@
         </p:nvSpPr>
         <p:spPr>
           <a:xfrm>
-            <a:off x="548640" y="365760"/>
-            <a:ext cx="8686800" cy="731520"/>
+            <a:off x="731520" y="365760"/>
+            <a:ext cx="8412480" cy="685800"/>
           </a:xfrm>
           <a:prstGeom prst="rect">
             <a:avLst/>
@@ -8707,11 +10911,11 @@
           <a:lstStyle/>
           <a:p>
             <a:pPr>
-              <a:defRPr sz="2200" b="1">
+              <a:defRPr sz="2100" b="1">
                 <a:solidFill>
                   <a:srgbClr val="00873E"/>
                 </a:solidFill>
-                <a:latin typeface="Arial"/>
+                <a:latin typeface="Segoe UI"/>
               </a:defRPr>
             </a:pPr>
             <a:r>
@@ -8728,8 +10932,8 @@
         </p:nvSpPr>
         <p:spPr>
           <a:xfrm>
-            <a:off x="9326880" y="411480"/>
-            <a:ext cx="2286000" cy="365760"/>
+            <a:off x="9235440" y="411480"/>
+            <a:ext cx="2194560" cy="347472"/>
           </a:xfrm>
           <a:prstGeom prst="roundRect">
             <a:avLst/>
@@ -8737,7 +10941,7 @@
           <a:solidFill>
             <a:srgbClr val="F8FAFC"/>
           </a:solidFill>
-          <a:ln>
+          <a:ln w="12700">
             <a:solidFill>
               <a:srgbClr val="E2E8F0"/>
             </a:solidFill>
@@ -8758,19 +10962,19 @@
           </a:fontRef>
         </p:style>
         <p:txBody>
-          <a:bodyPr rtlCol="0" anchor="ctr" wrap="none"/>
+          <a:bodyPr rtlCol="0" anchor="ctr" tIns="54864"/>
           <a:lstStyle/>
           <a:p>
             <a:pPr algn="ctr">
-              <a:defRPr sz="1100" b="1">
+              <a:defRPr sz="1000" b="1">
                 <a:solidFill>
                   <a:srgbClr val="64748B"/>
                 </a:solidFill>
-                <a:latin typeface="Arial"/>
-              </a:defRPr>
-            </a:pPr>
-            <a:r>
-              <a:t>5. Publicação &amp; Hospedagem</a:t>
+                <a:latin typeface="Segoe UI"/>
+              </a:defRPr>
+            </a:pPr>
+            <a:r>
+              <a:t>5. PUBLICAÇÃO &amp; HOSPEDAGEM</a:t>
             </a:r>
           </a:p>
         </p:txBody>
@@ -8783,8 +10987,8 @@
         </p:nvSpPr>
         <p:spPr>
           <a:xfrm>
-            <a:off x="548640" y="1097280"/>
-            <a:ext cx="11094415" cy="18288"/>
+            <a:off x="731520" y="1051560"/>
+            <a:ext cx="10728655" cy="13716"/>
           </a:xfrm>
           <a:prstGeom prst="rect">
             <a:avLst/>
@@ -8793,9 +10997,7 @@
             <a:srgbClr val="E2E8F0"/>
           </a:solidFill>
           <a:ln>
-            <a:solidFill>
-              <a:srgbClr val="E2E8F0"/>
-            </a:solidFill>
+            <a:noFill/>
           </a:ln>
         </p:spPr>
         <p:style>
@@ -8828,8 +11030,8 @@
         </p:nvSpPr>
         <p:spPr>
           <a:xfrm>
-            <a:off x="548640" y="6263640"/>
-            <a:ext cx="11094415" cy="18288"/>
+            <a:off x="731520" y="6263640"/>
+            <a:ext cx="10728655" cy="13716"/>
           </a:xfrm>
           <a:prstGeom prst="rect">
             <a:avLst/>
@@ -8838,9 +11040,7 @@
             <a:srgbClr val="E2E8F0"/>
           </a:solidFill>
           <a:ln>
-            <a:solidFill>
-              <a:srgbClr val="E2E8F0"/>
-            </a:solidFill>
+            <a:noFill/>
           </a:ln>
         </p:spPr>
         <p:style>
@@ -8873,7 +11073,7 @@
         </p:nvSpPr>
         <p:spPr>
           <a:xfrm>
-            <a:off x="548640" y="6327648"/>
+            <a:off x="731520" y="6327648"/>
             <a:ext cx="5486400" cy="320040"/>
           </a:xfrm>
           <a:prstGeom prst="rect">
@@ -8888,15 +11088,15 @@
           <a:lstStyle/>
           <a:p>
             <a:pPr>
-              <a:defRPr sz="1000">
+              <a:defRPr sz="950">
                 <a:solidFill>
                   <a:srgbClr val="64748B"/>
                 </a:solidFill>
-                <a:latin typeface="Arial"/>
-              </a:defRPr>
-            </a:pPr>
-            <a:r>
-              <a:t>Timbiras Solidária — ADS UEMA 2026 | Polo Timbiras</a:t>
+                <a:latin typeface="Segoe UI"/>
+              </a:defRPr>
+            </a:pPr>
+            <a:r>
+              <a:t>Timbiras Solidária — ADS UEMA 2026 | Polo Universitário de Timbiras</a:t>
             </a:r>
           </a:p>
         </p:txBody>
@@ -8909,8 +11109,8 @@
         </p:nvSpPr>
         <p:spPr>
           <a:xfrm>
-            <a:off x="9144000" y="6327648"/>
-            <a:ext cx="2499055" cy="320040"/>
+            <a:off x="8686800" y="6327648"/>
+            <a:ext cx="2773375" cy="320040"/>
           </a:xfrm>
           <a:prstGeom prst="rect">
             <a:avLst/>
@@ -8924,11 +11124,11 @@
           <a:lstStyle/>
           <a:p>
             <a:pPr algn="r">
-              <a:defRPr sz="1000" b="1">
+              <a:defRPr sz="950" b="1">
                 <a:solidFill>
                   <a:srgbClr val="64748B"/>
                 </a:solidFill>
-                <a:latin typeface="Arial"/>
+                <a:latin typeface="Segoe UI"/>
               </a:defRPr>
             </a:pPr>
             <a:r>
@@ -8945,8 +11145,8 @@
         </p:nvSpPr>
         <p:spPr>
           <a:xfrm>
-            <a:off x="548640" y="1371600"/>
-            <a:ext cx="11094415" cy="548640"/>
+            <a:off x="731520" y="1234440"/>
+            <a:ext cx="10728655" cy="548640"/>
           </a:xfrm>
           <a:prstGeom prst="rect">
             <a:avLst/>
@@ -8964,7 +11164,7 @@
                 <a:solidFill>
                   <a:srgbClr val="64748B"/>
                 </a:solidFill>
-                <a:latin typeface="Arial"/>
+                <a:latin typeface="Segoe UI"/>
               </a:defRPr>
             </a:pPr>
             <a:r>
@@ -8981,8 +11181,8 @@
         </p:nvSpPr>
         <p:spPr>
           <a:xfrm>
-            <a:off x="1097280" y="2103120"/>
-            <a:ext cx="4754880" cy="3291840"/>
+            <a:off x="1188720" y="1965960"/>
+            <a:ext cx="4663440" cy="3474720"/>
           </a:xfrm>
           <a:prstGeom prst="roundRect">
             <a:avLst/>
@@ -8990,7 +11190,7 @@
           <a:solidFill>
             <a:srgbClr val="FFFFFF"/>
           </a:solidFill>
-          <a:ln>
+          <a:ln w="12700">
             <a:solidFill>
               <a:srgbClr val="00873E"/>
             </a:solidFill>
@@ -9011,15 +11211,41 @@
           </a:fontRef>
         </p:style>
         <p:txBody>
-          <a:bodyPr rtlCol="0" anchor="ctr" wrap="square" lIns="274320" tIns="274320" rIns="274320" bIns="274320"/>
+          <a:bodyPr rtlCol="0" anchor="ctr"/>
+          <a:lstStyle/>
+          <a:p>
+            <a:pPr algn="ctr"/>
+          </a:p>
+        </p:txBody>
+      </p:sp>
+      <p:sp>
+        <p:nvSpPr>
+          <p:cNvPr id="10" name="TextBox 9"/>
+          <p:cNvSpPr txBox="1"/>
+          <p:nvPr/>
+        </p:nvSpPr>
+        <p:spPr>
+          <a:xfrm>
+            <a:off x="1371600" y="2194560"/>
+            <a:ext cx="4297680" cy="3017520"/>
+          </a:xfrm>
+          <a:prstGeom prst="rect">
+            <a:avLst/>
+          </a:prstGeom>
+          <a:noFill/>
+        </p:spPr>
+        <p:txBody>
+          <a:bodyPr wrap="square">
+            <a:spAutoFit/>
+          </a:bodyPr>
           <a:lstStyle/>
           <a:p>
             <a:pPr algn="ctr">
-              <a:defRPr sz="1800" b="1">
+              <a:defRPr sz="1700" b="1">
                 <a:solidFill>
                   <a:srgbClr val="00873E"/>
                 </a:solidFill>
-                <a:latin typeface="Arial"/>
+                <a:latin typeface="Segoe UI"/>
               </a:defRPr>
             </a:pPr>
             <a:r>
@@ -9029,11 +11255,11 @@
           <a:p>
             <a:br/>
             <a:pPr algn="ctr">
-              <a:defRPr sz="1200">
-                <a:solidFill>
-                  <a:srgbClr val="1E293B"/>
-                </a:solidFill>
-                <a:latin typeface="Arial"/>
+              <a:defRPr sz="1150">
+                <a:solidFill>
+                  <a:srgbClr val="64748B"/>
+                </a:solidFill>
+                <a:latin typeface="Segoe UI"/>
               </a:defRPr>
             </a:pPr>
             <a:r>
@@ -9043,11 +11269,11 @@
           <a:p>
             <a:br/>
             <a:pPr algn="ctr">
-              <a:defRPr sz="1100" b="1">
+              <a:defRPr sz="1050" b="1">
                 <a:solidFill>
                   <a:srgbClr val="00873E"/>
                 </a:solidFill>
-                <a:latin typeface="Courier New"/>
+                <a:latin typeface="Consolas"/>
               </a:defRPr>
             </a:pPr>
             <a:r>
@@ -9058,14 +11284,14 @@
       </p:sp>
       <p:sp>
         <p:nvSpPr>
-          <p:cNvPr id="10" name="Rounded Rectangle 9"/>
+          <p:cNvPr id="11" name="Rounded Rectangle 10"/>
           <p:cNvSpPr/>
           <p:nvPr/>
         </p:nvSpPr>
         <p:spPr>
           <a:xfrm>
-            <a:off x="6309360" y="2103120"/>
-            <a:ext cx="4754880" cy="3291840"/>
+            <a:off x="6339535" y="1965960"/>
+            <a:ext cx="4663440" cy="3474720"/>
           </a:xfrm>
           <a:prstGeom prst="roundRect">
             <a:avLst/>
@@ -9073,7 +11299,7 @@
           <a:solidFill>
             <a:srgbClr val="FFFFFF"/>
           </a:solidFill>
-          <a:ln>
+          <a:ln w="12700">
             <a:solidFill>
               <a:srgbClr val="0284C7"/>
             </a:solidFill>
@@ -9094,15 +11320,41 @@
           </a:fontRef>
         </p:style>
         <p:txBody>
-          <a:bodyPr rtlCol="0" anchor="ctr" wrap="square" lIns="274320" tIns="274320" rIns="274320" bIns="274320"/>
+          <a:bodyPr rtlCol="0" anchor="ctr"/>
+          <a:lstStyle/>
+          <a:p>
+            <a:pPr algn="ctr"/>
+          </a:p>
+        </p:txBody>
+      </p:sp>
+      <p:sp>
+        <p:nvSpPr>
+          <p:cNvPr id="12" name="TextBox 11"/>
+          <p:cNvSpPr txBox="1"/>
+          <p:nvPr/>
+        </p:nvSpPr>
+        <p:spPr>
+          <a:xfrm>
+            <a:off x="6522415" y="2194560"/>
+            <a:ext cx="4297680" cy="3017520"/>
+          </a:xfrm>
+          <a:prstGeom prst="rect">
+            <a:avLst/>
+          </a:prstGeom>
+          <a:noFill/>
+        </p:spPr>
+        <p:txBody>
+          <a:bodyPr wrap="square">
+            <a:spAutoFit/>
+          </a:bodyPr>
           <a:lstStyle/>
           <a:p>
             <a:pPr algn="ctr">
-              <a:defRPr sz="1800" b="1">
+              <a:defRPr sz="1700" b="1">
                 <a:solidFill>
                   <a:srgbClr val="0284C7"/>
                 </a:solidFill>
-                <a:latin typeface="Arial"/>
+                <a:latin typeface="Segoe UI"/>
               </a:defRPr>
             </a:pPr>
             <a:r>
@@ -9112,11 +11364,11 @@
           <a:p>
             <a:br/>
             <a:pPr algn="ctr">
-              <a:defRPr sz="1200">
-                <a:solidFill>
-                  <a:srgbClr val="1E293B"/>
-                </a:solidFill>
-                <a:latin typeface="Arial"/>
+              <a:defRPr sz="1150">
+                <a:solidFill>
+                  <a:srgbClr val="64748B"/>
+                </a:solidFill>
+                <a:latin typeface="Segoe UI"/>
               </a:defRPr>
             </a:pPr>
             <a:r>
@@ -9126,11 +11378,11 @@
           <a:p>
             <a:br/>
             <a:pPr algn="ctr">
-              <a:defRPr sz="1100" b="1">
+              <a:defRPr sz="1050" b="1">
                 <a:solidFill>
                   <a:srgbClr val="0284C7"/>
                 </a:solidFill>
-                <a:latin typeface="Courier New"/>
+                <a:latin typeface="Consolas"/>
               </a:defRPr>
             </a:pPr>
             <a:r>
@@ -9141,14 +11393,14 @@
       </p:sp>
       <p:sp>
         <p:nvSpPr>
-          <p:cNvPr id="11" name="Rounded Rectangle 10"/>
+          <p:cNvPr id="13" name="Rounded Rectangle 12"/>
           <p:cNvSpPr/>
           <p:nvPr/>
         </p:nvSpPr>
         <p:spPr>
           <a:xfrm>
-            <a:off x="1097280" y="5577840"/>
-            <a:ext cx="9966960" cy="502920"/>
+            <a:off x="1188720" y="5623560"/>
+            <a:ext cx="9814255" cy="457200"/>
           </a:xfrm>
           <a:prstGeom prst="roundRect">
             <a:avLst/>
@@ -9156,9 +11408,9 @@
           <a:solidFill>
             <a:srgbClr val="F0FDF4"/>
           </a:solidFill>
-          <a:ln>
+          <a:ln w="12700">
             <a:solidFill>
-              <a:srgbClr val="10B981"/>
+              <a:srgbClr val="BBF7D0"/>
             </a:solidFill>
           </a:ln>
         </p:spPr>
@@ -9180,12 +11432,38 @@
           <a:bodyPr rtlCol="0" anchor="ctr"/>
           <a:lstStyle/>
           <a:p>
+            <a:pPr algn="ctr"/>
+          </a:p>
+        </p:txBody>
+      </p:sp>
+      <p:sp>
+        <p:nvSpPr>
+          <p:cNvPr id="14" name="TextBox 13"/>
+          <p:cNvSpPr txBox="1"/>
+          <p:nvPr/>
+        </p:nvSpPr>
+        <p:spPr>
+          <a:xfrm>
+            <a:off x="1371600" y="5687568"/>
+            <a:ext cx="9448495" cy="320040"/>
+          </a:xfrm>
+          <a:prstGeom prst="rect">
+            <a:avLst/>
+          </a:prstGeom>
+          <a:noFill/>
+        </p:spPr>
+        <p:txBody>
+          <a:bodyPr wrap="none">
+            <a:spAutoFit/>
+          </a:bodyPr>
+          <a:lstStyle/>
+          <a:p>
             <a:pPr algn="ctr">
-              <a:defRPr sz="1200" b="1">
+              <a:defRPr sz="1100" b="1">
                 <a:solidFill>
                   <a:srgbClr val="00873E"/>
                 </a:solidFill>
-                <a:latin typeface="Arial"/>
+                <a:latin typeface="Segoe UI"/>
               </a:defRPr>
             </a:pPr>
             <a:r>

--- a/Relatorio_Atividade_2_Slides.pptx
+++ b/Relatorio_Atividade_2_Slides.pptx
@@ -5,21 +5,21 @@
     <p:sldMasterId id="2147483648" r:id="rId1"/>
   </p:sldMasterIdLst>
   <p:sldIdLst>
-    <p:sldId id="256" r:id="rId7"/>
-    <p:sldId id="257" r:id="rId8"/>
-    <p:sldId id="258" r:id="rId9"/>
-    <p:sldId id="259" r:id="rId10"/>
-    <p:sldId id="260" r:id="rId11"/>
-    <p:sldId id="261" r:id="rId12"/>
-    <p:sldId id="262" r:id="rId13"/>
-    <p:sldId id="263" r:id="rId14"/>
-    <p:sldId id="264" r:id="rId15"/>
-    <p:sldId id="265" r:id="rId16"/>
-    <p:sldId id="266" r:id="rId17"/>
-    <p:sldId id="267" r:id="rId18"/>
-    <p:sldId id="268" r:id="rId19"/>
+    <p:sldId id="256" r:id="rId2"/>
+    <p:sldId id="257" r:id="rId3"/>
+    <p:sldId id="258" r:id="rId4"/>
+    <p:sldId id="259" r:id="rId5"/>
+    <p:sldId id="260" r:id="rId6"/>
+    <p:sldId id="261" r:id="rId7"/>
+    <p:sldId id="262" r:id="rId8"/>
+    <p:sldId id="263" r:id="rId9"/>
+    <p:sldId id="264" r:id="rId10"/>
+    <p:sldId id="265" r:id="rId11"/>
+    <p:sldId id="266" r:id="rId12"/>
+    <p:sldId id="267" r:id="rId13"/>
+    <p:sldId id="268" r:id="rId14"/>
   </p:sldIdLst>
-  <p:sldSz cx="12191695" cy="6858000" type="screen4x3"/>
+  <p:sldSz cx="12192000" cy="6858000"/>
   <p:notesSz cx="6858000" cy="9144000"/>
   <p:defaultTextStyle>
     <a:defPPr>
@@ -116,7 +116,246 @@
       </a:defRPr>
     </a:lvl9pPr>
   </p:defaultTextStyle>
+  <p:extLst>
+    <p:ext uri="{EFAFB233-063F-42B5-8137-9DF3F51BA10A}">
+      <p15:sldGuideLst xmlns:p15="http://schemas.microsoft.com/office/powerpoint/2012/main">
+        <p15:guide id="1" orient="horz" pos="2160">
+          <p15:clr>
+            <a:srgbClr val="A4A3A4"/>
+          </p15:clr>
+        </p15:guide>
+        <p15:guide id="2" pos="2880">
+          <p15:clr>
+            <a:srgbClr val="A4A3A4"/>
+          </p15:clr>
+        </p15:guide>
+      </p15:sldGuideLst>
+    </p:ext>
+  </p:extLst>
 </p:presentation>
+</file>
+
+<file path=ppt/changesInfos/changesInfo1.xml><?xml version="1.0" encoding="utf-8"?>
+<pc:chgInfo xmlns:a="http://schemas.openxmlformats.org/drawingml/2006/main" xmlns:r="http://schemas.openxmlformats.org/officeDocument/2006/relationships" xmlns:ac="http://schemas.microsoft.com/office/drawing/2013/main/command" xmlns:pc="http://schemas.microsoft.com/office/powerpoint/2013/main/command">
+  <pc:docChgLst>
+    <pc:chgData name="Amberson Rogers Lindoso da Silva" userId="1e7355cac7a206dd" providerId="LiveId" clId="{F3CFAD84-59F1-4795-A6D8-6D79CCCB1EA4}"/>
+    <pc:docChg chg="undo custSel modSld">
+      <pc:chgData name="Amberson Rogers Lindoso da Silva" userId="1e7355cac7a206dd" providerId="LiveId" clId="{F3CFAD84-59F1-4795-A6D8-6D79CCCB1EA4}" dt="2026-09-17T17:32:43.060" v="145" actId="20577"/>
+      <pc:docMkLst>
+        <pc:docMk/>
+      </pc:docMkLst>
+      <pc:sldChg chg="modSp mod">
+        <pc:chgData name="Amberson Rogers Lindoso da Silva" userId="1e7355cac7a206dd" providerId="LiveId" clId="{F3CFAD84-59F1-4795-A6D8-6D79CCCB1EA4}" dt="2026-09-17T17:22:47.199" v="29" actId="113"/>
+        <pc:sldMkLst>
+          <pc:docMk/>
+          <pc:sldMk cId="0" sldId="256"/>
+        </pc:sldMkLst>
+        <pc:spChg chg="mod">
+          <ac:chgData name="Amberson Rogers Lindoso da Silva" userId="1e7355cac7a206dd" providerId="LiveId" clId="{F3CFAD84-59F1-4795-A6D8-6D79CCCB1EA4}" dt="2026-09-17T17:22:47.199" v="29" actId="113"/>
+          <ac:spMkLst>
+            <pc:docMk/>
+            <pc:sldMk cId="0" sldId="256"/>
+            <ac:spMk id="3" creationId="{00000000-0000-0000-0000-000000000000}"/>
+          </ac:spMkLst>
+        </pc:spChg>
+      </pc:sldChg>
+      <pc:sldChg chg="modSp mod">
+        <pc:chgData name="Amberson Rogers Lindoso da Silva" userId="1e7355cac7a206dd" providerId="LiveId" clId="{F3CFAD84-59F1-4795-A6D8-6D79CCCB1EA4}" dt="2026-09-17T17:27:08.993" v="72" actId="403"/>
+        <pc:sldMkLst>
+          <pc:docMk/>
+          <pc:sldMk cId="0" sldId="257"/>
+        </pc:sldMkLst>
+        <pc:spChg chg="mod">
+          <ac:chgData name="Amberson Rogers Lindoso da Silva" userId="1e7355cac7a206dd" providerId="LiveId" clId="{F3CFAD84-59F1-4795-A6D8-6D79CCCB1EA4}" dt="2026-09-17T17:23:45.265" v="33" actId="20577"/>
+          <ac:spMkLst>
+            <pc:docMk/>
+            <pc:sldMk cId="0" sldId="257"/>
+            <ac:spMk id="8" creationId="{00000000-0000-0000-0000-000000000000}"/>
+          </ac:spMkLst>
+        </pc:spChg>
+        <pc:spChg chg="mod">
+          <ac:chgData name="Amberson Rogers Lindoso da Silva" userId="1e7355cac7a206dd" providerId="LiveId" clId="{F3CFAD84-59F1-4795-A6D8-6D79CCCB1EA4}" dt="2026-09-17T17:23:52.944" v="34" actId="123"/>
+          <ac:spMkLst>
+            <pc:docMk/>
+            <pc:sldMk cId="0" sldId="257"/>
+            <ac:spMk id="11" creationId="{00000000-0000-0000-0000-000000000000}"/>
+          </ac:spMkLst>
+        </pc:spChg>
+        <pc:spChg chg="mod">
+          <ac:chgData name="Amberson Rogers Lindoso da Silva" userId="1e7355cac7a206dd" providerId="LiveId" clId="{F3CFAD84-59F1-4795-A6D8-6D79CCCB1EA4}" dt="2026-09-17T17:27:08.993" v="72" actId="403"/>
+          <ac:spMkLst>
+            <pc:docMk/>
+            <pc:sldMk cId="0" sldId="257"/>
+            <ac:spMk id="13" creationId="{00000000-0000-0000-0000-000000000000}"/>
+          </ac:spMkLst>
+        </pc:spChg>
+      </pc:sldChg>
+      <pc:sldChg chg="modSp mod">
+        <pc:chgData name="Amberson Rogers Lindoso da Silva" userId="1e7355cac7a206dd" providerId="LiveId" clId="{F3CFAD84-59F1-4795-A6D8-6D79CCCB1EA4}" dt="2026-09-17T17:27:20.811" v="76" actId="403"/>
+        <pc:sldMkLst>
+          <pc:docMk/>
+          <pc:sldMk cId="0" sldId="258"/>
+        </pc:sldMkLst>
+        <pc:spChg chg="mod">
+          <ac:chgData name="Amberson Rogers Lindoso da Silva" userId="1e7355cac7a206dd" providerId="LiveId" clId="{F3CFAD84-59F1-4795-A6D8-6D79CCCB1EA4}" dt="2026-09-17T17:27:15.354" v="73" actId="403"/>
+          <ac:spMkLst>
+            <pc:docMk/>
+            <pc:sldMk cId="0" sldId="258"/>
+            <ac:spMk id="8" creationId="{00000000-0000-0000-0000-000000000000}"/>
+          </ac:spMkLst>
+        </pc:spChg>
+        <pc:spChg chg="mod">
+          <ac:chgData name="Amberson Rogers Lindoso da Silva" userId="1e7355cac7a206dd" providerId="LiveId" clId="{F3CFAD84-59F1-4795-A6D8-6D79CCCB1EA4}" dt="2026-09-17T17:24:15.661" v="40" actId="123"/>
+          <ac:spMkLst>
+            <pc:docMk/>
+            <pc:sldMk cId="0" sldId="258"/>
+            <ac:spMk id="11" creationId="{00000000-0000-0000-0000-000000000000}"/>
+          </ac:spMkLst>
+        </pc:spChg>
+        <pc:spChg chg="mod">
+          <ac:chgData name="Amberson Rogers Lindoso da Silva" userId="1e7355cac7a206dd" providerId="LiveId" clId="{F3CFAD84-59F1-4795-A6D8-6D79CCCB1EA4}" dt="2026-09-17T17:27:20.811" v="76" actId="403"/>
+          <ac:spMkLst>
+            <pc:docMk/>
+            <pc:sldMk cId="0" sldId="258"/>
+            <ac:spMk id="13" creationId="{00000000-0000-0000-0000-000000000000}"/>
+          </ac:spMkLst>
+        </pc:spChg>
+      </pc:sldChg>
+      <pc:sldChg chg="modSp mod">
+        <pc:chgData name="Amberson Rogers Lindoso da Silva" userId="1e7355cac7a206dd" providerId="LiveId" clId="{F3CFAD84-59F1-4795-A6D8-6D79CCCB1EA4}" dt="2026-09-17T17:27:44.047" v="80" actId="403"/>
+        <pc:sldMkLst>
+          <pc:docMk/>
+          <pc:sldMk cId="0" sldId="259"/>
+        </pc:sldMkLst>
+        <pc:spChg chg="mod">
+          <ac:chgData name="Amberson Rogers Lindoso da Silva" userId="1e7355cac7a206dd" providerId="LiveId" clId="{F3CFAD84-59F1-4795-A6D8-6D79CCCB1EA4}" dt="2026-09-17T17:27:32.622" v="79" actId="20577"/>
+          <ac:spMkLst>
+            <pc:docMk/>
+            <pc:sldMk cId="0" sldId="259"/>
+            <ac:spMk id="8" creationId="{00000000-0000-0000-0000-000000000000}"/>
+          </ac:spMkLst>
+        </pc:spChg>
+        <pc:spChg chg="mod">
+          <ac:chgData name="Amberson Rogers Lindoso da Silva" userId="1e7355cac7a206dd" providerId="LiveId" clId="{F3CFAD84-59F1-4795-A6D8-6D79CCCB1EA4}" dt="2026-09-17T17:26:14.327" v="64" actId="403"/>
+          <ac:spMkLst>
+            <pc:docMk/>
+            <pc:sldMk cId="0" sldId="259"/>
+            <ac:spMk id="11" creationId="{00000000-0000-0000-0000-000000000000}"/>
+          </ac:spMkLst>
+        </pc:spChg>
+        <pc:spChg chg="mod">
+          <ac:chgData name="Amberson Rogers Lindoso da Silva" userId="1e7355cac7a206dd" providerId="LiveId" clId="{F3CFAD84-59F1-4795-A6D8-6D79CCCB1EA4}" dt="2026-09-17T17:27:44.047" v="80" actId="403"/>
+          <ac:spMkLst>
+            <pc:docMk/>
+            <pc:sldMk cId="0" sldId="259"/>
+            <ac:spMk id="12" creationId="{00000000-0000-0000-0000-000000000000}"/>
+          </ac:spMkLst>
+        </pc:spChg>
+        <pc:spChg chg="mod">
+          <ac:chgData name="Amberson Rogers Lindoso da Silva" userId="1e7355cac7a206dd" providerId="LiveId" clId="{F3CFAD84-59F1-4795-A6D8-6D79CCCB1EA4}" dt="2026-09-17T17:26:18.424" v="66" actId="403"/>
+          <ac:spMkLst>
+            <pc:docMk/>
+            <pc:sldMk cId="0" sldId="259"/>
+            <ac:spMk id="14" creationId="{00000000-0000-0000-0000-000000000000}"/>
+          </ac:spMkLst>
+        </pc:spChg>
+      </pc:sldChg>
+      <pc:sldChg chg="modSp mod">
+        <pc:chgData name="Amberson Rogers Lindoso da Silva" userId="1e7355cac7a206dd" providerId="LiveId" clId="{F3CFAD84-59F1-4795-A6D8-6D79CCCB1EA4}" dt="2026-09-17T17:28:18.880" v="87" actId="403"/>
+        <pc:sldMkLst>
+          <pc:docMk/>
+          <pc:sldMk cId="0" sldId="260"/>
+        </pc:sldMkLst>
+        <pc:spChg chg="mod">
+          <ac:chgData name="Amberson Rogers Lindoso da Silva" userId="1e7355cac7a206dd" providerId="LiveId" clId="{F3CFAD84-59F1-4795-A6D8-6D79CCCB1EA4}" dt="2026-09-17T17:26:57.307" v="71" actId="123"/>
+          <ac:spMkLst>
+            <pc:docMk/>
+            <pc:sldMk cId="0" sldId="260"/>
+            <ac:spMk id="8" creationId="{00000000-0000-0000-0000-000000000000}"/>
+          </ac:spMkLst>
+        </pc:spChg>
+        <pc:spChg chg="mod">
+          <ac:chgData name="Amberson Rogers Lindoso da Silva" userId="1e7355cac7a206dd" providerId="LiveId" clId="{F3CFAD84-59F1-4795-A6D8-6D79CCCB1EA4}" dt="2026-09-17T17:28:18.880" v="87" actId="403"/>
+          <ac:spMkLst>
+            <pc:docMk/>
+            <pc:sldMk cId="0" sldId="260"/>
+            <ac:spMk id="10" creationId="{00000000-0000-0000-0000-000000000000}"/>
+          </ac:spMkLst>
+        </pc:spChg>
+        <pc:spChg chg="mod">
+          <ac:chgData name="Amberson Rogers Lindoso da Silva" userId="1e7355cac7a206dd" providerId="LiveId" clId="{F3CFAD84-59F1-4795-A6D8-6D79CCCB1EA4}" dt="2026-09-17T17:26:51.284" v="70" actId="403"/>
+          <ac:spMkLst>
+            <pc:docMk/>
+            <pc:sldMk cId="0" sldId="260"/>
+            <ac:spMk id="13" creationId="{00000000-0000-0000-0000-000000000000}"/>
+          </ac:spMkLst>
+        </pc:spChg>
+      </pc:sldChg>
+      <pc:sldChg chg="modSp mod">
+        <pc:chgData name="Amberson Rogers Lindoso da Silva" userId="1e7355cac7a206dd" providerId="LiveId" clId="{F3CFAD84-59F1-4795-A6D8-6D79CCCB1EA4}" dt="2026-09-17T17:30:23.740" v="119" actId="255"/>
+        <pc:sldMkLst>
+          <pc:docMk/>
+          <pc:sldMk cId="0" sldId="261"/>
+        </pc:sldMkLst>
+        <pc:spChg chg="mod">
+          <ac:chgData name="Amberson Rogers Lindoso da Silva" userId="1e7355cac7a206dd" providerId="LiveId" clId="{F3CFAD84-59F1-4795-A6D8-6D79CCCB1EA4}" dt="2026-09-17T17:30:23.740" v="119" actId="255"/>
+          <ac:spMkLst>
+            <pc:docMk/>
+            <pc:sldMk cId="0" sldId="261"/>
+            <ac:spMk id="9" creationId="{00000000-0000-0000-0000-000000000000}"/>
+          </ac:spMkLst>
+        </pc:spChg>
+        <pc:spChg chg="mod">
+          <ac:chgData name="Amberson Rogers Lindoso da Silva" userId="1e7355cac7a206dd" providerId="LiveId" clId="{F3CFAD84-59F1-4795-A6D8-6D79CCCB1EA4}" dt="2026-09-17T17:29:44.799" v="103" actId="403"/>
+          <ac:spMkLst>
+            <pc:docMk/>
+            <pc:sldMk cId="0" sldId="261"/>
+            <ac:spMk id="12" creationId="{00000000-0000-0000-0000-000000000000}"/>
+          </ac:spMkLst>
+        </pc:spChg>
+        <pc:spChg chg="mod">
+          <ac:chgData name="Amberson Rogers Lindoso da Silva" userId="1e7355cac7a206dd" providerId="LiveId" clId="{F3CFAD84-59F1-4795-A6D8-6D79CCCB1EA4}" dt="2026-09-17T17:29:49.894" v="105" actId="122"/>
+          <ac:spMkLst>
+            <pc:docMk/>
+            <pc:sldMk cId="0" sldId="261"/>
+            <ac:spMk id="15" creationId="{00000000-0000-0000-0000-000000000000}"/>
+          </ac:spMkLst>
+        </pc:spChg>
+      </pc:sldChg>
+      <pc:sldChg chg="modSp mod">
+        <pc:chgData name="Amberson Rogers Lindoso da Silva" userId="1e7355cac7a206dd" providerId="LiveId" clId="{F3CFAD84-59F1-4795-A6D8-6D79CCCB1EA4}" dt="2026-09-17T17:32:43.060" v="145" actId="20577"/>
+        <pc:sldMkLst>
+          <pc:docMk/>
+          <pc:sldMk cId="0" sldId="262"/>
+        </pc:sldMkLst>
+        <pc:spChg chg="mod">
+          <ac:chgData name="Amberson Rogers Lindoso da Silva" userId="1e7355cac7a206dd" providerId="LiveId" clId="{F3CFAD84-59F1-4795-A6D8-6D79CCCB1EA4}" dt="2026-09-17T17:32:43.060" v="145" actId="20577"/>
+          <ac:spMkLst>
+            <pc:docMk/>
+            <pc:sldMk cId="0" sldId="262"/>
+            <ac:spMk id="9" creationId="{00000000-0000-0000-0000-000000000000}"/>
+          </ac:spMkLst>
+        </pc:spChg>
+        <pc:spChg chg="mod">
+          <ac:chgData name="Amberson Rogers Lindoso da Silva" userId="1e7355cac7a206dd" providerId="LiveId" clId="{F3CFAD84-59F1-4795-A6D8-6D79CCCB1EA4}" dt="2026-09-17T17:32:12.219" v="135" actId="122"/>
+          <ac:spMkLst>
+            <pc:docMk/>
+            <pc:sldMk cId="0" sldId="262"/>
+            <ac:spMk id="12" creationId="{00000000-0000-0000-0000-000000000000}"/>
+          </ac:spMkLst>
+        </pc:spChg>
+        <pc:spChg chg="mod">
+          <ac:chgData name="Amberson Rogers Lindoso da Silva" userId="1e7355cac7a206dd" providerId="LiveId" clId="{F3CFAD84-59F1-4795-A6D8-6D79CCCB1EA4}" dt="2026-09-17T17:32:02.757" v="132" actId="1076"/>
+          <ac:spMkLst>
+            <pc:docMk/>
+            <pc:sldMk cId="0" sldId="262"/>
+            <ac:spMk id="14" creationId="{00000000-0000-0000-0000-000000000000}"/>
+          </ac:spMkLst>
+        </pc:spChg>
+      </pc:sldChg>
+    </pc:docChg>
+  </pc:docChgLst>
+</pc:chgInfo>
 </file>
 
 <file path=ppt/slideLayouts/slideLayout1.xml><?xml version="1.0" encoding="utf-8"?>
@@ -157,10 +396,9 @@
           <a:lstStyle/>
           <a:p>
             <a:r>
-              <a:rPr lang="en-US" smtClean="0"/>
+              <a:rPr lang="en-US"/>
               <a:t>Click to edit Master title style</a:t>
             </a:r>
-            <a:endParaRPr lang="en-US"/>
           </a:p>
         </p:txBody>
       </p:sp>
@@ -276,10 +514,9 @@
           </a:lstStyle>
           <a:p>
             <a:r>
-              <a:rPr lang="en-US" smtClean="0"/>
+              <a:rPr lang="en-US"/>
               <a:t>Click to edit Master subtitle style</a:t>
             </a:r>
-            <a:endParaRPr lang="en-US"/>
           </a:p>
         </p:txBody>
       </p:sp>
@@ -300,7 +537,7 @@
           <a:p>
             <a:fld id="{5BCAD085-E8A6-8845-BD4E-CB4CCA059FC4}" type="datetimeFigureOut">
               <a:rPr lang="en-US" smtClean="0"/>
-              <a:t>1/27/13</a:t>
+              <a:t>9/17/2026</a:t>
             </a:fld>
             <a:endParaRPr lang="en-US"/>
           </a:p>
@@ -342,7 +579,7 @@
           <a:p>
             <a:fld id="{C1FF6DA9-008F-8B48-92A6-B652298478BF}" type="slidenum">
               <a:rPr lang="en-US" smtClean="0"/>
-              <a:t>‹#›</a:t>
+              <a:t>‹nº›</a:t>
             </a:fld>
             <a:endParaRPr lang="en-US"/>
           </a:p>
@@ -394,10 +631,9 @@
           <a:lstStyle/>
           <a:p>
             <a:r>
-              <a:rPr lang="en-US" smtClean="0"/>
+              <a:rPr lang="en-US"/>
               <a:t>Click to edit Master title style</a:t>
             </a:r>
-            <a:endParaRPr lang="en-US"/>
           </a:p>
         </p:txBody>
       </p:sp>
@@ -418,38 +654,37 @@
           <a:p>
             <a:pPr lvl="0"/>
             <a:r>
-              <a:rPr lang="en-US" smtClean="0"/>
+              <a:rPr lang="en-US"/>
               <a:t>Click to edit Master text styles</a:t>
             </a:r>
           </a:p>
           <a:p>
             <a:pPr lvl="1"/>
             <a:r>
-              <a:rPr lang="en-US" smtClean="0"/>
+              <a:rPr lang="en-US"/>
               <a:t>Second level</a:t>
             </a:r>
           </a:p>
           <a:p>
             <a:pPr lvl="2"/>
             <a:r>
-              <a:rPr lang="en-US" smtClean="0"/>
+              <a:rPr lang="en-US"/>
               <a:t>Third level</a:t>
             </a:r>
           </a:p>
           <a:p>
             <a:pPr lvl="3"/>
             <a:r>
-              <a:rPr lang="en-US" smtClean="0"/>
+              <a:rPr lang="en-US"/>
               <a:t>Fourth level</a:t>
             </a:r>
           </a:p>
           <a:p>
             <a:pPr lvl="4"/>
             <a:r>
-              <a:rPr lang="en-US" smtClean="0"/>
+              <a:rPr lang="en-US"/>
               <a:t>Fifth level</a:t>
             </a:r>
-            <a:endParaRPr lang="en-US"/>
           </a:p>
         </p:txBody>
       </p:sp>
@@ -470,7 +705,7 @@
           <a:p>
             <a:fld id="{5BCAD085-E8A6-8845-BD4E-CB4CCA059FC4}" type="datetimeFigureOut">
               <a:rPr lang="en-US" smtClean="0"/>
-              <a:t>1/27/13</a:t>
+              <a:t>9/17/2026</a:t>
             </a:fld>
             <a:endParaRPr lang="en-US"/>
           </a:p>
@@ -512,7 +747,7 @@
           <a:p>
             <a:fld id="{C1FF6DA9-008F-8B48-92A6-B652298478BF}" type="slidenum">
               <a:rPr lang="en-US" smtClean="0"/>
-              <a:t>‹#›</a:t>
+              <a:t>‹nº›</a:t>
             </a:fld>
             <a:endParaRPr lang="en-US"/>
           </a:p>
@@ -569,10 +804,9 @@
           <a:lstStyle/>
           <a:p>
             <a:r>
-              <a:rPr lang="en-US" smtClean="0"/>
+              <a:rPr lang="en-US"/>
               <a:t>Click to edit Master title style</a:t>
             </a:r>
-            <a:endParaRPr lang="en-US"/>
           </a:p>
         </p:txBody>
       </p:sp>
@@ -598,38 +832,37 @@
           <a:p>
             <a:pPr lvl="0"/>
             <a:r>
-              <a:rPr lang="en-US" smtClean="0"/>
+              <a:rPr lang="en-US"/>
               <a:t>Click to edit Master text styles</a:t>
             </a:r>
           </a:p>
           <a:p>
             <a:pPr lvl="1"/>
             <a:r>
-              <a:rPr lang="en-US" smtClean="0"/>
+              <a:rPr lang="en-US"/>
               <a:t>Second level</a:t>
             </a:r>
           </a:p>
           <a:p>
             <a:pPr lvl="2"/>
             <a:r>
-              <a:rPr lang="en-US" smtClean="0"/>
+              <a:rPr lang="en-US"/>
               <a:t>Third level</a:t>
             </a:r>
           </a:p>
           <a:p>
             <a:pPr lvl="3"/>
             <a:r>
-              <a:rPr lang="en-US" smtClean="0"/>
+              <a:rPr lang="en-US"/>
               <a:t>Fourth level</a:t>
             </a:r>
           </a:p>
           <a:p>
             <a:pPr lvl="4"/>
             <a:r>
-              <a:rPr lang="en-US" smtClean="0"/>
+              <a:rPr lang="en-US"/>
               <a:t>Fifth level</a:t>
             </a:r>
-            <a:endParaRPr lang="en-US"/>
           </a:p>
         </p:txBody>
       </p:sp>
@@ -650,7 +883,7 @@
           <a:p>
             <a:fld id="{5BCAD085-E8A6-8845-BD4E-CB4CCA059FC4}" type="datetimeFigureOut">
               <a:rPr lang="en-US" smtClean="0"/>
-              <a:t>1/27/13</a:t>
+              <a:t>9/17/2026</a:t>
             </a:fld>
             <a:endParaRPr lang="en-US"/>
           </a:p>
@@ -692,7 +925,7 @@
           <a:p>
             <a:fld id="{C1FF6DA9-008F-8B48-92A6-B652298478BF}" type="slidenum">
               <a:rPr lang="en-US" smtClean="0"/>
-              <a:t>‹#›</a:t>
+              <a:t>‹nº›</a:t>
             </a:fld>
             <a:endParaRPr lang="en-US"/>
           </a:p>
@@ -744,10 +977,9 @@
           <a:lstStyle/>
           <a:p>
             <a:r>
-              <a:rPr lang="en-US" smtClean="0"/>
+              <a:rPr lang="en-US"/>
               <a:t>Click to edit Master title style</a:t>
             </a:r>
-            <a:endParaRPr lang="en-US"/>
           </a:p>
         </p:txBody>
       </p:sp>
@@ -768,38 +1000,37 @@
           <a:p>
             <a:pPr lvl="0"/>
             <a:r>
-              <a:rPr lang="en-US" smtClean="0"/>
+              <a:rPr lang="en-US"/>
               <a:t>Click to edit Master text styles</a:t>
             </a:r>
           </a:p>
           <a:p>
             <a:pPr lvl="1"/>
             <a:r>
-              <a:rPr lang="en-US" smtClean="0"/>
+              <a:rPr lang="en-US"/>
               <a:t>Second level</a:t>
             </a:r>
           </a:p>
           <a:p>
             <a:pPr lvl="2"/>
             <a:r>
-              <a:rPr lang="en-US" smtClean="0"/>
+              <a:rPr lang="en-US"/>
               <a:t>Third level</a:t>
             </a:r>
           </a:p>
           <a:p>
             <a:pPr lvl="3"/>
             <a:r>
-              <a:rPr lang="en-US" smtClean="0"/>
+              <a:rPr lang="en-US"/>
               <a:t>Fourth level</a:t>
             </a:r>
           </a:p>
           <a:p>
             <a:pPr lvl="4"/>
             <a:r>
-              <a:rPr lang="en-US" smtClean="0"/>
+              <a:rPr lang="en-US"/>
               <a:t>Fifth level</a:t>
             </a:r>
-            <a:endParaRPr lang="en-US"/>
           </a:p>
         </p:txBody>
       </p:sp>
@@ -820,7 +1051,7 @@
           <a:p>
             <a:fld id="{5BCAD085-E8A6-8845-BD4E-CB4CCA059FC4}" type="datetimeFigureOut">
               <a:rPr lang="en-US" smtClean="0"/>
-              <a:t>1/27/13</a:t>
+              <a:t>9/17/2026</a:t>
             </a:fld>
             <a:endParaRPr lang="en-US"/>
           </a:p>
@@ -862,7 +1093,7 @@
           <a:p>
             <a:fld id="{C1FF6DA9-008F-8B48-92A6-B652298478BF}" type="slidenum">
               <a:rPr lang="en-US" smtClean="0"/>
-              <a:t>‹#›</a:t>
+              <a:t>‹nº›</a:t>
             </a:fld>
             <a:endParaRPr lang="en-US"/>
           </a:p>
@@ -923,10 +1154,9 @@
           </a:lstStyle>
           <a:p>
             <a:r>
-              <a:rPr lang="en-US" smtClean="0"/>
+              <a:rPr lang="en-US"/>
               <a:t>Click to edit Master title style</a:t>
             </a:r>
-            <a:endParaRPr lang="en-US"/>
           </a:p>
         </p:txBody>
       </p:sp>
@@ -1043,7 +1273,7 @@
           <a:p>
             <a:pPr lvl="0"/>
             <a:r>
-              <a:rPr lang="en-US" smtClean="0"/>
+              <a:rPr lang="en-US"/>
               <a:t>Click to edit Master text styles</a:t>
             </a:r>
           </a:p>
@@ -1066,7 +1296,7 @@
           <a:p>
             <a:fld id="{5BCAD085-E8A6-8845-BD4E-CB4CCA059FC4}" type="datetimeFigureOut">
               <a:rPr lang="en-US" smtClean="0"/>
-              <a:t>1/27/13</a:t>
+              <a:t>9/17/2026</a:t>
             </a:fld>
             <a:endParaRPr lang="en-US"/>
           </a:p>
@@ -1108,7 +1338,7 @@
           <a:p>
             <a:fld id="{C1FF6DA9-008F-8B48-92A6-B652298478BF}" type="slidenum">
               <a:rPr lang="en-US" smtClean="0"/>
-              <a:t>‹#›</a:t>
+              <a:t>‹nº›</a:t>
             </a:fld>
             <a:endParaRPr lang="en-US"/>
           </a:p>
@@ -1160,10 +1390,9 @@
           <a:lstStyle/>
           <a:p>
             <a:r>
-              <a:rPr lang="en-US" smtClean="0"/>
+              <a:rPr lang="en-US"/>
               <a:t>Click to edit Master title style</a:t>
             </a:r>
-            <a:endParaRPr lang="en-US"/>
           </a:p>
         </p:txBody>
       </p:sp>
@@ -1217,38 +1446,37 @@
           <a:p>
             <a:pPr lvl="0"/>
             <a:r>
-              <a:rPr lang="en-US" smtClean="0"/>
+              <a:rPr lang="en-US"/>
               <a:t>Click to edit Master text styles</a:t>
             </a:r>
           </a:p>
           <a:p>
             <a:pPr lvl="1"/>
             <a:r>
-              <a:rPr lang="en-US" smtClean="0"/>
+              <a:rPr lang="en-US"/>
               <a:t>Second level</a:t>
             </a:r>
           </a:p>
           <a:p>
             <a:pPr lvl="2"/>
             <a:r>
-              <a:rPr lang="en-US" smtClean="0"/>
+              <a:rPr lang="en-US"/>
               <a:t>Third level</a:t>
             </a:r>
           </a:p>
           <a:p>
             <a:pPr lvl="3"/>
             <a:r>
-              <a:rPr lang="en-US" smtClean="0"/>
+              <a:rPr lang="en-US"/>
               <a:t>Fourth level</a:t>
             </a:r>
           </a:p>
           <a:p>
             <a:pPr lvl="4"/>
             <a:r>
-              <a:rPr lang="en-US" smtClean="0"/>
+              <a:rPr lang="en-US"/>
               <a:t>Fifth level</a:t>
             </a:r>
-            <a:endParaRPr lang="en-US"/>
           </a:p>
         </p:txBody>
       </p:sp>
@@ -1302,38 +1530,37 @@
           <a:p>
             <a:pPr lvl="0"/>
             <a:r>
-              <a:rPr lang="en-US" smtClean="0"/>
+              <a:rPr lang="en-US"/>
               <a:t>Click to edit Master text styles</a:t>
             </a:r>
           </a:p>
           <a:p>
             <a:pPr lvl="1"/>
             <a:r>
-              <a:rPr lang="en-US" smtClean="0"/>
+              <a:rPr lang="en-US"/>
               <a:t>Second level</a:t>
             </a:r>
           </a:p>
           <a:p>
             <a:pPr lvl="2"/>
             <a:r>
-              <a:rPr lang="en-US" smtClean="0"/>
+              <a:rPr lang="en-US"/>
               <a:t>Third level</a:t>
             </a:r>
           </a:p>
           <a:p>
             <a:pPr lvl="3"/>
             <a:r>
-              <a:rPr lang="en-US" smtClean="0"/>
+              <a:rPr lang="en-US"/>
               <a:t>Fourth level</a:t>
             </a:r>
           </a:p>
           <a:p>
             <a:pPr lvl="4"/>
             <a:r>
-              <a:rPr lang="en-US" smtClean="0"/>
+              <a:rPr lang="en-US"/>
               <a:t>Fifth level</a:t>
             </a:r>
-            <a:endParaRPr lang="en-US"/>
           </a:p>
         </p:txBody>
       </p:sp>
@@ -1354,7 +1581,7 @@
           <a:p>
             <a:fld id="{5BCAD085-E8A6-8845-BD4E-CB4CCA059FC4}" type="datetimeFigureOut">
               <a:rPr lang="en-US" smtClean="0"/>
-              <a:t>1/27/13</a:t>
+              <a:t>9/17/2026</a:t>
             </a:fld>
             <a:endParaRPr lang="en-US"/>
           </a:p>
@@ -1396,7 +1623,7 @@
           <a:p>
             <a:fld id="{C1FF6DA9-008F-8B48-92A6-B652298478BF}" type="slidenum">
               <a:rPr lang="en-US" smtClean="0"/>
-              <a:t>‹#›</a:t>
+              <a:t>‹nº›</a:t>
             </a:fld>
             <a:endParaRPr lang="en-US"/>
           </a:p>
@@ -1452,10 +1679,9 @@
           </a:lstStyle>
           <a:p>
             <a:r>
-              <a:rPr lang="en-US" smtClean="0"/>
+              <a:rPr lang="en-US"/>
               <a:t>Click to edit Master title style</a:t>
             </a:r>
-            <a:endParaRPr lang="en-US"/>
           </a:p>
         </p:txBody>
       </p:sp>
@@ -1518,7 +1744,7 @@
           <a:p>
             <a:pPr lvl="0"/>
             <a:r>
-              <a:rPr lang="en-US" smtClean="0"/>
+              <a:rPr lang="en-US"/>
               <a:t>Click to edit Master text styles</a:t>
             </a:r>
           </a:p>
@@ -1574,38 +1800,37 @@
           <a:p>
             <a:pPr lvl="0"/>
             <a:r>
-              <a:rPr lang="en-US" smtClean="0"/>
+              <a:rPr lang="en-US"/>
               <a:t>Click to edit Master text styles</a:t>
             </a:r>
           </a:p>
           <a:p>
             <a:pPr lvl="1"/>
             <a:r>
-              <a:rPr lang="en-US" smtClean="0"/>
+              <a:rPr lang="en-US"/>
               <a:t>Second level</a:t>
             </a:r>
           </a:p>
           <a:p>
             <a:pPr lvl="2"/>
             <a:r>
-              <a:rPr lang="en-US" smtClean="0"/>
+              <a:rPr lang="en-US"/>
               <a:t>Third level</a:t>
             </a:r>
           </a:p>
           <a:p>
             <a:pPr lvl="3"/>
             <a:r>
-              <a:rPr lang="en-US" smtClean="0"/>
+              <a:rPr lang="en-US"/>
               <a:t>Fourth level</a:t>
             </a:r>
           </a:p>
           <a:p>
             <a:pPr lvl="4"/>
             <a:r>
-              <a:rPr lang="en-US" smtClean="0"/>
+              <a:rPr lang="en-US"/>
               <a:t>Fifth level</a:t>
             </a:r>
-            <a:endParaRPr lang="en-US"/>
           </a:p>
         </p:txBody>
       </p:sp>
@@ -1668,7 +1893,7 @@
           <a:p>
             <a:pPr lvl="0"/>
             <a:r>
-              <a:rPr lang="en-US" smtClean="0"/>
+              <a:rPr lang="en-US"/>
               <a:t>Click to edit Master text styles</a:t>
             </a:r>
           </a:p>
@@ -1724,38 +1949,37 @@
           <a:p>
             <a:pPr lvl="0"/>
             <a:r>
-              <a:rPr lang="en-US" smtClean="0"/>
+              <a:rPr lang="en-US"/>
               <a:t>Click to edit Master text styles</a:t>
             </a:r>
           </a:p>
           <a:p>
             <a:pPr lvl="1"/>
             <a:r>
-              <a:rPr lang="en-US" smtClean="0"/>
+              <a:rPr lang="en-US"/>
               <a:t>Second level</a:t>
             </a:r>
           </a:p>
           <a:p>
             <a:pPr lvl="2"/>
             <a:r>
-              <a:rPr lang="en-US" smtClean="0"/>
+              <a:rPr lang="en-US"/>
               <a:t>Third level</a:t>
             </a:r>
           </a:p>
           <a:p>
             <a:pPr lvl="3"/>
             <a:r>
-              <a:rPr lang="en-US" smtClean="0"/>
+              <a:rPr lang="en-US"/>
               <a:t>Fourth level</a:t>
             </a:r>
           </a:p>
           <a:p>
             <a:pPr lvl="4"/>
             <a:r>
-              <a:rPr lang="en-US" smtClean="0"/>
+              <a:rPr lang="en-US"/>
               <a:t>Fifth level</a:t>
             </a:r>
-            <a:endParaRPr lang="en-US"/>
           </a:p>
         </p:txBody>
       </p:sp>
@@ -1776,7 +2000,7 @@
           <a:p>
             <a:fld id="{5BCAD085-E8A6-8845-BD4E-CB4CCA059FC4}" type="datetimeFigureOut">
               <a:rPr lang="en-US" smtClean="0"/>
-              <a:t>1/27/13</a:t>
+              <a:t>9/17/2026</a:t>
             </a:fld>
             <a:endParaRPr lang="en-US"/>
           </a:p>
@@ -1818,7 +2042,7 @@
           <a:p>
             <a:fld id="{C1FF6DA9-008F-8B48-92A6-B652298478BF}" type="slidenum">
               <a:rPr lang="en-US" smtClean="0"/>
-              <a:t>‹#›</a:t>
+              <a:t>‹nº›</a:t>
             </a:fld>
             <a:endParaRPr lang="en-US"/>
           </a:p>
@@ -1870,10 +2094,9 @@
           <a:lstStyle/>
           <a:p>
             <a:r>
-              <a:rPr lang="en-US" smtClean="0"/>
+              <a:rPr lang="en-US"/>
               <a:t>Click to edit Master title style</a:t>
             </a:r>
-            <a:endParaRPr lang="en-US"/>
           </a:p>
         </p:txBody>
       </p:sp>
@@ -1894,7 +2117,7 @@
           <a:p>
             <a:fld id="{5BCAD085-E8A6-8845-BD4E-CB4CCA059FC4}" type="datetimeFigureOut">
               <a:rPr lang="en-US" smtClean="0"/>
-              <a:t>1/27/13</a:t>
+              <a:t>9/17/2026</a:t>
             </a:fld>
             <a:endParaRPr lang="en-US"/>
           </a:p>
@@ -1936,7 +2159,7 @@
           <a:p>
             <a:fld id="{C1FF6DA9-008F-8B48-92A6-B652298478BF}" type="slidenum">
               <a:rPr lang="en-US" smtClean="0"/>
-              <a:t>‹#›</a:t>
+              <a:t>‹nº›</a:t>
             </a:fld>
             <a:endParaRPr lang="en-US"/>
           </a:p>
@@ -1989,7 +2212,7 @@
           <a:p>
             <a:fld id="{5BCAD085-E8A6-8845-BD4E-CB4CCA059FC4}" type="datetimeFigureOut">
               <a:rPr lang="en-US" smtClean="0"/>
-              <a:t>1/27/13</a:t>
+              <a:t>9/17/2026</a:t>
             </a:fld>
             <a:endParaRPr lang="en-US"/>
           </a:p>
@@ -2031,7 +2254,7 @@
           <a:p>
             <a:fld id="{C1FF6DA9-008F-8B48-92A6-B652298478BF}" type="slidenum">
               <a:rPr lang="en-US" smtClean="0"/>
-              <a:t>‹#›</a:t>
+              <a:t>‹nº›</a:t>
             </a:fld>
             <a:endParaRPr lang="en-US"/>
           </a:p>
@@ -2092,10 +2315,9 @@
           </a:lstStyle>
           <a:p>
             <a:r>
-              <a:rPr lang="en-US" smtClean="0"/>
+              <a:rPr lang="en-US"/>
               <a:t>Click to edit Master title style</a:t>
             </a:r>
-            <a:endParaRPr lang="en-US"/>
           </a:p>
         </p:txBody>
       </p:sp>
@@ -2149,38 +2371,37 @@
           <a:p>
             <a:pPr lvl="0"/>
             <a:r>
-              <a:rPr lang="en-US" smtClean="0"/>
+              <a:rPr lang="en-US"/>
               <a:t>Click to edit Master text styles</a:t>
             </a:r>
           </a:p>
           <a:p>
             <a:pPr lvl="1"/>
             <a:r>
-              <a:rPr lang="en-US" smtClean="0"/>
+              <a:rPr lang="en-US"/>
               <a:t>Second level</a:t>
             </a:r>
           </a:p>
           <a:p>
             <a:pPr lvl="2"/>
             <a:r>
-              <a:rPr lang="en-US" smtClean="0"/>
+              <a:rPr lang="en-US"/>
               <a:t>Third level</a:t>
             </a:r>
           </a:p>
           <a:p>
             <a:pPr lvl="3"/>
             <a:r>
-              <a:rPr lang="en-US" smtClean="0"/>
+              <a:rPr lang="en-US"/>
               <a:t>Fourth level</a:t>
             </a:r>
           </a:p>
           <a:p>
             <a:pPr lvl="4"/>
             <a:r>
-              <a:rPr lang="en-US" smtClean="0"/>
+              <a:rPr lang="en-US"/>
               <a:t>Fifth level</a:t>
             </a:r>
-            <a:endParaRPr lang="en-US"/>
           </a:p>
         </p:txBody>
       </p:sp>
@@ -2243,7 +2464,7 @@
           <a:p>
             <a:pPr lvl="0"/>
             <a:r>
-              <a:rPr lang="en-US" smtClean="0"/>
+              <a:rPr lang="en-US"/>
               <a:t>Click to edit Master text styles</a:t>
             </a:r>
           </a:p>
@@ -2266,7 +2487,7 @@
           <a:p>
             <a:fld id="{5BCAD085-E8A6-8845-BD4E-CB4CCA059FC4}" type="datetimeFigureOut">
               <a:rPr lang="en-US" smtClean="0"/>
-              <a:t>1/27/13</a:t>
+              <a:t>9/17/2026</a:t>
             </a:fld>
             <a:endParaRPr lang="en-US"/>
           </a:p>
@@ -2308,7 +2529,7 @@
           <a:p>
             <a:fld id="{C1FF6DA9-008F-8B48-92A6-B652298478BF}" type="slidenum">
               <a:rPr lang="en-US" smtClean="0"/>
-              <a:t>‹#›</a:t>
+              <a:t>‹nº›</a:t>
             </a:fld>
             <a:endParaRPr lang="en-US"/>
           </a:p>
@@ -2369,10 +2590,9 @@
           </a:lstStyle>
           <a:p>
             <a:r>
-              <a:rPr lang="en-US" smtClean="0"/>
+              <a:rPr lang="en-US"/>
               <a:t>Click to edit Master title style</a:t>
             </a:r>
-            <a:endParaRPr lang="en-US"/>
           </a:p>
         </p:txBody>
       </p:sp>
@@ -2496,7 +2716,7 @@
           <a:p>
             <a:pPr lvl="0"/>
             <a:r>
-              <a:rPr lang="en-US" smtClean="0"/>
+              <a:rPr lang="en-US"/>
               <a:t>Click to edit Master text styles</a:t>
             </a:r>
           </a:p>
@@ -2519,7 +2739,7 @@
           <a:p>
             <a:fld id="{5BCAD085-E8A6-8845-BD4E-CB4CCA059FC4}" type="datetimeFigureOut">
               <a:rPr lang="en-US" smtClean="0"/>
-              <a:t>1/27/13</a:t>
+              <a:t>9/17/2026</a:t>
             </a:fld>
             <a:endParaRPr lang="en-US"/>
           </a:p>
@@ -2561,7 +2781,7 @@
           <a:p>
             <a:fld id="{C1FF6DA9-008F-8B48-92A6-B652298478BF}" type="slidenum">
               <a:rPr lang="en-US" smtClean="0"/>
-              <a:t>‹#›</a:t>
+              <a:t>‹nº›</a:t>
             </a:fld>
             <a:endParaRPr lang="en-US"/>
           </a:p>
@@ -2628,10 +2848,9 @@
           <a:lstStyle/>
           <a:p>
             <a:r>
-              <a:rPr lang="en-US" smtClean="0"/>
+              <a:rPr lang="en-US"/>
               <a:t>Click to edit Master title style</a:t>
             </a:r>
-            <a:endParaRPr lang="en-US"/>
           </a:p>
         </p:txBody>
       </p:sp>
@@ -2662,38 +2881,37 @@
           <a:p>
             <a:pPr lvl="0"/>
             <a:r>
-              <a:rPr lang="en-US" smtClean="0"/>
+              <a:rPr lang="en-US"/>
               <a:t>Click to edit Master text styles</a:t>
             </a:r>
           </a:p>
           <a:p>
             <a:pPr lvl="1"/>
             <a:r>
-              <a:rPr lang="en-US" smtClean="0"/>
+              <a:rPr lang="en-US"/>
               <a:t>Second level</a:t>
             </a:r>
           </a:p>
           <a:p>
             <a:pPr lvl="2"/>
             <a:r>
-              <a:rPr lang="en-US" smtClean="0"/>
+              <a:rPr lang="en-US"/>
               <a:t>Third level</a:t>
             </a:r>
           </a:p>
           <a:p>
             <a:pPr lvl="3"/>
             <a:r>
-              <a:rPr lang="en-US" smtClean="0"/>
+              <a:rPr lang="en-US"/>
               <a:t>Fourth level</a:t>
             </a:r>
           </a:p>
           <a:p>
             <a:pPr lvl="4"/>
             <a:r>
-              <a:rPr lang="en-US" smtClean="0"/>
+              <a:rPr lang="en-US"/>
               <a:t>Fifth level</a:t>
             </a:r>
-            <a:endParaRPr lang="en-US"/>
           </a:p>
         </p:txBody>
       </p:sp>
@@ -2732,7 +2950,7 @@
           <a:p>
             <a:fld id="{5BCAD085-E8A6-8845-BD4E-CB4CCA059FC4}" type="datetimeFigureOut">
               <a:rPr lang="en-US" smtClean="0"/>
-              <a:t>1/27/13</a:t>
+              <a:t>9/17/2026</a:t>
             </a:fld>
             <a:endParaRPr lang="en-US"/>
           </a:p>
@@ -2810,7 +3028,7 @@
           <a:p>
             <a:fld id="{C1FF6DA9-008F-8B48-92A6-B652298478BF}" type="slidenum">
               <a:rPr lang="en-US" smtClean="0"/>
-              <a:t>‹#›</a:t>
+              <a:t>‹nº›</a:t>
             </a:fld>
             <a:endParaRPr lang="en-US"/>
           </a:p>
@@ -3091,7 +3309,7 @@
 </file>
 
 <file path=ppt/slides/slide1.xml><?xml version="1.0" encoding="utf-8"?>
-<p:sld xmlns:a="http://schemas.openxmlformats.org/drawingml/2006/main" xmlns:p="http://schemas.openxmlformats.org/presentationml/2006/main" xmlns:r="http://schemas.openxmlformats.org/officeDocument/2006/relationships">
+<p:sld xmlns:a="http://schemas.openxmlformats.org/drawingml/2006/main" xmlns:r="http://schemas.openxmlformats.org/officeDocument/2006/relationships" xmlns:p="http://schemas.openxmlformats.org/presentationml/2006/main">
   <p:cSld>
     <p:spTree>
       <p:nvGrpSpPr>
@@ -3099,7 +3317,14 @@
         <p:cNvGrpSpPr/>
         <p:nvPr/>
       </p:nvGrpSpPr>
-      <p:grpSpPr/>
+      <p:grpSpPr>
+        <a:xfrm>
+          <a:off x="0" y="0"/>
+          <a:ext cx="0" cy="0"/>
+          <a:chOff x="0" y="0"/>
+          <a:chExt cx="0" cy="0"/>
+        </a:xfrm>
+      </p:grpSpPr>
       <p:sp>
         <p:nvSpPr>
           <p:cNvPr id="2" name="Rectangle 1"/>
@@ -3140,25 +3365,219 @@
           <a:lstStyle/>
           <a:p>
             <a:pPr algn="ctr"/>
-          </a:p>
-        </p:txBody>
-      </p:sp>
-      <p:sp>
-        <p:nvSpPr>
-          <p:cNvPr id="3" name="Rounded Rectangle 2"/>
+            <a:endParaRPr/>
+          </a:p>
+        </p:txBody>
+      </p:sp>
+      <p:sp>
+        <p:nvSpPr>
+          <p:cNvPr id="3" name="TextBox 2"/>
+          <p:cNvSpPr txBox="1"/>
+          <p:nvPr/>
+        </p:nvSpPr>
+        <p:spPr>
+          <a:xfrm>
+            <a:off x="822959" y="320040"/>
+            <a:ext cx="8085067" cy="1477328"/>
+          </a:xfrm>
+          <a:prstGeom prst="rect">
+            <a:avLst/>
+          </a:prstGeom>
+          <a:noFill/>
+        </p:spPr>
+        <p:txBody>
+          <a:bodyPr wrap="square" lIns="0" tIns="0" rIns="0" bIns="0">
+            <a:spAutoFit/>
+          </a:bodyPr>
+          <a:lstStyle/>
+          <a:p>
+            <a:pPr algn="just">
+              <a:defRPr sz="1600">
+                <a:solidFill>
+                  <a:srgbClr val="F1F5F9"/>
+                </a:solidFill>
+                <a:latin typeface="Segoe UI"/>
+              </a:defRPr>
+            </a:pPr>
+            <a:r>
+              <a:rPr sz="1600" dirty="0">
+                <a:solidFill>
+                  <a:srgbClr val="F1F5F9"/>
+                </a:solidFill>
+                <a:latin typeface="Segoe UI"/>
+              </a:rPr>
+              <a:t>UNIVERSIDADE ESTADUAL DO MARANHÃO – UEMA</a:t>
+            </a:r>
+          </a:p>
+          <a:p>
+            <a:pPr algn="just">
+              <a:defRPr sz="1600">
+                <a:solidFill>
+                  <a:srgbClr val="F1F5F9"/>
+                </a:solidFill>
+                <a:latin typeface="Segoe UI"/>
+              </a:defRPr>
+            </a:pPr>
+            <a:r>
+              <a:rPr sz="1600" dirty="0">
+                <a:solidFill>
+                  <a:srgbClr val="F1F5F9"/>
+                </a:solidFill>
+                <a:latin typeface="Segoe UI"/>
+              </a:rPr>
+              <a:t>NÚCLEO DE TECNOLOGIAS PARA EDUCAÇÃO – UEMANET</a:t>
+            </a:r>
+          </a:p>
+          <a:p>
+            <a:pPr algn="just">
+              <a:defRPr sz="1600">
+                <a:solidFill>
+                  <a:srgbClr val="F1F5F9"/>
+                </a:solidFill>
+                <a:latin typeface="Segoe UI"/>
+              </a:defRPr>
+            </a:pPr>
+            <a:r>
+              <a:rPr sz="1600" dirty="0">
+                <a:solidFill>
+                  <a:srgbClr val="F1F5F9"/>
+                </a:solidFill>
+                <a:latin typeface="Segoe UI"/>
+              </a:rPr>
+              <a:t>CURSO SUPERIOR DE TECNOLOGIA EM ANÁLISE E DESENVOLVIMENTO DE SISTEMAS</a:t>
+            </a:r>
+          </a:p>
+          <a:p>
+            <a:pPr algn="just">
+              <a:defRPr sz="1600">
+                <a:solidFill>
+                  <a:srgbClr val="F1F5F9"/>
+                </a:solidFill>
+                <a:latin typeface="Segoe UI"/>
+              </a:defRPr>
+            </a:pPr>
+            <a:r>
+              <a:rPr sz="1600" dirty="0">
+                <a:solidFill>
+                  <a:srgbClr val="F1F5F9"/>
+                </a:solidFill>
+                <a:latin typeface="Segoe UI"/>
+              </a:rPr>
+              <a:t>DISCIPLINA: DESENVOLVIMENTO WEB</a:t>
+            </a:r>
+            <a:endParaRPr lang="pt-BR" sz="1600" dirty="0">
+              <a:solidFill>
+                <a:srgbClr val="F1F5F9"/>
+              </a:solidFill>
+              <a:latin typeface="Segoe UI"/>
+            </a:endParaRPr>
+          </a:p>
+          <a:p>
+            <a:pPr algn="just">
+              <a:defRPr sz="1600">
+                <a:solidFill>
+                  <a:srgbClr val="F1F5F9"/>
+                </a:solidFill>
+                <a:latin typeface="Segoe UI"/>
+              </a:defRPr>
+            </a:pPr>
+            <a:r>
+              <a:rPr sz="1600" dirty="0">
+                <a:solidFill>
+                  <a:srgbClr val="F1F5F9"/>
+                </a:solidFill>
+                <a:latin typeface="Segoe UI"/>
+              </a:rPr>
+              <a:t>DOCENTE: PROF. EDILSON CARLOS SILVA LIMA </a:t>
+            </a:r>
+            <a:endParaRPr lang="pt-BR" sz="1600" dirty="0">
+              <a:solidFill>
+                <a:srgbClr val="F1F5F9"/>
+              </a:solidFill>
+              <a:latin typeface="Segoe UI"/>
+            </a:endParaRPr>
+          </a:p>
+          <a:p>
+            <a:pPr algn="just">
+              <a:defRPr sz="1600">
+                <a:solidFill>
+                  <a:srgbClr val="F1F5F9"/>
+                </a:solidFill>
+                <a:latin typeface="Segoe UI"/>
+              </a:defRPr>
+            </a:pPr>
+            <a:r>
+              <a:rPr sz="1600" dirty="0">
+                <a:solidFill>
+                  <a:srgbClr val="F1F5F9"/>
+                </a:solidFill>
+                <a:latin typeface="Segoe UI"/>
+              </a:rPr>
+              <a:t>TUTORA: PROF.ª SIMONE</a:t>
+            </a:r>
+          </a:p>
+        </p:txBody>
+      </p:sp>
+      <p:sp>
+        <p:nvSpPr>
+          <p:cNvPr id="4" name="Rectangle 3"/>
           <p:cNvSpPr/>
           <p:nvPr/>
         </p:nvSpPr>
         <p:spPr>
           <a:xfrm>
-            <a:off x="2011680" y="685800"/>
-            <a:ext cx="8168335" cy="438912"/>
+            <a:off x="822960" y="1783080"/>
+            <a:ext cx="10545775" cy="13716"/>
+          </a:xfrm>
+          <a:prstGeom prst="rect">
+            <a:avLst/>
+          </a:prstGeom>
+          <a:solidFill>
+            <a:srgbClr val="166534"/>
+          </a:solidFill>
+          <a:ln>
+            <a:noFill/>
+          </a:ln>
+        </p:spPr>
+        <p:style>
+          <a:lnRef idx="1">
+            <a:schemeClr val="accent1"/>
+          </a:lnRef>
+          <a:fillRef idx="3">
+            <a:schemeClr val="accent1"/>
+          </a:fillRef>
+          <a:effectRef idx="2">
+            <a:schemeClr val="accent1"/>
+          </a:effectRef>
+          <a:fontRef idx="minor">
+            <a:schemeClr val="lt1"/>
+          </a:fontRef>
+        </p:style>
+        <p:txBody>
+          <a:bodyPr rtlCol="0" anchor="ctr"/>
+          <a:lstStyle/>
+          <a:p>
+            <a:pPr algn="ctr"/>
+            <a:endParaRPr/>
+          </a:p>
+        </p:txBody>
+      </p:sp>
+      <p:sp>
+        <p:nvSpPr>
+          <p:cNvPr id="5" name="Rounded Rectangle 4"/>
+          <p:cNvSpPr/>
+          <p:nvPr/>
+        </p:nvSpPr>
+        <p:spPr>
+          <a:xfrm>
+            <a:off x="2926080" y="1965960"/>
+            <a:ext cx="6339535" cy="365760"/>
           </a:xfrm>
           <a:prstGeom prst="roundRect">
             <a:avLst/>
           </a:prstGeom>
           <a:solidFill>
-            <a:srgbClr val="0F3D24"/>
+            <a:srgbClr val="0C321D"/>
           </a:solidFill>
           <a:ln w="15240">
             <a:solidFill>
@@ -3181,33 +3600,33 @@
           </a:fontRef>
         </p:style>
         <p:txBody>
-          <a:bodyPr rtlCol="0" anchor="ctr" tIns="73152"/>
+          <a:bodyPr tIns="54864" rtlCol="0" anchor="ctr"/>
           <a:lstStyle/>
           <a:p>
             <a:pPr algn="ctr">
-              <a:defRPr sz="1200" b="1">
-                <a:solidFill>
-                  <a:srgbClr val="10B981"/>
+              <a:defRPr sz="1100" b="1">
+                <a:solidFill>
+                  <a:srgbClr val="4ADE80"/>
                 </a:solidFill>
                 <a:latin typeface="Segoe UI"/>
               </a:defRPr>
             </a:pPr>
             <a:r>
-              <a:t>UNIVERSIDADE ESTADUAL DO MARANHÃO — UEMA</a:t>
-            </a:r>
-          </a:p>
-        </p:txBody>
-      </p:sp>
-      <p:sp>
-        <p:nvSpPr>
-          <p:cNvPr id="4" name="TextBox 3"/>
+              <a:t>TECNOLOGIA A SERVIÇO DA VIDA  •  ODS 2 &amp; ODS 11</a:t>
+            </a:r>
+          </a:p>
+        </p:txBody>
+      </p:sp>
+      <p:sp>
+        <p:nvSpPr>
+          <p:cNvPr id="6" name="TextBox 5"/>
           <p:cNvSpPr txBox="1"/>
           <p:nvPr/>
         </p:nvSpPr>
         <p:spPr>
           <a:xfrm>
-            <a:off x="1371600" y="1234440"/>
-            <a:ext cx="9448495" cy="457200"/>
+            <a:off x="1371600" y="2423160"/>
+            <a:ext cx="9448495" cy="1097280"/>
           </a:xfrm>
           <a:prstGeom prst="rect">
             <a:avLst/>
@@ -3215,107 +3634,196 @@
           <a:noFill/>
         </p:spPr>
         <p:txBody>
-          <a:bodyPr wrap="none">
+          <a:bodyPr wrap="square">
             <a:spAutoFit/>
           </a:bodyPr>
           <a:lstStyle/>
           <a:p>
+            <a:pPr algn="ctr"/>
+            <a:r>
+              <a:rPr sz="4600" b="1">
+                <a:solidFill>
+                  <a:srgbClr val="FFFFFF"/>
+                </a:solidFill>
+                <a:latin typeface="Segoe UI"/>
+              </a:rPr>
+              <a:t>TIMBIRAS </a:t>
+            </a:r>
+            <a:r>
+              <a:rPr sz="4600" b="1">
+                <a:solidFill>
+                  <a:srgbClr val="4ADE80"/>
+                </a:solidFill>
+                <a:latin typeface="Segoe UI"/>
+              </a:rPr>
+              <a:t>SOLIDÁRIA </a:t>
+            </a:r>
+            <a:r>
+              <a:rPr sz="4000">
+                <a:solidFill>
+                  <a:srgbClr val="FFFFFF"/>
+                </a:solidFill>
+                <a:latin typeface="Segoe UI"/>
+              </a:rPr>
+              <a:t>🏹</a:t>
+            </a:r>
+          </a:p>
+        </p:txBody>
+      </p:sp>
+      <p:sp>
+        <p:nvSpPr>
+          <p:cNvPr id="7" name="TextBox 6"/>
+          <p:cNvSpPr txBox="1"/>
+          <p:nvPr/>
+        </p:nvSpPr>
+        <p:spPr>
+          <a:xfrm>
+            <a:off x="1645920" y="3566160"/>
+            <a:ext cx="8899855" cy="1005840"/>
+          </a:xfrm>
+          <a:prstGeom prst="rect">
+            <a:avLst/>
+          </a:prstGeom>
+          <a:noFill/>
+        </p:spPr>
+        <p:txBody>
+          <a:bodyPr wrap="square">
+            <a:spAutoFit/>
+          </a:bodyPr>
+          <a:lstStyle/>
+          <a:p>
             <a:pPr algn="ctr">
-              <a:defRPr sz="1300">
-                <a:solidFill>
-                  <a:srgbClr val="CBD5E1"/>
+              <a:defRPr sz="1600">
+                <a:solidFill>
+                  <a:srgbClr val="F1F5F9"/>
                 </a:solidFill>
                 <a:latin typeface="Segoe UI"/>
               </a:defRPr>
             </a:pPr>
             <a:r>
-              <a:t>CST em Análise e Desenvolvimento de Sistemas  |  Desenvolvimento Web  |  Nota 2</a:t>
-            </a:r>
-          </a:p>
-        </p:txBody>
-      </p:sp>
-      <p:sp>
-        <p:nvSpPr>
-          <p:cNvPr id="5" name="TextBox 4"/>
-          <p:cNvSpPr txBox="1"/>
-          <p:nvPr/>
-        </p:nvSpPr>
-        <p:spPr>
-          <a:xfrm>
-            <a:off x="1371600" y="1874519"/>
-            <a:ext cx="9448495" cy="1188720"/>
-          </a:xfrm>
-          <a:prstGeom prst="rect">
-            <a:avLst/>
-          </a:prstGeom>
-          <a:noFill/>
-        </p:spPr>
-        <p:txBody>
-          <a:bodyPr wrap="none">
-            <a:spAutoFit/>
-          </a:bodyPr>
-          <a:lstStyle/>
+              <a:rPr dirty="0"/>
+              <a:t>Plataforma Web </a:t>
+            </a:r>
+            <a:r>
+              <a:rPr dirty="0" err="1"/>
+              <a:t>Comunitária</a:t>
+            </a:r>
+            <a:r>
+              <a:rPr dirty="0"/>
+              <a:t> de </a:t>
+            </a:r>
+            <a:r>
+              <a:rPr dirty="0" err="1"/>
+              <a:t>Mapeamento</a:t>
+            </a:r>
+            <a:r>
+              <a:rPr dirty="0"/>
+              <a:t>, </a:t>
+            </a:r>
+            <a:r>
+              <a:rPr dirty="0" err="1"/>
+              <a:t>Solidariedade</a:t>
+            </a:r>
+            <a:r>
+              <a:rPr dirty="0"/>
+              <a:t> e </a:t>
+            </a:r>
+            <a:r>
+              <a:rPr dirty="0" err="1"/>
+              <a:t>Resiliência</a:t>
+            </a:r>
+            <a:r>
+              <a:rPr dirty="0"/>
+              <a:t> </a:t>
+            </a:r>
+            <a:r>
+              <a:rPr dirty="0" err="1"/>
+              <a:t>Alimentar</a:t>
+            </a:r>
+            <a:r>
+              <a:rPr dirty="0"/>
+              <a:t> no Interior do Maranhão</a:t>
+            </a:r>
+          </a:p>
           <a:p>
             <a:pPr algn="ctr">
-              <a:defRPr sz="4600" b="1">
-                <a:solidFill>
-                  <a:srgbClr val="4ADE80"/>
+              <a:defRPr sz="1250">
+                <a:solidFill>
+                  <a:srgbClr val="CBD5E1"/>
                 </a:solidFill>
                 <a:latin typeface="Segoe UI"/>
               </a:defRPr>
             </a:pPr>
             <a:r>
-              <a:t>Timbiras Solidária 🏹</a:t>
-            </a:r>
-          </a:p>
-        </p:txBody>
-      </p:sp>
-      <p:sp>
-        <p:nvSpPr>
-          <p:cNvPr id="6" name="TextBox 5"/>
-          <p:cNvSpPr txBox="1"/>
-          <p:nvPr/>
-        </p:nvSpPr>
-        <p:spPr>
-          <a:xfrm>
-            <a:off x="1645920" y="3154680"/>
-            <a:ext cx="8899855" cy="1005840"/>
-          </a:xfrm>
-          <a:prstGeom prst="rect">
-            <a:avLst/>
-          </a:prstGeom>
-          <a:noFill/>
-        </p:spPr>
-        <p:txBody>
-          <a:bodyPr wrap="square">
-            <a:spAutoFit/>
-          </a:bodyPr>
-          <a:lstStyle/>
-          <a:p>
-            <a:pPr algn="ctr">
-              <a:defRPr sz="1700">
-                <a:solidFill>
-                  <a:srgbClr val="F1F5F9"/>
-                </a:solidFill>
-                <a:latin typeface="Segoe UI"/>
-              </a:defRPr>
-            </a:pPr>
-            <a:r>
-              <a:t>Como a tecnologia web pode encurtar distâncias, combater a fome e unir uma comunidade inteira em torno do ODS 2 da ONU.</a:t>
-            </a:r>
-          </a:p>
-        </p:txBody>
-      </p:sp>
-      <p:sp>
-        <p:nvSpPr>
-          <p:cNvPr id="7" name="Rounded Rectangle 6"/>
+              <a:rPr dirty="0"/>
+              <a:t>Uma </a:t>
+            </a:r>
+            <a:r>
+              <a:rPr dirty="0" err="1"/>
+              <a:t>ponte</a:t>
+            </a:r>
+            <a:r>
+              <a:rPr dirty="0"/>
+              <a:t> digital entre a </a:t>
+            </a:r>
+            <a:r>
+              <a:rPr dirty="0" err="1"/>
+              <a:t>generosidade</a:t>
+            </a:r>
+            <a:r>
+              <a:rPr dirty="0"/>
+              <a:t> de quem </a:t>
+            </a:r>
+            <a:r>
+              <a:rPr dirty="0" err="1"/>
+              <a:t>pode</a:t>
+            </a:r>
+            <a:r>
+              <a:rPr dirty="0"/>
+              <a:t> </a:t>
+            </a:r>
+            <a:r>
+              <a:rPr dirty="0" err="1"/>
+              <a:t>doar</a:t>
+            </a:r>
+            <a:r>
+              <a:rPr dirty="0"/>
+              <a:t> e a </a:t>
+            </a:r>
+            <a:r>
+              <a:rPr dirty="0" err="1"/>
+              <a:t>dignidade</a:t>
+            </a:r>
+            <a:r>
+              <a:rPr dirty="0"/>
+              <a:t> de quem </a:t>
+            </a:r>
+            <a:r>
+              <a:rPr dirty="0" err="1"/>
+              <a:t>precisa</a:t>
+            </a:r>
+            <a:r>
+              <a:rPr dirty="0"/>
+              <a:t> </a:t>
+            </a:r>
+            <a:r>
+              <a:rPr dirty="0" err="1"/>
+              <a:t>receber</a:t>
+            </a:r>
+            <a:endParaRPr dirty="0"/>
+          </a:p>
+        </p:txBody>
+      </p:sp>
+      <p:sp>
+        <p:nvSpPr>
+          <p:cNvPr id="8" name="Rounded Rectangle 7"/>
           <p:cNvSpPr/>
           <p:nvPr/>
         </p:nvSpPr>
         <p:spPr>
           <a:xfrm>
-            <a:off x="1645920" y="4434840"/>
-            <a:ext cx="8899855" cy="1600200"/>
+            <a:off x="1645920" y="4754880"/>
+            <a:ext cx="8899855" cy="1508760"/>
           </a:xfrm>
           <a:prstGeom prst="roundRect">
             <a:avLst/>
@@ -3344,11 +3852,11 @@
           </a:fontRef>
         </p:style>
         <p:txBody>
-          <a:bodyPr rtlCol="0" anchor="ctr" tIns="182880"/>
+          <a:bodyPr tIns="164592" rtlCol="0" anchor="ctr"/>
           <a:lstStyle/>
           <a:p>
             <a:pPr algn="ctr">
-              <a:defRPr sz="1300" b="1">
+              <a:defRPr sz="1250" b="1">
                 <a:solidFill>
                   <a:srgbClr val="4ADE80"/>
                 </a:solidFill>
@@ -3374,7 +3882,7 @@
           </a:p>
           <a:p>
             <a:pPr algn="ctr">
-              <a:defRPr sz="1200">
+              <a:defRPr sz="1150">
                 <a:solidFill>
                   <a:srgbClr val="94A3B8"/>
                 </a:solidFill>
@@ -3396,7 +3904,7 @@
 </file>
 
 <file path=ppt/slides/slide10.xml><?xml version="1.0" encoding="utf-8"?>
-<p:sld xmlns:a="http://schemas.openxmlformats.org/drawingml/2006/main" xmlns:p="http://schemas.openxmlformats.org/presentationml/2006/main" xmlns:r="http://schemas.openxmlformats.org/officeDocument/2006/relationships">
+<p:sld xmlns:a="http://schemas.openxmlformats.org/drawingml/2006/main" xmlns:r="http://schemas.openxmlformats.org/officeDocument/2006/relationships" xmlns:p="http://schemas.openxmlformats.org/presentationml/2006/main">
   <p:cSld>
     <p:spTree>
       <p:nvGrpSpPr>
@@ -3404,7 +3912,14 @@
         <p:cNvGrpSpPr/>
         <p:nvPr/>
       </p:nvGrpSpPr>
-      <p:grpSpPr/>
+      <p:grpSpPr>
+        <a:xfrm>
+          <a:off x="0" y="0"/>
+          <a:ext cx="0" cy="0"/>
+          <a:chOff x="0" y="0"/>
+          <a:chExt cx="0" cy="0"/>
+        </a:xfrm>
+      </p:grpSpPr>
       <p:sp>
         <p:nvSpPr>
           <p:cNvPr id="2" name="TextBox 1"/>
@@ -3479,7 +3994,7 @@
           </a:fontRef>
         </p:style>
         <p:txBody>
-          <a:bodyPr rtlCol="0" anchor="ctr" tIns="54864"/>
+          <a:bodyPr tIns="54864" rtlCol="0" anchor="ctr"/>
           <a:lstStyle/>
           <a:p>
             <a:pPr algn="ctr">
@@ -3536,6 +4051,7 @@
           <a:lstStyle/>
           <a:p>
             <a:pPr algn="ctr"/>
+            <a:endParaRPr/>
           </a:p>
         </p:txBody>
       </p:sp>
@@ -3579,6 +4095,7 @@
           <a:lstStyle/>
           <a:p>
             <a:pPr algn="ctr"/>
+            <a:endParaRPr/>
           </a:p>
         </p:txBody>
       </p:sp>
@@ -3696,6 +4213,7 @@
           <a:lstStyle/>
           <a:p>
             <a:pPr algn="ctr"/>
+            <a:endParaRPr/>
           </a:p>
         </p:txBody>
       </p:sp>
@@ -3721,7 +4239,7 @@
           </a:bodyPr>
           <a:lstStyle/>
           <a:p>
-            <a:pPr>
+            <a:pPr algn="just">
               <a:defRPr sz="1200" b="1">
                 <a:solidFill>
                   <a:srgbClr val="00873E"/>
@@ -3752,7 +4270,7 @@
         <p:spPr>
           <a:xfrm>
             <a:off x="868680" y="1737360"/>
-            <a:ext cx="4892040" cy="2653735"/>
+            <a:ext cx="4892040" cy="2750430"/>
           </a:xfrm>
           <a:prstGeom prst="rect">
             <a:avLst/>
@@ -3781,7 +4299,7 @@
           </a:bodyPr>
           <a:lstStyle/>
           <a:p>
-            <a:pPr>
+            <a:pPr algn="just">
               <a:defRPr sz="1000">
                 <a:solidFill>
                   <a:srgbClr val="64748B"/>
@@ -3837,6 +4355,7 @@
           <a:lstStyle/>
           <a:p>
             <a:pPr algn="ctr"/>
+            <a:endParaRPr/>
           </a:p>
         </p:txBody>
       </p:sp>
@@ -3893,7 +4412,7 @@
         <p:spPr>
           <a:xfrm>
             <a:off x="6400800" y="1737360"/>
-            <a:ext cx="4892040" cy="3874954"/>
+            <a:ext cx="4892040" cy="2750430"/>
           </a:xfrm>
           <a:prstGeom prst="rect">
             <a:avLst/>
@@ -3922,7 +4441,7 @@
           </a:bodyPr>
           <a:lstStyle/>
           <a:p>
-            <a:pPr>
+            <a:pPr algn="just">
               <a:defRPr sz="1000">
                 <a:solidFill>
                   <a:srgbClr val="64748B"/>
@@ -3945,7 +4464,7 @@
 </file>
 
 <file path=ppt/slides/slide11.xml><?xml version="1.0" encoding="utf-8"?>
-<p:sld xmlns:a="http://schemas.openxmlformats.org/drawingml/2006/main" xmlns:p="http://schemas.openxmlformats.org/presentationml/2006/main" xmlns:r="http://schemas.openxmlformats.org/officeDocument/2006/relationships">
+<p:sld xmlns:a="http://schemas.openxmlformats.org/drawingml/2006/main" xmlns:r="http://schemas.openxmlformats.org/officeDocument/2006/relationships" xmlns:p="http://schemas.openxmlformats.org/presentationml/2006/main">
   <p:cSld>
     <p:spTree>
       <p:nvGrpSpPr>
@@ -3953,7 +4472,14 @@
         <p:cNvGrpSpPr/>
         <p:nvPr/>
       </p:nvGrpSpPr>
-      <p:grpSpPr/>
+      <p:grpSpPr>
+        <a:xfrm>
+          <a:off x="0" y="0"/>
+          <a:ext cx="0" cy="0"/>
+          <a:chOff x="0" y="0"/>
+          <a:chExt cx="0" cy="0"/>
+        </a:xfrm>
+      </p:grpSpPr>
       <p:sp>
         <p:nvSpPr>
           <p:cNvPr id="2" name="TextBox 1"/>
@@ -4028,7 +4554,7 @@
           </a:fontRef>
         </p:style>
         <p:txBody>
-          <a:bodyPr rtlCol="0" anchor="ctr" tIns="54864"/>
+          <a:bodyPr tIns="54864" rtlCol="0" anchor="ctr"/>
           <a:lstStyle/>
           <a:p>
             <a:pPr algn="ctr">
@@ -4085,6 +4611,7 @@
           <a:lstStyle/>
           <a:p>
             <a:pPr algn="ctr"/>
+            <a:endParaRPr/>
           </a:p>
         </p:txBody>
       </p:sp>
@@ -4128,6 +4655,7 @@
           <a:lstStyle/>
           <a:p>
             <a:pPr algn="ctr"/>
+            <a:endParaRPr/>
           </a:p>
         </p:txBody>
       </p:sp>
@@ -4245,6 +4773,7 @@
           <a:lstStyle/>
           <a:p>
             <a:pPr algn="ctr"/>
+            <a:endParaRPr/>
           </a:p>
         </p:txBody>
       </p:sp>
@@ -4301,7 +4830,7 @@
         <p:spPr>
           <a:xfrm>
             <a:off x="868680" y="1737360"/>
-            <a:ext cx="4892040" cy="3334180"/>
+            <a:ext cx="4892040" cy="2750430"/>
           </a:xfrm>
           <a:prstGeom prst="rect">
             <a:avLst/>
@@ -4330,7 +4859,7 @@
           </a:bodyPr>
           <a:lstStyle/>
           <a:p>
-            <a:pPr>
+            <a:pPr algn="just">
               <a:defRPr sz="1000">
                 <a:solidFill>
                   <a:srgbClr val="64748B"/>
@@ -4386,6 +4915,7 @@
           <a:lstStyle/>
           <a:p>
             <a:pPr algn="ctr"/>
+            <a:endParaRPr/>
           </a:p>
         </p:txBody>
       </p:sp>
@@ -4442,7 +4972,7 @@
         <p:spPr>
           <a:xfrm>
             <a:off x="6400800" y="1737360"/>
-            <a:ext cx="4892040" cy="3688727"/>
+            <a:ext cx="4892040" cy="2750430"/>
           </a:xfrm>
           <a:prstGeom prst="rect">
             <a:avLst/>
@@ -4471,7 +5001,7 @@
           </a:bodyPr>
           <a:lstStyle/>
           <a:p>
-            <a:pPr>
+            <a:pPr algn="just">
               <a:defRPr sz="1000">
                 <a:solidFill>
                   <a:srgbClr val="64748B"/>
@@ -4494,7 +5024,7 @@
 </file>
 
 <file path=ppt/slides/slide12.xml><?xml version="1.0" encoding="utf-8"?>
-<p:sld xmlns:a="http://schemas.openxmlformats.org/drawingml/2006/main" xmlns:p="http://schemas.openxmlformats.org/presentationml/2006/main" xmlns:r="http://schemas.openxmlformats.org/officeDocument/2006/relationships">
+<p:sld xmlns:a="http://schemas.openxmlformats.org/drawingml/2006/main" xmlns:r="http://schemas.openxmlformats.org/officeDocument/2006/relationships" xmlns:p="http://schemas.openxmlformats.org/presentationml/2006/main">
   <p:cSld>
     <p:spTree>
       <p:nvGrpSpPr>
@@ -4502,7 +5032,14 @@
         <p:cNvGrpSpPr/>
         <p:nvPr/>
       </p:nvGrpSpPr>
-      <p:grpSpPr/>
+      <p:grpSpPr>
+        <a:xfrm>
+          <a:off x="0" y="0"/>
+          <a:ext cx="0" cy="0"/>
+          <a:chOff x="0" y="0"/>
+          <a:chExt cx="0" cy="0"/>
+        </a:xfrm>
+      </p:grpSpPr>
       <p:sp>
         <p:nvSpPr>
           <p:cNvPr id="2" name="TextBox 1"/>
@@ -4577,7 +5114,7 @@
           </a:fontRef>
         </p:style>
         <p:txBody>
-          <a:bodyPr rtlCol="0" anchor="ctr" tIns="54864"/>
+          <a:bodyPr tIns="54864" rtlCol="0" anchor="ctr"/>
           <a:lstStyle/>
           <a:p>
             <a:pPr algn="ctr">
@@ -4634,6 +5171,7 @@
           <a:lstStyle/>
           <a:p>
             <a:pPr algn="ctr"/>
+            <a:endParaRPr/>
           </a:p>
         </p:txBody>
       </p:sp>
@@ -4677,6 +5215,7 @@
           <a:lstStyle/>
           <a:p>
             <a:pPr algn="ctr"/>
+            <a:endParaRPr/>
           </a:p>
         </p:txBody>
       </p:sp>
@@ -4794,6 +5333,7 @@
           <a:lstStyle/>
           <a:p>
             <a:pPr algn="ctr"/>
+            <a:endParaRPr/>
           </a:p>
         </p:txBody>
       </p:sp>
@@ -4915,7 +5455,7 @@
           </a:bodyPr>
           <a:lstStyle/>
           <a:p>
-            <a:pPr>
+            <a:pPr algn="just">
               <a:defRPr sz="1600" b="1">
                 <a:solidFill>
                   <a:srgbClr val="00873E"/>
@@ -4928,7 +5468,7 @@
             </a:r>
           </a:p>
           <a:p>
-            <a:pPr>
+            <a:pPr algn="just">
               <a:defRPr sz="1150">
                 <a:solidFill>
                   <a:srgbClr val="64748B"/>
@@ -4984,6 +5524,7 @@
           <a:lstStyle/>
           <a:p>
             <a:pPr algn="ctr"/>
+            <a:endParaRPr/>
           </a:p>
         </p:txBody>
       </p:sp>
@@ -5027,6 +5568,7 @@
           <a:lstStyle/>
           <a:p>
             <a:pPr algn="ctr"/>
+            <a:endParaRPr/>
           </a:p>
         </p:txBody>
       </p:sp>
@@ -5065,7 +5607,7 @@
             </a:r>
           </a:p>
           <a:p>
-            <a:pPr>
+            <a:pPr algn="just">
               <a:defRPr sz="1050">
                 <a:solidFill>
                   <a:srgbClr val="64748B"/>
@@ -5121,6 +5663,7 @@
           <a:lstStyle/>
           <a:p>
             <a:pPr algn="ctr"/>
+            <a:endParaRPr/>
           </a:p>
         </p:txBody>
       </p:sp>
@@ -5164,6 +5707,7 @@
           <a:lstStyle/>
           <a:p>
             <a:pPr algn="ctr"/>
+            <a:endParaRPr/>
           </a:p>
         </p:txBody>
       </p:sp>
@@ -5202,7 +5746,7 @@
             </a:r>
           </a:p>
           <a:p>
-            <a:pPr>
+            <a:pPr algn="just">
               <a:defRPr sz="1050">
                 <a:solidFill>
                   <a:srgbClr val="64748B"/>
@@ -5258,6 +5802,7 @@
           <a:lstStyle/>
           <a:p>
             <a:pPr algn="ctr"/>
+            <a:endParaRPr/>
           </a:p>
         </p:txBody>
       </p:sp>
@@ -5301,6 +5846,7 @@
           <a:lstStyle/>
           <a:p>
             <a:pPr algn="ctr"/>
+            <a:endParaRPr/>
           </a:p>
         </p:txBody>
       </p:sp>
@@ -5339,7 +5885,7 @@
             </a:r>
           </a:p>
           <a:p>
-            <a:pPr>
+            <a:pPr algn="just">
               <a:defRPr sz="1050">
                 <a:solidFill>
                   <a:srgbClr val="64748B"/>
@@ -5395,6 +5941,7 @@
           <a:lstStyle/>
           <a:p>
             <a:pPr algn="ctr"/>
+            <a:endParaRPr/>
           </a:p>
         </p:txBody>
       </p:sp>
@@ -5438,6 +5985,7 @@
           <a:lstStyle/>
           <a:p>
             <a:pPr algn="ctr"/>
+            <a:endParaRPr/>
           </a:p>
         </p:txBody>
       </p:sp>
@@ -5476,7 +6024,7 @@
             </a:r>
           </a:p>
           <a:p>
-            <a:pPr>
+            <a:pPr algn="just">
               <a:defRPr sz="1050">
                 <a:solidFill>
                   <a:srgbClr val="64748B"/>
@@ -5499,7 +6047,7 @@
 </file>
 
 <file path=ppt/slides/slide13.xml><?xml version="1.0" encoding="utf-8"?>
-<p:sld xmlns:a="http://schemas.openxmlformats.org/drawingml/2006/main" xmlns:p="http://schemas.openxmlformats.org/presentationml/2006/main" xmlns:r="http://schemas.openxmlformats.org/officeDocument/2006/relationships">
+<p:sld xmlns:a="http://schemas.openxmlformats.org/drawingml/2006/main" xmlns:r="http://schemas.openxmlformats.org/officeDocument/2006/relationships" xmlns:p="http://schemas.openxmlformats.org/presentationml/2006/main">
   <p:cSld>
     <p:spTree>
       <p:nvGrpSpPr>
@@ -5507,7 +6055,14 @@
         <p:cNvGrpSpPr/>
         <p:nvPr/>
       </p:nvGrpSpPr>
-      <p:grpSpPr/>
+      <p:grpSpPr>
+        <a:xfrm>
+          <a:off x="0" y="0"/>
+          <a:ext cx="0" cy="0"/>
+          <a:chOff x="0" y="0"/>
+          <a:chExt cx="0" cy="0"/>
+        </a:xfrm>
+      </p:grpSpPr>
       <p:sp>
         <p:nvSpPr>
           <p:cNvPr id="2" name="TextBox 1"/>
@@ -5582,7 +6137,7 @@
           </a:fontRef>
         </p:style>
         <p:txBody>
-          <a:bodyPr rtlCol="0" anchor="ctr" tIns="54864"/>
+          <a:bodyPr tIns="54864" rtlCol="0" anchor="ctr"/>
           <a:lstStyle/>
           <a:p>
             <a:pPr algn="ctr">
@@ -5639,6 +6194,7 @@
           <a:lstStyle/>
           <a:p>
             <a:pPr algn="ctr"/>
+            <a:endParaRPr/>
           </a:p>
         </p:txBody>
       </p:sp>
@@ -5682,6 +6238,7 @@
           <a:lstStyle/>
           <a:p>
             <a:pPr algn="ctr"/>
+            <a:endParaRPr/>
           </a:p>
         </p:txBody>
       </p:sp>
@@ -5799,6 +6356,7 @@
           <a:lstStyle/>
           <a:p>
             <a:pPr algn="ctr"/>
+            <a:endParaRPr/>
           </a:p>
         </p:txBody>
       </p:sp>
@@ -5842,6 +6400,7 @@
           <a:lstStyle/>
           <a:p>
             <a:pPr algn="ctr"/>
+            <a:endParaRPr/>
           </a:p>
         </p:txBody>
       </p:sp>
@@ -5881,14 +6440,6 @@
           </a:p>
           <a:p>
             <a:br/>
-            <a:pPr>
-              <a:defRPr sz="1150">
-                <a:solidFill>
-                  <a:srgbClr val="1E293B"/>
-                </a:solidFill>
-                <a:latin typeface="Segoe UI"/>
-              </a:defRPr>
-            </a:pPr>
             <a:r>
               <a:t>Aprendemos que um framework moderno como o React ou uma API do governo só têm valor quando resolvem um problema humano real. O código ganha vida quando serve para combater a fome e valorizar a nossa terra.</a:t>
             </a:r>
@@ -5937,6 +6488,7 @@
           <a:lstStyle/>
           <a:p>
             <a:pPr algn="ctr"/>
+            <a:endParaRPr/>
           </a:p>
         </p:txBody>
       </p:sp>
@@ -5980,6 +6532,7 @@
           <a:lstStyle/>
           <a:p>
             <a:pPr algn="ctr"/>
+            <a:endParaRPr/>
           </a:p>
         </p:txBody>
       </p:sp>
@@ -6019,14 +6572,6 @@
           </a:p>
           <a:p>
             <a:br/>
-            <a:pPr>
-              <a:defRPr sz="1150">
-                <a:solidFill>
-                  <a:srgbClr val="1E293B"/>
-                </a:solidFill>
-                <a:latin typeface="Segoe UI"/>
-              </a:defRPr>
-            </a:pPr>
             <a:r>
               <a:t>A equipe conclui esta etapa com o sistema no ar, dados reais integrados e muito orgulho do que construímos. Estamos preparados e entusiasmados para a apresentação presencial no polo de Timbiras!</a:t>
             </a:r>
@@ -6075,6 +6620,7 @@
           <a:lstStyle/>
           <a:p>
             <a:pPr algn="ctr"/>
+            <a:endParaRPr/>
           </a:p>
         </p:txBody>
       </p:sp>
@@ -6114,84 +6660,36 @@
           </a:p>
           <a:p>
             <a:br/>
-            <a:pPr>
-              <a:defRPr sz="900">
-                <a:solidFill>
-                  <a:srgbClr val="64748B"/>
-                </a:solidFill>
-                <a:latin typeface="Segoe UI"/>
-              </a:defRPr>
-            </a:pPr>
             <a:r>
               <a:t>• BRASIL. Instituto Brasileiro de Geografia e Estatística (IBGE). API de Serviços de Dados: Localidades. Rio de Janeiro: IBGE, 2026. Disponível em: &lt;https://servicodados.ibge.gov.br/api/docs/localidades&gt;. Acesso em: 17 set. 2026.</a:t>
             </a:r>
           </a:p>
           <a:p>
             <a:br/>
-            <a:pPr>
-              <a:defRPr sz="900">
-                <a:solidFill>
-                  <a:srgbClr val="64748B"/>
-                </a:solidFill>
-                <a:latin typeface="Segoe UI"/>
-              </a:defRPr>
-            </a:pPr>
             <a:r>
               <a:t>• LENNON, John. Imagine. In: Imagine. Produção: John Lennon, Yoko Ono, Phil Spector. Ascot Sound Studios: Apple Records, 1971. 1 faixa musical (3 min 3 s). Uso pedagógico e cultural.</a:t>
             </a:r>
           </a:p>
           <a:p>
             <a:br/>
-            <a:pPr>
-              <a:defRPr sz="900">
-                <a:solidFill>
-                  <a:srgbClr val="64748B"/>
-                </a:solidFill>
-                <a:latin typeface="Segoe UI"/>
-              </a:defRPr>
-            </a:pPr>
             <a:r>
               <a:t>• MDN WEB DOCS. Fetch API. Mozilla Developer Network, 2026. Disponível em: &lt;https://developer.mozilla.org/pt-BR/docs/Web/API/Fetch_API&gt;. Acesso em: 17 set. 2026.</a:t>
             </a:r>
           </a:p>
           <a:p>
             <a:br/>
-            <a:pPr>
-              <a:defRPr sz="900">
-                <a:solidFill>
-                  <a:srgbClr val="64748B"/>
-                </a:solidFill>
-                <a:latin typeface="Segoe UI"/>
-              </a:defRPr>
-            </a:pPr>
             <a:r>
               <a:t>• ORGANIZAÇÃO DAS NAÇÕES UNIDAS (ONU). Objetivo de Desenvolvimento Sustentável 2: Fome Zero e Agricultura Sustentável. Brasília: Nações Unidas Brasil, 2015. Disponível em: &lt;https://brasil.un.org/pt-br/sdgs/2&gt;. Acesso em: 17 set. 2026.</a:t>
             </a:r>
           </a:p>
           <a:p>
             <a:br/>
-            <a:pPr>
-              <a:defRPr sz="900">
-                <a:solidFill>
-                  <a:srgbClr val="64748B"/>
-                </a:solidFill>
-                <a:latin typeface="Segoe UI"/>
-              </a:defRPr>
-            </a:pPr>
             <a:r>
               <a:t>• REACT. React — A JavaScript library for building user interfaces. Versão 19. Meta Open Source, 2026. Disponível em: &lt;https://react.dev/&gt;. Acesso em: 17 set. 2026.</a:t>
             </a:r>
           </a:p>
           <a:p>
             <a:br/>
-            <a:pPr>
-              <a:defRPr sz="900">
-                <a:solidFill>
-                  <a:srgbClr val="64748B"/>
-                </a:solidFill>
-                <a:latin typeface="Segoe UI"/>
-              </a:defRPr>
-            </a:pPr>
             <a:r>
               <a:t>• VITE. Next Generation Frontend Tooling. Evan You &amp; Vite Team, 2026. Disponível em: &lt;https://vitejs.dev/&gt;. Acesso em: 17 set. 2026.</a:t>
             </a:r>
@@ -6207,7 +6705,7 @@
 </file>
 
 <file path=ppt/slides/slide2.xml><?xml version="1.0" encoding="utf-8"?>
-<p:sld xmlns:a="http://schemas.openxmlformats.org/drawingml/2006/main" xmlns:p="http://schemas.openxmlformats.org/presentationml/2006/main" xmlns:r="http://schemas.openxmlformats.org/officeDocument/2006/relationships">
+<p:sld xmlns:a="http://schemas.openxmlformats.org/drawingml/2006/main" xmlns:r="http://schemas.openxmlformats.org/officeDocument/2006/relationships" xmlns:p="http://schemas.openxmlformats.org/presentationml/2006/main">
   <p:cSld>
     <p:spTree>
       <p:nvGrpSpPr>
@@ -6215,7 +6713,14 @@
         <p:cNvGrpSpPr/>
         <p:nvPr/>
       </p:nvGrpSpPr>
-      <p:grpSpPr/>
+      <p:grpSpPr>
+        <a:xfrm>
+          <a:off x="0" y="0"/>
+          <a:ext cx="0" cy="0"/>
+          <a:chOff x="0" y="0"/>
+          <a:chExt cx="0" cy="0"/>
+        </a:xfrm>
+      </p:grpSpPr>
       <p:sp>
         <p:nvSpPr>
           <p:cNvPr id="2" name="TextBox 1"/>
@@ -6290,7 +6795,7 @@
           </a:fontRef>
         </p:style>
         <p:txBody>
-          <a:bodyPr rtlCol="0" anchor="ctr" tIns="54864"/>
+          <a:bodyPr tIns="54864" rtlCol="0" anchor="ctr"/>
           <a:lstStyle/>
           <a:p>
             <a:pPr algn="ctr">
@@ -6347,6 +6852,7 @@
           <a:lstStyle/>
           <a:p>
             <a:pPr algn="ctr"/>
+            <a:endParaRPr/>
           </a:p>
         </p:txBody>
       </p:sp>
@@ -6390,6 +6896,7 @@
           <a:lstStyle/>
           <a:p>
             <a:pPr algn="ctr"/>
+            <a:endParaRPr/>
           </a:p>
         </p:txBody>
       </p:sp>
@@ -6474,7 +6981,7 @@
         <p:spPr>
           <a:xfrm>
             <a:off x="731520" y="1234440"/>
-            <a:ext cx="5943600" cy="2377440"/>
+            <a:ext cx="5943600" cy="1862048"/>
           </a:xfrm>
           <a:prstGeom prst="rect">
             <a:avLst/>
@@ -6487,7 +6994,7 @@
           </a:bodyPr>
           <a:lstStyle/>
           <a:p>
-            <a:pPr>
+            <a:pPr algn="just">
               <a:defRPr sz="1550" b="1">
                 <a:solidFill>
                   <a:srgbClr val="1E293B"/>
@@ -6496,21 +7003,274 @@
               </a:defRPr>
             </a:pPr>
             <a:r>
-              <a:t>A fome não é um número abstrato: ela tem nome, endereço e rosto nos bairros e na zona rural da nossa cidade.</a:t>
-            </a:r>
-          </a:p>
-          <a:p>
-            <a:br/>
-            <a:pPr>
-              <a:defRPr sz="1250">
-                <a:solidFill>
-                  <a:srgbClr val="64748B"/>
-                </a:solidFill>
-                <a:latin typeface="Segoe UI"/>
-              </a:defRPr>
-            </a:pPr>
-            <a:r>
-              <a:t>Timbiras é uma cidade acolhedora, forte e trabalhadora, banhada pelas águas do Rio Itapecuru. Mas, como tantas cidades do interior do Maranhão, muitas famílias de bairros como Forquilha, Mutirão, Alto Fogoso, Olaria e povoados rurais distantes enfrentam dias difíceis para garantir o básico na mesa.</a:t>
+              <a:rPr dirty="0"/>
+              <a:t>A </a:t>
+            </a:r>
+            <a:r>
+              <a:rPr dirty="0" err="1"/>
+              <a:t>fome</a:t>
+            </a:r>
+            <a:r>
+              <a:rPr dirty="0"/>
+              <a:t> </a:t>
+            </a:r>
+            <a:r>
+              <a:rPr dirty="0" err="1"/>
+              <a:t>não</a:t>
+            </a:r>
+            <a:r>
+              <a:rPr dirty="0"/>
+              <a:t> é um </a:t>
+            </a:r>
+            <a:r>
+              <a:rPr dirty="0" err="1"/>
+              <a:t>número</a:t>
+            </a:r>
+            <a:r>
+              <a:rPr dirty="0"/>
+              <a:t> </a:t>
+            </a:r>
+            <a:r>
+              <a:rPr dirty="0" err="1"/>
+              <a:t>abstrato</a:t>
+            </a:r>
+            <a:r>
+              <a:rPr dirty="0"/>
+              <a:t>: </a:t>
+            </a:r>
+            <a:r>
+              <a:rPr dirty="0" err="1"/>
+              <a:t>ela</a:t>
+            </a:r>
+            <a:r>
+              <a:rPr dirty="0"/>
+              <a:t> </a:t>
+            </a:r>
+            <a:r>
+              <a:rPr dirty="0" err="1"/>
+              <a:t>tem</a:t>
+            </a:r>
+            <a:r>
+              <a:rPr dirty="0"/>
+              <a:t> </a:t>
+            </a:r>
+            <a:r>
+              <a:rPr dirty="0" err="1"/>
+              <a:t>nome</a:t>
+            </a:r>
+            <a:r>
+              <a:rPr dirty="0"/>
+              <a:t>, </a:t>
+            </a:r>
+            <a:r>
+              <a:rPr dirty="0" err="1"/>
+              <a:t>endereço</a:t>
+            </a:r>
+            <a:r>
+              <a:rPr dirty="0"/>
+              <a:t> e </a:t>
+            </a:r>
+            <a:r>
+              <a:rPr dirty="0" err="1"/>
+              <a:t>rosto</a:t>
+            </a:r>
+            <a:r>
+              <a:rPr dirty="0"/>
+              <a:t> </a:t>
+            </a:r>
+            <a:r>
+              <a:rPr dirty="0" err="1"/>
+              <a:t>nos</a:t>
+            </a:r>
+            <a:r>
+              <a:rPr dirty="0"/>
+              <a:t> bairros e </a:t>
+            </a:r>
+            <a:r>
+              <a:rPr dirty="0" err="1"/>
+              <a:t>na</a:t>
+            </a:r>
+            <a:r>
+              <a:rPr dirty="0"/>
+              <a:t> zona rural da </a:t>
+            </a:r>
+            <a:r>
+              <a:rPr dirty="0" err="1"/>
+              <a:t>nossa</a:t>
+            </a:r>
+            <a:r>
+              <a:rPr dirty="0"/>
+              <a:t> </a:t>
+            </a:r>
+            <a:r>
+              <a:rPr dirty="0" err="1"/>
+              <a:t>cidade</a:t>
+            </a:r>
+            <a:r>
+              <a:rPr dirty="0"/>
+              <a:t>.</a:t>
+            </a:r>
+          </a:p>
+          <a:p>
+            <a:pPr algn="just"/>
+            <a:br>
+              <a:rPr dirty="0"/>
+            </a:br>
+            <a:r>
+              <a:rPr dirty="0"/>
+              <a:t>Timbiras é </a:t>
+            </a:r>
+            <a:r>
+              <a:rPr dirty="0" err="1"/>
+              <a:t>uma</a:t>
+            </a:r>
+            <a:r>
+              <a:rPr dirty="0"/>
+              <a:t> </a:t>
+            </a:r>
+            <a:r>
+              <a:rPr dirty="0" err="1"/>
+              <a:t>cidade</a:t>
+            </a:r>
+            <a:r>
+              <a:rPr dirty="0"/>
+              <a:t> </a:t>
+            </a:r>
+            <a:r>
+              <a:rPr dirty="0" err="1"/>
+              <a:t>acolhedora</a:t>
+            </a:r>
+            <a:r>
+              <a:rPr dirty="0"/>
+              <a:t>, forte e </a:t>
+            </a:r>
+            <a:r>
+              <a:rPr dirty="0" err="1"/>
+              <a:t>trabalhadora</a:t>
+            </a:r>
+            <a:r>
+              <a:rPr dirty="0"/>
+              <a:t>, </a:t>
+            </a:r>
+            <a:r>
+              <a:rPr dirty="0" err="1"/>
+              <a:t>banhada</a:t>
+            </a:r>
+            <a:r>
+              <a:rPr dirty="0"/>
+              <a:t> </a:t>
+            </a:r>
+            <a:r>
+              <a:rPr dirty="0" err="1"/>
+              <a:t>pelas</a:t>
+            </a:r>
+            <a:r>
+              <a:rPr dirty="0"/>
+              <a:t> </a:t>
+            </a:r>
+            <a:r>
+              <a:rPr dirty="0" err="1"/>
+              <a:t>águas</a:t>
+            </a:r>
+            <a:r>
+              <a:rPr dirty="0"/>
+              <a:t> do Rio </a:t>
+            </a:r>
+            <a:r>
+              <a:rPr dirty="0" err="1"/>
+              <a:t>Itapecuru</a:t>
+            </a:r>
+            <a:r>
+              <a:rPr dirty="0"/>
+              <a:t>. Mas, </a:t>
+            </a:r>
+            <a:r>
+              <a:rPr dirty="0" err="1"/>
+              <a:t>como</a:t>
+            </a:r>
+            <a:r>
+              <a:rPr dirty="0"/>
+              <a:t> </a:t>
+            </a:r>
+            <a:r>
+              <a:rPr dirty="0" err="1"/>
+              <a:t>tantas</a:t>
+            </a:r>
+            <a:r>
+              <a:rPr dirty="0"/>
+              <a:t> </a:t>
+            </a:r>
+            <a:r>
+              <a:rPr dirty="0" err="1"/>
+              <a:t>cidades</a:t>
+            </a:r>
+            <a:r>
+              <a:rPr dirty="0"/>
+              <a:t> do interior do Maranhão, </a:t>
+            </a:r>
+            <a:r>
+              <a:rPr dirty="0" err="1"/>
+              <a:t>muitas</a:t>
+            </a:r>
+            <a:r>
+              <a:rPr dirty="0"/>
+              <a:t> </a:t>
+            </a:r>
+            <a:r>
+              <a:rPr dirty="0" err="1"/>
+              <a:t>famílias</a:t>
+            </a:r>
+            <a:r>
+              <a:rPr lang="pt-BR" dirty="0"/>
+              <a:t> </a:t>
+            </a:r>
+            <a:r>
+              <a:rPr dirty="0" err="1"/>
+              <a:t>enfrentam</a:t>
+            </a:r>
+            <a:r>
+              <a:rPr dirty="0"/>
+              <a:t> </a:t>
+            </a:r>
+            <a:r>
+              <a:rPr dirty="0" err="1"/>
+              <a:t>dias</a:t>
+            </a:r>
+            <a:r>
+              <a:rPr dirty="0"/>
+              <a:t> </a:t>
+            </a:r>
+            <a:r>
+              <a:rPr dirty="0" err="1"/>
+              <a:t>difíceis</a:t>
+            </a:r>
+            <a:r>
+              <a:rPr dirty="0"/>
+              <a:t> para </a:t>
+            </a:r>
+            <a:r>
+              <a:rPr dirty="0" err="1"/>
+              <a:t>garantir</a:t>
+            </a:r>
+            <a:r>
+              <a:rPr dirty="0"/>
+              <a:t> o </a:t>
+            </a:r>
+            <a:r>
+              <a:rPr dirty="0" err="1"/>
+              <a:t>básico</a:t>
+            </a:r>
+            <a:r>
+              <a:rPr dirty="0"/>
+              <a:t> </a:t>
+            </a:r>
+            <a:r>
+              <a:rPr dirty="0" err="1"/>
+              <a:t>na</a:t>
+            </a:r>
+            <a:r>
+              <a:rPr dirty="0"/>
+              <a:t> mesa.</a:t>
             </a:r>
           </a:p>
         </p:txBody>
@@ -6557,6 +7317,7 @@
           <a:lstStyle/>
           <a:p>
             <a:pPr algn="ctr"/>
+            <a:endParaRPr/>
           </a:p>
         </p:txBody>
       </p:sp>
@@ -6600,6 +7361,7 @@
           <a:lstStyle/>
           <a:p>
             <a:pPr algn="ctr"/>
+            <a:endParaRPr/>
           </a:p>
         </p:txBody>
       </p:sp>
@@ -6634,21 +7396,199 @@
               </a:defRPr>
             </a:pPr>
             <a:r>
-              <a:t>O Encontro de Duas Realidades</a:t>
-            </a:r>
-          </a:p>
-          <a:p>
-            <a:br/>
-            <a:pPr>
-              <a:defRPr sz="1150">
-                <a:solidFill>
-                  <a:srgbClr val="1E293B"/>
-                </a:solidFill>
-                <a:latin typeface="Segoe UI"/>
-              </a:defRPr>
-            </a:pPr>
-            <a:r>
-              <a:t>De um lado, pequenos agricultores e comerciantes com vontade de ajudar e excedentes de colheita. Do outro, famílias precisando de auxílio imediato. O Timbiras Solidária nasceu para ser a ponte digital entre a generosidade de quem pode doar e a dignidade de quem precisa receber.</a:t>
+              <a:rPr dirty="0"/>
+              <a:t>O </a:t>
+            </a:r>
+            <a:r>
+              <a:rPr dirty="0" err="1"/>
+              <a:t>Encontro</a:t>
+            </a:r>
+            <a:r>
+              <a:rPr dirty="0"/>
+              <a:t> de Duas </a:t>
+            </a:r>
+            <a:r>
+              <a:rPr dirty="0" err="1"/>
+              <a:t>Realidades</a:t>
+            </a:r>
+            <a:endParaRPr dirty="0"/>
+          </a:p>
+          <a:p>
+            <a:pPr algn="just"/>
+            <a:br>
+              <a:rPr dirty="0"/>
+            </a:br>
+            <a:r>
+              <a:rPr dirty="0"/>
+              <a:t>De um </a:t>
+            </a:r>
+            <a:r>
+              <a:rPr dirty="0" err="1"/>
+              <a:t>lado</a:t>
+            </a:r>
+            <a:r>
+              <a:rPr dirty="0"/>
+              <a:t>, </a:t>
+            </a:r>
+            <a:r>
+              <a:rPr dirty="0" err="1"/>
+              <a:t>pequenos</a:t>
+            </a:r>
+            <a:r>
+              <a:rPr dirty="0"/>
+              <a:t> </a:t>
+            </a:r>
+            <a:r>
+              <a:rPr dirty="0" err="1"/>
+              <a:t>agricultores</a:t>
+            </a:r>
+            <a:r>
+              <a:rPr dirty="0"/>
+              <a:t> e </a:t>
+            </a:r>
+            <a:r>
+              <a:rPr dirty="0" err="1"/>
+              <a:t>comerciantes</a:t>
+            </a:r>
+            <a:r>
+              <a:rPr dirty="0"/>
+              <a:t> com </a:t>
+            </a:r>
+            <a:r>
+              <a:rPr dirty="0" err="1"/>
+              <a:t>vontade</a:t>
+            </a:r>
+            <a:r>
+              <a:rPr dirty="0"/>
+              <a:t> de </a:t>
+            </a:r>
+            <a:r>
+              <a:rPr dirty="0" err="1"/>
+              <a:t>ajudar</a:t>
+            </a:r>
+            <a:r>
+              <a:rPr dirty="0"/>
+              <a:t> e </a:t>
+            </a:r>
+            <a:r>
+              <a:rPr dirty="0" err="1"/>
+              <a:t>excedentes</a:t>
+            </a:r>
+            <a:r>
+              <a:rPr dirty="0"/>
+              <a:t> de </a:t>
+            </a:r>
+            <a:r>
+              <a:rPr dirty="0" err="1"/>
+              <a:t>colheita</a:t>
+            </a:r>
+            <a:r>
+              <a:rPr dirty="0"/>
+              <a:t>. Do outro, </a:t>
+            </a:r>
+            <a:r>
+              <a:rPr dirty="0" err="1"/>
+              <a:t>famílias</a:t>
+            </a:r>
+            <a:r>
+              <a:rPr dirty="0"/>
+              <a:t> </a:t>
+            </a:r>
+            <a:r>
+              <a:rPr dirty="0" err="1"/>
+              <a:t>precisando</a:t>
+            </a:r>
+            <a:r>
+              <a:rPr dirty="0"/>
+              <a:t> de </a:t>
+            </a:r>
+            <a:r>
+              <a:rPr dirty="0" err="1"/>
+              <a:t>auxílio</a:t>
+            </a:r>
+            <a:r>
+              <a:rPr dirty="0"/>
+              <a:t> </a:t>
+            </a:r>
+            <a:r>
+              <a:rPr dirty="0" err="1"/>
+              <a:t>imediato</a:t>
+            </a:r>
+            <a:r>
+              <a:rPr dirty="0"/>
+              <a:t>. O Timbiras </a:t>
+            </a:r>
+            <a:r>
+              <a:rPr dirty="0" err="1"/>
+              <a:t>Solidária</a:t>
+            </a:r>
+            <a:r>
+              <a:rPr dirty="0"/>
+              <a:t> </a:t>
+            </a:r>
+            <a:r>
+              <a:rPr dirty="0" err="1"/>
+              <a:t>nasceu</a:t>
+            </a:r>
+            <a:r>
+              <a:rPr dirty="0"/>
+              <a:t> para ser a </a:t>
+            </a:r>
+            <a:r>
+              <a:rPr dirty="0" err="1"/>
+              <a:t>ponte</a:t>
+            </a:r>
+            <a:r>
+              <a:rPr dirty="0"/>
+              <a:t> digital entre a </a:t>
+            </a:r>
+            <a:r>
+              <a:rPr dirty="0" err="1"/>
+              <a:t>generosidade</a:t>
+            </a:r>
+            <a:r>
+              <a:rPr dirty="0"/>
+              <a:t> de quem </a:t>
+            </a:r>
+            <a:r>
+              <a:rPr dirty="0" err="1"/>
+              <a:t>pode</a:t>
+            </a:r>
+            <a:r>
+              <a:rPr dirty="0"/>
+              <a:t> </a:t>
+            </a:r>
+            <a:r>
+              <a:rPr dirty="0" err="1"/>
+              <a:t>doar</a:t>
+            </a:r>
+            <a:r>
+              <a:rPr dirty="0"/>
+              <a:t> e a </a:t>
+            </a:r>
+            <a:r>
+              <a:rPr dirty="0" err="1"/>
+              <a:t>dignidade</a:t>
+            </a:r>
+            <a:r>
+              <a:rPr dirty="0"/>
+              <a:t> de quem </a:t>
+            </a:r>
+            <a:r>
+              <a:rPr dirty="0" err="1"/>
+              <a:t>precisa</a:t>
+            </a:r>
+            <a:r>
+              <a:rPr dirty="0"/>
+              <a:t> </a:t>
+            </a:r>
+            <a:r>
+              <a:rPr dirty="0" err="1"/>
+              <a:t>receber</a:t>
+            </a:r>
+            <a:r>
+              <a:rPr dirty="0"/>
+              <a:t>.</a:t>
             </a:r>
           </a:p>
         </p:txBody>
@@ -6695,6 +7635,7 @@
           <a:lstStyle/>
           <a:p>
             <a:pPr algn="ctr"/>
+            <a:endParaRPr/>
           </a:p>
         </p:txBody>
       </p:sp>
@@ -6707,7 +7648,7 @@
         <p:spPr>
           <a:xfrm>
             <a:off x="7223760" y="1417320"/>
-            <a:ext cx="3977639" cy="4434840"/>
+            <a:ext cx="3977639" cy="4208844"/>
           </a:xfrm>
           <a:prstGeom prst="rect">
             <a:avLst/>
@@ -6720,7 +7661,7 @@
           </a:bodyPr>
           <a:lstStyle/>
           <a:p>
-            <a:pPr>
+            <a:pPr algn="ctr">
               <a:defRPr sz="1550" b="1">
                 <a:solidFill>
                   <a:srgbClr val="00873E"/>
@@ -6729,11 +7670,16 @@
               </a:defRPr>
             </a:pPr>
             <a:r>
-              <a:t>Compromisso Real com o ODS 2</a:t>
-            </a:r>
-          </a:p>
-          <a:p>
-            <a:pPr>
+              <a:rPr sz="1600" dirty="0" err="1"/>
+              <a:t>Compromisso</a:t>
+            </a:r>
+            <a:r>
+              <a:rPr sz="1600" dirty="0"/>
+              <a:t> Real com o ODS 2</a:t>
+            </a:r>
+          </a:p>
+          <a:p>
+            <a:pPr algn="just">
               <a:defRPr sz="1150">
                 <a:solidFill>
                   <a:srgbClr val="1E293B"/>
@@ -6742,25 +7688,192 @@
               </a:defRPr>
             </a:pPr>
             <a:r>
-              <a:t>Fome Zero e Agricultura Sustentável: nosso foco não é assistencialismo frio, mas mobilização comunitária com valorização do agricultor familiar local.</a:t>
-            </a:r>
-          </a:p>
-          <a:p>
-            <a:br/>
-            <a:pPr>
-              <a:defRPr sz="1300" b="1">
-                <a:solidFill>
-                  <a:srgbClr val="00873E"/>
+              <a:rPr sz="1400" dirty="0" err="1"/>
+              <a:t>Fome</a:t>
+            </a:r>
+            <a:r>
+              <a:rPr sz="1400" dirty="0"/>
+              <a:t> Zero e Agricultura </a:t>
+            </a:r>
+            <a:r>
+              <a:rPr sz="1400" dirty="0" err="1"/>
+              <a:t>Sustentável</a:t>
+            </a:r>
+            <a:r>
+              <a:rPr sz="1400" dirty="0"/>
+              <a:t>: </a:t>
+            </a:r>
+            <a:r>
+              <a:rPr sz="1400" dirty="0" err="1"/>
+              <a:t>nosso</a:t>
+            </a:r>
+            <a:r>
+              <a:rPr sz="1400" dirty="0"/>
+              <a:t> </a:t>
+            </a:r>
+            <a:r>
+              <a:rPr sz="1400" dirty="0" err="1"/>
+              <a:t>foco</a:t>
+            </a:r>
+            <a:r>
+              <a:rPr sz="1400" dirty="0"/>
+              <a:t> </a:t>
+            </a:r>
+            <a:r>
+              <a:rPr sz="1400" dirty="0" err="1"/>
+              <a:t>não</a:t>
+            </a:r>
+            <a:r>
+              <a:rPr sz="1400" dirty="0"/>
+              <a:t> é </a:t>
+            </a:r>
+            <a:r>
+              <a:rPr sz="1400" dirty="0" err="1"/>
+              <a:t>assistencialismo</a:t>
+            </a:r>
+            <a:r>
+              <a:rPr sz="1400" dirty="0"/>
+              <a:t> </a:t>
+            </a:r>
+            <a:r>
+              <a:rPr sz="1400" dirty="0" err="1"/>
+              <a:t>frio</a:t>
+            </a:r>
+            <a:r>
+              <a:rPr sz="1400" dirty="0"/>
+              <a:t>, mas </a:t>
+            </a:r>
+            <a:r>
+              <a:rPr sz="1400" dirty="0" err="1"/>
+              <a:t>mobilização</a:t>
+            </a:r>
+            <a:r>
+              <a:rPr sz="1400" dirty="0"/>
+              <a:t> </a:t>
+            </a:r>
+            <a:r>
+              <a:rPr sz="1400" dirty="0" err="1"/>
+              <a:t>comunitária</a:t>
+            </a:r>
+            <a:r>
+              <a:rPr sz="1400" dirty="0"/>
+              <a:t> com </a:t>
+            </a:r>
+            <a:r>
+              <a:rPr sz="1400" dirty="0" err="1"/>
+              <a:t>valorização</a:t>
+            </a:r>
+            <a:r>
+              <a:rPr sz="1400" dirty="0"/>
+              <a:t> do </a:t>
+            </a:r>
+            <a:r>
+              <a:rPr sz="1400" dirty="0" err="1"/>
+              <a:t>agricultor</a:t>
+            </a:r>
+            <a:r>
+              <a:rPr sz="1400" dirty="0"/>
+              <a:t> familiar local.</a:t>
+            </a:r>
+          </a:p>
+          <a:p>
+            <a:br>
+              <a:rPr sz="2400" dirty="0"/>
+            </a:br>
+            <a:r>
+              <a:rPr sz="2400" dirty="0"/>
+              <a:t>Público-Alvo </a:t>
+            </a:r>
+            <a:r>
+              <a:rPr sz="2400" dirty="0" err="1"/>
+              <a:t>que</a:t>
+            </a:r>
+            <a:r>
+              <a:rPr sz="2400" dirty="0"/>
+              <a:t> </a:t>
+            </a:r>
+            <a:r>
+              <a:rPr sz="2400" dirty="0" err="1"/>
+              <a:t>Abraçamos</a:t>
+            </a:r>
+            <a:r>
+              <a:rPr sz="2400" dirty="0"/>
+              <a:t>:</a:t>
+            </a:r>
+          </a:p>
+          <a:p>
+            <a:pPr algn="just">
+              <a:defRPr sz="1100">
+                <a:solidFill>
+                  <a:srgbClr val="1E293B"/>
                 </a:solidFill>
                 <a:latin typeface="Segoe UI"/>
               </a:defRPr>
             </a:pPr>
             <a:r>
-              <a:t>Público-Alvo que Abraçamos:</a:t>
-            </a:r>
-          </a:p>
-          <a:p>
-            <a:pPr>
+              <a:rPr sz="1400" dirty="0"/>
+              <a:t>• </a:t>
+            </a:r>
+            <a:r>
+              <a:rPr sz="1400" dirty="0" err="1"/>
+              <a:t>Cidadãos</a:t>
+            </a:r>
+            <a:r>
+              <a:rPr sz="1400" dirty="0"/>
+              <a:t> </a:t>
+            </a:r>
+            <a:r>
+              <a:rPr sz="1400" dirty="0" err="1"/>
+              <a:t>comuns</a:t>
+            </a:r>
+            <a:r>
+              <a:rPr sz="1400" dirty="0"/>
+              <a:t>:  </a:t>
+            </a:r>
+            <a:r>
+              <a:rPr sz="1400" dirty="0" err="1"/>
+              <a:t>Que</a:t>
+            </a:r>
+            <a:r>
+              <a:rPr sz="1400" dirty="0"/>
+              <a:t> </a:t>
+            </a:r>
+            <a:r>
+              <a:rPr sz="1400" dirty="0" err="1"/>
+              <a:t>querem</a:t>
+            </a:r>
+            <a:r>
+              <a:rPr sz="1400" dirty="0"/>
+              <a:t> </a:t>
+            </a:r>
+            <a:r>
+              <a:rPr sz="1400" dirty="0" err="1"/>
+              <a:t>doar</a:t>
+            </a:r>
+            <a:r>
+              <a:rPr sz="1400" dirty="0"/>
+              <a:t> 1 cesta </a:t>
+            </a:r>
+            <a:r>
+              <a:rPr sz="1400" dirty="0" err="1"/>
+              <a:t>ou</a:t>
+            </a:r>
+            <a:r>
+              <a:rPr sz="1400" dirty="0"/>
+              <a:t> 1 kg de </a:t>
+            </a:r>
+            <a:r>
+              <a:rPr sz="1400" dirty="0" err="1"/>
+              <a:t>alimento</a:t>
+            </a:r>
+            <a:r>
+              <a:rPr sz="1400" dirty="0"/>
+              <a:t>;</a:t>
+            </a:r>
+            <a:endParaRPr lang="pt-BR" sz="1400" dirty="0"/>
+          </a:p>
+          <a:p>
+            <a:pPr algn="just">
               <a:defRPr sz="1100">
                 <a:solidFill>
                   <a:srgbClr val="1E293B"/>
@@ -6768,12 +7881,10 @@
                 <a:latin typeface="Segoe UI"/>
               </a:defRPr>
             </a:pPr>
-            <a:r>
-              <a:t>• Cidadãos comuns:  Que querem doar 1 cesta ou 1 kg de alimento;</a:t>
-            </a:r>
-          </a:p>
-          <a:p>
-            <a:pPr>
+            <a:endParaRPr sz="1400" dirty="0"/>
+          </a:p>
+          <a:p>
+            <a:pPr algn="just">
               <a:defRPr sz="1100">
                 <a:solidFill>
                   <a:srgbClr val="1E293B"/>
@@ -6782,11 +7893,53 @@
               </a:defRPr>
             </a:pPr>
             <a:r>
-              <a:t>• Comércio e feirantes:  Que exercem cidadania ativa;</a:t>
-            </a:r>
-          </a:p>
-          <a:p>
-            <a:pPr>
+              <a:rPr sz="1400" dirty="0"/>
+              <a:t>• Comércio e </a:t>
+            </a:r>
+            <a:r>
+              <a:rPr sz="1400" dirty="0" err="1"/>
+              <a:t>feirantes</a:t>
+            </a:r>
+            <a:r>
+              <a:rPr sz="1400" dirty="0"/>
+              <a:t>:  </a:t>
+            </a:r>
+            <a:r>
+              <a:rPr sz="1400" dirty="0" err="1"/>
+              <a:t>Que</a:t>
+            </a:r>
+            <a:r>
+              <a:rPr sz="1400" dirty="0"/>
+              <a:t> </a:t>
+            </a:r>
+            <a:r>
+              <a:rPr sz="1400" dirty="0" err="1"/>
+              <a:t>exercem</a:t>
+            </a:r>
+            <a:r>
+              <a:rPr sz="1400" dirty="0"/>
+              <a:t> </a:t>
+            </a:r>
+            <a:r>
+              <a:rPr sz="1400" dirty="0" err="1"/>
+              <a:t>cidadania</a:t>
+            </a:r>
+            <a:r>
+              <a:rPr sz="1400" dirty="0"/>
+              <a:t> </a:t>
+            </a:r>
+            <a:r>
+              <a:rPr sz="1400" dirty="0" err="1"/>
+              <a:t>ativa</a:t>
+            </a:r>
+            <a:r>
+              <a:rPr sz="1400" dirty="0"/>
+              <a:t>;</a:t>
+            </a:r>
+            <a:endParaRPr lang="pt-BR" sz="1400" dirty="0"/>
+          </a:p>
+          <a:p>
+            <a:pPr algn="just">
               <a:defRPr sz="1100">
                 <a:solidFill>
                   <a:srgbClr val="1E293B"/>
@@ -6794,12 +7947,10 @@
                 <a:latin typeface="Segoe UI"/>
               </a:defRPr>
             </a:pPr>
-            <a:r>
-              <a:t>• Agricultura familiar:  Que abastece a cidade com alimentos frescos;</a:t>
-            </a:r>
-          </a:p>
-          <a:p>
-            <a:pPr>
+            <a:endParaRPr sz="1400" dirty="0"/>
+          </a:p>
+          <a:p>
+            <a:pPr algn="just">
               <a:defRPr sz="1100">
                 <a:solidFill>
                   <a:srgbClr val="1E293B"/>
@@ -6808,7 +7959,98 @@
               </a:defRPr>
             </a:pPr>
             <a:r>
-              <a:t>• Poder público &amp; voluntários:  Para transparência e logística.</a:t>
+              <a:rPr sz="1400" dirty="0"/>
+              <a:t>• Agricultura familiar:  </a:t>
+            </a:r>
+            <a:r>
+              <a:rPr sz="1400" dirty="0" err="1"/>
+              <a:t>Que</a:t>
+            </a:r>
+            <a:r>
+              <a:rPr sz="1400" dirty="0"/>
+              <a:t> </a:t>
+            </a:r>
+            <a:r>
+              <a:rPr sz="1400" dirty="0" err="1"/>
+              <a:t>abastece</a:t>
+            </a:r>
+            <a:r>
+              <a:rPr sz="1400" dirty="0"/>
+              <a:t> a </a:t>
+            </a:r>
+            <a:r>
+              <a:rPr sz="1400" dirty="0" err="1"/>
+              <a:t>cidade</a:t>
+            </a:r>
+            <a:r>
+              <a:rPr sz="1400" dirty="0"/>
+              <a:t> com </a:t>
+            </a:r>
+            <a:r>
+              <a:rPr sz="1400" dirty="0" err="1"/>
+              <a:t>alimentos</a:t>
+            </a:r>
+            <a:r>
+              <a:rPr sz="1400" dirty="0"/>
+              <a:t> frescos;</a:t>
+            </a:r>
+            <a:endParaRPr lang="pt-BR" sz="1400" dirty="0"/>
+          </a:p>
+          <a:p>
+            <a:pPr algn="just">
+              <a:defRPr sz="1100">
+                <a:solidFill>
+                  <a:srgbClr val="1E293B"/>
+                </a:solidFill>
+                <a:latin typeface="Segoe UI"/>
+              </a:defRPr>
+            </a:pPr>
+            <a:endParaRPr sz="1400" dirty="0"/>
+          </a:p>
+          <a:p>
+            <a:pPr algn="just">
+              <a:defRPr sz="1100">
+                <a:solidFill>
+                  <a:srgbClr val="1E293B"/>
+                </a:solidFill>
+                <a:latin typeface="Segoe UI"/>
+              </a:defRPr>
+            </a:pPr>
+            <a:r>
+              <a:rPr sz="1400" dirty="0"/>
+              <a:t>• Poder </a:t>
+            </a:r>
+            <a:r>
+              <a:rPr sz="1400" dirty="0" err="1"/>
+              <a:t>público</a:t>
+            </a:r>
+            <a:r>
+              <a:rPr sz="1400" dirty="0"/>
+              <a:t> &amp; </a:t>
+            </a:r>
+            <a:r>
+              <a:rPr sz="1400" dirty="0" err="1"/>
+              <a:t>voluntários</a:t>
+            </a:r>
+            <a:r>
+              <a:rPr sz="1400" dirty="0"/>
+              <a:t>:  Para </a:t>
+            </a:r>
+            <a:r>
+              <a:rPr sz="1400" dirty="0" err="1"/>
+              <a:t>transparência</a:t>
+            </a:r>
+            <a:r>
+              <a:rPr sz="1400" dirty="0"/>
+              <a:t> e </a:t>
+            </a:r>
+            <a:r>
+              <a:rPr sz="1400" dirty="0" err="1"/>
+              <a:t>logística</a:t>
+            </a:r>
+            <a:r>
+              <a:rPr sz="1400" dirty="0"/>
+              <a:t>.</a:t>
             </a:r>
           </a:p>
         </p:txBody>
@@ -6822,7 +8064,7 @@
 </file>
 
 <file path=ppt/slides/slide3.xml><?xml version="1.0" encoding="utf-8"?>
-<p:sld xmlns:a="http://schemas.openxmlformats.org/drawingml/2006/main" xmlns:p="http://schemas.openxmlformats.org/presentationml/2006/main" xmlns:r="http://schemas.openxmlformats.org/officeDocument/2006/relationships">
+<p:sld xmlns:a="http://schemas.openxmlformats.org/drawingml/2006/main" xmlns:r="http://schemas.openxmlformats.org/officeDocument/2006/relationships" xmlns:p="http://schemas.openxmlformats.org/presentationml/2006/main">
   <p:cSld>
     <p:spTree>
       <p:nvGrpSpPr>
@@ -6830,7 +8072,14 @@
         <p:cNvGrpSpPr/>
         <p:nvPr/>
       </p:nvGrpSpPr>
-      <p:grpSpPr/>
+      <p:grpSpPr>
+        <a:xfrm>
+          <a:off x="0" y="0"/>
+          <a:ext cx="0" cy="0"/>
+          <a:chOff x="0" y="0"/>
+          <a:chExt cx="0" cy="0"/>
+        </a:xfrm>
+      </p:grpSpPr>
       <p:sp>
         <p:nvSpPr>
           <p:cNvPr id="2" name="TextBox 1"/>
@@ -6905,7 +8154,7 @@
           </a:fontRef>
         </p:style>
         <p:txBody>
-          <a:bodyPr rtlCol="0" anchor="ctr" tIns="54864"/>
+          <a:bodyPr tIns="54864" rtlCol="0" anchor="ctr"/>
           <a:lstStyle/>
           <a:p>
             <a:pPr algn="ctr">
@@ -6962,6 +8211,7 @@
           <a:lstStyle/>
           <a:p>
             <a:pPr algn="ctr"/>
+            <a:endParaRPr/>
           </a:p>
         </p:txBody>
       </p:sp>
@@ -7005,6 +8255,7 @@
           <a:lstStyle/>
           <a:p>
             <a:pPr algn="ctr"/>
+            <a:endParaRPr/>
           </a:p>
         </p:txBody>
       </p:sp>
@@ -7089,7 +8340,7 @@
         <p:spPr>
           <a:xfrm>
             <a:off x="731520" y="1234440"/>
-            <a:ext cx="5166360" cy="2743200"/>
+            <a:ext cx="5166360" cy="3008516"/>
           </a:xfrm>
           <a:prstGeom prst="rect">
             <a:avLst/>
@@ -7102,7 +8353,7 @@
           </a:bodyPr>
           <a:lstStyle/>
           <a:p>
-            <a:pPr>
+            <a:pPr algn="just">
               <a:defRPr sz="1550" b="1">
                 <a:solidFill>
                   <a:srgbClr val="00873E"/>
@@ -7111,35 +8362,332 @@
               </a:defRPr>
             </a:pPr>
             <a:r>
-              <a:t>O Salto da Primeira para a Segunda Etapa</a:t>
-            </a:r>
-          </a:p>
-          <a:p>
-            <a:br/>
-            <a:pPr>
-              <a:defRPr sz="1200">
-                <a:solidFill>
-                  <a:srgbClr val="64748B"/>
-                </a:solidFill>
-                <a:latin typeface="Segoe UI"/>
-              </a:defRPr>
-            </a:pPr>
-            <a:r>
-              <a:t>Na Nota 1, criamos uma interface estática em HTML5, CSS3 e Bootstrap. Era bonita e organizada, mas funcionava como um panfleto digital: parada, passiva e sem diálogo direto com quem acessava.</a:t>
-            </a:r>
-          </a:p>
-          <a:p>
-            <a:br/>
-            <a:pPr>
-              <a:defRPr sz="1200">
-                <a:solidFill>
-                  <a:srgbClr val="64748B"/>
-                </a:solidFill>
-                <a:latin typeface="Segoe UI"/>
-              </a:defRPr>
-            </a:pPr>
-            <a:r>
-              <a:t>Na Nota 2, nossa missão foi dar vida e coração ao projeto: quando alguém preenche uma doação, precisa sentir que aquele ato gerou uma resposta no mundo real.</a:t>
+              <a:rPr sz="1600" dirty="0"/>
+              <a:t>O Salto da </a:t>
+            </a:r>
+            <a:r>
+              <a:rPr sz="1600" dirty="0" err="1"/>
+              <a:t>Primeira</a:t>
+            </a:r>
+            <a:r>
+              <a:rPr sz="1600" dirty="0"/>
+              <a:t> para a Segunda Etapa</a:t>
+            </a:r>
+          </a:p>
+          <a:p>
+            <a:pPr algn="just"/>
+            <a:br>
+              <a:rPr dirty="0"/>
+            </a:br>
+            <a:r>
+              <a:rPr dirty="0"/>
+              <a:t>Na Nota 1, </a:t>
+            </a:r>
+            <a:r>
+              <a:rPr dirty="0" err="1"/>
+              <a:t>criamos</a:t>
+            </a:r>
+            <a:r>
+              <a:rPr dirty="0"/>
+              <a:t> </a:t>
+            </a:r>
+            <a:r>
+              <a:rPr dirty="0" err="1"/>
+              <a:t>uma</a:t>
+            </a:r>
+            <a:r>
+              <a:rPr dirty="0"/>
+              <a:t> interface </a:t>
+            </a:r>
+            <a:r>
+              <a:rPr dirty="0" err="1"/>
+              <a:t>estática</a:t>
+            </a:r>
+            <a:r>
+              <a:rPr dirty="0"/>
+              <a:t> </a:t>
+            </a:r>
+            <a:r>
+              <a:rPr dirty="0" err="1"/>
+              <a:t>em</a:t>
+            </a:r>
+            <a:r>
+              <a:rPr dirty="0"/>
+              <a:t> HTML5, CSS3 e Bootstrap. Era </a:t>
+            </a:r>
+            <a:r>
+              <a:rPr dirty="0" err="1"/>
+              <a:t>bonita</a:t>
+            </a:r>
+            <a:r>
+              <a:rPr dirty="0"/>
+              <a:t> e </a:t>
+            </a:r>
+            <a:r>
+              <a:rPr dirty="0" err="1"/>
+              <a:t>organizada</a:t>
+            </a:r>
+            <a:r>
+              <a:rPr dirty="0"/>
+              <a:t>, mas </a:t>
+            </a:r>
+            <a:r>
+              <a:rPr dirty="0" err="1"/>
+              <a:t>funcionava</a:t>
+            </a:r>
+            <a:r>
+              <a:rPr dirty="0"/>
+              <a:t> </a:t>
+            </a:r>
+            <a:r>
+              <a:rPr dirty="0" err="1"/>
+              <a:t>como</a:t>
+            </a:r>
+            <a:r>
+              <a:rPr dirty="0"/>
+              <a:t> um </a:t>
+            </a:r>
+            <a:r>
+              <a:rPr dirty="0" err="1"/>
+              <a:t>panfleto</a:t>
+            </a:r>
+            <a:r>
+              <a:rPr dirty="0"/>
+              <a:t> digital: </a:t>
+            </a:r>
+            <a:r>
+              <a:rPr dirty="0" err="1"/>
+              <a:t>parada</a:t>
+            </a:r>
+            <a:r>
+              <a:rPr dirty="0"/>
+              <a:t>, </a:t>
+            </a:r>
+            <a:r>
+              <a:rPr dirty="0" err="1"/>
+              <a:t>passiva</a:t>
+            </a:r>
+            <a:r>
+              <a:rPr dirty="0"/>
+              <a:t> e </a:t>
+            </a:r>
+            <a:r>
+              <a:rPr dirty="0" err="1"/>
+              <a:t>sem</a:t>
+            </a:r>
+            <a:r>
+              <a:rPr dirty="0"/>
+              <a:t> </a:t>
+            </a:r>
+            <a:r>
+              <a:rPr dirty="0" err="1"/>
+              <a:t>diálogo</a:t>
+            </a:r>
+            <a:r>
+              <a:rPr dirty="0"/>
+              <a:t> </a:t>
+            </a:r>
+            <a:r>
+              <a:rPr dirty="0" err="1"/>
+              <a:t>direto</a:t>
+            </a:r>
+            <a:r>
+              <a:rPr dirty="0"/>
+              <a:t> com quem </a:t>
+            </a:r>
+            <a:r>
+              <a:rPr dirty="0" err="1"/>
+              <a:t>acessava</a:t>
+            </a:r>
+            <a:r>
+              <a:rPr dirty="0"/>
+              <a:t>.</a:t>
+            </a:r>
+          </a:p>
+          <a:p>
+            <a:pPr algn="just"/>
+            <a:br>
+              <a:rPr dirty="0"/>
+            </a:br>
+            <a:r>
+              <a:rPr dirty="0"/>
+              <a:t>Na Nota 2, </a:t>
+            </a:r>
+            <a:r>
+              <a:rPr dirty="0" err="1"/>
+              <a:t>nossa</a:t>
+            </a:r>
+            <a:r>
+              <a:rPr dirty="0"/>
+              <a:t> </a:t>
+            </a:r>
+            <a:r>
+              <a:rPr dirty="0" err="1"/>
+              <a:t>missão</a:t>
+            </a:r>
+            <a:r>
+              <a:rPr dirty="0"/>
+              <a:t> </a:t>
+            </a:r>
+            <a:r>
+              <a:rPr dirty="0" err="1"/>
+              <a:t>foi</a:t>
+            </a:r>
+            <a:r>
+              <a:rPr dirty="0"/>
+              <a:t> </a:t>
+            </a:r>
+            <a:r>
+              <a:rPr dirty="0" err="1"/>
+              <a:t>dar</a:t>
+            </a:r>
+            <a:r>
+              <a:rPr dirty="0"/>
+              <a:t> </a:t>
+            </a:r>
+            <a:r>
+              <a:rPr dirty="0" err="1"/>
+              <a:t>vida</a:t>
+            </a:r>
+            <a:r>
+              <a:rPr dirty="0"/>
+              <a:t> e </a:t>
+            </a:r>
+            <a:r>
+              <a:rPr dirty="0" err="1"/>
+              <a:t>coração</a:t>
+            </a:r>
+            <a:r>
+              <a:rPr dirty="0"/>
+              <a:t> </a:t>
+            </a:r>
+            <a:r>
+              <a:rPr dirty="0" err="1"/>
+              <a:t>ao</a:t>
+            </a:r>
+            <a:r>
+              <a:rPr dirty="0"/>
+              <a:t> </a:t>
+            </a:r>
+            <a:r>
+              <a:rPr dirty="0" err="1"/>
+              <a:t>projeto</a:t>
+            </a:r>
+            <a:r>
+              <a:rPr dirty="0"/>
+              <a:t>: </a:t>
+            </a:r>
+            <a:r>
+              <a:rPr dirty="0" err="1"/>
+              <a:t>quando</a:t>
+            </a:r>
+            <a:r>
+              <a:rPr dirty="0"/>
+              <a:t> </a:t>
+            </a:r>
+            <a:r>
+              <a:rPr dirty="0" err="1"/>
+              <a:t>alguém</a:t>
+            </a:r>
+            <a:r>
+              <a:rPr dirty="0"/>
+              <a:t> </a:t>
+            </a:r>
+            <a:r>
+              <a:rPr dirty="0" err="1"/>
+              <a:t>preenche</a:t>
+            </a:r>
+            <a:r>
+              <a:rPr dirty="0"/>
+              <a:t> </a:t>
+            </a:r>
+            <a:r>
+              <a:rPr dirty="0" err="1"/>
+              <a:t>uma</a:t>
+            </a:r>
+            <a:r>
+              <a:rPr dirty="0"/>
+              <a:t> </a:t>
+            </a:r>
+            <a:r>
+              <a:rPr dirty="0" err="1"/>
+              <a:t>doação</a:t>
+            </a:r>
+            <a:r>
+              <a:rPr dirty="0"/>
+              <a:t>, </a:t>
+            </a:r>
+            <a:r>
+              <a:rPr dirty="0" err="1"/>
+              <a:t>precisa</a:t>
+            </a:r>
+            <a:r>
+              <a:rPr dirty="0"/>
+              <a:t> </a:t>
+            </a:r>
+            <a:r>
+              <a:rPr dirty="0" err="1"/>
+              <a:t>sentir</a:t>
+            </a:r>
+            <a:r>
+              <a:rPr dirty="0"/>
+              <a:t> </a:t>
+            </a:r>
+            <a:r>
+              <a:rPr dirty="0" err="1"/>
+              <a:t>que</a:t>
+            </a:r>
+            <a:r>
+              <a:rPr dirty="0"/>
+              <a:t> </a:t>
+            </a:r>
+            <a:r>
+              <a:rPr dirty="0" err="1"/>
+              <a:t>aquele</a:t>
+            </a:r>
+            <a:r>
+              <a:rPr dirty="0"/>
+              <a:t> </a:t>
+            </a:r>
+            <a:r>
+              <a:rPr dirty="0" err="1"/>
+              <a:t>ato</a:t>
+            </a:r>
+            <a:r>
+              <a:rPr dirty="0"/>
+              <a:t> </a:t>
+            </a:r>
+            <a:r>
+              <a:rPr dirty="0" err="1"/>
+              <a:t>gerou</a:t>
+            </a:r>
+            <a:r>
+              <a:rPr dirty="0"/>
+              <a:t> </a:t>
+            </a:r>
+            <a:r>
+              <a:rPr dirty="0" err="1"/>
+              <a:t>uma</a:t>
+            </a:r>
+            <a:r>
+              <a:rPr dirty="0"/>
+              <a:t> </a:t>
+            </a:r>
+            <a:r>
+              <a:rPr dirty="0" err="1"/>
+              <a:t>resposta</a:t>
+            </a:r>
+            <a:r>
+              <a:rPr dirty="0"/>
+              <a:t> no </a:t>
+            </a:r>
+            <a:r>
+              <a:rPr dirty="0" err="1"/>
+              <a:t>mundo</a:t>
+            </a:r>
+            <a:r>
+              <a:rPr dirty="0"/>
+              <a:t> real.</a:t>
             </a:r>
           </a:p>
         </p:txBody>
@@ -7186,6 +8734,7 @@
           <a:lstStyle/>
           <a:p>
             <a:pPr algn="ctr"/>
+            <a:endParaRPr/>
           </a:p>
         </p:txBody>
       </p:sp>
@@ -7229,6 +8778,7 @@
           <a:lstStyle/>
           <a:p>
             <a:pPr algn="ctr"/>
+            <a:endParaRPr/>
           </a:p>
         </p:txBody>
       </p:sp>
@@ -7263,21 +8813,175 @@
               </a:defRPr>
             </a:pPr>
             <a:r>
-              <a:t>Interação que Acolhe</a:t>
-            </a:r>
-          </a:p>
-          <a:p>
-            <a:br/>
-            <a:pPr>
-              <a:defRPr sz="1150">
-                <a:solidFill>
-                  <a:srgbClr val="1E293B"/>
-                </a:solidFill>
-                <a:latin typeface="Segoe UI"/>
-              </a:defRPr>
-            </a:pPr>
-            <a:r>
-              <a:t>Abraçamos o React 19 para que cada elemento na tela reaja imediatamente aos sentimentos e intenções do usuário, sem recarregar a página e sem travar a navegação.</a:t>
+              <a:rPr dirty="0" err="1"/>
+              <a:t>Interação</a:t>
+            </a:r>
+            <a:r>
+              <a:rPr dirty="0"/>
+              <a:t> </a:t>
+            </a:r>
+            <a:r>
+              <a:rPr dirty="0" err="1"/>
+              <a:t>que</a:t>
+            </a:r>
+            <a:r>
+              <a:rPr dirty="0"/>
+              <a:t> </a:t>
+            </a:r>
+            <a:r>
+              <a:rPr dirty="0" err="1"/>
+              <a:t>Acolhe</a:t>
+            </a:r>
+            <a:endParaRPr dirty="0"/>
+          </a:p>
+          <a:p>
+            <a:pPr algn="just"/>
+            <a:br>
+              <a:rPr dirty="0"/>
+            </a:br>
+            <a:r>
+              <a:rPr dirty="0" err="1"/>
+              <a:t>Abraçamos</a:t>
+            </a:r>
+            <a:r>
+              <a:rPr dirty="0"/>
+              <a:t> o React 19 para </a:t>
+            </a:r>
+            <a:r>
+              <a:rPr dirty="0" err="1"/>
+              <a:t>que</a:t>
+            </a:r>
+            <a:r>
+              <a:rPr dirty="0"/>
+              <a:t> </a:t>
+            </a:r>
+            <a:r>
+              <a:rPr dirty="0" err="1"/>
+              <a:t>cada</a:t>
+            </a:r>
+            <a:r>
+              <a:rPr dirty="0"/>
+              <a:t> </a:t>
+            </a:r>
+            <a:r>
+              <a:rPr dirty="0" err="1"/>
+              <a:t>elemento</a:t>
+            </a:r>
+            <a:r>
+              <a:rPr dirty="0"/>
+              <a:t> </a:t>
+            </a:r>
+            <a:r>
+              <a:rPr dirty="0" err="1"/>
+              <a:t>na</a:t>
+            </a:r>
+            <a:r>
+              <a:rPr dirty="0"/>
+              <a:t> </a:t>
+            </a:r>
+            <a:r>
+              <a:rPr dirty="0" err="1"/>
+              <a:t>tela</a:t>
+            </a:r>
+            <a:r>
+              <a:rPr dirty="0"/>
+              <a:t> </a:t>
+            </a:r>
+            <a:r>
+              <a:rPr dirty="0" err="1"/>
+              <a:t>reaja</a:t>
+            </a:r>
+            <a:r>
+              <a:rPr dirty="0"/>
+              <a:t> </a:t>
+            </a:r>
+            <a:r>
+              <a:rPr dirty="0" err="1"/>
+              <a:t>imediatamente</a:t>
+            </a:r>
+            <a:r>
+              <a:rPr dirty="0"/>
+              <a:t> </a:t>
+            </a:r>
+            <a:r>
+              <a:rPr dirty="0" err="1"/>
+              <a:t>aos</a:t>
+            </a:r>
+            <a:r>
+              <a:rPr dirty="0"/>
+              <a:t> </a:t>
+            </a:r>
+            <a:r>
+              <a:rPr dirty="0" err="1"/>
+              <a:t>sentimentos</a:t>
+            </a:r>
+            <a:r>
+              <a:rPr dirty="0"/>
+              <a:t> e </a:t>
+            </a:r>
+            <a:r>
+              <a:rPr dirty="0" err="1"/>
+              <a:t>intenções</a:t>
+            </a:r>
+            <a:r>
+              <a:rPr dirty="0"/>
+              <a:t> do </a:t>
+            </a:r>
+            <a:r>
+              <a:rPr dirty="0" err="1"/>
+              <a:t>usuário</a:t>
+            </a:r>
+            <a:r>
+              <a:rPr dirty="0"/>
+              <a:t>, </a:t>
+            </a:r>
+            <a:r>
+              <a:rPr dirty="0" err="1"/>
+              <a:t>sem</a:t>
+            </a:r>
+            <a:r>
+              <a:rPr dirty="0"/>
+              <a:t> </a:t>
+            </a:r>
+            <a:r>
+              <a:rPr dirty="0" err="1"/>
+              <a:t>recarregar</a:t>
+            </a:r>
+            <a:r>
+              <a:rPr dirty="0"/>
+              <a:t> a </a:t>
+            </a:r>
+            <a:r>
+              <a:rPr dirty="0" err="1"/>
+              <a:t>página</a:t>
+            </a:r>
+            <a:r>
+              <a:rPr dirty="0"/>
+              <a:t> e </a:t>
+            </a:r>
+            <a:r>
+              <a:rPr dirty="0" err="1"/>
+              <a:t>sem</a:t>
+            </a:r>
+            <a:r>
+              <a:rPr dirty="0"/>
+              <a:t> </a:t>
+            </a:r>
+            <a:r>
+              <a:rPr dirty="0" err="1"/>
+              <a:t>travar</a:t>
+            </a:r>
+            <a:r>
+              <a:rPr dirty="0"/>
+              <a:t> a </a:t>
+            </a:r>
+            <a:r>
+              <a:rPr dirty="0" err="1"/>
+              <a:t>navegação</a:t>
+            </a:r>
+            <a:r>
+              <a:rPr dirty="0"/>
+              <a:t>.</a:t>
             </a:r>
           </a:p>
         </p:txBody>
@@ -7324,6 +9028,7 @@
           <a:lstStyle/>
           <a:p>
             <a:pPr algn="ctr"/>
+            <a:endParaRPr/>
           </a:p>
         </p:txBody>
       </p:sp>
@@ -7336,7 +9041,7 @@
         <p:spPr>
           <a:xfrm>
             <a:off x="6537960" y="1417320"/>
-            <a:ext cx="4617720" cy="4434840"/>
+            <a:ext cx="4617720" cy="4401205"/>
           </a:xfrm>
           <a:prstGeom prst="rect">
             <a:avLst/>
@@ -7349,7 +9054,7 @@
           </a:bodyPr>
           <a:lstStyle/>
           <a:p>
-            <a:pPr>
+            <a:pPr algn="ctr">
               <a:defRPr sz="1550" b="1">
                 <a:solidFill>
                   <a:srgbClr val="00873E"/>
@@ -7358,63 +9063,408 @@
               </a:defRPr>
             </a:pPr>
             <a:r>
-              <a:t>O Que Mudou na Experiência de Quem Usa</a:t>
-            </a:r>
-          </a:p>
-          <a:p>
-            <a:br/>
-            <a:pPr>
-              <a:defRPr sz="1150">
-                <a:solidFill>
-                  <a:srgbClr val="1E293B"/>
-                </a:solidFill>
-                <a:latin typeface="Segoe UI"/>
-              </a:defRPr>
-            </a:pPr>
-            <a:r>
-              <a:t>• Retorno Imediato: Ao enviar uma doação, a meta comunitária sobe na mesma hora no topo do site e um Recibo Solidário com código único surge na tela.</a:t>
-            </a:r>
-          </a:p>
-          <a:p>
-            <a:br/>
-            <a:pPr>
-              <a:defRPr sz="1150">
-                <a:solidFill>
-                  <a:srgbClr val="1E293B"/>
-                </a:solidFill>
-                <a:latin typeface="Segoe UI"/>
-              </a:defRPr>
-            </a:pPr>
-            <a:r>
-              <a:t>• Menos Esforço para Fazer o Bem: Botões de clique rápido ('1 Cesta', '2 Cestas', '5 Cestas') evitam digitação demorada no celular.</a:t>
-            </a:r>
-          </a:p>
-          <a:p>
-            <a:br/>
-            <a:pPr>
-              <a:defRPr sz="1150">
-                <a:solidFill>
-                  <a:srgbClr val="1E293B"/>
-                </a:solidFill>
-                <a:latin typeface="Segoe UI"/>
-              </a:defRPr>
-            </a:pPr>
-            <a:r>
-              <a:t>• Chave PIX com 1 Toque: Cópia instantânea da chave institucional com aviso de confirmação na tela via Clipboard API.</a:t>
-            </a:r>
-          </a:p>
-          <a:p>
-            <a:br/>
-            <a:pPr>
-              <a:defRPr sz="1150">
-                <a:solidFill>
-                  <a:srgbClr val="1E293B"/>
-                </a:solidFill>
-                <a:latin typeface="Segoe UI"/>
-              </a:defRPr>
-            </a:pPr>
-            <a:r>
-              <a:t>• Trilha Sonora Emocionante: Player com a canção 'Imagine' (John Lennon, 1971), que respeita a privacidade do usuário e pode ser pausado, mutado ou recolhido a qualquer momento.</a:t>
+              <a:rPr sz="1600" dirty="0"/>
+              <a:t>O </a:t>
+            </a:r>
+            <a:r>
+              <a:rPr sz="1600" dirty="0" err="1"/>
+              <a:t>Que</a:t>
+            </a:r>
+            <a:r>
+              <a:rPr sz="1600" dirty="0"/>
+              <a:t> </a:t>
+            </a:r>
+            <a:r>
+              <a:rPr sz="1600" dirty="0" err="1"/>
+              <a:t>Mudou</a:t>
+            </a:r>
+            <a:r>
+              <a:rPr sz="1600" dirty="0"/>
+              <a:t> </a:t>
+            </a:r>
+            <a:r>
+              <a:rPr sz="1600" dirty="0" err="1"/>
+              <a:t>na</a:t>
+            </a:r>
+            <a:r>
+              <a:rPr sz="1600" dirty="0"/>
+              <a:t> </a:t>
+            </a:r>
+            <a:r>
+              <a:rPr sz="1600" dirty="0" err="1"/>
+              <a:t>Experiência</a:t>
+            </a:r>
+            <a:r>
+              <a:rPr sz="1600" dirty="0"/>
+              <a:t> de Quem Usa</a:t>
+            </a:r>
+          </a:p>
+          <a:p>
+            <a:pPr algn="just"/>
+            <a:br>
+              <a:rPr sz="1600" dirty="0"/>
+            </a:br>
+            <a:r>
+              <a:rPr sz="1600" dirty="0"/>
+              <a:t>• </a:t>
+            </a:r>
+            <a:r>
+              <a:rPr sz="1600" dirty="0" err="1"/>
+              <a:t>Retorno</a:t>
+            </a:r>
+            <a:r>
+              <a:rPr sz="1600" dirty="0"/>
+              <a:t> </a:t>
+            </a:r>
+            <a:r>
+              <a:rPr sz="1600" dirty="0" err="1"/>
+              <a:t>Imediato</a:t>
+            </a:r>
+            <a:r>
+              <a:rPr sz="1600" dirty="0"/>
+              <a:t>: Ao </a:t>
+            </a:r>
+            <a:r>
+              <a:rPr sz="1600" dirty="0" err="1"/>
+              <a:t>enviar</a:t>
+            </a:r>
+            <a:r>
+              <a:rPr sz="1600" dirty="0"/>
+              <a:t> </a:t>
+            </a:r>
+            <a:r>
+              <a:rPr sz="1600" dirty="0" err="1"/>
+              <a:t>uma</a:t>
+            </a:r>
+            <a:r>
+              <a:rPr sz="1600" dirty="0"/>
+              <a:t> </a:t>
+            </a:r>
+            <a:r>
+              <a:rPr sz="1600" dirty="0" err="1"/>
+              <a:t>doação</a:t>
+            </a:r>
+            <a:r>
+              <a:rPr sz="1600" dirty="0"/>
+              <a:t>, a meta </a:t>
+            </a:r>
+            <a:r>
+              <a:rPr sz="1600" dirty="0" err="1"/>
+              <a:t>comunitária</a:t>
+            </a:r>
+            <a:r>
+              <a:rPr sz="1600" dirty="0"/>
+              <a:t> </a:t>
+            </a:r>
+            <a:r>
+              <a:rPr sz="1600" dirty="0" err="1"/>
+              <a:t>sobe</a:t>
+            </a:r>
+            <a:r>
+              <a:rPr sz="1600" dirty="0"/>
+              <a:t> </a:t>
+            </a:r>
+            <a:r>
+              <a:rPr sz="1600" dirty="0" err="1"/>
+              <a:t>na</a:t>
+            </a:r>
+            <a:r>
+              <a:rPr sz="1600" dirty="0"/>
+              <a:t> </a:t>
+            </a:r>
+            <a:r>
+              <a:rPr sz="1600" dirty="0" err="1"/>
+              <a:t>mesma</a:t>
+            </a:r>
+            <a:r>
+              <a:rPr sz="1600" dirty="0"/>
+              <a:t> hora no topo do site e um </a:t>
+            </a:r>
+            <a:r>
+              <a:rPr sz="1600" dirty="0" err="1"/>
+              <a:t>Recibo</a:t>
+            </a:r>
+            <a:r>
+              <a:rPr sz="1600" dirty="0"/>
+              <a:t> </a:t>
+            </a:r>
+            <a:r>
+              <a:rPr sz="1600" dirty="0" err="1"/>
+              <a:t>Solidário</a:t>
+            </a:r>
+            <a:r>
+              <a:rPr sz="1600" dirty="0"/>
+              <a:t> com </a:t>
+            </a:r>
+            <a:r>
+              <a:rPr sz="1600" dirty="0" err="1"/>
+              <a:t>código</a:t>
+            </a:r>
+            <a:r>
+              <a:rPr sz="1600" dirty="0"/>
+              <a:t> </a:t>
+            </a:r>
+            <a:r>
+              <a:rPr sz="1600" dirty="0" err="1"/>
+              <a:t>único</a:t>
+            </a:r>
+            <a:r>
+              <a:rPr sz="1600" dirty="0"/>
+              <a:t> surge </a:t>
+            </a:r>
+            <a:r>
+              <a:rPr sz="1600" dirty="0" err="1"/>
+              <a:t>na</a:t>
+            </a:r>
+            <a:r>
+              <a:rPr sz="1600" dirty="0"/>
+              <a:t> </a:t>
+            </a:r>
+            <a:r>
+              <a:rPr sz="1600" dirty="0" err="1"/>
+              <a:t>tela</a:t>
+            </a:r>
+            <a:r>
+              <a:rPr sz="1600" dirty="0"/>
+              <a:t>.</a:t>
+            </a:r>
+          </a:p>
+          <a:p>
+            <a:pPr algn="just"/>
+            <a:br>
+              <a:rPr sz="1600" dirty="0"/>
+            </a:br>
+            <a:r>
+              <a:rPr sz="1600" dirty="0"/>
+              <a:t>• Menos </a:t>
+            </a:r>
+            <a:r>
+              <a:rPr sz="1600" dirty="0" err="1"/>
+              <a:t>Esforço</a:t>
+            </a:r>
+            <a:r>
+              <a:rPr sz="1600" dirty="0"/>
+              <a:t> para Fazer o Bem: </a:t>
+            </a:r>
+            <a:r>
+              <a:rPr sz="1600" dirty="0" err="1"/>
+              <a:t>Botões</a:t>
+            </a:r>
+            <a:r>
+              <a:rPr sz="1600" dirty="0"/>
+              <a:t> de clique </a:t>
+            </a:r>
+            <a:r>
+              <a:rPr sz="1600" dirty="0" err="1"/>
+              <a:t>rápido</a:t>
+            </a:r>
+            <a:r>
+              <a:rPr sz="1600" dirty="0"/>
+              <a:t> ('1 Cesta', '2 Cestas', '5 Cestas') </a:t>
+            </a:r>
+            <a:r>
+              <a:rPr sz="1600" dirty="0" err="1"/>
+              <a:t>evitam</a:t>
+            </a:r>
+            <a:r>
+              <a:rPr sz="1600" dirty="0"/>
+              <a:t> </a:t>
+            </a:r>
+            <a:r>
+              <a:rPr sz="1600" dirty="0" err="1"/>
+              <a:t>digitação</a:t>
+            </a:r>
+            <a:r>
+              <a:rPr sz="1600" dirty="0"/>
+              <a:t> </a:t>
+            </a:r>
+            <a:r>
+              <a:rPr sz="1600" dirty="0" err="1"/>
+              <a:t>demorada</a:t>
+            </a:r>
+            <a:r>
+              <a:rPr sz="1600" dirty="0"/>
+              <a:t> no </a:t>
+            </a:r>
+            <a:r>
+              <a:rPr sz="1600" dirty="0" err="1"/>
+              <a:t>celular</a:t>
+            </a:r>
+            <a:r>
+              <a:rPr sz="1600" dirty="0"/>
+              <a:t>.</a:t>
+            </a:r>
+          </a:p>
+          <a:p>
+            <a:pPr algn="just"/>
+            <a:br>
+              <a:rPr sz="1600" dirty="0"/>
+            </a:br>
+            <a:r>
+              <a:rPr sz="1600" dirty="0"/>
+              <a:t>• Chave PIX com 1 Toque: </a:t>
+            </a:r>
+            <a:r>
+              <a:rPr sz="1600" dirty="0" err="1"/>
+              <a:t>Cópia</a:t>
+            </a:r>
+            <a:r>
+              <a:rPr sz="1600" dirty="0"/>
+              <a:t> </a:t>
+            </a:r>
+            <a:r>
+              <a:rPr sz="1600" dirty="0" err="1"/>
+              <a:t>instantânea</a:t>
+            </a:r>
+            <a:r>
+              <a:rPr sz="1600" dirty="0"/>
+              <a:t> da </a:t>
+            </a:r>
+            <a:r>
+              <a:rPr sz="1600" dirty="0" err="1"/>
+              <a:t>chave</a:t>
+            </a:r>
+            <a:r>
+              <a:rPr sz="1600" dirty="0"/>
+              <a:t> </a:t>
+            </a:r>
+            <a:r>
+              <a:rPr sz="1600" dirty="0" err="1"/>
+              <a:t>institucional</a:t>
+            </a:r>
+            <a:r>
+              <a:rPr sz="1600" dirty="0"/>
+              <a:t> com aviso de </a:t>
+            </a:r>
+            <a:r>
+              <a:rPr sz="1600" dirty="0" err="1"/>
+              <a:t>confirmação</a:t>
+            </a:r>
+            <a:r>
+              <a:rPr sz="1600" dirty="0"/>
+              <a:t> </a:t>
+            </a:r>
+            <a:r>
+              <a:rPr sz="1600" dirty="0" err="1"/>
+              <a:t>na</a:t>
+            </a:r>
+            <a:r>
+              <a:rPr sz="1600" dirty="0"/>
+              <a:t> </a:t>
+            </a:r>
+            <a:r>
+              <a:rPr sz="1600" dirty="0" err="1"/>
+              <a:t>tela</a:t>
+            </a:r>
+            <a:r>
+              <a:rPr sz="1600" dirty="0"/>
+              <a:t> via Clipboard API.</a:t>
+            </a:r>
+          </a:p>
+          <a:p>
+            <a:pPr algn="just"/>
+            <a:br>
+              <a:rPr sz="1600" dirty="0"/>
+            </a:br>
+            <a:r>
+              <a:rPr sz="1600" dirty="0"/>
+              <a:t>• Trilha Sonora Emocionante: Player com a </a:t>
+            </a:r>
+            <a:r>
+              <a:rPr sz="1600" dirty="0" err="1"/>
+              <a:t>canção</a:t>
+            </a:r>
+            <a:r>
+              <a:rPr sz="1600" dirty="0"/>
+              <a:t> 'Imagine' (John Lennon, 1971), </a:t>
+            </a:r>
+            <a:r>
+              <a:rPr sz="1600" dirty="0" err="1"/>
+              <a:t>que</a:t>
+            </a:r>
+            <a:r>
+              <a:rPr sz="1600" dirty="0"/>
+              <a:t> </a:t>
+            </a:r>
+            <a:r>
+              <a:rPr sz="1600" dirty="0" err="1"/>
+              <a:t>respeita</a:t>
+            </a:r>
+            <a:r>
+              <a:rPr sz="1600" dirty="0"/>
+              <a:t> a </a:t>
+            </a:r>
+            <a:r>
+              <a:rPr sz="1600" dirty="0" err="1"/>
+              <a:t>privacidade</a:t>
+            </a:r>
+            <a:r>
+              <a:rPr sz="1600" dirty="0"/>
+              <a:t> do </a:t>
+            </a:r>
+            <a:r>
+              <a:rPr sz="1600" dirty="0" err="1"/>
+              <a:t>usuário</a:t>
+            </a:r>
+            <a:r>
+              <a:rPr sz="1600" dirty="0"/>
+              <a:t> e </a:t>
+            </a:r>
+            <a:r>
+              <a:rPr sz="1600" dirty="0" err="1"/>
+              <a:t>pode</a:t>
+            </a:r>
+            <a:r>
+              <a:rPr sz="1600" dirty="0"/>
+              <a:t> ser </a:t>
+            </a:r>
+            <a:r>
+              <a:rPr sz="1600" dirty="0" err="1"/>
+              <a:t>pausado</a:t>
+            </a:r>
+            <a:r>
+              <a:rPr sz="1600" dirty="0"/>
+              <a:t>, </a:t>
+            </a:r>
+            <a:r>
+              <a:rPr sz="1600" dirty="0" err="1"/>
+              <a:t>mutado</a:t>
+            </a:r>
+            <a:r>
+              <a:rPr sz="1600" dirty="0"/>
+              <a:t> </a:t>
+            </a:r>
+            <a:r>
+              <a:rPr sz="1600" dirty="0" err="1"/>
+              <a:t>ou</a:t>
+            </a:r>
+            <a:r>
+              <a:rPr sz="1600" dirty="0"/>
+              <a:t> </a:t>
+            </a:r>
+            <a:r>
+              <a:rPr sz="1600" dirty="0" err="1"/>
+              <a:t>recolhido</a:t>
+            </a:r>
+            <a:r>
+              <a:rPr sz="1600" dirty="0"/>
+              <a:t> a </a:t>
+            </a:r>
+            <a:r>
+              <a:rPr sz="1600" dirty="0" err="1"/>
+              <a:t>qualquer</a:t>
+            </a:r>
+            <a:r>
+              <a:rPr sz="1600" dirty="0"/>
+              <a:t> </a:t>
+            </a:r>
+            <a:r>
+              <a:rPr sz="1600" dirty="0" err="1"/>
+              <a:t>momento</a:t>
+            </a:r>
+            <a:r>
+              <a:rPr sz="1600" dirty="0"/>
+              <a:t>.</a:t>
             </a:r>
           </a:p>
         </p:txBody>
@@ -7428,7 +9478,7 @@
 </file>
 
 <file path=ppt/slides/slide4.xml><?xml version="1.0" encoding="utf-8"?>
-<p:sld xmlns:a="http://schemas.openxmlformats.org/drawingml/2006/main" xmlns:p="http://schemas.openxmlformats.org/presentationml/2006/main" xmlns:r="http://schemas.openxmlformats.org/officeDocument/2006/relationships">
+<p:sld xmlns:a="http://schemas.openxmlformats.org/drawingml/2006/main" xmlns:r="http://schemas.openxmlformats.org/officeDocument/2006/relationships" xmlns:p="http://schemas.openxmlformats.org/presentationml/2006/main">
   <p:cSld>
     <p:spTree>
       <p:nvGrpSpPr>
@@ -7436,7 +9486,14 @@
         <p:cNvGrpSpPr/>
         <p:nvPr/>
       </p:nvGrpSpPr>
-      <p:grpSpPr/>
+      <p:grpSpPr>
+        <a:xfrm>
+          <a:off x="0" y="0"/>
+          <a:ext cx="0" cy="0"/>
+          <a:chOff x="0" y="0"/>
+          <a:chExt cx="0" cy="0"/>
+        </a:xfrm>
+      </p:grpSpPr>
       <p:sp>
         <p:nvSpPr>
           <p:cNvPr id="2" name="TextBox 1"/>
@@ -7511,7 +9568,7 @@
           </a:fontRef>
         </p:style>
         <p:txBody>
-          <a:bodyPr rtlCol="0" anchor="ctr" tIns="54864"/>
+          <a:bodyPr tIns="54864" rtlCol="0" anchor="ctr"/>
           <a:lstStyle/>
           <a:p>
             <a:pPr algn="ctr">
@@ -7568,6 +9625,7 @@
           <a:lstStyle/>
           <a:p>
             <a:pPr algn="ctr"/>
+            <a:endParaRPr/>
           </a:p>
         </p:txBody>
       </p:sp>
@@ -7611,6 +9669,7 @@
           <a:lstStyle/>
           <a:p>
             <a:pPr algn="ctr"/>
+            <a:endParaRPr/>
           </a:p>
         </p:txBody>
       </p:sp>
@@ -7695,7 +9754,7 @@
         <p:spPr>
           <a:xfrm>
             <a:off x="731520" y="1234440"/>
-            <a:ext cx="5166360" cy="1188720"/>
+            <a:ext cx="5166360" cy="615553"/>
           </a:xfrm>
           <a:prstGeom prst="rect">
             <a:avLst/>
@@ -7708,7 +9767,7 @@
           </a:bodyPr>
           <a:lstStyle/>
           <a:p>
-            <a:pPr>
+            <a:pPr algn="just">
               <a:defRPr sz="1550" b="1">
                 <a:solidFill>
                   <a:srgbClr val="00873E"/>
@@ -7717,11 +9776,40 @@
               </a:defRPr>
             </a:pPr>
             <a:r>
-              <a:t>Os Sentidos da Aplicação (Eventos JavaScript)</a:t>
-            </a:r>
-          </a:p>
-          <a:p>
-            <a:pPr>
+              <a:rPr sz="1600" dirty="0" err="1"/>
+              <a:t>Os</a:t>
+            </a:r>
+            <a:r>
+              <a:rPr sz="1600" dirty="0"/>
+              <a:t> </a:t>
+            </a:r>
+            <a:r>
+              <a:rPr sz="1600" dirty="0" err="1"/>
+              <a:t>Sentidos</a:t>
+            </a:r>
+            <a:r>
+              <a:rPr sz="1600" dirty="0"/>
+              <a:t> da </a:t>
+            </a:r>
+            <a:r>
+              <a:rPr sz="1600" dirty="0" err="1"/>
+              <a:t>Aplicação</a:t>
+            </a:r>
+            <a:r>
+              <a:rPr sz="1600" dirty="0"/>
+              <a:t> (</a:t>
+            </a:r>
+            <a:r>
+              <a:rPr sz="1600" dirty="0" err="1"/>
+              <a:t>Eventos</a:t>
+            </a:r>
+            <a:r>
+              <a:rPr sz="1600" dirty="0"/>
+              <a:t> JavaScript)</a:t>
+            </a:r>
+          </a:p>
+          <a:p>
+            <a:pPr algn="just">
               <a:defRPr sz="1200">
                 <a:solidFill>
                   <a:srgbClr val="64748B"/>
@@ -7730,7 +9818,60 @@
               </a:defRPr>
             </a:pPr>
             <a:r>
-              <a:t>Tratamento de eventos pensado para ser acolhedor e intuitivo, sem burocracias:</a:t>
+              <a:rPr dirty="0" err="1"/>
+              <a:t>Tratamento</a:t>
+            </a:r>
+            <a:r>
+              <a:rPr dirty="0"/>
+              <a:t> de </a:t>
+            </a:r>
+            <a:r>
+              <a:rPr dirty="0" err="1"/>
+              <a:t>eventos</a:t>
+            </a:r>
+            <a:r>
+              <a:rPr dirty="0"/>
+              <a:t> </a:t>
+            </a:r>
+            <a:r>
+              <a:rPr dirty="0" err="1"/>
+              <a:t>pensado</a:t>
+            </a:r>
+            <a:r>
+              <a:rPr dirty="0"/>
+              <a:t> para ser </a:t>
+            </a:r>
+            <a:r>
+              <a:rPr dirty="0" err="1"/>
+              <a:t>acolhedor</a:t>
+            </a:r>
+            <a:r>
+              <a:rPr dirty="0"/>
+              <a:t> e </a:t>
+            </a:r>
+            <a:r>
+              <a:rPr dirty="0" err="1"/>
+              <a:t>intuitivo</a:t>
+            </a:r>
+            <a:r>
+              <a:rPr dirty="0"/>
+              <a:t>, </a:t>
+            </a:r>
+            <a:r>
+              <a:rPr dirty="0" err="1"/>
+              <a:t>sem</a:t>
+            </a:r>
+            <a:r>
+              <a:rPr dirty="0"/>
+              <a:t> </a:t>
+            </a:r>
+            <a:r>
+              <a:rPr dirty="0" err="1"/>
+              <a:t>burocracias</a:t>
+            </a:r>
+            <a:r>
+              <a:rPr dirty="0"/>
+              <a:t>:</a:t>
             </a:r>
           </a:p>
         </p:txBody>
@@ -7777,6 +9918,7 @@
           <a:lstStyle/>
           <a:p>
             <a:pPr algn="ctr"/>
+            <a:endParaRPr/>
           </a:p>
         </p:txBody>
       </p:sp>
@@ -7820,6 +9962,7 @@
           <a:lstStyle/>
           <a:p>
             <a:pPr algn="ctr"/>
+            <a:endParaRPr/>
           </a:p>
         </p:txBody>
       </p:sp>
@@ -7832,7 +9975,7 @@
         <p:spPr>
           <a:xfrm>
             <a:off x="960120" y="2651760"/>
-            <a:ext cx="4800600" cy="3246120"/>
+            <a:ext cx="4800600" cy="3247043"/>
           </a:xfrm>
           <a:prstGeom prst="rect">
             <a:avLst/>
@@ -7845,7 +9988,7 @@
           </a:bodyPr>
           <a:lstStyle/>
           <a:p>
-            <a:pPr>
+            <a:pPr algn="just">
               <a:defRPr sz="1300" b="1">
                 <a:solidFill>
                   <a:srgbClr val="00873E"/>
@@ -7854,24 +9997,36 @@
               </a:defRPr>
             </a:pPr>
             <a:r>
-              <a:t>Eventos Centrais Implementados:</a:t>
-            </a:r>
-          </a:p>
-          <a:p>
-            <a:pPr>
-              <a:defRPr sz="1050">
-                <a:solidFill>
-                  <a:srgbClr val="1E293B"/>
+              <a:rPr sz="1600" dirty="0" err="1"/>
+              <a:t>Eventos</a:t>
+            </a:r>
+            <a:r>
+              <a:rPr sz="1600" dirty="0"/>
+              <a:t> Centrais </a:t>
+            </a:r>
+            <a:r>
+              <a:rPr sz="1600" dirty="0" err="1"/>
+              <a:t>Implementados</a:t>
+            </a:r>
+            <a:r>
+              <a:rPr sz="1600" dirty="0"/>
+              <a:t>:</a:t>
+            </a:r>
+            <a:endParaRPr lang="pt-BR" sz="1600" dirty="0"/>
+          </a:p>
+          <a:p>
+            <a:pPr algn="just">
+              <a:defRPr sz="1300" b="1">
+                <a:solidFill>
+                  <a:srgbClr val="00873E"/>
                 </a:solidFill>
                 <a:latin typeface="Segoe UI"/>
               </a:defRPr>
             </a:pPr>
-            <a:r>
-              <a:t>• onSubmit (Doar.jsx): Interrompe o recarregamento brusco, valida campos, grava no localStorage e emite Recibo Solidário com código rastreável (REC-XXXXXX).</a:t>
-            </a:r>
-          </a:p>
-          <a:p>
-            <a:pPr>
+            <a:endParaRPr dirty="0"/>
+          </a:p>
+          <a:p>
+            <a:pPr algn="just">
               <a:defRPr sz="1050">
                 <a:solidFill>
                   <a:srgbClr val="1E293B"/>
@@ -7880,11 +10035,117 @@
               </a:defRPr>
             </a:pPr>
             <a:r>
-              <a:t>• onChange (PrestacaoContas.jsx): Filtra os 13 bairros e a Zona Rural enquanto o morador digita, normalizando acentos sem travamentos.</a:t>
-            </a:r>
-          </a:p>
-          <a:p>
-            <a:pPr>
+              <a:rPr sz="1400" dirty="0"/>
+              <a:t>• </a:t>
+            </a:r>
+            <a:r>
+              <a:rPr sz="1400" dirty="0" err="1"/>
+              <a:t>onSubmit</a:t>
+            </a:r>
+            <a:r>
+              <a:rPr sz="1400" dirty="0"/>
+              <a:t> (</a:t>
+            </a:r>
+            <a:r>
+              <a:rPr sz="1400" dirty="0" err="1"/>
+              <a:t>Doar.jsx</a:t>
+            </a:r>
+            <a:r>
+              <a:rPr sz="1400" dirty="0"/>
+              <a:t>): </a:t>
+            </a:r>
+            <a:r>
+              <a:rPr sz="1400" dirty="0" err="1"/>
+              <a:t>Interrompe</a:t>
+            </a:r>
+            <a:r>
+              <a:rPr sz="1400" dirty="0"/>
+              <a:t> o </a:t>
+            </a:r>
+            <a:r>
+              <a:rPr sz="1400" dirty="0" err="1"/>
+              <a:t>recarregamento</a:t>
+            </a:r>
+            <a:r>
+              <a:rPr sz="1400" dirty="0"/>
+              <a:t> </a:t>
+            </a:r>
+            <a:r>
+              <a:rPr sz="1400" dirty="0" err="1"/>
+              <a:t>brusco</a:t>
+            </a:r>
+            <a:r>
+              <a:rPr sz="1400" dirty="0"/>
+              <a:t>, </a:t>
+            </a:r>
+            <a:r>
+              <a:rPr sz="1400" dirty="0" err="1"/>
+              <a:t>valida</a:t>
+            </a:r>
+            <a:r>
+              <a:rPr sz="1400" dirty="0"/>
+              <a:t> campos, </a:t>
+            </a:r>
+            <a:r>
+              <a:rPr sz="1400" dirty="0" err="1"/>
+              <a:t>grava</a:t>
+            </a:r>
+            <a:r>
+              <a:rPr sz="1400" dirty="0"/>
+              <a:t> no </a:t>
+            </a:r>
+            <a:r>
+              <a:rPr sz="1400" dirty="0" err="1"/>
+              <a:t>localStorage</a:t>
+            </a:r>
+            <a:r>
+              <a:rPr sz="1400" dirty="0"/>
+              <a:t> e </a:t>
+            </a:r>
+            <a:r>
+              <a:rPr sz="1400" dirty="0" err="1"/>
+              <a:t>emite</a:t>
+            </a:r>
+            <a:r>
+              <a:rPr sz="1400" dirty="0"/>
+              <a:t> </a:t>
+            </a:r>
+            <a:r>
+              <a:rPr sz="1400" dirty="0" err="1"/>
+              <a:t>Recibo</a:t>
+            </a:r>
+            <a:r>
+              <a:rPr sz="1400" dirty="0"/>
+              <a:t> </a:t>
+            </a:r>
+            <a:r>
+              <a:rPr sz="1400" dirty="0" err="1"/>
+              <a:t>Solidário</a:t>
+            </a:r>
+            <a:r>
+              <a:rPr sz="1400" dirty="0"/>
+              <a:t> com </a:t>
+            </a:r>
+            <a:r>
+              <a:rPr sz="1400" dirty="0" err="1"/>
+              <a:t>código</a:t>
+            </a:r>
+            <a:r>
+              <a:rPr sz="1400" dirty="0"/>
+              <a:t> </a:t>
+            </a:r>
+            <a:r>
+              <a:rPr sz="1400" dirty="0" err="1"/>
+              <a:t>rastreável</a:t>
+            </a:r>
+            <a:r>
+              <a:rPr sz="1400" dirty="0"/>
+              <a:t> (REC-XXXXXX).</a:t>
+            </a:r>
+            <a:endParaRPr lang="pt-BR" sz="1400" dirty="0"/>
+          </a:p>
+          <a:p>
+            <a:pPr algn="just">
               <a:defRPr sz="1050">
                 <a:solidFill>
                   <a:srgbClr val="1E293B"/>
@@ -7892,12 +10153,10 @@
                 <a:latin typeface="Segoe UI"/>
               </a:defRPr>
             </a:pPr>
-            <a:r>
-              <a:t>• onClick na Navbar: Menu móvel que abre e fecha sozinho ao tocar em qualquer link.</a:t>
-            </a:r>
-          </a:p>
-          <a:p>
-            <a:pPr>
+            <a:endParaRPr sz="1400" dirty="0"/>
+          </a:p>
+          <a:p>
+            <a:pPr algn="just">
               <a:defRPr sz="1050">
                 <a:solidFill>
                   <a:srgbClr val="1E293B"/>
@@ -7906,7 +10165,268 @@
               </a:defRPr>
             </a:pPr>
             <a:r>
-              <a:t>• Clipboard API: Cópia suave da chave PIX sem selecionar texto.</a:t>
+              <a:rPr sz="1400" dirty="0"/>
+              <a:t>• </a:t>
+            </a:r>
+            <a:r>
+              <a:rPr sz="1400" dirty="0" err="1"/>
+              <a:t>onChange</a:t>
+            </a:r>
+            <a:r>
+              <a:rPr sz="1400" dirty="0"/>
+              <a:t> (</a:t>
+            </a:r>
+            <a:r>
+              <a:rPr sz="1400" dirty="0" err="1"/>
+              <a:t>PrestacaoContas.jsx</a:t>
+            </a:r>
+            <a:r>
+              <a:rPr sz="1400" dirty="0"/>
+              <a:t>): Filtra </a:t>
+            </a:r>
+            <a:r>
+              <a:rPr sz="1400" dirty="0" err="1"/>
+              <a:t>os</a:t>
+            </a:r>
+            <a:r>
+              <a:rPr sz="1400" dirty="0"/>
+              <a:t> 13 bairros e a Zona Rural </a:t>
+            </a:r>
+            <a:r>
+              <a:rPr sz="1400" dirty="0" err="1"/>
+              <a:t>enquanto</a:t>
+            </a:r>
+            <a:r>
+              <a:rPr sz="1400" dirty="0"/>
+              <a:t> o </a:t>
+            </a:r>
+            <a:r>
+              <a:rPr sz="1400" dirty="0" err="1"/>
+              <a:t>morador</a:t>
+            </a:r>
+            <a:r>
+              <a:rPr sz="1400" dirty="0"/>
+              <a:t> </a:t>
+            </a:r>
+            <a:r>
+              <a:rPr sz="1400" dirty="0" err="1"/>
+              <a:t>digita</a:t>
+            </a:r>
+            <a:r>
+              <a:rPr sz="1400" dirty="0"/>
+              <a:t>, </a:t>
+            </a:r>
+            <a:r>
+              <a:rPr sz="1400" dirty="0" err="1"/>
+              <a:t>normalizando</a:t>
+            </a:r>
+            <a:r>
+              <a:rPr sz="1400" dirty="0"/>
+              <a:t> </a:t>
+            </a:r>
+            <a:r>
+              <a:rPr sz="1400" dirty="0" err="1"/>
+              <a:t>acentos</a:t>
+            </a:r>
+            <a:r>
+              <a:rPr sz="1400" dirty="0"/>
+              <a:t> </a:t>
+            </a:r>
+            <a:r>
+              <a:rPr sz="1400" dirty="0" err="1"/>
+              <a:t>sem</a:t>
+            </a:r>
+            <a:r>
+              <a:rPr sz="1400" dirty="0"/>
+              <a:t> </a:t>
+            </a:r>
+            <a:r>
+              <a:rPr sz="1400" dirty="0" err="1"/>
+              <a:t>travamentos</a:t>
+            </a:r>
+            <a:r>
+              <a:rPr sz="1400" dirty="0"/>
+              <a:t>.</a:t>
+            </a:r>
+            <a:endParaRPr lang="pt-BR" sz="1400" dirty="0"/>
+          </a:p>
+          <a:p>
+            <a:pPr algn="just">
+              <a:defRPr sz="1050">
+                <a:solidFill>
+                  <a:srgbClr val="1E293B"/>
+                </a:solidFill>
+                <a:latin typeface="Segoe UI"/>
+              </a:defRPr>
+            </a:pPr>
+            <a:endParaRPr sz="1400" dirty="0"/>
+          </a:p>
+          <a:p>
+            <a:pPr algn="just">
+              <a:defRPr sz="1050">
+                <a:solidFill>
+                  <a:srgbClr val="1E293B"/>
+                </a:solidFill>
+                <a:latin typeface="Segoe UI"/>
+              </a:defRPr>
+            </a:pPr>
+            <a:r>
+              <a:rPr sz="1400" dirty="0"/>
+              <a:t>• </a:t>
+            </a:r>
+            <a:r>
+              <a:rPr sz="1400" dirty="0" err="1"/>
+              <a:t>onClick</a:t>
+            </a:r>
+            <a:r>
+              <a:rPr sz="1400" dirty="0"/>
+              <a:t> </a:t>
+            </a:r>
+            <a:r>
+              <a:rPr sz="1400" dirty="0" err="1"/>
+              <a:t>na</a:t>
+            </a:r>
+            <a:r>
+              <a:rPr sz="1400" dirty="0"/>
+              <a:t> Navbar: Menu </a:t>
+            </a:r>
+            <a:r>
+              <a:rPr sz="1400" dirty="0" err="1"/>
+              <a:t>móvel</a:t>
+            </a:r>
+            <a:r>
+              <a:rPr sz="1400" dirty="0"/>
+              <a:t> </a:t>
+            </a:r>
+            <a:r>
+              <a:rPr sz="1400" dirty="0" err="1"/>
+              <a:t>que</a:t>
+            </a:r>
+            <a:r>
+              <a:rPr sz="1400" dirty="0"/>
+              <a:t> </a:t>
+            </a:r>
+            <a:r>
+              <a:rPr sz="1400" dirty="0" err="1"/>
+              <a:t>abre</a:t>
+            </a:r>
+            <a:r>
+              <a:rPr sz="1400" dirty="0"/>
+              <a:t> e </a:t>
+            </a:r>
+            <a:r>
+              <a:rPr sz="1400" dirty="0" err="1"/>
+              <a:t>fecha</a:t>
+            </a:r>
+            <a:r>
+              <a:rPr sz="1400" dirty="0"/>
+              <a:t> </a:t>
+            </a:r>
+            <a:r>
+              <a:rPr sz="1400" dirty="0" err="1"/>
+              <a:t>sozinho</a:t>
+            </a:r>
+            <a:r>
+              <a:rPr sz="1400" dirty="0"/>
+              <a:t> </a:t>
+            </a:r>
+            <a:r>
+              <a:rPr sz="1400" dirty="0" err="1"/>
+              <a:t>ao</a:t>
+            </a:r>
+            <a:r>
+              <a:rPr sz="1400" dirty="0"/>
+              <a:t> </a:t>
+            </a:r>
+            <a:r>
+              <a:rPr sz="1400" dirty="0" err="1"/>
+              <a:t>tocar</a:t>
+            </a:r>
+            <a:r>
+              <a:rPr sz="1400" dirty="0"/>
+              <a:t> </a:t>
+            </a:r>
+            <a:r>
+              <a:rPr sz="1400" dirty="0" err="1"/>
+              <a:t>em</a:t>
+            </a:r>
+            <a:r>
+              <a:rPr sz="1400" dirty="0"/>
+              <a:t> </a:t>
+            </a:r>
+            <a:r>
+              <a:rPr sz="1400" dirty="0" err="1"/>
+              <a:t>qualquer</a:t>
+            </a:r>
+            <a:r>
+              <a:rPr sz="1400" dirty="0"/>
+              <a:t> link.</a:t>
+            </a:r>
+            <a:endParaRPr lang="pt-BR" sz="1400" dirty="0"/>
+          </a:p>
+          <a:p>
+            <a:pPr algn="just">
+              <a:defRPr sz="1050">
+                <a:solidFill>
+                  <a:srgbClr val="1E293B"/>
+                </a:solidFill>
+                <a:latin typeface="Segoe UI"/>
+              </a:defRPr>
+            </a:pPr>
+            <a:endParaRPr sz="1400" dirty="0"/>
+          </a:p>
+          <a:p>
+            <a:pPr algn="just">
+              <a:defRPr sz="1050">
+                <a:solidFill>
+                  <a:srgbClr val="1E293B"/>
+                </a:solidFill>
+                <a:latin typeface="Segoe UI"/>
+              </a:defRPr>
+            </a:pPr>
+            <a:r>
+              <a:rPr sz="1400" dirty="0"/>
+              <a:t>• Clipboard API: </a:t>
+            </a:r>
+            <a:r>
+              <a:rPr sz="1400" dirty="0" err="1"/>
+              <a:t>Cópia</a:t>
+            </a:r>
+            <a:r>
+              <a:rPr sz="1400" dirty="0"/>
+              <a:t> suave da </a:t>
+            </a:r>
+            <a:r>
+              <a:rPr sz="1400" dirty="0" err="1"/>
+              <a:t>chave</a:t>
+            </a:r>
+            <a:r>
+              <a:rPr sz="1400" dirty="0"/>
+              <a:t> PIX </a:t>
+            </a:r>
+            <a:r>
+              <a:rPr sz="1400" dirty="0" err="1"/>
+              <a:t>sem</a:t>
+            </a:r>
+            <a:r>
+              <a:rPr sz="1400" dirty="0"/>
+              <a:t> </a:t>
+            </a:r>
+            <a:r>
+              <a:rPr sz="1400" dirty="0" err="1"/>
+              <a:t>selecionar</a:t>
+            </a:r>
+            <a:r>
+              <a:rPr sz="1400" dirty="0"/>
+              <a:t> </a:t>
+            </a:r>
+            <a:r>
+              <a:rPr sz="1400" dirty="0" err="1"/>
+              <a:t>texto</a:t>
+            </a:r>
+            <a:r>
+              <a:rPr sz="1400" dirty="0"/>
+              <a:t>.</a:t>
             </a:r>
           </a:p>
         </p:txBody>
@@ -7920,7 +10440,7 @@
         <p:spPr>
           <a:xfrm>
             <a:off x="6263640" y="1234440"/>
-            <a:ext cx="5166360" cy="1188720"/>
+            <a:ext cx="5166360" cy="1023357"/>
           </a:xfrm>
           <a:prstGeom prst="rect">
             <a:avLst/>
@@ -7933,7 +10453,7 @@
           </a:bodyPr>
           <a:lstStyle/>
           <a:p>
-            <a:pPr>
+            <a:pPr algn="just">
               <a:defRPr sz="1500" b="1">
                 <a:solidFill>
                   <a:srgbClr val="00873E"/>
@@ -7942,11 +10462,36 @@
               </a:defRPr>
             </a:pPr>
             <a:r>
-              <a:t>A Música que Conecta Gerações (Imagine — John Lennon, 1971)</a:t>
-            </a:r>
-          </a:p>
-          <a:p>
-            <a:pPr>
+              <a:rPr sz="1600" dirty="0"/>
+              <a:t>A Música </a:t>
+            </a:r>
+            <a:r>
+              <a:rPr sz="1600" dirty="0" err="1"/>
+              <a:t>que</a:t>
+            </a:r>
+            <a:r>
+              <a:rPr sz="1600" dirty="0"/>
+              <a:t> </a:t>
+            </a:r>
+            <a:r>
+              <a:rPr sz="1600" dirty="0" err="1"/>
+              <a:t>Conecta</a:t>
+            </a:r>
+            <a:r>
+              <a:rPr sz="1600" dirty="0"/>
+              <a:t> </a:t>
+            </a:r>
+            <a:r>
+              <a:rPr sz="1600" dirty="0" err="1"/>
+              <a:t>Gerações</a:t>
+            </a:r>
+            <a:r>
+              <a:rPr sz="1600" dirty="0"/>
+              <a:t> (Imagine — John Lennon, 1971)</a:t>
+            </a:r>
+          </a:p>
+          <a:p>
+            <a:pPr algn="just">
               <a:defRPr sz="1150">
                 <a:solidFill>
                   <a:srgbClr val="64748B"/>
@@ -7955,7 +10500,140 @@
               </a:defRPr>
             </a:pPr>
             <a:r>
-              <a:t>Nenhum projeto comunitário vive só de botões; ele vive de sentimento. A trilha sonora traz a clássica canção 'Imagine' para sensibilização pedagógica e acolhimento.</a:t>
+              <a:rPr dirty="0" err="1"/>
+              <a:t>Nenhum</a:t>
+            </a:r>
+            <a:r>
+              <a:rPr dirty="0"/>
+              <a:t> </a:t>
+            </a:r>
+            <a:r>
+              <a:rPr dirty="0" err="1"/>
+              <a:t>projeto</a:t>
+            </a:r>
+            <a:r>
+              <a:rPr dirty="0"/>
+              <a:t> </a:t>
+            </a:r>
+            <a:r>
+              <a:rPr dirty="0" err="1"/>
+              <a:t>comunitário</a:t>
+            </a:r>
+            <a:r>
+              <a:rPr dirty="0"/>
+              <a:t> </a:t>
+            </a:r>
+            <a:r>
+              <a:rPr dirty="0" err="1"/>
+              <a:t>vive</a:t>
+            </a:r>
+            <a:r>
+              <a:rPr dirty="0"/>
+              <a:t> </a:t>
+            </a:r>
+            <a:r>
+              <a:rPr dirty="0" err="1"/>
+              <a:t>só</a:t>
+            </a:r>
+            <a:r>
+              <a:rPr dirty="0"/>
+              <a:t> de </a:t>
+            </a:r>
+            <a:r>
+              <a:rPr dirty="0" err="1"/>
+              <a:t>botões</a:t>
+            </a:r>
+            <a:r>
+              <a:rPr dirty="0"/>
+              <a:t>; </a:t>
+            </a:r>
+            <a:r>
+              <a:rPr dirty="0" err="1"/>
+              <a:t>ele</a:t>
+            </a:r>
+            <a:r>
+              <a:rPr dirty="0"/>
+              <a:t> </a:t>
+            </a:r>
+            <a:r>
+              <a:rPr dirty="0" err="1"/>
+              <a:t>vive</a:t>
+            </a:r>
+            <a:r>
+              <a:rPr dirty="0"/>
+              <a:t> de </a:t>
+            </a:r>
+            <a:r>
+              <a:rPr dirty="0" err="1"/>
+              <a:t>sentimento</a:t>
+            </a:r>
+            <a:r>
+              <a:rPr dirty="0"/>
+              <a:t>. A </a:t>
+            </a:r>
+            <a:r>
+              <a:rPr dirty="0" err="1"/>
+              <a:t>trilha</a:t>
+            </a:r>
+            <a:r>
+              <a:rPr dirty="0"/>
+              <a:t> </a:t>
+            </a:r>
+            <a:r>
+              <a:rPr dirty="0" err="1"/>
+              <a:t>sonora</a:t>
+            </a:r>
+            <a:r>
+              <a:rPr dirty="0"/>
+              <a:t> </a:t>
+            </a:r>
+            <a:r>
+              <a:rPr dirty="0" err="1"/>
+              <a:t>traz</a:t>
+            </a:r>
+            <a:r>
+              <a:rPr dirty="0"/>
+              <a:t> a </a:t>
+            </a:r>
+            <a:r>
+              <a:rPr dirty="0" err="1"/>
+              <a:t>clássica</a:t>
+            </a:r>
+            <a:r>
+              <a:rPr dirty="0"/>
+              <a:t> </a:t>
+            </a:r>
+            <a:r>
+              <a:rPr dirty="0" err="1"/>
+              <a:t>canção</a:t>
+            </a:r>
+            <a:r>
+              <a:rPr dirty="0"/>
+              <a:t> 'Imagine' para </a:t>
+            </a:r>
+            <a:r>
+              <a:rPr dirty="0" err="1"/>
+              <a:t>sensibilização</a:t>
+            </a:r>
+            <a:r>
+              <a:rPr dirty="0"/>
+              <a:t> </a:t>
+            </a:r>
+            <a:r>
+              <a:rPr dirty="0" err="1"/>
+              <a:t>pedagógica</a:t>
+            </a:r>
+            <a:r>
+              <a:rPr dirty="0"/>
+              <a:t> e </a:t>
+            </a:r>
+            <a:r>
+              <a:rPr dirty="0" err="1"/>
+              <a:t>acolhimento</a:t>
+            </a:r>
+            <a:r>
+              <a:rPr dirty="0"/>
+              <a:t>.</a:t>
             </a:r>
           </a:p>
         </p:txBody>
@@ -8002,6 +10680,7 @@
           <a:lstStyle/>
           <a:p>
             <a:pPr algn="ctr"/>
+            <a:endParaRPr/>
           </a:p>
         </p:txBody>
       </p:sp>
@@ -8014,7 +10693,7 @@
         <p:spPr>
           <a:xfrm>
             <a:off x="6537960" y="2651760"/>
-            <a:ext cx="4663440" cy="3246120"/>
+            <a:ext cx="4663440" cy="3170099"/>
           </a:xfrm>
           <a:prstGeom prst="rect">
             <a:avLst/>
@@ -8027,7 +10706,7 @@
           </a:bodyPr>
           <a:lstStyle/>
           <a:p>
-            <a:pPr>
+            <a:pPr algn="ctr">
               <a:defRPr sz="1300" b="1">
                 <a:solidFill>
                   <a:srgbClr val="00873E"/>
@@ -8036,35 +10715,312 @@
               </a:defRPr>
             </a:pPr>
             <a:r>
-              <a:t>Tratamento Cuidadoso de Áudio:</a:t>
-            </a:r>
-          </a:p>
-          <a:p>
-            <a:br/>
-            <a:pPr>
-              <a:defRPr sz="1100">
-                <a:solidFill>
-                  <a:srgbClr val="1E293B"/>
-                </a:solidFill>
-                <a:latin typeface="Segoe UI"/>
-              </a:defRPr>
-            </a:pPr>
-            <a:r>
-              <a:t>• Respeito ao Usuário (Anti-Autoplay Invasivo): Navegadores modernos bloqueiam reprodução automática. Criamos escutadores de evento (window.addEventListener('click') e rolagem) para iniciar suavemente quando o visitante demonstra interesse pelo site.</a:t>
-            </a:r>
-          </a:p>
-          <a:p>
-            <a:br/>
-            <a:pPr>
-              <a:defRPr sz="1100">
-                <a:solidFill>
-                  <a:srgbClr val="1E293B"/>
-                </a:solidFill>
-                <a:latin typeface="Segoe UI"/>
-              </a:defRPr>
-            </a:pPr>
-            <a:r>
-              <a:t>• Controles Completos: Slider de volume contínuo, botão de silenciar (mute), equalizador com 3 barras animadas em CSS e botão para recolher o tocador para um canto discreto da tela.</a:t>
+              <a:rPr sz="1600" dirty="0" err="1"/>
+              <a:t>Tratamento</a:t>
+            </a:r>
+            <a:r>
+              <a:rPr sz="1600" dirty="0"/>
+              <a:t> </a:t>
+            </a:r>
+            <a:r>
+              <a:rPr sz="1600" dirty="0" err="1"/>
+              <a:t>Cuidadoso</a:t>
+            </a:r>
+            <a:r>
+              <a:rPr sz="1600" dirty="0"/>
+              <a:t> de </a:t>
+            </a:r>
+            <a:r>
+              <a:rPr sz="1600" dirty="0" err="1"/>
+              <a:t>Áudio</a:t>
+            </a:r>
+            <a:r>
+              <a:rPr sz="1600" dirty="0"/>
+              <a:t>:</a:t>
+            </a:r>
+          </a:p>
+          <a:p>
+            <a:pPr algn="just"/>
+            <a:br>
+              <a:rPr sz="1600" dirty="0"/>
+            </a:br>
+            <a:r>
+              <a:rPr sz="1600" dirty="0"/>
+              <a:t>• </a:t>
+            </a:r>
+            <a:r>
+              <a:rPr sz="1600" dirty="0" err="1"/>
+              <a:t>Respeito</a:t>
+            </a:r>
+            <a:r>
+              <a:rPr sz="1600" dirty="0"/>
+              <a:t> </a:t>
+            </a:r>
+            <a:r>
+              <a:rPr sz="1600" dirty="0" err="1"/>
+              <a:t>ao</a:t>
+            </a:r>
+            <a:r>
+              <a:rPr sz="1600" dirty="0"/>
+              <a:t> </a:t>
+            </a:r>
+            <a:r>
+              <a:rPr sz="1600" dirty="0" err="1"/>
+              <a:t>Usuário</a:t>
+            </a:r>
+            <a:r>
+              <a:rPr sz="1600" dirty="0"/>
+              <a:t> (Anti-Autoplay </a:t>
+            </a:r>
+            <a:r>
+              <a:rPr sz="1600" dirty="0" err="1"/>
+              <a:t>Invasivo</a:t>
+            </a:r>
+            <a:r>
+              <a:rPr sz="1600" dirty="0"/>
+              <a:t>): </a:t>
+            </a:r>
+            <a:r>
+              <a:rPr sz="1600" dirty="0" err="1"/>
+              <a:t>Navegadores</a:t>
+            </a:r>
+            <a:r>
+              <a:rPr sz="1600" dirty="0"/>
+              <a:t> </a:t>
+            </a:r>
+            <a:r>
+              <a:rPr sz="1600" dirty="0" err="1"/>
+              <a:t>modernos</a:t>
+            </a:r>
+            <a:r>
+              <a:rPr sz="1600" dirty="0"/>
+              <a:t> </a:t>
+            </a:r>
+            <a:r>
+              <a:rPr sz="1600" dirty="0" err="1"/>
+              <a:t>bloqueiam</a:t>
+            </a:r>
+            <a:r>
+              <a:rPr sz="1600" dirty="0"/>
+              <a:t> </a:t>
+            </a:r>
+            <a:r>
+              <a:rPr sz="1600" dirty="0" err="1"/>
+              <a:t>reprodução</a:t>
+            </a:r>
+            <a:r>
+              <a:rPr sz="1600" dirty="0"/>
+              <a:t> </a:t>
+            </a:r>
+            <a:r>
+              <a:rPr sz="1600" dirty="0" err="1"/>
+              <a:t>automática</a:t>
+            </a:r>
+            <a:r>
+              <a:rPr sz="1600" dirty="0"/>
+              <a:t>. </a:t>
+            </a:r>
+            <a:r>
+              <a:rPr sz="1600" dirty="0" err="1"/>
+              <a:t>Criamos</a:t>
+            </a:r>
+            <a:r>
+              <a:rPr sz="1600" dirty="0"/>
+              <a:t> </a:t>
+            </a:r>
+            <a:r>
+              <a:rPr sz="1600" dirty="0" err="1"/>
+              <a:t>escutadores</a:t>
+            </a:r>
+            <a:r>
+              <a:rPr sz="1600" dirty="0"/>
+              <a:t> de </a:t>
+            </a:r>
+            <a:r>
+              <a:rPr sz="1600" dirty="0" err="1"/>
+              <a:t>evento</a:t>
+            </a:r>
+            <a:r>
+              <a:rPr sz="1600" dirty="0"/>
+              <a:t> (</a:t>
+            </a:r>
+            <a:r>
+              <a:rPr sz="1600" dirty="0" err="1"/>
+              <a:t>window.addEventListener</a:t>
+            </a:r>
+            <a:r>
+              <a:rPr sz="1600" dirty="0"/>
+              <a:t>('click') e </a:t>
+            </a:r>
+            <a:r>
+              <a:rPr sz="1600" dirty="0" err="1"/>
+              <a:t>rolagem</a:t>
+            </a:r>
+            <a:r>
+              <a:rPr sz="1600" dirty="0"/>
+              <a:t>) para </a:t>
+            </a:r>
+            <a:r>
+              <a:rPr sz="1600" dirty="0" err="1"/>
+              <a:t>iniciar</a:t>
+            </a:r>
+            <a:r>
+              <a:rPr sz="1600" dirty="0"/>
+              <a:t> </a:t>
+            </a:r>
+            <a:r>
+              <a:rPr sz="1600" dirty="0" err="1"/>
+              <a:t>suavemente</a:t>
+            </a:r>
+            <a:r>
+              <a:rPr sz="1600" dirty="0"/>
+              <a:t> </a:t>
+            </a:r>
+            <a:r>
+              <a:rPr sz="1600" dirty="0" err="1"/>
+              <a:t>quando</a:t>
+            </a:r>
+            <a:r>
+              <a:rPr sz="1600" dirty="0"/>
+              <a:t> o </a:t>
+            </a:r>
+            <a:r>
+              <a:rPr sz="1600" dirty="0" err="1"/>
+              <a:t>visitante</a:t>
+            </a:r>
+            <a:r>
+              <a:rPr sz="1600" dirty="0"/>
+              <a:t> </a:t>
+            </a:r>
+            <a:r>
+              <a:rPr sz="1600" dirty="0" err="1"/>
+              <a:t>demonstra</a:t>
+            </a:r>
+            <a:r>
+              <a:rPr sz="1600" dirty="0"/>
+              <a:t> interesse </a:t>
+            </a:r>
+            <a:r>
+              <a:rPr sz="1600" dirty="0" err="1"/>
+              <a:t>pelo</a:t>
+            </a:r>
+            <a:r>
+              <a:rPr sz="1600" dirty="0"/>
+              <a:t> site.</a:t>
+            </a:r>
+          </a:p>
+          <a:p>
+            <a:pPr algn="just"/>
+            <a:br>
+              <a:rPr sz="1600" dirty="0"/>
+            </a:br>
+            <a:r>
+              <a:rPr sz="1600" dirty="0"/>
+              <a:t>• </a:t>
+            </a:r>
+            <a:r>
+              <a:rPr sz="1600" dirty="0" err="1"/>
+              <a:t>Controles</a:t>
+            </a:r>
+            <a:r>
+              <a:rPr sz="1600" dirty="0"/>
+              <a:t> </a:t>
+            </a:r>
+            <a:r>
+              <a:rPr sz="1600" dirty="0" err="1"/>
+              <a:t>Completos</a:t>
+            </a:r>
+            <a:r>
+              <a:rPr sz="1600" dirty="0"/>
+              <a:t>: Slider de volume </a:t>
+            </a:r>
+            <a:r>
+              <a:rPr sz="1600" dirty="0" err="1"/>
+              <a:t>contínuo</a:t>
+            </a:r>
+            <a:r>
+              <a:rPr sz="1600" dirty="0"/>
+              <a:t>, </a:t>
+            </a:r>
+            <a:r>
+              <a:rPr sz="1600" dirty="0" err="1"/>
+              <a:t>botão</a:t>
+            </a:r>
+            <a:r>
+              <a:rPr sz="1600" dirty="0"/>
+              <a:t> de </a:t>
+            </a:r>
+            <a:r>
+              <a:rPr sz="1600" dirty="0" err="1"/>
+              <a:t>silenciar</a:t>
+            </a:r>
+            <a:r>
+              <a:rPr sz="1600" dirty="0"/>
+              <a:t> (mute), </a:t>
+            </a:r>
+            <a:r>
+              <a:rPr sz="1600" dirty="0" err="1"/>
+              <a:t>equalizador</a:t>
+            </a:r>
+            <a:r>
+              <a:rPr sz="1600" dirty="0"/>
+              <a:t> com 3 barras </a:t>
+            </a:r>
+            <a:r>
+              <a:rPr sz="1600" dirty="0" err="1"/>
+              <a:t>animadas</a:t>
+            </a:r>
+            <a:r>
+              <a:rPr sz="1600" dirty="0"/>
+              <a:t> </a:t>
+            </a:r>
+            <a:r>
+              <a:rPr sz="1600" dirty="0" err="1"/>
+              <a:t>em</a:t>
+            </a:r>
+            <a:r>
+              <a:rPr sz="1600" dirty="0"/>
+              <a:t> CSS e </a:t>
+            </a:r>
+            <a:r>
+              <a:rPr sz="1600" dirty="0" err="1"/>
+              <a:t>botão</a:t>
+            </a:r>
+            <a:r>
+              <a:rPr sz="1600" dirty="0"/>
+              <a:t> para </a:t>
+            </a:r>
+            <a:r>
+              <a:rPr sz="1600" dirty="0" err="1"/>
+              <a:t>recolher</a:t>
+            </a:r>
+            <a:r>
+              <a:rPr sz="1600" dirty="0"/>
+              <a:t> o </a:t>
+            </a:r>
+            <a:r>
+              <a:rPr sz="1600" dirty="0" err="1"/>
+              <a:t>tocador</a:t>
+            </a:r>
+            <a:r>
+              <a:rPr sz="1600" dirty="0"/>
+              <a:t> para um canto </a:t>
+            </a:r>
+            <a:r>
+              <a:rPr sz="1600" dirty="0" err="1"/>
+              <a:t>discreto</a:t>
+            </a:r>
+            <a:r>
+              <a:rPr sz="1600" dirty="0"/>
+              <a:t> da </a:t>
+            </a:r>
+            <a:r>
+              <a:rPr sz="1600" dirty="0" err="1"/>
+              <a:t>tela</a:t>
+            </a:r>
+            <a:r>
+              <a:rPr sz="1600" dirty="0"/>
+              <a:t>.</a:t>
             </a:r>
           </a:p>
         </p:txBody>
@@ -8078,7 +11034,7 @@
 </file>
 
 <file path=ppt/slides/slide5.xml><?xml version="1.0" encoding="utf-8"?>
-<p:sld xmlns:a="http://schemas.openxmlformats.org/drawingml/2006/main" xmlns:p="http://schemas.openxmlformats.org/presentationml/2006/main" xmlns:r="http://schemas.openxmlformats.org/officeDocument/2006/relationships">
+<p:sld xmlns:a="http://schemas.openxmlformats.org/drawingml/2006/main" xmlns:r="http://schemas.openxmlformats.org/officeDocument/2006/relationships" xmlns:p="http://schemas.openxmlformats.org/presentationml/2006/main">
   <p:cSld>
     <p:spTree>
       <p:nvGrpSpPr>
@@ -8086,7 +11042,14 @@
         <p:cNvGrpSpPr/>
         <p:nvPr/>
       </p:nvGrpSpPr>
-      <p:grpSpPr/>
+      <p:grpSpPr>
+        <a:xfrm>
+          <a:off x="0" y="0"/>
+          <a:ext cx="0" cy="0"/>
+          <a:chOff x="0" y="0"/>
+          <a:chExt cx="0" cy="0"/>
+        </a:xfrm>
+      </p:grpSpPr>
       <p:sp>
         <p:nvSpPr>
           <p:cNvPr id="2" name="TextBox 1"/>
@@ -8161,7 +11124,7 @@
           </a:fontRef>
         </p:style>
         <p:txBody>
-          <a:bodyPr rtlCol="0" anchor="ctr" tIns="54864"/>
+          <a:bodyPr tIns="54864" rtlCol="0" anchor="ctr"/>
           <a:lstStyle/>
           <a:p>
             <a:pPr algn="ctr">
@@ -8218,6 +11181,7 @@
           <a:lstStyle/>
           <a:p>
             <a:pPr algn="ctr"/>
+            <a:endParaRPr/>
           </a:p>
         </p:txBody>
       </p:sp>
@@ -8261,6 +11225,7 @@
           <a:lstStyle/>
           <a:p>
             <a:pPr algn="ctr"/>
+            <a:endParaRPr/>
           </a:p>
         </p:txBody>
       </p:sp>
@@ -8345,7 +11310,7 @@
         <p:spPr>
           <a:xfrm>
             <a:off x="731520" y="1234440"/>
-            <a:ext cx="5166360" cy="2103120"/>
+            <a:ext cx="5166360" cy="1623521"/>
           </a:xfrm>
           <a:prstGeom prst="rect">
             <a:avLst/>
@@ -8358,7 +11323,7 @@
           </a:bodyPr>
           <a:lstStyle/>
           <a:p>
-            <a:pPr>
+            <a:pPr algn="just">
               <a:defRPr sz="1550" b="1">
                 <a:solidFill>
                   <a:srgbClr val="00873E"/>
@@ -8367,21 +11332,166 @@
               </a:defRPr>
             </a:pPr>
             <a:r>
-              <a:t>Por Que Usar a API do IBGE?</a:t>
-            </a:r>
-          </a:p>
-          <a:p>
-            <a:br/>
-            <a:pPr>
-              <a:defRPr sz="1200">
-                <a:solidFill>
-                  <a:srgbClr val="64748B"/>
-                </a:solidFill>
-                <a:latin typeface="Segoe UI"/>
-              </a:defRPr>
-            </a:pPr>
-            <a:r>
-              <a:t>Poderíamos ter inventado nomes em um arquivo fixo, mas a disciplina nos desafiou a trabalhar como desenvolvedores profissionais trabalham: consumindo dados reais de servidores públicos em tempo real.</a:t>
+              <a:rPr dirty="0"/>
+              <a:t>Por </a:t>
+            </a:r>
+            <a:r>
+              <a:rPr dirty="0" err="1"/>
+              <a:t>Que</a:t>
+            </a:r>
+            <a:r>
+              <a:rPr dirty="0"/>
+              <a:t> Usar a API do IBGE?</a:t>
+            </a:r>
+          </a:p>
+          <a:p>
+            <a:pPr algn="just"/>
+            <a:br>
+              <a:rPr dirty="0"/>
+            </a:br>
+            <a:r>
+              <a:rPr dirty="0" err="1"/>
+              <a:t>Poderíamos</a:t>
+            </a:r>
+            <a:r>
+              <a:rPr dirty="0"/>
+              <a:t> ter </a:t>
+            </a:r>
+            <a:r>
+              <a:rPr dirty="0" err="1"/>
+              <a:t>inventado</a:t>
+            </a:r>
+            <a:r>
+              <a:rPr dirty="0"/>
+              <a:t> </a:t>
+            </a:r>
+            <a:r>
+              <a:rPr dirty="0" err="1"/>
+              <a:t>nomes</a:t>
+            </a:r>
+            <a:r>
+              <a:rPr dirty="0"/>
+              <a:t> </a:t>
+            </a:r>
+            <a:r>
+              <a:rPr dirty="0" err="1"/>
+              <a:t>em</a:t>
+            </a:r>
+            <a:r>
+              <a:rPr dirty="0"/>
+              <a:t> um </a:t>
+            </a:r>
+            <a:r>
+              <a:rPr dirty="0" err="1"/>
+              <a:t>arquivo</a:t>
+            </a:r>
+            <a:r>
+              <a:rPr dirty="0"/>
+              <a:t> </a:t>
+            </a:r>
+            <a:r>
+              <a:rPr dirty="0" err="1"/>
+              <a:t>fixo</a:t>
+            </a:r>
+            <a:r>
+              <a:rPr dirty="0"/>
+              <a:t>, mas a </a:t>
+            </a:r>
+            <a:r>
+              <a:rPr dirty="0" err="1"/>
+              <a:t>disciplina</a:t>
+            </a:r>
+            <a:r>
+              <a:rPr dirty="0"/>
+              <a:t> </a:t>
+            </a:r>
+            <a:r>
+              <a:rPr dirty="0" err="1"/>
+              <a:t>nos</a:t>
+            </a:r>
+            <a:r>
+              <a:rPr dirty="0"/>
+              <a:t> </a:t>
+            </a:r>
+            <a:r>
+              <a:rPr dirty="0" err="1"/>
+              <a:t>desafiou</a:t>
+            </a:r>
+            <a:r>
+              <a:rPr dirty="0"/>
+              <a:t> a </a:t>
+            </a:r>
+            <a:r>
+              <a:rPr dirty="0" err="1"/>
+              <a:t>trabalhar</a:t>
+            </a:r>
+            <a:r>
+              <a:rPr dirty="0"/>
+              <a:t> </a:t>
+            </a:r>
+            <a:r>
+              <a:rPr dirty="0" err="1"/>
+              <a:t>como</a:t>
+            </a:r>
+            <a:r>
+              <a:rPr dirty="0"/>
+              <a:t> </a:t>
+            </a:r>
+            <a:r>
+              <a:rPr dirty="0" err="1"/>
+              <a:t>desenvolvedores</a:t>
+            </a:r>
+            <a:r>
+              <a:rPr dirty="0"/>
+              <a:t> </a:t>
+            </a:r>
+            <a:r>
+              <a:rPr dirty="0" err="1"/>
+              <a:t>profissionais</a:t>
+            </a:r>
+            <a:r>
+              <a:rPr dirty="0"/>
+              <a:t> </a:t>
+            </a:r>
+            <a:r>
+              <a:rPr dirty="0" err="1"/>
+              <a:t>trabalham</a:t>
+            </a:r>
+            <a:r>
+              <a:rPr dirty="0"/>
+              <a:t>: </a:t>
+            </a:r>
+            <a:r>
+              <a:rPr dirty="0" err="1"/>
+              <a:t>consumindo</a:t>
+            </a:r>
+            <a:r>
+              <a:rPr dirty="0"/>
+              <a:t> dados reais de </a:t>
+            </a:r>
+            <a:r>
+              <a:rPr dirty="0" err="1"/>
+              <a:t>servidores</a:t>
+            </a:r>
+            <a:r>
+              <a:rPr dirty="0"/>
+              <a:t> </a:t>
+            </a:r>
+            <a:r>
+              <a:rPr dirty="0" err="1"/>
+              <a:t>públicos</a:t>
+            </a:r>
+            <a:r>
+              <a:rPr dirty="0"/>
+              <a:t> </a:t>
+            </a:r>
+            <a:r>
+              <a:rPr dirty="0" err="1"/>
+              <a:t>em</a:t>
+            </a:r>
+            <a:r>
+              <a:rPr dirty="0"/>
+              <a:t> tempo real.</a:t>
             </a:r>
           </a:p>
         </p:txBody>
@@ -8428,6 +11538,7 @@
           <a:lstStyle/>
           <a:p>
             <a:pPr algn="ctr"/>
+            <a:endParaRPr/>
           </a:p>
         </p:txBody>
       </p:sp>
@@ -8439,8 +11550,8 @@
         </p:nvSpPr>
         <p:spPr>
           <a:xfrm>
-            <a:off x="914400" y="3520440"/>
-            <a:ext cx="4800600" cy="868680"/>
+            <a:off x="762001" y="3520440"/>
+            <a:ext cx="5048864" cy="553998"/>
           </a:xfrm>
           <a:prstGeom prst="rect">
             <a:avLst/>
@@ -8453,7 +11564,7 @@
           </a:bodyPr>
           <a:lstStyle/>
           <a:p>
-            <a:pPr>
+            <a:pPr algn="just">
               <a:defRPr sz="1050" b="1">
                 <a:solidFill>
                   <a:srgbClr val="38BDF8"/>
@@ -8462,6 +11573,7 @@
               </a:defRPr>
             </a:pPr>
             <a:r>
+              <a:rPr sz="1200" dirty="0"/>
               <a:t>GET https://servicodados.ibge.gov.br/api/v1/localidades/estados/MA/municipios</a:t>
             </a:r>
           </a:p>
@@ -8489,7 +11601,7 @@
           </a:bodyPr>
           <a:lstStyle/>
           <a:p>
-            <a:pPr>
+            <a:pPr algn="just">
               <a:defRPr sz="1150">
                 <a:solidFill>
                   <a:srgbClr val="1E293B"/>
@@ -8498,7 +11610,80 @@
               </a:defRPr>
             </a:pPr>
             <a:r>
-              <a:t>Obtivemos com total precisão o Código Oficial do IBGE (ID de 7 dígitos), a Microrregião e a Mesorregião de Timbiras e cidades vizinhas da Região dos Cocais.</a:t>
+              <a:rPr dirty="0"/>
+              <a:t>Obtivemos com total </a:t>
+            </a:r>
+            <a:r>
+              <a:rPr dirty="0" err="1"/>
+              <a:t>precisão</a:t>
+            </a:r>
+            <a:r>
+              <a:rPr dirty="0"/>
+              <a:t> o Código </a:t>
+            </a:r>
+            <a:r>
+              <a:rPr dirty="0" err="1"/>
+              <a:t>Oficial</a:t>
+            </a:r>
+            <a:r>
+              <a:rPr dirty="0"/>
+              <a:t> do IBGE (ID de 7 </a:t>
+            </a:r>
+            <a:r>
+              <a:rPr dirty="0" err="1"/>
+              <a:t>dígitos</a:t>
+            </a:r>
+            <a:r>
+              <a:rPr dirty="0"/>
+              <a:t>), a </a:t>
+            </a:r>
+            <a:r>
+              <a:rPr dirty="0" err="1"/>
+              <a:t>Microrregião</a:t>
+            </a:r>
+            <a:r>
+              <a:rPr dirty="0"/>
+              <a:t> e a </a:t>
+            </a:r>
+            <a:r>
+              <a:rPr dirty="0" err="1"/>
+              <a:t>Mesorregião</a:t>
+            </a:r>
+            <a:r>
+              <a:rPr dirty="0"/>
+              <a:t> de Timbiras e </a:t>
+            </a:r>
+            <a:r>
+              <a:rPr dirty="0" err="1"/>
+              <a:t>cidades</a:t>
+            </a:r>
+            <a:r>
+              <a:rPr dirty="0"/>
+              <a:t> </a:t>
+            </a:r>
+            <a:r>
+              <a:rPr dirty="0" err="1"/>
+              <a:t>vizinhas</a:t>
+            </a:r>
+            <a:r>
+              <a:rPr dirty="0"/>
+              <a:t> da </a:t>
+            </a:r>
+            <a:r>
+              <a:rPr dirty="0" err="1"/>
+              <a:t>Região</a:t>
+            </a:r>
+            <a:r>
+              <a:rPr dirty="0"/>
+              <a:t> dos </a:t>
+            </a:r>
+            <a:r>
+              <a:rPr dirty="0" err="1"/>
+              <a:t>Cocais</a:t>
+            </a:r>
+            <a:r>
+              <a:rPr dirty="0"/>
+              <a:t>.</a:t>
             </a:r>
           </a:p>
         </p:txBody>
@@ -8545,6 +11730,7 @@
           <a:lstStyle/>
           <a:p>
             <a:pPr algn="ctr"/>
+            <a:endParaRPr/>
           </a:p>
         </p:txBody>
       </p:sp>
@@ -8557,7 +11743,7 @@
         <p:spPr>
           <a:xfrm>
             <a:off x="6537960" y="1417320"/>
-            <a:ext cx="4617720" cy="4434840"/>
+            <a:ext cx="4617720" cy="4154984"/>
           </a:xfrm>
           <a:prstGeom prst="rect">
             <a:avLst/>
@@ -8570,7 +11756,7 @@
           </a:bodyPr>
           <a:lstStyle/>
           <a:p>
-            <a:pPr>
+            <a:pPr algn="ctr">
               <a:defRPr sz="1550" b="1">
                 <a:solidFill>
                   <a:srgbClr val="0284C7"/>
@@ -8579,61 +11765,375 @@
               </a:defRPr>
             </a:pPr>
             <a:r>
-              <a:t>Tratamento Humano dos Estados de Rede</a:t>
-            </a:r>
-          </a:p>
-          <a:p>
-            <a:br/>
-            <a:pPr>
-              <a:defRPr sz="1100">
-                <a:solidFill>
-                  <a:srgbClr val="1E293B"/>
-                </a:solidFill>
-                <a:latin typeface="Segoe UI"/>
-              </a:defRPr>
-            </a:pPr>
-            <a:r>
-              <a:t>1. Momento da Espera (Loading):</a:t>
-            </a:r>
-            <a:br/>
-            <a:r>
-              <a:t> Em conexões 3G ou 4G comuns no interior, a requisição pode demorar. Exibimos um spinner amigável com a mensagem: 'Consultando base pública do IBGE...'</a:t>
-            </a:r>
-          </a:p>
-          <a:p>
-            <a:br/>
-            <a:pPr>
-              <a:defRPr sz="1100">
-                <a:solidFill>
-                  <a:srgbClr val="1E293B"/>
-                </a:solidFill>
-                <a:latin typeface="Segoe UI"/>
-              </a:defRPr>
-            </a:pPr>
-            <a:r>
-              <a:t>2. Quando a Conexão Falha (Error):</a:t>
-            </a:r>
-            <a:br/>
-            <a:r>
-              <a:t> A vida real tem quedas de sinal. Em vez de tela branca ou travamento, exibimos um painel explicativo e o botão 'Recarregar API'.</a:t>
-            </a:r>
-          </a:p>
-          <a:p>
-            <a:br/>
-            <a:pPr>
-              <a:defRPr sz="1100">
-                <a:solidFill>
-                  <a:srgbClr val="1E293B"/>
-                </a:solidFill>
-                <a:latin typeface="Segoe UI"/>
-              </a:defRPr>
-            </a:pPr>
-            <a:r>
-              <a:t>3. Quando os Dados Chegam (Success):</a:t>
-            </a:r>
-            <a:br/>
-            <a:r>
-              <a:t> Convertemos o JSON com response.json() e preenchemos 217 cidades, dando destaque a Timbiras, Codó, Coroatá, Caxias, Peritoró e Alto Alegre.</a:t>
+              <a:rPr sz="1600" dirty="0" err="1"/>
+              <a:t>Tratamento</a:t>
+            </a:r>
+            <a:r>
+              <a:rPr sz="1600" dirty="0"/>
+              <a:t> Humano dos </a:t>
+            </a:r>
+            <a:r>
+              <a:rPr sz="1600" dirty="0" err="1"/>
+              <a:t>Estados</a:t>
+            </a:r>
+            <a:r>
+              <a:rPr sz="1600" dirty="0"/>
+              <a:t> de Rede</a:t>
+            </a:r>
+          </a:p>
+          <a:p>
+            <a:pPr algn="just"/>
+            <a:br>
+              <a:rPr sz="1600" dirty="0"/>
+            </a:br>
+            <a:r>
+              <a:rPr sz="1600" dirty="0"/>
+              <a:t>1. </a:t>
+            </a:r>
+            <a:r>
+              <a:rPr sz="1600" dirty="0" err="1"/>
+              <a:t>Momento</a:t>
+            </a:r>
+            <a:r>
+              <a:rPr sz="1600" dirty="0"/>
+              <a:t> da Espera (Loading):</a:t>
+            </a:r>
+            <a:br>
+              <a:rPr sz="1600" dirty="0"/>
+            </a:br>
+            <a:r>
+              <a:rPr sz="1600" dirty="0"/>
+              <a:t> Em </a:t>
+            </a:r>
+            <a:r>
+              <a:rPr sz="1600" dirty="0" err="1"/>
+              <a:t>conexões</a:t>
+            </a:r>
+            <a:r>
+              <a:rPr sz="1600" dirty="0"/>
+              <a:t> 3G </a:t>
+            </a:r>
+            <a:r>
+              <a:rPr sz="1600" dirty="0" err="1"/>
+              <a:t>ou</a:t>
+            </a:r>
+            <a:r>
+              <a:rPr sz="1600" dirty="0"/>
+              <a:t> 4G </a:t>
+            </a:r>
+            <a:r>
+              <a:rPr sz="1600" dirty="0" err="1"/>
+              <a:t>comuns</a:t>
+            </a:r>
+            <a:r>
+              <a:rPr sz="1600" dirty="0"/>
+              <a:t> no interior, a </a:t>
+            </a:r>
+            <a:r>
+              <a:rPr sz="1600" dirty="0" err="1"/>
+              <a:t>requisição</a:t>
+            </a:r>
+            <a:r>
+              <a:rPr sz="1600" dirty="0"/>
+              <a:t> </a:t>
+            </a:r>
+            <a:r>
+              <a:rPr sz="1600" dirty="0" err="1"/>
+              <a:t>pode</a:t>
+            </a:r>
+            <a:r>
+              <a:rPr sz="1600" dirty="0"/>
+              <a:t> </a:t>
+            </a:r>
+            <a:r>
+              <a:rPr sz="1600" dirty="0" err="1"/>
+              <a:t>demorar</a:t>
+            </a:r>
+            <a:r>
+              <a:rPr sz="1600" dirty="0"/>
+              <a:t>. </a:t>
+            </a:r>
+            <a:r>
+              <a:rPr sz="1600" dirty="0" err="1"/>
+              <a:t>Exibimos</a:t>
+            </a:r>
+            <a:r>
+              <a:rPr sz="1600" dirty="0"/>
+              <a:t> um spinner </a:t>
+            </a:r>
+            <a:r>
+              <a:rPr sz="1600" dirty="0" err="1"/>
+              <a:t>amigável</a:t>
+            </a:r>
+            <a:r>
+              <a:rPr sz="1600" dirty="0"/>
+              <a:t> com a </a:t>
+            </a:r>
+            <a:r>
+              <a:rPr sz="1600" dirty="0" err="1"/>
+              <a:t>mensagem</a:t>
+            </a:r>
+            <a:r>
+              <a:rPr sz="1600" dirty="0"/>
+              <a:t>: '</a:t>
+            </a:r>
+            <a:r>
+              <a:rPr sz="1600" dirty="0" err="1"/>
+              <a:t>Consultando</a:t>
+            </a:r>
+            <a:r>
+              <a:rPr sz="1600" dirty="0"/>
+              <a:t> base </a:t>
+            </a:r>
+            <a:r>
+              <a:rPr sz="1600" dirty="0" err="1"/>
+              <a:t>pública</a:t>
+            </a:r>
+            <a:r>
+              <a:rPr sz="1600" dirty="0"/>
+              <a:t> do IBGE...'</a:t>
+            </a:r>
+          </a:p>
+          <a:p>
+            <a:pPr algn="just"/>
+            <a:br>
+              <a:rPr sz="1600" dirty="0"/>
+            </a:br>
+            <a:r>
+              <a:rPr sz="1600" dirty="0"/>
+              <a:t>2. Quando a </a:t>
+            </a:r>
+            <a:r>
+              <a:rPr sz="1600" dirty="0" err="1"/>
+              <a:t>Conexão</a:t>
+            </a:r>
+            <a:r>
+              <a:rPr sz="1600" dirty="0"/>
+              <a:t> Falha (Error):</a:t>
+            </a:r>
+            <a:br>
+              <a:rPr sz="1600" dirty="0"/>
+            </a:br>
+            <a:r>
+              <a:rPr sz="1600" dirty="0"/>
+              <a:t> A </a:t>
+            </a:r>
+            <a:r>
+              <a:rPr sz="1600" dirty="0" err="1"/>
+              <a:t>vida</a:t>
+            </a:r>
+            <a:r>
+              <a:rPr sz="1600" dirty="0"/>
+              <a:t> real </a:t>
+            </a:r>
+            <a:r>
+              <a:rPr sz="1600" dirty="0" err="1"/>
+              <a:t>tem</a:t>
+            </a:r>
+            <a:r>
+              <a:rPr sz="1600" dirty="0"/>
+              <a:t> </a:t>
+            </a:r>
+            <a:r>
+              <a:rPr sz="1600" dirty="0" err="1"/>
+              <a:t>quedas</a:t>
+            </a:r>
+            <a:r>
+              <a:rPr sz="1600" dirty="0"/>
+              <a:t> de </a:t>
+            </a:r>
+            <a:r>
+              <a:rPr sz="1600" dirty="0" err="1"/>
+              <a:t>sinal</a:t>
+            </a:r>
+            <a:r>
+              <a:rPr sz="1600" dirty="0"/>
+              <a:t>. Em </a:t>
+            </a:r>
+            <a:r>
+              <a:rPr sz="1600" dirty="0" err="1"/>
+              <a:t>vez</a:t>
+            </a:r>
+            <a:r>
+              <a:rPr sz="1600" dirty="0"/>
+              <a:t> de </a:t>
+            </a:r>
+            <a:r>
+              <a:rPr sz="1600" dirty="0" err="1"/>
+              <a:t>tela</a:t>
+            </a:r>
+            <a:r>
+              <a:rPr sz="1600" dirty="0"/>
+              <a:t> </a:t>
+            </a:r>
+            <a:r>
+              <a:rPr sz="1600" dirty="0" err="1"/>
+              <a:t>branca</a:t>
+            </a:r>
+            <a:r>
+              <a:rPr sz="1600" dirty="0"/>
+              <a:t> </a:t>
+            </a:r>
+            <a:r>
+              <a:rPr sz="1600" dirty="0" err="1"/>
+              <a:t>ou</a:t>
+            </a:r>
+            <a:r>
+              <a:rPr sz="1600" dirty="0"/>
+              <a:t> </a:t>
+            </a:r>
+            <a:r>
+              <a:rPr sz="1600" dirty="0" err="1"/>
+              <a:t>travamento</a:t>
+            </a:r>
+            <a:r>
+              <a:rPr sz="1600" dirty="0"/>
+              <a:t>, </a:t>
+            </a:r>
+            <a:r>
+              <a:rPr sz="1600" dirty="0" err="1"/>
+              <a:t>exibimos</a:t>
+            </a:r>
+            <a:r>
+              <a:rPr sz="1600" dirty="0"/>
+              <a:t> um </a:t>
+            </a:r>
+            <a:r>
+              <a:rPr sz="1600" dirty="0" err="1"/>
+              <a:t>painel</a:t>
+            </a:r>
+            <a:r>
+              <a:rPr sz="1600" dirty="0"/>
+              <a:t> </a:t>
+            </a:r>
+            <a:r>
+              <a:rPr sz="1600" dirty="0" err="1"/>
+              <a:t>explicativo</a:t>
+            </a:r>
+            <a:r>
+              <a:rPr sz="1600" dirty="0"/>
+              <a:t> e o </a:t>
+            </a:r>
+            <a:r>
+              <a:rPr sz="1600" dirty="0" err="1"/>
+              <a:t>botão</a:t>
+            </a:r>
+            <a:r>
+              <a:rPr sz="1600" dirty="0"/>
+              <a:t> '</a:t>
+            </a:r>
+            <a:r>
+              <a:rPr sz="1600" dirty="0" err="1"/>
+              <a:t>Recarregar</a:t>
+            </a:r>
+            <a:r>
+              <a:rPr sz="1600" dirty="0"/>
+              <a:t> API'.</a:t>
+            </a:r>
+          </a:p>
+          <a:p>
+            <a:pPr algn="just"/>
+            <a:br>
+              <a:rPr sz="1600" dirty="0"/>
+            </a:br>
+            <a:r>
+              <a:rPr sz="1600" dirty="0"/>
+              <a:t>3. Quando </a:t>
+            </a:r>
+            <a:r>
+              <a:rPr sz="1600" dirty="0" err="1"/>
+              <a:t>os</a:t>
+            </a:r>
+            <a:r>
+              <a:rPr sz="1600" dirty="0"/>
+              <a:t> Dados </a:t>
+            </a:r>
+            <a:r>
+              <a:rPr sz="1600" dirty="0" err="1"/>
+              <a:t>Chegam</a:t>
+            </a:r>
+            <a:r>
+              <a:rPr sz="1600" dirty="0"/>
+              <a:t> (Success):</a:t>
+            </a:r>
+            <a:br>
+              <a:rPr sz="1600" dirty="0"/>
+            </a:br>
+            <a:r>
+              <a:rPr sz="1600" dirty="0"/>
+              <a:t> </a:t>
+            </a:r>
+            <a:r>
+              <a:rPr sz="1600" dirty="0" err="1"/>
+              <a:t>Convertemos</a:t>
+            </a:r>
+            <a:r>
+              <a:rPr sz="1600" dirty="0"/>
+              <a:t> o JSON com </a:t>
+            </a:r>
+            <a:r>
+              <a:rPr sz="1600" dirty="0" err="1"/>
+              <a:t>response.json</a:t>
+            </a:r>
+            <a:r>
+              <a:rPr sz="1600" dirty="0"/>
+              <a:t>() e </a:t>
+            </a:r>
+            <a:r>
+              <a:rPr sz="1600" dirty="0" err="1"/>
+              <a:t>preenchemos</a:t>
+            </a:r>
+            <a:r>
+              <a:rPr sz="1600" dirty="0"/>
+              <a:t> 217 </a:t>
+            </a:r>
+            <a:r>
+              <a:rPr sz="1600" dirty="0" err="1"/>
+              <a:t>cidades</a:t>
+            </a:r>
+            <a:r>
+              <a:rPr sz="1600" dirty="0"/>
+              <a:t>, </a:t>
+            </a:r>
+            <a:r>
+              <a:rPr sz="1600" dirty="0" err="1"/>
+              <a:t>dando</a:t>
+            </a:r>
+            <a:r>
+              <a:rPr sz="1600" dirty="0"/>
+              <a:t> </a:t>
+            </a:r>
+            <a:r>
+              <a:rPr sz="1600" dirty="0" err="1"/>
+              <a:t>destaque</a:t>
+            </a:r>
+            <a:r>
+              <a:rPr sz="1600" dirty="0"/>
+              <a:t> a Timbiras, </a:t>
+            </a:r>
+            <a:r>
+              <a:rPr sz="1600" dirty="0" err="1"/>
+              <a:t>Codó</a:t>
+            </a:r>
+            <a:r>
+              <a:rPr sz="1600" dirty="0"/>
+              <a:t>, </a:t>
+            </a:r>
+            <a:r>
+              <a:rPr sz="1600" dirty="0" err="1"/>
+              <a:t>Coroatá</a:t>
+            </a:r>
+            <a:r>
+              <a:rPr sz="1600" dirty="0"/>
+              <a:t>, Caxias, </a:t>
+            </a:r>
+            <a:r>
+              <a:rPr sz="1600" dirty="0" err="1"/>
+              <a:t>Peritoró</a:t>
+            </a:r>
+            <a:r>
+              <a:rPr sz="1600" dirty="0"/>
+              <a:t> e Alto Alegre.</a:t>
             </a:r>
           </a:p>
         </p:txBody>
@@ -8647,7 +12147,7 @@
 </file>
 
 <file path=ppt/slides/slide6.xml><?xml version="1.0" encoding="utf-8"?>
-<p:sld xmlns:a="http://schemas.openxmlformats.org/drawingml/2006/main" xmlns:p="http://schemas.openxmlformats.org/presentationml/2006/main" xmlns:r="http://schemas.openxmlformats.org/officeDocument/2006/relationships">
+<p:sld xmlns:a="http://schemas.openxmlformats.org/drawingml/2006/main" xmlns:r="http://schemas.openxmlformats.org/officeDocument/2006/relationships" xmlns:p="http://schemas.openxmlformats.org/presentationml/2006/main">
   <p:cSld>
     <p:spTree>
       <p:nvGrpSpPr>
@@ -8655,7 +12155,14 @@
         <p:cNvGrpSpPr/>
         <p:nvPr/>
       </p:nvGrpSpPr>
-      <p:grpSpPr/>
+      <p:grpSpPr>
+        <a:xfrm>
+          <a:off x="0" y="0"/>
+          <a:ext cx="0" cy="0"/>
+          <a:chOff x="0" y="0"/>
+          <a:chExt cx="0" cy="0"/>
+        </a:xfrm>
+      </p:grpSpPr>
       <p:sp>
         <p:nvSpPr>
           <p:cNvPr id="2" name="TextBox 1"/>
@@ -8730,7 +12237,7 @@
           </a:fontRef>
         </p:style>
         <p:txBody>
-          <a:bodyPr rtlCol="0" anchor="ctr" tIns="54864"/>
+          <a:bodyPr tIns="54864" rtlCol="0" anchor="ctr"/>
           <a:lstStyle/>
           <a:p>
             <a:pPr algn="ctr">
@@ -8787,6 +12294,7 @@
           <a:lstStyle/>
           <a:p>
             <a:pPr algn="ctr"/>
+            <a:endParaRPr/>
           </a:p>
         </p:txBody>
       </p:sp>
@@ -8830,6 +12338,7 @@
           <a:lstStyle/>
           <a:p>
             <a:pPr algn="ctr"/>
+            <a:endParaRPr/>
           </a:p>
         </p:txBody>
       </p:sp>
@@ -8947,6 +12456,7 @@
           <a:lstStyle/>
           <a:p>
             <a:pPr algn="ctr"/>
+            <a:endParaRPr/>
           </a:p>
         </p:txBody>
       </p:sp>
@@ -8958,8 +12468,8 @@
         </p:nvSpPr>
         <p:spPr>
           <a:xfrm>
-            <a:off x="960120" y="1417320"/>
-            <a:ext cx="4709160" cy="4434840"/>
+            <a:off x="875071" y="1417320"/>
+            <a:ext cx="5053289" cy="4062651"/>
           </a:xfrm>
           <a:prstGeom prst="rect">
             <a:avLst/>
@@ -8972,7 +12482,7 @@
           </a:bodyPr>
           <a:lstStyle/>
           <a:p>
-            <a:pPr>
+            <a:pPr algn="ctr">
               <a:defRPr sz="1400" b="1">
                 <a:solidFill>
                   <a:srgbClr val="38BDF8"/>
@@ -8981,86 +12491,603 @@
               </a:defRPr>
             </a:pPr>
             <a:r>
-              <a:t>Código de Integração Assíncrona</a:t>
-            </a:r>
-          </a:p>
-          <a:p>
-            <a:br/>
-            <a:pPr>
-              <a:defRPr sz="1050">
-                <a:solidFill>
-                  <a:srgbClr val="E2E8F0"/>
-                </a:solidFill>
-                <a:latin typeface="Consolas"/>
-              </a:defRPr>
-            </a:pPr>
-            <a:r>
-              <a:t>useEffect(() =&gt; {</a:t>
-            </a:r>
-            <a:br/>
-            <a:r>
-              <a:t>  const controlador = new AbortController();</a:t>
-            </a:r>
-            <a:br/>
-            <a:br/>
-            <a:r>
+              <a:rPr sz="1600" dirty="0"/>
+              <a:t>Código de </a:t>
+            </a:r>
+            <a:r>
+              <a:rPr sz="1600" dirty="0" err="1"/>
+              <a:t>Integração</a:t>
+            </a:r>
+            <a:r>
+              <a:rPr sz="1600" dirty="0"/>
+              <a:t> </a:t>
+            </a:r>
+            <a:r>
+              <a:rPr sz="1600" dirty="0" err="1"/>
+              <a:t>Assíncrona</a:t>
+            </a:r>
+            <a:endParaRPr sz="1600" dirty="0"/>
+          </a:p>
+          <a:p>
+            <a:br>
+              <a:rPr sz="1200" dirty="0">
+                <a:solidFill>
+                  <a:schemeClr val="bg1"/>
+                </a:solidFill>
+              </a:rPr>
+            </a:br>
+            <a:r>
+              <a:rPr sz="1200" dirty="0" err="1">
+                <a:solidFill>
+                  <a:schemeClr val="bg1"/>
+                </a:solidFill>
+              </a:rPr>
+              <a:t>useEffect</a:t>
+            </a:r>
+            <a:r>
+              <a:rPr sz="1200" dirty="0">
+                <a:solidFill>
+                  <a:schemeClr val="bg1"/>
+                </a:solidFill>
+              </a:rPr>
+              <a:t>(() =&gt; {</a:t>
+            </a:r>
+            <a:br>
+              <a:rPr sz="1200" dirty="0">
+                <a:solidFill>
+                  <a:schemeClr val="bg1"/>
+                </a:solidFill>
+              </a:rPr>
+            </a:br>
+            <a:r>
+              <a:rPr sz="1200" dirty="0">
+                <a:solidFill>
+                  <a:schemeClr val="bg1"/>
+                </a:solidFill>
+              </a:rPr>
+              <a:t>  const </a:t>
+            </a:r>
+            <a:r>
+              <a:rPr sz="1200" dirty="0" err="1">
+                <a:solidFill>
+                  <a:schemeClr val="bg1"/>
+                </a:solidFill>
+              </a:rPr>
+              <a:t>controlador</a:t>
+            </a:r>
+            <a:r>
+              <a:rPr sz="1200" dirty="0">
+                <a:solidFill>
+                  <a:schemeClr val="bg1"/>
+                </a:solidFill>
+              </a:rPr>
+              <a:t> = new </a:t>
+            </a:r>
+            <a:r>
+              <a:rPr sz="1200" dirty="0" err="1">
+                <a:solidFill>
+                  <a:schemeClr val="bg1"/>
+                </a:solidFill>
+              </a:rPr>
+              <a:t>AbortController</a:t>
+            </a:r>
+            <a:r>
+              <a:rPr sz="1200" dirty="0">
+                <a:solidFill>
+                  <a:schemeClr val="bg1"/>
+                </a:solidFill>
+              </a:rPr>
+              <a:t>();</a:t>
+            </a:r>
+            <a:br>
+              <a:rPr sz="1200" dirty="0">
+                <a:solidFill>
+                  <a:schemeClr val="bg1"/>
+                </a:solidFill>
+              </a:rPr>
+            </a:br>
+            <a:br>
+              <a:rPr sz="1200" dirty="0">
+                <a:solidFill>
+                  <a:schemeClr val="bg1"/>
+                </a:solidFill>
+              </a:rPr>
+            </a:br>
+            <a:r>
+              <a:rPr sz="1200" dirty="0">
+                <a:solidFill>
+                  <a:schemeClr val="bg1"/>
+                </a:solidFill>
+              </a:rPr>
               <a:t>  fetch('https://servicodados.ibge.gov.br/.../municipios', {</a:t>
             </a:r>
-            <a:br/>
-            <a:r>
-              <a:t>    signal: controlador.signal // Evita memory leak</a:t>
-            </a:r>
-            <a:br/>
-            <a:r>
+            <a:br>
+              <a:rPr sz="1200" dirty="0">
+                <a:solidFill>
+                  <a:schemeClr val="bg1"/>
+                </a:solidFill>
+              </a:rPr>
+            </a:br>
+            <a:r>
+              <a:rPr sz="1200" dirty="0">
+                <a:solidFill>
+                  <a:schemeClr val="bg1"/>
+                </a:solidFill>
+              </a:rPr>
+              <a:t>    signal: </a:t>
+            </a:r>
+            <a:r>
+              <a:rPr sz="1200" dirty="0" err="1">
+                <a:solidFill>
+                  <a:schemeClr val="bg1"/>
+                </a:solidFill>
+              </a:rPr>
+              <a:t>controlador.signal</a:t>
+            </a:r>
+            <a:r>
+              <a:rPr sz="1200" dirty="0">
+                <a:solidFill>
+                  <a:schemeClr val="bg1"/>
+                </a:solidFill>
+              </a:rPr>
+              <a:t> // Evita memory leak</a:t>
+            </a:r>
+            <a:br>
+              <a:rPr sz="1200" dirty="0">
+                <a:solidFill>
+                  <a:schemeClr val="bg1"/>
+                </a:solidFill>
+              </a:rPr>
+            </a:br>
+            <a:r>
+              <a:rPr sz="1200" dirty="0">
+                <a:solidFill>
+                  <a:schemeClr val="bg1"/>
+                </a:solidFill>
+              </a:rPr>
               <a:t>  })</a:t>
             </a:r>
-            <a:br/>
-            <a:r>
+            <a:br>
+              <a:rPr sz="1200" dirty="0">
+                <a:solidFill>
+                  <a:schemeClr val="bg1"/>
+                </a:solidFill>
+              </a:rPr>
+            </a:br>
+            <a:r>
+              <a:rPr sz="1200" dirty="0">
+                <a:solidFill>
+                  <a:schemeClr val="bg1"/>
+                </a:solidFill>
+              </a:rPr>
               <a:t>    .then(res =&gt; {</a:t>
             </a:r>
-            <a:br/>
-            <a:r>
-              <a:t>      if (!res.ok) throw new Error('Falha na resposta');</a:t>
-            </a:r>
-            <a:br/>
-            <a:r>
-              <a:t>      return res.json(); // Converte fluxo em JSON</a:t>
-            </a:r>
-            <a:br/>
-            <a:r>
+            <a:br>
+              <a:rPr sz="1200" dirty="0">
+                <a:solidFill>
+                  <a:schemeClr val="bg1"/>
+                </a:solidFill>
+              </a:rPr>
+            </a:br>
+            <a:r>
+              <a:rPr sz="1200" dirty="0">
+                <a:solidFill>
+                  <a:schemeClr val="bg1"/>
+                </a:solidFill>
+              </a:rPr>
+              <a:t>      if (!</a:t>
+            </a:r>
+            <a:r>
+              <a:rPr sz="1200" dirty="0" err="1">
+                <a:solidFill>
+                  <a:schemeClr val="bg1"/>
+                </a:solidFill>
+              </a:rPr>
+              <a:t>res.ok</a:t>
+            </a:r>
+            <a:r>
+              <a:rPr sz="1200" dirty="0">
+                <a:solidFill>
+                  <a:schemeClr val="bg1"/>
+                </a:solidFill>
+              </a:rPr>
+              <a:t>) throw new Error('Falha </a:t>
+            </a:r>
+            <a:r>
+              <a:rPr sz="1200" dirty="0" err="1">
+                <a:solidFill>
+                  <a:schemeClr val="bg1"/>
+                </a:solidFill>
+              </a:rPr>
+              <a:t>na</a:t>
+            </a:r>
+            <a:r>
+              <a:rPr sz="1200" dirty="0">
+                <a:solidFill>
+                  <a:schemeClr val="bg1"/>
+                </a:solidFill>
+              </a:rPr>
+              <a:t> </a:t>
+            </a:r>
+            <a:r>
+              <a:rPr sz="1200" dirty="0" err="1">
+                <a:solidFill>
+                  <a:schemeClr val="bg1"/>
+                </a:solidFill>
+              </a:rPr>
+              <a:t>resposta</a:t>
+            </a:r>
+            <a:r>
+              <a:rPr sz="1200" dirty="0">
+                <a:solidFill>
+                  <a:schemeClr val="bg1"/>
+                </a:solidFill>
+              </a:rPr>
+              <a:t>');</a:t>
+            </a:r>
+            <a:br>
+              <a:rPr sz="1200" dirty="0">
+                <a:solidFill>
+                  <a:schemeClr val="bg1"/>
+                </a:solidFill>
+              </a:rPr>
+            </a:br>
+            <a:r>
+              <a:rPr sz="1200" dirty="0">
+                <a:solidFill>
+                  <a:schemeClr val="bg1"/>
+                </a:solidFill>
+              </a:rPr>
+              <a:t>      return </a:t>
+            </a:r>
+            <a:r>
+              <a:rPr sz="1200" dirty="0" err="1">
+                <a:solidFill>
+                  <a:schemeClr val="bg1"/>
+                </a:solidFill>
+              </a:rPr>
+              <a:t>res.json</a:t>
+            </a:r>
+            <a:r>
+              <a:rPr sz="1200" dirty="0">
+                <a:solidFill>
+                  <a:schemeClr val="bg1"/>
+                </a:solidFill>
+              </a:rPr>
+              <a:t>(); // </a:t>
+            </a:r>
+            <a:r>
+              <a:rPr sz="1200" dirty="0" err="1">
+                <a:solidFill>
+                  <a:schemeClr val="bg1"/>
+                </a:solidFill>
+              </a:rPr>
+              <a:t>Converte</a:t>
+            </a:r>
+            <a:r>
+              <a:rPr sz="1200" dirty="0">
+                <a:solidFill>
+                  <a:schemeClr val="bg1"/>
+                </a:solidFill>
+              </a:rPr>
+              <a:t> </a:t>
+            </a:r>
+            <a:r>
+              <a:rPr sz="1200" dirty="0" err="1">
+                <a:solidFill>
+                  <a:schemeClr val="bg1"/>
+                </a:solidFill>
+              </a:rPr>
+              <a:t>fluxo</a:t>
+            </a:r>
+            <a:r>
+              <a:rPr sz="1200" dirty="0">
+                <a:solidFill>
+                  <a:schemeClr val="bg1"/>
+                </a:solidFill>
+              </a:rPr>
+              <a:t> </a:t>
+            </a:r>
+            <a:r>
+              <a:rPr sz="1200" dirty="0" err="1">
+                <a:solidFill>
+                  <a:schemeClr val="bg1"/>
+                </a:solidFill>
+              </a:rPr>
+              <a:t>em</a:t>
+            </a:r>
+            <a:r>
+              <a:rPr sz="1200" dirty="0">
+                <a:solidFill>
+                  <a:schemeClr val="bg1"/>
+                </a:solidFill>
+              </a:rPr>
+              <a:t> JSON</a:t>
+            </a:r>
+            <a:br>
+              <a:rPr sz="1200" dirty="0">
+                <a:solidFill>
+                  <a:schemeClr val="bg1"/>
+                </a:solidFill>
+              </a:rPr>
+            </a:br>
+            <a:r>
+              <a:rPr sz="1200" dirty="0">
+                <a:solidFill>
+                  <a:schemeClr val="bg1"/>
+                </a:solidFill>
+              </a:rPr>
               <a:t>    })</a:t>
             </a:r>
-            <a:br/>
-            <a:r>
-              <a:t>    .then(dados =&gt; setMunicipiosIbge(dados))</a:t>
-            </a:r>
-            <a:br/>
-            <a:r>
+            <a:br>
+              <a:rPr sz="1200" dirty="0">
+                <a:solidFill>
+                  <a:schemeClr val="bg1"/>
+                </a:solidFill>
+              </a:rPr>
+            </a:br>
+            <a:r>
+              <a:rPr sz="1200" dirty="0">
+                <a:solidFill>
+                  <a:schemeClr val="bg1"/>
+                </a:solidFill>
+              </a:rPr>
+              <a:t>    .then(dados =&gt; </a:t>
+            </a:r>
+            <a:r>
+              <a:rPr sz="1200" dirty="0" err="1">
+                <a:solidFill>
+                  <a:schemeClr val="bg1"/>
+                </a:solidFill>
+              </a:rPr>
+              <a:t>setMunicipiosIbge</a:t>
+            </a:r>
+            <a:r>
+              <a:rPr sz="1200" dirty="0">
+                <a:solidFill>
+                  <a:schemeClr val="bg1"/>
+                </a:solidFill>
+              </a:rPr>
+              <a:t>(dados))</a:t>
+            </a:r>
+            <a:br>
+              <a:rPr sz="1200" dirty="0">
+                <a:solidFill>
+                  <a:schemeClr val="bg1"/>
+                </a:solidFill>
+              </a:rPr>
+            </a:br>
+            <a:r>
+              <a:rPr sz="1200" dirty="0">
+                <a:solidFill>
+                  <a:schemeClr val="bg1"/>
+                </a:solidFill>
+              </a:rPr>
               <a:t>    .catch(err =&gt; {</a:t>
             </a:r>
-            <a:br/>
-            <a:r>
-              <a:t>      if (err.name !== 'AbortError')</a:t>
-            </a:r>
-            <a:br/>
-            <a:r>
-              <a:t>        setErro('Sinal instável. Tente novamente.');</a:t>
-            </a:r>
-            <a:br/>
-            <a:r>
+            <a:br>
+              <a:rPr sz="1200" dirty="0">
+                <a:solidFill>
+                  <a:schemeClr val="bg1"/>
+                </a:solidFill>
+              </a:rPr>
+            </a:br>
+            <a:r>
+              <a:rPr sz="1200" dirty="0">
+                <a:solidFill>
+                  <a:schemeClr val="bg1"/>
+                </a:solidFill>
+              </a:rPr>
+              <a:t>      if (err.name !== '</a:t>
+            </a:r>
+            <a:r>
+              <a:rPr sz="1200" dirty="0" err="1">
+                <a:solidFill>
+                  <a:schemeClr val="bg1"/>
+                </a:solidFill>
+              </a:rPr>
+              <a:t>AbortError</a:t>
+            </a:r>
+            <a:r>
+              <a:rPr sz="1200" dirty="0">
+                <a:solidFill>
+                  <a:schemeClr val="bg1"/>
+                </a:solidFill>
+              </a:rPr>
+              <a:t>')</a:t>
+            </a:r>
+            <a:br>
+              <a:rPr sz="1200" dirty="0">
+                <a:solidFill>
+                  <a:schemeClr val="bg1"/>
+                </a:solidFill>
+              </a:rPr>
+            </a:br>
+            <a:r>
+              <a:rPr sz="1200" dirty="0">
+                <a:solidFill>
+                  <a:schemeClr val="bg1"/>
+                </a:solidFill>
+              </a:rPr>
+              <a:t>        </a:t>
+            </a:r>
+            <a:r>
+              <a:rPr sz="1200" dirty="0" err="1">
+                <a:solidFill>
+                  <a:schemeClr val="bg1"/>
+                </a:solidFill>
+              </a:rPr>
+              <a:t>setErro</a:t>
+            </a:r>
+            <a:r>
+              <a:rPr sz="1200" dirty="0">
+                <a:solidFill>
+                  <a:schemeClr val="bg1"/>
+                </a:solidFill>
+              </a:rPr>
+              <a:t>('</a:t>
+            </a:r>
+            <a:r>
+              <a:rPr sz="1200" dirty="0" err="1">
+                <a:solidFill>
+                  <a:schemeClr val="bg1"/>
+                </a:solidFill>
+              </a:rPr>
+              <a:t>Sinal</a:t>
+            </a:r>
+            <a:r>
+              <a:rPr sz="1200" dirty="0">
+                <a:solidFill>
+                  <a:schemeClr val="bg1"/>
+                </a:solidFill>
+              </a:rPr>
+              <a:t> </a:t>
+            </a:r>
+            <a:r>
+              <a:rPr sz="1200" dirty="0" err="1">
+                <a:solidFill>
+                  <a:schemeClr val="bg1"/>
+                </a:solidFill>
+              </a:rPr>
+              <a:t>instável</a:t>
+            </a:r>
+            <a:r>
+              <a:rPr sz="1200" dirty="0">
+                <a:solidFill>
+                  <a:schemeClr val="bg1"/>
+                </a:solidFill>
+              </a:rPr>
+              <a:t>. </a:t>
+            </a:r>
+            <a:r>
+              <a:rPr sz="1200" dirty="0" err="1">
+                <a:solidFill>
+                  <a:schemeClr val="bg1"/>
+                </a:solidFill>
+              </a:rPr>
+              <a:t>Tente</a:t>
+            </a:r>
+            <a:r>
+              <a:rPr sz="1200" dirty="0">
+                <a:solidFill>
+                  <a:schemeClr val="bg1"/>
+                </a:solidFill>
+              </a:rPr>
+              <a:t> </a:t>
+            </a:r>
+            <a:r>
+              <a:rPr sz="1200" dirty="0" err="1">
+                <a:solidFill>
+                  <a:schemeClr val="bg1"/>
+                </a:solidFill>
+              </a:rPr>
+              <a:t>novamente</a:t>
+            </a:r>
+            <a:r>
+              <a:rPr sz="1200" dirty="0">
+                <a:solidFill>
+                  <a:schemeClr val="bg1"/>
+                </a:solidFill>
+              </a:rPr>
+              <a:t>.');</a:t>
+            </a:r>
+            <a:br>
+              <a:rPr sz="1200" dirty="0">
+                <a:solidFill>
+                  <a:schemeClr val="bg1"/>
+                </a:solidFill>
+              </a:rPr>
+            </a:br>
+            <a:r>
+              <a:rPr sz="1200" dirty="0">
+                <a:solidFill>
+                  <a:schemeClr val="bg1"/>
+                </a:solidFill>
+              </a:rPr>
               <a:t>    })</a:t>
             </a:r>
-            <a:br/>
-            <a:r>
-              <a:t>    .finally(() =&gt; setCarregando(false));</a:t>
-            </a:r>
-            <a:br/>
-            <a:br/>
-            <a:r>
-              <a:t>  return () =&gt; controlador.abort();</a:t>
-            </a:r>
-            <a:br/>
-            <a:r>
+            <a:br>
+              <a:rPr sz="1200" dirty="0">
+                <a:solidFill>
+                  <a:schemeClr val="bg1"/>
+                </a:solidFill>
+              </a:rPr>
+            </a:br>
+            <a:r>
+              <a:rPr sz="1200" dirty="0">
+                <a:solidFill>
+                  <a:schemeClr val="bg1"/>
+                </a:solidFill>
+              </a:rPr>
+              <a:t>    .finally(() =&gt; </a:t>
+            </a:r>
+            <a:r>
+              <a:rPr sz="1200" dirty="0" err="1">
+                <a:solidFill>
+                  <a:schemeClr val="bg1"/>
+                </a:solidFill>
+              </a:rPr>
+              <a:t>setCarregando</a:t>
+            </a:r>
+            <a:r>
+              <a:rPr sz="1200" dirty="0">
+                <a:solidFill>
+                  <a:schemeClr val="bg1"/>
+                </a:solidFill>
+              </a:rPr>
+              <a:t>(false));</a:t>
+            </a:r>
+            <a:br>
+              <a:rPr sz="1200" dirty="0">
+                <a:solidFill>
+                  <a:schemeClr val="bg1"/>
+                </a:solidFill>
+              </a:rPr>
+            </a:br>
+            <a:br>
+              <a:rPr sz="1400" dirty="0">
+                <a:solidFill>
+                  <a:schemeClr val="bg1"/>
+                </a:solidFill>
+              </a:rPr>
+            </a:br>
+            <a:r>
+              <a:rPr sz="1400" dirty="0">
+                <a:solidFill>
+                  <a:schemeClr val="bg1"/>
+                </a:solidFill>
+              </a:rPr>
+              <a:t>  return () =&gt; </a:t>
+            </a:r>
+            <a:r>
+              <a:rPr sz="1400" dirty="0" err="1">
+                <a:solidFill>
+                  <a:schemeClr val="bg1"/>
+                </a:solidFill>
+              </a:rPr>
+              <a:t>controlador.abort</a:t>
+            </a:r>
+            <a:r>
+              <a:rPr sz="1400" dirty="0">
+                <a:solidFill>
+                  <a:schemeClr val="bg1"/>
+                </a:solidFill>
+              </a:rPr>
+              <a:t>();</a:t>
+            </a:r>
+            <a:br>
+              <a:rPr sz="1400" dirty="0">
+                <a:solidFill>
+                  <a:schemeClr val="bg1"/>
+                </a:solidFill>
+              </a:rPr>
+            </a:br>
+            <a:r>
+              <a:rPr sz="1400" dirty="0">
+                <a:solidFill>
+                  <a:schemeClr val="bg1"/>
+                </a:solidFill>
+              </a:rPr>
               <a:t>}, []);</a:t>
             </a:r>
           </a:p>
@@ -9108,6 +13135,7 @@
           <a:lstStyle/>
           <a:p>
             <a:pPr algn="ctr"/>
+            <a:endParaRPr/>
           </a:p>
         </p:txBody>
       </p:sp>
@@ -9151,6 +13179,7 @@
           <a:lstStyle/>
           <a:p>
             <a:pPr algn="ctr"/>
+            <a:endParaRPr/>
           </a:p>
         </p:txBody>
       </p:sp>
@@ -9163,7 +13192,7 @@
         <p:spPr>
           <a:xfrm>
             <a:off x="6537960" y="1417320"/>
-            <a:ext cx="4663440" cy="1920240"/>
+            <a:ext cx="4663440" cy="2185214"/>
           </a:xfrm>
           <a:prstGeom prst="rect">
             <a:avLst/>
@@ -9176,7 +13205,7 @@
           </a:bodyPr>
           <a:lstStyle/>
           <a:p>
-            <a:pPr>
+            <a:pPr algn="ctr">
               <a:defRPr sz="1400" b="1">
                 <a:solidFill>
                   <a:srgbClr val="00873E"/>
@@ -9185,21 +13214,214 @@
               </a:defRPr>
             </a:pPr>
             <a:r>
-              <a:t>O Voo da Esperança (mapa.flyTo)</a:t>
-            </a:r>
-          </a:p>
-          <a:p>
-            <a:br/>
-            <a:pPr>
-              <a:defRPr sz="1150">
-                <a:solidFill>
-                  <a:srgbClr val="1E293B"/>
-                </a:solidFill>
-                <a:latin typeface="Segoe UI"/>
-              </a:defRPr>
-            </a:pPr>
-            <a:r>
-              <a:t>Usamos o hook useMemo para cruzar a lista oficial do IBGE com as coordenadas geográficas de cada cidade parceira. Ao clicar no card de Coroatá ou Codó, o mapa faz uma transição suave de câmera até a cidade, com marcador e detalhes da distância de Timbiras.</a:t>
+              <a:rPr dirty="0"/>
+              <a:t>O Voo da Esperança (</a:t>
+            </a:r>
+            <a:r>
+              <a:rPr dirty="0" err="1"/>
+              <a:t>mapa.flyTo</a:t>
+            </a:r>
+            <a:r>
+              <a:rPr dirty="0"/>
+              <a:t>)</a:t>
+            </a:r>
+          </a:p>
+          <a:p>
+            <a:pPr algn="just"/>
+            <a:br>
+              <a:rPr dirty="0"/>
+            </a:br>
+            <a:r>
+              <a:rPr dirty="0" err="1"/>
+              <a:t>Usamos</a:t>
+            </a:r>
+            <a:r>
+              <a:rPr dirty="0"/>
+              <a:t> o hook </a:t>
+            </a:r>
+            <a:r>
+              <a:rPr dirty="0" err="1"/>
+              <a:t>useMemo</a:t>
+            </a:r>
+            <a:r>
+              <a:rPr dirty="0"/>
+              <a:t> para </a:t>
+            </a:r>
+            <a:r>
+              <a:rPr dirty="0" err="1"/>
+              <a:t>cruzar</a:t>
+            </a:r>
+            <a:r>
+              <a:rPr dirty="0"/>
+              <a:t> a </a:t>
+            </a:r>
+            <a:r>
+              <a:rPr dirty="0" err="1"/>
+              <a:t>lista</a:t>
+            </a:r>
+            <a:r>
+              <a:rPr dirty="0"/>
+              <a:t> </a:t>
+            </a:r>
+            <a:r>
+              <a:rPr dirty="0" err="1"/>
+              <a:t>oficial</a:t>
+            </a:r>
+            <a:r>
+              <a:rPr dirty="0"/>
+              <a:t> do IBGE com as </a:t>
+            </a:r>
+            <a:r>
+              <a:rPr dirty="0" err="1"/>
+              <a:t>coordenadas</a:t>
+            </a:r>
+            <a:r>
+              <a:rPr dirty="0"/>
+              <a:t> </a:t>
+            </a:r>
+            <a:r>
+              <a:rPr dirty="0" err="1"/>
+              <a:t>geográficas</a:t>
+            </a:r>
+            <a:r>
+              <a:rPr dirty="0"/>
+              <a:t> de </a:t>
+            </a:r>
+            <a:r>
+              <a:rPr dirty="0" err="1"/>
+              <a:t>cada</a:t>
+            </a:r>
+            <a:r>
+              <a:rPr dirty="0"/>
+              <a:t> </a:t>
+            </a:r>
+            <a:r>
+              <a:rPr dirty="0" err="1"/>
+              <a:t>cidade</a:t>
+            </a:r>
+            <a:r>
+              <a:rPr dirty="0"/>
+              <a:t> </a:t>
+            </a:r>
+            <a:r>
+              <a:rPr dirty="0" err="1"/>
+              <a:t>parceira</a:t>
+            </a:r>
+            <a:r>
+              <a:rPr dirty="0"/>
+              <a:t>. Ao </a:t>
+            </a:r>
+            <a:r>
+              <a:rPr dirty="0" err="1"/>
+              <a:t>clicar</a:t>
+            </a:r>
+            <a:r>
+              <a:rPr dirty="0"/>
+              <a:t> no card de </a:t>
+            </a:r>
+            <a:r>
+              <a:rPr dirty="0" err="1"/>
+              <a:t>Coroatá</a:t>
+            </a:r>
+            <a:r>
+              <a:rPr dirty="0"/>
+              <a:t> </a:t>
+            </a:r>
+            <a:r>
+              <a:rPr dirty="0" err="1"/>
+              <a:t>ou</a:t>
+            </a:r>
+            <a:r>
+              <a:rPr dirty="0"/>
+              <a:t> </a:t>
+            </a:r>
+            <a:r>
+              <a:rPr dirty="0" err="1"/>
+              <a:t>Codó</a:t>
+            </a:r>
+            <a:r>
+              <a:rPr dirty="0"/>
+              <a:t>, o </a:t>
+            </a:r>
+            <a:r>
+              <a:rPr dirty="0" err="1"/>
+              <a:t>mapa</a:t>
+            </a:r>
+            <a:r>
+              <a:rPr dirty="0"/>
+              <a:t> </a:t>
+            </a:r>
+            <a:r>
+              <a:rPr dirty="0" err="1"/>
+              <a:t>faz</a:t>
+            </a:r>
+            <a:r>
+              <a:rPr dirty="0"/>
+              <a:t> </a:t>
+            </a:r>
+            <a:r>
+              <a:rPr dirty="0" err="1"/>
+              <a:t>uma</a:t>
+            </a:r>
+            <a:r>
+              <a:rPr dirty="0"/>
+              <a:t> </a:t>
+            </a:r>
+            <a:r>
+              <a:rPr dirty="0" err="1"/>
+              <a:t>transição</a:t>
+            </a:r>
+            <a:r>
+              <a:rPr dirty="0"/>
+              <a:t> suave de </a:t>
+            </a:r>
+            <a:r>
+              <a:rPr dirty="0" err="1"/>
+              <a:t>câmera</a:t>
+            </a:r>
+            <a:r>
+              <a:rPr dirty="0"/>
+              <a:t> </a:t>
+            </a:r>
+            <a:r>
+              <a:rPr dirty="0" err="1"/>
+              <a:t>até</a:t>
+            </a:r>
+            <a:r>
+              <a:rPr dirty="0"/>
+              <a:t> a </a:t>
+            </a:r>
+            <a:r>
+              <a:rPr dirty="0" err="1"/>
+              <a:t>cidade</a:t>
+            </a:r>
+            <a:r>
+              <a:rPr dirty="0"/>
+              <a:t>, com </a:t>
+            </a:r>
+            <a:r>
+              <a:rPr dirty="0" err="1"/>
+              <a:t>marcador</a:t>
+            </a:r>
+            <a:r>
+              <a:rPr dirty="0"/>
+              <a:t> e </a:t>
+            </a:r>
+            <a:r>
+              <a:rPr dirty="0" err="1"/>
+              <a:t>detalhes</a:t>
+            </a:r>
+            <a:r>
+              <a:rPr dirty="0"/>
+              <a:t> da </a:t>
+            </a:r>
+            <a:r>
+              <a:rPr dirty="0" err="1"/>
+              <a:t>distância</a:t>
+            </a:r>
+            <a:r>
+              <a:rPr dirty="0"/>
+              <a:t> de Timbiras.</a:t>
             </a:r>
           </a:p>
         </p:txBody>
@@ -9246,6 +13468,7 @@
           <a:lstStyle/>
           <a:p>
             <a:pPr algn="ctr"/>
+            <a:endParaRPr/>
           </a:p>
         </p:txBody>
       </p:sp>
@@ -9289,6 +13512,7 @@
           <a:lstStyle/>
           <a:p>
             <a:pPr algn="ctr"/>
+            <a:endParaRPr/>
           </a:p>
         </p:txBody>
       </p:sp>
@@ -9301,7 +13525,7 @@
         <p:spPr>
           <a:xfrm>
             <a:off x="6537960" y="3931920"/>
-            <a:ext cx="4663440" cy="1920240"/>
+            <a:ext cx="4663440" cy="1631216"/>
           </a:xfrm>
           <a:prstGeom prst="rect">
             <a:avLst/>
@@ -9314,7 +13538,7 @@
           </a:bodyPr>
           <a:lstStyle/>
           <a:p>
-            <a:pPr>
+            <a:pPr algn="ctr">
               <a:defRPr sz="1400" b="1">
                 <a:solidFill>
                   <a:srgbClr val="B45309"/>
@@ -9323,21 +13547,159 @@
               </a:defRPr>
             </a:pPr>
             <a:r>
-              <a:t>Busca Ampla por Qualquer Cidade</a:t>
-            </a:r>
-          </a:p>
-          <a:p>
-            <a:br/>
-            <a:pPr>
-              <a:defRPr sz="1150">
-                <a:solidFill>
-                  <a:srgbClr val="1E293B"/>
-                </a:solidFill>
-                <a:latin typeface="Segoe UI"/>
-              </a:defRPr>
-            </a:pPr>
-            <a:r>
-              <a:t>Além das cidades dos Cocais, o usuário pode selecionar qualquer município do Maranhão no dropdown dinâmico para localizar e planejar novos polos de expansão solidária.</a:t>
+              <a:rPr sz="1600" dirty="0" err="1"/>
+              <a:t>Busca</a:t>
+            </a:r>
+            <a:r>
+              <a:rPr sz="1600" dirty="0"/>
+              <a:t> </a:t>
+            </a:r>
+            <a:r>
+              <a:rPr sz="1600" dirty="0" err="1"/>
+              <a:t>Ampla</a:t>
+            </a:r>
+            <a:r>
+              <a:rPr sz="1600" dirty="0"/>
+              <a:t> </a:t>
+            </a:r>
+            <a:r>
+              <a:rPr sz="1600" dirty="0" err="1"/>
+              <a:t>por</a:t>
+            </a:r>
+            <a:r>
+              <a:rPr sz="1600" dirty="0"/>
+              <a:t> </a:t>
+            </a:r>
+            <a:r>
+              <a:rPr sz="1600" dirty="0" err="1"/>
+              <a:t>Qualquer</a:t>
+            </a:r>
+            <a:r>
+              <a:rPr sz="1600" dirty="0"/>
+              <a:t> </a:t>
+            </a:r>
+            <a:r>
+              <a:rPr sz="1600" dirty="0" err="1"/>
+              <a:t>Cidade</a:t>
+            </a:r>
+            <a:endParaRPr sz="1600" dirty="0"/>
+          </a:p>
+          <a:p>
+            <a:pPr algn="just"/>
+            <a:br>
+              <a:rPr dirty="0"/>
+            </a:br>
+            <a:r>
+              <a:rPr dirty="0" err="1"/>
+              <a:t>Além</a:t>
+            </a:r>
+            <a:r>
+              <a:rPr dirty="0"/>
+              <a:t> das </a:t>
+            </a:r>
+            <a:r>
+              <a:rPr dirty="0" err="1"/>
+              <a:t>cidades</a:t>
+            </a:r>
+            <a:r>
+              <a:rPr dirty="0"/>
+              <a:t> dos </a:t>
+            </a:r>
+            <a:r>
+              <a:rPr dirty="0" err="1"/>
+              <a:t>Cocais</a:t>
+            </a:r>
+            <a:r>
+              <a:rPr dirty="0"/>
+              <a:t>, o </a:t>
+            </a:r>
+            <a:r>
+              <a:rPr dirty="0" err="1"/>
+              <a:t>usuário</a:t>
+            </a:r>
+            <a:r>
+              <a:rPr dirty="0"/>
+              <a:t> </a:t>
+            </a:r>
+            <a:r>
+              <a:rPr dirty="0" err="1"/>
+              <a:t>pode</a:t>
+            </a:r>
+            <a:r>
+              <a:rPr dirty="0"/>
+              <a:t> </a:t>
+            </a:r>
+            <a:r>
+              <a:rPr dirty="0" err="1"/>
+              <a:t>selecionar</a:t>
+            </a:r>
+            <a:r>
+              <a:rPr dirty="0"/>
+              <a:t> </a:t>
+            </a:r>
+            <a:r>
+              <a:rPr dirty="0" err="1"/>
+              <a:t>qualquer</a:t>
+            </a:r>
+            <a:r>
+              <a:rPr dirty="0"/>
+              <a:t> </a:t>
+            </a:r>
+            <a:r>
+              <a:rPr dirty="0" err="1"/>
+              <a:t>município</a:t>
+            </a:r>
+            <a:r>
+              <a:rPr dirty="0"/>
+              <a:t> do Maranhão no dropdown </a:t>
+            </a:r>
+            <a:r>
+              <a:rPr dirty="0" err="1"/>
+              <a:t>dinâmico</a:t>
+            </a:r>
+            <a:r>
+              <a:rPr dirty="0"/>
+              <a:t> para </a:t>
+            </a:r>
+            <a:r>
+              <a:rPr dirty="0" err="1"/>
+              <a:t>localizar</a:t>
+            </a:r>
+            <a:r>
+              <a:rPr dirty="0"/>
+              <a:t> e </a:t>
+            </a:r>
+            <a:r>
+              <a:rPr dirty="0" err="1"/>
+              <a:t>planejar</a:t>
+            </a:r>
+            <a:r>
+              <a:rPr dirty="0"/>
+              <a:t> </a:t>
+            </a:r>
+            <a:r>
+              <a:rPr dirty="0" err="1"/>
+              <a:t>novos</a:t>
+            </a:r>
+            <a:r>
+              <a:rPr dirty="0"/>
+              <a:t> polos de </a:t>
+            </a:r>
+            <a:r>
+              <a:rPr dirty="0" err="1"/>
+              <a:t>expansão</a:t>
+            </a:r>
+            <a:r>
+              <a:rPr dirty="0"/>
+              <a:t> </a:t>
+            </a:r>
+            <a:r>
+              <a:rPr dirty="0" err="1"/>
+              <a:t>solidária</a:t>
+            </a:r>
+            <a:r>
+              <a:rPr dirty="0"/>
+              <a:t>.</a:t>
             </a:r>
           </a:p>
         </p:txBody>
@@ -9351,7 +13713,7 @@
 </file>
 
 <file path=ppt/slides/slide7.xml><?xml version="1.0" encoding="utf-8"?>
-<p:sld xmlns:a="http://schemas.openxmlformats.org/drawingml/2006/main" xmlns:p="http://schemas.openxmlformats.org/presentationml/2006/main" xmlns:r="http://schemas.openxmlformats.org/officeDocument/2006/relationships">
+<p:sld xmlns:a="http://schemas.openxmlformats.org/drawingml/2006/main" xmlns:r="http://schemas.openxmlformats.org/officeDocument/2006/relationships" xmlns:p="http://schemas.openxmlformats.org/presentationml/2006/main">
   <p:cSld>
     <p:spTree>
       <p:nvGrpSpPr>
@@ -9359,7 +13721,14 @@
         <p:cNvGrpSpPr/>
         <p:nvPr/>
       </p:nvGrpSpPr>
-      <p:grpSpPr/>
+      <p:grpSpPr>
+        <a:xfrm>
+          <a:off x="0" y="0"/>
+          <a:ext cx="0" cy="0"/>
+          <a:chOff x="0" y="0"/>
+          <a:chExt cx="0" cy="0"/>
+        </a:xfrm>
+      </p:grpSpPr>
       <p:sp>
         <p:nvSpPr>
           <p:cNvPr id="2" name="TextBox 1"/>
@@ -9434,7 +13803,7 @@
           </a:fontRef>
         </p:style>
         <p:txBody>
-          <a:bodyPr rtlCol="0" anchor="ctr" tIns="54864"/>
+          <a:bodyPr tIns="54864" rtlCol="0" anchor="ctr"/>
           <a:lstStyle/>
           <a:p>
             <a:pPr algn="ctr">
@@ -9491,6 +13860,7 @@
           <a:lstStyle/>
           <a:p>
             <a:pPr algn="ctr"/>
+            <a:endParaRPr/>
           </a:p>
         </p:txBody>
       </p:sp>
@@ -9534,6 +13904,7 @@
           <a:lstStyle/>
           <a:p>
             <a:pPr algn="ctr"/>
+            <a:endParaRPr/>
           </a:p>
         </p:txBody>
       </p:sp>
@@ -9651,6 +14022,7 @@
           <a:lstStyle/>
           <a:p>
             <a:pPr algn="ctr"/>
+            <a:endParaRPr/>
           </a:p>
         </p:txBody>
       </p:sp>
@@ -9663,7 +14035,7 @@
         <p:spPr>
           <a:xfrm>
             <a:off x="960120" y="1417320"/>
-            <a:ext cx="4114800" cy="4434840"/>
+            <a:ext cx="4114800" cy="3847207"/>
           </a:xfrm>
           <a:prstGeom prst="rect">
             <a:avLst/>
@@ -9685,65 +14057,250 @@
               </a:defRPr>
             </a:pPr>
             <a:r>
-              <a:t>Árvore Modular de Componentes</a:t>
-            </a:r>
-          </a:p>
-          <a:p>
-            <a:br/>
-            <a:pPr>
-              <a:defRPr sz="1000">
-                <a:solidFill>
-                  <a:srgbClr val="1E293B"/>
-                </a:solidFill>
-                <a:latin typeface="Consolas"/>
-              </a:defRPr>
-            </a:pPr>
-            <a:r>
-              <a:t>App.jsx (Orquestrador Global)</a:t>
-            </a:r>
-            <a:br/>
-            <a:r>
-              <a:t>├── Navbar.jsx (Menu &amp; Mobile Toggle)</a:t>
-            </a:r>
-            <a:br/>
-            <a:r>
-              <a:t>├── Hero.jsx (Banner &amp; Metas ao Vivo)</a:t>
-            </a:r>
-            <a:br/>
-            <a:r>
-              <a:t>├── ConsumoApi.jsx (IBGE &amp; Leaflet)</a:t>
-            </a:r>
-            <a:br/>
-            <a:r>
-              <a:t>├── SobreCompleto.jsx (História)</a:t>
-            </a:r>
-            <a:br/>
-            <a:r>
-              <a:t>├── ComoFunciona.jsx (4 Passos)</a:t>
-            </a:r>
-            <a:br/>
-            <a:r>
-              <a:t>├── Fluxo.jsx (Percurso do Alimento)</a:t>
-            </a:r>
-            <a:br/>
-            <a:r>
-              <a:t>├── PrestacaoContas.jsx (Bairros)</a:t>
-            </a:r>
-            <a:br/>
-            <a:r>
-              <a:t>├── Doar.jsx (Chips, PIX &amp; Recibo)</a:t>
-            </a:r>
-            <a:br/>
-            <a:r>
-              <a:t>├── PlayerAudio.jsx (Trilha Sonora)</a:t>
-            </a:r>
-            <a:br/>
-            <a:r>
-              <a:t>├── Contato.jsx (Ouvidoria Local)</a:t>
-            </a:r>
-            <a:br/>
-            <a:r>
-              <a:t>└── Footer.jsx (Créditos &amp; Links)</a:t>
+              <a:rPr sz="1600" dirty="0" err="1"/>
+              <a:t>Árvore</a:t>
+            </a:r>
+            <a:r>
+              <a:rPr sz="1600" dirty="0"/>
+              <a:t> Modular de </a:t>
+            </a:r>
+            <a:r>
+              <a:rPr sz="1600" dirty="0" err="1"/>
+              <a:t>Componentes</a:t>
+            </a:r>
+            <a:endParaRPr sz="1600" dirty="0"/>
+          </a:p>
+          <a:p>
+            <a:br>
+              <a:rPr dirty="0"/>
+            </a:br>
+            <a:r>
+              <a:rPr dirty="0" err="1"/>
+              <a:t>App.jsx</a:t>
+            </a:r>
+            <a:r>
+              <a:rPr dirty="0"/>
+              <a:t> (</a:t>
+            </a:r>
+            <a:r>
+              <a:rPr dirty="0" err="1"/>
+              <a:t>Orquestrador</a:t>
+            </a:r>
+            <a:r>
+              <a:rPr dirty="0"/>
+              <a:t> Global)</a:t>
+            </a:r>
+            <a:br>
+              <a:rPr dirty="0"/>
+            </a:br>
+            <a:r>
+              <a:rPr dirty="0"/>
+              <a:t>├ </a:t>
+            </a:r>
+            <a:r>
+              <a:rPr dirty="0" err="1"/>
+              <a:t>Navbar.jsx</a:t>
+            </a:r>
+            <a:r>
+              <a:rPr dirty="0"/>
+              <a:t> (Menu &amp; Mobile Toggle)</a:t>
+            </a:r>
+            <a:br>
+              <a:rPr dirty="0"/>
+            </a:br>
+            <a:r>
+              <a:rPr dirty="0"/>
+              <a:t>├ </a:t>
+            </a:r>
+            <a:r>
+              <a:rPr dirty="0" err="1"/>
+              <a:t>Hero.jsx</a:t>
+            </a:r>
+            <a:r>
+              <a:rPr dirty="0"/>
+              <a:t> (Banner &amp; Metas </a:t>
+            </a:r>
+            <a:r>
+              <a:rPr dirty="0" err="1"/>
+              <a:t>ao</a:t>
+            </a:r>
+            <a:r>
+              <a:rPr dirty="0"/>
+              <a:t> Vivo)</a:t>
+            </a:r>
+            <a:br>
+              <a:rPr dirty="0"/>
+            </a:br>
+            <a:r>
+              <a:rPr dirty="0"/>
+              <a:t>├── </a:t>
+            </a:r>
+            <a:r>
+              <a:rPr dirty="0" err="1"/>
+              <a:t>ConsumoApi.jsx</a:t>
+            </a:r>
+            <a:r>
+              <a:rPr dirty="0"/>
+              <a:t> (IBGE &amp; Leaflet)</a:t>
+            </a:r>
+            <a:br>
+              <a:rPr/>
+            </a:br>
+            <a:r>
+              <a:t>├ </a:t>
+            </a:r>
+            <a:r>
+              <a:rPr dirty="0" err="1"/>
+              <a:t>SobreCompleto.jsx</a:t>
+            </a:r>
+            <a:r>
+              <a:rPr dirty="0"/>
+              <a:t> (</a:t>
+            </a:r>
+            <a:r>
+              <a:rPr dirty="0" err="1"/>
+              <a:t>História</a:t>
+            </a:r>
+            <a:r>
+              <a:rPr dirty="0"/>
+              <a:t>)</a:t>
+            </a:r>
+            <a:br>
+              <a:rPr dirty="0"/>
+            </a:br>
+            <a:r>
+              <a:rPr dirty="0"/>
+              <a:t>├── </a:t>
+            </a:r>
+            <a:r>
+              <a:rPr dirty="0" err="1"/>
+              <a:t>ComoFunciona.jsx</a:t>
+            </a:r>
+            <a:r>
+              <a:rPr dirty="0"/>
+              <a:t> (4 Passos)</a:t>
+            </a:r>
+            <a:br>
+              <a:rPr dirty="0"/>
+            </a:br>
+            <a:r>
+              <a:rPr dirty="0"/>
+              <a:t>├── </a:t>
+            </a:r>
+            <a:r>
+              <a:rPr dirty="0" err="1"/>
+              <a:t>Fluxo.jsx</a:t>
+            </a:r>
+            <a:r>
+              <a:rPr dirty="0"/>
+              <a:t> (</a:t>
+            </a:r>
+            <a:r>
+              <a:rPr dirty="0" err="1"/>
+              <a:t>Percurso</a:t>
+            </a:r>
+            <a:r>
+              <a:rPr dirty="0"/>
+              <a:t> do Alimento)</a:t>
+            </a:r>
+            <a:br>
+              <a:rPr dirty="0"/>
+            </a:br>
+            <a:r>
+              <a:rPr dirty="0"/>
+              <a:t>├── </a:t>
+            </a:r>
+            <a:r>
+              <a:rPr dirty="0" err="1"/>
+              <a:t>PrestacaoContas.jsx</a:t>
+            </a:r>
+            <a:r>
+              <a:rPr dirty="0"/>
+              <a:t> (Bairros)</a:t>
+            </a:r>
+            <a:br>
+              <a:rPr dirty="0"/>
+            </a:br>
+            <a:r>
+              <a:rPr dirty="0"/>
+              <a:t>├── </a:t>
+            </a:r>
+            <a:r>
+              <a:rPr dirty="0" err="1"/>
+              <a:t>Doar.jsx</a:t>
+            </a:r>
+            <a:r>
+              <a:rPr dirty="0"/>
+              <a:t> (Chips, PIX &amp; </a:t>
+            </a:r>
+            <a:r>
+              <a:rPr dirty="0" err="1"/>
+              <a:t>Recibo</a:t>
+            </a:r>
+            <a:r>
+              <a:rPr dirty="0"/>
+              <a:t>)</a:t>
+            </a:r>
+            <a:br>
+              <a:rPr dirty="0"/>
+            </a:br>
+            <a:r>
+              <a:rPr dirty="0"/>
+              <a:t>├── </a:t>
+            </a:r>
+            <a:r>
+              <a:rPr dirty="0" err="1"/>
+              <a:t>PlayerAudio.jsx</a:t>
+            </a:r>
+            <a:r>
+              <a:rPr dirty="0"/>
+              <a:t> (Trilha Sonora)</a:t>
+            </a:r>
+            <a:br>
+              <a:rPr dirty="0"/>
+            </a:br>
+            <a:r>
+              <a:rPr dirty="0"/>
+              <a:t>├── </a:t>
+            </a:r>
+            <a:r>
+              <a:rPr dirty="0" err="1"/>
+              <a:t>Contato.jsx</a:t>
+            </a:r>
+            <a:r>
+              <a:rPr dirty="0"/>
+              <a:t> (</a:t>
+            </a:r>
+            <a:r>
+              <a:rPr dirty="0" err="1"/>
+              <a:t>Ouvidoria</a:t>
+            </a:r>
+            <a:r>
+              <a:rPr dirty="0"/>
+              <a:t> Local)</a:t>
+            </a:r>
+            <a:br>
+              <a:rPr dirty="0"/>
+            </a:br>
+            <a:r>
+              <a:rPr dirty="0"/>
+              <a:t>└── </a:t>
+            </a:r>
+            <a:r>
+              <a:rPr dirty="0" err="1"/>
+              <a:t>Footer.jsx</a:t>
+            </a:r>
+            <a:r>
+              <a:rPr dirty="0"/>
+              <a:t> (</a:t>
+            </a:r>
+            <a:r>
+              <a:rPr dirty="0" err="1"/>
+              <a:t>Créditos</a:t>
+            </a:r>
+            <a:r>
+              <a:rPr dirty="0"/>
+              <a:t> &amp; Links)</a:t>
             </a:r>
           </a:p>
         </p:txBody>
@@ -9790,6 +14347,7 @@
           <a:lstStyle/>
           <a:p>
             <a:pPr algn="ctr"/>
+            <a:endParaRPr/>
           </a:p>
         </p:txBody>
       </p:sp>
@@ -9833,6 +14391,7 @@
           <a:lstStyle/>
           <a:p>
             <a:pPr algn="ctr"/>
+            <a:endParaRPr/>
           </a:p>
         </p:txBody>
       </p:sp>
@@ -9845,7 +14404,7 @@
         <p:spPr>
           <a:xfrm>
             <a:off x="5897880" y="1371600"/>
-            <a:ext cx="5303520" cy="1737360"/>
+            <a:ext cx="5303520" cy="1631216"/>
           </a:xfrm>
           <a:prstGeom prst="rect">
             <a:avLst/>
@@ -9858,7 +14417,7 @@
           </a:bodyPr>
           <a:lstStyle/>
           <a:p>
-            <a:pPr>
+            <a:pPr algn="ctr">
               <a:defRPr sz="1400" b="1">
                 <a:solidFill>
                   <a:srgbClr val="00873E"/>
@@ -9867,21 +14426,143 @@
               </a:defRPr>
             </a:pPr>
             <a:r>
-              <a:t>Sem Aquele 'Piscar Branco' do Navegador</a:t>
-            </a:r>
-          </a:p>
-          <a:p>
-            <a:br/>
-            <a:pPr>
-              <a:defRPr sz="1150">
-                <a:solidFill>
-                  <a:srgbClr val="1E293B"/>
-                </a:solidFill>
-                <a:latin typeface="Segoe UI"/>
-              </a:defRPr>
-            </a:pPr>
-            <a:r>
-              <a:t>Como uma Single Page Application (SPA), a navegação ocorre por rolagem suave (smooth scroll), mantendo a música tocando sem cortes e os dados preenchidos no formulário preservados.</a:t>
+              <a:rPr sz="1600" dirty="0"/>
+              <a:t>Sem </a:t>
+            </a:r>
+            <a:r>
+              <a:rPr sz="1600" dirty="0" err="1"/>
+              <a:t>Aquele</a:t>
+            </a:r>
+            <a:r>
+              <a:rPr sz="1600" dirty="0"/>
+              <a:t> '</a:t>
+            </a:r>
+            <a:r>
+              <a:rPr sz="1600" dirty="0" err="1"/>
+              <a:t>Piscar</a:t>
+            </a:r>
+            <a:r>
+              <a:rPr sz="1600" dirty="0"/>
+              <a:t> Branco' do </a:t>
+            </a:r>
+            <a:r>
+              <a:rPr sz="1600" dirty="0" err="1"/>
+              <a:t>Navegador</a:t>
+            </a:r>
+            <a:endParaRPr sz="1600" dirty="0"/>
+          </a:p>
+          <a:p>
+            <a:pPr algn="just"/>
+            <a:br>
+              <a:rPr dirty="0"/>
+            </a:br>
+            <a:r>
+              <a:rPr dirty="0"/>
+              <a:t>Como </a:t>
+            </a:r>
+            <a:r>
+              <a:rPr dirty="0" err="1"/>
+              <a:t>uma</a:t>
+            </a:r>
+            <a:r>
+              <a:rPr dirty="0"/>
+              <a:t> Single Page Application (SPA), a </a:t>
+            </a:r>
+            <a:r>
+              <a:rPr dirty="0" err="1"/>
+              <a:t>navegação</a:t>
+            </a:r>
+            <a:r>
+              <a:rPr dirty="0"/>
+              <a:t> </a:t>
+            </a:r>
+            <a:r>
+              <a:rPr dirty="0" err="1"/>
+              <a:t>ocorre</a:t>
+            </a:r>
+            <a:r>
+              <a:rPr dirty="0"/>
+              <a:t> </a:t>
+            </a:r>
+            <a:r>
+              <a:rPr dirty="0" err="1"/>
+              <a:t>por</a:t>
+            </a:r>
+            <a:r>
+              <a:rPr dirty="0"/>
+              <a:t> </a:t>
+            </a:r>
+            <a:r>
+              <a:rPr dirty="0" err="1"/>
+              <a:t>rolagem</a:t>
+            </a:r>
+            <a:r>
+              <a:rPr dirty="0"/>
+              <a:t> suave (smooth scroll), </a:t>
+            </a:r>
+            <a:r>
+              <a:rPr dirty="0" err="1"/>
+              <a:t>mantendo</a:t>
+            </a:r>
+            <a:r>
+              <a:rPr dirty="0"/>
+              <a:t> a </a:t>
+            </a:r>
+            <a:r>
+              <a:rPr dirty="0" err="1"/>
+              <a:t>música</a:t>
+            </a:r>
+            <a:r>
+              <a:rPr dirty="0"/>
+              <a:t> </a:t>
+            </a:r>
+            <a:r>
+              <a:rPr dirty="0" err="1"/>
+              <a:t>tocando</a:t>
+            </a:r>
+            <a:r>
+              <a:rPr dirty="0"/>
+              <a:t> </a:t>
+            </a:r>
+            <a:r>
+              <a:rPr dirty="0" err="1"/>
+              <a:t>sem</a:t>
+            </a:r>
+            <a:r>
+              <a:rPr dirty="0"/>
+              <a:t> cortes e </a:t>
+            </a:r>
+            <a:r>
+              <a:rPr dirty="0" err="1"/>
+              <a:t>os</a:t>
+            </a:r>
+            <a:r>
+              <a:rPr dirty="0"/>
+              <a:t> dados </a:t>
+            </a:r>
+            <a:r>
+              <a:rPr dirty="0" err="1"/>
+              <a:t>preenchidos</a:t>
+            </a:r>
+            <a:r>
+              <a:rPr dirty="0"/>
+              <a:t> no </a:t>
+            </a:r>
+            <a:r>
+              <a:rPr dirty="0" err="1"/>
+              <a:t>formulário</a:t>
+            </a:r>
+            <a:r>
+              <a:rPr dirty="0"/>
+              <a:t> </a:t>
+            </a:r>
+            <a:r>
+              <a:rPr dirty="0" err="1"/>
+              <a:t>preservados</a:t>
+            </a:r>
+            <a:r>
+              <a:rPr dirty="0"/>
+              <a:t>.</a:t>
             </a:r>
           </a:p>
         </p:txBody>
@@ -9928,6 +14609,7 @@
           <a:lstStyle/>
           <a:p>
             <a:pPr algn="ctr"/>
+            <a:endParaRPr/>
           </a:p>
         </p:txBody>
       </p:sp>
@@ -9939,8 +14621,8 @@
         </p:nvSpPr>
         <p:spPr>
           <a:xfrm>
-            <a:off x="5897880" y="3611880"/>
-            <a:ext cx="5303520" cy="2286000"/>
+            <a:off x="5956874" y="3694888"/>
+            <a:ext cx="5234203" cy="1785104"/>
           </a:xfrm>
           <a:prstGeom prst="rect">
             <a:avLst/>
@@ -9953,7 +14635,7 @@
           </a:bodyPr>
           <a:lstStyle/>
           <a:p>
-            <a:pPr>
+            <a:pPr algn="ctr">
               <a:defRPr sz="1300" b="1">
                 <a:solidFill>
                   <a:srgbClr val="00873E"/>
@@ -9962,24 +14644,40 @@
               </a:defRPr>
             </a:pPr>
             <a:r>
-              <a:t>Hooks do React que Deram Vida à Aplicação:</a:t>
-            </a:r>
-          </a:p>
-          <a:p>
-            <a:pPr>
-              <a:defRPr sz="1100">
-                <a:solidFill>
-                  <a:srgbClr val="1E293B"/>
+              <a:rPr sz="1600" dirty="0"/>
+              <a:t>Hooks do React </a:t>
+            </a:r>
+            <a:r>
+              <a:rPr sz="1600" dirty="0" err="1"/>
+              <a:t>que</a:t>
+            </a:r>
+            <a:r>
+              <a:rPr sz="1600" dirty="0"/>
+              <a:t> Deram Vida à </a:t>
+            </a:r>
+            <a:r>
+              <a:rPr sz="1600" dirty="0" err="1"/>
+              <a:t>Aplicação</a:t>
+            </a:r>
+            <a:r>
+              <a:rPr sz="1600" dirty="0"/>
+              <a:t>:</a:t>
+            </a:r>
+            <a:endParaRPr lang="pt-BR" sz="1600" dirty="0"/>
+          </a:p>
+          <a:p>
+            <a:pPr algn="ctr">
+              <a:defRPr sz="1300" b="1">
+                <a:solidFill>
+                  <a:srgbClr val="00873E"/>
                 </a:solidFill>
                 <a:latin typeface="Segoe UI"/>
               </a:defRPr>
             </a:pPr>
-            <a:r>
-              <a:t>• useState:  Guarda o total arrecadado, filtro de bairros e menu aberto;</a:t>
-            </a:r>
-          </a:p>
-          <a:p>
-            <a:pPr>
+            <a:endParaRPr sz="1600" dirty="0"/>
+          </a:p>
+          <a:p>
+            <a:pPr algn="just">
               <a:defRPr sz="1100">
                 <a:solidFill>
                   <a:srgbClr val="1E293B"/>
@@ -9988,11 +14686,45 @@
               </a:defRPr>
             </a:pPr>
             <a:r>
-              <a:t>• useEffect:  Busca dados no IBGE e escuta eventos de clique para o som;</a:t>
-            </a:r>
-          </a:p>
-          <a:p>
-            <a:pPr>
+              <a:rPr sz="1200" dirty="0"/>
+              <a:t>• </a:t>
+            </a:r>
+            <a:r>
+              <a:rPr sz="1200" dirty="0" err="1"/>
+              <a:t>useState</a:t>
+            </a:r>
+            <a:r>
+              <a:rPr sz="1200" dirty="0"/>
+              <a:t>:  Guarda o total </a:t>
+            </a:r>
+            <a:r>
+              <a:rPr sz="1200" dirty="0" err="1"/>
+              <a:t>arrecadado</a:t>
+            </a:r>
+            <a:r>
+              <a:rPr sz="1200" dirty="0"/>
+              <a:t>, </a:t>
+            </a:r>
+            <a:r>
+              <a:rPr sz="1200" dirty="0" err="1"/>
+              <a:t>filtro</a:t>
+            </a:r>
+            <a:r>
+              <a:rPr sz="1200" dirty="0"/>
+              <a:t> de bairros e menu </a:t>
+            </a:r>
+            <a:r>
+              <a:rPr sz="1200" dirty="0" err="1"/>
+              <a:t>aberto</a:t>
+            </a:r>
+            <a:r>
+              <a:rPr sz="1200" dirty="0"/>
+              <a:t>;</a:t>
+            </a:r>
+            <a:endParaRPr lang="pt-BR" sz="1200" dirty="0"/>
+          </a:p>
+          <a:p>
+            <a:pPr algn="just">
               <a:defRPr sz="1100">
                 <a:solidFill>
                   <a:srgbClr val="1E293B"/>
@@ -10000,12 +14732,10 @@
                 <a:latin typeface="Segoe UI"/>
               </a:defRPr>
             </a:pPr>
-            <a:r>
-              <a:t>• useRef:  Controla a tag HTML5 audio sem re-renderizar a tela inteira;</a:t>
-            </a:r>
-          </a:p>
-          <a:p>
-            <a:pPr>
+            <a:endParaRPr sz="1200" dirty="0"/>
+          </a:p>
+          <a:p>
+            <a:pPr algn="just">
               <a:defRPr sz="1100">
                 <a:solidFill>
                   <a:srgbClr val="1E293B"/>
@@ -10014,7 +14744,196 @@
               </a:defRPr>
             </a:pPr>
             <a:r>
-              <a:t>• localStorage:  Preserva as doações mesmo fechando o navegador.</a:t>
+              <a:rPr sz="1200" dirty="0"/>
+              <a:t>• </a:t>
+            </a:r>
+            <a:r>
+              <a:rPr sz="1200" dirty="0" err="1"/>
+              <a:t>useEffect</a:t>
+            </a:r>
+            <a:r>
+              <a:rPr sz="1200" dirty="0"/>
+              <a:t>:  </a:t>
+            </a:r>
+            <a:r>
+              <a:rPr sz="1200" dirty="0" err="1"/>
+              <a:t>Busca</a:t>
+            </a:r>
+            <a:r>
+              <a:rPr sz="1200" dirty="0"/>
+              <a:t> dados no IBGE e </a:t>
+            </a:r>
+            <a:r>
+              <a:rPr sz="1200" dirty="0" err="1"/>
+              <a:t>escuta</a:t>
+            </a:r>
+            <a:r>
+              <a:rPr sz="1200" dirty="0"/>
+              <a:t> </a:t>
+            </a:r>
+            <a:r>
+              <a:rPr sz="1200" dirty="0" err="1"/>
+              <a:t>eventos</a:t>
+            </a:r>
+            <a:r>
+              <a:rPr sz="1200" dirty="0"/>
+              <a:t> de clique para o </a:t>
+            </a:r>
+            <a:r>
+              <a:rPr sz="1200" dirty="0" err="1"/>
+              <a:t>som</a:t>
+            </a:r>
+            <a:r>
+              <a:rPr sz="1200" dirty="0"/>
+              <a:t>;</a:t>
+            </a:r>
+            <a:endParaRPr lang="pt-BR" sz="1200" dirty="0"/>
+          </a:p>
+          <a:p>
+            <a:pPr algn="just">
+              <a:defRPr sz="1100">
+                <a:solidFill>
+                  <a:srgbClr val="1E293B"/>
+                </a:solidFill>
+                <a:latin typeface="Segoe UI"/>
+              </a:defRPr>
+            </a:pPr>
+            <a:endParaRPr sz="1200" dirty="0"/>
+          </a:p>
+          <a:p>
+            <a:pPr algn="just">
+              <a:defRPr sz="1100">
+                <a:solidFill>
+                  <a:srgbClr val="1E293B"/>
+                </a:solidFill>
+                <a:latin typeface="Segoe UI"/>
+              </a:defRPr>
+            </a:pPr>
+            <a:r>
+              <a:rPr sz="1200" dirty="0"/>
+              <a:t>• </a:t>
+            </a:r>
+            <a:r>
+              <a:rPr sz="1200" dirty="0" err="1"/>
+              <a:t>useRef</a:t>
+            </a:r>
+            <a:r>
+              <a:rPr sz="1200" dirty="0"/>
+              <a:t>:  </a:t>
+            </a:r>
+            <a:r>
+              <a:rPr sz="1200" dirty="0" err="1"/>
+              <a:t>Controla</a:t>
+            </a:r>
+            <a:r>
+              <a:rPr sz="1200" dirty="0"/>
+              <a:t> a tag HTML5 audio </a:t>
+            </a:r>
+            <a:r>
+              <a:rPr sz="1200" dirty="0" err="1"/>
+              <a:t>sem</a:t>
+            </a:r>
+            <a:r>
+              <a:rPr sz="1200" dirty="0"/>
+              <a:t> re-</a:t>
+            </a:r>
+            <a:r>
+              <a:rPr sz="1200" dirty="0" err="1"/>
+              <a:t>renderizar</a:t>
+            </a:r>
+            <a:r>
+              <a:rPr sz="1200" dirty="0"/>
+              <a:t> a </a:t>
+            </a:r>
+            <a:r>
+              <a:rPr sz="1200" dirty="0" err="1"/>
+              <a:t>tela</a:t>
+            </a:r>
+            <a:r>
+              <a:rPr sz="1200" dirty="0"/>
+              <a:t> </a:t>
+            </a:r>
+            <a:r>
+              <a:rPr sz="1200" dirty="0" err="1"/>
+              <a:t>inteira</a:t>
+            </a:r>
+            <a:r>
+              <a:rPr sz="1200" dirty="0"/>
+              <a:t>;</a:t>
+            </a:r>
+            <a:endParaRPr lang="pt-BR" sz="1200" dirty="0"/>
+          </a:p>
+          <a:p>
+            <a:pPr algn="just">
+              <a:defRPr sz="1100">
+                <a:solidFill>
+                  <a:srgbClr val="1E293B"/>
+                </a:solidFill>
+                <a:latin typeface="Segoe UI"/>
+              </a:defRPr>
+            </a:pPr>
+            <a:endParaRPr sz="1200" dirty="0"/>
+          </a:p>
+          <a:p>
+            <a:pPr algn="just">
+              <a:defRPr sz="1100">
+                <a:solidFill>
+                  <a:srgbClr val="1E293B"/>
+                </a:solidFill>
+                <a:latin typeface="Segoe UI"/>
+              </a:defRPr>
+            </a:pPr>
+            <a:r>
+              <a:rPr sz="1200" dirty="0"/>
+              <a:t>• </a:t>
+            </a:r>
+            <a:r>
+              <a:rPr sz="1200" dirty="0" err="1"/>
+              <a:t>localStorage</a:t>
+            </a:r>
+            <a:r>
+              <a:rPr sz="1200" dirty="0"/>
+              <a:t>:  </a:t>
+            </a:r>
+            <a:r>
+              <a:rPr sz="1200" dirty="0" err="1"/>
+              <a:t>Preserva</a:t>
+            </a:r>
+            <a:r>
+              <a:rPr sz="1200" dirty="0"/>
+              <a:t> as </a:t>
+            </a:r>
+            <a:r>
+              <a:rPr sz="1200" dirty="0" err="1"/>
+              <a:t>doações</a:t>
+            </a:r>
+            <a:r>
+              <a:rPr sz="1200" dirty="0"/>
+              <a:t> </a:t>
+            </a:r>
+            <a:r>
+              <a:rPr sz="1200" dirty="0" err="1"/>
+              <a:t>mesmo</a:t>
+            </a:r>
+            <a:r>
+              <a:rPr sz="1200" dirty="0"/>
+              <a:t> </a:t>
+            </a:r>
+            <a:r>
+              <a:rPr sz="1200" dirty="0" err="1"/>
+              <a:t>fechando</a:t>
+            </a:r>
+            <a:r>
+              <a:rPr sz="1200" dirty="0"/>
+              <a:t> o </a:t>
+            </a:r>
+            <a:r>
+              <a:rPr sz="1200" dirty="0" err="1"/>
+              <a:t>navegador</a:t>
+            </a:r>
+            <a:r>
+              <a:rPr sz="1200" dirty="0"/>
+              <a:t>.</a:t>
             </a:r>
           </a:p>
         </p:txBody>
@@ -10028,7 +14947,7 @@
 </file>
 
 <file path=ppt/slides/slide8.xml><?xml version="1.0" encoding="utf-8"?>
-<p:sld xmlns:a="http://schemas.openxmlformats.org/drawingml/2006/main" xmlns:p="http://schemas.openxmlformats.org/presentationml/2006/main" xmlns:r="http://schemas.openxmlformats.org/officeDocument/2006/relationships">
+<p:sld xmlns:a="http://schemas.openxmlformats.org/drawingml/2006/main" xmlns:r="http://schemas.openxmlformats.org/officeDocument/2006/relationships" xmlns:p="http://schemas.openxmlformats.org/presentationml/2006/main">
   <p:cSld>
     <p:spTree>
       <p:nvGrpSpPr>
@@ -10036,7 +14955,14 @@
         <p:cNvGrpSpPr/>
         <p:nvPr/>
       </p:nvGrpSpPr>
-      <p:grpSpPr/>
+      <p:grpSpPr>
+        <a:xfrm>
+          <a:off x="0" y="0"/>
+          <a:ext cx="0" cy="0"/>
+          <a:chOff x="0" y="0"/>
+          <a:chExt cx="0" cy="0"/>
+        </a:xfrm>
+      </p:grpSpPr>
       <p:sp>
         <p:nvSpPr>
           <p:cNvPr id="2" name="TextBox 1"/>
@@ -10111,7 +15037,7 @@
           </a:fontRef>
         </p:style>
         <p:txBody>
-          <a:bodyPr rtlCol="0" anchor="ctr" tIns="54864"/>
+          <a:bodyPr tIns="54864" rtlCol="0" anchor="ctr"/>
           <a:lstStyle/>
           <a:p>
             <a:pPr algn="ctr">
@@ -10168,6 +15094,7 @@
           <a:lstStyle/>
           <a:p>
             <a:pPr algn="ctr"/>
+            <a:endParaRPr/>
           </a:p>
         </p:txBody>
       </p:sp>
@@ -10211,6 +15138,7 @@
           <a:lstStyle/>
           <a:p>
             <a:pPr algn="ctr"/>
+            <a:endParaRPr/>
           </a:p>
         </p:txBody>
       </p:sp>
@@ -10364,6 +15292,7 @@
           <a:lstStyle/>
           <a:p>
             <a:pPr algn="ctr"/>
+            <a:endParaRPr/>
           </a:p>
         </p:txBody>
       </p:sp>
@@ -10407,6 +15336,7 @@
           <a:lstStyle/>
           <a:p>
             <a:pPr algn="ctr"/>
+            <a:endParaRPr/>
           </a:p>
         </p:txBody>
       </p:sp>
@@ -10445,7 +15375,7 @@
             </a:r>
           </a:p>
           <a:p>
-            <a:pPr>
+            <a:pPr algn="just">
               <a:defRPr sz="1050">
                 <a:solidFill>
                   <a:srgbClr val="64748B"/>
@@ -10501,6 +15431,7 @@
           <a:lstStyle/>
           <a:p>
             <a:pPr algn="ctr"/>
+            <a:endParaRPr/>
           </a:p>
         </p:txBody>
       </p:sp>
@@ -10544,6 +15475,7 @@
           <a:lstStyle/>
           <a:p>
             <a:pPr algn="ctr"/>
+            <a:endParaRPr/>
           </a:p>
         </p:txBody>
       </p:sp>
@@ -10582,7 +15514,7 @@
             </a:r>
           </a:p>
           <a:p>
-            <a:pPr>
+            <a:pPr algn="just">
               <a:defRPr sz="1050">
                 <a:solidFill>
                   <a:srgbClr val="64748B"/>
@@ -10638,6 +15570,7 @@
           <a:lstStyle/>
           <a:p>
             <a:pPr algn="ctr"/>
+            <a:endParaRPr/>
           </a:p>
         </p:txBody>
       </p:sp>
@@ -10681,6 +15614,7 @@
           <a:lstStyle/>
           <a:p>
             <a:pPr algn="ctr"/>
+            <a:endParaRPr/>
           </a:p>
         </p:txBody>
       </p:sp>
@@ -10719,7 +15653,7 @@
             </a:r>
           </a:p>
           <a:p>
-            <a:pPr>
+            <a:pPr algn="just">
               <a:defRPr sz="1050">
                 <a:solidFill>
                   <a:srgbClr val="64748B"/>
@@ -10775,6 +15709,7 @@
           <a:lstStyle/>
           <a:p>
             <a:pPr algn="ctr"/>
+            <a:endParaRPr/>
           </a:p>
         </p:txBody>
       </p:sp>
@@ -10814,56 +15749,24 @@
           </a:p>
           <a:p>
             <a:br/>
-            <a:pPr>
-              <a:defRPr sz="1150">
-                <a:solidFill>
-                  <a:srgbClr val="1E293B"/>
-                </a:solidFill>
-                <a:latin typeface="Segoe UI"/>
-              </a:defRPr>
-            </a:pPr>
             <a:r>
               <a:t>• Build de Produção com Vite: Compilado em menos de 800ms, gerando código minificado e assets otimizados na pasta dist/.</a:t>
             </a:r>
           </a:p>
           <a:p>
             <a:br/>
-            <a:pPr>
-              <a:defRPr sz="1150">
-                <a:solidFill>
-                  <a:srgbClr val="1E293B"/>
-                </a:solidFill>
-                <a:latin typeface="Segoe UI"/>
-              </a:defRPr>
-            </a:pPr>
             <a:r>
               <a:t>• Análise Estática com Oxlint: Zero erros de sintaxe, zero alertas de React e conformidade estrita com padrões modernos de código.</a:t>
             </a:r>
           </a:p>
           <a:p>
             <a:br/>
-            <a:pPr>
-              <a:defRPr sz="1150">
-                <a:solidFill>
-                  <a:srgbClr val="1E293B"/>
-                </a:solidFill>
-                <a:latin typeface="Segoe UI"/>
-              </a:defRPr>
-            </a:pPr>
             <a:r>
               <a:t>• Teste de Formulários em Branco: O navegador bloqueia submissão vazia e orienta o usuário de forma amigável.</a:t>
             </a:r>
           </a:p>
           <a:p>
             <a:br/>
-            <a:pPr>
-              <a:defRPr sz="1150">
-                <a:solidFill>
-                  <a:srgbClr val="1E293B"/>
-                </a:solidFill>
-                <a:latin typeface="Segoe UI"/>
-              </a:defRPr>
-            </a:pPr>
             <a:r>
               <a:t>• Teste em Celulares Reais: Testamos botões de toque, teclado numérico e rolagem suave em dispositivos Android e iOS dos membros da equipe.</a:t>
             </a:r>
@@ -10879,7 +15782,7 @@
 </file>
 
 <file path=ppt/slides/slide9.xml><?xml version="1.0" encoding="utf-8"?>
-<p:sld xmlns:a="http://schemas.openxmlformats.org/drawingml/2006/main" xmlns:p="http://schemas.openxmlformats.org/presentationml/2006/main" xmlns:r="http://schemas.openxmlformats.org/officeDocument/2006/relationships">
+<p:sld xmlns:a="http://schemas.openxmlformats.org/drawingml/2006/main" xmlns:r="http://schemas.openxmlformats.org/officeDocument/2006/relationships" xmlns:p="http://schemas.openxmlformats.org/presentationml/2006/main">
   <p:cSld>
     <p:spTree>
       <p:nvGrpSpPr>
@@ -10887,7 +15790,14 @@
         <p:cNvGrpSpPr/>
         <p:nvPr/>
       </p:nvGrpSpPr>
-      <p:grpSpPr/>
+      <p:grpSpPr>
+        <a:xfrm>
+          <a:off x="0" y="0"/>
+          <a:ext cx="0" cy="0"/>
+          <a:chOff x="0" y="0"/>
+          <a:chExt cx="0" cy="0"/>
+        </a:xfrm>
+      </p:grpSpPr>
       <p:sp>
         <p:nvSpPr>
           <p:cNvPr id="2" name="TextBox 1"/>
@@ -10962,7 +15872,7 @@
           </a:fontRef>
         </p:style>
         <p:txBody>
-          <a:bodyPr rtlCol="0" anchor="ctr" tIns="54864"/>
+          <a:bodyPr tIns="54864" rtlCol="0" anchor="ctr"/>
           <a:lstStyle/>
           <a:p>
             <a:pPr algn="ctr">
@@ -11019,6 +15929,7 @@
           <a:lstStyle/>
           <a:p>
             <a:pPr algn="ctr"/>
+            <a:endParaRPr/>
           </a:p>
         </p:txBody>
       </p:sp>
@@ -11062,6 +15973,7 @@
           <a:lstStyle/>
           <a:p>
             <a:pPr algn="ctr"/>
+            <a:endParaRPr/>
           </a:p>
         </p:txBody>
       </p:sp>
@@ -11215,6 +16127,7 @@
           <a:lstStyle/>
           <a:p>
             <a:pPr algn="ctr"/>
+            <a:endParaRPr/>
           </a:p>
         </p:txBody>
       </p:sp>
@@ -11254,28 +16167,12 @@
           </a:p>
           <a:p>
             <a:br/>
-            <a:pPr algn="ctr">
-              <a:defRPr sz="1150">
-                <a:solidFill>
-                  <a:srgbClr val="64748B"/>
-                </a:solidFill>
-                <a:latin typeface="Segoe UI"/>
-              </a:defRPr>
-            </a:pPr>
             <a:r>
               <a:t>Histórico completo de versões, commits explicativos da equipe, componentes React e instruções de execução.</a:t>
             </a:r>
           </a:p>
           <a:p>
             <a:br/>
-            <a:pPr algn="ctr">
-              <a:defRPr sz="1050" b="1">
-                <a:solidFill>
-                  <a:srgbClr val="00873E"/>
-                </a:solidFill>
-                <a:latin typeface="Consolas"/>
-              </a:defRPr>
-            </a:pPr>
             <a:r>
               <a:t>https://github.com/ambersonrogers/timbiras-solidaria</a:t>
             </a:r>
@@ -11324,6 +16221,7 @@
           <a:lstStyle/>
           <a:p>
             <a:pPr algn="ctr"/>
+            <a:endParaRPr/>
           </a:p>
         </p:txBody>
       </p:sp>
@@ -11363,28 +16261,12 @@
           </a:p>
           <a:p>
             <a:br/>
-            <a:pPr algn="ctr">
-              <a:defRPr sz="1150">
-                <a:solidFill>
-                  <a:srgbClr val="64748B"/>
-                </a:solidFill>
-                <a:latin typeface="Segoe UI"/>
-              </a:defRPr>
-            </a:pPr>
             <a:r>
               <a:t>Deploy em nuvem de alta velocidade, com roteamento de SPA configurado via vercel.json e acesso mundial.</a:t>
             </a:r>
           </a:p>
           <a:p>
             <a:br/>
-            <a:pPr algn="ctr">
-              <a:defRPr sz="1050" b="1">
-                <a:solidFill>
-                  <a:srgbClr val="0284C7"/>
-                </a:solidFill>
-                <a:latin typeface="Consolas"/>
-              </a:defRPr>
-            </a:pPr>
             <a:r>
               <a:t>https://timbiras-solidaria.vercel.app</a:t>
             </a:r>
@@ -11433,6 +16315,7 @@
           <a:lstStyle/>
           <a:p>
             <a:pPr algn="ctr"/>
+            <a:endParaRPr/>
           </a:p>
         </p:txBody>
       </p:sp>

--- a/Relatorio_Atividade_2_Slides.pptx
+++ b/Relatorio_Atividade_2_Slides.pptx
@@ -140,7 +140,7 @@
   <pc:docChgLst>
     <pc:chgData name="Amberson Rogers Lindoso da Silva" userId="1e7355cac7a206dd" providerId="LiveId" clId="{F3CFAD84-59F1-4795-A6D8-6D79CCCB1EA4}"/>
     <pc:docChg chg="undo custSel modSld">
-      <pc:chgData name="Amberson Rogers Lindoso da Silva" userId="1e7355cac7a206dd" providerId="LiveId" clId="{F3CFAD84-59F1-4795-A6D8-6D79CCCB1EA4}" dt="2026-09-17T17:32:43.060" v="145" actId="20577"/>
+      <pc:chgData name="Amberson Rogers Lindoso da Silva" userId="1e7355cac7a206dd" providerId="LiveId" clId="{F3CFAD84-59F1-4795-A6D8-6D79CCCB1EA4}" dt="2026-09-17T17:33:37.865" v="171" actId="6549"/>
       <pc:docMkLst>
         <pc:docMk/>
       </pc:docMkLst>
@@ -323,13 +323,13 @@
         </pc:spChg>
       </pc:sldChg>
       <pc:sldChg chg="modSp mod">
-        <pc:chgData name="Amberson Rogers Lindoso da Silva" userId="1e7355cac7a206dd" providerId="LiveId" clId="{F3CFAD84-59F1-4795-A6D8-6D79CCCB1EA4}" dt="2026-09-17T17:32:43.060" v="145" actId="20577"/>
+        <pc:chgData name="Amberson Rogers Lindoso da Silva" userId="1e7355cac7a206dd" providerId="LiveId" clId="{F3CFAD84-59F1-4795-A6D8-6D79CCCB1EA4}" dt="2026-09-17T17:33:37.865" v="171" actId="6549"/>
         <pc:sldMkLst>
           <pc:docMk/>
           <pc:sldMk cId="0" sldId="262"/>
         </pc:sldMkLst>
         <pc:spChg chg="mod">
-          <ac:chgData name="Amberson Rogers Lindoso da Silva" userId="1e7355cac7a206dd" providerId="LiveId" clId="{F3CFAD84-59F1-4795-A6D8-6D79CCCB1EA4}" dt="2026-09-17T17:32:43.060" v="145" actId="20577"/>
+          <ac:chgData name="Amberson Rogers Lindoso da Silva" userId="1e7355cac7a206dd" providerId="LiveId" clId="{F3CFAD84-59F1-4795-A6D8-6D79CCCB1EA4}" dt="2026-09-17T17:33:37.865" v="171" actId="6549"/>
           <ac:spMkLst>
             <pc:docMk/>
             <pc:sldMk cId="0" sldId="262"/>
@@ -14133,7 +14133,7 @@
             </a:br>
             <a:r>
               <a:rPr dirty="0"/>
-              <a:t>├── </a:t>
+              <a:t>├ </a:t>
             </a:r>
             <a:r>
               <a:rPr dirty="0" err="1"/>
@@ -14144,9 +14144,10 @@
               <a:t> (IBGE &amp; Leaflet)</a:t>
             </a:r>
             <a:br>
-              <a:rPr/>
+              <a:rPr dirty="0"/>
             </a:br>
             <a:r>
+              <a:rPr dirty="0"/>
               <a:t>├ </a:t>
             </a:r>
             <a:r>
@@ -14170,7 +14171,7 @@
             </a:br>
             <a:r>
               <a:rPr dirty="0"/>
-              <a:t>├── </a:t>
+              <a:t>├ </a:t>
             </a:r>
             <a:r>
               <a:rPr dirty="0" err="1"/>
@@ -14185,7 +14186,7 @@
             </a:br>
             <a:r>
               <a:rPr dirty="0"/>
-              <a:t>├── </a:t>
+              <a:t>├ </a:t>
             </a:r>
             <a:r>
               <a:rPr dirty="0" err="1"/>
@@ -14208,7 +14209,7 @@
             </a:br>
             <a:r>
               <a:rPr dirty="0"/>
-              <a:t>├── </a:t>
+              <a:t>├ </a:t>
             </a:r>
             <a:r>
               <a:rPr dirty="0" err="1"/>
@@ -14223,7 +14224,7 @@
             </a:br>
             <a:r>
               <a:rPr dirty="0"/>
-              <a:t>├── </a:t>
+              <a:t>├ </a:t>
             </a:r>
             <a:r>
               <a:rPr dirty="0" err="1"/>
@@ -14246,7 +14247,7 @@
             </a:br>
             <a:r>
               <a:rPr dirty="0"/>
-              <a:t>├── </a:t>
+              <a:t>├ </a:t>
             </a:r>
             <a:r>
               <a:rPr dirty="0" err="1"/>
@@ -14261,7 +14262,7 @@
             </a:br>
             <a:r>
               <a:rPr dirty="0"/>
-              <a:t>├── </a:t>
+              <a:t>├ </a:t>
             </a:r>
             <a:r>
               <a:rPr dirty="0" err="1"/>
@@ -14283,8 +14284,19 @@
               <a:rPr dirty="0"/>
             </a:br>
             <a:r>
-              <a:rPr dirty="0"/>
-              <a:t>└── </a:t>
+              <a:rPr lang="pt-BR" dirty="0"/>
+              <a:t> </a:t>
+            </a:r>
+            <a:r>
+              <a:rPr dirty="0"/>
+              <a:t>└</a:t>
+            </a:r>
+            <a:r>
+              <a:rPr lang="pt-BR"/>
+              <a:t>-</a:t>
+            </a:r>
+            <a:r>
+              <a:t> </a:t>
             </a:r>
             <a:r>
               <a:rPr dirty="0" err="1"/>

--- a/Relatorio_Atividade_2_Slides.pptx
+++ b/Relatorio_Atividade_2_Slides.pptx
@@ -5,21 +5,21 @@
     <p:sldMasterId id="2147483648" r:id="rId1"/>
   </p:sldMasterIdLst>
   <p:sldIdLst>
-    <p:sldId id="256" r:id="rId2"/>
-    <p:sldId id="257" r:id="rId3"/>
-    <p:sldId id="258" r:id="rId4"/>
-    <p:sldId id="259" r:id="rId5"/>
-    <p:sldId id="260" r:id="rId6"/>
-    <p:sldId id="261" r:id="rId7"/>
-    <p:sldId id="262" r:id="rId8"/>
-    <p:sldId id="263" r:id="rId9"/>
-    <p:sldId id="264" r:id="rId10"/>
-    <p:sldId id="265" r:id="rId11"/>
-    <p:sldId id="266" r:id="rId12"/>
-    <p:sldId id="267" r:id="rId13"/>
-    <p:sldId id="268" r:id="rId14"/>
+    <p:sldId id="256" r:id="rId7"/>
+    <p:sldId id="257" r:id="rId8"/>
+    <p:sldId id="258" r:id="rId9"/>
+    <p:sldId id="259" r:id="rId10"/>
+    <p:sldId id="260" r:id="rId11"/>
+    <p:sldId id="261" r:id="rId12"/>
+    <p:sldId id="262" r:id="rId13"/>
+    <p:sldId id="263" r:id="rId14"/>
+    <p:sldId id="264" r:id="rId15"/>
+    <p:sldId id="265" r:id="rId16"/>
+    <p:sldId id="266" r:id="rId17"/>
+    <p:sldId id="267" r:id="rId18"/>
+    <p:sldId id="268" r:id="rId19"/>
   </p:sldIdLst>
-  <p:sldSz cx="12192000" cy="6858000"/>
+  <p:sldSz cx="12191695" cy="6858000" type="screen4x3"/>
   <p:notesSz cx="6858000" cy="9144000"/>
   <p:defaultTextStyle>
     <a:defPPr>
@@ -116,246 +116,7 @@
       </a:defRPr>
     </a:lvl9pPr>
   </p:defaultTextStyle>
-  <p:extLst>
-    <p:ext uri="{EFAFB233-063F-42B5-8137-9DF3F51BA10A}">
-      <p15:sldGuideLst xmlns:p15="http://schemas.microsoft.com/office/powerpoint/2012/main">
-        <p15:guide id="1" orient="horz" pos="2160">
-          <p15:clr>
-            <a:srgbClr val="A4A3A4"/>
-          </p15:clr>
-        </p15:guide>
-        <p15:guide id="2" pos="2880">
-          <p15:clr>
-            <a:srgbClr val="A4A3A4"/>
-          </p15:clr>
-        </p15:guide>
-      </p15:sldGuideLst>
-    </p:ext>
-  </p:extLst>
 </p:presentation>
-</file>
-
-<file path=ppt/changesInfos/changesInfo1.xml><?xml version="1.0" encoding="utf-8"?>
-<pc:chgInfo xmlns:a="http://schemas.openxmlformats.org/drawingml/2006/main" xmlns:r="http://schemas.openxmlformats.org/officeDocument/2006/relationships" xmlns:ac="http://schemas.microsoft.com/office/drawing/2013/main/command" xmlns:pc="http://schemas.microsoft.com/office/powerpoint/2013/main/command">
-  <pc:docChgLst>
-    <pc:chgData name="Amberson Rogers Lindoso da Silva" userId="1e7355cac7a206dd" providerId="LiveId" clId="{F3CFAD84-59F1-4795-A6D8-6D79CCCB1EA4}"/>
-    <pc:docChg chg="undo custSel modSld">
-      <pc:chgData name="Amberson Rogers Lindoso da Silva" userId="1e7355cac7a206dd" providerId="LiveId" clId="{F3CFAD84-59F1-4795-A6D8-6D79CCCB1EA4}" dt="2026-09-17T17:33:37.865" v="171" actId="6549"/>
-      <pc:docMkLst>
-        <pc:docMk/>
-      </pc:docMkLst>
-      <pc:sldChg chg="modSp mod">
-        <pc:chgData name="Amberson Rogers Lindoso da Silva" userId="1e7355cac7a206dd" providerId="LiveId" clId="{F3CFAD84-59F1-4795-A6D8-6D79CCCB1EA4}" dt="2026-09-17T17:22:47.199" v="29" actId="113"/>
-        <pc:sldMkLst>
-          <pc:docMk/>
-          <pc:sldMk cId="0" sldId="256"/>
-        </pc:sldMkLst>
-        <pc:spChg chg="mod">
-          <ac:chgData name="Amberson Rogers Lindoso da Silva" userId="1e7355cac7a206dd" providerId="LiveId" clId="{F3CFAD84-59F1-4795-A6D8-6D79CCCB1EA4}" dt="2026-09-17T17:22:47.199" v="29" actId="113"/>
-          <ac:spMkLst>
-            <pc:docMk/>
-            <pc:sldMk cId="0" sldId="256"/>
-            <ac:spMk id="3" creationId="{00000000-0000-0000-0000-000000000000}"/>
-          </ac:spMkLst>
-        </pc:spChg>
-      </pc:sldChg>
-      <pc:sldChg chg="modSp mod">
-        <pc:chgData name="Amberson Rogers Lindoso da Silva" userId="1e7355cac7a206dd" providerId="LiveId" clId="{F3CFAD84-59F1-4795-A6D8-6D79CCCB1EA4}" dt="2026-09-17T17:27:08.993" v="72" actId="403"/>
-        <pc:sldMkLst>
-          <pc:docMk/>
-          <pc:sldMk cId="0" sldId="257"/>
-        </pc:sldMkLst>
-        <pc:spChg chg="mod">
-          <ac:chgData name="Amberson Rogers Lindoso da Silva" userId="1e7355cac7a206dd" providerId="LiveId" clId="{F3CFAD84-59F1-4795-A6D8-6D79CCCB1EA4}" dt="2026-09-17T17:23:45.265" v="33" actId="20577"/>
-          <ac:spMkLst>
-            <pc:docMk/>
-            <pc:sldMk cId="0" sldId="257"/>
-            <ac:spMk id="8" creationId="{00000000-0000-0000-0000-000000000000}"/>
-          </ac:spMkLst>
-        </pc:spChg>
-        <pc:spChg chg="mod">
-          <ac:chgData name="Amberson Rogers Lindoso da Silva" userId="1e7355cac7a206dd" providerId="LiveId" clId="{F3CFAD84-59F1-4795-A6D8-6D79CCCB1EA4}" dt="2026-09-17T17:23:52.944" v="34" actId="123"/>
-          <ac:spMkLst>
-            <pc:docMk/>
-            <pc:sldMk cId="0" sldId="257"/>
-            <ac:spMk id="11" creationId="{00000000-0000-0000-0000-000000000000}"/>
-          </ac:spMkLst>
-        </pc:spChg>
-        <pc:spChg chg="mod">
-          <ac:chgData name="Amberson Rogers Lindoso da Silva" userId="1e7355cac7a206dd" providerId="LiveId" clId="{F3CFAD84-59F1-4795-A6D8-6D79CCCB1EA4}" dt="2026-09-17T17:27:08.993" v="72" actId="403"/>
-          <ac:spMkLst>
-            <pc:docMk/>
-            <pc:sldMk cId="0" sldId="257"/>
-            <ac:spMk id="13" creationId="{00000000-0000-0000-0000-000000000000}"/>
-          </ac:spMkLst>
-        </pc:spChg>
-      </pc:sldChg>
-      <pc:sldChg chg="modSp mod">
-        <pc:chgData name="Amberson Rogers Lindoso da Silva" userId="1e7355cac7a206dd" providerId="LiveId" clId="{F3CFAD84-59F1-4795-A6D8-6D79CCCB1EA4}" dt="2026-09-17T17:27:20.811" v="76" actId="403"/>
-        <pc:sldMkLst>
-          <pc:docMk/>
-          <pc:sldMk cId="0" sldId="258"/>
-        </pc:sldMkLst>
-        <pc:spChg chg="mod">
-          <ac:chgData name="Amberson Rogers Lindoso da Silva" userId="1e7355cac7a206dd" providerId="LiveId" clId="{F3CFAD84-59F1-4795-A6D8-6D79CCCB1EA4}" dt="2026-09-17T17:27:15.354" v="73" actId="403"/>
-          <ac:spMkLst>
-            <pc:docMk/>
-            <pc:sldMk cId="0" sldId="258"/>
-            <ac:spMk id="8" creationId="{00000000-0000-0000-0000-000000000000}"/>
-          </ac:spMkLst>
-        </pc:spChg>
-        <pc:spChg chg="mod">
-          <ac:chgData name="Amberson Rogers Lindoso da Silva" userId="1e7355cac7a206dd" providerId="LiveId" clId="{F3CFAD84-59F1-4795-A6D8-6D79CCCB1EA4}" dt="2026-09-17T17:24:15.661" v="40" actId="123"/>
-          <ac:spMkLst>
-            <pc:docMk/>
-            <pc:sldMk cId="0" sldId="258"/>
-            <ac:spMk id="11" creationId="{00000000-0000-0000-0000-000000000000}"/>
-          </ac:spMkLst>
-        </pc:spChg>
-        <pc:spChg chg="mod">
-          <ac:chgData name="Amberson Rogers Lindoso da Silva" userId="1e7355cac7a206dd" providerId="LiveId" clId="{F3CFAD84-59F1-4795-A6D8-6D79CCCB1EA4}" dt="2026-09-17T17:27:20.811" v="76" actId="403"/>
-          <ac:spMkLst>
-            <pc:docMk/>
-            <pc:sldMk cId="0" sldId="258"/>
-            <ac:spMk id="13" creationId="{00000000-0000-0000-0000-000000000000}"/>
-          </ac:spMkLst>
-        </pc:spChg>
-      </pc:sldChg>
-      <pc:sldChg chg="modSp mod">
-        <pc:chgData name="Amberson Rogers Lindoso da Silva" userId="1e7355cac7a206dd" providerId="LiveId" clId="{F3CFAD84-59F1-4795-A6D8-6D79CCCB1EA4}" dt="2026-09-17T17:27:44.047" v="80" actId="403"/>
-        <pc:sldMkLst>
-          <pc:docMk/>
-          <pc:sldMk cId="0" sldId="259"/>
-        </pc:sldMkLst>
-        <pc:spChg chg="mod">
-          <ac:chgData name="Amberson Rogers Lindoso da Silva" userId="1e7355cac7a206dd" providerId="LiveId" clId="{F3CFAD84-59F1-4795-A6D8-6D79CCCB1EA4}" dt="2026-09-17T17:27:32.622" v="79" actId="20577"/>
-          <ac:spMkLst>
-            <pc:docMk/>
-            <pc:sldMk cId="0" sldId="259"/>
-            <ac:spMk id="8" creationId="{00000000-0000-0000-0000-000000000000}"/>
-          </ac:spMkLst>
-        </pc:spChg>
-        <pc:spChg chg="mod">
-          <ac:chgData name="Amberson Rogers Lindoso da Silva" userId="1e7355cac7a206dd" providerId="LiveId" clId="{F3CFAD84-59F1-4795-A6D8-6D79CCCB1EA4}" dt="2026-09-17T17:26:14.327" v="64" actId="403"/>
-          <ac:spMkLst>
-            <pc:docMk/>
-            <pc:sldMk cId="0" sldId="259"/>
-            <ac:spMk id="11" creationId="{00000000-0000-0000-0000-000000000000}"/>
-          </ac:spMkLst>
-        </pc:spChg>
-        <pc:spChg chg="mod">
-          <ac:chgData name="Amberson Rogers Lindoso da Silva" userId="1e7355cac7a206dd" providerId="LiveId" clId="{F3CFAD84-59F1-4795-A6D8-6D79CCCB1EA4}" dt="2026-09-17T17:27:44.047" v="80" actId="403"/>
-          <ac:spMkLst>
-            <pc:docMk/>
-            <pc:sldMk cId="0" sldId="259"/>
-            <ac:spMk id="12" creationId="{00000000-0000-0000-0000-000000000000}"/>
-          </ac:spMkLst>
-        </pc:spChg>
-        <pc:spChg chg="mod">
-          <ac:chgData name="Amberson Rogers Lindoso da Silva" userId="1e7355cac7a206dd" providerId="LiveId" clId="{F3CFAD84-59F1-4795-A6D8-6D79CCCB1EA4}" dt="2026-09-17T17:26:18.424" v="66" actId="403"/>
-          <ac:spMkLst>
-            <pc:docMk/>
-            <pc:sldMk cId="0" sldId="259"/>
-            <ac:spMk id="14" creationId="{00000000-0000-0000-0000-000000000000}"/>
-          </ac:spMkLst>
-        </pc:spChg>
-      </pc:sldChg>
-      <pc:sldChg chg="modSp mod">
-        <pc:chgData name="Amberson Rogers Lindoso da Silva" userId="1e7355cac7a206dd" providerId="LiveId" clId="{F3CFAD84-59F1-4795-A6D8-6D79CCCB1EA4}" dt="2026-09-17T17:28:18.880" v="87" actId="403"/>
-        <pc:sldMkLst>
-          <pc:docMk/>
-          <pc:sldMk cId="0" sldId="260"/>
-        </pc:sldMkLst>
-        <pc:spChg chg="mod">
-          <ac:chgData name="Amberson Rogers Lindoso da Silva" userId="1e7355cac7a206dd" providerId="LiveId" clId="{F3CFAD84-59F1-4795-A6D8-6D79CCCB1EA4}" dt="2026-09-17T17:26:57.307" v="71" actId="123"/>
-          <ac:spMkLst>
-            <pc:docMk/>
-            <pc:sldMk cId="0" sldId="260"/>
-            <ac:spMk id="8" creationId="{00000000-0000-0000-0000-000000000000}"/>
-          </ac:spMkLst>
-        </pc:spChg>
-        <pc:spChg chg="mod">
-          <ac:chgData name="Amberson Rogers Lindoso da Silva" userId="1e7355cac7a206dd" providerId="LiveId" clId="{F3CFAD84-59F1-4795-A6D8-6D79CCCB1EA4}" dt="2026-09-17T17:28:18.880" v="87" actId="403"/>
-          <ac:spMkLst>
-            <pc:docMk/>
-            <pc:sldMk cId="0" sldId="260"/>
-            <ac:spMk id="10" creationId="{00000000-0000-0000-0000-000000000000}"/>
-          </ac:spMkLst>
-        </pc:spChg>
-        <pc:spChg chg="mod">
-          <ac:chgData name="Amberson Rogers Lindoso da Silva" userId="1e7355cac7a206dd" providerId="LiveId" clId="{F3CFAD84-59F1-4795-A6D8-6D79CCCB1EA4}" dt="2026-09-17T17:26:51.284" v="70" actId="403"/>
-          <ac:spMkLst>
-            <pc:docMk/>
-            <pc:sldMk cId="0" sldId="260"/>
-            <ac:spMk id="13" creationId="{00000000-0000-0000-0000-000000000000}"/>
-          </ac:spMkLst>
-        </pc:spChg>
-      </pc:sldChg>
-      <pc:sldChg chg="modSp mod">
-        <pc:chgData name="Amberson Rogers Lindoso da Silva" userId="1e7355cac7a206dd" providerId="LiveId" clId="{F3CFAD84-59F1-4795-A6D8-6D79CCCB1EA4}" dt="2026-09-17T17:30:23.740" v="119" actId="255"/>
-        <pc:sldMkLst>
-          <pc:docMk/>
-          <pc:sldMk cId="0" sldId="261"/>
-        </pc:sldMkLst>
-        <pc:spChg chg="mod">
-          <ac:chgData name="Amberson Rogers Lindoso da Silva" userId="1e7355cac7a206dd" providerId="LiveId" clId="{F3CFAD84-59F1-4795-A6D8-6D79CCCB1EA4}" dt="2026-09-17T17:30:23.740" v="119" actId="255"/>
-          <ac:spMkLst>
-            <pc:docMk/>
-            <pc:sldMk cId="0" sldId="261"/>
-            <ac:spMk id="9" creationId="{00000000-0000-0000-0000-000000000000}"/>
-          </ac:spMkLst>
-        </pc:spChg>
-        <pc:spChg chg="mod">
-          <ac:chgData name="Amberson Rogers Lindoso da Silva" userId="1e7355cac7a206dd" providerId="LiveId" clId="{F3CFAD84-59F1-4795-A6D8-6D79CCCB1EA4}" dt="2026-09-17T17:29:44.799" v="103" actId="403"/>
-          <ac:spMkLst>
-            <pc:docMk/>
-            <pc:sldMk cId="0" sldId="261"/>
-            <ac:spMk id="12" creationId="{00000000-0000-0000-0000-000000000000}"/>
-          </ac:spMkLst>
-        </pc:spChg>
-        <pc:spChg chg="mod">
-          <ac:chgData name="Amberson Rogers Lindoso da Silva" userId="1e7355cac7a206dd" providerId="LiveId" clId="{F3CFAD84-59F1-4795-A6D8-6D79CCCB1EA4}" dt="2026-09-17T17:29:49.894" v="105" actId="122"/>
-          <ac:spMkLst>
-            <pc:docMk/>
-            <pc:sldMk cId="0" sldId="261"/>
-            <ac:spMk id="15" creationId="{00000000-0000-0000-0000-000000000000}"/>
-          </ac:spMkLst>
-        </pc:spChg>
-      </pc:sldChg>
-      <pc:sldChg chg="modSp mod">
-        <pc:chgData name="Amberson Rogers Lindoso da Silva" userId="1e7355cac7a206dd" providerId="LiveId" clId="{F3CFAD84-59F1-4795-A6D8-6D79CCCB1EA4}" dt="2026-09-17T17:33:37.865" v="171" actId="6549"/>
-        <pc:sldMkLst>
-          <pc:docMk/>
-          <pc:sldMk cId="0" sldId="262"/>
-        </pc:sldMkLst>
-        <pc:spChg chg="mod">
-          <ac:chgData name="Amberson Rogers Lindoso da Silva" userId="1e7355cac7a206dd" providerId="LiveId" clId="{F3CFAD84-59F1-4795-A6D8-6D79CCCB1EA4}" dt="2026-09-17T17:33:37.865" v="171" actId="6549"/>
-          <ac:spMkLst>
-            <pc:docMk/>
-            <pc:sldMk cId="0" sldId="262"/>
-            <ac:spMk id="9" creationId="{00000000-0000-0000-0000-000000000000}"/>
-          </ac:spMkLst>
-        </pc:spChg>
-        <pc:spChg chg="mod">
-          <ac:chgData name="Amberson Rogers Lindoso da Silva" userId="1e7355cac7a206dd" providerId="LiveId" clId="{F3CFAD84-59F1-4795-A6D8-6D79CCCB1EA4}" dt="2026-09-17T17:32:12.219" v="135" actId="122"/>
-          <ac:spMkLst>
-            <pc:docMk/>
-            <pc:sldMk cId="0" sldId="262"/>
-            <ac:spMk id="12" creationId="{00000000-0000-0000-0000-000000000000}"/>
-          </ac:spMkLst>
-        </pc:spChg>
-        <pc:spChg chg="mod">
-          <ac:chgData name="Amberson Rogers Lindoso da Silva" userId="1e7355cac7a206dd" providerId="LiveId" clId="{F3CFAD84-59F1-4795-A6D8-6D79CCCB1EA4}" dt="2026-09-17T17:32:02.757" v="132" actId="1076"/>
-          <ac:spMkLst>
-            <pc:docMk/>
-            <pc:sldMk cId="0" sldId="262"/>
-            <ac:spMk id="14" creationId="{00000000-0000-0000-0000-000000000000}"/>
-          </ac:spMkLst>
-        </pc:spChg>
-      </pc:sldChg>
-    </pc:docChg>
-  </pc:docChgLst>
-</pc:chgInfo>
 </file>
 
 <file path=ppt/slideLayouts/slideLayout1.xml><?xml version="1.0" encoding="utf-8"?>
@@ -396,9 +157,10 @@
           <a:lstStyle/>
           <a:p>
             <a:r>
-              <a:rPr lang="en-US"/>
+              <a:rPr lang="en-US" smtClean="0"/>
               <a:t>Click to edit Master title style</a:t>
             </a:r>
+            <a:endParaRPr lang="en-US"/>
           </a:p>
         </p:txBody>
       </p:sp>
@@ -514,9 +276,10 @@
           </a:lstStyle>
           <a:p>
             <a:r>
-              <a:rPr lang="en-US"/>
+              <a:rPr lang="en-US" smtClean="0"/>
               <a:t>Click to edit Master subtitle style</a:t>
             </a:r>
+            <a:endParaRPr lang="en-US"/>
           </a:p>
         </p:txBody>
       </p:sp>
@@ -537,7 +300,7 @@
           <a:p>
             <a:fld id="{5BCAD085-E8A6-8845-BD4E-CB4CCA059FC4}" type="datetimeFigureOut">
               <a:rPr lang="en-US" smtClean="0"/>
-              <a:t>9/17/2026</a:t>
+              <a:t>1/27/13</a:t>
             </a:fld>
             <a:endParaRPr lang="en-US"/>
           </a:p>
@@ -579,7 +342,7 @@
           <a:p>
             <a:fld id="{C1FF6DA9-008F-8B48-92A6-B652298478BF}" type="slidenum">
               <a:rPr lang="en-US" smtClean="0"/>
-              <a:t>‹nº›</a:t>
+              <a:t>‹#›</a:t>
             </a:fld>
             <a:endParaRPr lang="en-US"/>
           </a:p>
@@ -631,9 +394,10 @@
           <a:lstStyle/>
           <a:p>
             <a:r>
-              <a:rPr lang="en-US"/>
+              <a:rPr lang="en-US" smtClean="0"/>
               <a:t>Click to edit Master title style</a:t>
             </a:r>
+            <a:endParaRPr lang="en-US"/>
           </a:p>
         </p:txBody>
       </p:sp>
@@ -654,37 +418,38 @@
           <a:p>
             <a:pPr lvl="0"/>
             <a:r>
-              <a:rPr lang="en-US"/>
+              <a:rPr lang="en-US" smtClean="0"/>
               <a:t>Click to edit Master text styles</a:t>
             </a:r>
           </a:p>
           <a:p>
             <a:pPr lvl="1"/>
             <a:r>
-              <a:rPr lang="en-US"/>
+              <a:rPr lang="en-US" smtClean="0"/>
               <a:t>Second level</a:t>
             </a:r>
           </a:p>
           <a:p>
             <a:pPr lvl="2"/>
             <a:r>
-              <a:rPr lang="en-US"/>
+              <a:rPr lang="en-US" smtClean="0"/>
               <a:t>Third level</a:t>
             </a:r>
           </a:p>
           <a:p>
             <a:pPr lvl="3"/>
             <a:r>
-              <a:rPr lang="en-US"/>
+              <a:rPr lang="en-US" smtClean="0"/>
               <a:t>Fourth level</a:t>
             </a:r>
           </a:p>
           <a:p>
             <a:pPr lvl="4"/>
             <a:r>
-              <a:rPr lang="en-US"/>
+              <a:rPr lang="en-US" smtClean="0"/>
               <a:t>Fifth level</a:t>
             </a:r>
+            <a:endParaRPr lang="en-US"/>
           </a:p>
         </p:txBody>
       </p:sp>
@@ -705,7 +470,7 @@
           <a:p>
             <a:fld id="{5BCAD085-E8A6-8845-BD4E-CB4CCA059FC4}" type="datetimeFigureOut">
               <a:rPr lang="en-US" smtClean="0"/>
-              <a:t>9/17/2026</a:t>
+              <a:t>1/27/13</a:t>
             </a:fld>
             <a:endParaRPr lang="en-US"/>
           </a:p>
@@ -747,7 +512,7 @@
           <a:p>
             <a:fld id="{C1FF6DA9-008F-8B48-92A6-B652298478BF}" type="slidenum">
               <a:rPr lang="en-US" smtClean="0"/>
-              <a:t>‹nº›</a:t>
+              <a:t>‹#›</a:t>
             </a:fld>
             <a:endParaRPr lang="en-US"/>
           </a:p>
@@ -804,9 +569,10 @@
           <a:lstStyle/>
           <a:p>
             <a:r>
-              <a:rPr lang="en-US"/>
+              <a:rPr lang="en-US" smtClean="0"/>
               <a:t>Click to edit Master title style</a:t>
             </a:r>
+            <a:endParaRPr lang="en-US"/>
           </a:p>
         </p:txBody>
       </p:sp>
@@ -832,37 +598,38 @@
           <a:p>
             <a:pPr lvl="0"/>
             <a:r>
-              <a:rPr lang="en-US"/>
+              <a:rPr lang="en-US" smtClean="0"/>
               <a:t>Click to edit Master text styles</a:t>
             </a:r>
           </a:p>
           <a:p>
             <a:pPr lvl="1"/>
             <a:r>
-              <a:rPr lang="en-US"/>
+              <a:rPr lang="en-US" smtClean="0"/>
               <a:t>Second level</a:t>
             </a:r>
           </a:p>
           <a:p>
             <a:pPr lvl="2"/>
             <a:r>
-              <a:rPr lang="en-US"/>
+              <a:rPr lang="en-US" smtClean="0"/>
               <a:t>Third level</a:t>
             </a:r>
           </a:p>
           <a:p>
             <a:pPr lvl="3"/>
             <a:r>
-              <a:rPr lang="en-US"/>
+              <a:rPr lang="en-US" smtClean="0"/>
               <a:t>Fourth level</a:t>
             </a:r>
           </a:p>
           <a:p>
             <a:pPr lvl="4"/>
             <a:r>
-              <a:rPr lang="en-US"/>
+              <a:rPr lang="en-US" smtClean="0"/>
               <a:t>Fifth level</a:t>
             </a:r>
+            <a:endParaRPr lang="en-US"/>
           </a:p>
         </p:txBody>
       </p:sp>
@@ -883,7 +650,7 @@
           <a:p>
             <a:fld id="{5BCAD085-E8A6-8845-BD4E-CB4CCA059FC4}" type="datetimeFigureOut">
               <a:rPr lang="en-US" smtClean="0"/>
-              <a:t>9/17/2026</a:t>
+              <a:t>1/27/13</a:t>
             </a:fld>
             <a:endParaRPr lang="en-US"/>
           </a:p>
@@ -925,7 +692,7 @@
           <a:p>
             <a:fld id="{C1FF6DA9-008F-8B48-92A6-B652298478BF}" type="slidenum">
               <a:rPr lang="en-US" smtClean="0"/>
-              <a:t>‹nº›</a:t>
+              <a:t>‹#›</a:t>
             </a:fld>
             <a:endParaRPr lang="en-US"/>
           </a:p>
@@ -977,9 +744,10 @@
           <a:lstStyle/>
           <a:p>
             <a:r>
-              <a:rPr lang="en-US"/>
+              <a:rPr lang="en-US" smtClean="0"/>
               <a:t>Click to edit Master title style</a:t>
             </a:r>
+            <a:endParaRPr lang="en-US"/>
           </a:p>
         </p:txBody>
       </p:sp>
@@ -1000,37 +768,38 @@
           <a:p>
             <a:pPr lvl="0"/>
             <a:r>
-              <a:rPr lang="en-US"/>
+              <a:rPr lang="en-US" smtClean="0"/>
               <a:t>Click to edit Master text styles</a:t>
             </a:r>
           </a:p>
           <a:p>
             <a:pPr lvl="1"/>
             <a:r>
-              <a:rPr lang="en-US"/>
+              <a:rPr lang="en-US" smtClean="0"/>
               <a:t>Second level</a:t>
             </a:r>
           </a:p>
           <a:p>
             <a:pPr lvl="2"/>
             <a:r>
-              <a:rPr lang="en-US"/>
+              <a:rPr lang="en-US" smtClean="0"/>
               <a:t>Third level</a:t>
             </a:r>
           </a:p>
           <a:p>
             <a:pPr lvl="3"/>
             <a:r>
-              <a:rPr lang="en-US"/>
+              <a:rPr lang="en-US" smtClean="0"/>
               <a:t>Fourth level</a:t>
             </a:r>
           </a:p>
           <a:p>
             <a:pPr lvl="4"/>
             <a:r>
-              <a:rPr lang="en-US"/>
+              <a:rPr lang="en-US" smtClean="0"/>
               <a:t>Fifth level</a:t>
             </a:r>
+            <a:endParaRPr lang="en-US"/>
           </a:p>
         </p:txBody>
       </p:sp>
@@ -1051,7 +820,7 @@
           <a:p>
             <a:fld id="{5BCAD085-E8A6-8845-BD4E-CB4CCA059FC4}" type="datetimeFigureOut">
               <a:rPr lang="en-US" smtClean="0"/>
-              <a:t>9/17/2026</a:t>
+              <a:t>1/27/13</a:t>
             </a:fld>
             <a:endParaRPr lang="en-US"/>
           </a:p>
@@ -1093,7 +862,7 @@
           <a:p>
             <a:fld id="{C1FF6DA9-008F-8B48-92A6-B652298478BF}" type="slidenum">
               <a:rPr lang="en-US" smtClean="0"/>
-              <a:t>‹nº›</a:t>
+              <a:t>‹#›</a:t>
             </a:fld>
             <a:endParaRPr lang="en-US"/>
           </a:p>
@@ -1154,9 +923,10 @@
           </a:lstStyle>
           <a:p>
             <a:r>
-              <a:rPr lang="en-US"/>
+              <a:rPr lang="en-US" smtClean="0"/>
               <a:t>Click to edit Master title style</a:t>
             </a:r>
+            <a:endParaRPr lang="en-US"/>
           </a:p>
         </p:txBody>
       </p:sp>
@@ -1273,7 +1043,7 @@
           <a:p>
             <a:pPr lvl="0"/>
             <a:r>
-              <a:rPr lang="en-US"/>
+              <a:rPr lang="en-US" smtClean="0"/>
               <a:t>Click to edit Master text styles</a:t>
             </a:r>
           </a:p>
@@ -1296,7 +1066,7 @@
           <a:p>
             <a:fld id="{5BCAD085-E8A6-8845-BD4E-CB4CCA059FC4}" type="datetimeFigureOut">
               <a:rPr lang="en-US" smtClean="0"/>
-              <a:t>9/17/2026</a:t>
+              <a:t>1/27/13</a:t>
             </a:fld>
             <a:endParaRPr lang="en-US"/>
           </a:p>
@@ -1338,7 +1108,7 @@
           <a:p>
             <a:fld id="{C1FF6DA9-008F-8B48-92A6-B652298478BF}" type="slidenum">
               <a:rPr lang="en-US" smtClean="0"/>
-              <a:t>‹nº›</a:t>
+              <a:t>‹#›</a:t>
             </a:fld>
             <a:endParaRPr lang="en-US"/>
           </a:p>
@@ -1390,9 +1160,10 @@
           <a:lstStyle/>
           <a:p>
             <a:r>
-              <a:rPr lang="en-US"/>
+              <a:rPr lang="en-US" smtClean="0"/>
               <a:t>Click to edit Master title style</a:t>
             </a:r>
+            <a:endParaRPr lang="en-US"/>
           </a:p>
         </p:txBody>
       </p:sp>
@@ -1446,37 +1217,38 @@
           <a:p>
             <a:pPr lvl="0"/>
             <a:r>
-              <a:rPr lang="en-US"/>
+              <a:rPr lang="en-US" smtClean="0"/>
               <a:t>Click to edit Master text styles</a:t>
             </a:r>
           </a:p>
           <a:p>
             <a:pPr lvl="1"/>
             <a:r>
-              <a:rPr lang="en-US"/>
+              <a:rPr lang="en-US" smtClean="0"/>
               <a:t>Second level</a:t>
             </a:r>
           </a:p>
           <a:p>
             <a:pPr lvl="2"/>
             <a:r>
-              <a:rPr lang="en-US"/>
+              <a:rPr lang="en-US" smtClean="0"/>
               <a:t>Third level</a:t>
             </a:r>
           </a:p>
           <a:p>
             <a:pPr lvl="3"/>
             <a:r>
-              <a:rPr lang="en-US"/>
+              <a:rPr lang="en-US" smtClean="0"/>
               <a:t>Fourth level</a:t>
             </a:r>
           </a:p>
           <a:p>
             <a:pPr lvl="4"/>
             <a:r>
-              <a:rPr lang="en-US"/>
+              <a:rPr lang="en-US" smtClean="0"/>
               <a:t>Fifth level</a:t>
             </a:r>
+            <a:endParaRPr lang="en-US"/>
           </a:p>
         </p:txBody>
       </p:sp>
@@ -1530,37 +1302,38 @@
           <a:p>
             <a:pPr lvl="0"/>
             <a:r>
-              <a:rPr lang="en-US"/>
+              <a:rPr lang="en-US" smtClean="0"/>
               <a:t>Click to edit Master text styles</a:t>
             </a:r>
           </a:p>
           <a:p>
             <a:pPr lvl="1"/>
             <a:r>
-              <a:rPr lang="en-US"/>
+              <a:rPr lang="en-US" smtClean="0"/>
               <a:t>Second level</a:t>
             </a:r>
           </a:p>
           <a:p>
             <a:pPr lvl="2"/>
             <a:r>
-              <a:rPr lang="en-US"/>
+              <a:rPr lang="en-US" smtClean="0"/>
               <a:t>Third level</a:t>
             </a:r>
           </a:p>
           <a:p>
             <a:pPr lvl="3"/>
             <a:r>
-              <a:rPr lang="en-US"/>
+              <a:rPr lang="en-US" smtClean="0"/>
               <a:t>Fourth level</a:t>
             </a:r>
           </a:p>
           <a:p>
             <a:pPr lvl="4"/>
             <a:r>
-              <a:rPr lang="en-US"/>
+              <a:rPr lang="en-US" smtClean="0"/>
               <a:t>Fifth level</a:t>
             </a:r>
+            <a:endParaRPr lang="en-US"/>
           </a:p>
         </p:txBody>
       </p:sp>
@@ -1581,7 +1354,7 @@
           <a:p>
             <a:fld id="{5BCAD085-E8A6-8845-BD4E-CB4CCA059FC4}" type="datetimeFigureOut">
               <a:rPr lang="en-US" smtClean="0"/>
-              <a:t>9/17/2026</a:t>
+              <a:t>1/27/13</a:t>
             </a:fld>
             <a:endParaRPr lang="en-US"/>
           </a:p>
@@ -1623,7 +1396,7 @@
           <a:p>
             <a:fld id="{C1FF6DA9-008F-8B48-92A6-B652298478BF}" type="slidenum">
               <a:rPr lang="en-US" smtClean="0"/>
-              <a:t>‹nº›</a:t>
+              <a:t>‹#›</a:t>
             </a:fld>
             <a:endParaRPr lang="en-US"/>
           </a:p>
@@ -1679,9 +1452,10 @@
           </a:lstStyle>
           <a:p>
             <a:r>
-              <a:rPr lang="en-US"/>
+              <a:rPr lang="en-US" smtClean="0"/>
               <a:t>Click to edit Master title style</a:t>
             </a:r>
+            <a:endParaRPr lang="en-US"/>
           </a:p>
         </p:txBody>
       </p:sp>
@@ -1744,7 +1518,7 @@
           <a:p>
             <a:pPr lvl="0"/>
             <a:r>
-              <a:rPr lang="en-US"/>
+              <a:rPr lang="en-US" smtClean="0"/>
               <a:t>Click to edit Master text styles</a:t>
             </a:r>
           </a:p>
@@ -1800,37 +1574,38 @@
           <a:p>
             <a:pPr lvl="0"/>
             <a:r>
-              <a:rPr lang="en-US"/>
+              <a:rPr lang="en-US" smtClean="0"/>
               <a:t>Click to edit Master text styles</a:t>
             </a:r>
           </a:p>
           <a:p>
             <a:pPr lvl="1"/>
             <a:r>
-              <a:rPr lang="en-US"/>
+              <a:rPr lang="en-US" smtClean="0"/>
               <a:t>Second level</a:t>
             </a:r>
           </a:p>
           <a:p>
             <a:pPr lvl="2"/>
             <a:r>
-              <a:rPr lang="en-US"/>
+              <a:rPr lang="en-US" smtClean="0"/>
               <a:t>Third level</a:t>
             </a:r>
           </a:p>
           <a:p>
             <a:pPr lvl="3"/>
             <a:r>
-              <a:rPr lang="en-US"/>
+              <a:rPr lang="en-US" smtClean="0"/>
               <a:t>Fourth level</a:t>
             </a:r>
           </a:p>
           <a:p>
             <a:pPr lvl="4"/>
             <a:r>
-              <a:rPr lang="en-US"/>
+              <a:rPr lang="en-US" smtClean="0"/>
               <a:t>Fifth level</a:t>
             </a:r>
+            <a:endParaRPr lang="en-US"/>
           </a:p>
         </p:txBody>
       </p:sp>
@@ -1893,7 +1668,7 @@
           <a:p>
             <a:pPr lvl="0"/>
             <a:r>
-              <a:rPr lang="en-US"/>
+              <a:rPr lang="en-US" smtClean="0"/>
               <a:t>Click to edit Master text styles</a:t>
             </a:r>
           </a:p>
@@ -1949,37 +1724,38 @@
           <a:p>
             <a:pPr lvl="0"/>
             <a:r>
-              <a:rPr lang="en-US"/>
+              <a:rPr lang="en-US" smtClean="0"/>
               <a:t>Click to edit Master text styles</a:t>
             </a:r>
           </a:p>
           <a:p>
             <a:pPr lvl="1"/>
             <a:r>
-              <a:rPr lang="en-US"/>
+              <a:rPr lang="en-US" smtClean="0"/>
               <a:t>Second level</a:t>
             </a:r>
           </a:p>
           <a:p>
             <a:pPr lvl="2"/>
             <a:r>
-              <a:rPr lang="en-US"/>
+              <a:rPr lang="en-US" smtClean="0"/>
               <a:t>Third level</a:t>
             </a:r>
           </a:p>
           <a:p>
             <a:pPr lvl="3"/>
             <a:r>
-              <a:rPr lang="en-US"/>
+              <a:rPr lang="en-US" smtClean="0"/>
               <a:t>Fourth level</a:t>
             </a:r>
           </a:p>
           <a:p>
             <a:pPr lvl="4"/>
             <a:r>
-              <a:rPr lang="en-US"/>
+              <a:rPr lang="en-US" smtClean="0"/>
               <a:t>Fifth level</a:t>
             </a:r>
+            <a:endParaRPr lang="en-US"/>
           </a:p>
         </p:txBody>
       </p:sp>
@@ -2000,7 +1776,7 @@
           <a:p>
             <a:fld id="{5BCAD085-E8A6-8845-BD4E-CB4CCA059FC4}" type="datetimeFigureOut">
               <a:rPr lang="en-US" smtClean="0"/>
-              <a:t>9/17/2026</a:t>
+              <a:t>1/27/13</a:t>
             </a:fld>
             <a:endParaRPr lang="en-US"/>
           </a:p>
@@ -2042,7 +1818,7 @@
           <a:p>
             <a:fld id="{C1FF6DA9-008F-8B48-92A6-B652298478BF}" type="slidenum">
               <a:rPr lang="en-US" smtClean="0"/>
-              <a:t>‹nº›</a:t>
+              <a:t>‹#›</a:t>
             </a:fld>
             <a:endParaRPr lang="en-US"/>
           </a:p>
@@ -2094,9 +1870,10 @@
           <a:lstStyle/>
           <a:p>
             <a:r>
-              <a:rPr lang="en-US"/>
+              <a:rPr lang="en-US" smtClean="0"/>
               <a:t>Click to edit Master title style</a:t>
             </a:r>
+            <a:endParaRPr lang="en-US"/>
           </a:p>
         </p:txBody>
       </p:sp>
@@ -2117,7 +1894,7 @@
           <a:p>
             <a:fld id="{5BCAD085-E8A6-8845-BD4E-CB4CCA059FC4}" type="datetimeFigureOut">
               <a:rPr lang="en-US" smtClean="0"/>
-              <a:t>9/17/2026</a:t>
+              <a:t>1/27/13</a:t>
             </a:fld>
             <a:endParaRPr lang="en-US"/>
           </a:p>
@@ -2159,7 +1936,7 @@
           <a:p>
             <a:fld id="{C1FF6DA9-008F-8B48-92A6-B652298478BF}" type="slidenum">
               <a:rPr lang="en-US" smtClean="0"/>
-              <a:t>‹nº›</a:t>
+              <a:t>‹#›</a:t>
             </a:fld>
             <a:endParaRPr lang="en-US"/>
           </a:p>
@@ -2212,7 +1989,7 @@
           <a:p>
             <a:fld id="{5BCAD085-E8A6-8845-BD4E-CB4CCA059FC4}" type="datetimeFigureOut">
               <a:rPr lang="en-US" smtClean="0"/>
-              <a:t>9/17/2026</a:t>
+              <a:t>1/27/13</a:t>
             </a:fld>
             <a:endParaRPr lang="en-US"/>
           </a:p>
@@ -2254,7 +2031,7 @@
           <a:p>
             <a:fld id="{C1FF6DA9-008F-8B48-92A6-B652298478BF}" type="slidenum">
               <a:rPr lang="en-US" smtClean="0"/>
-              <a:t>‹nº›</a:t>
+              <a:t>‹#›</a:t>
             </a:fld>
             <a:endParaRPr lang="en-US"/>
           </a:p>
@@ -2315,9 +2092,10 @@
           </a:lstStyle>
           <a:p>
             <a:r>
-              <a:rPr lang="en-US"/>
+              <a:rPr lang="en-US" smtClean="0"/>
               <a:t>Click to edit Master title style</a:t>
             </a:r>
+            <a:endParaRPr lang="en-US"/>
           </a:p>
         </p:txBody>
       </p:sp>
@@ -2371,37 +2149,38 @@
           <a:p>
             <a:pPr lvl="0"/>
             <a:r>
-              <a:rPr lang="en-US"/>
+              <a:rPr lang="en-US" smtClean="0"/>
               <a:t>Click to edit Master text styles</a:t>
             </a:r>
           </a:p>
           <a:p>
             <a:pPr lvl="1"/>
             <a:r>
-              <a:rPr lang="en-US"/>
+              <a:rPr lang="en-US" smtClean="0"/>
               <a:t>Second level</a:t>
             </a:r>
           </a:p>
           <a:p>
             <a:pPr lvl="2"/>
             <a:r>
-              <a:rPr lang="en-US"/>
+              <a:rPr lang="en-US" smtClean="0"/>
               <a:t>Third level</a:t>
             </a:r>
           </a:p>
           <a:p>
             <a:pPr lvl="3"/>
             <a:r>
-              <a:rPr lang="en-US"/>
+              <a:rPr lang="en-US" smtClean="0"/>
               <a:t>Fourth level</a:t>
             </a:r>
           </a:p>
           <a:p>
             <a:pPr lvl="4"/>
             <a:r>
-              <a:rPr lang="en-US"/>
+              <a:rPr lang="en-US" smtClean="0"/>
               <a:t>Fifth level</a:t>
             </a:r>
+            <a:endParaRPr lang="en-US"/>
           </a:p>
         </p:txBody>
       </p:sp>
@@ -2464,7 +2243,7 @@
           <a:p>
             <a:pPr lvl="0"/>
             <a:r>
-              <a:rPr lang="en-US"/>
+              <a:rPr lang="en-US" smtClean="0"/>
               <a:t>Click to edit Master text styles</a:t>
             </a:r>
           </a:p>
@@ -2487,7 +2266,7 @@
           <a:p>
             <a:fld id="{5BCAD085-E8A6-8845-BD4E-CB4CCA059FC4}" type="datetimeFigureOut">
               <a:rPr lang="en-US" smtClean="0"/>
-              <a:t>9/17/2026</a:t>
+              <a:t>1/27/13</a:t>
             </a:fld>
             <a:endParaRPr lang="en-US"/>
           </a:p>
@@ -2529,7 +2308,7 @@
           <a:p>
             <a:fld id="{C1FF6DA9-008F-8B48-92A6-B652298478BF}" type="slidenum">
               <a:rPr lang="en-US" smtClean="0"/>
-              <a:t>‹nº›</a:t>
+              <a:t>‹#›</a:t>
             </a:fld>
             <a:endParaRPr lang="en-US"/>
           </a:p>
@@ -2590,9 +2369,10 @@
           </a:lstStyle>
           <a:p>
             <a:r>
-              <a:rPr lang="en-US"/>
+              <a:rPr lang="en-US" smtClean="0"/>
               <a:t>Click to edit Master title style</a:t>
             </a:r>
+            <a:endParaRPr lang="en-US"/>
           </a:p>
         </p:txBody>
       </p:sp>
@@ -2716,7 +2496,7 @@
           <a:p>
             <a:pPr lvl="0"/>
             <a:r>
-              <a:rPr lang="en-US"/>
+              <a:rPr lang="en-US" smtClean="0"/>
               <a:t>Click to edit Master text styles</a:t>
             </a:r>
           </a:p>
@@ -2739,7 +2519,7 @@
           <a:p>
             <a:fld id="{5BCAD085-E8A6-8845-BD4E-CB4CCA059FC4}" type="datetimeFigureOut">
               <a:rPr lang="en-US" smtClean="0"/>
-              <a:t>9/17/2026</a:t>
+              <a:t>1/27/13</a:t>
             </a:fld>
             <a:endParaRPr lang="en-US"/>
           </a:p>
@@ -2781,7 +2561,7 @@
           <a:p>
             <a:fld id="{C1FF6DA9-008F-8B48-92A6-B652298478BF}" type="slidenum">
               <a:rPr lang="en-US" smtClean="0"/>
-              <a:t>‹nº›</a:t>
+              <a:t>‹#›</a:t>
             </a:fld>
             <a:endParaRPr lang="en-US"/>
           </a:p>
@@ -2848,9 +2628,10 @@
           <a:lstStyle/>
           <a:p>
             <a:r>
-              <a:rPr lang="en-US"/>
+              <a:rPr lang="en-US" smtClean="0"/>
               <a:t>Click to edit Master title style</a:t>
             </a:r>
+            <a:endParaRPr lang="en-US"/>
           </a:p>
         </p:txBody>
       </p:sp>
@@ -2881,37 +2662,38 @@
           <a:p>
             <a:pPr lvl="0"/>
             <a:r>
-              <a:rPr lang="en-US"/>
+              <a:rPr lang="en-US" smtClean="0"/>
               <a:t>Click to edit Master text styles</a:t>
             </a:r>
           </a:p>
           <a:p>
             <a:pPr lvl="1"/>
             <a:r>
-              <a:rPr lang="en-US"/>
+              <a:rPr lang="en-US" smtClean="0"/>
               <a:t>Second level</a:t>
             </a:r>
           </a:p>
           <a:p>
             <a:pPr lvl="2"/>
             <a:r>
-              <a:rPr lang="en-US"/>
+              <a:rPr lang="en-US" smtClean="0"/>
               <a:t>Third level</a:t>
             </a:r>
           </a:p>
           <a:p>
             <a:pPr lvl="3"/>
             <a:r>
-              <a:rPr lang="en-US"/>
+              <a:rPr lang="en-US" smtClean="0"/>
               <a:t>Fourth level</a:t>
             </a:r>
           </a:p>
           <a:p>
             <a:pPr lvl="4"/>
             <a:r>
-              <a:rPr lang="en-US"/>
+              <a:rPr lang="en-US" smtClean="0"/>
               <a:t>Fifth level</a:t>
             </a:r>
+            <a:endParaRPr lang="en-US"/>
           </a:p>
         </p:txBody>
       </p:sp>
@@ -2950,7 +2732,7 @@
           <a:p>
             <a:fld id="{5BCAD085-E8A6-8845-BD4E-CB4CCA059FC4}" type="datetimeFigureOut">
               <a:rPr lang="en-US" smtClean="0"/>
-              <a:t>9/17/2026</a:t>
+              <a:t>1/27/13</a:t>
             </a:fld>
             <a:endParaRPr lang="en-US"/>
           </a:p>
@@ -3028,7 +2810,7 @@
           <a:p>
             <a:fld id="{C1FF6DA9-008F-8B48-92A6-B652298478BF}" type="slidenum">
               <a:rPr lang="en-US" smtClean="0"/>
-              <a:t>‹nº›</a:t>
+              <a:t>‹#›</a:t>
             </a:fld>
             <a:endParaRPr lang="en-US"/>
           </a:p>
@@ -3309,7 +3091,7 @@
 </file>
 
 <file path=ppt/slides/slide1.xml><?xml version="1.0" encoding="utf-8"?>
-<p:sld xmlns:a="http://schemas.openxmlformats.org/drawingml/2006/main" xmlns:r="http://schemas.openxmlformats.org/officeDocument/2006/relationships" xmlns:p="http://schemas.openxmlformats.org/presentationml/2006/main">
+<p:sld xmlns:a="http://schemas.openxmlformats.org/drawingml/2006/main" xmlns:p="http://schemas.openxmlformats.org/presentationml/2006/main" xmlns:r="http://schemas.openxmlformats.org/officeDocument/2006/relationships">
   <p:cSld>
     <p:spTree>
       <p:nvGrpSpPr>
@@ -3317,14 +3099,7 @@
         <p:cNvGrpSpPr/>
         <p:nvPr/>
       </p:nvGrpSpPr>
-      <p:grpSpPr>
-        <a:xfrm>
-          <a:off x="0" y="0"/>
-          <a:ext cx="0" cy="0"/>
-          <a:chOff x="0" y="0"/>
-          <a:chExt cx="0" cy="0"/>
-        </a:xfrm>
-      </p:grpSpPr>
+      <p:grpSpPr/>
       <p:sp>
         <p:nvSpPr>
           <p:cNvPr id="2" name="Rectangle 1"/>
@@ -3365,7 +3140,6 @@
           <a:lstStyle/>
           <a:p>
             <a:pPr algn="ctr"/>
-            <a:endParaRPr/>
           </a:p>
         </p:txBody>
       </p:sp>
@@ -3377,8 +3151,8 @@
         </p:nvSpPr>
         <p:spPr>
           <a:xfrm>
-            <a:off x="822959" y="320040"/>
-            <a:ext cx="8085067" cy="1477328"/>
+            <a:off x="822960" y="274320"/>
+            <a:ext cx="6858000" cy="1508760"/>
           </a:xfrm>
           <a:prstGeom prst="rect">
             <a:avLst/>
@@ -3391,128 +3165,80 @@
           </a:bodyPr>
           <a:lstStyle/>
           <a:p>
-            <a:pPr algn="just">
-              <a:defRPr sz="1600">
-                <a:solidFill>
-                  <a:srgbClr val="F1F5F9"/>
-                </a:solidFill>
-                <a:latin typeface="Segoe UI"/>
-              </a:defRPr>
-            </a:pPr>
-            <a:r>
-              <a:rPr sz="1600" dirty="0">
-                <a:solidFill>
-                  <a:srgbClr val="F1F5F9"/>
-                </a:solidFill>
-                <a:latin typeface="Segoe UI"/>
-              </a:rPr>
+            <a:pPr>
+              <a:defRPr sz="1150" b="1">
+                <a:solidFill>
+                  <a:srgbClr val="FFFFFF"/>
+                </a:solidFill>
+                <a:latin typeface="Segoe UI"/>
+              </a:defRPr>
+            </a:pPr>
+            <a:r>
               <a:t>UNIVERSIDADE ESTADUAL DO MARANHÃO – UEMA</a:t>
             </a:r>
           </a:p>
           <a:p>
-            <a:pPr algn="just">
-              <a:defRPr sz="1600">
-                <a:solidFill>
-                  <a:srgbClr val="F1F5F9"/>
-                </a:solidFill>
-                <a:latin typeface="Segoe UI"/>
-              </a:defRPr>
-            </a:pPr>
-            <a:r>
-              <a:rPr sz="1600" dirty="0">
-                <a:solidFill>
-                  <a:srgbClr val="F1F5F9"/>
-                </a:solidFill>
-                <a:latin typeface="Segoe UI"/>
-              </a:rPr>
+            <a:pPr>
+              <a:defRPr sz="1050" b="1">
+                <a:solidFill>
+                  <a:srgbClr val="4ADE80"/>
+                </a:solidFill>
+                <a:latin typeface="Segoe UI"/>
+              </a:defRPr>
+            </a:pPr>
+            <a:r>
               <a:t>NÚCLEO DE TECNOLOGIAS PARA EDUCAÇÃO – UEMANET</a:t>
             </a:r>
           </a:p>
           <a:p>
-            <a:pPr algn="just">
-              <a:defRPr sz="1600">
-                <a:solidFill>
-                  <a:srgbClr val="F1F5F9"/>
-                </a:solidFill>
-                <a:latin typeface="Segoe UI"/>
-              </a:defRPr>
-            </a:pPr>
-            <a:r>
-              <a:rPr sz="1600" dirty="0">
-                <a:solidFill>
-                  <a:srgbClr val="F1F5F9"/>
-                </a:solidFill>
-                <a:latin typeface="Segoe UI"/>
-              </a:rPr>
+            <a:pPr>
+              <a:defRPr sz="950" b="1">
+                <a:solidFill>
+                  <a:srgbClr val="E2E8F0"/>
+                </a:solidFill>
+                <a:latin typeface="Segoe UI"/>
+              </a:defRPr>
+            </a:pPr>
+            <a:r>
               <a:t>CURSO SUPERIOR DE TECNOLOGIA EM ANÁLISE E DESENVOLVIMENTO DE SISTEMAS</a:t>
             </a:r>
           </a:p>
           <a:p>
-            <a:pPr algn="just">
-              <a:defRPr sz="1600">
-                <a:solidFill>
-                  <a:srgbClr val="F1F5F9"/>
-                </a:solidFill>
-                <a:latin typeface="Segoe UI"/>
-              </a:defRPr>
-            </a:pPr>
-            <a:r>
-              <a:rPr sz="1600" dirty="0">
-                <a:solidFill>
-                  <a:srgbClr val="F1F5F9"/>
-                </a:solidFill>
-                <a:latin typeface="Segoe UI"/>
-              </a:rPr>
+            <a:pPr>
+              <a:defRPr sz="900" b="1">
+                <a:solidFill>
+                  <a:srgbClr val="CBD5E1"/>
+                </a:solidFill>
+                <a:latin typeface="Segoe UI"/>
+              </a:defRPr>
+            </a:pPr>
+            <a:r>
               <a:t>DISCIPLINA: DESENVOLVIMENTO WEB</a:t>
             </a:r>
-            <a:endParaRPr lang="pt-BR" sz="1600" dirty="0">
-              <a:solidFill>
-                <a:srgbClr val="F1F5F9"/>
-              </a:solidFill>
-              <a:latin typeface="Segoe UI"/>
-            </a:endParaRPr>
-          </a:p>
-          <a:p>
-            <a:pPr algn="just">
-              <a:defRPr sz="1600">
-                <a:solidFill>
-                  <a:srgbClr val="F1F5F9"/>
-                </a:solidFill>
-                <a:latin typeface="Segoe UI"/>
-              </a:defRPr>
-            </a:pPr>
-            <a:r>
-              <a:rPr sz="1600" dirty="0">
-                <a:solidFill>
-                  <a:srgbClr val="F1F5F9"/>
-                </a:solidFill>
-                <a:latin typeface="Segoe UI"/>
-              </a:rPr>
-              <a:t>DOCENTE: PROF. EDILSON CARLOS SILVA LIMA </a:t>
-            </a:r>
-            <a:endParaRPr lang="pt-BR" sz="1600" dirty="0">
-              <a:solidFill>
-                <a:srgbClr val="F1F5F9"/>
-              </a:solidFill>
-              <a:latin typeface="Segoe UI"/>
-            </a:endParaRPr>
-          </a:p>
-          <a:p>
-            <a:pPr algn="just">
-              <a:defRPr sz="1600">
-                <a:solidFill>
-                  <a:srgbClr val="F1F5F9"/>
-                </a:solidFill>
-                <a:latin typeface="Segoe UI"/>
-              </a:defRPr>
-            </a:pPr>
-            <a:r>
-              <a:rPr sz="1600" dirty="0">
-                <a:solidFill>
-                  <a:srgbClr val="F1F5F9"/>
-                </a:solidFill>
-                <a:latin typeface="Segoe UI"/>
-              </a:rPr>
+          </a:p>
+          <a:p>
+            <a:pPr>
+              <a:defRPr sz="900" b="1">
+                <a:solidFill>
+                  <a:srgbClr val="CBD5E1"/>
+                </a:solidFill>
+                <a:latin typeface="Segoe UI"/>
+              </a:defRPr>
+            </a:pPr>
+            <a:r>
+              <a:t>DOCENTE: PROF. EDILSON CARLOS SILVA LIMA</a:t>
+            </a:r>
+          </a:p>
+          <a:p>
+            <a:pPr>
+              <a:defRPr sz="900" b="1">
+                <a:solidFill>
+                  <a:srgbClr val="CBD5E1"/>
+                </a:solidFill>
+                <a:latin typeface="Segoe UI"/>
+              </a:defRPr>
+            </a:pPr>
+            <a:r>
               <a:t>TUTORA: PROF.ª SIMONE</a:t>
             </a:r>
           </a:p>
@@ -3558,7 +3284,6 @@
           <a:lstStyle/>
           <a:p>
             <a:pPr algn="ctr"/>
-            <a:endParaRPr/>
           </a:p>
         </p:txBody>
       </p:sp>
@@ -3600,7 +3325,7 @@
           </a:fontRef>
         </p:style>
         <p:txBody>
-          <a:bodyPr tIns="54864" rtlCol="0" anchor="ctr"/>
+          <a:bodyPr rtlCol="0" anchor="ctr" tIns="54864"/>
           <a:lstStyle/>
           <a:p>
             <a:pPr algn="ctr">
@@ -3701,48 +3426,7 @@
               </a:defRPr>
             </a:pPr>
             <a:r>
-              <a:rPr dirty="0"/>
-              <a:t>Plataforma Web </a:t>
-            </a:r>
-            <a:r>
-              <a:rPr dirty="0" err="1"/>
-              <a:t>Comunitária</a:t>
-            </a:r>
-            <a:r>
-              <a:rPr dirty="0"/>
-              <a:t> de </a:t>
-            </a:r>
-            <a:r>
-              <a:rPr dirty="0" err="1"/>
-              <a:t>Mapeamento</a:t>
-            </a:r>
-            <a:r>
-              <a:rPr dirty="0"/>
-              <a:t>, </a:t>
-            </a:r>
-            <a:r>
-              <a:rPr dirty="0" err="1"/>
-              <a:t>Solidariedade</a:t>
-            </a:r>
-            <a:r>
-              <a:rPr dirty="0"/>
-              <a:t> e </a:t>
-            </a:r>
-            <a:r>
-              <a:rPr dirty="0" err="1"/>
-              <a:t>Resiliência</a:t>
-            </a:r>
-            <a:r>
-              <a:rPr dirty="0"/>
-              <a:t> </a:t>
-            </a:r>
-            <a:r>
-              <a:rPr dirty="0" err="1"/>
-              <a:t>Alimentar</a:t>
-            </a:r>
-            <a:r>
-              <a:rPr dirty="0"/>
-              <a:t> no Interior do Maranhão</a:t>
+              <a:t>Plataforma Web Comunitária de Mapeamento, Solidariedade e Resiliência Alimentar no Interior do Maranhão</a:t>
             </a:r>
           </a:p>
           <a:p>
@@ -3755,62 +3439,8 @@
               </a:defRPr>
             </a:pPr>
             <a:r>
-              <a:rPr dirty="0"/>
-              <a:t>Uma </a:t>
-            </a:r>
-            <a:r>
-              <a:rPr dirty="0" err="1"/>
-              <a:t>ponte</a:t>
-            </a:r>
-            <a:r>
-              <a:rPr dirty="0"/>
-              <a:t> digital entre a </a:t>
-            </a:r>
-            <a:r>
-              <a:rPr dirty="0" err="1"/>
-              <a:t>generosidade</a:t>
-            </a:r>
-            <a:r>
-              <a:rPr dirty="0"/>
-              <a:t> de quem </a:t>
-            </a:r>
-            <a:r>
-              <a:rPr dirty="0" err="1"/>
-              <a:t>pode</a:t>
-            </a:r>
-            <a:r>
-              <a:rPr dirty="0"/>
-              <a:t> </a:t>
-            </a:r>
-            <a:r>
-              <a:rPr dirty="0" err="1"/>
-              <a:t>doar</a:t>
-            </a:r>
-            <a:r>
-              <a:rPr dirty="0"/>
-              <a:t> e a </a:t>
-            </a:r>
-            <a:r>
-              <a:rPr dirty="0" err="1"/>
-              <a:t>dignidade</a:t>
-            </a:r>
-            <a:r>
-              <a:rPr dirty="0"/>
-              <a:t> de quem </a:t>
-            </a:r>
-            <a:r>
-              <a:rPr dirty="0" err="1"/>
-              <a:t>precisa</a:t>
-            </a:r>
-            <a:r>
-              <a:rPr dirty="0"/>
-              <a:t> </a:t>
-            </a:r>
-            <a:r>
-              <a:rPr dirty="0" err="1"/>
-              <a:t>receber</a:t>
-            </a:r>
-            <a:endParaRPr dirty="0"/>
+              <a:t>Uma ponte digital entre a generosidade de quem pode doar e a dignidade de quem precisa receber</a:t>
+            </a:r>
           </a:p>
         </p:txBody>
       </p:sp>
@@ -3852,7 +3482,7 @@
           </a:fontRef>
         </p:style>
         <p:txBody>
-          <a:bodyPr tIns="164592" rtlCol="0" anchor="ctr"/>
+          <a:bodyPr rtlCol="0" anchor="ctr" tIns="164592"/>
           <a:lstStyle/>
           <a:p>
             <a:pPr algn="ctr">
@@ -3904,7 +3534,7 @@
 </file>
 
 <file path=ppt/slides/slide10.xml><?xml version="1.0" encoding="utf-8"?>
-<p:sld xmlns:a="http://schemas.openxmlformats.org/drawingml/2006/main" xmlns:r="http://schemas.openxmlformats.org/officeDocument/2006/relationships" xmlns:p="http://schemas.openxmlformats.org/presentationml/2006/main">
+<p:sld xmlns:a="http://schemas.openxmlformats.org/drawingml/2006/main" xmlns:p="http://schemas.openxmlformats.org/presentationml/2006/main" xmlns:r="http://schemas.openxmlformats.org/officeDocument/2006/relationships">
   <p:cSld>
     <p:spTree>
       <p:nvGrpSpPr>
@@ -3912,14 +3542,7 @@
         <p:cNvGrpSpPr/>
         <p:nvPr/>
       </p:nvGrpSpPr>
-      <p:grpSpPr>
-        <a:xfrm>
-          <a:off x="0" y="0"/>
-          <a:ext cx="0" cy="0"/>
-          <a:chOff x="0" y="0"/>
-          <a:chExt cx="0" cy="0"/>
-        </a:xfrm>
-      </p:grpSpPr>
+      <p:grpSpPr/>
       <p:sp>
         <p:nvSpPr>
           <p:cNvPr id="2" name="TextBox 1"/>
@@ -3994,7 +3617,7 @@
           </a:fontRef>
         </p:style>
         <p:txBody>
-          <a:bodyPr tIns="54864" rtlCol="0" anchor="ctr"/>
+          <a:bodyPr rtlCol="0" anchor="ctr" tIns="54864"/>
           <a:lstStyle/>
           <a:p>
             <a:pPr algn="ctr">
@@ -4051,7 +3674,6 @@
           <a:lstStyle/>
           <a:p>
             <a:pPr algn="ctr"/>
-            <a:endParaRPr/>
           </a:p>
         </p:txBody>
       </p:sp>
@@ -4095,7 +3717,6 @@
           <a:lstStyle/>
           <a:p>
             <a:pPr algn="ctr"/>
-            <a:endParaRPr/>
           </a:p>
         </p:txBody>
       </p:sp>
@@ -4213,7 +3834,6 @@
           <a:lstStyle/>
           <a:p>
             <a:pPr algn="ctr"/>
-            <a:endParaRPr/>
           </a:p>
         </p:txBody>
       </p:sp>
@@ -4355,7 +3975,6 @@
           <a:lstStyle/>
           <a:p>
             <a:pPr algn="ctr"/>
-            <a:endParaRPr/>
           </a:p>
         </p:txBody>
       </p:sp>
@@ -4464,7 +4083,7 @@
 </file>
 
 <file path=ppt/slides/slide11.xml><?xml version="1.0" encoding="utf-8"?>
-<p:sld xmlns:a="http://schemas.openxmlformats.org/drawingml/2006/main" xmlns:r="http://schemas.openxmlformats.org/officeDocument/2006/relationships" xmlns:p="http://schemas.openxmlformats.org/presentationml/2006/main">
+<p:sld xmlns:a="http://schemas.openxmlformats.org/drawingml/2006/main" xmlns:p="http://schemas.openxmlformats.org/presentationml/2006/main" xmlns:r="http://schemas.openxmlformats.org/officeDocument/2006/relationships">
   <p:cSld>
     <p:spTree>
       <p:nvGrpSpPr>
@@ -4472,14 +4091,7 @@
         <p:cNvGrpSpPr/>
         <p:nvPr/>
       </p:nvGrpSpPr>
-      <p:grpSpPr>
-        <a:xfrm>
-          <a:off x="0" y="0"/>
-          <a:ext cx="0" cy="0"/>
-          <a:chOff x="0" y="0"/>
-          <a:chExt cx="0" cy="0"/>
-        </a:xfrm>
-      </p:grpSpPr>
+      <p:grpSpPr/>
       <p:sp>
         <p:nvSpPr>
           <p:cNvPr id="2" name="TextBox 1"/>
@@ -4554,7 +4166,7 @@
           </a:fontRef>
         </p:style>
         <p:txBody>
-          <a:bodyPr tIns="54864" rtlCol="0" anchor="ctr"/>
+          <a:bodyPr rtlCol="0" anchor="ctr" tIns="54864"/>
           <a:lstStyle/>
           <a:p>
             <a:pPr algn="ctr">
@@ -4611,7 +4223,6 @@
           <a:lstStyle/>
           <a:p>
             <a:pPr algn="ctr"/>
-            <a:endParaRPr/>
           </a:p>
         </p:txBody>
       </p:sp>
@@ -4655,7 +4266,6 @@
           <a:lstStyle/>
           <a:p>
             <a:pPr algn="ctr"/>
-            <a:endParaRPr/>
           </a:p>
         </p:txBody>
       </p:sp>
@@ -4773,7 +4383,6 @@
           <a:lstStyle/>
           <a:p>
             <a:pPr algn="ctr"/>
-            <a:endParaRPr/>
           </a:p>
         </p:txBody>
       </p:sp>
@@ -4915,7 +4524,6 @@
           <a:lstStyle/>
           <a:p>
             <a:pPr algn="ctr"/>
-            <a:endParaRPr/>
           </a:p>
         </p:txBody>
       </p:sp>
@@ -5024,7 +4632,7 @@
 </file>
 
 <file path=ppt/slides/slide12.xml><?xml version="1.0" encoding="utf-8"?>
-<p:sld xmlns:a="http://schemas.openxmlformats.org/drawingml/2006/main" xmlns:r="http://schemas.openxmlformats.org/officeDocument/2006/relationships" xmlns:p="http://schemas.openxmlformats.org/presentationml/2006/main">
+<p:sld xmlns:a="http://schemas.openxmlformats.org/drawingml/2006/main" xmlns:p="http://schemas.openxmlformats.org/presentationml/2006/main" xmlns:r="http://schemas.openxmlformats.org/officeDocument/2006/relationships">
   <p:cSld>
     <p:spTree>
       <p:nvGrpSpPr>
@@ -5032,14 +4640,7 @@
         <p:cNvGrpSpPr/>
         <p:nvPr/>
       </p:nvGrpSpPr>
-      <p:grpSpPr>
-        <a:xfrm>
-          <a:off x="0" y="0"/>
-          <a:ext cx="0" cy="0"/>
-          <a:chOff x="0" y="0"/>
-          <a:chExt cx="0" cy="0"/>
-        </a:xfrm>
-      </p:grpSpPr>
+      <p:grpSpPr/>
       <p:sp>
         <p:nvSpPr>
           <p:cNvPr id="2" name="TextBox 1"/>
@@ -5114,7 +4715,7 @@
           </a:fontRef>
         </p:style>
         <p:txBody>
-          <a:bodyPr tIns="54864" rtlCol="0" anchor="ctr"/>
+          <a:bodyPr rtlCol="0" anchor="ctr" tIns="54864"/>
           <a:lstStyle/>
           <a:p>
             <a:pPr algn="ctr">
@@ -5171,7 +4772,6 @@
           <a:lstStyle/>
           <a:p>
             <a:pPr algn="ctr"/>
-            <a:endParaRPr/>
           </a:p>
         </p:txBody>
       </p:sp>
@@ -5215,7 +4815,6 @@
           <a:lstStyle/>
           <a:p>
             <a:pPr algn="ctr"/>
-            <a:endParaRPr/>
           </a:p>
         </p:txBody>
       </p:sp>
@@ -5333,7 +4932,6 @@
           <a:lstStyle/>
           <a:p>
             <a:pPr algn="ctr"/>
-            <a:endParaRPr/>
           </a:p>
         </p:txBody>
       </p:sp>
@@ -5524,7 +5122,6 @@
           <a:lstStyle/>
           <a:p>
             <a:pPr algn="ctr"/>
-            <a:endParaRPr/>
           </a:p>
         </p:txBody>
       </p:sp>
@@ -5568,7 +5165,6 @@
           <a:lstStyle/>
           <a:p>
             <a:pPr algn="ctr"/>
-            <a:endParaRPr/>
           </a:p>
         </p:txBody>
       </p:sp>
@@ -5663,7 +5259,6 @@
           <a:lstStyle/>
           <a:p>
             <a:pPr algn="ctr"/>
-            <a:endParaRPr/>
           </a:p>
         </p:txBody>
       </p:sp>
@@ -5707,7 +5302,6 @@
           <a:lstStyle/>
           <a:p>
             <a:pPr algn="ctr"/>
-            <a:endParaRPr/>
           </a:p>
         </p:txBody>
       </p:sp>
@@ -5802,7 +5396,6 @@
           <a:lstStyle/>
           <a:p>
             <a:pPr algn="ctr"/>
-            <a:endParaRPr/>
           </a:p>
         </p:txBody>
       </p:sp>
@@ -5846,7 +5439,6 @@
           <a:lstStyle/>
           <a:p>
             <a:pPr algn="ctr"/>
-            <a:endParaRPr/>
           </a:p>
         </p:txBody>
       </p:sp>
@@ -5941,7 +5533,6 @@
           <a:lstStyle/>
           <a:p>
             <a:pPr algn="ctr"/>
-            <a:endParaRPr/>
           </a:p>
         </p:txBody>
       </p:sp>
@@ -5985,7 +5576,6 @@
           <a:lstStyle/>
           <a:p>
             <a:pPr algn="ctr"/>
-            <a:endParaRPr/>
           </a:p>
         </p:txBody>
       </p:sp>
@@ -6047,7 +5637,7 @@
 </file>
 
 <file path=ppt/slides/slide13.xml><?xml version="1.0" encoding="utf-8"?>
-<p:sld xmlns:a="http://schemas.openxmlformats.org/drawingml/2006/main" xmlns:r="http://schemas.openxmlformats.org/officeDocument/2006/relationships" xmlns:p="http://schemas.openxmlformats.org/presentationml/2006/main">
+<p:sld xmlns:a="http://schemas.openxmlformats.org/drawingml/2006/main" xmlns:p="http://schemas.openxmlformats.org/presentationml/2006/main" xmlns:r="http://schemas.openxmlformats.org/officeDocument/2006/relationships">
   <p:cSld>
     <p:spTree>
       <p:nvGrpSpPr>
@@ -6055,14 +5645,7 @@
         <p:cNvGrpSpPr/>
         <p:nvPr/>
       </p:nvGrpSpPr>
-      <p:grpSpPr>
-        <a:xfrm>
-          <a:off x="0" y="0"/>
-          <a:ext cx="0" cy="0"/>
-          <a:chOff x="0" y="0"/>
-          <a:chExt cx="0" cy="0"/>
-        </a:xfrm>
-      </p:grpSpPr>
+      <p:grpSpPr/>
       <p:sp>
         <p:nvSpPr>
           <p:cNvPr id="2" name="TextBox 1"/>
@@ -6137,7 +5720,7 @@
           </a:fontRef>
         </p:style>
         <p:txBody>
-          <a:bodyPr tIns="54864" rtlCol="0" anchor="ctr"/>
+          <a:bodyPr rtlCol="0" anchor="ctr" tIns="54864"/>
           <a:lstStyle/>
           <a:p>
             <a:pPr algn="ctr">
@@ -6194,7 +5777,6 @@
           <a:lstStyle/>
           <a:p>
             <a:pPr algn="ctr"/>
-            <a:endParaRPr/>
           </a:p>
         </p:txBody>
       </p:sp>
@@ -6238,7 +5820,6 @@
           <a:lstStyle/>
           <a:p>
             <a:pPr algn="ctr"/>
-            <a:endParaRPr/>
           </a:p>
         </p:txBody>
       </p:sp>
@@ -6356,7 +5937,6 @@
           <a:lstStyle/>
           <a:p>
             <a:pPr algn="ctr"/>
-            <a:endParaRPr/>
           </a:p>
         </p:txBody>
       </p:sp>
@@ -6400,7 +5980,6 @@
           <a:lstStyle/>
           <a:p>
             <a:pPr algn="ctr"/>
-            <a:endParaRPr/>
           </a:p>
         </p:txBody>
       </p:sp>
@@ -6440,6 +6019,14 @@
           </a:p>
           <a:p>
             <a:br/>
+            <a:pPr algn="just">
+              <a:defRPr sz="1150">
+                <a:solidFill>
+                  <a:srgbClr val="1E293B"/>
+                </a:solidFill>
+                <a:latin typeface="Segoe UI"/>
+              </a:defRPr>
+            </a:pPr>
             <a:r>
               <a:t>Aprendemos que um framework moderno como o React ou uma API do governo só têm valor quando resolvem um problema humano real. O código ganha vida quando serve para combater a fome e valorizar a nossa terra.</a:t>
             </a:r>
@@ -6488,7 +6075,6 @@
           <a:lstStyle/>
           <a:p>
             <a:pPr algn="ctr"/>
-            <a:endParaRPr/>
           </a:p>
         </p:txBody>
       </p:sp>
@@ -6532,7 +6118,6 @@
           <a:lstStyle/>
           <a:p>
             <a:pPr algn="ctr"/>
-            <a:endParaRPr/>
           </a:p>
         </p:txBody>
       </p:sp>
@@ -6572,6 +6157,14 @@
           </a:p>
           <a:p>
             <a:br/>
+            <a:pPr algn="just">
+              <a:defRPr sz="1150">
+                <a:solidFill>
+                  <a:srgbClr val="1E293B"/>
+                </a:solidFill>
+                <a:latin typeface="Segoe UI"/>
+              </a:defRPr>
+            </a:pPr>
             <a:r>
               <a:t>A equipe conclui esta etapa com o sistema no ar, dados reais integrados e muito orgulho do que construímos. Estamos preparados e entusiasmados para a apresentação presencial no polo de Timbiras!</a:t>
             </a:r>
@@ -6620,7 +6213,6 @@
           <a:lstStyle/>
           <a:p>
             <a:pPr algn="ctr"/>
-            <a:endParaRPr/>
           </a:p>
         </p:txBody>
       </p:sp>
@@ -6660,36 +6252,84 @@
           </a:p>
           <a:p>
             <a:br/>
+            <a:pPr algn="just">
+              <a:defRPr sz="900">
+                <a:solidFill>
+                  <a:srgbClr val="64748B"/>
+                </a:solidFill>
+                <a:latin typeface="Segoe UI"/>
+              </a:defRPr>
+            </a:pPr>
             <a:r>
               <a:t>• BRASIL. Instituto Brasileiro de Geografia e Estatística (IBGE). API de Serviços de Dados: Localidades. Rio de Janeiro: IBGE, 2026. Disponível em: &lt;https://servicodados.ibge.gov.br/api/docs/localidades&gt;. Acesso em: 17 set. 2026.</a:t>
             </a:r>
           </a:p>
           <a:p>
             <a:br/>
+            <a:pPr algn="just">
+              <a:defRPr sz="900">
+                <a:solidFill>
+                  <a:srgbClr val="64748B"/>
+                </a:solidFill>
+                <a:latin typeface="Segoe UI"/>
+              </a:defRPr>
+            </a:pPr>
             <a:r>
               <a:t>• LENNON, John. Imagine. In: Imagine. Produção: John Lennon, Yoko Ono, Phil Spector. Ascot Sound Studios: Apple Records, 1971. 1 faixa musical (3 min 3 s). Uso pedagógico e cultural.</a:t>
             </a:r>
           </a:p>
           <a:p>
             <a:br/>
+            <a:pPr algn="just">
+              <a:defRPr sz="900">
+                <a:solidFill>
+                  <a:srgbClr val="64748B"/>
+                </a:solidFill>
+                <a:latin typeface="Segoe UI"/>
+              </a:defRPr>
+            </a:pPr>
             <a:r>
               <a:t>• MDN WEB DOCS. Fetch API. Mozilla Developer Network, 2026. Disponível em: &lt;https://developer.mozilla.org/pt-BR/docs/Web/API/Fetch_API&gt;. Acesso em: 17 set. 2026.</a:t>
             </a:r>
           </a:p>
           <a:p>
             <a:br/>
+            <a:pPr algn="just">
+              <a:defRPr sz="900">
+                <a:solidFill>
+                  <a:srgbClr val="64748B"/>
+                </a:solidFill>
+                <a:latin typeface="Segoe UI"/>
+              </a:defRPr>
+            </a:pPr>
             <a:r>
               <a:t>• ORGANIZAÇÃO DAS NAÇÕES UNIDAS (ONU). Objetivo de Desenvolvimento Sustentável 2: Fome Zero e Agricultura Sustentável. Brasília: Nações Unidas Brasil, 2015. Disponível em: &lt;https://brasil.un.org/pt-br/sdgs/2&gt;. Acesso em: 17 set. 2026.</a:t>
             </a:r>
           </a:p>
           <a:p>
             <a:br/>
+            <a:pPr algn="just">
+              <a:defRPr sz="900">
+                <a:solidFill>
+                  <a:srgbClr val="64748B"/>
+                </a:solidFill>
+                <a:latin typeface="Segoe UI"/>
+              </a:defRPr>
+            </a:pPr>
             <a:r>
               <a:t>• REACT. React — A JavaScript library for building user interfaces. Versão 19. Meta Open Source, 2026. Disponível em: &lt;https://react.dev/&gt;. Acesso em: 17 set. 2026.</a:t>
             </a:r>
           </a:p>
           <a:p>
             <a:br/>
+            <a:pPr algn="just">
+              <a:defRPr sz="900">
+                <a:solidFill>
+                  <a:srgbClr val="64748B"/>
+                </a:solidFill>
+                <a:latin typeface="Segoe UI"/>
+              </a:defRPr>
+            </a:pPr>
             <a:r>
               <a:t>• VITE. Next Generation Frontend Tooling. Evan You &amp; Vite Team, 2026. Disponível em: &lt;https://vitejs.dev/&gt;. Acesso em: 17 set. 2026.</a:t>
             </a:r>
@@ -6705,7 +6345,7 @@
 </file>
 
 <file path=ppt/slides/slide2.xml><?xml version="1.0" encoding="utf-8"?>
-<p:sld xmlns:a="http://schemas.openxmlformats.org/drawingml/2006/main" xmlns:r="http://schemas.openxmlformats.org/officeDocument/2006/relationships" xmlns:p="http://schemas.openxmlformats.org/presentationml/2006/main">
+<p:sld xmlns:a="http://schemas.openxmlformats.org/drawingml/2006/main" xmlns:p="http://schemas.openxmlformats.org/presentationml/2006/main" xmlns:r="http://schemas.openxmlformats.org/officeDocument/2006/relationships">
   <p:cSld>
     <p:spTree>
       <p:nvGrpSpPr>
@@ -6713,14 +6353,7 @@
         <p:cNvGrpSpPr/>
         <p:nvPr/>
       </p:nvGrpSpPr>
-      <p:grpSpPr>
-        <a:xfrm>
-          <a:off x="0" y="0"/>
-          <a:ext cx="0" cy="0"/>
-          <a:chOff x="0" y="0"/>
-          <a:chExt cx="0" cy="0"/>
-        </a:xfrm>
-      </p:grpSpPr>
+      <p:grpSpPr/>
       <p:sp>
         <p:nvSpPr>
           <p:cNvPr id="2" name="TextBox 1"/>
@@ -6795,7 +6428,7 @@
           </a:fontRef>
         </p:style>
         <p:txBody>
-          <a:bodyPr tIns="54864" rtlCol="0" anchor="ctr"/>
+          <a:bodyPr rtlCol="0" anchor="ctr" tIns="54864"/>
           <a:lstStyle/>
           <a:p>
             <a:pPr algn="ctr">
@@ -6852,7 +6485,6 @@
           <a:lstStyle/>
           <a:p>
             <a:pPr algn="ctr"/>
-            <a:endParaRPr/>
           </a:p>
         </p:txBody>
       </p:sp>
@@ -6896,7 +6528,6 @@
           <a:lstStyle/>
           <a:p>
             <a:pPr algn="ctr"/>
-            <a:endParaRPr/>
           </a:p>
         </p:txBody>
       </p:sp>
@@ -6981,7 +6612,7 @@
         <p:spPr>
           <a:xfrm>
             <a:off x="731520" y="1234440"/>
-            <a:ext cx="5943600" cy="1862048"/>
+            <a:ext cx="5943600" cy="2377440"/>
           </a:xfrm>
           <a:prstGeom prst="rect">
             <a:avLst/>
@@ -7003,274 +6634,21 @@
               </a:defRPr>
             </a:pPr>
             <a:r>
-              <a:rPr dirty="0"/>
-              <a:t>A </a:t>
-            </a:r>
-            <a:r>
-              <a:rPr dirty="0" err="1"/>
-              <a:t>fome</a:t>
-            </a:r>
-            <a:r>
-              <a:rPr dirty="0"/>
-              <a:t> </a:t>
-            </a:r>
-            <a:r>
-              <a:rPr dirty="0" err="1"/>
-              <a:t>não</a:t>
-            </a:r>
-            <a:r>
-              <a:rPr dirty="0"/>
-              <a:t> é um </a:t>
-            </a:r>
-            <a:r>
-              <a:rPr dirty="0" err="1"/>
-              <a:t>número</a:t>
-            </a:r>
-            <a:r>
-              <a:rPr dirty="0"/>
-              <a:t> </a:t>
-            </a:r>
-            <a:r>
-              <a:rPr dirty="0" err="1"/>
-              <a:t>abstrato</a:t>
-            </a:r>
-            <a:r>
-              <a:rPr dirty="0"/>
-              <a:t>: </a:t>
-            </a:r>
-            <a:r>
-              <a:rPr dirty="0" err="1"/>
-              <a:t>ela</a:t>
-            </a:r>
-            <a:r>
-              <a:rPr dirty="0"/>
-              <a:t> </a:t>
-            </a:r>
-            <a:r>
-              <a:rPr dirty="0" err="1"/>
-              <a:t>tem</a:t>
-            </a:r>
-            <a:r>
-              <a:rPr dirty="0"/>
-              <a:t> </a:t>
-            </a:r>
-            <a:r>
-              <a:rPr dirty="0" err="1"/>
-              <a:t>nome</a:t>
-            </a:r>
-            <a:r>
-              <a:rPr dirty="0"/>
-              <a:t>, </a:t>
-            </a:r>
-            <a:r>
-              <a:rPr dirty="0" err="1"/>
-              <a:t>endereço</a:t>
-            </a:r>
-            <a:r>
-              <a:rPr dirty="0"/>
-              <a:t> e </a:t>
-            </a:r>
-            <a:r>
-              <a:rPr dirty="0" err="1"/>
-              <a:t>rosto</a:t>
-            </a:r>
-            <a:r>
-              <a:rPr dirty="0"/>
-              <a:t> </a:t>
-            </a:r>
-            <a:r>
-              <a:rPr dirty="0" err="1"/>
-              <a:t>nos</a:t>
-            </a:r>
-            <a:r>
-              <a:rPr dirty="0"/>
-              <a:t> bairros e </a:t>
-            </a:r>
-            <a:r>
-              <a:rPr dirty="0" err="1"/>
-              <a:t>na</a:t>
-            </a:r>
-            <a:r>
-              <a:rPr dirty="0"/>
-              <a:t> zona rural da </a:t>
-            </a:r>
-            <a:r>
-              <a:rPr dirty="0" err="1"/>
-              <a:t>nossa</a:t>
-            </a:r>
-            <a:r>
-              <a:rPr dirty="0"/>
-              <a:t> </a:t>
-            </a:r>
-            <a:r>
-              <a:rPr dirty="0" err="1"/>
-              <a:t>cidade</a:t>
-            </a:r>
-            <a:r>
-              <a:rPr dirty="0"/>
-              <a:t>.</a:t>
-            </a:r>
-          </a:p>
-          <a:p>
-            <a:pPr algn="just"/>
-            <a:br>
-              <a:rPr dirty="0"/>
-            </a:br>
-            <a:r>
-              <a:rPr dirty="0"/>
-              <a:t>Timbiras é </a:t>
-            </a:r>
-            <a:r>
-              <a:rPr dirty="0" err="1"/>
-              <a:t>uma</a:t>
-            </a:r>
-            <a:r>
-              <a:rPr dirty="0"/>
-              <a:t> </a:t>
-            </a:r>
-            <a:r>
-              <a:rPr dirty="0" err="1"/>
-              <a:t>cidade</a:t>
-            </a:r>
-            <a:r>
-              <a:rPr dirty="0"/>
-              <a:t> </a:t>
-            </a:r>
-            <a:r>
-              <a:rPr dirty="0" err="1"/>
-              <a:t>acolhedora</a:t>
-            </a:r>
-            <a:r>
-              <a:rPr dirty="0"/>
-              <a:t>, forte e </a:t>
-            </a:r>
-            <a:r>
-              <a:rPr dirty="0" err="1"/>
-              <a:t>trabalhadora</a:t>
-            </a:r>
-            <a:r>
-              <a:rPr dirty="0"/>
-              <a:t>, </a:t>
-            </a:r>
-            <a:r>
-              <a:rPr dirty="0" err="1"/>
-              <a:t>banhada</a:t>
-            </a:r>
-            <a:r>
-              <a:rPr dirty="0"/>
-              <a:t> </a:t>
-            </a:r>
-            <a:r>
-              <a:rPr dirty="0" err="1"/>
-              <a:t>pelas</a:t>
-            </a:r>
-            <a:r>
-              <a:rPr dirty="0"/>
-              <a:t> </a:t>
-            </a:r>
-            <a:r>
-              <a:rPr dirty="0" err="1"/>
-              <a:t>águas</a:t>
-            </a:r>
-            <a:r>
-              <a:rPr dirty="0"/>
-              <a:t> do Rio </a:t>
-            </a:r>
-            <a:r>
-              <a:rPr dirty="0" err="1"/>
-              <a:t>Itapecuru</a:t>
-            </a:r>
-            <a:r>
-              <a:rPr dirty="0"/>
-              <a:t>. Mas, </a:t>
-            </a:r>
-            <a:r>
-              <a:rPr dirty="0" err="1"/>
-              <a:t>como</a:t>
-            </a:r>
-            <a:r>
-              <a:rPr dirty="0"/>
-              <a:t> </a:t>
-            </a:r>
-            <a:r>
-              <a:rPr dirty="0" err="1"/>
-              <a:t>tantas</a:t>
-            </a:r>
-            <a:r>
-              <a:rPr dirty="0"/>
-              <a:t> </a:t>
-            </a:r>
-            <a:r>
-              <a:rPr dirty="0" err="1"/>
-              <a:t>cidades</a:t>
-            </a:r>
-            <a:r>
-              <a:rPr dirty="0"/>
-              <a:t> do interior do Maranhão, </a:t>
-            </a:r>
-            <a:r>
-              <a:rPr dirty="0" err="1"/>
-              <a:t>muitas</a:t>
-            </a:r>
-            <a:r>
-              <a:rPr dirty="0"/>
-              <a:t> </a:t>
-            </a:r>
-            <a:r>
-              <a:rPr dirty="0" err="1"/>
-              <a:t>famílias</a:t>
-            </a:r>
-            <a:r>
-              <a:rPr lang="pt-BR" dirty="0"/>
-              <a:t> </a:t>
-            </a:r>
-            <a:r>
-              <a:rPr dirty="0" err="1"/>
-              <a:t>enfrentam</a:t>
-            </a:r>
-            <a:r>
-              <a:rPr dirty="0"/>
-              <a:t> </a:t>
-            </a:r>
-            <a:r>
-              <a:rPr dirty="0" err="1"/>
-              <a:t>dias</a:t>
-            </a:r>
-            <a:r>
-              <a:rPr dirty="0"/>
-              <a:t> </a:t>
-            </a:r>
-            <a:r>
-              <a:rPr dirty="0" err="1"/>
-              <a:t>difíceis</a:t>
-            </a:r>
-            <a:r>
-              <a:rPr dirty="0"/>
-              <a:t> para </a:t>
-            </a:r>
-            <a:r>
-              <a:rPr dirty="0" err="1"/>
-              <a:t>garantir</a:t>
-            </a:r>
-            <a:r>
-              <a:rPr dirty="0"/>
-              <a:t> o </a:t>
-            </a:r>
-            <a:r>
-              <a:rPr dirty="0" err="1"/>
-              <a:t>básico</a:t>
-            </a:r>
-            <a:r>
-              <a:rPr dirty="0"/>
-              <a:t> </a:t>
-            </a:r>
-            <a:r>
-              <a:rPr dirty="0" err="1"/>
-              <a:t>na</a:t>
-            </a:r>
-            <a:r>
-              <a:rPr dirty="0"/>
-              <a:t> mesa.</a:t>
+              <a:t>A fome não é um número abstrato: ela tem nome, endereço e rosto nos bairros e na zona rural da nossa cidade.</a:t>
+            </a:r>
+          </a:p>
+          <a:p>
+            <a:br/>
+            <a:pPr algn="just">
+              <a:defRPr sz="1250">
+                <a:solidFill>
+                  <a:srgbClr val="64748B"/>
+                </a:solidFill>
+                <a:latin typeface="Segoe UI"/>
+              </a:defRPr>
+            </a:pPr>
+            <a:r>
+              <a:t>Timbiras é uma cidade acolhedora, forte e trabalhadora, banhada pelas águas do Rio Itapecuru. Mas, como tantas cidades do interior do Maranhão, muitas famílias de bairros como Forquilha, Mutirão, Alto Fogoso, Olaria e povoados rurais distantes enfrentam dias difíceis para garantir o básico na mesa.</a:t>
             </a:r>
           </a:p>
         </p:txBody>
@@ -7317,7 +6695,6 @@
           <a:lstStyle/>
           <a:p>
             <a:pPr algn="ctr"/>
-            <a:endParaRPr/>
           </a:p>
         </p:txBody>
       </p:sp>
@@ -7361,7 +6738,6 @@
           <a:lstStyle/>
           <a:p>
             <a:pPr algn="ctr"/>
-            <a:endParaRPr/>
           </a:p>
         </p:txBody>
       </p:sp>
@@ -7396,199 +6772,21 @@
               </a:defRPr>
             </a:pPr>
             <a:r>
-              <a:rPr dirty="0"/>
-              <a:t>O </a:t>
-            </a:r>
-            <a:r>
-              <a:rPr dirty="0" err="1"/>
-              <a:t>Encontro</a:t>
-            </a:r>
-            <a:r>
-              <a:rPr dirty="0"/>
-              <a:t> de Duas </a:t>
-            </a:r>
-            <a:r>
-              <a:rPr dirty="0" err="1"/>
-              <a:t>Realidades</a:t>
-            </a:r>
-            <a:endParaRPr dirty="0"/>
-          </a:p>
-          <a:p>
-            <a:pPr algn="just"/>
-            <a:br>
-              <a:rPr dirty="0"/>
-            </a:br>
-            <a:r>
-              <a:rPr dirty="0"/>
-              <a:t>De um </a:t>
-            </a:r>
-            <a:r>
-              <a:rPr dirty="0" err="1"/>
-              <a:t>lado</a:t>
-            </a:r>
-            <a:r>
-              <a:rPr dirty="0"/>
-              <a:t>, </a:t>
-            </a:r>
-            <a:r>
-              <a:rPr dirty="0" err="1"/>
-              <a:t>pequenos</a:t>
-            </a:r>
-            <a:r>
-              <a:rPr dirty="0"/>
-              <a:t> </a:t>
-            </a:r>
-            <a:r>
-              <a:rPr dirty="0" err="1"/>
-              <a:t>agricultores</a:t>
-            </a:r>
-            <a:r>
-              <a:rPr dirty="0"/>
-              <a:t> e </a:t>
-            </a:r>
-            <a:r>
-              <a:rPr dirty="0" err="1"/>
-              <a:t>comerciantes</a:t>
-            </a:r>
-            <a:r>
-              <a:rPr dirty="0"/>
-              <a:t> com </a:t>
-            </a:r>
-            <a:r>
-              <a:rPr dirty="0" err="1"/>
-              <a:t>vontade</a:t>
-            </a:r>
-            <a:r>
-              <a:rPr dirty="0"/>
-              <a:t> de </a:t>
-            </a:r>
-            <a:r>
-              <a:rPr dirty="0" err="1"/>
-              <a:t>ajudar</a:t>
-            </a:r>
-            <a:r>
-              <a:rPr dirty="0"/>
-              <a:t> e </a:t>
-            </a:r>
-            <a:r>
-              <a:rPr dirty="0" err="1"/>
-              <a:t>excedentes</a:t>
-            </a:r>
-            <a:r>
-              <a:rPr dirty="0"/>
-              <a:t> de </a:t>
-            </a:r>
-            <a:r>
-              <a:rPr dirty="0" err="1"/>
-              <a:t>colheita</a:t>
-            </a:r>
-            <a:r>
-              <a:rPr dirty="0"/>
-              <a:t>. Do outro, </a:t>
-            </a:r>
-            <a:r>
-              <a:rPr dirty="0" err="1"/>
-              <a:t>famílias</a:t>
-            </a:r>
-            <a:r>
-              <a:rPr dirty="0"/>
-              <a:t> </a:t>
-            </a:r>
-            <a:r>
-              <a:rPr dirty="0" err="1"/>
-              <a:t>precisando</a:t>
-            </a:r>
-            <a:r>
-              <a:rPr dirty="0"/>
-              <a:t> de </a:t>
-            </a:r>
-            <a:r>
-              <a:rPr dirty="0" err="1"/>
-              <a:t>auxílio</a:t>
-            </a:r>
-            <a:r>
-              <a:rPr dirty="0"/>
-              <a:t> </a:t>
-            </a:r>
-            <a:r>
-              <a:rPr dirty="0" err="1"/>
-              <a:t>imediato</a:t>
-            </a:r>
-            <a:r>
-              <a:rPr dirty="0"/>
-              <a:t>. O Timbiras </a:t>
-            </a:r>
-            <a:r>
-              <a:rPr dirty="0" err="1"/>
-              <a:t>Solidária</a:t>
-            </a:r>
-            <a:r>
-              <a:rPr dirty="0"/>
-              <a:t> </a:t>
-            </a:r>
-            <a:r>
-              <a:rPr dirty="0" err="1"/>
-              <a:t>nasceu</a:t>
-            </a:r>
-            <a:r>
-              <a:rPr dirty="0"/>
-              <a:t> para ser a </a:t>
-            </a:r>
-            <a:r>
-              <a:rPr dirty="0" err="1"/>
-              <a:t>ponte</a:t>
-            </a:r>
-            <a:r>
-              <a:rPr dirty="0"/>
-              <a:t> digital entre a </a:t>
-            </a:r>
-            <a:r>
-              <a:rPr dirty="0" err="1"/>
-              <a:t>generosidade</a:t>
-            </a:r>
-            <a:r>
-              <a:rPr dirty="0"/>
-              <a:t> de quem </a:t>
-            </a:r>
-            <a:r>
-              <a:rPr dirty="0" err="1"/>
-              <a:t>pode</a:t>
-            </a:r>
-            <a:r>
-              <a:rPr dirty="0"/>
-              <a:t> </a:t>
-            </a:r>
-            <a:r>
-              <a:rPr dirty="0" err="1"/>
-              <a:t>doar</a:t>
-            </a:r>
-            <a:r>
-              <a:rPr dirty="0"/>
-              <a:t> e a </a:t>
-            </a:r>
-            <a:r>
-              <a:rPr dirty="0" err="1"/>
-              <a:t>dignidade</a:t>
-            </a:r>
-            <a:r>
-              <a:rPr dirty="0"/>
-              <a:t> de quem </a:t>
-            </a:r>
-            <a:r>
-              <a:rPr dirty="0" err="1"/>
-              <a:t>precisa</a:t>
-            </a:r>
-            <a:r>
-              <a:rPr dirty="0"/>
-              <a:t> </a:t>
-            </a:r>
-            <a:r>
-              <a:rPr dirty="0" err="1"/>
-              <a:t>receber</a:t>
-            </a:r>
-            <a:r>
-              <a:rPr dirty="0"/>
-              <a:t>.</a:t>
+              <a:t>O Encontro de Duas Realidades</a:t>
+            </a:r>
+          </a:p>
+          <a:p>
+            <a:br/>
+            <a:pPr algn="just">
+              <a:defRPr sz="1150">
+                <a:solidFill>
+                  <a:srgbClr val="1E293B"/>
+                </a:solidFill>
+                <a:latin typeface="Segoe UI"/>
+              </a:defRPr>
+            </a:pPr>
+            <a:r>
+              <a:t>De um lado, pequenos agricultores e comerciantes com vontade de ajudar e excedentes de colheita. Do outro, famílias precisando de auxílio imediato. O Timbiras Solidária nasceu para ser a ponte digital entre a generosidade de quem pode doar e a dignidade de quem precisa receber.</a:t>
             </a:r>
           </a:p>
         </p:txBody>
@@ -7635,7 +6833,6 @@
           <a:lstStyle/>
           <a:p>
             <a:pPr algn="ctr"/>
-            <a:endParaRPr/>
           </a:p>
         </p:txBody>
       </p:sp>
@@ -7648,7 +6845,7 @@
         <p:spPr>
           <a:xfrm>
             <a:off x="7223760" y="1417320"/>
-            <a:ext cx="3977639" cy="4208844"/>
+            <a:ext cx="3977639" cy="4434840"/>
           </a:xfrm>
           <a:prstGeom prst="rect">
             <a:avLst/>
@@ -7661,7 +6858,7 @@
           </a:bodyPr>
           <a:lstStyle/>
           <a:p>
-            <a:pPr algn="ctr">
+            <a:pPr>
               <a:defRPr sz="1550" b="1">
                 <a:solidFill>
                   <a:srgbClr val="00873E"/>
@@ -7670,12 +6867,7 @@
               </a:defRPr>
             </a:pPr>
             <a:r>
-              <a:rPr sz="1600" dirty="0" err="1"/>
-              <a:t>Compromisso</a:t>
-            </a:r>
-            <a:r>
-              <a:rPr sz="1600" dirty="0"/>
-              <a:t> Real com o ODS 2</a:t>
+              <a:t>Compromisso Real com o ODS 2</a:t>
             </a:r>
           </a:p>
           <a:p>
@@ -7688,117 +6880,21 @@
               </a:defRPr>
             </a:pPr>
             <a:r>
-              <a:rPr sz="1400" dirty="0" err="1"/>
-              <a:t>Fome</a:t>
-            </a:r>
-            <a:r>
-              <a:rPr sz="1400" dirty="0"/>
-              <a:t> Zero e Agricultura </a:t>
-            </a:r>
-            <a:r>
-              <a:rPr sz="1400" dirty="0" err="1"/>
-              <a:t>Sustentável</a:t>
-            </a:r>
-            <a:r>
-              <a:rPr sz="1400" dirty="0"/>
-              <a:t>: </a:t>
-            </a:r>
-            <a:r>
-              <a:rPr sz="1400" dirty="0" err="1"/>
-              <a:t>nosso</a:t>
-            </a:r>
-            <a:r>
-              <a:rPr sz="1400" dirty="0"/>
-              <a:t> </a:t>
-            </a:r>
-            <a:r>
-              <a:rPr sz="1400" dirty="0" err="1"/>
-              <a:t>foco</a:t>
-            </a:r>
-            <a:r>
-              <a:rPr sz="1400" dirty="0"/>
-              <a:t> </a:t>
-            </a:r>
-            <a:r>
-              <a:rPr sz="1400" dirty="0" err="1"/>
-              <a:t>não</a:t>
-            </a:r>
-            <a:r>
-              <a:rPr sz="1400" dirty="0"/>
-              <a:t> é </a:t>
-            </a:r>
-            <a:r>
-              <a:rPr sz="1400" dirty="0" err="1"/>
-              <a:t>assistencialismo</a:t>
-            </a:r>
-            <a:r>
-              <a:rPr sz="1400" dirty="0"/>
-              <a:t> </a:t>
-            </a:r>
-            <a:r>
-              <a:rPr sz="1400" dirty="0" err="1"/>
-              <a:t>frio</a:t>
-            </a:r>
-            <a:r>
-              <a:rPr sz="1400" dirty="0"/>
-              <a:t>, mas </a:t>
-            </a:r>
-            <a:r>
-              <a:rPr sz="1400" dirty="0" err="1"/>
-              <a:t>mobilização</a:t>
-            </a:r>
-            <a:r>
-              <a:rPr sz="1400" dirty="0"/>
-              <a:t> </a:t>
-            </a:r>
-            <a:r>
-              <a:rPr sz="1400" dirty="0" err="1"/>
-              <a:t>comunitária</a:t>
-            </a:r>
-            <a:r>
-              <a:rPr sz="1400" dirty="0"/>
-              <a:t> com </a:t>
-            </a:r>
-            <a:r>
-              <a:rPr sz="1400" dirty="0" err="1"/>
-              <a:t>valorização</a:t>
-            </a:r>
-            <a:r>
-              <a:rPr sz="1400" dirty="0"/>
-              <a:t> do </a:t>
-            </a:r>
-            <a:r>
-              <a:rPr sz="1400" dirty="0" err="1"/>
-              <a:t>agricultor</a:t>
-            </a:r>
-            <a:r>
-              <a:rPr sz="1400" dirty="0"/>
-              <a:t> familiar local.</a:t>
-            </a:r>
-          </a:p>
-          <a:p>
-            <a:br>
-              <a:rPr sz="2400" dirty="0"/>
-            </a:br>
-            <a:r>
-              <a:rPr sz="2400" dirty="0"/>
-              <a:t>Público-Alvo </a:t>
-            </a:r>
-            <a:r>
-              <a:rPr sz="2400" dirty="0" err="1"/>
-              <a:t>que</a:t>
-            </a:r>
-            <a:r>
-              <a:rPr sz="2400" dirty="0"/>
-              <a:t> </a:t>
-            </a:r>
-            <a:r>
-              <a:rPr sz="2400" dirty="0" err="1"/>
-              <a:t>Abraçamos</a:t>
-            </a:r>
-            <a:r>
-              <a:rPr sz="2400" dirty="0"/>
-              <a:t>:</a:t>
+              <a:t>Fome Zero e Agricultura Sustentável: nosso foco não é assistencialismo frio, mas mobilização comunitária com valorização do agricultor familiar local.</a:t>
+            </a:r>
+          </a:p>
+          <a:p>
+            <a:br/>
+            <a:pPr>
+              <a:defRPr sz="1300" b="1">
+                <a:solidFill>
+                  <a:srgbClr val="00873E"/>
+                </a:solidFill>
+                <a:latin typeface="Segoe UI"/>
+              </a:defRPr>
+            </a:pPr>
+            <a:r>
+              <a:t>Público-Alvo que Abraçamos:</a:t>
             </a:r>
           </a:p>
           <a:p>
@@ -7811,66 +6907,8 @@
               </a:defRPr>
             </a:pPr>
             <a:r>
-              <a:rPr sz="1400" dirty="0"/>
-              <a:t>• </a:t>
-            </a:r>
-            <a:r>
-              <a:rPr sz="1400" dirty="0" err="1"/>
-              <a:t>Cidadãos</a:t>
-            </a:r>
-            <a:r>
-              <a:rPr sz="1400" dirty="0"/>
-              <a:t> </a:t>
-            </a:r>
-            <a:r>
-              <a:rPr sz="1400" dirty="0" err="1"/>
-              <a:t>comuns</a:t>
-            </a:r>
-            <a:r>
-              <a:rPr sz="1400" dirty="0"/>
-              <a:t>:  </a:t>
-            </a:r>
-            <a:r>
-              <a:rPr sz="1400" dirty="0" err="1"/>
-              <a:t>Que</a:t>
-            </a:r>
-            <a:r>
-              <a:rPr sz="1400" dirty="0"/>
-              <a:t> </a:t>
-            </a:r>
-            <a:r>
-              <a:rPr sz="1400" dirty="0" err="1"/>
-              <a:t>querem</a:t>
-            </a:r>
-            <a:r>
-              <a:rPr sz="1400" dirty="0"/>
-              <a:t> </a:t>
-            </a:r>
-            <a:r>
-              <a:rPr sz="1400" dirty="0" err="1"/>
-              <a:t>doar</a:t>
-            </a:r>
-            <a:r>
-              <a:rPr sz="1400" dirty="0"/>
-              <a:t> 1 cesta </a:t>
-            </a:r>
-            <a:r>
-              <a:rPr sz="1400" dirty="0" err="1"/>
-              <a:t>ou</a:t>
-            </a:r>
-            <a:r>
-              <a:rPr sz="1400" dirty="0"/>
-              <a:t> 1 kg de </a:t>
-            </a:r>
-            <a:r>
-              <a:rPr sz="1400" dirty="0" err="1"/>
-              <a:t>alimento</a:t>
-            </a:r>
-            <a:r>
-              <a:rPr sz="1400" dirty="0"/>
-              <a:t>;</a:t>
-            </a:r>
-            <a:endParaRPr lang="pt-BR" sz="1400" dirty="0"/>
+              <a:t>• Cidadãos comuns:  Que querem doar 1 cesta ou 1 kg de alimento;</a:t>
+            </a:r>
           </a:p>
           <a:p>
             <a:pPr algn="just">
@@ -7881,7 +6919,9 @@
                 <a:latin typeface="Segoe UI"/>
               </a:defRPr>
             </a:pPr>
-            <a:endParaRPr sz="1400" dirty="0"/>
+            <a:r>
+              <a:t>• Comércio e feirantes:  Que exercem cidadania ativa;</a:t>
+            </a:r>
           </a:p>
           <a:p>
             <a:pPr algn="just">
@@ -7893,50 +6933,8 @@
               </a:defRPr>
             </a:pPr>
             <a:r>
-              <a:rPr sz="1400" dirty="0"/>
-              <a:t>• Comércio e </a:t>
-            </a:r>
-            <a:r>
-              <a:rPr sz="1400" dirty="0" err="1"/>
-              <a:t>feirantes</a:t>
-            </a:r>
-            <a:r>
-              <a:rPr sz="1400" dirty="0"/>
-              <a:t>:  </a:t>
-            </a:r>
-            <a:r>
-              <a:rPr sz="1400" dirty="0" err="1"/>
-              <a:t>Que</a:t>
-            </a:r>
-            <a:r>
-              <a:rPr sz="1400" dirty="0"/>
-              <a:t> </a:t>
-            </a:r>
-            <a:r>
-              <a:rPr sz="1400" dirty="0" err="1"/>
-              <a:t>exercem</a:t>
-            </a:r>
-            <a:r>
-              <a:rPr sz="1400" dirty="0"/>
-              <a:t> </a:t>
-            </a:r>
-            <a:r>
-              <a:rPr sz="1400" dirty="0" err="1"/>
-              <a:t>cidadania</a:t>
-            </a:r>
-            <a:r>
-              <a:rPr sz="1400" dirty="0"/>
-              <a:t> </a:t>
-            </a:r>
-            <a:r>
-              <a:rPr sz="1400" dirty="0" err="1"/>
-              <a:t>ativa</a:t>
-            </a:r>
-            <a:r>
-              <a:rPr sz="1400" dirty="0"/>
-              <a:t>;</a:t>
-            </a:r>
-            <a:endParaRPr lang="pt-BR" sz="1400" dirty="0"/>
+              <a:t>• Agricultura familiar:  Que abastece a cidade com alimentos frescos;</a:t>
+            </a:r>
           </a:p>
           <a:p>
             <a:pPr algn="just">
@@ -7947,110 +6945,8 @@
                 <a:latin typeface="Segoe UI"/>
               </a:defRPr>
             </a:pPr>
-            <a:endParaRPr sz="1400" dirty="0"/>
-          </a:p>
-          <a:p>
-            <a:pPr algn="just">
-              <a:defRPr sz="1100">
-                <a:solidFill>
-                  <a:srgbClr val="1E293B"/>
-                </a:solidFill>
-                <a:latin typeface="Segoe UI"/>
-              </a:defRPr>
-            </a:pPr>
-            <a:r>
-              <a:rPr sz="1400" dirty="0"/>
-              <a:t>• Agricultura familiar:  </a:t>
-            </a:r>
-            <a:r>
-              <a:rPr sz="1400" dirty="0" err="1"/>
-              <a:t>Que</a:t>
-            </a:r>
-            <a:r>
-              <a:rPr sz="1400" dirty="0"/>
-              <a:t> </a:t>
-            </a:r>
-            <a:r>
-              <a:rPr sz="1400" dirty="0" err="1"/>
-              <a:t>abastece</a:t>
-            </a:r>
-            <a:r>
-              <a:rPr sz="1400" dirty="0"/>
-              <a:t> a </a:t>
-            </a:r>
-            <a:r>
-              <a:rPr sz="1400" dirty="0" err="1"/>
-              <a:t>cidade</a:t>
-            </a:r>
-            <a:r>
-              <a:rPr sz="1400" dirty="0"/>
-              <a:t> com </a:t>
-            </a:r>
-            <a:r>
-              <a:rPr sz="1400" dirty="0" err="1"/>
-              <a:t>alimentos</a:t>
-            </a:r>
-            <a:r>
-              <a:rPr sz="1400" dirty="0"/>
-              <a:t> frescos;</a:t>
-            </a:r>
-            <a:endParaRPr lang="pt-BR" sz="1400" dirty="0"/>
-          </a:p>
-          <a:p>
-            <a:pPr algn="just">
-              <a:defRPr sz="1100">
-                <a:solidFill>
-                  <a:srgbClr val="1E293B"/>
-                </a:solidFill>
-                <a:latin typeface="Segoe UI"/>
-              </a:defRPr>
-            </a:pPr>
-            <a:endParaRPr sz="1400" dirty="0"/>
-          </a:p>
-          <a:p>
-            <a:pPr algn="just">
-              <a:defRPr sz="1100">
-                <a:solidFill>
-                  <a:srgbClr val="1E293B"/>
-                </a:solidFill>
-                <a:latin typeface="Segoe UI"/>
-              </a:defRPr>
-            </a:pPr>
-            <a:r>
-              <a:rPr sz="1400" dirty="0"/>
-              <a:t>• Poder </a:t>
-            </a:r>
-            <a:r>
-              <a:rPr sz="1400" dirty="0" err="1"/>
-              <a:t>público</a:t>
-            </a:r>
-            <a:r>
-              <a:rPr sz="1400" dirty="0"/>
-              <a:t> &amp; </a:t>
-            </a:r>
-            <a:r>
-              <a:rPr sz="1400" dirty="0" err="1"/>
-              <a:t>voluntários</a:t>
-            </a:r>
-            <a:r>
-              <a:rPr sz="1400" dirty="0"/>
-              <a:t>:  Para </a:t>
-            </a:r>
-            <a:r>
-              <a:rPr sz="1400" dirty="0" err="1"/>
-              <a:t>transparência</a:t>
-            </a:r>
-            <a:r>
-              <a:rPr sz="1400" dirty="0"/>
-              <a:t> e </a:t>
-            </a:r>
-            <a:r>
-              <a:rPr sz="1400" dirty="0" err="1"/>
-              <a:t>logística</a:t>
-            </a:r>
-            <a:r>
-              <a:rPr sz="1400" dirty="0"/>
-              <a:t>.</a:t>
+            <a:r>
+              <a:t>• Poder público &amp; voluntários:  Para transparência e logística.</a:t>
             </a:r>
           </a:p>
         </p:txBody>
@@ -8064,7 +6960,7 @@
 </file>
 
 <file path=ppt/slides/slide3.xml><?xml version="1.0" encoding="utf-8"?>
-<p:sld xmlns:a="http://schemas.openxmlformats.org/drawingml/2006/main" xmlns:r="http://schemas.openxmlformats.org/officeDocument/2006/relationships" xmlns:p="http://schemas.openxmlformats.org/presentationml/2006/main">
+<p:sld xmlns:a="http://schemas.openxmlformats.org/drawingml/2006/main" xmlns:p="http://schemas.openxmlformats.org/presentationml/2006/main" xmlns:r="http://schemas.openxmlformats.org/officeDocument/2006/relationships">
   <p:cSld>
     <p:spTree>
       <p:nvGrpSpPr>
@@ -8072,14 +6968,7 @@
         <p:cNvGrpSpPr/>
         <p:nvPr/>
       </p:nvGrpSpPr>
-      <p:grpSpPr>
-        <a:xfrm>
-          <a:off x="0" y="0"/>
-          <a:ext cx="0" cy="0"/>
-          <a:chOff x="0" y="0"/>
-          <a:chExt cx="0" cy="0"/>
-        </a:xfrm>
-      </p:grpSpPr>
+      <p:grpSpPr/>
       <p:sp>
         <p:nvSpPr>
           <p:cNvPr id="2" name="TextBox 1"/>
@@ -8154,7 +7043,7 @@
           </a:fontRef>
         </p:style>
         <p:txBody>
-          <a:bodyPr tIns="54864" rtlCol="0" anchor="ctr"/>
+          <a:bodyPr rtlCol="0" anchor="ctr" tIns="54864"/>
           <a:lstStyle/>
           <a:p>
             <a:pPr algn="ctr">
@@ -8211,7 +7100,6 @@
           <a:lstStyle/>
           <a:p>
             <a:pPr algn="ctr"/>
-            <a:endParaRPr/>
           </a:p>
         </p:txBody>
       </p:sp>
@@ -8255,7 +7143,6 @@
           <a:lstStyle/>
           <a:p>
             <a:pPr algn="ctr"/>
-            <a:endParaRPr/>
           </a:p>
         </p:txBody>
       </p:sp>
@@ -8340,7 +7227,7 @@
         <p:spPr>
           <a:xfrm>
             <a:off x="731520" y="1234440"/>
-            <a:ext cx="5166360" cy="3008516"/>
+            <a:ext cx="5166360" cy="2743200"/>
           </a:xfrm>
           <a:prstGeom prst="rect">
             <a:avLst/>
@@ -8353,341 +7240,44 @@
           </a:bodyPr>
           <a:lstStyle/>
           <a:p>
+            <a:pPr>
+              <a:defRPr sz="1550" b="1">
+                <a:solidFill>
+                  <a:srgbClr val="00873E"/>
+                </a:solidFill>
+                <a:latin typeface="Segoe UI"/>
+              </a:defRPr>
+            </a:pPr>
+            <a:r>
+              <a:t>O Salto da Primeira para a Segunda Etapa</a:t>
+            </a:r>
+          </a:p>
+          <a:p>
+            <a:br/>
             <a:pPr algn="just">
-              <a:defRPr sz="1550" b="1">
-                <a:solidFill>
-                  <a:srgbClr val="00873E"/>
-                </a:solidFill>
-                <a:latin typeface="Segoe UI"/>
-              </a:defRPr>
-            </a:pPr>
-            <a:r>
-              <a:rPr sz="1600" dirty="0"/>
-              <a:t>O Salto da </a:t>
-            </a:r>
-            <a:r>
-              <a:rPr sz="1600" dirty="0" err="1"/>
-              <a:t>Primeira</a:t>
-            </a:r>
-            <a:r>
-              <a:rPr sz="1600" dirty="0"/>
-              <a:t> para a Segunda Etapa</a:t>
-            </a:r>
-          </a:p>
-          <a:p>
-            <a:pPr algn="just"/>
-            <a:br>
-              <a:rPr dirty="0"/>
-            </a:br>
-            <a:r>
-              <a:rPr dirty="0"/>
-              <a:t>Na Nota 1, </a:t>
-            </a:r>
-            <a:r>
-              <a:rPr dirty="0" err="1"/>
-              <a:t>criamos</a:t>
-            </a:r>
-            <a:r>
-              <a:rPr dirty="0"/>
-              <a:t> </a:t>
-            </a:r>
-            <a:r>
-              <a:rPr dirty="0" err="1"/>
-              <a:t>uma</a:t>
-            </a:r>
-            <a:r>
-              <a:rPr dirty="0"/>
-              <a:t> interface </a:t>
-            </a:r>
-            <a:r>
-              <a:rPr dirty="0" err="1"/>
-              <a:t>estática</a:t>
-            </a:r>
-            <a:r>
-              <a:rPr dirty="0"/>
-              <a:t> </a:t>
-            </a:r>
-            <a:r>
-              <a:rPr dirty="0" err="1"/>
-              <a:t>em</a:t>
-            </a:r>
-            <a:r>
-              <a:rPr dirty="0"/>
-              <a:t> HTML5, CSS3 e Bootstrap. Era </a:t>
-            </a:r>
-            <a:r>
-              <a:rPr dirty="0" err="1"/>
-              <a:t>bonita</a:t>
-            </a:r>
-            <a:r>
-              <a:rPr dirty="0"/>
-              <a:t> e </a:t>
-            </a:r>
-            <a:r>
-              <a:rPr dirty="0" err="1"/>
-              <a:t>organizada</a:t>
-            </a:r>
-            <a:r>
-              <a:rPr dirty="0"/>
-              <a:t>, mas </a:t>
-            </a:r>
-            <a:r>
-              <a:rPr dirty="0" err="1"/>
-              <a:t>funcionava</a:t>
-            </a:r>
-            <a:r>
-              <a:rPr dirty="0"/>
-              <a:t> </a:t>
-            </a:r>
-            <a:r>
-              <a:rPr dirty="0" err="1"/>
-              <a:t>como</a:t>
-            </a:r>
-            <a:r>
-              <a:rPr dirty="0"/>
-              <a:t> um </a:t>
-            </a:r>
-            <a:r>
-              <a:rPr dirty="0" err="1"/>
-              <a:t>panfleto</a:t>
-            </a:r>
-            <a:r>
-              <a:rPr dirty="0"/>
-              <a:t> digital: </a:t>
-            </a:r>
-            <a:r>
-              <a:rPr dirty="0" err="1"/>
-              <a:t>parada</a:t>
-            </a:r>
-            <a:r>
-              <a:rPr dirty="0"/>
-              <a:t>, </a:t>
-            </a:r>
-            <a:r>
-              <a:rPr dirty="0" err="1"/>
-              <a:t>passiva</a:t>
-            </a:r>
-            <a:r>
-              <a:rPr dirty="0"/>
-              <a:t> e </a:t>
-            </a:r>
-            <a:r>
-              <a:rPr dirty="0" err="1"/>
-              <a:t>sem</a:t>
-            </a:r>
-            <a:r>
-              <a:rPr dirty="0"/>
-              <a:t> </a:t>
-            </a:r>
-            <a:r>
-              <a:rPr dirty="0" err="1"/>
-              <a:t>diálogo</a:t>
-            </a:r>
-            <a:r>
-              <a:rPr dirty="0"/>
-              <a:t> </a:t>
-            </a:r>
-            <a:r>
-              <a:rPr dirty="0" err="1"/>
-              <a:t>direto</a:t>
-            </a:r>
-            <a:r>
-              <a:rPr dirty="0"/>
-              <a:t> com quem </a:t>
-            </a:r>
-            <a:r>
-              <a:rPr dirty="0" err="1"/>
-              <a:t>acessava</a:t>
-            </a:r>
-            <a:r>
-              <a:rPr dirty="0"/>
-              <a:t>.</a:t>
-            </a:r>
-          </a:p>
-          <a:p>
-            <a:pPr algn="just"/>
-            <a:br>
-              <a:rPr dirty="0"/>
-            </a:br>
-            <a:r>
-              <a:rPr dirty="0"/>
-              <a:t>Na Nota 2, </a:t>
-            </a:r>
-            <a:r>
-              <a:rPr dirty="0" err="1"/>
-              <a:t>nossa</a:t>
-            </a:r>
-            <a:r>
-              <a:rPr dirty="0"/>
-              <a:t> </a:t>
-            </a:r>
-            <a:r>
-              <a:rPr dirty="0" err="1"/>
-              <a:t>missão</a:t>
-            </a:r>
-            <a:r>
-              <a:rPr dirty="0"/>
-              <a:t> </a:t>
-            </a:r>
-            <a:r>
-              <a:rPr dirty="0" err="1"/>
-              <a:t>foi</a:t>
-            </a:r>
-            <a:r>
-              <a:rPr dirty="0"/>
-              <a:t> </a:t>
-            </a:r>
-            <a:r>
-              <a:rPr dirty="0" err="1"/>
-              <a:t>dar</a:t>
-            </a:r>
-            <a:r>
-              <a:rPr dirty="0"/>
-              <a:t> </a:t>
-            </a:r>
-            <a:r>
-              <a:rPr dirty="0" err="1"/>
-              <a:t>vida</a:t>
-            </a:r>
-            <a:r>
-              <a:rPr dirty="0"/>
-              <a:t> e </a:t>
-            </a:r>
-            <a:r>
-              <a:rPr dirty="0" err="1"/>
-              <a:t>coração</a:t>
-            </a:r>
-            <a:r>
-              <a:rPr dirty="0"/>
-              <a:t> </a:t>
-            </a:r>
-            <a:r>
-              <a:rPr dirty="0" err="1"/>
-              <a:t>ao</a:t>
-            </a:r>
-            <a:r>
-              <a:rPr dirty="0"/>
-              <a:t> </a:t>
-            </a:r>
-            <a:r>
-              <a:rPr dirty="0" err="1"/>
-              <a:t>projeto</a:t>
-            </a:r>
-            <a:r>
-              <a:rPr dirty="0"/>
-              <a:t>: </a:t>
-            </a:r>
-            <a:r>
-              <a:rPr dirty="0" err="1"/>
-              <a:t>quando</a:t>
-            </a:r>
-            <a:r>
-              <a:rPr dirty="0"/>
-              <a:t> </a:t>
-            </a:r>
-            <a:r>
-              <a:rPr dirty="0" err="1"/>
-              <a:t>alguém</a:t>
-            </a:r>
-            <a:r>
-              <a:rPr dirty="0"/>
-              <a:t> </a:t>
-            </a:r>
-            <a:r>
-              <a:rPr dirty="0" err="1"/>
-              <a:t>preenche</a:t>
-            </a:r>
-            <a:r>
-              <a:rPr dirty="0"/>
-              <a:t> </a:t>
-            </a:r>
-            <a:r>
-              <a:rPr dirty="0" err="1"/>
-              <a:t>uma</a:t>
-            </a:r>
-            <a:r>
-              <a:rPr dirty="0"/>
-              <a:t> </a:t>
-            </a:r>
-            <a:r>
-              <a:rPr dirty="0" err="1"/>
-              <a:t>doação</a:t>
-            </a:r>
-            <a:r>
-              <a:rPr dirty="0"/>
-              <a:t>, </a:t>
-            </a:r>
-            <a:r>
-              <a:rPr dirty="0" err="1"/>
-              <a:t>precisa</a:t>
-            </a:r>
-            <a:r>
-              <a:rPr dirty="0"/>
-              <a:t> </a:t>
-            </a:r>
-            <a:r>
-              <a:rPr dirty="0" err="1"/>
-              <a:t>sentir</a:t>
-            </a:r>
-            <a:r>
-              <a:rPr dirty="0"/>
-              <a:t> </a:t>
-            </a:r>
-            <a:r>
-              <a:rPr dirty="0" err="1"/>
-              <a:t>que</a:t>
-            </a:r>
-            <a:r>
-              <a:rPr dirty="0"/>
-              <a:t> </a:t>
-            </a:r>
-            <a:r>
-              <a:rPr dirty="0" err="1"/>
-              <a:t>aquele</a:t>
-            </a:r>
-            <a:r>
-              <a:rPr dirty="0"/>
-              <a:t> </a:t>
-            </a:r>
-            <a:r>
-              <a:rPr dirty="0" err="1"/>
-              <a:t>ato</a:t>
-            </a:r>
-            <a:r>
-              <a:rPr dirty="0"/>
-              <a:t> </a:t>
-            </a:r>
-            <a:r>
-              <a:rPr dirty="0" err="1"/>
-              <a:t>gerou</a:t>
-            </a:r>
-            <a:r>
-              <a:rPr dirty="0"/>
-              <a:t> </a:t>
-            </a:r>
-            <a:r>
-              <a:rPr dirty="0" err="1"/>
-              <a:t>uma</a:t>
-            </a:r>
-            <a:r>
-              <a:rPr dirty="0"/>
-              <a:t> </a:t>
-            </a:r>
-            <a:r>
-              <a:rPr dirty="0" err="1"/>
-              <a:t>resposta</a:t>
-            </a:r>
-            <a:r>
-              <a:rPr dirty="0"/>
-              <a:t> no </a:t>
-            </a:r>
-            <a:r>
-              <a:rPr dirty="0" err="1"/>
-              <a:t>mundo</a:t>
-            </a:r>
-            <a:r>
-              <a:rPr dirty="0"/>
-              <a:t> real.</a:t>
+              <a:defRPr sz="1200">
+                <a:solidFill>
+                  <a:srgbClr val="64748B"/>
+                </a:solidFill>
+                <a:latin typeface="Segoe UI"/>
+              </a:defRPr>
+            </a:pPr>
+            <a:r>
+              <a:t>Na Nota 1, criamos uma interface estática em HTML5, CSS3 e Bootstrap. Era bonita e organizada, mas funcionava como um panfleto digital: parada, passiva e sem diálogo direto com quem acessava.</a:t>
+            </a:r>
+          </a:p>
+          <a:p>
+            <a:br/>
+            <a:pPr algn="just">
+              <a:defRPr sz="1200">
+                <a:solidFill>
+                  <a:srgbClr val="64748B"/>
+                </a:solidFill>
+                <a:latin typeface="Segoe UI"/>
+              </a:defRPr>
+            </a:pPr>
+            <a:r>
+              <a:t>Na Nota 2, nossa missão foi dar vida e coração ao projeto: quando alguém preenche uma doação, precisa sentir que aquele ato gerou uma resposta no mundo real.</a:t>
             </a:r>
           </a:p>
         </p:txBody>
@@ -8734,7 +7324,6 @@
           <a:lstStyle/>
           <a:p>
             <a:pPr algn="ctr"/>
-            <a:endParaRPr/>
           </a:p>
         </p:txBody>
       </p:sp>
@@ -8778,7 +7367,6 @@
           <a:lstStyle/>
           <a:p>
             <a:pPr algn="ctr"/>
-            <a:endParaRPr/>
           </a:p>
         </p:txBody>
       </p:sp>
@@ -8813,175 +7401,21 @@
               </a:defRPr>
             </a:pPr>
             <a:r>
-              <a:rPr dirty="0" err="1"/>
-              <a:t>Interação</a:t>
-            </a:r>
-            <a:r>
-              <a:rPr dirty="0"/>
-              <a:t> </a:t>
-            </a:r>
-            <a:r>
-              <a:rPr dirty="0" err="1"/>
-              <a:t>que</a:t>
-            </a:r>
-            <a:r>
-              <a:rPr dirty="0"/>
-              <a:t> </a:t>
-            </a:r>
-            <a:r>
-              <a:rPr dirty="0" err="1"/>
-              <a:t>Acolhe</a:t>
-            </a:r>
-            <a:endParaRPr dirty="0"/>
-          </a:p>
-          <a:p>
-            <a:pPr algn="just"/>
-            <a:br>
-              <a:rPr dirty="0"/>
-            </a:br>
-            <a:r>
-              <a:rPr dirty="0" err="1"/>
-              <a:t>Abraçamos</a:t>
-            </a:r>
-            <a:r>
-              <a:rPr dirty="0"/>
-              <a:t> o React 19 para </a:t>
-            </a:r>
-            <a:r>
-              <a:rPr dirty="0" err="1"/>
-              <a:t>que</a:t>
-            </a:r>
-            <a:r>
-              <a:rPr dirty="0"/>
-              <a:t> </a:t>
-            </a:r>
-            <a:r>
-              <a:rPr dirty="0" err="1"/>
-              <a:t>cada</a:t>
-            </a:r>
-            <a:r>
-              <a:rPr dirty="0"/>
-              <a:t> </a:t>
-            </a:r>
-            <a:r>
-              <a:rPr dirty="0" err="1"/>
-              <a:t>elemento</a:t>
-            </a:r>
-            <a:r>
-              <a:rPr dirty="0"/>
-              <a:t> </a:t>
-            </a:r>
-            <a:r>
-              <a:rPr dirty="0" err="1"/>
-              <a:t>na</a:t>
-            </a:r>
-            <a:r>
-              <a:rPr dirty="0"/>
-              <a:t> </a:t>
-            </a:r>
-            <a:r>
-              <a:rPr dirty="0" err="1"/>
-              <a:t>tela</a:t>
-            </a:r>
-            <a:r>
-              <a:rPr dirty="0"/>
-              <a:t> </a:t>
-            </a:r>
-            <a:r>
-              <a:rPr dirty="0" err="1"/>
-              <a:t>reaja</a:t>
-            </a:r>
-            <a:r>
-              <a:rPr dirty="0"/>
-              <a:t> </a:t>
-            </a:r>
-            <a:r>
-              <a:rPr dirty="0" err="1"/>
-              <a:t>imediatamente</a:t>
-            </a:r>
-            <a:r>
-              <a:rPr dirty="0"/>
-              <a:t> </a:t>
-            </a:r>
-            <a:r>
-              <a:rPr dirty="0" err="1"/>
-              <a:t>aos</a:t>
-            </a:r>
-            <a:r>
-              <a:rPr dirty="0"/>
-              <a:t> </a:t>
-            </a:r>
-            <a:r>
-              <a:rPr dirty="0" err="1"/>
-              <a:t>sentimentos</a:t>
-            </a:r>
-            <a:r>
-              <a:rPr dirty="0"/>
-              <a:t> e </a:t>
-            </a:r>
-            <a:r>
-              <a:rPr dirty="0" err="1"/>
-              <a:t>intenções</a:t>
-            </a:r>
-            <a:r>
-              <a:rPr dirty="0"/>
-              <a:t> do </a:t>
-            </a:r>
-            <a:r>
-              <a:rPr dirty="0" err="1"/>
-              <a:t>usuário</a:t>
-            </a:r>
-            <a:r>
-              <a:rPr dirty="0"/>
-              <a:t>, </a:t>
-            </a:r>
-            <a:r>
-              <a:rPr dirty="0" err="1"/>
-              <a:t>sem</a:t>
-            </a:r>
-            <a:r>
-              <a:rPr dirty="0"/>
-              <a:t> </a:t>
-            </a:r>
-            <a:r>
-              <a:rPr dirty="0" err="1"/>
-              <a:t>recarregar</a:t>
-            </a:r>
-            <a:r>
-              <a:rPr dirty="0"/>
-              <a:t> a </a:t>
-            </a:r>
-            <a:r>
-              <a:rPr dirty="0" err="1"/>
-              <a:t>página</a:t>
-            </a:r>
-            <a:r>
-              <a:rPr dirty="0"/>
-              <a:t> e </a:t>
-            </a:r>
-            <a:r>
-              <a:rPr dirty="0" err="1"/>
-              <a:t>sem</a:t>
-            </a:r>
-            <a:r>
-              <a:rPr dirty="0"/>
-              <a:t> </a:t>
-            </a:r>
-            <a:r>
-              <a:rPr dirty="0" err="1"/>
-              <a:t>travar</a:t>
-            </a:r>
-            <a:r>
-              <a:rPr dirty="0"/>
-              <a:t> a </a:t>
-            </a:r>
-            <a:r>
-              <a:rPr dirty="0" err="1"/>
-              <a:t>navegação</a:t>
-            </a:r>
-            <a:r>
-              <a:rPr dirty="0"/>
-              <a:t>.</a:t>
+              <a:t>Interação que Acolhe</a:t>
+            </a:r>
+          </a:p>
+          <a:p>
+            <a:br/>
+            <a:pPr algn="just">
+              <a:defRPr sz="1150">
+                <a:solidFill>
+                  <a:srgbClr val="1E293B"/>
+                </a:solidFill>
+                <a:latin typeface="Segoe UI"/>
+              </a:defRPr>
+            </a:pPr>
+            <a:r>
+              <a:t>Abraçamos o React 19 para que cada elemento na tela reaja imediatamente aos sentimentos e intenções do usuário, sem recarregar a página e sem travar a navegação.</a:t>
             </a:r>
           </a:p>
         </p:txBody>
@@ -9028,7 +7462,6 @@
           <a:lstStyle/>
           <a:p>
             <a:pPr algn="ctr"/>
-            <a:endParaRPr/>
           </a:p>
         </p:txBody>
       </p:sp>
@@ -9041,7 +7474,7 @@
         <p:spPr>
           <a:xfrm>
             <a:off x="6537960" y="1417320"/>
-            <a:ext cx="4617720" cy="4401205"/>
+            <a:ext cx="4617720" cy="4434840"/>
           </a:xfrm>
           <a:prstGeom prst="rect">
             <a:avLst/>
@@ -9054,7 +7487,7 @@
           </a:bodyPr>
           <a:lstStyle/>
           <a:p>
-            <a:pPr algn="ctr">
+            <a:pPr>
               <a:defRPr sz="1550" b="1">
                 <a:solidFill>
                   <a:srgbClr val="00873E"/>
@@ -9063,408 +7496,63 @@
               </a:defRPr>
             </a:pPr>
             <a:r>
-              <a:rPr sz="1600" dirty="0"/>
-              <a:t>O </a:t>
-            </a:r>
-            <a:r>
-              <a:rPr sz="1600" dirty="0" err="1"/>
-              <a:t>Que</a:t>
-            </a:r>
-            <a:r>
-              <a:rPr sz="1600" dirty="0"/>
-              <a:t> </a:t>
-            </a:r>
-            <a:r>
-              <a:rPr sz="1600" dirty="0" err="1"/>
-              <a:t>Mudou</a:t>
-            </a:r>
-            <a:r>
-              <a:rPr sz="1600" dirty="0"/>
-              <a:t> </a:t>
-            </a:r>
-            <a:r>
-              <a:rPr sz="1600" dirty="0" err="1"/>
-              <a:t>na</a:t>
-            </a:r>
-            <a:r>
-              <a:rPr sz="1600" dirty="0"/>
-              <a:t> </a:t>
-            </a:r>
-            <a:r>
-              <a:rPr sz="1600" dirty="0" err="1"/>
-              <a:t>Experiência</a:t>
-            </a:r>
-            <a:r>
-              <a:rPr sz="1600" dirty="0"/>
-              <a:t> de Quem Usa</a:t>
-            </a:r>
-          </a:p>
-          <a:p>
-            <a:pPr algn="just"/>
-            <a:br>
-              <a:rPr sz="1600" dirty="0"/>
-            </a:br>
-            <a:r>
-              <a:rPr sz="1600" dirty="0"/>
-              <a:t>• </a:t>
-            </a:r>
-            <a:r>
-              <a:rPr sz="1600" dirty="0" err="1"/>
-              <a:t>Retorno</a:t>
-            </a:r>
-            <a:r>
-              <a:rPr sz="1600" dirty="0"/>
-              <a:t> </a:t>
-            </a:r>
-            <a:r>
-              <a:rPr sz="1600" dirty="0" err="1"/>
-              <a:t>Imediato</a:t>
-            </a:r>
-            <a:r>
-              <a:rPr sz="1600" dirty="0"/>
-              <a:t>: Ao </a:t>
-            </a:r>
-            <a:r>
-              <a:rPr sz="1600" dirty="0" err="1"/>
-              <a:t>enviar</a:t>
-            </a:r>
-            <a:r>
-              <a:rPr sz="1600" dirty="0"/>
-              <a:t> </a:t>
-            </a:r>
-            <a:r>
-              <a:rPr sz="1600" dirty="0" err="1"/>
-              <a:t>uma</a:t>
-            </a:r>
-            <a:r>
-              <a:rPr sz="1600" dirty="0"/>
-              <a:t> </a:t>
-            </a:r>
-            <a:r>
-              <a:rPr sz="1600" dirty="0" err="1"/>
-              <a:t>doação</a:t>
-            </a:r>
-            <a:r>
-              <a:rPr sz="1600" dirty="0"/>
-              <a:t>, a meta </a:t>
-            </a:r>
-            <a:r>
-              <a:rPr sz="1600" dirty="0" err="1"/>
-              <a:t>comunitária</a:t>
-            </a:r>
-            <a:r>
-              <a:rPr sz="1600" dirty="0"/>
-              <a:t> </a:t>
-            </a:r>
-            <a:r>
-              <a:rPr sz="1600" dirty="0" err="1"/>
-              <a:t>sobe</a:t>
-            </a:r>
-            <a:r>
-              <a:rPr sz="1600" dirty="0"/>
-              <a:t> </a:t>
-            </a:r>
-            <a:r>
-              <a:rPr sz="1600" dirty="0" err="1"/>
-              <a:t>na</a:t>
-            </a:r>
-            <a:r>
-              <a:rPr sz="1600" dirty="0"/>
-              <a:t> </a:t>
-            </a:r>
-            <a:r>
-              <a:rPr sz="1600" dirty="0" err="1"/>
-              <a:t>mesma</a:t>
-            </a:r>
-            <a:r>
-              <a:rPr sz="1600" dirty="0"/>
-              <a:t> hora no topo do site e um </a:t>
-            </a:r>
-            <a:r>
-              <a:rPr sz="1600" dirty="0" err="1"/>
-              <a:t>Recibo</a:t>
-            </a:r>
-            <a:r>
-              <a:rPr sz="1600" dirty="0"/>
-              <a:t> </a:t>
-            </a:r>
-            <a:r>
-              <a:rPr sz="1600" dirty="0" err="1"/>
-              <a:t>Solidário</a:t>
-            </a:r>
-            <a:r>
-              <a:rPr sz="1600" dirty="0"/>
-              <a:t> com </a:t>
-            </a:r>
-            <a:r>
-              <a:rPr sz="1600" dirty="0" err="1"/>
-              <a:t>código</a:t>
-            </a:r>
-            <a:r>
-              <a:rPr sz="1600" dirty="0"/>
-              <a:t> </a:t>
-            </a:r>
-            <a:r>
-              <a:rPr sz="1600" dirty="0" err="1"/>
-              <a:t>único</a:t>
-            </a:r>
-            <a:r>
-              <a:rPr sz="1600" dirty="0"/>
-              <a:t> surge </a:t>
-            </a:r>
-            <a:r>
-              <a:rPr sz="1600" dirty="0" err="1"/>
-              <a:t>na</a:t>
-            </a:r>
-            <a:r>
-              <a:rPr sz="1600" dirty="0"/>
-              <a:t> </a:t>
-            </a:r>
-            <a:r>
-              <a:rPr sz="1600" dirty="0" err="1"/>
-              <a:t>tela</a:t>
-            </a:r>
-            <a:r>
-              <a:rPr sz="1600" dirty="0"/>
-              <a:t>.</a:t>
-            </a:r>
-          </a:p>
-          <a:p>
-            <a:pPr algn="just"/>
-            <a:br>
-              <a:rPr sz="1600" dirty="0"/>
-            </a:br>
-            <a:r>
-              <a:rPr sz="1600" dirty="0"/>
-              <a:t>• Menos </a:t>
-            </a:r>
-            <a:r>
-              <a:rPr sz="1600" dirty="0" err="1"/>
-              <a:t>Esforço</a:t>
-            </a:r>
-            <a:r>
-              <a:rPr sz="1600" dirty="0"/>
-              <a:t> para Fazer o Bem: </a:t>
-            </a:r>
-            <a:r>
-              <a:rPr sz="1600" dirty="0" err="1"/>
-              <a:t>Botões</a:t>
-            </a:r>
-            <a:r>
-              <a:rPr sz="1600" dirty="0"/>
-              <a:t> de clique </a:t>
-            </a:r>
-            <a:r>
-              <a:rPr sz="1600" dirty="0" err="1"/>
-              <a:t>rápido</a:t>
-            </a:r>
-            <a:r>
-              <a:rPr sz="1600" dirty="0"/>
-              <a:t> ('1 Cesta', '2 Cestas', '5 Cestas') </a:t>
-            </a:r>
-            <a:r>
-              <a:rPr sz="1600" dirty="0" err="1"/>
-              <a:t>evitam</a:t>
-            </a:r>
-            <a:r>
-              <a:rPr sz="1600" dirty="0"/>
-              <a:t> </a:t>
-            </a:r>
-            <a:r>
-              <a:rPr sz="1600" dirty="0" err="1"/>
-              <a:t>digitação</a:t>
-            </a:r>
-            <a:r>
-              <a:rPr sz="1600" dirty="0"/>
-              <a:t> </a:t>
-            </a:r>
-            <a:r>
-              <a:rPr sz="1600" dirty="0" err="1"/>
-              <a:t>demorada</a:t>
-            </a:r>
-            <a:r>
-              <a:rPr sz="1600" dirty="0"/>
-              <a:t> no </a:t>
-            </a:r>
-            <a:r>
-              <a:rPr sz="1600" dirty="0" err="1"/>
-              <a:t>celular</a:t>
-            </a:r>
-            <a:r>
-              <a:rPr sz="1600" dirty="0"/>
-              <a:t>.</a:t>
-            </a:r>
-          </a:p>
-          <a:p>
-            <a:pPr algn="just"/>
-            <a:br>
-              <a:rPr sz="1600" dirty="0"/>
-            </a:br>
-            <a:r>
-              <a:rPr sz="1600" dirty="0"/>
-              <a:t>• Chave PIX com 1 Toque: </a:t>
-            </a:r>
-            <a:r>
-              <a:rPr sz="1600" dirty="0" err="1"/>
-              <a:t>Cópia</a:t>
-            </a:r>
-            <a:r>
-              <a:rPr sz="1600" dirty="0"/>
-              <a:t> </a:t>
-            </a:r>
-            <a:r>
-              <a:rPr sz="1600" dirty="0" err="1"/>
-              <a:t>instantânea</a:t>
-            </a:r>
-            <a:r>
-              <a:rPr sz="1600" dirty="0"/>
-              <a:t> da </a:t>
-            </a:r>
-            <a:r>
-              <a:rPr sz="1600" dirty="0" err="1"/>
-              <a:t>chave</a:t>
-            </a:r>
-            <a:r>
-              <a:rPr sz="1600" dirty="0"/>
-              <a:t> </a:t>
-            </a:r>
-            <a:r>
-              <a:rPr sz="1600" dirty="0" err="1"/>
-              <a:t>institucional</a:t>
-            </a:r>
-            <a:r>
-              <a:rPr sz="1600" dirty="0"/>
-              <a:t> com aviso de </a:t>
-            </a:r>
-            <a:r>
-              <a:rPr sz="1600" dirty="0" err="1"/>
-              <a:t>confirmação</a:t>
-            </a:r>
-            <a:r>
-              <a:rPr sz="1600" dirty="0"/>
-              <a:t> </a:t>
-            </a:r>
-            <a:r>
-              <a:rPr sz="1600" dirty="0" err="1"/>
-              <a:t>na</a:t>
-            </a:r>
-            <a:r>
-              <a:rPr sz="1600" dirty="0"/>
-              <a:t> </a:t>
-            </a:r>
-            <a:r>
-              <a:rPr sz="1600" dirty="0" err="1"/>
-              <a:t>tela</a:t>
-            </a:r>
-            <a:r>
-              <a:rPr sz="1600" dirty="0"/>
-              <a:t> via Clipboard API.</a:t>
-            </a:r>
-          </a:p>
-          <a:p>
-            <a:pPr algn="just"/>
-            <a:br>
-              <a:rPr sz="1600" dirty="0"/>
-            </a:br>
-            <a:r>
-              <a:rPr sz="1600" dirty="0"/>
-              <a:t>• Trilha Sonora Emocionante: Player com a </a:t>
-            </a:r>
-            <a:r>
-              <a:rPr sz="1600" dirty="0" err="1"/>
-              <a:t>canção</a:t>
-            </a:r>
-            <a:r>
-              <a:rPr sz="1600" dirty="0"/>
-              <a:t> 'Imagine' (John Lennon, 1971), </a:t>
-            </a:r>
-            <a:r>
-              <a:rPr sz="1600" dirty="0" err="1"/>
-              <a:t>que</a:t>
-            </a:r>
-            <a:r>
-              <a:rPr sz="1600" dirty="0"/>
-              <a:t> </a:t>
-            </a:r>
-            <a:r>
-              <a:rPr sz="1600" dirty="0" err="1"/>
-              <a:t>respeita</a:t>
-            </a:r>
-            <a:r>
-              <a:rPr sz="1600" dirty="0"/>
-              <a:t> a </a:t>
-            </a:r>
-            <a:r>
-              <a:rPr sz="1600" dirty="0" err="1"/>
-              <a:t>privacidade</a:t>
-            </a:r>
-            <a:r>
-              <a:rPr sz="1600" dirty="0"/>
-              <a:t> do </a:t>
-            </a:r>
-            <a:r>
-              <a:rPr sz="1600" dirty="0" err="1"/>
-              <a:t>usuário</a:t>
-            </a:r>
-            <a:r>
-              <a:rPr sz="1600" dirty="0"/>
-              <a:t> e </a:t>
-            </a:r>
-            <a:r>
-              <a:rPr sz="1600" dirty="0" err="1"/>
-              <a:t>pode</a:t>
-            </a:r>
-            <a:r>
-              <a:rPr sz="1600" dirty="0"/>
-              <a:t> ser </a:t>
-            </a:r>
-            <a:r>
-              <a:rPr sz="1600" dirty="0" err="1"/>
-              <a:t>pausado</a:t>
-            </a:r>
-            <a:r>
-              <a:rPr sz="1600" dirty="0"/>
-              <a:t>, </a:t>
-            </a:r>
-            <a:r>
-              <a:rPr sz="1600" dirty="0" err="1"/>
-              <a:t>mutado</a:t>
-            </a:r>
-            <a:r>
-              <a:rPr sz="1600" dirty="0"/>
-              <a:t> </a:t>
-            </a:r>
-            <a:r>
-              <a:rPr sz="1600" dirty="0" err="1"/>
-              <a:t>ou</a:t>
-            </a:r>
-            <a:r>
-              <a:rPr sz="1600" dirty="0"/>
-              <a:t> </a:t>
-            </a:r>
-            <a:r>
-              <a:rPr sz="1600" dirty="0" err="1"/>
-              <a:t>recolhido</a:t>
-            </a:r>
-            <a:r>
-              <a:rPr sz="1600" dirty="0"/>
-              <a:t> a </a:t>
-            </a:r>
-            <a:r>
-              <a:rPr sz="1600" dirty="0" err="1"/>
-              <a:t>qualquer</a:t>
-            </a:r>
-            <a:r>
-              <a:rPr sz="1600" dirty="0"/>
-              <a:t> </a:t>
-            </a:r>
-            <a:r>
-              <a:rPr sz="1600" dirty="0" err="1"/>
-              <a:t>momento</a:t>
-            </a:r>
-            <a:r>
-              <a:rPr sz="1600" dirty="0"/>
-              <a:t>.</a:t>
+              <a:t>O Que Mudou na Experiência de Quem Usa</a:t>
+            </a:r>
+          </a:p>
+          <a:p>
+            <a:br/>
+            <a:pPr algn="just">
+              <a:defRPr sz="1150">
+                <a:solidFill>
+                  <a:srgbClr val="1E293B"/>
+                </a:solidFill>
+                <a:latin typeface="Segoe UI"/>
+              </a:defRPr>
+            </a:pPr>
+            <a:r>
+              <a:t>• Retorno Imediato: Ao enviar uma doação, a meta comunitária sobe na mesma hora no topo do site e um Recibo Solidário com código único surge na tela.</a:t>
+            </a:r>
+          </a:p>
+          <a:p>
+            <a:br/>
+            <a:pPr algn="just">
+              <a:defRPr sz="1150">
+                <a:solidFill>
+                  <a:srgbClr val="1E293B"/>
+                </a:solidFill>
+                <a:latin typeface="Segoe UI"/>
+              </a:defRPr>
+            </a:pPr>
+            <a:r>
+              <a:t>• Menos Esforço para Fazer o Bem: Botões de clique rápido ('1 Cesta', '2 Cestas', '5 Cestas') evitam digitação demorada no celular.</a:t>
+            </a:r>
+          </a:p>
+          <a:p>
+            <a:br/>
+            <a:pPr algn="just">
+              <a:defRPr sz="1150">
+                <a:solidFill>
+                  <a:srgbClr val="1E293B"/>
+                </a:solidFill>
+                <a:latin typeface="Segoe UI"/>
+              </a:defRPr>
+            </a:pPr>
+            <a:r>
+              <a:t>• Chave PIX com 1 Toque: Cópia instantânea da chave institucional com aviso de confirmação na tela via Clipboard API.</a:t>
+            </a:r>
+          </a:p>
+          <a:p>
+            <a:br/>
+            <a:pPr algn="just">
+              <a:defRPr sz="1150">
+                <a:solidFill>
+                  <a:srgbClr val="1E293B"/>
+                </a:solidFill>
+                <a:latin typeface="Segoe UI"/>
+              </a:defRPr>
+            </a:pPr>
+            <a:r>
+              <a:t>• Trilha Sonora Emocionante: Player com a canção 'Imagine' (John Lennon, 1971), que respeita a privacidade do usuário e pode ser pausado, mutado ou recolhido a qualquer momento.</a:t>
             </a:r>
           </a:p>
         </p:txBody>
@@ -9478,7 +7566,7 @@
 </file>
 
 <file path=ppt/slides/slide4.xml><?xml version="1.0" encoding="utf-8"?>
-<p:sld xmlns:a="http://schemas.openxmlformats.org/drawingml/2006/main" xmlns:r="http://schemas.openxmlformats.org/officeDocument/2006/relationships" xmlns:p="http://schemas.openxmlformats.org/presentationml/2006/main">
+<p:sld xmlns:a="http://schemas.openxmlformats.org/drawingml/2006/main" xmlns:p="http://schemas.openxmlformats.org/presentationml/2006/main" xmlns:r="http://schemas.openxmlformats.org/officeDocument/2006/relationships">
   <p:cSld>
     <p:spTree>
       <p:nvGrpSpPr>
@@ -9486,14 +7574,7 @@
         <p:cNvGrpSpPr/>
         <p:nvPr/>
       </p:nvGrpSpPr>
-      <p:grpSpPr>
-        <a:xfrm>
-          <a:off x="0" y="0"/>
-          <a:ext cx="0" cy="0"/>
-          <a:chOff x="0" y="0"/>
-          <a:chExt cx="0" cy="0"/>
-        </a:xfrm>
-      </p:grpSpPr>
+      <p:grpSpPr/>
       <p:sp>
         <p:nvSpPr>
           <p:cNvPr id="2" name="TextBox 1"/>
@@ -9568,7 +7649,7 @@
           </a:fontRef>
         </p:style>
         <p:txBody>
-          <a:bodyPr tIns="54864" rtlCol="0" anchor="ctr"/>
+          <a:bodyPr rtlCol="0" anchor="ctr" tIns="54864"/>
           <a:lstStyle/>
           <a:p>
             <a:pPr algn="ctr">
@@ -9625,7 +7706,6 @@
           <a:lstStyle/>
           <a:p>
             <a:pPr algn="ctr"/>
-            <a:endParaRPr/>
           </a:p>
         </p:txBody>
       </p:sp>
@@ -9669,7 +7749,6 @@
           <a:lstStyle/>
           <a:p>
             <a:pPr algn="ctr"/>
-            <a:endParaRPr/>
           </a:p>
         </p:txBody>
       </p:sp>
@@ -9754,7 +7833,7 @@
         <p:spPr>
           <a:xfrm>
             <a:off x="731520" y="1234440"/>
-            <a:ext cx="5166360" cy="615553"/>
+            <a:ext cx="5166360" cy="1188720"/>
           </a:xfrm>
           <a:prstGeom prst="rect">
             <a:avLst/>
@@ -9776,36 +7855,7 @@
               </a:defRPr>
             </a:pPr>
             <a:r>
-              <a:rPr sz="1600" dirty="0" err="1"/>
-              <a:t>Os</a:t>
-            </a:r>
-            <a:r>
-              <a:rPr sz="1600" dirty="0"/>
-              <a:t> </a:t>
-            </a:r>
-            <a:r>
-              <a:rPr sz="1600" dirty="0" err="1"/>
-              <a:t>Sentidos</a:t>
-            </a:r>
-            <a:r>
-              <a:rPr sz="1600" dirty="0"/>
-              <a:t> da </a:t>
-            </a:r>
-            <a:r>
-              <a:rPr sz="1600" dirty="0" err="1"/>
-              <a:t>Aplicação</a:t>
-            </a:r>
-            <a:r>
-              <a:rPr sz="1600" dirty="0"/>
-              <a:t> (</a:t>
-            </a:r>
-            <a:r>
-              <a:rPr sz="1600" dirty="0" err="1"/>
-              <a:t>Eventos</a:t>
-            </a:r>
-            <a:r>
-              <a:rPr sz="1600" dirty="0"/>
-              <a:t> JavaScript)</a:t>
+              <a:t>Os Sentidos da Aplicação (Eventos JavaScript)</a:t>
             </a:r>
           </a:p>
           <a:p>
@@ -9818,60 +7868,7 @@
               </a:defRPr>
             </a:pPr>
             <a:r>
-              <a:rPr dirty="0" err="1"/>
-              <a:t>Tratamento</a:t>
-            </a:r>
-            <a:r>
-              <a:rPr dirty="0"/>
-              <a:t> de </a:t>
-            </a:r>
-            <a:r>
-              <a:rPr dirty="0" err="1"/>
-              <a:t>eventos</a:t>
-            </a:r>
-            <a:r>
-              <a:rPr dirty="0"/>
-              <a:t> </a:t>
-            </a:r>
-            <a:r>
-              <a:rPr dirty="0" err="1"/>
-              <a:t>pensado</a:t>
-            </a:r>
-            <a:r>
-              <a:rPr dirty="0"/>
-              <a:t> para ser </a:t>
-            </a:r>
-            <a:r>
-              <a:rPr dirty="0" err="1"/>
-              <a:t>acolhedor</a:t>
-            </a:r>
-            <a:r>
-              <a:rPr dirty="0"/>
-              <a:t> e </a:t>
-            </a:r>
-            <a:r>
-              <a:rPr dirty="0" err="1"/>
-              <a:t>intuitivo</a:t>
-            </a:r>
-            <a:r>
-              <a:rPr dirty="0"/>
-              <a:t>, </a:t>
-            </a:r>
-            <a:r>
-              <a:rPr dirty="0" err="1"/>
-              <a:t>sem</a:t>
-            </a:r>
-            <a:r>
-              <a:rPr dirty="0"/>
-              <a:t> </a:t>
-            </a:r>
-            <a:r>
-              <a:rPr dirty="0" err="1"/>
-              <a:t>burocracias</a:t>
-            </a:r>
-            <a:r>
-              <a:rPr dirty="0"/>
-              <a:t>:</a:t>
+              <a:t>Tratamento de eventos pensado para ser acolhedor e intuitivo, sem burocracias:</a:t>
             </a:r>
           </a:p>
         </p:txBody>
@@ -9918,7 +7915,6 @@
           <a:lstStyle/>
           <a:p>
             <a:pPr algn="ctr"/>
-            <a:endParaRPr/>
           </a:p>
         </p:txBody>
       </p:sp>
@@ -9962,7 +7958,6 @@
           <a:lstStyle/>
           <a:p>
             <a:pPr algn="ctr"/>
-            <a:endParaRPr/>
           </a:p>
         </p:txBody>
       </p:sp>
@@ -9975,7 +7970,7 @@
         <p:spPr>
           <a:xfrm>
             <a:off x="960120" y="2651760"/>
-            <a:ext cx="4800600" cy="3247043"/>
+            <a:ext cx="4800600" cy="3246120"/>
           </a:xfrm>
           <a:prstGeom prst="rect">
             <a:avLst/>
@@ -9988,7 +7983,7 @@
           </a:bodyPr>
           <a:lstStyle/>
           <a:p>
-            <a:pPr algn="just">
+            <a:pPr>
               <a:defRPr sz="1300" b="1">
                 <a:solidFill>
                   <a:srgbClr val="00873E"/>
@@ -9997,33 +7992,8 @@
               </a:defRPr>
             </a:pPr>
             <a:r>
-              <a:rPr sz="1600" dirty="0" err="1"/>
-              <a:t>Eventos</a:t>
-            </a:r>
-            <a:r>
-              <a:rPr sz="1600" dirty="0"/>
-              <a:t> Centrais </a:t>
-            </a:r>
-            <a:r>
-              <a:rPr sz="1600" dirty="0" err="1"/>
-              <a:t>Implementados</a:t>
-            </a:r>
-            <a:r>
-              <a:rPr sz="1600" dirty="0"/>
-              <a:t>:</a:t>
-            </a:r>
-            <a:endParaRPr lang="pt-BR" sz="1600" dirty="0"/>
-          </a:p>
-          <a:p>
-            <a:pPr algn="just">
-              <a:defRPr sz="1300" b="1">
-                <a:solidFill>
-                  <a:srgbClr val="00873E"/>
-                </a:solidFill>
-                <a:latin typeface="Segoe UI"/>
-              </a:defRPr>
-            </a:pPr>
-            <a:endParaRPr dirty="0"/>
+              <a:t>Eventos Centrais Implementados:</a:t>
+            </a:r>
           </a:p>
           <a:p>
             <a:pPr algn="just">
@@ -10035,114 +8005,8 @@
               </a:defRPr>
             </a:pPr>
             <a:r>
-              <a:rPr sz="1400" dirty="0"/>
-              <a:t>• </a:t>
-            </a:r>
-            <a:r>
-              <a:rPr sz="1400" dirty="0" err="1"/>
-              <a:t>onSubmit</a:t>
-            </a:r>
-            <a:r>
-              <a:rPr sz="1400" dirty="0"/>
-              <a:t> (</a:t>
-            </a:r>
-            <a:r>
-              <a:rPr sz="1400" dirty="0" err="1"/>
-              <a:t>Doar.jsx</a:t>
-            </a:r>
-            <a:r>
-              <a:rPr sz="1400" dirty="0"/>
-              <a:t>): </a:t>
-            </a:r>
-            <a:r>
-              <a:rPr sz="1400" dirty="0" err="1"/>
-              <a:t>Interrompe</a:t>
-            </a:r>
-            <a:r>
-              <a:rPr sz="1400" dirty="0"/>
-              <a:t> o </a:t>
-            </a:r>
-            <a:r>
-              <a:rPr sz="1400" dirty="0" err="1"/>
-              <a:t>recarregamento</a:t>
-            </a:r>
-            <a:r>
-              <a:rPr sz="1400" dirty="0"/>
-              <a:t> </a:t>
-            </a:r>
-            <a:r>
-              <a:rPr sz="1400" dirty="0" err="1"/>
-              <a:t>brusco</a:t>
-            </a:r>
-            <a:r>
-              <a:rPr sz="1400" dirty="0"/>
-              <a:t>, </a:t>
-            </a:r>
-            <a:r>
-              <a:rPr sz="1400" dirty="0" err="1"/>
-              <a:t>valida</a:t>
-            </a:r>
-            <a:r>
-              <a:rPr sz="1400" dirty="0"/>
-              <a:t> campos, </a:t>
-            </a:r>
-            <a:r>
-              <a:rPr sz="1400" dirty="0" err="1"/>
-              <a:t>grava</a:t>
-            </a:r>
-            <a:r>
-              <a:rPr sz="1400" dirty="0"/>
-              <a:t> no </a:t>
-            </a:r>
-            <a:r>
-              <a:rPr sz="1400" dirty="0" err="1"/>
-              <a:t>localStorage</a:t>
-            </a:r>
-            <a:r>
-              <a:rPr sz="1400" dirty="0"/>
-              <a:t> e </a:t>
-            </a:r>
-            <a:r>
-              <a:rPr sz="1400" dirty="0" err="1"/>
-              <a:t>emite</a:t>
-            </a:r>
-            <a:r>
-              <a:rPr sz="1400" dirty="0"/>
-              <a:t> </a:t>
-            </a:r>
-            <a:r>
-              <a:rPr sz="1400" dirty="0" err="1"/>
-              <a:t>Recibo</a:t>
-            </a:r>
-            <a:r>
-              <a:rPr sz="1400" dirty="0"/>
-              <a:t> </a:t>
-            </a:r>
-            <a:r>
-              <a:rPr sz="1400" dirty="0" err="1"/>
-              <a:t>Solidário</a:t>
-            </a:r>
-            <a:r>
-              <a:rPr sz="1400" dirty="0"/>
-              <a:t> com </a:t>
-            </a:r>
-            <a:r>
-              <a:rPr sz="1400" dirty="0" err="1"/>
-              <a:t>código</a:t>
-            </a:r>
-            <a:r>
-              <a:rPr sz="1400" dirty="0"/>
-              <a:t> </a:t>
-            </a:r>
-            <a:r>
-              <a:rPr sz="1400" dirty="0" err="1"/>
-              <a:t>rastreável</a:t>
-            </a:r>
-            <a:r>
-              <a:rPr sz="1400" dirty="0"/>
-              <a:t> (REC-XXXXXX).</a:t>
-            </a:r>
-            <a:endParaRPr lang="pt-BR" sz="1400" dirty="0"/>
+              <a:t>• onSubmit (Doar.jsx): Interrompe o recarregamento brusco, valida campos, grava no localStorage e emite Recibo Solidário com código rastreável (REC-XXXXXX).</a:t>
+            </a:r>
           </a:p>
           <a:p>
             <a:pPr algn="just">
@@ -10153,7 +8017,9 @@
                 <a:latin typeface="Segoe UI"/>
               </a:defRPr>
             </a:pPr>
-            <a:endParaRPr sz="1400" dirty="0"/>
+            <a:r>
+              <a:t>• onChange (PrestacaoContas.jsx): Filtra os 13 bairros e a Zona Rural enquanto o morador digita, normalizando acentos sem travamentos.</a:t>
+            </a:r>
           </a:p>
           <a:p>
             <a:pPr algn="just">
@@ -10165,90 +8031,8 @@
               </a:defRPr>
             </a:pPr>
             <a:r>
-              <a:rPr sz="1400" dirty="0"/>
-              <a:t>• </a:t>
-            </a:r>
-            <a:r>
-              <a:rPr sz="1400" dirty="0" err="1"/>
-              <a:t>onChange</a:t>
-            </a:r>
-            <a:r>
-              <a:rPr sz="1400" dirty="0"/>
-              <a:t> (</a:t>
-            </a:r>
-            <a:r>
-              <a:rPr sz="1400" dirty="0" err="1"/>
-              <a:t>PrestacaoContas.jsx</a:t>
-            </a:r>
-            <a:r>
-              <a:rPr sz="1400" dirty="0"/>
-              <a:t>): Filtra </a:t>
-            </a:r>
-            <a:r>
-              <a:rPr sz="1400" dirty="0" err="1"/>
-              <a:t>os</a:t>
-            </a:r>
-            <a:r>
-              <a:rPr sz="1400" dirty="0"/>
-              <a:t> 13 bairros e a Zona Rural </a:t>
-            </a:r>
-            <a:r>
-              <a:rPr sz="1400" dirty="0" err="1"/>
-              <a:t>enquanto</a:t>
-            </a:r>
-            <a:r>
-              <a:rPr sz="1400" dirty="0"/>
-              <a:t> o </a:t>
-            </a:r>
-            <a:r>
-              <a:rPr sz="1400" dirty="0" err="1"/>
-              <a:t>morador</a:t>
-            </a:r>
-            <a:r>
-              <a:rPr sz="1400" dirty="0"/>
-              <a:t> </a:t>
-            </a:r>
-            <a:r>
-              <a:rPr sz="1400" dirty="0" err="1"/>
-              <a:t>digita</a:t>
-            </a:r>
-            <a:r>
-              <a:rPr sz="1400" dirty="0"/>
-              <a:t>, </a:t>
-            </a:r>
-            <a:r>
-              <a:rPr sz="1400" dirty="0" err="1"/>
-              <a:t>normalizando</a:t>
-            </a:r>
-            <a:r>
-              <a:rPr sz="1400" dirty="0"/>
-              <a:t> </a:t>
-            </a:r>
-            <a:r>
-              <a:rPr sz="1400" dirty="0" err="1"/>
-              <a:t>acentos</a:t>
-            </a:r>
-            <a:r>
-              <a:rPr sz="1400" dirty="0"/>
-              <a:t> </a:t>
-            </a:r>
-            <a:r>
-              <a:rPr sz="1400" dirty="0" err="1"/>
-              <a:t>sem</a:t>
-            </a:r>
-            <a:r>
-              <a:rPr sz="1400" dirty="0"/>
-              <a:t> </a:t>
-            </a:r>
-            <a:r>
-              <a:rPr sz="1400" dirty="0" err="1"/>
-              <a:t>travamentos</a:t>
-            </a:r>
-            <a:r>
-              <a:rPr sz="1400" dirty="0"/>
-              <a:t>.</a:t>
-            </a:r>
-            <a:endParaRPr lang="pt-BR" sz="1400" dirty="0"/>
+              <a:t>• onClick na Navbar: Menu móvel que abre e fecha sozinho ao tocar em qualquer link.</a:t>
+            </a:r>
           </a:p>
           <a:p>
             <a:pPr algn="just">
@@ -10259,174 +8043,8 @@
                 <a:latin typeface="Segoe UI"/>
               </a:defRPr>
             </a:pPr>
-            <a:endParaRPr sz="1400" dirty="0"/>
-          </a:p>
-          <a:p>
-            <a:pPr algn="just">
-              <a:defRPr sz="1050">
-                <a:solidFill>
-                  <a:srgbClr val="1E293B"/>
-                </a:solidFill>
-                <a:latin typeface="Segoe UI"/>
-              </a:defRPr>
-            </a:pPr>
-            <a:r>
-              <a:rPr sz="1400" dirty="0"/>
-              <a:t>• </a:t>
-            </a:r>
-            <a:r>
-              <a:rPr sz="1400" dirty="0" err="1"/>
-              <a:t>onClick</a:t>
-            </a:r>
-            <a:r>
-              <a:rPr sz="1400" dirty="0"/>
-              <a:t> </a:t>
-            </a:r>
-            <a:r>
-              <a:rPr sz="1400" dirty="0" err="1"/>
-              <a:t>na</a:t>
-            </a:r>
-            <a:r>
-              <a:rPr sz="1400" dirty="0"/>
-              <a:t> Navbar: Menu </a:t>
-            </a:r>
-            <a:r>
-              <a:rPr sz="1400" dirty="0" err="1"/>
-              <a:t>móvel</a:t>
-            </a:r>
-            <a:r>
-              <a:rPr sz="1400" dirty="0"/>
-              <a:t> </a:t>
-            </a:r>
-            <a:r>
-              <a:rPr sz="1400" dirty="0" err="1"/>
-              <a:t>que</a:t>
-            </a:r>
-            <a:r>
-              <a:rPr sz="1400" dirty="0"/>
-              <a:t> </a:t>
-            </a:r>
-            <a:r>
-              <a:rPr sz="1400" dirty="0" err="1"/>
-              <a:t>abre</a:t>
-            </a:r>
-            <a:r>
-              <a:rPr sz="1400" dirty="0"/>
-              <a:t> e </a:t>
-            </a:r>
-            <a:r>
-              <a:rPr sz="1400" dirty="0" err="1"/>
-              <a:t>fecha</a:t>
-            </a:r>
-            <a:r>
-              <a:rPr sz="1400" dirty="0"/>
-              <a:t> </a:t>
-            </a:r>
-            <a:r>
-              <a:rPr sz="1400" dirty="0" err="1"/>
-              <a:t>sozinho</a:t>
-            </a:r>
-            <a:r>
-              <a:rPr sz="1400" dirty="0"/>
-              <a:t> </a:t>
-            </a:r>
-            <a:r>
-              <a:rPr sz="1400" dirty="0" err="1"/>
-              <a:t>ao</a:t>
-            </a:r>
-            <a:r>
-              <a:rPr sz="1400" dirty="0"/>
-              <a:t> </a:t>
-            </a:r>
-            <a:r>
-              <a:rPr sz="1400" dirty="0" err="1"/>
-              <a:t>tocar</a:t>
-            </a:r>
-            <a:r>
-              <a:rPr sz="1400" dirty="0"/>
-              <a:t> </a:t>
-            </a:r>
-            <a:r>
-              <a:rPr sz="1400" dirty="0" err="1"/>
-              <a:t>em</a:t>
-            </a:r>
-            <a:r>
-              <a:rPr sz="1400" dirty="0"/>
-              <a:t> </a:t>
-            </a:r>
-            <a:r>
-              <a:rPr sz="1400" dirty="0" err="1"/>
-              <a:t>qualquer</a:t>
-            </a:r>
-            <a:r>
-              <a:rPr sz="1400" dirty="0"/>
-              <a:t> link.</a:t>
-            </a:r>
-            <a:endParaRPr lang="pt-BR" sz="1400" dirty="0"/>
-          </a:p>
-          <a:p>
-            <a:pPr algn="just">
-              <a:defRPr sz="1050">
-                <a:solidFill>
-                  <a:srgbClr val="1E293B"/>
-                </a:solidFill>
-                <a:latin typeface="Segoe UI"/>
-              </a:defRPr>
-            </a:pPr>
-            <a:endParaRPr sz="1400" dirty="0"/>
-          </a:p>
-          <a:p>
-            <a:pPr algn="just">
-              <a:defRPr sz="1050">
-                <a:solidFill>
-                  <a:srgbClr val="1E293B"/>
-                </a:solidFill>
-                <a:latin typeface="Segoe UI"/>
-              </a:defRPr>
-            </a:pPr>
-            <a:r>
-              <a:rPr sz="1400" dirty="0"/>
-              <a:t>• Clipboard API: </a:t>
-            </a:r>
-            <a:r>
-              <a:rPr sz="1400" dirty="0" err="1"/>
-              <a:t>Cópia</a:t>
-            </a:r>
-            <a:r>
-              <a:rPr sz="1400" dirty="0"/>
-              <a:t> suave da </a:t>
-            </a:r>
-            <a:r>
-              <a:rPr sz="1400" dirty="0" err="1"/>
-              <a:t>chave</a:t>
-            </a:r>
-            <a:r>
-              <a:rPr sz="1400" dirty="0"/>
-              <a:t> PIX </a:t>
-            </a:r>
-            <a:r>
-              <a:rPr sz="1400" dirty="0" err="1"/>
-              <a:t>sem</a:t>
-            </a:r>
-            <a:r>
-              <a:rPr sz="1400" dirty="0"/>
-              <a:t> </a:t>
-            </a:r>
-            <a:r>
-              <a:rPr sz="1400" dirty="0" err="1"/>
-              <a:t>selecionar</a:t>
-            </a:r>
-            <a:r>
-              <a:rPr sz="1400" dirty="0"/>
-              <a:t> </a:t>
-            </a:r>
-            <a:r>
-              <a:rPr sz="1400" dirty="0" err="1"/>
-              <a:t>texto</a:t>
-            </a:r>
-            <a:r>
-              <a:rPr sz="1400" dirty="0"/>
-              <a:t>.</a:t>
+            <a:r>
+              <a:t>• Clipboard API: Cópia suave da chave PIX sem selecionar texto.</a:t>
             </a:r>
           </a:p>
         </p:txBody>
@@ -10440,7 +8058,7 @@
         <p:spPr>
           <a:xfrm>
             <a:off x="6263640" y="1234440"/>
-            <a:ext cx="5166360" cy="1023357"/>
+            <a:ext cx="5166360" cy="1188720"/>
           </a:xfrm>
           <a:prstGeom prst="rect">
             <a:avLst/>
@@ -10462,32 +8080,7 @@
               </a:defRPr>
             </a:pPr>
             <a:r>
-              <a:rPr sz="1600" dirty="0"/>
-              <a:t>A Música </a:t>
-            </a:r>
-            <a:r>
-              <a:rPr sz="1600" dirty="0" err="1"/>
-              <a:t>que</a:t>
-            </a:r>
-            <a:r>
-              <a:rPr sz="1600" dirty="0"/>
-              <a:t> </a:t>
-            </a:r>
-            <a:r>
-              <a:rPr sz="1600" dirty="0" err="1"/>
-              <a:t>Conecta</a:t>
-            </a:r>
-            <a:r>
-              <a:rPr sz="1600" dirty="0"/>
-              <a:t> </a:t>
-            </a:r>
-            <a:r>
-              <a:rPr sz="1600" dirty="0" err="1"/>
-              <a:t>Gerações</a:t>
-            </a:r>
-            <a:r>
-              <a:rPr sz="1600" dirty="0"/>
-              <a:t> (Imagine — John Lennon, 1971)</a:t>
+              <a:t>A Música que Conecta Gerações (Imagine — John Lennon, 1971)</a:t>
             </a:r>
           </a:p>
           <a:p>
@@ -10500,140 +8093,7 @@
               </a:defRPr>
             </a:pPr>
             <a:r>
-              <a:rPr dirty="0" err="1"/>
-              <a:t>Nenhum</a:t>
-            </a:r>
-            <a:r>
-              <a:rPr dirty="0"/>
-              <a:t> </a:t>
-            </a:r>
-            <a:r>
-              <a:rPr dirty="0" err="1"/>
-              <a:t>projeto</a:t>
-            </a:r>
-            <a:r>
-              <a:rPr dirty="0"/>
-              <a:t> </a:t>
-            </a:r>
-            <a:r>
-              <a:rPr dirty="0" err="1"/>
-              <a:t>comunitário</a:t>
-            </a:r>
-            <a:r>
-              <a:rPr dirty="0"/>
-              <a:t> </a:t>
-            </a:r>
-            <a:r>
-              <a:rPr dirty="0" err="1"/>
-              <a:t>vive</a:t>
-            </a:r>
-            <a:r>
-              <a:rPr dirty="0"/>
-              <a:t> </a:t>
-            </a:r>
-            <a:r>
-              <a:rPr dirty="0" err="1"/>
-              <a:t>só</a:t>
-            </a:r>
-            <a:r>
-              <a:rPr dirty="0"/>
-              <a:t> de </a:t>
-            </a:r>
-            <a:r>
-              <a:rPr dirty="0" err="1"/>
-              <a:t>botões</a:t>
-            </a:r>
-            <a:r>
-              <a:rPr dirty="0"/>
-              <a:t>; </a:t>
-            </a:r>
-            <a:r>
-              <a:rPr dirty="0" err="1"/>
-              <a:t>ele</a:t>
-            </a:r>
-            <a:r>
-              <a:rPr dirty="0"/>
-              <a:t> </a:t>
-            </a:r>
-            <a:r>
-              <a:rPr dirty="0" err="1"/>
-              <a:t>vive</a:t>
-            </a:r>
-            <a:r>
-              <a:rPr dirty="0"/>
-              <a:t> de </a:t>
-            </a:r>
-            <a:r>
-              <a:rPr dirty="0" err="1"/>
-              <a:t>sentimento</a:t>
-            </a:r>
-            <a:r>
-              <a:rPr dirty="0"/>
-              <a:t>. A </a:t>
-            </a:r>
-            <a:r>
-              <a:rPr dirty="0" err="1"/>
-              <a:t>trilha</a:t>
-            </a:r>
-            <a:r>
-              <a:rPr dirty="0"/>
-              <a:t> </a:t>
-            </a:r>
-            <a:r>
-              <a:rPr dirty="0" err="1"/>
-              <a:t>sonora</a:t>
-            </a:r>
-            <a:r>
-              <a:rPr dirty="0"/>
-              <a:t> </a:t>
-            </a:r>
-            <a:r>
-              <a:rPr dirty="0" err="1"/>
-              <a:t>traz</a:t>
-            </a:r>
-            <a:r>
-              <a:rPr dirty="0"/>
-              <a:t> a </a:t>
-            </a:r>
-            <a:r>
-              <a:rPr dirty="0" err="1"/>
-              <a:t>clássica</a:t>
-            </a:r>
-            <a:r>
-              <a:rPr dirty="0"/>
-              <a:t> </a:t>
-            </a:r>
-            <a:r>
-              <a:rPr dirty="0" err="1"/>
-              <a:t>canção</a:t>
-            </a:r>
-            <a:r>
-              <a:rPr dirty="0"/>
-              <a:t> 'Imagine' para </a:t>
-            </a:r>
-            <a:r>
-              <a:rPr dirty="0" err="1"/>
-              <a:t>sensibilização</a:t>
-            </a:r>
-            <a:r>
-              <a:rPr dirty="0"/>
-              <a:t> </a:t>
-            </a:r>
-            <a:r>
-              <a:rPr dirty="0" err="1"/>
-              <a:t>pedagógica</a:t>
-            </a:r>
-            <a:r>
-              <a:rPr dirty="0"/>
-              <a:t> e </a:t>
-            </a:r>
-            <a:r>
-              <a:rPr dirty="0" err="1"/>
-              <a:t>acolhimento</a:t>
-            </a:r>
-            <a:r>
-              <a:rPr dirty="0"/>
-              <a:t>.</a:t>
+              <a:t>Nenhum projeto comunitário vive só de botões; ele vive de sentimento. A trilha sonora traz a clássica canção 'Imagine' para sensibilização pedagógica e acolhimento.</a:t>
             </a:r>
           </a:p>
         </p:txBody>
@@ -10680,7 +8140,6 @@
           <a:lstStyle/>
           <a:p>
             <a:pPr algn="ctr"/>
-            <a:endParaRPr/>
           </a:p>
         </p:txBody>
       </p:sp>
@@ -10693,7 +8152,7 @@
         <p:spPr>
           <a:xfrm>
             <a:off x="6537960" y="2651760"/>
-            <a:ext cx="4663440" cy="3170099"/>
+            <a:ext cx="4663440" cy="3246120"/>
           </a:xfrm>
           <a:prstGeom prst="rect">
             <a:avLst/>
@@ -10706,7 +8165,7 @@
           </a:bodyPr>
           <a:lstStyle/>
           <a:p>
-            <a:pPr algn="ctr">
+            <a:pPr>
               <a:defRPr sz="1300" b="1">
                 <a:solidFill>
                   <a:srgbClr val="00873E"/>
@@ -10715,312 +8174,35 @@
               </a:defRPr>
             </a:pPr>
             <a:r>
-              <a:rPr sz="1600" dirty="0" err="1"/>
-              <a:t>Tratamento</a:t>
-            </a:r>
-            <a:r>
-              <a:rPr sz="1600" dirty="0"/>
-              <a:t> </a:t>
-            </a:r>
-            <a:r>
-              <a:rPr sz="1600" dirty="0" err="1"/>
-              <a:t>Cuidadoso</a:t>
-            </a:r>
-            <a:r>
-              <a:rPr sz="1600" dirty="0"/>
-              <a:t> de </a:t>
-            </a:r>
-            <a:r>
-              <a:rPr sz="1600" dirty="0" err="1"/>
-              <a:t>Áudio</a:t>
-            </a:r>
-            <a:r>
-              <a:rPr sz="1600" dirty="0"/>
-              <a:t>:</a:t>
-            </a:r>
-          </a:p>
-          <a:p>
-            <a:pPr algn="just"/>
-            <a:br>
-              <a:rPr sz="1600" dirty="0"/>
-            </a:br>
-            <a:r>
-              <a:rPr sz="1600" dirty="0"/>
-              <a:t>• </a:t>
-            </a:r>
-            <a:r>
-              <a:rPr sz="1600" dirty="0" err="1"/>
-              <a:t>Respeito</a:t>
-            </a:r>
-            <a:r>
-              <a:rPr sz="1600" dirty="0"/>
-              <a:t> </a:t>
-            </a:r>
-            <a:r>
-              <a:rPr sz="1600" dirty="0" err="1"/>
-              <a:t>ao</a:t>
-            </a:r>
-            <a:r>
-              <a:rPr sz="1600" dirty="0"/>
-              <a:t> </a:t>
-            </a:r>
-            <a:r>
-              <a:rPr sz="1600" dirty="0" err="1"/>
-              <a:t>Usuário</a:t>
-            </a:r>
-            <a:r>
-              <a:rPr sz="1600" dirty="0"/>
-              <a:t> (Anti-Autoplay </a:t>
-            </a:r>
-            <a:r>
-              <a:rPr sz="1600" dirty="0" err="1"/>
-              <a:t>Invasivo</a:t>
-            </a:r>
-            <a:r>
-              <a:rPr sz="1600" dirty="0"/>
-              <a:t>): </a:t>
-            </a:r>
-            <a:r>
-              <a:rPr sz="1600" dirty="0" err="1"/>
-              <a:t>Navegadores</a:t>
-            </a:r>
-            <a:r>
-              <a:rPr sz="1600" dirty="0"/>
-              <a:t> </a:t>
-            </a:r>
-            <a:r>
-              <a:rPr sz="1600" dirty="0" err="1"/>
-              <a:t>modernos</a:t>
-            </a:r>
-            <a:r>
-              <a:rPr sz="1600" dirty="0"/>
-              <a:t> </a:t>
-            </a:r>
-            <a:r>
-              <a:rPr sz="1600" dirty="0" err="1"/>
-              <a:t>bloqueiam</a:t>
-            </a:r>
-            <a:r>
-              <a:rPr sz="1600" dirty="0"/>
-              <a:t> </a:t>
-            </a:r>
-            <a:r>
-              <a:rPr sz="1600" dirty="0" err="1"/>
-              <a:t>reprodução</a:t>
-            </a:r>
-            <a:r>
-              <a:rPr sz="1600" dirty="0"/>
-              <a:t> </a:t>
-            </a:r>
-            <a:r>
-              <a:rPr sz="1600" dirty="0" err="1"/>
-              <a:t>automática</a:t>
-            </a:r>
-            <a:r>
-              <a:rPr sz="1600" dirty="0"/>
-              <a:t>. </a:t>
-            </a:r>
-            <a:r>
-              <a:rPr sz="1600" dirty="0" err="1"/>
-              <a:t>Criamos</a:t>
-            </a:r>
-            <a:r>
-              <a:rPr sz="1600" dirty="0"/>
-              <a:t> </a:t>
-            </a:r>
-            <a:r>
-              <a:rPr sz="1600" dirty="0" err="1"/>
-              <a:t>escutadores</a:t>
-            </a:r>
-            <a:r>
-              <a:rPr sz="1600" dirty="0"/>
-              <a:t> de </a:t>
-            </a:r>
-            <a:r>
-              <a:rPr sz="1600" dirty="0" err="1"/>
-              <a:t>evento</a:t>
-            </a:r>
-            <a:r>
-              <a:rPr sz="1600" dirty="0"/>
-              <a:t> (</a:t>
-            </a:r>
-            <a:r>
-              <a:rPr sz="1600" dirty="0" err="1"/>
-              <a:t>window.addEventListener</a:t>
-            </a:r>
-            <a:r>
-              <a:rPr sz="1600" dirty="0"/>
-              <a:t>('click') e </a:t>
-            </a:r>
-            <a:r>
-              <a:rPr sz="1600" dirty="0" err="1"/>
-              <a:t>rolagem</a:t>
-            </a:r>
-            <a:r>
-              <a:rPr sz="1600" dirty="0"/>
-              <a:t>) para </a:t>
-            </a:r>
-            <a:r>
-              <a:rPr sz="1600" dirty="0" err="1"/>
-              <a:t>iniciar</a:t>
-            </a:r>
-            <a:r>
-              <a:rPr sz="1600" dirty="0"/>
-              <a:t> </a:t>
-            </a:r>
-            <a:r>
-              <a:rPr sz="1600" dirty="0" err="1"/>
-              <a:t>suavemente</a:t>
-            </a:r>
-            <a:r>
-              <a:rPr sz="1600" dirty="0"/>
-              <a:t> </a:t>
-            </a:r>
-            <a:r>
-              <a:rPr sz="1600" dirty="0" err="1"/>
-              <a:t>quando</a:t>
-            </a:r>
-            <a:r>
-              <a:rPr sz="1600" dirty="0"/>
-              <a:t> o </a:t>
-            </a:r>
-            <a:r>
-              <a:rPr sz="1600" dirty="0" err="1"/>
-              <a:t>visitante</a:t>
-            </a:r>
-            <a:r>
-              <a:rPr sz="1600" dirty="0"/>
-              <a:t> </a:t>
-            </a:r>
-            <a:r>
-              <a:rPr sz="1600" dirty="0" err="1"/>
-              <a:t>demonstra</a:t>
-            </a:r>
-            <a:r>
-              <a:rPr sz="1600" dirty="0"/>
-              <a:t> interesse </a:t>
-            </a:r>
-            <a:r>
-              <a:rPr sz="1600" dirty="0" err="1"/>
-              <a:t>pelo</a:t>
-            </a:r>
-            <a:r>
-              <a:rPr sz="1600" dirty="0"/>
-              <a:t> site.</a:t>
-            </a:r>
-          </a:p>
-          <a:p>
-            <a:pPr algn="just"/>
-            <a:br>
-              <a:rPr sz="1600" dirty="0"/>
-            </a:br>
-            <a:r>
-              <a:rPr sz="1600" dirty="0"/>
-              <a:t>• </a:t>
-            </a:r>
-            <a:r>
-              <a:rPr sz="1600" dirty="0" err="1"/>
-              <a:t>Controles</a:t>
-            </a:r>
-            <a:r>
-              <a:rPr sz="1600" dirty="0"/>
-              <a:t> </a:t>
-            </a:r>
-            <a:r>
-              <a:rPr sz="1600" dirty="0" err="1"/>
-              <a:t>Completos</a:t>
-            </a:r>
-            <a:r>
-              <a:rPr sz="1600" dirty="0"/>
-              <a:t>: Slider de volume </a:t>
-            </a:r>
-            <a:r>
-              <a:rPr sz="1600" dirty="0" err="1"/>
-              <a:t>contínuo</a:t>
-            </a:r>
-            <a:r>
-              <a:rPr sz="1600" dirty="0"/>
-              <a:t>, </a:t>
-            </a:r>
-            <a:r>
-              <a:rPr sz="1600" dirty="0" err="1"/>
-              <a:t>botão</a:t>
-            </a:r>
-            <a:r>
-              <a:rPr sz="1600" dirty="0"/>
-              <a:t> de </a:t>
-            </a:r>
-            <a:r>
-              <a:rPr sz="1600" dirty="0" err="1"/>
-              <a:t>silenciar</a:t>
-            </a:r>
-            <a:r>
-              <a:rPr sz="1600" dirty="0"/>
-              <a:t> (mute), </a:t>
-            </a:r>
-            <a:r>
-              <a:rPr sz="1600" dirty="0" err="1"/>
-              <a:t>equalizador</a:t>
-            </a:r>
-            <a:r>
-              <a:rPr sz="1600" dirty="0"/>
-              <a:t> com 3 barras </a:t>
-            </a:r>
-            <a:r>
-              <a:rPr sz="1600" dirty="0" err="1"/>
-              <a:t>animadas</a:t>
-            </a:r>
-            <a:r>
-              <a:rPr sz="1600" dirty="0"/>
-              <a:t> </a:t>
-            </a:r>
-            <a:r>
-              <a:rPr sz="1600" dirty="0" err="1"/>
-              <a:t>em</a:t>
-            </a:r>
-            <a:r>
-              <a:rPr sz="1600" dirty="0"/>
-              <a:t> CSS e </a:t>
-            </a:r>
-            <a:r>
-              <a:rPr sz="1600" dirty="0" err="1"/>
-              <a:t>botão</a:t>
-            </a:r>
-            <a:r>
-              <a:rPr sz="1600" dirty="0"/>
-              <a:t> para </a:t>
-            </a:r>
-            <a:r>
-              <a:rPr sz="1600" dirty="0" err="1"/>
-              <a:t>recolher</a:t>
-            </a:r>
-            <a:r>
-              <a:rPr sz="1600" dirty="0"/>
-              <a:t> o </a:t>
-            </a:r>
-            <a:r>
-              <a:rPr sz="1600" dirty="0" err="1"/>
-              <a:t>tocador</a:t>
-            </a:r>
-            <a:r>
-              <a:rPr sz="1600" dirty="0"/>
-              <a:t> para um canto </a:t>
-            </a:r>
-            <a:r>
-              <a:rPr sz="1600" dirty="0" err="1"/>
-              <a:t>discreto</a:t>
-            </a:r>
-            <a:r>
-              <a:rPr sz="1600" dirty="0"/>
-              <a:t> da </a:t>
-            </a:r>
-            <a:r>
-              <a:rPr sz="1600" dirty="0" err="1"/>
-              <a:t>tela</a:t>
-            </a:r>
-            <a:r>
-              <a:rPr sz="1600" dirty="0"/>
-              <a:t>.</a:t>
+              <a:t>Tratamento Cuidadoso de Áudio:</a:t>
+            </a:r>
+          </a:p>
+          <a:p>
+            <a:br/>
+            <a:pPr algn="just">
+              <a:defRPr sz="1100">
+                <a:solidFill>
+                  <a:srgbClr val="1E293B"/>
+                </a:solidFill>
+                <a:latin typeface="Segoe UI"/>
+              </a:defRPr>
+            </a:pPr>
+            <a:r>
+              <a:t>• Respeito ao Usuário (Anti-Autoplay Invasivo): Navegadores modernos bloqueiam reprodução automática. Criamos escutadores de evento (window.addEventListener('click') e rolagem) para iniciar suavemente quando o visitante demonstra interesse pelo site.</a:t>
+            </a:r>
+          </a:p>
+          <a:p>
+            <a:br/>
+            <a:pPr algn="just">
+              <a:defRPr sz="1100">
+                <a:solidFill>
+                  <a:srgbClr val="1E293B"/>
+                </a:solidFill>
+                <a:latin typeface="Segoe UI"/>
+              </a:defRPr>
+            </a:pPr>
+            <a:r>
+              <a:t>• Controles Completos: Slider de volume contínuo, botão de silenciar (mute), equalizador com 3 barras animadas em CSS e botão para recolher o tocador para um canto discreto da tela.</a:t>
             </a:r>
           </a:p>
         </p:txBody>
@@ -11034,7 +8216,7 @@
 </file>
 
 <file path=ppt/slides/slide5.xml><?xml version="1.0" encoding="utf-8"?>
-<p:sld xmlns:a="http://schemas.openxmlformats.org/drawingml/2006/main" xmlns:r="http://schemas.openxmlformats.org/officeDocument/2006/relationships" xmlns:p="http://schemas.openxmlformats.org/presentationml/2006/main">
+<p:sld xmlns:a="http://schemas.openxmlformats.org/drawingml/2006/main" xmlns:p="http://schemas.openxmlformats.org/presentationml/2006/main" xmlns:r="http://schemas.openxmlformats.org/officeDocument/2006/relationships">
   <p:cSld>
     <p:spTree>
       <p:nvGrpSpPr>
@@ -11042,14 +8224,7 @@
         <p:cNvGrpSpPr/>
         <p:nvPr/>
       </p:nvGrpSpPr>
-      <p:grpSpPr>
-        <a:xfrm>
-          <a:off x="0" y="0"/>
-          <a:ext cx="0" cy="0"/>
-          <a:chOff x="0" y="0"/>
-          <a:chExt cx="0" cy="0"/>
-        </a:xfrm>
-      </p:grpSpPr>
+      <p:grpSpPr/>
       <p:sp>
         <p:nvSpPr>
           <p:cNvPr id="2" name="TextBox 1"/>
@@ -11124,7 +8299,7 @@
           </a:fontRef>
         </p:style>
         <p:txBody>
-          <a:bodyPr tIns="54864" rtlCol="0" anchor="ctr"/>
+          <a:bodyPr rtlCol="0" anchor="ctr" tIns="54864"/>
           <a:lstStyle/>
           <a:p>
             <a:pPr algn="ctr">
@@ -11181,7 +8356,6 @@
           <a:lstStyle/>
           <a:p>
             <a:pPr algn="ctr"/>
-            <a:endParaRPr/>
           </a:p>
         </p:txBody>
       </p:sp>
@@ -11225,7 +8399,6 @@
           <a:lstStyle/>
           <a:p>
             <a:pPr algn="ctr"/>
-            <a:endParaRPr/>
           </a:p>
         </p:txBody>
       </p:sp>
@@ -11310,7 +8483,7 @@
         <p:spPr>
           <a:xfrm>
             <a:off x="731520" y="1234440"/>
-            <a:ext cx="5166360" cy="1623521"/>
+            <a:ext cx="5166360" cy="2103120"/>
           </a:xfrm>
           <a:prstGeom prst="rect">
             <a:avLst/>
@@ -11323,175 +8496,30 @@
           </a:bodyPr>
           <a:lstStyle/>
           <a:p>
+            <a:pPr>
+              <a:defRPr sz="1550" b="1">
+                <a:solidFill>
+                  <a:srgbClr val="00873E"/>
+                </a:solidFill>
+                <a:latin typeface="Segoe UI"/>
+              </a:defRPr>
+            </a:pPr>
+            <a:r>
+              <a:t>Por Que Usar a API do IBGE?</a:t>
+            </a:r>
+          </a:p>
+          <a:p>
+            <a:br/>
             <a:pPr algn="just">
-              <a:defRPr sz="1550" b="1">
-                <a:solidFill>
-                  <a:srgbClr val="00873E"/>
-                </a:solidFill>
-                <a:latin typeface="Segoe UI"/>
-              </a:defRPr>
-            </a:pPr>
-            <a:r>
-              <a:rPr dirty="0"/>
-              <a:t>Por </a:t>
-            </a:r>
-            <a:r>
-              <a:rPr dirty="0" err="1"/>
-              <a:t>Que</a:t>
-            </a:r>
-            <a:r>
-              <a:rPr dirty="0"/>
-              <a:t> Usar a API do IBGE?</a:t>
-            </a:r>
-          </a:p>
-          <a:p>
-            <a:pPr algn="just"/>
-            <a:br>
-              <a:rPr dirty="0"/>
-            </a:br>
-            <a:r>
-              <a:rPr dirty="0" err="1"/>
-              <a:t>Poderíamos</a:t>
-            </a:r>
-            <a:r>
-              <a:rPr dirty="0"/>
-              <a:t> ter </a:t>
-            </a:r>
-            <a:r>
-              <a:rPr dirty="0" err="1"/>
-              <a:t>inventado</a:t>
-            </a:r>
-            <a:r>
-              <a:rPr dirty="0"/>
-              <a:t> </a:t>
-            </a:r>
-            <a:r>
-              <a:rPr dirty="0" err="1"/>
-              <a:t>nomes</a:t>
-            </a:r>
-            <a:r>
-              <a:rPr dirty="0"/>
-              <a:t> </a:t>
-            </a:r>
-            <a:r>
-              <a:rPr dirty="0" err="1"/>
-              <a:t>em</a:t>
-            </a:r>
-            <a:r>
-              <a:rPr dirty="0"/>
-              <a:t> um </a:t>
-            </a:r>
-            <a:r>
-              <a:rPr dirty="0" err="1"/>
-              <a:t>arquivo</a:t>
-            </a:r>
-            <a:r>
-              <a:rPr dirty="0"/>
-              <a:t> </a:t>
-            </a:r>
-            <a:r>
-              <a:rPr dirty="0" err="1"/>
-              <a:t>fixo</a:t>
-            </a:r>
-            <a:r>
-              <a:rPr dirty="0"/>
-              <a:t>, mas a </a:t>
-            </a:r>
-            <a:r>
-              <a:rPr dirty="0" err="1"/>
-              <a:t>disciplina</a:t>
-            </a:r>
-            <a:r>
-              <a:rPr dirty="0"/>
-              <a:t> </a:t>
-            </a:r>
-            <a:r>
-              <a:rPr dirty="0" err="1"/>
-              <a:t>nos</a:t>
-            </a:r>
-            <a:r>
-              <a:rPr dirty="0"/>
-              <a:t> </a:t>
-            </a:r>
-            <a:r>
-              <a:rPr dirty="0" err="1"/>
-              <a:t>desafiou</a:t>
-            </a:r>
-            <a:r>
-              <a:rPr dirty="0"/>
-              <a:t> a </a:t>
-            </a:r>
-            <a:r>
-              <a:rPr dirty="0" err="1"/>
-              <a:t>trabalhar</a:t>
-            </a:r>
-            <a:r>
-              <a:rPr dirty="0"/>
-              <a:t> </a:t>
-            </a:r>
-            <a:r>
-              <a:rPr dirty="0" err="1"/>
-              <a:t>como</a:t>
-            </a:r>
-            <a:r>
-              <a:rPr dirty="0"/>
-              <a:t> </a:t>
-            </a:r>
-            <a:r>
-              <a:rPr dirty="0" err="1"/>
-              <a:t>desenvolvedores</a:t>
-            </a:r>
-            <a:r>
-              <a:rPr dirty="0"/>
-              <a:t> </a:t>
-            </a:r>
-            <a:r>
-              <a:rPr dirty="0" err="1"/>
-              <a:t>profissionais</a:t>
-            </a:r>
-            <a:r>
-              <a:rPr dirty="0"/>
-              <a:t> </a:t>
-            </a:r>
-            <a:r>
-              <a:rPr dirty="0" err="1"/>
-              <a:t>trabalham</a:t>
-            </a:r>
-            <a:r>
-              <a:rPr dirty="0"/>
-              <a:t>: </a:t>
-            </a:r>
-            <a:r>
-              <a:rPr dirty="0" err="1"/>
-              <a:t>consumindo</a:t>
-            </a:r>
-            <a:r>
-              <a:rPr dirty="0"/>
-              <a:t> dados reais de </a:t>
-            </a:r>
-            <a:r>
-              <a:rPr dirty="0" err="1"/>
-              <a:t>servidores</a:t>
-            </a:r>
-            <a:r>
-              <a:rPr dirty="0"/>
-              <a:t> </a:t>
-            </a:r>
-            <a:r>
-              <a:rPr dirty="0" err="1"/>
-              <a:t>públicos</a:t>
-            </a:r>
-            <a:r>
-              <a:rPr dirty="0"/>
-              <a:t> </a:t>
-            </a:r>
-            <a:r>
-              <a:rPr dirty="0" err="1"/>
-              <a:t>em</a:t>
-            </a:r>
-            <a:r>
-              <a:rPr dirty="0"/>
-              <a:t> tempo real.</a:t>
+              <a:defRPr sz="1200">
+                <a:solidFill>
+                  <a:srgbClr val="64748B"/>
+                </a:solidFill>
+                <a:latin typeface="Segoe UI"/>
+              </a:defRPr>
+            </a:pPr>
+            <a:r>
+              <a:t>Poderíamos ter inventado nomes em um arquivo fixo, mas a disciplina nos desafiou a trabalhar como desenvolvedores profissionais trabalham: consumindo dados reais de servidores públicos em tempo real.</a:t>
             </a:r>
           </a:p>
         </p:txBody>
@@ -11538,7 +8566,6 @@
           <a:lstStyle/>
           <a:p>
             <a:pPr algn="ctr"/>
-            <a:endParaRPr/>
           </a:p>
         </p:txBody>
       </p:sp>
@@ -11550,8 +8577,8 @@
         </p:nvSpPr>
         <p:spPr>
           <a:xfrm>
-            <a:off x="762001" y="3520440"/>
-            <a:ext cx="5048864" cy="553998"/>
+            <a:off x="914400" y="3520440"/>
+            <a:ext cx="4800600" cy="868680"/>
           </a:xfrm>
           <a:prstGeom prst="rect">
             <a:avLst/>
@@ -11564,7 +8591,7 @@
           </a:bodyPr>
           <a:lstStyle/>
           <a:p>
-            <a:pPr algn="just">
+            <a:pPr algn="l">
               <a:defRPr sz="1050" b="1">
                 <a:solidFill>
                   <a:srgbClr val="38BDF8"/>
@@ -11573,7 +8600,6 @@
               </a:defRPr>
             </a:pPr>
             <a:r>
-              <a:rPr sz="1200" dirty="0"/>
               <a:t>GET https://servicodados.ibge.gov.br/api/v1/localidades/estados/MA/municipios</a:t>
             </a:r>
           </a:p>
@@ -11610,80 +8636,7 @@
               </a:defRPr>
             </a:pPr>
             <a:r>
-              <a:rPr dirty="0"/>
-              <a:t>Obtivemos com total </a:t>
-            </a:r>
-            <a:r>
-              <a:rPr dirty="0" err="1"/>
-              <a:t>precisão</a:t>
-            </a:r>
-            <a:r>
-              <a:rPr dirty="0"/>
-              <a:t> o Código </a:t>
-            </a:r>
-            <a:r>
-              <a:rPr dirty="0" err="1"/>
-              <a:t>Oficial</a:t>
-            </a:r>
-            <a:r>
-              <a:rPr dirty="0"/>
-              <a:t> do IBGE (ID de 7 </a:t>
-            </a:r>
-            <a:r>
-              <a:rPr dirty="0" err="1"/>
-              <a:t>dígitos</a:t>
-            </a:r>
-            <a:r>
-              <a:rPr dirty="0"/>
-              <a:t>), a </a:t>
-            </a:r>
-            <a:r>
-              <a:rPr dirty="0" err="1"/>
-              <a:t>Microrregião</a:t>
-            </a:r>
-            <a:r>
-              <a:rPr dirty="0"/>
-              <a:t> e a </a:t>
-            </a:r>
-            <a:r>
-              <a:rPr dirty="0" err="1"/>
-              <a:t>Mesorregião</a:t>
-            </a:r>
-            <a:r>
-              <a:rPr dirty="0"/>
-              <a:t> de Timbiras e </a:t>
-            </a:r>
-            <a:r>
-              <a:rPr dirty="0" err="1"/>
-              <a:t>cidades</a:t>
-            </a:r>
-            <a:r>
-              <a:rPr dirty="0"/>
-              <a:t> </a:t>
-            </a:r>
-            <a:r>
-              <a:rPr dirty="0" err="1"/>
-              <a:t>vizinhas</a:t>
-            </a:r>
-            <a:r>
-              <a:rPr dirty="0"/>
-              <a:t> da </a:t>
-            </a:r>
-            <a:r>
-              <a:rPr dirty="0" err="1"/>
-              <a:t>Região</a:t>
-            </a:r>
-            <a:r>
-              <a:rPr dirty="0"/>
-              <a:t> dos </a:t>
-            </a:r>
-            <a:r>
-              <a:rPr dirty="0" err="1"/>
-              <a:t>Cocais</a:t>
-            </a:r>
-            <a:r>
-              <a:rPr dirty="0"/>
-              <a:t>.</a:t>
+              <a:t>Obtivemos com total precisão o Código Oficial do IBGE (ID de 7 dígitos), a Microrregião e a Mesorregião de Timbiras e cidades vizinhas da Região dos Cocais.</a:t>
             </a:r>
           </a:p>
         </p:txBody>
@@ -11730,7 +8683,6 @@
           <a:lstStyle/>
           <a:p>
             <a:pPr algn="ctr"/>
-            <a:endParaRPr/>
           </a:p>
         </p:txBody>
       </p:sp>
@@ -11743,7 +8695,7 @@
         <p:spPr>
           <a:xfrm>
             <a:off x="6537960" y="1417320"/>
-            <a:ext cx="4617720" cy="4154984"/>
+            <a:ext cx="4617720" cy="4434840"/>
           </a:xfrm>
           <a:prstGeom prst="rect">
             <a:avLst/>
@@ -11756,7 +8708,7 @@
           </a:bodyPr>
           <a:lstStyle/>
           <a:p>
-            <a:pPr algn="ctr">
+            <a:pPr>
               <a:defRPr sz="1550" b="1">
                 <a:solidFill>
                   <a:srgbClr val="0284C7"/>
@@ -11765,375 +8717,61 @@
               </a:defRPr>
             </a:pPr>
             <a:r>
-              <a:rPr sz="1600" dirty="0" err="1"/>
-              <a:t>Tratamento</a:t>
-            </a:r>
-            <a:r>
-              <a:rPr sz="1600" dirty="0"/>
-              <a:t> Humano dos </a:t>
-            </a:r>
-            <a:r>
-              <a:rPr sz="1600" dirty="0" err="1"/>
-              <a:t>Estados</a:t>
-            </a:r>
-            <a:r>
-              <a:rPr sz="1600" dirty="0"/>
-              <a:t> de Rede</a:t>
-            </a:r>
-          </a:p>
-          <a:p>
-            <a:pPr algn="just"/>
-            <a:br>
-              <a:rPr sz="1600" dirty="0"/>
-            </a:br>
-            <a:r>
-              <a:rPr sz="1600" dirty="0"/>
-              <a:t>1. </a:t>
-            </a:r>
-            <a:r>
-              <a:rPr sz="1600" dirty="0" err="1"/>
-              <a:t>Momento</a:t>
-            </a:r>
-            <a:r>
-              <a:rPr sz="1600" dirty="0"/>
-              <a:t> da Espera (Loading):</a:t>
-            </a:r>
-            <a:br>
-              <a:rPr sz="1600" dirty="0"/>
-            </a:br>
-            <a:r>
-              <a:rPr sz="1600" dirty="0"/>
-              <a:t> Em </a:t>
-            </a:r>
-            <a:r>
-              <a:rPr sz="1600" dirty="0" err="1"/>
-              <a:t>conexões</a:t>
-            </a:r>
-            <a:r>
-              <a:rPr sz="1600" dirty="0"/>
-              <a:t> 3G </a:t>
-            </a:r>
-            <a:r>
-              <a:rPr sz="1600" dirty="0" err="1"/>
-              <a:t>ou</a:t>
-            </a:r>
-            <a:r>
-              <a:rPr sz="1600" dirty="0"/>
-              <a:t> 4G </a:t>
-            </a:r>
-            <a:r>
-              <a:rPr sz="1600" dirty="0" err="1"/>
-              <a:t>comuns</a:t>
-            </a:r>
-            <a:r>
-              <a:rPr sz="1600" dirty="0"/>
-              <a:t> no interior, a </a:t>
-            </a:r>
-            <a:r>
-              <a:rPr sz="1600" dirty="0" err="1"/>
-              <a:t>requisição</a:t>
-            </a:r>
-            <a:r>
-              <a:rPr sz="1600" dirty="0"/>
-              <a:t> </a:t>
-            </a:r>
-            <a:r>
-              <a:rPr sz="1600" dirty="0" err="1"/>
-              <a:t>pode</a:t>
-            </a:r>
-            <a:r>
-              <a:rPr sz="1600" dirty="0"/>
-              <a:t> </a:t>
-            </a:r>
-            <a:r>
-              <a:rPr sz="1600" dirty="0" err="1"/>
-              <a:t>demorar</a:t>
-            </a:r>
-            <a:r>
-              <a:rPr sz="1600" dirty="0"/>
-              <a:t>. </a:t>
-            </a:r>
-            <a:r>
-              <a:rPr sz="1600" dirty="0" err="1"/>
-              <a:t>Exibimos</a:t>
-            </a:r>
-            <a:r>
-              <a:rPr sz="1600" dirty="0"/>
-              <a:t> um spinner </a:t>
-            </a:r>
-            <a:r>
-              <a:rPr sz="1600" dirty="0" err="1"/>
-              <a:t>amigável</a:t>
-            </a:r>
-            <a:r>
-              <a:rPr sz="1600" dirty="0"/>
-              <a:t> com a </a:t>
-            </a:r>
-            <a:r>
-              <a:rPr sz="1600" dirty="0" err="1"/>
-              <a:t>mensagem</a:t>
-            </a:r>
-            <a:r>
-              <a:rPr sz="1600" dirty="0"/>
-              <a:t>: '</a:t>
-            </a:r>
-            <a:r>
-              <a:rPr sz="1600" dirty="0" err="1"/>
-              <a:t>Consultando</a:t>
-            </a:r>
-            <a:r>
-              <a:rPr sz="1600" dirty="0"/>
-              <a:t> base </a:t>
-            </a:r>
-            <a:r>
-              <a:rPr sz="1600" dirty="0" err="1"/>
-              <a:t>pública</a:t>
-            </a:r>
-            <a:r>
-              <a:rPr sz="1600" dirty="0"/>
-              <a:t> do IBGE...'</a:t>
-            </a:r>
-          </a:p>
-          <a:p>
-            <a:pPr algn="just"/>
-            <a:br>
-              <a:rPr sz="1600" dirty="0"/>
-            </a:br>
-            <a:r>
-              <a:rPr sz="1600" dirty="0"/>
-              <a:t>2. Quando a </a:t>
-            </a:r>
-            <a:r>
-              <a:rPr sz="1600" dirty="0" err="1"/>
-              <a:t>Conexão</a:t>
-            </a:r>
-            <a:r>
-              <a:rPr sz="1600" dirty="0"/>
-              <a:t> Falha (Error):</a:t>
-            </a:r>
-            <a:br>
-              <a:rPr sz="1600" dirty="0"/>
-            </a:br>
-            <a:r>
-              <a:rPr sz="1600" dirty="0"/>
-              <a:t> A </a:t>
-            </a:r>
-            <a:r>
-              <a:rPr sz="1600" dirty="0" err="1"/>
-              <a:t>vida</a:t>
-            </a:r>
-            <a:r>
-              <a:rPr sz="1600" dirty="0"/>
-              <a:t> real </a:t>
-            </a:r>
-            <a:r>
-              <a:rPr sz="1600" dirty="0" err="1"/>
-              <a:t>tem</a:t>
-            </a:r>
-            <a:r>
-              <a:rPr sz="1600" dirty="0"/>
-              <a:t> </a:t>
-            </a:r>
-            <a:r>
-              <a:rPr sz="1600" dirty="0" err="1"/>
-              <a:t>quedas</a:t>
-            </a:r>
-            <a:r>
-              <a:rPr sz="1600" dirty="0"/>
-              <a:t> de </a:t>
-            </a:r>
-            <a:r>
-              <a:rPr sz="1600" dirty="0" err="1"/>
-              <a:t>sinal</a:t>
-            </a:r>
-            <a:r>
-              <a:rPr sz="1600" dirty="0"/>
-              <a:t>. Em </a:t>
-            </a:r>
-            <a:r>
-              <a:rPr sz="1600" dirty="0" err="1"/>
-              <a:t>vez</a:t>
-            </a:r>
-            <a:r>
-              <a:rPr sz="1600" dirty="0"/>
-              <a:t> de </a:t>
-            </a:r>
-            <a:r>
-              <a:rPr sz="1600" dirty="0" err="1"/>
-              <a:t>tela</a:t>
-            </a:r>
-            <a:r>
-              <a:rPr sz="1600" dirty="0"/>
-              <a:t> </a:t>
-            </a:r>
-            <a:r>
-              <a:rPr sz="1600" dirty="0" err="1"/>
-              <a:t>branca</a:t>
-            </a:r>
-            <a:r>
-              <a:rPr sz="1600" dirty="0"/>
-              <a:t> </a:t>
-            </a:r>
-            <a:r>
-              <a:rPr sz="1600" dirty="0" err="1"/>
-              <a:t>ou</a:t>
-            </a:r>
-            <a:r>
-              <a:rPr sz="1600" dirty="0"/>
-              <a:t> </a:t>
-            </a:r>
-            <a:r>
-              <a:rPr sz="1600" dirty="0" err="1"/>
-              <a:t>travamento</a:t>
-            </a:r>
-            <a:r>
-              <a:rPr sz="1600" dirty="0"/>
-              <a:t>, </a:t>
-            </a:r>
-            <a:r>
-              <a:rPr sz="1600" dirty="0" err="1"/>
-              <a:t>exibimos</a:t>
-            </a:r>
-            <a:r>
-              <a:rPr sz="1600" dirty="0"/>
-              <a:t> um </a:t>
-            </a:r>
-            <a:r>
-              <a:rPr sz="1600" dirty="0" err="1"/>
-              <a:t>painel</a:t>
-            </a:r>
-            <a:r>
-              <a:rPr sz="1600" dirty="0"/>
-              <a:t> </a:t>
-            </a:r>
-            <a:r>
-              <a:rPr sz="1600" dirty="0" err="1"/>
-              <a:t>explicativo</a:t>
-            </a:r>
-            <a:r>
-              <a:rPr sz="1600" dirty="0"/>
-              <a:t> e o </a:t>
-            </a:r>
-            <a:r>
-              <a:rPr sz="1600" dirty="0" err="1"/>
-              <a:t>botão</a:t>
-            </a:r>
-            <a:r>
-              <a:rPr sz="1600" dirty="0"/>
-              <a:t> '</a:t>
-            </a:r>
-            <a:r>
-              <a:rPr sz="1600" dirty="0" err="1"/>
-              <a:t>Recarregar</a:t>
-            </a:r>
-            <a:r>
-              <a:rPr sz="1600" dirty="0"/>
-              <a:t> API'.</a:t>
-            </a:r>
-          </a:p>
-          <a:p>
-            <a:pPr algn="just"/>
-            <a:br>
-              <a:rPr sz="1600" dirty="0"/>
-            </a:br>
-            <a:r>
-              <a:rPr sz="1600" dirty="0"/>
-              <a:t>3. Quando </a:t>
-            </a:r>
-            <a:r>
-              <a:rPr sz="1600" dirty="0" err="1"/>
-              <a:t>os</a:t>
-            </a:r>
-            <a:r>
-              <a:rPr sz="1600" dirty="0"/>
-              <a:t> Dados </a:t>
-            </a:r>
-            <a:r>
-              <a:rPr sz="1600" dirty="0" err="1"/>
-              <a:t>Chegam</a:t>
-            </a:r>
-            <a:r>
-              <a:rPr sz="1600" dirty="0"/>
-              <a:t> (Success):</a:t>
-            </a:r>
-            <a:br>
-              <a:rPr sz="1600" dirty="0"/>
-            </a:br>
-            <a:r>
-              <a:rPr sz="1600" dirty="0"/>
-              <a:t> </a:t>
-            </a:r>
-            <a:r>
-              <a:rPr sz="1600" dirty="0" err="1"/>
-              <a:t>Convertemos</a:t>
-            </a:r>
-            <a:r>
-              <a:rPr sz="1600" dirty="0"/>
-              <a:t> o JSON com </a:t>
-            </a:r>
-            <a:r>
-              <a:rPr sz="1600" dirty="0" err="1"/>
-              <a:t>response.json</a:t>
-            </a:r>
-            <a:r>
-              <a:rPr sz="1600" dirty="0"/>
-              <a:t>() e </a:t>
-            </a:r>
-            <a:r>
-              <a:rPr sz="1600" dirty="0" err="1"/>
-              <a:t>preenchemos</a:t>
-            </a:r>
-            <a:r>
-              <a:rPr sz="1600" dirty="0"/>
-              <a:t> 217 </a:t>
-            </a:r>
-            <a:r>
-              <a:rPr sz="1600" dirty="0" err="1"/>
-              <a:t>cidades</a:t>
-            </a:r>
-            <a:r>
-              <a:rPr sz="1600" dirty="0"/>
-              <a:t>, </a:t>
-            </a:r>
-            <a:r>
-              <a:rPr sz="1600" dirty="0" err="1"/>
-              <a:t>dando</a:t>
-            </a:r>
-            <a:r>
-              <a:rPr sz="1600" dirty="0"/>
-              <a:t> </a:t>
-            </a:r>
-            <a:r>
-              <a:rPr sz="1600" dirty="0" err="1"/>
-              <a:t>destaque</a:t>
-            </a:r>
-            <a:r>
-              <a:rPr sz="1600" dirty="0"/>
-              <a:t> a Timbiras, </a:t>
-            </a:r>
-            <a:r>
-              <a:rPr sz="1600" dirty="0" err="1"/>
-              <a:t>Codó</a:t>
-            </a:r>
-            <a:r>
-              <a:rPr sz="1600" dirty="0"/>
-              <a:t>, </a:t>
-            </a:r>
-            <a:r>
-              <a:rPr sz="1600" dirty="0" err="1"/>
-              <a:t>Coroatá</a:t>
-            </a:r>
-            <a:r>
-              <a:rPr sz="1600" dirty="0"/>
-              <a:t>, Caxias, </a:t>
-            </a:r>
-            <a:r>
-              <a:rPr sz="1600" dirty="0" err="1"/>
-              <a:t>Peritoró</a:t>
-            </a:r>
-            <a:r>
-              <a:rPr sz="1600" dirty="0"/>
-              <a:t> e Alto Alegre.</a:t>
+              <a:t>Tratamento Humano dos Estados de Rede</a:t>
+            </a:r>
+          </a:p>
+          <a:p>
+            <a:br/>
+            <a:pPr algn="just">
+              <a:defRPr sz="1100">
+                <a:solidFill>
+                  <a:srgbClr val="1E293B"/>
+                </a:solidFill>
+                <a:latin typeface="Segoe UI"/>
+              </a:defRPr>
+            </a:pPr>
+            <a:r>
+              <a:t>1. Momento da Espera (Loading):</a:t>
+            </a:r>
+            <a:br/>
+            <a:r>
+              <a:t> Em conexões 3G ou 4G comuns no interior, a requisição pode demorar. Exibimos um spinner amigável com a mensagem: 'Consultando base pública do IBGE...'</a:t>
+            </a:r>
+          </a:p>
+          <a:p>
+            <a:br/>
+            <a:pPr algn="just">
+              <a:defRPr sz="1100">
+                <a:solidFill>
+                  <a:srgbClr val="1E293B"/>
+                </a:solidFill>
+                <a:latin typeface="Segoe UI"/>
+              </a:defRPr>
+            </a:pPr>
+            <a:r>
+              <a:t>2. Quando a Conexão Falha (Error):</a:t>
+            </a:r>
+            <a:br/>
+            <a:r>
+              <a:t> A vida real tem quedas de sinal. Em vez de tela branca ou travamento, exibimos um painel explicativo e o botão 'Recarregar API'.</a:t>
+            </a:r>
+          </a:p>
+          <a:p>
+            <a:br/>
+            <a:pPr algn="just">
+              <a:defRPr sz="1100">
+                <a:solidFill>
+                  <a:srgbClr val="1E293B"/>
+                </a:solidFill>
+                <a:latin typeface="Segoe UI"/>
+              </a:defRPr>
+            </a:pPr>
+            <a:r>
+              <a:t>3. Quando os Dados Chegam (Success):</a:t>
+            </a:r>
+            <a:br/>
+            <a:r>
+              <a:t> Convertemos o JSON com response.json() e preenchemos 217 cidades, dando destaque a Timbiras, Codó, Coroatá, Caxias, Peritoró e Alto Alegre.</a:t>
             </a:r>
           </a:p>
         </p:txBody>
@@ -12147,7 +8785,7 @@
 </file>
 
 <file path=ppt/slides/slide6.xml><?xml version="1.0" encoding="utf-8"?>
-<p:sld xmlns:a="http://schemas.openxmlformats.org/drawingml/2006/main" xmlns:r="http://schemas.openxmlformats.org/officeDocument/2006/relationships" xmlns:p="http://schemas.openxmlformats.org/presentationml/2006/main">
+<p:sld xmlns:a="http://schemas.openxmlformats.org/drawingml/2006/main" xmlns:p="http://schemas.openxmlformats.org/presentationml/2006/main" xmlns:r="http://schemas.openxmlformats.org/officeDocument/2006/relationships">
   <p:cSld>
     <p:spTree>
       <p:nvGrpSpPr>
@@ -12155,14 +8793,7 @@
         <p:cNvGrpSpPr/>
         <p:nvPr/>
       </p:nvGrpSpPr>
-      <p:grpSpPr>
-        <a:xfrm>
-          <a:off x="0" y="0"/>
-          <a:ext cx="0" cy="0"/>
-          <a:chOff x="0" y="0"/>
-          <a:chExt cx="0" cy="0"/>
-        </a:xfrm>
-      </p:grpSpPr>
+      <p:grpSpPr/>
       <p:sp>
         <p:nvSpPr>
           <p:cNvPr id="2" name="TextBox 1"/>
@@ -12237,7 +8868,7 @@
           </a:fontRef>
         </p:style>
         <p:txBody>
-          <a:bodyPr tIns="54864" rtlCol="0" anchor="ctr"/>
+          <a:bodyPr rtlCol="0" anchor="ctr" tIns="54864"/>
           <a:lstStyle/>
           <a:p>
             <a:pPr algn="ctr">
@@ -12294,7 +8925,6 @@
           <a:lstStyle/>
           <a:p>
             <a:pPr algn="ctr"/>
-            <a:endParaRPr/>
           </a:p>
         </p:txBody>
       </p:sp>
@@ -12338,7 +8968,6 @@
           <a:lstStyle/>
           <a:p>
             <a:pPr algn="ctr"/>
-            <a:endParaRPr/>
           </a:p>
         </p:txBody>
       </p:sp>
@@ -12456,7 +9085,6 @@
           <a:lstStyle/>
           <a:p>
             <a:pPr algn="ctr"/>
-            <a:endParaRPr/>
           </a:p>
         </p:txBody>
       </p:sp>
@@ -12468,8 +9096,8 @@
         </p:nvSpPr>
         <p:spPr>
           <a:xfrm>
-            <a:off x="875071" y="1417320"/>
-            <a:ext cx="5053289" cy="4062651"/>
+            <a:off x="960120" y="1417320"/>
+            <a:ext cx="4709160" cy="4434840"/>
           </a:xfrm>
           <a:prstGeom prst="rect">
             <a:avLst/>
@@ -12482,7 +9110,7 @@
           </a:bodyPr>
           <a:lstStyle/>
           <a:p>
-            <a:pPr algn="ctr">
+            <a:pPr>
               <a:defRPr sz="1400" b="1">
                 <a:solidFill>
                   <a:srgbClr val="38BDF8"/>
@@ -12491,603 +9119,86 @@
               </a:defRPr>
             </a:pPr>
             <a:r>
-              <a:rPr sz="1600" dirty="0"/>
-              <a:t>Código de </a:t>
-            </a:r>
-            <a:r>
-              <a:rPr sz="1600" dirty="0" err="1"/>
-              <a:t>Integração</a:t>
-            </a:r>
-            <a:r>
-              <a:rPr sz="1600" dirty="0"/>
-              <a:t> </a:t>
-            </a:r>
-            <a:r>
-              <a:rPr sz="1600" dirty="0" err="1"/>
-              <a:t>Assíncrona</a:t>
-            </a:r>
-            <a:endParaRPr sz="1600" dirty="0"/>
-          </a:p>
-          <a:p>
-            <a:br>
-              <a:rPr sz="1200" dirty="0">
-                <a:solidFill>
-                  <a:schemeClr val="bg1"/>
-                </a:solidFill>
-              </a:rPr>
-            </a:br>
-            <a:r>
-              <a:rPr sz="1200" dirty="0" err="1">
-                <a:solidFill>
-                  <a:schemeClr val="bg1"/>
-                </a:solidFill>
-              </a:rPr>
-              <a:t>useEffect</a:t>
-            </a:r>
-            <a:r>
-              <a:rPr sz="1200" dirty="0">
-                <a:solidFill>
-                  <a:schemeClr val="bg1"/>
-                </a:solidFill>
-              </a:rPr>
-              <a:t>(() =&gt; {</a:t>
-            </a:r>
-            <a:br>
-              <a:rPr sz="1200" dirty="0">
-                <a:solidFill>
-                  <a:schemeClr val="bg1"/>
-                </a:solidFill>
-              </a:rPr>
-            </a:br>
-            <a:r>
-              <a:rPr sz="1200" dirty="0">
-                <a:solidFill>
-                  <a:schemeClr val="bg1"/>
-                </a:solidFill>
-              </a:rPr>
-              <a:t>  const </a:t>
-            </a:r>
-            <a:r>
-              <a:rPr sz="1200" dirty="0" err="1">
-                <a:solidFill>
-                  <a:schemeClr val="bg1"/>
-                </a:solidFill>
-              </a:rPr>
-              <a:t>controlador</a:t>
-            </a:r>
-            <a:r>
-              <a:rPr sz="1200" dirty="0">
-                <a:solidFill>
-                  <a:schemeClr val="bg1"/>
-                </a:solidFill>
-              </a:rPr>
-              <a:t> = new </a:t>
-            </a:r>
-            <a:r>
-              <a:rPr sz="1200" dirty="0" err="1">
-                <a:solidFill>
-                  <a:schemeClr val="bg1"/>
-                </a:solidFill>
-              </a:rPr>
-              <a:t>AbortController</a:t>
-            </a:r>
-            <a:r>
-              <a:rPr sz="1200" dirty="0">
-                <a:solidFill>
-                  <a:schemeClr val="bg1"/>
-                </a:solidFill>
-              </a:rPr>
-              <a:t>();</a:t>
-            </a:r>
-            <a:br>
-              <a:rPr sz="1200" dirty="0">
-                <a:solidFill>
-                  <a:schemeClr val="bg1"/>
-                </a:solidFill>
-              </a:rPr>
-            </a:br>
-            <a:br>
-              <a:rPr sz="1200" dirty="0">
-                <a:solidFill>
-                  <a:schemeClr val="bg1"/>
-                </a:solidFill>
-              </a:rPr>
-            </a:br>
-            <a:r>
-              <a:rPr sz="1200" dirty="0">
-                <a:solidFill>
-                  <a:schemeClr val="bg1"/>
-                </a:solidFill>
-              </a:rPr>
+              <a:t>Código de Integração Assíncrona</a:t>
+            </a:r>
+          </a:p>
+          <a:p>
+            <a:br/>
+            <a:pPr algn="l">
+              <a:defRPr sz="1050">
+                <a:solidFill>
+                  <a:srgbClr val="E2E8F0"/>
+                </a:solidFill>
+                <a:latin typeface="Consolas"/>
+              </a:defRPr>
+            </a:pPr>
+            <a:r>
+              <a:t>useEffect(() =&gt; {</a:t>
+            </a:r>
+            <a:br/>
+            <a:r>
+              <a:t>  const controlador = new AbortController();</a:t>
+            </a:r>
+            <a:br/>
+            <a:br/>
+            <a:r>
               <a:t>  fetch('https://servicodados.ibge.gov.br/.../municipios', {</a:t>
             </a:r>
-            <a:br>
-              <a:rPr sz="1200" dirty="0">
-                <a:solidFill>
-                  <a:schemeClr val="bg1"/>
-                </a:solidFill>
-              </a:rPr>
-            </a:br>
-            <a:r>
-              <a:rPr sz="1200" dirty="0">
-                <a:solidFill>
-                  <a:schemeClr val="bg1"/>
-                </a:solidFill>
-              </a:rPr>
-              <a:t>    signal: </a:t>
-            </a:r>
-            <a:r>
-              <a:rPr sz="1200" dirty="0" err="1">
-                <a:solidFill>
-                  <a:schemeClr val="bg1"/>
-                </a:solidFill>
-              </a:rPr>
-              <a:t>controlador.signal</a:t>
-            </a:r>
-            <a:r>
-              <a:rPr sz="1200" dirty="0">
-                <a:solidFill>
-                  <a:schemeClr val="bg1"/>
-                </a:solidFill>
-              </a:rPr>
-              <a:t> // Evita memory leak</a:t>
-            </a:r>
-            <a:br>
-              <a:rPr sz="1200" dirty="0">
-                <a:solidFill>
-                  <a:schemeClr val="bg1"/>
-                </a:solidFill>
-              </a:rPr>
-            </a:br>
-            <a:r>
-              <a:rPr sz="1200" dirty="0">
-                <a:solidFill>
-                  <a:schemeClr val="bg1"/>
-                </a:solidFill>
-              </a:rPr>
+            <a:br/>
+            <a:r>
+              <a:t>    signal: controlador.signal // Evita memory leak</a:t>
+            </a:r>
+            <a:br/>
+            <a:r>
               <a:t>  })</a:t>
             </a:r>
-            <a:br>
-              <a:rPr sz="1200" dirty="0">
-                <a:solidFill>
-                  <a:schemeClr val="bg1"/>
-                </a:solidFill>
-              </a:rPr>
-            </a:br>
-            <a:r>
-              <a:rPr sz="1200" dirty="0">
-                <a:solidFill>
-                  <a:schemeClr val="bg1"/>
-                </a:solidFill>
-              </a:rPr>
+            <a:br/>
+            <a:r>
               <a:t>    .then(res =&gt; {</a:t>
             </a:r>
-            <a:br>
-              <a:rPr sz="1200" dirty="0">
-                <a:solidFill>
-                  <a:schemeClr val="bg1"/>
-                </a:solidFill>
-              </a:rPr>
-            </a:br>
-            <a:r>
-              <a:rPr sz="1200" dirty="0">
-                <a:solidFill>
-                  <a:schemeClr val="bg1"/>
-                </a:solidFill>
-              </a:rPr>
-              <a:t>      if (!</a:t>
-            </a:r>
-            <a:r>
-              <a:rPr sz="1200" dirty="0" err="1">
-                <a:solidFill>
-                  <a:schemeClr val="bg1"/>
-                </a:solidFill>
-              </a:rPr>
-              <a:t>res.ok</a:t>
-            </a:r>
-            <a:r>
-              <a:rPr sz="1200" dirty="0">
-                <a:solidFill>
-                  <a:schemeClr val="bg1"/>
-                </a:solidFill>
-              </a:rPr>
-              <a:t>) throw new Error('Falha </a:t>
-            </a:r>
-            <a:r>
-              <a:rPr sz="1200" dirty="0" err="1">
-                <a:solidFill>
-                  <a:schemeClr val="bg1"/>
-                </a:solidFill>
-              </a:rPr>
-              <a:t>na</a:t>
-            </a:r>
-            <a:r>
-              <a:rPr sz="1200" dirty="0">
-                <a:solidFill>
-                  <a:schemeClr val="bg1"/>
-                </a:solidFill>
-              </a:rPr>
-              <a:t> </a:t>
-            </a:r>
-            <a:r>
-              <a:rPr sz="1200" dirty="0" err="1">
-                <a:solidFill>
-                  <a:schemeClr val="bg1"/>
-                </a:solidFill>
-              </a:rPr>
-              <a:t>resposta</a:t>
-            </a:r>
-            <a:r>
-              <a:rPr sz="1200" dirty="0">
-                <a:solidFill>
-                  <a:schemeClr val="bg1"/>
-                </a:solidFill>
-              </a:rPr>
-              <a:t>');</a:t>
-            </a:r>
-            <a:br>
-              <a:rPr sz="1200" dirty="0">
-                <a:solidFill>
-                  <a:schemeClr val="bg1"/>
-                </a:solidFill>
-              </a:rPr>
-            </a:br>
-            <a:r>
-              <a:rPr sz="1200" dirty="0">
-                <a:solidFill>
-                  <a:schemeClr val="bg1"/>
-                </a:solidFill>
-              </a:rPr>
-              <a:t>      return </a:t>
-            </a:r>
-            <a:r>
-              <a:rPr sz="1200" dirty="0" err="1">
-                <a:solidFill>
-                  <a:schemeClr val="bg1"/>
-                </a:solidFill>
-              </a:rPr>
-              <a:t>res.json</a:t>
-            </a:r>
-            <a:r>
-              <a:rPr sz="1200" dirty="0">
-                <a:solidFill>
-                  <a:schemeClr val="bg1"/>
-                </a:solidFill>
-              </a:rPr>
-              <a:t>(); // </a:t>
-            </a:r>
-            <a:r>
-              <a:rPr sz="1200" dirty="0" err="1">
-                <a:solidFill>
-                  <a:schemeClr val="bg1"/>
-                </a:solidFill>
-              </a:rPr>
-              <a:t>Converte</a:t>
-            </a:r>
-            <a:r>
-              <a:rPr sz="1200" dirty="0">
-                <a:solidFill>
-                  <a:schemeClr val="bg1"/>
-                </a:solidFill>
-              </a:rPr>
-              <a:t> </a:t>
-            </a:r>
-            <a:r>
-              <a:rPr sz="1200" dirty="0" err="1">
-                <a:solidFill>
-                  <a:schemeClr val="bg1"/>
-                </a:solidFill>
-              </a:rPr>
-              <a:t>fluxo</a:t>
-            </a:r>
-            <a:r>
-              <a:rPr sz="1200" dirty="0">
-                <a:solidFill>
-                  <a:schemeClr val="bg1"/>
-                </a:solidFill>
-              </a:rPr>
-              <a:t> </a:t>
-            </a:r>
-            <a:r>
-              <a:rPr sz="1200" dirty="0" err="1">
-                <a:solidFill>
-                  <a:schemeClr val="bg1"/>
-                </a:solidFill>
-              </a:rPr>
-              <a:t>em</a:t>
-            </a:r>
-            <a:r>
-              <a:rPr sz="1200" dirty="0">
-                <a:solidFill>
-                  <a:schemeClr val="bg1"/>
-                </a:solidFill>
-              </a:rPr>
-              <a:t> JSON</a:t>
-            </a:r>
-            <a:br>
-              <a:rPr sz="1200" dirty="0">
-                <a:solidFill>
-                  <a:schemeClr val="bg1"/>
-                </a:solidFill>
-              </a:rPr>
-            </a:br>
-            <a:r>
-              <a:rPr sz="1200" dirty="0">
-                <a:solidFill>
-                  <a:schemeClr val="bg1"/>
-                </a:solidFill>
-              </a:rPr>
+            <a:br/>
+            <a:r>
+              <a:t>      if (!res.ok) throw new Error('Falha na resposta');</a:t>
+            </a:r>
+            <a:br/>
+            <a:r>
+              <a:t>      return res.json(); // Converte fluxo em JSON</a:t>
+            </a:r>
+            <a:br/>
+            <a:r>
               <a:t>    })</a:t>
             </a:r>
-            <a:br>
-              <a:rPr sz="1200" dirty="0">
-                <a:solidFill>
-                  <a:schemeClr val="bg1"/>
-                </a:solidFill>
-              </a:rPr>
-            </a:br>
-            <a:r>
-              <a:rPr sz="1200" dirty="0">
-                <a:solidFill>
-                  <a:schemeClr val="bg1"/>
-                </a:solidFill>
-              </a:rPr>
-              <a:t>    .then(dados =&gt; </a:t>
-            </a:r>
-            <a:r>
-              <a:rPr sz="1200" dirty="0" err="1">
-                <a:solidFill>
-                  <a:schemeClr val="bg1"/>
-                </a:solidFill>
-              </a:rPr>
-              <a:t>setMunicipiosIbge</a:t>
-            </a:r>
-            <a:r>
-              <a:rPr sz="1200" dirty="0">
-                <a:solidFill>
-                  <a:schemeClr val="bg1"/>
-                </a:solidFill>
-              </a:rPr>
-              <a:t>(dados))</a:t>
-            </a:r>
-            <a:br>
-              <a:rPr sz="1200" dirty="0">
-                <a:solidFill>
-                  <a:schemeClr val="bg1"/>
-                </a:solidFill>
-              </a:rPr>
-            </a:br>
-            <a:r>
-              <a:rPr sz="1200" dirty="0">
-                <a:solidFill>
-                  <a:schemeClr val="bg1"/>
-                </a:solidFill>
-              </a:rPr>
+            <a:br/>
+            <a:r>
+              <a:t>    .then(dados =&gt; setMunicipiosIbge(dados))</a:t>
+            </a:r>
+            <a:br/>
+            <a:r>
               <a:t>    .catch(err =&gt; {</a:t>
             </a:r>
-            <a:br>
-              <a:rPr sz="1200" dirty="0">
-                <a:solidFill>
-                  <a:schemeClr val="bg1"/>
-                </a:solidFill>
-              </a:rPr>
-            </a:br>
-            <a:r>
-              <a:rPr sz="1200" dirty="0">
-                <a:solidFill>
-                  <a:schemeClr val="bg1"/>
-                </a:solidFill>
-              </a:rPr>
-              <a:t>      if (err.name !== '</a:t>
-            </a:r>
-            <a:r>
-              <a:rPr sz="1200" dirty="0" err="1">
-                <a:solidFill>
-                  <a:schemeClr val="bg1"/>
-                </a:solidFill>
-              </a:rPr>
-              <a:t>AbortError</a:t>
-            </a:r>
-            <a:r>
-              <a:rPr sz="1200" dirty="0">
-                <a:solidFill>
-                  <a:schemeClr val="bg1"/>
-                </a:solidFill>
-              </a:rPr>
-              <a:t>')</a:t>
-            </a:r>
-            <a:br>
-              <a:rPr sz="1200" dirty="0">
-                <a:solidFill>
-                  <a:schemeClr val="bg1"/>
-                </a:solidFill>
-              </a:rPr>
-            </a:br>
-            <a:r>
-              <a:rPr sz="1200" dirty="0">
-                <a:solidFill>
-                  <a:schemeClr val="bg1"/>
-                </a:solidFill>
-              </a:rPr>
-              <a:t>        </a:t>
-            </a:r>
-            <a:r>
-              <a:rPr sz="1200" dirty="0" err="1">
-                <a:solidFill>
-                  <a:schemeClr val="bg1"/>
-                </a:solidFill>
-              </a:rPr>
-              <a:t>setErro</a:t>
-            </a:r>
-            <a:r>
-              <a:rPr sz="1200" dirty="0">
-                <a:solidFill>
-                  <a:schemeClr val="bg1"/>
-                </a:solidFill>
-              </a:rPr>
-              <a:t>('</a:t>
-            </a:r>
-            <a:r>
-              <a:rPr sz="1200" dirty="0" err="1">
-                <a:solidFill>
-                  <a:schemeClr val="bg1"/>
-                </a:solidFill>
-              </a:rPr>
-              <a:t>Sinal</a:t>
-            </a:r>
-            <a:r>
-              <a:rPr sz="1200" dirty="0">
-                <a:solidFill>
-                  <a:schemeClr val="bg1"/>
-                </a:solidFill>
-              </a:rPr>
-              <a:t> </a:t>
-            </a:r>
-            <a:r>
-              <a:rPr sz="1200" dirty="0" err="1">
-                <a:solidFill>
-                  <a:schemeClr val="bg1"/>
-                </a:solidFill>
-              </a:rPr>
-              <a:t>instável</a:t>
-            </a:r>
-            <a:r>
-              <a:rPr sz="1200" dirty="0">
-                <a:solidFill>
-                  <a:schemeClr val="bg1"/>
-                </a:solidFill>
-              </a:rPr>
-              <a:t>. </a:t>
-            </a:r>
-            <a:r>
-              <a:rPr sz="1200" dirty="0" err="1">
-                <a:solidFill>
-                  <a:schemeClr val="bg1"/>
-                </a:solidFill>
-              </a:rPr>
-              <a:t>Tente</a:t>
-            </a:r>
-            <a:r>
-              <a:rPr sz="1200" dirty="0">
-                <a:solidFill>
-                  <a:schemeClr val="bg1"/>
-                </a:solidFill>
-              </a:rPr>
-              <a:t> </a:t>
-            </a:r>
-            <a:r>
-              <a:rPr sz="1200" dirty="0" err="1">
-                <a:solidFill>
-                  <a:schemeClr val="bg1"/>
-                </a:solidFill>
-              </a:rPr>
-              <a:t>novamente</a:t>
-            </a:r>
-            <a:r>
-              <a:rPr sz="1200" dirty="0">
-                <a:solidFill>
-                  <a:schemeClr val="bg1"/>
-                </a:solidFill>
-              </a:rPr>
-              <a:t>.');</a:t>
-            </a:r>
-            <a:br>
-              <a:rPr sz="1200" dirty="0">
-                <a:solidFill>
-                  <a:schemeClr val="bg1"/>
-                </a:solidFill>
-              </a:rPr>
-            </a:br>
-            <a:r>
-              <a:rPr sz="1200" dirty="0">
-                <a:solidFill>
-                  <a:schemeClr val="bg1"/>
-                </a:solidFill>
-              </a:rPr>
+            <a:br/>
+            <a:r>
+              <a:t>      if (err.name !== 'AbortError')</a:t>
+            </a:r>
+            <a:br/>
+            <a:r>
+              <a:t>        setErro('Sinal instável. Tente novamente.');</a:t>
+            </a:r>
+            <a:br/>
+            <a:r>
               <a:t>    })</a:t>
             </a:r>
-            <a:br>
-              <a:rPr sz="1200" dirty="0">
-                <a:solidFill>
-                  <a:schemeClr val="bg1"/>
-                </a:solidFill>
-              </a:rPr>
-            </a:br>
-            <a:r>
-              <a:rPr sz="1200" dirty="0">
-                <a:solidFill>
-                  <a:schemeClr val="bg1"/>
-                </a:solidFill>
-              </a:rPr>
-              <a:t>    .finally(() =&gt; </a:t>
-            </a:r>
-            <a:r>
-              <a:rPr sz="1200" dirty="0" err="1">
-                <a:solidFill>
-                  <a:schemeClr val="bg1"/>
-                </a:solidFill>
-              </a:rPr>
-              <a:t>setCarregando</a:t>
-            </a:r>
-            <a:r>
-              <a:rPr sz="1200" dirty="0">
-                <a:solidFill>
-                  <a:schemeClr val="bg1"/>
-                </a:solidFill>
-              </a:rPr>
-              <a:t>(false));</a:t>
-            </a:r>
-            <a:br>
-              <a:rPr sz="1200" dirty="0">
-                <a:solidFill>
-                  <a:schemeClr val="bg1"/>
-                </a:solidFill>
-              </a:rPr>
-            </a:br>
-            <a:br>
-              <a:rPr sz="1400" dirty="0">
-                <a:solidFill>
-                  <a:schemeClr val="bg1"/>
-                </a:solidFill>
-              </a:rPr>
-            </a:br>
-            <a:r>
-              <a:rPr sz="1400" dirty="0">
-                <a:solidFill>
-                  <a:schemeClr val="bg1"/>
-                </a:solidFill>
-              </a:rPr>
-              <a:t>  return () =&gt; </a:t>
-            </a:r>
-            <a:r>
-              <a:rPr sz="1400" dirty="0" err="1">
-                <a:solidFill>
-                  <a:schemeClr val="bg1"/>
-                </a:solidFill>
-              </a:rPr>
-              <a:t>controlador.abort</a:t>
-            </a:r>
-            <a:r>
-              <a:rPr sz="1400" dirty="0">
-                <a:solidFill>
-                  <a:schemeClr val="bg1"/>
-                </a:solidFill>
-              </a:rPr>
-              <a:t>();</a:t>
-            </a:r>
-            <a:br>
-              <a:rPr sz="1400" dirty="0">
-                <a:solidFill>
-                  <a:schemeClr val="bg1"/>
-                </a:solidFill>
-              </a:rPr>
-            </a:br>
-            <a:r>
-              <a:rPr sz="1400" dirty="0">
-                <a:solidFill>
-                  <a:schemeClr val="bg1"/>
-                </a:solidFill>
-              </a:rPr>
+            <a:br/>
+            <a:r>
+              <a:t>    .finally(() =&gt; setCarregando(false));</a:t>
+            </a:r>
+            <a:br/>
+            <a:br/>
+            <a:r>
+              <a:t>  return () =&gt; controlador.abort();</a:t>
+            </a:r>
+            <a:br/>
+            <a:r>
               <a:t>}, []);</a:t>
             </a:r>
           </a:p>
@@ -13135,7 +9246,6 @@
           <a:lstStyle/>
           <a:p>
             <a:pPr algn="ctr"/>
-            <a:endParaRPr/>
           </a:p>
         </p:txBody>
       </p:sp>
@@ -13179,7 +9289,6 @@
           <a:lstStyle/>
           <a:p>
             <a:pPr algn="ctr"/>
-            <a:endParaRPr/>
           </a:p>
         </p:txBody>
       </p:sp>
@@ -13192,7 +9301,7 @@
         <p:spPr>
           <a:xfrm>
             <a:off x="6537960" y="1417320"/>
-            <a:ext cx="4663440" cy="2185214"/>
+            <a:ext cx="4663440" cy="1920240"/>
           </a:xfrm>
           <a:prstGeom prst="rect">
             <a:avLst/>
@@ -13205,7 +9314,7 @@
           </a:bodyPr>
           <a:lstStyle/>
           <a:p>
-            <a:pPr algn="ctr">
+            <a:pPr>
               <a:defRPr sz="1400" b="1">
                 <a:solidFill>
                   <a:srgbClr val="00873E"/>
@@ -13214,214 +9323,21 @@
               </a:defRPr>
             </a:pPr>
             <a:r>
-              <a:rPr dirty="0"/>
-              <a:t>O Voo da Esperança (</a:t>
-            </a:r>
-            <a:r>
-              <a:rPr dirty="0" err="1"/>
-              <a:t>mapa.flyTo</a:t>
-            </a:r>
-            <a:r>
-              <a:rPr dirty="0"/>
-              <a:t>)</a:t>
-            </a:r>
-          </a:p>
-          <a:p>
-            <a:pPr algn="just"/>
-            <a:br>
-              <a:rPr dirty="0"/>
-            </a:br>
-            <a:r>
-              <a:rPr dirty="0" err="1"/>
-              <a:t>Usamos</a:t>
-            </a:r>
-            <a:r>
-              <a:rPr dirty="0"/>
-              <a:t> o hook </a:t>
-            </a:r>
-            <a:r>
-              <a:rPr dirty="0" err="1"/>
-              <a:t>useMemo</a:t>
-            </a:r>
-            <a:r>
-              <a:rPr dirty="0"/>
-              <a:t> para </a:t>
-            </a:r>
-            <a:r>
-              <a:rPr dirty="0" err="1"/>
-              <a:t>cruzar</a:t>
-            </a:r>
-            <a:r>
-              <a:rPr dirty="0"/>
-              <a:t> a </a:t>
-            </a:r>
-            <a:r>
-              <a:rPr dirty="0" err="1"/>
-              <a:t>lista</a:t>
-            </a:r>
-            <a:r>
-              <a:rPr dirty="0"/>
-              <a:t> </a:t>
-            </a:r>
-            <a:r>
-              <a:rPr dirty="0" err="1"/>
-              <a:t>oficial</a:t>
-            </a:r>
-            <a:r>
-              <a:rPr dirty="0"/>
-              <a:t> do IBGE com as </a:t>
-            </a:r>
-            <a:r>
-              <a:rPr dirty="0" err="1"/>
-              <a:t>coordenadas</a:t>
-            </a:r>
-            <a:r>
-              <a:rPr dirty="0"/>
-              <a:t> </a:t>
-            </a:r>
-            <a:r>
-              <a:rPr dirty="0" err="1"/>
-              <a:t>geográficas</a:t>
-            </a:r>
-            <a:r>
-              <a:rPr dirty="0"/>
-              <a:t> de </a:t>
-            </a:r>
-            <a:r>
-              <a:rPr dirty="0" err="1"/>
-              <a:t>cada</a:t>
-            </a:r>
-            <a:r>
-              <a:rPr dirty="0"/>
-              <a:t> </a:t>
-            </a:r>
-            <a:r>
-              <a:rPr dirty="0" err="1"/>
-              <a:t>cidade</a:t>
-            </a:r>
-            <a:r>
-              <a:rPr dirty="0"/>
-              <a:t> </a:t>
-            </a:r>
-            <a:r>
-              <a:rPr dirty="0" err="1"/>
-              <a:t>parceira</a:t>
-            </a:r>
-            <a:r>
-              <a:rPr dirty="0"/>
-              <a:t>. Ao </a:t>
-            </a:r>
-            <a:r>
-              <a:rPr dirty="0" err="1"/>
-              <a:t>clicar</a:t>
-            </a:r>
-            <a:r>
-              <a:rPr dirty="0"/>
-              <a:t> no card de </a:t>
-            </a:r>
-            <a:r>
-              <a:rPr dirty="0" err="1"/>
-              <a:t>Coroatá</a:t>
-            </a:r>
-            <a:r>
-              <a:rPr dirty="0"/>
-              <a:t> </a:t>
-            </a:r>
-            <a:r>
-              <a:rPr dirty="0" err="1"/>
-              <a:t>ou</a:t>
-            </a:r>
-            <a:r>
-              <a:rPr dirty="0"/>
-              <a:t> </a:t>
-            </a:r>
-            <a:r>
-              <a:rPr dirty="0" err="1"/>
-              <a:t>Codó</a:t>
-            </a:r>
-            <a:r>
-              <a:rPr dirty="0"/>
-              <a:t>, o </a:t>
-            </a:r>
-            <a:r>
-              <a:rPr dirty="0" err="1"/>
-              <a:t>mapa</a:t>
-            </a:r>
-            <a:r>
-              <a:rPr dirty="0"/>
-              <a:t> </a:t>
-            </a:r>
-            <a:r>
-              <a:rPr dirty="0" err="1"/>
-              <a:t>faz</a:t>
-            </a:r>
-            <a:r>
-              <a:rPr dirty="0"/>
-              <a:t> </a:t>
-            </a:r>
-            <a:r>
-              <a:rPr dirty="0" err="1"/>
-              <a:t>uma</a:t>
-            </a:r>
-            <a:r>
-              <a:rPr dirty="0"/>
-              <a:t> </a:t>
-            </a:r>
-            <a:r>
-              <a:rPr dirty="0" err="1"/>
-              <a:t>transição</a:t>
-            </a:r>
-            <a:r>
-              <a:rPr dirty="0"/>
-              <a:t> suave de </a:t>
-            </a:r>
-            <a:r>
-              <a:rPr dirty="0" err="1"/>
-              <a:t>câmera</a:t>
-            </a:r>
-            <a:r>
-              <a:rPr dirty="0"/>
-              <a:t> </a:t>
-            </a:r>
-            <a:r>
-              <a:rPr dirty="0" err="1"/>
-              <a:t>até</a:t>
-            </a:r>
-            <a:r>
-              <a:rPr dirty="0"/>
-              <a:t> a </a:t>
-            </a:r>
-            <a:r>
-              <a:rPr dirty="0" err="1"/>
-              <a:t>cidade</a:t>
-            </a:r>
-            <a:r>
-              <a:rPr dirty="0"/>
-              <a:t>, com </a:t>
-            </a:r>
-            <a:r>
-              <a:rPr dirty="0" err="1"/>
-              <a:t>marcador</a:t>
-            </a:r>
-            <a:r>
-              <a:rPr dirty="0"/>
-              <a:t> e </a:t>
-            </a:r>
-            <a:r>
-              <a:rPr dirty="0" err="1"/>
-              <a:t>detalhes</a:t>
-            </a:r>
-            <a:r>
-              <a:rPr dirty="0"/>
-              <a:t> da </a:t>
-            </a:r>
-            <a:r>
-              <a:rPr dirty="0" err="1"/>
-              <a:t>distância</a:t>
-            </a:r>
-            <a:r>
-              <a:rPr dirty="0"/>
-              <a:t> de Timbiras.</a:t>
+              <a:t>O Voo da Esperança (mapa.flyTo)</a:t>
+            </a:r>
+          </a:p>
+          <a:p>
+            <a:br/>
+            <a:pPr algn="just">
+              <a:defRPr sz="1150">
+                <a:solidFill>
+                  <a:srgbClr val="1E293B"/>
+                </a:solidFill>
+                <a:latin typeface="Segoe UI"/>
+              </a:defRPr>
+            </a:pPr>
+            <a:r>
+              <a:t>Usamos o hook useMemo para cruzar a lista oficial do IBGE com as coordenadas geográficas de cada cidade parceira. Ao clicar no card de Coroatá ou Codó, o mapa faz uma transição suave de câmera até a cidade, com marcador e detalhes da distância de Timbiras.</a:t>
             </a:r>
           </a:p>
         </p:txBody>
@@ -13468,7 +9384,6 @@
           <a:lstStyle/>
           <a:p>
             <a:pPr algn="ctr"/>
-            <a:endParaRPr/>
           </a:p>
         </p:txBody>
       </p:sp>
@@ -13512,7 +9427,6 @@
           <a:lstStyle/>
           <a:p>
             <a:pPr algn="ctr"/>
-            <a:endParaRPr/>
           </a:p>
         </p:txBody>
       </p:sp>
@@ -13525,7 +9439,7 @@
         <p:spPr>
           <a:xfrm>
             <a:off x="6537960" y="3931920"/>
-            <a:ext cx="4663440" cy="1631216"/>
+            <a:ext cx="4663440" cy="1920240"/>
           </a:xfrm>
           <a:prstGeom prst="rect">
             <a:avLst/>
@@ -13538,7 +9452,7 @@
           </a:bodyPr>
           <a:lstStyle/>
           <a:p>
-            <a:pPr algn="ctr">
+            <a:pPr>
               <a:defRPr sz="1400" b="1">
                 <a:solidFill>
                   <a:srgbClr val="B45309"/>
@@ -13547,159 +9461,21 @@
               </a:defRPr>
             </a:pPr>
             <a:r>
-              <a:rPr sz="1600" dirty="0" err="1"/>
-              <a:t>Busca</a:t>
-            </a:r>
-            <a:r>
-              <a:rPr sz="1600" dirty="0"/>
-              <a:t> </a:t>
-            </a:r>
-            <a:r>
-              <a:rPr sz="1600" dirty="0" err="1"/>
-              <a:t>Ampla</a:t>
-            </a:r>
-            <a:r>
-              <a:rPr sz="1600" dirty="0"/>
-              <a:t> </a:t>
-            </a:r>
-            <a:r>
-              <a:rPr sz="1600" dirty="0" err="1"/>
-              <a:t>por</a:t>
-            </a:r>
-            <a:r>
-              <a:rPr sz="1600" dirty="0"/>
-              <a:t> </a:t>
-            </a:r>
-            <a:r>
-              <a:rPr sz="1600" dirty="0" err="1"/>
-              <a:t>Qualquer</a:t>
-            </a:r>
-            <a:r>
-              <a:rPr sz="1600" dirty="0"/>
-              <a:t> </a:t>
-            </a:r>
-            <a:r>
-              <a:rPr sz="1600" dirty="0" err="1"/>
-              <a:t>Cidade</a:t>
-            </a:r>
-            <a:endParaRPr sz="1600" dirty="0"/>
-          </a:p>
-          <a:p>
-            <a:pPr algn="just"/>
-            <a:br>
-              <a:rPr dirty="0"/>
-            </a:br>
-            <a:r>
-              <a:rPr dirty="0" err="1"/>
-              <a:t>Além</a:t>
-            </a:r>
-            <a:r>
-              <a:rPr dirty="0"/>
-              <a:t> das </a:t>
-            </a:r>
-            <a:r>
-              <a:rPr dirty="0" err="1"/>
-              <a:t>cidades</a:t>
-            </a:r>
-            <a:r>
-              <a:rPr dirty="0"/>
-              <a:t> dos </a:t>
-            </a:r>
-            <a:r>
-              <a:rPr dirty="0" err="1"/>
-              <a:t>Cocais</a:t>
-            </a:r>
-            <a:r>
-              <a:rPr dirty="0"/>
-              <a:t>, o </a:t>
-            </a:r>
-            <a:r>
-              <a:rPr dirty="0" err="1"/>
-              <a:t>usuário</a:t>
-            </a:r>
-            <a:r>
-              <a:rPr dirty="0"/>
-              <a:t> </a:t>
-            </a:r>
-            <a:r>
-              <a:rPr dirty="0" err="1"/>
-              <a:t>pode</a:t>
-            </a:r>
-            <a:r>
-              <a:rPr dirty="0"/>
-              <a:t> </a:t>
-            </a:r>
-            <a:r>
-              <a:rPr dirty="0" err="1"/>
-              <a:t>selecionar</a:t>
-            </a:r>
-            <a:r>
-              <a:rPr dirty="0"/>
-              <a:t> </a:t>
-            </a:r>
-            <a:r>
-              <a:rPr dirty="0" err="1"/>
-              <a:t>qualquer</a:t>
-            </a:r>
-            <a:r>
-              <a:rPr dirty="0"/>
-              <a:t> </a:t>
-            </a:r>
-            <a:r>
-              <a:rPr dirty="0" err="1"/>
-              <a:t>município</a:t>
-            </a:r>
-            <a:r>
-              <a:rPr dirty="0"/>
-              <a:t> do Maranhão no dropdown </a:t>
-            </a:r>
-            <a:r>
-              <a:rPr dirty="0" err="1"/>
-              <a:t>dinâmico</a:t>
-            </a:r>
-            <a:r>
-              <a:rPr dirty="0"/>
-              <a:t> para </a:t>
-            </a:r>
-            <a:r>
-              <a:rPr dirty="0" err="1"/>
-              <a:t>localizar</a:t>
-            </a:r>
-            <a:r>
-              <a:rPr dirty="0"/>
-              <a:t> e </a:t>
-            </a:r>
-            <a:r>
-              <a:rPr dirty="0" err="1"/>
-              <a:t>planejar</a:t>
-            </a:r>
-            <a:r>
-              <a:rPr dirty="0"/>
-              <a:t> </a:t>
-            </a:r>
-            <a:r>
-              <a:rPr dirty="0" err="1"/>
-              <a:t>novos</a:t>
-            </a:r>
-            <a:r>
-              <a:rPr dirty="0"/>
-              <a:t> polos de </a:t>
-            </a:r>
-            <a:r>
-              <a:rPr dirty="0" err="1"/>
-              <a:t>expansão</a:t>
-            </a:r>
-            <a:r>
-              <a:rPr dirty="0"/>
-              <a:t> </a:t>
-            </a:r>
-            <a:r>
-              <a:rPr dirty="0" err="1"/>
-              <a:t>solidária</a:t>
-            </a:r>
-            <a:r>
-              <a:rPr dirty="0"/>
-              <a:t>.</a:t>
+              <a:t>Busca Ampla por Qualquer Cidade</a:t>
+            </a:r>
+          </a:p>
+          <a:p>
+            <a:br/>
+            <a:pPr algn="just">
+              <a:defRPr sz="1150">
+                <a:solidFill>
+                  <a:srgbClr val="1E293B"/>
+                </a:solidFill>
+                <a:latin typeface="Segoe UI"/>
+              </a:defRPr>
+            </a:pPr>
+            <a:r>
+              <a:t>Além das cidades dos Cocais, o usuário pode selecionar qualquer município do Maranhão no dropdown dinâmico para localizar e planejar novos polos de expansão solidária.</a:t>
             </a:r>
           </a:p>
         </p:txBody>
@@ -13713,7 +9489,7 @@
 </file>
 
 <file path=ppt/slides/slide7.xml><?xml version="1.0" encoding="utf-8"?>
-<p:sld xmlns:a="http://schemas.openxmlformats.org/drawingml/2006/main" xmlns:r="http://schemas.openxmlformats.org/officeDocument/2006/relationships" xmlns:p="http://schemas.openxmlformats.org/presentationml/2006/main">
+<p:sld xmlns:a="http://schemas.openxmlformats.org/drawingml/2006/main" xmlns:p="http://schemas.openxmlformats.org/presentationml/2006/main" xmlns:r="http://schemas.openxmlformats.org/officeDocument/2006/relationships">
   <p:cSld>
     <p:spTree>
       <p:nvGrpSpPr>
@@ -13721,14 +9497,7 @@
         <p:cNvGrpSpPr/>
         <p:nvPr/>
       </p:nvGrpSpPr>
-      <p:grpSpPr>
-        <a:xfrm>
-          <a:off x="0" y="0"/>
-          <a:ext cx="0" cy="0"/>
-          <a:chOff x="0" y="0"/>
-          <a:chExt cx="0" cy="0"/>
-        </a:xfrm>
-      </p:grpSpPr>
+      <p:grpSpPr/>
       <p:sp>
         <p:nvSpPr>
           <p:cNvPr id="2" name="TextBox 1"/>
@@ -13803,7 +9572,7 @@
           </a:fontRef>
         </p:style>
         <p:txBody>
-          <a:bodyPr tIns="54864" rtlCol="0" anchor="ctr"/>
+          <a:bodyPr rtlCol="0" anchor="ctr" tIns="54864"/>
           <a:lstStyle/>
           <a:p>
             <a:pPr algn="ctr">
@@ -13860,7 +9629,6 @@
           <a:lstStyle/>
           <a:p>
             <a:pPr algn="ctr"/>
-            <a:endParaRPr/>
           </a:p>
         </p:txBody>
       </p:sp>
@@ -13904,7 +9672,6 @@
           <a:lstStyle/>
           <a:p>
             <a:pPr algn="ctr"/>
-            <a:endParaRPr/>
           </a:p>
         </p:txBody>
       </p:sp>
@@ -14022,7 +9789,6 @@
           <a:lstStyle/>
           <a:p>
             <a:pPr algn="ctr"/>
-            <a:endParaRPr/>
           </a:p>
         </p:txBody>
       </p:sp>
@@ -14035,7 +9801,7 @@
         <p:spPr>
           <a:xfrm>
             <a:off x="960120" y="1417320"/>
-            <a:ext cx="4114800" cy="3847207"/>
+            <a:ext cx="4114800" cy="4434840"/>
           </a:xfrm>
           <a:prstGeom prst="rect">
             <a:avLst/>
@@ -14057,262 +9823,65 @@
               </a:defRPr>
             </a:pPr>
             <a:r>
-              <a:rPr sz="1600" dirty="0" err="1"/>
-              <a:t>Árvore</a:t>
-            </a:r>
-            <a:r>
-              <a:rPr sz="1600" dirty="0"/>
-              <a:t> Modular de </a:t>
-            </a:r>
-            <a:r>
-              <a:rPr sz="1600" dirty="0" err="1"/>
-              <a:t>Componentes</a:t>
-            </a:r>
-            <a:endParaRPr sz="1600" dirty="0"/>
-          </a:p>
-          <a:p>
-            <a:br>
-              <a:rPr dirty="0"/>
-            </a:br>
-            <a:r>
-              <a:rPr dirty="0" err="1"/>
-              <a:t>App.jsx</a:t>
-            </a:r>
-            <a:r>
-              <a:rPr dirty="0"/>
-              <a:t> (</a:t>
-            </a:r>
-            <a:r>
-              <a:rPr dirty="0" err="1"/>
-              <a:t>Orquestrador</a:t>
-            </a:r>
-            <a:r>
-              <a:rPr dirty="0"/>
-              <a:t> Global)</a:t>
-            </a:r>
-            <a:br>
-              <a:rPr dirty="0"/>
-            </a:br>
-            <a:r>
-              <a:rPr dirty="0"/>
-              <a:t>├ </a:t>
-            </a:r>
-            <a:r>
-              <a:rPr dirty="0" err="1"/>
-              <a:t>Navbar.jsx</a:t>
-            </a:r>
-            <a:r>
-              <a:rPr dirty="0"/>
-              <a:t> (Menu &amp; Mobile Toggle)</a:t>
-            </a:r>
-            <a:br>
-              <a:rPr dirty="0"/>
-            </a:br>
-            <a:r>
-              <a:rPr dirty="0"/>
-              <a:t>├ </a:t>
-            </a:r>
-            <a:r>
-              <a:rPr dirty="0" err="1"/>
-              <a:t>Hero.jsx</a:t>
-            </a:r>
-            <a:r>
-              <a:rPr dirty="0"/>
-              <a:t> (Banner &amp; Metas </a:t>
-            </a:r>
-            <a:r>
-              <a:rPr dirty="0" err="1"/>
-              <a:t>ao</a:t>
-            </a:r>
-            <a:r>
-              <a:rPr dirty="0"/>
-              <a:t> Vivo)</a:t>
-            </a:r>
-            <a:br>
-              <a:rPr dirty="0"/>
-            </a:br>
-            <a:r>
-              <a:rPr dirty="0"/>
-              <a:t>├ </a:t>
-            </a:r>
-            <a:r>
-              <a:rPr dirty="0" err="1"/>
-              <a:t>ConsumoApi.jsx</a:t>
-            </a:r>
-            <a:r>
-              <a:rPr dirty="0"/>
-              <a:t> (IBGE &amp; Leaflet)</a:t>
-            </a:r>
-            <a:br>
-              <a:rPr dirty="0"/>
-            </a:br>
-            <a:r>
-              <a:rPr dirty="0"/>
-              <a:t>├ </a:t>
-            </a:r>
-            <a:r>
-              <a:rPr dirty="0" err="1"/>
-              <a:t>SobreCompleto.jsx</a:t>
-            </a:r>
-            <a:r>
-              <a:rPr dirty="0"/>
-              <a:t> (</a:t>
-            </a:r>
-            <a:r>
-              <a:rPr dirty="0" err="1"/>
-              <a:t>História</a:t>
-            </a:r>
-            <a:r>
-              <a:rPr dirty="0"/>
-              <a:t>)</a:t>
-            </a:r>
-            <a:br>
-              <a:rPr dirty="0"/>
-            </a:br>
-            <a:r>
-              <a:rPr dirty="0"/>
-              <a:t>├ </a:t>
-            </a:r>
-            <a:r>
-              <a:rPr dirty="0" err="1"/>
-              <a:t>ComoFunciona.jsx</a:t>
-            </a:r>
-            <a:r>
-              <a:rPr dirty="0"/>
-              <a:t> (4 Passos)</a:t>
-            </a:r>
-            <a:br>
-              <a:rPr dirty="0"/>
-            </a:br>
-            <a:r>
-              <a:rPr dirty="0"/>
-              <a:t>├ </a:t>
-            </a:r>
-            <a:r>
-              <a:rPr dirty="0" err="1"/>
-              <a:t>Fluxo.jsx</a:t>
-            </a:r>
-            <a:r>
-              <a:rPr dirty="0"/>
-              <a:t> (</a:t>
-            </a:r>
-            <a:r>
-              <a:rPr dirty="0" err="1"/>
-              <a:t>Percurso</a:t>
-            </a:r>
-            <a:r>
-              <a:rPr dirty="0"/>
-              <a:t> do Alimento)</a:t>
-            </a:r>
-            <a:br>
-              <a:rPr dirty="0"/>
-            </a:br>
-            <a:r>
-              <a:rPr dirty="0"/>
-              <a:t>├ </a:t>
-            </a:r>
-            <a:r>
-              <a:rPr dirty="0" err="1"/>
-              <a:t>PrestacaoContas.jsx</a:t>
-            </a:r>
-            <a:r>
-              <a:rPr dirty="0"/>
-              <a:t> (Bairros)</a:t>
-            </a:r>
-            <a:br>
-              <a:rPr dirty="0"/>
-            </a:br>
-            <a:r>
-              <a:rPr dirty="0"/>
-              <a:t>├ </a:t>
-            </a:r>
-            <a:r>
-              <a:rPr dirty="0" err="1"/>
-              <a:t>Doar.jsx</a:t>
-            </a:r>
-            <a:r>
-              <a:rPr dirty="0"/>
-              <a:t> (Chips, PIX &amp; </a:t>
-            </a:r>
-            <a:r>
-              <a:rPr dirty="0" err="1"/>
-              <a:t>Recibo</a:t>
-            </a:r>
-            <a:r>
-              <a:rPr dirty="0"/>
-              <a:t>)</a:t>
-            </a:r>
-            <a:br>
-              <a:rPr dirty="0"/>
-            </a:br>
-            <a:r>
-              <a:rPr dirty="0"/>
-              <a:t>├ </a:t>
-            </a:r>
-            <a:r>
-              <a:rPr dirty="0" err="1"/>
-              <a:t>PlayerAudio.jsx</a:t>
-            </a:r>
-            <a:r>
-              <a:rPr dirty="0"/>
-              <a:t> (Trilha Sonora)</a:t>
-            </a:r>
-            <a:br>
-              <a:rPr dirty="0"/>
-            </a:br>
-            <a:r>
-              <a:rPr dirty="0"/>
-              <a:t>├ </a:t>
-            </a:r>
-            <a:r>
-              <a:rPr dirty="0" err="1"/>
-              <a:t>Contato.jsx</a:t>
-            </a:r>
-            <a:r>
-              <a:rPr dirty="0"/>
-              <a:t> (</a:t>
-            </a:r>
-            <a:r>
-              <a:rPr dirty="0" err="1"/>
-              <a:t>Ouvidoria</a:t>
-            </a:r>
-            <a:r>
-              <a:rPr dirty="0"/>
-              <a:t> Local)</a:t>
-            </a:r>
-            <a:br>
-              <a:rPr dirty="0"/>
-            </a:br>
-            <a:r>
-              <a:rPr lang="pt-BR" dirty="0"/>
-              <a:t> </a:t>
-            </a:r>
-            <a:r>
-              <a:rPr dirty="0"/>
-              <a:t>└</a:t>
-            </a:r>
-            <a:r>
-              <a:rPr lang="pt-BR"/>
-              <a:t>-</a:t>
-            </a:r>
-            <a:r>
-              <a:t> </a:t>
-            </a:r>
-            <a:r>
-              <a:rPr dirty="0" err="1"/>
-              <a:t>Footer.jsx</a:t>
-            </a:r>
-            <a:r>
-              <a:rPr dirty="0"/>
-              <a:t> (</a:t>
-            </a:r>
-            <a:r>
-              <a:rPr dirty="0" err="1"/>
-              <a:t>Créditos</a:t>
-            </a:r>
-            <a:r>
-              <a:rPr dirty="0"/>
-              <a:t> &amp; Links)</a:t>
+              <a:t>Árvore Modular de Componentes</a:t>
+            </a:r>
+          </a:p>
+          <a:p>
+            <a:br/>
+            <a:pPr algn="l">
+              <a:defRPr sz="1000">
+                <a:solidFill>
+                  <a:srgbClr val="1E293B"/>
+                </a:solidFill>
+                <a:latin typeface="Consolas"/>
+              </a:defRPr>
+            </a:pPr>
+            <a:r>
+              <a:t>App.jsx (Orquestrador Global)</a:t>
+            </a:r>
+            <a:br/>
+            <a:r>
+              <a:t>├── Navbar.jsx (Menu &amp; Mobile Toggle)</a:t>
+            </a:r>
+            <a:br/>
+            <a:r>
+              <a:t>├── Hero.jsx (Banner &amp; Metas ao Vivo)</a:t>
+            </a:r>
+            <a:br/>
+            <a:r>
+              <a:t>├── ConsumoApi.jsx (IBGE &amp; Leaflet)</a:t>
+            </a:r>
+            <a:br/>
+            <a:r>
+              <a:t>├── SobreCompleto.jsx (História)</a:t>
+            </a:r>
+            <a:br/>
+            <a:r>
+              <a:t>├── ComoFunciona.jsx (4 Passos)</a:t>
+            </a:r>
+            <a:br/>
+            <a:r>
+              <a:t>├── Fluxo.jsx (Percurso do Alimento)</a:t>
+            </a:r>
+            <a:br/>
+            <a:r>
+              <a:t>├── PrestacaoContas.jsx (Bairros)</a:t>
+            </a:r>
+            <a:br/>
+            <a:r>
+              <a:t>├── Doar.jsx (Chips, PIX &amp; Recibo)</a:t>
+            </a:r>
+            <a:br/>
+            <a:r>
+              <a:t>├── PlayerAudio.jsx (Trilha Sonora)</a:t>
+            </a:r>
+            <a:br/>
+            <a:r>
+              <a:t>├── Contato.jsx (Ouvidoria Local)</a:t>
+            </a:r>
+            <a:br/>
+            <a:r>
+              <a:t>└── Footer.jsx (Créditos &amp; Links)</a:t>
             </a:r>
           </a:p>
         </p:txBody>
@@ -14359,7 +9928,6 @@
           <a:lstStyle/>
           <a:p>
             <a:pPr algn="ctr"/>
-            <a:endParaRPr/>
           </a:p>
         </p:txBody>
       </p:sp>
@@ -14403,7 +9971,6 @@
           <a:lstStyle/>
           <a:p>
             <a:pPr algn="ctr"/>
-            <a:endParaRPr/>
           </a:p>
         </p:txBody>
       </p:sp>
@@ -14416,7 +9983,7 @@
         <p:spPr>
           <a:xfrm>
             <a:off x="5897880" y="1371600"/>
-            <a:ext cx="5303520" cy="1631216"/>
+            <a:ext cx="5303520" cy="1737360"/>
           </a:xfrm>
           <a:prstGeom prst="rect">
             <a:avLst/>
@@ -14429,7 +9996,7 @@
           </a:bodyPr>
           <a:lstStyle/>
           <a:p>
-            <a:pPr algn="ctr">
+            <a:pPr>
               <a:defRPr sz="1400" b="1">
                 <a:solidFill>
                   <a:srgbClr val="00873E"/>
@@ -14438,143 +10005,21 @@
               </a:defRPr>
             </a:pPr>
             <a:r>
-              <a:rPr sz="1600" dirty="0"/>
-              <a:t>Sem </a:t>
-            </a:r>
-            <a:r>
-              <a:rPr sz="1600" dirty="0" err="1"/>
-              <a:t>Aquele</a:t>
-            </a:r>
-            <a:r>
-              <a:rPr sz="1600" dirty="0"/>
-              <a:t> '</a:t>
-            </a:r>
-            <a:r>
-              <a:rPr sz="1600" dirty="0" err="1"/>
-              <a:t>Piscar</a:t>
-            </a:r>
-            <a:r>
-              <a:rPr sz="1600" dirty="0"/>
-              <a:t> Branco' do </a:t>
-            </a:r>
-            <a:r>
-              <a:rPr sz="1600" dirty="0" err="1"/>
-              <a:t>Navegador</a:t>
-            </a:r>
-            <a:endParaRPr sz="1600" dirty="0"/>
-          </a:p>
-          <a:p>
-            <a:pPr algn="just"/>
-            <a:br>
-              <a:rPr dirty="0"/>
-            </a:br>
-            <a:r>
-              <a:rPr dirty="0"/>
-              <a:t>Como </a:t>
-            </a:r>
-            <a:r>
-              <a:rPr dirty="0" err="1"/>
-              <a:t>uma</a:t>
-            </a:r>
-            <a:r>
-              <a:rPr dirty="0"/>
-              <a:t> Single Page Application (SPA), a </a:t>
-            </a:r>
-            <a:r>
-              <a:rPr dirty="0" err="1"/>
-              <a:t>navegação</a:t>
-            </a:r>
-            <a:r>
-              <a:rPr dirty="0"/>
-              <a:t> </a:t>
-            </a:r>
-            <a:r>
-              <a:rPr dirty="0" err="1"/>
-              <a:t>ocorre</a:t>
-            </a:r>
-            <a:r>
-              <a:rPr dirty="0"/>
-              <a:t> </a:t>
-            </a:r>
-            <a:r>
-              <a:rPr dirty="0" err="1"/>
-              <a:t>por</a:t>
-            </a:r>
-            <a:r>
-              <a:rPr dirty="0"/>
-              <a:t> </a:t>
-            </a:r>
-            <a:r>
-              <a:rPr dirty="0" err="1"/>
-              <a:t>rolagem</a:t>
-            </a:r>
-            <a:r>
-              <a:rPr dirty="0"/>
-              <a:t> suave (smooth scroll), </a:t>
-            </a:r>
-            <a:r>
-              <a:rPr dirty="0" err="1"/>
-              <a:t>mantendo</a:t>
-            </a:r>
-            <a:r>
-              <a:rPr dirty="0"/>
-              <a:t> a </a:t>
-            </a:r>
-            <a:r>
-              <a:rPr dirty="0" err="1"/>
-              <a:t>música</a:t>
-            </a:r>
-            <a:r>
-              <a:rPr dirty="0"/>
-              <a:t> </a:t>
-            </a:r>
-            <a:r>
-              <a:rPr dirty="0" err="1"/>
-              <a:t>tocando</a:t>
-            </a:r>
-            <a:r>
-              <a:rPr dirty="0"/>
-              <a:t> </a:t>
-            </a:r>
-            <a:r>
-              <a:rPr dirty="0" err="1"/>
-              <a:t>sem</a:t>
-            </a:r>
-            <a:r>
-              <a:rPr dirty="0"/>
-              <a:t> cortes e </a:t>
-            </a:r>
-            <a:r>
-              <a:rPr dirty="0" err="1"/>
-              <a:t>os</a:t>
-            </a:r>
-            <a:r>
-              <a:rPr dirty="0"/>
-              <a:t> dados </a:t>
-            </a:r>
-            <a:r>
-              <a:rPr dirty="0" err="1"/>
-              <a:t>preenchidos</a:t>
-            </a:r>
-            <a:r>
-              <a:rPr dirty="0"/>
-              <a:t> no </a:t>
-            </a:r>
-            <a:r>
-              <a:rPr dirty="0" err="1"/>
-              <a:t>formulário</a:t>
-            </a:r>
-            <a:r>
-              <a:rPr dirty="0"/>
-              <a:t> </a:t>
-            </a:r>
-            <a:r>
-              <a:rPr dirty="0" err="1"/>
-              <a:t>preservados</a:t>
-            </a:r>
-            <a:r>
-              <a:rPr dirty="0"/>
-              <a:t>.</a:t>
+              <a:t>Sem Aquele 'Piscar Branco' do Navegador</a:t>
+            </a:r>
+          </a:p>
+          <a:p>
+            <a:br/>
+            <a:pPr algn="just">
+              <a:defRPr sz="1150">
+                <a:solidFill>
+                  <a:srgbClr val="1E293B"/>
+                </a:solidFill>
+                <a:latin typeface="Segoe UI"/>
+              </a:defRPr>
+            </a:pPr>
+            <a:r>
+              <a:t>Como uma Single Page Application (SPA), a navegação ocorre por rolagem suave (smooth scroll), mantendo a música tocando sem cortes e os dados preenchidos no formulário preservados.</a:t>
             </a:r>
           </a:p>
         </p:txBody>
@@ -14621,7 +10066,6 @@
           <a:lstStyle/>
           <a:p>
             <a:pPr algn="ctr"/>
-            <a:endParaRPr/>
           </a:p>
         </p:txBody>
       </p:sp>
@@ -14633,8 +10077,8 @@
         </p:nvSpPr>
         <p:spPr>
           <a:xfrm>
-            <a:off x="5956874" y="3694888"/>
-            <a:ext cx="5234203" cy="1785104"/>
+            <a:off x="5897880" y="3611880"/>
+            <a:ext cx="5303520" cy="2286000"/>
           </a:xfrm>
           <a:prstGeom prst="rect">
             <a:avLst/>
@@ -14647,7 +10091,7 @@
           </a:bodyPr>
           <a:lstStyle/>
           <a:p>
-            <a:pPr algn="ctr">
+            <a:pPr>
               <a:defRPr sz="1300" b="1">
                 <a:solidFill>
                   <a:srgbClr val="00873E"/>
@@ -14656,37 +10100,8 @@
               </a:defRPr>
             </a:pPr>
             <a:r>
-              <a:rPr sz="1600" dirty="0"/>
-              <a:t>Hooks do React </a:t>
-            </a:r>
-            <a:r>
-              <a:rPr sz="1600" dirty="0" err="1"/>
-              <a:t>que</a:t>
-            </a:r>
-            <a:r>
-              <a:rPr sz="1600" dirty="0"/>
-              <a:t> Deram Vida à </a:t>
-            </a:r>
-            <a:r>
-              <a:rPr sz="1600" dirty="0" err="1"/>
-              <a:t>Aplicação</a:t>
-            </a:r>
-            <a:r>
-              <a:rPr sz="1600" dirty="0"/>
-              <a:t>:</a:t>
-            </a:r>
-            <a:endParaRPr lang="pt-BR" sz="1600" dirty="0"/>
-          </a:p>
-          <a:p>
-            <a:pPr algn="ctr">
-              <a:defRPr sz="1300" b="1">
-                <a:solidFill>
-                  <a:srgbClr val="00873E"/>
-                </a:solidFill>
-                <a:latin typeface="Segoe UI"/>
-              </a:defRPr>
-            </a:pPr>
-            <a:endParaRPr sz="1600" dirty="0"/>
+              <a:t>Hooks do React que Deram Vida à Aplicação:</a:t>
+            </a:r>
           </a:p>
           <a:p>
             <a:pPr algn="just">
@@ -14698,42 +10113,8 @@
               </a:defRPr>
             </a:pPr>
             <a:r>
-              <a:rPr sz="1200" dirty="0"/>
-              <a:t>• </a:t>
-            </a:r>
-            <a:r>
-              <a:rPr sz="1200" dirty="0" err="1"/>
-              <a:t>useState</a:t>
-            </a:r>
-            <a:r>
-              <a:rPr sz="1200" dirty="0"/>
-              <a:t>:  Guarda o total </a:t>
-            </a:r>
-            <a:r>
-              <a:rPr sz="1200" dirty="0" err="1"/>
-              <a:t>arrecadado</a:t>
-            </a:r>
-            <a:r>
-              <a:rPr sz="1200" dirty="0"/>
-              <a:t>, </a:t>
-            </a:r>
-            <a:r>
-              <a:rPr sz="1200" dirty="0" err="1"/>
-              <a:t>filtro</a:t>
-            </a:r>
-            <a:r>
-              <a:rPr sz="1200" dirty="0"/>
-              <a:t> de bairros e menu </a:t>
-            </a:r>
-            <a:r>
-              <a:rPr sz="1200" dirty="0" err="1"/>
-              <a:t>aberto</a:t>
-            </a:r>
-            <a:r>
-              <a:rPr sz="1200" dirty="0"/>
-              <a:t>;</a:t>
-            </a:r>
-            <a:endParaRPr lang="pt-BR" sz="1200" dirty="0"/>
+              <a:t>• useState:  Guarda o total arrecadado, filtro de bairros e menu aberto;</a:t>
+            </a:r>
           </a:p>
           <a:p>
             <a:pPr algn="just">
@@ -14744,7 +10125,9 @@
                 <a:latin typeface="Segoe UI"/>
               </a:defRPr>
             </a:pPr>
-            <a:endParaRPr sz="1200" dirty="0"/>
+            <a:r>
+              <a:t>• useEffect:  Busca dados no IBGE e escuta eventos de clique para o som;</a:t>
+            </a:r>
           </a:p>
           <a:p>
             <a:pPr algn="just">
@@ -14756,50 +10139,8 @@
               </a:defRPr>
             </a:pPr>
             <a:r>
-              <a:rPr sz="1200" dirty="0"/>
-              <a:t>• </a:t>
-            </a:r>
-            <a:r>
-              <a:rPr sz="1200" dirty="0" err="1"/>
-              <a:t>useEffect</a:t>
-            </a:r>
-            <a:r>
-              <a:rPr sz="1200" dirty="0"/>
-              <a:t>:  </a:t>
-            </a:r>
-            <a:r>
-              <a:rPr sz="1200" dirty="0" err="1"/>
-              <a:t>Busca</a:t>
-            </a:r>
-            <a:r>
-              <a:rPr sz="1200" dirty="0"/>
-              <a:t> dados no IBGE e </a:t>
-            </a:r>
-            <a:r>
-              <a:rPr sz="1200" dirty="0" err="1"/>
-              <a:t>escuta</a:t>
-            </a:r>
-            <a:r>
-              <a:rPr sz="1200" dirty="0"/>
-              <a:t> </a:t>
-            </a:r>
-            <a:r>
-              <a:rPr sz="1200" dirty="0" err="1"/>
-              <a:t>eventos</a:t>
-            </a:r>
-            <a:r>
-              <a:rPr sz="1200" dirty="0"/>
-              <a:t> de clique para o </a:t>
-            </a:r>
-            <a:r>
-              <a:rPr sz="1200" dirty="0" err="1"/>
-              <a:t>som</a:t>
-            </a:r>
-            <a:r>
-              <a:rPr sz="1200" dirty="0"/>
-              <a:t>;</a:t>
-            </a:r>
-            <a:endParaRPr lang="pt-BR" sz="1200" dirty="0"/>
+              <a:t>• useRef:  Controla a tag HTML5 audio sem re-renderizar a tela inteira;</a:t>
+            </a:r>
           </a:p>
           <a:p>
             <a:pPr algn="just">
@@ -14810,142 +10151,8 @@
                 <a:latin typeface="Segoe UI"/>
               </a:defRPr>
             </a:pPr>
-            <a:endParaRPr sz="1200" dirty="0"/>
-          </a:p>
-          <a:p>
-            <a:pPr algn="just">
-              <a:defRPr sz="1100">
-                <a:solidFill>
-                  <a:srgbClr val="1E293B"/>
-                </a:solidFill>
-                <a:latin typeface="Segoe UI"/>
-              </a:defRPr>
-            </a:pPr>
-            <a:r>
-              <a:rPr sz="1200" dirty="0"/>
-              <a:t>• </a:t>
-            </a:r>
-            <a:r>
-              <a:rPr sz="1200" dirty="0" err="1"/>
-              <a:t>useRef</a:t>
-            </a:r>
-            <a:r>
-              <a:rPr sz="1200" dirty="0"/>
-              <a:t>:  </a:t>
-            </a:r>
-            <a:r>
-              <a:rPr sz="1200" dirty="0" err="1"/>
-              <a:t>Controla</a:t>
-            </a:r>
-            <a:r>
-              <a:rPr sz="1200" dirty="0"/>
-              <a:t> a tag HTML5 audio </a:t>
-            </a:r>
-            <a:r>
-              <a:rPr sz="1200" dirty="0" err="1"/>
-              <a:t>sem</a:t>
-            </a:r>
-            <a:r>
-              <a:rPr sz="1200" dirty="0"/>
-              <a:t> re-</a:t>
-            </a:r>
-            <a:r>
-              <a:rPr sz="1200" dirty="0" err="1"/>
-              <a:t>renderizar</a:t>
-            </a:r>
-            <a:r>
-              <a:rPr sz="1200" dirty="0"/>
-              <a:t> a </a:t>
-            </a:r>
-            <a:r>
-              <a:rPr sz="1200" dirty="0" err="1"/>
-              <a:t>tela</a:t>
-            </a:r>
-            <a:r>
-              <a:rPr sz="1200" dirty="0"/>
-              <a:t> </a:t>
-            </a:r>
-            <a:r>
-              <a:rPr sz="1200" dirty="0" err="1"/>
-              <a:t>inteira</a:t>
-            </a:r>
-            <a:r>
-              <a:rPr sz="1200" dirty="0"/>
-              <a:t>;</a:t>
-            </a:r>
-            <a:endParaRPr lang="pt-BR" sz="1200" dirty="0"/>
-          </a:p>
-          <a:p>
-            <a:pPr algn="just">
-              <a:defRPr sz="1100">
-                <a:solidFill>
-                  <a:srgbClr val="1E293B"/>
-                </a:solidFill>
-                <a:latin typeface="Segoe UI"/>
-              </a:defRPr>
-            </a:pPr>
-            <a:endParaRPr sz="1200" dirty="0"/>
-          </a:p>
-          <a:p>
-            <a:pPr algn="just">
-              <a:defRPr sz="1100">
-                <a:solidFill>
-                  <a:srgbClr val="1E293B"/>
-                </a:solidFill>
-                <a:latin typeface="Segoe UI"/>
-              </a:defRPr>
-            </a:pPr>
-            <a:r>
-              <a:rPr sz="1200" dirty="0"/>
-              <a:t>• </a:t>
-            </a:r>
-            <a:r>
-              <a:rPr sz="1200" dirty="0" err="1"/>
-              <a:t>localStorage</a:t>
-            </a:r>
-            <a:r>
-              <a:rPr sz="1200" dirty="0"/>
-              <a:t>:  </a:t>
-            </a:r>
-            <a:r>
-              <a:rPr sz="1200" dirty="0" err="1"/>
-              <a:t>Preserva</a:t>
-            </a:r>
-            <a:r>
-              <a:rPr sz="1200" dirty="0"/>
-              <a:t> as </a:t>
-            </a:r>
-            <a:r>
-              <a:rPr sz="1200" dirty="0" err="1"/>
-              <a:t>doações</a:t>
-            </a:r>
-            <a:r>
-              <a:rPr sz="1200" dirty="0"/>
-              <a:t> </a:t>
-            </a:r>
-            <a:r>
-              <a:rPr sz="1200" dirty="0" err="1"/>
-              <a:t>mesmo</a:t>
-            </a:r>
-            <a:r>
-              <a:rPr sz="1200" dirty="0"/>
-              <a:t> </a:t>
-            </a:r>
-            <a:r>
-              <a:rPr sz="1200" dirty="0" err="1"/>
-              <a:t>fechando</a:t>
-            </a:r>
-            <a:r>
-              <a:rPr sz="1200" dirty="0"/>
-              <a:t> o </a:t>
-            </a:r>
-            <a:r>
-              <a:rPr sz="1200" dirty="0" err="1"/>
-              <a:t>navegador</a:t>
-            </a:r>
-            <a:r>
-              <a:rPr sz="1200" dirty="0"/>
-              <a:t>.</a:t>
+            <a:r>
+              <a:t>• localStorage:  Preserva as doações mesmo fechando o navegador.</a:t>
             </a:r>
           </a:p>
         </p:txBody>
@@ -14959,7 +10166,7 @@
 </file>
 
 <file path=ppt/slides/slide8.xml><?xml version="1.0" encoding="utf-8"?>
-<p:sld xmlns:a="http://schemas.openxmlformats.org/drawingml/2006/main" xmlns:r="http://schemas.openxmlformats.org/officeDocument/2006/relationships" xmlns:p="http://schemas.openxmlformats.org/presentationml/2006/main">
+<p:sld xmlns:a="http://schemas.openxmlformats.org/drawingml/2006/main" xmlns:p="http://schemas.openxmlformats.org/presentationml/2006/main" xmlns:r="http://schemas.openxmlformats.org/officeDocument/2006/relationships">
   <p:cSld>
     <p:spTree>
       <p:nvGrpSpPr>
@@ -14967,14 +10174,7 @@
         <p:cNvGrpSpPr/>
         <p:nvPr/>
       </p:nvGrpSpPr>
-      <p:grpSpPr>
-        <a:xfrm>
-          <a:off x="0" y="0"/>
-          <a:ext cx="0" cy="0"/>
-          <a:chOff x="0" y="0"/>
-          <a:chExt cx="0" cy="0"/>
-        </a:xfrm>
-      </p:grpSpPr>
+      <p:grpSpPr/>
       <p:sp>
         <p:nvSpPr>
           <p:cNvPr id="2" name="TextBox 1"/>
@@ -15049,7 +10249,7 @@
           </a:fontRef>
         </p:style>
         <p:txBody>
-          <a:bodyPr tIns="54864" rtlCol="0" anchor="ctr"/>
+          <a:bodyPr rtlCol="0" anchor="ctr" tIns="54864"/>
           <a:lstStyle/>
           <a:p>
             <a:pPr algn="ctr">
@@ -15106,7 +10306,6 @@
           <a:lstStyle/>
           <a:p>
             <a:pPr algn="ctr"/>
-            <a:endParaRPr/>
           </a:p>
         </p:txBody>
       </p:sp>
@@ -15150,7 +10349,6 @@
           <a:lstStyle/>
           <a:p>
             <a:pPr algn="ctr"/>
-            <a:endParaRPr/>
           </a:p>
         </p:txBody>
       </p:sp>
@@ -15304,7 +10502,6 @@
           <a:lstStyle/>
           <a:p>
             <a:pPr algn="ctr"/>
-            <a:endParaRPr/>
           </a:p>
         </p:txBody>
       </p:sp>
@@ -15348,7 +10545,6 @@
           <a:lstStyle/>
           <a:p>
             <a:pPr algn="ctr"/>
-            <a:endParaRPr/>
           </a:p>
         </p:txBody>
       </p:sp>
@@ -15443,7 +10639,6 @@
           <a:lstStyle/>
           <a:p>
             <a:pPr algn="ctr"/>
-            <a:endParaRPr/>
           </a:p>
         </p:txBody>
       </p:sp>
@@ -15487,7 +10682,6 @@
           <a:lstStyle/>
           <a:p>
             <a:pPr algn="ctr"/>
-            <a:endParaRPr/>
           </a:p>
         </p:txBody>
       </p:sp>
@@ -15582,7 +10776,6 @@
           <a:lstStyle/>
           <a:p>
             <a:pPr algn="ctr"/>
-            <a:endParaRPr/>
           </a:p>
         </p:txBody>
       </p:sp>
@@ -15626,7 +10819,6 @@
           <a:lstStyle/>
           <a:p>
             <a:pPr algn="ctr"/>
-            <a:endParaRPr/>
           </a:p>
         </p:txBody>
       </p:sp>
@@ -15721,7 +10913,6 @@
           <a:lstStyle/>
           <a:p>
             <a:pPr algn="ctr"/>
-            <a:endParaRPr/>
           </a:p>
         </p:txBody>
       </p:sp>
@@ -15761,24 +10952,56 @@
           </a:p>
           <a:p>
             <a:br/>
+            <a:pPr algn="just">
+              <a:defRPr sz="1150">
+                <a:solidFill>
+                  <a:srgbClr val="1E293B"/>
+                </a:solidFill>
+                <a:latin typeface="Segoe UI"/>
+              </a:defRPr>
+            </a:pPr>
             <a:r>
               <a:t>• Build de Produção com Vite: Compilado em menos de 800ms, gerando código minificado e assets otimizados na pasta dist/.</a:t>
             </a:r>
           </a:p>
           <a:p>
             <a:br/>
+            <a:pPr algn="just">
+              <a:defRPr sz="1150">
+                <a:solidFill>
+                  <a:srgbClr val="1E293B"/>
+                </a:solidFill>
+                <a:latin typeface="Segoe UI"/>
+              </a:defRPr>
+            </a:pPr>
             <a:r>
               <a:t>• Análise Estática com Oxlint: Zero erros de sintaxe, zero alertas de React e conformidade estrita com padrões modernos de código.</a:t>
             </a:r>
           </a:p>
           <a:p>
             <a:br/>
+            <a:pPr algn="just">
+              <a:defRPr sz="1150">
+                <a:solidFill>
+                  <a:srgbClr val="1E293B"/>
+                </a:solidFill>
+                <a:latin typeface="Segoe UI"/>
+              </a:defRPr>
+            </a:pPr>
             <a:r>
               <a:t>• Teste de Formulários em Branco: O navegador bloqueia submissão vazia e orienta o usuário de forma amigável.</a:t>
             </a:r>
           </a:p>
           <a:p>
             <a:br/>
+            <a:pPr algn="just">
+              <a:defRPr sz="1150">
+                <a:solidFill>
+                  <a:srgbClr val="1E293B"/>
+                </a:solidFill>
+                <a:latin typeface="Segoe UI"/>
+              </a:defRPr>
+            </a:pPr>
             <a:r>
               <a:t>• Teste em Celulares Reais: Testamos botões de toque, teclado numérico e rolagem suave em dispositivos Android e iOS dos membros da equipe.</a:t>
             </a:r>
@@ -15794,7 +11017,7 @@
 </file>
 
 <file path=ppt/slides/slide9.xml><?xml version="1.0" encoding="utf-8"?>
-<p:sld xmlns:a="http://schemas.openxmlformats.org/drawingml/2006/main" xmlns:r="http://schemas.openxmlformats.org/officeDocument/2006/relationships" xmlns:p="http://schemas.openxmlformats.org/presentationml/2006/main">
+<p:sld xmlns:a="http://schemas.openxmlformats.org/drawingml/2006/main" xmlns:p="http://schemas.openxmlformats.org/presentationml/2006/main" xmlns:r="http://schemas.openxmlformats.org/officeDocument/2006/relationships">
   <p:cSld>
     <p:spTree>
       <p:nvGrpSpPr>
@@ -15802,14 +11025,7 @@
         <p:cNvGrpSpPr/>
         <p:nvPr/>
       </p:nvGrpSpPr>
-      <p:grpSpPr>
-        <a:xfrm>
-          <a:off x="0" y="0"/>
-          <a:ext cx="0" cy="0"/>
-          <a:chOff x="0" y="0"/>
-          <a:chExt cx="0" cy="0"/>
-        </a:xfrm>
-      </p:grpSpPr>
+      <p:grpSpPr/>
       <p:sp>
         <p:nvSpPr>
           <p:cNvPr id="2" name="TextBox 1"/>
@@ -15884,7 +11100,7 @@
           </a:fontRef>
         </p:style>
         <p:txBody>
-          <a:bodyPr tIns="54864" rtlCol="0" anchor="ctr"/>
+          <a:bodyPr rtlCol="0" anchor="ctr" tIns="54864"/>
           <a:lstStyle/>
           <a:p>
             <a:pPr algn="ctr">
@@ -15941,7 +11157,6 @@
           <a:lstStyle/>
           <a:p>
             <a:pPr algn="ctr"/>
-            <a:endParaRPr/>
           </a:p>
         </p:txBody>
       </p:sp>
@@ -15985,7 +11200,6 @@
           <a:lstStyle/>
           <a:p>
             <a:pPr algn="ctr"/>
-            <a:endParaRPr/>
           </a:p>
         </p:txBody>
       </p:sp>
@@ -16139,7 +11353,6 @@
           <a:lstStyle/>
           <a:p>
             <a:pPr algn="ctr"/>
-            <a:endParaRPr/>
           </a:p>
         </p:txBody>
       </p:sp>
@@ -16179,12 +11392,28 @@
           </a:p>
           <a:p>
             <a:br/>
+            <a:pPr algn="ctr">
+              <a:defRPr sz="1150">
+                <a:solidFill>
+                  <a:srgbClr val="64748B"/>
+                </a:solidFill>
+                <a:latin typeface="Segoe UI"/>
+              </a:defRPr>
+            </a:pPr>
             <a:r>
               <a:t>Histórico completo de versões, commits explicativos da equipe, componentes React e instruções de execução.</a:t>
             </a:r>
           </a:p>
           <a:p>
             <a:br/>
+            <a:pPr algn="l">
+              <a:defRPr sz="1050" b="1">
+                <a:solidFill>
+                  <a:srgbClr val="00873E"/>
+                </a:solidFill>
+                <a:latin typeface="Consolas"/>
+              </a:defRPr>
+            </a:pPr>
             <a:r>
               <a:t>https://github.com/ambersonrogers/timbiras-solidaria</a:t>
             </a:r>
@@ -16233,7 +11462,6 @@
           <a:lstStyle/>
           <a:p>
             <a:pPr algn="ctr"/>
-            <a:endParaRPr/>
           </a:p>
         </p:txBody>
       </p:sp>
@@ -16273,12 +11501,28 @@
           </a:p>
           <a:p>
             <a:br/>
+            <a:pPr algn="ctr">
+              <a:defRPr sz="1150">
+                <a:solidFill>
+                  <a:srgbClr val="64748B"/>
+                </a:solidFill>
+                <a:latin typeface="Segoe UI"/>
+              </a:defRPr>
+            </a:pPr>
             <a:r>
               <a:t>Deploy em nuvem de alta velocidade, com roteamento de SPA configurado via vercel.json e acesso mundial.</a:t>
             </a:r>
           </a:p>
           <a:p>
             <a:br/>
+            <a:pPr algn="l">
+              <a:defRPr sz="1050" b="1">
+                <a:solidFill>
+                  <a:srgbClr val="0284C7"/>
+                </a:solidFill>
+                <a:latin typeface="Consolas"/>
+              </a:defRPr>
+            </a:pPr>
             <a:r>
               <a:t>https://timbiras-solidaria.vercel.app</a:t>
             </a:r>
@@ -16327,7 +11571,6 @@
           <a:lstStyle/>
           <a:p>
             <a:pPr algn="ctr"/>
-            <a:endParaRPr/>
           </a:p>
         </p:txBody>
       </p:sp>

--- a/Relatorio_Atividade_2_Slides.pptx
+++ b/Relatorio_Atividade_2_Slides.pptx
@@ -5,21 +5,21 @@
     <p:sldMasterId id="2147483648" r:id="rId1"/>
   </p:sldMasterIdLst>
   <p:sldIdLst>
-    <p:sldId id="256" r:id="rId7"/>
-    <p:sldId id="257" r:id="rId8"/>
-    <p:sldId id="258" r:id="rId9"/>
-    <p:sldId id="259" r:id="rId10"/>
-    <p:sldId id="260" r:id="rId11"/>
-    <p:sldId id="261" r:id="rId12"/>
-    <p:sldId id="262" r:id="rId13"/>
-    <p:sldId id="263" r:id="rId14"/>
-    <p:sldId id="264" r:id="rId15"/>
-    <p:sldId id="265" r:id="rId16"/>
-    <p:sldId id="266" r:id="rId17"/>
-    <p:sldId id="267" r:id="rId18"/>
-    <p:sldId id="268" r:id="rId19"/>
+    <p:sldId id="256" r:id="rId2"/>
+    <p:sldId id="257" r:id="rId3"/>
+    <p:sldId id="258" r:id="rId4"/>
+    <p:sldId id="259" r:id="rId5"/>
+    <p:sldId id="260" r:id="rId6"/>
+    <p:sldId id="261" r:id="rId7"/>
+    <p:sldId id="262" r:id="rId8"/>
+    <p:sldId id="263" r:id="rId9"/>
+    <p:sldId id="264" r:id="rId10"/>
+    <p:sldId id="265" r:id="rId11"/>
+    <p:sldId id="266" r:id="rId12"/>
+    <p:sldId id="267" r:id="rId13"/>
+    <p:sldId id="268" r:id="rId14"/>
   </p:sldIdLst>
-  <p:sldSz cx="12191695" cy="6858000" type="screen4x3"/>
+  <p:sldSz cx="12192000" cy="6858000"/>
   <p:notesSz cx="6858000" cy="9144000"/>
   <p:defaultTextStyle>
     <a:defPPr>
@@ -116,7 +116,153 @@
       </a:defRPr>
     </a:lvl9pPr>
   </p:defaultTextStyle>
+  <p:extLst>
+    <p:ext uri="{EFAFB233-063F-42B5-8137-9DF3F51BA10A}">
+      <p15:sldGuideLst xmlns:p15="http://schemas.microsoft.com/office/powerpoint/2012/main">
+        <p15:guide id="1" orient="horz" pos="2160">
+          <p15:clr>
+            <a:srgbClr val="A4A3A4"/>
+          </p15:clr>
+        </p15:guide>
+        <p15:guide id="2" pos="2880">
+          <p15:clr>
+            <a:srgbClr val="A4A3A4"/>
+          </p15:clr>
+        </p15:guide>
+      </p15:sldGuideLst>
+    </p:ext>
+  </p:extLst>
 </p:presentation>
+</file>
+
+<file path=ppt/changesInfos/changesInfo1.xml><?xml version="1.0" encoding="utf-8"?>
+<pc:chgInfo xmlns:a="http://schemas.openxmlformats.org/drawingml/2006/main" xmlns:r="http://schemas.openxmlformats.org/officeDocument/2006/relationships" xmlns:ac="http://schemas.microsoft.com/office/drawing/2013/main/command" xmlns:pc="http://schemas.microsoft.com/office/powerpoint/2013/main/command">
+  <pc:docChgLst>
+    <pc:chgData name="Amberson Rogers Lindoso da Silva" userId="1e7355cac7a206dd" providerId="LiveId" clId="{F3CFAD84-59F1-4795-A6D8-6D79CCCB1EA4}"/>
+    <pc:docChg chg="undo custSel modSld">
+      <pc:chgData name="Amberson Rogers Lindoso da Silva" userId="1e7355cac7a206dd" providerId="LiveId" clId="{F3CFAD84-59F1-4795-A6D8-6D79CCCB1EA4}" dt="2026-09-18T01:50:52.296" v="53" actId="403"/>
+      <pc:docMkLst>
+        <pc:docMk/>
+      </pc:docMkLst>
+      <pc:sldChg chg="modSp mod">
+        <pc:chgData name="Amberson Rogers Lindoso da Silva" userId="1e7355cac7a206dd" providerId="LiveId" clId="{F3CFAD84-59F1-4795-A6D8-6D79CCCB1EA4}" dt="2026-09-18T01:46:35.762" v="18" actId="20577"/>
+        <pc:sldMkLst>
+          <pc:docMk/>
+          <pc:sldMk cId="0" sldId="256"/>
+        </pc:sldMkLst>
+        <pc:spChg chg="mod">
+          <ac:chgData name="Amberson Rogers Lindoso da Silva" userId="1e7355cac7a206dd" providerId="LiveId" clId="{F3CFAD84-59F1-4795-A6D8-6D79CCCB1EA4}" dt="2026-09-18T01:45:28.002" v="7" actId="403"/>
+          <ac:spMkLst>
+            <pc:docMk/>
+            <pc:sldMk cId="0" sldId="256"/>
+            <ac:spMk id="3" creationId="{00000000-0000-0000-0000-000000000000}"/>
+          </ac:spMkLst>
+        </pc:spChg>
+        <pc:spChg chg="mod">
+          <ac:chgData name="Amberson Rogers Lindoso da Silva" userId="1e7355cac7a206dd" providerId="LiveId" clId="{F3CFAD84-59F1-4795-A6D8-6D79CCCB1EA4}" dt="2026-09-18T01:46:35.762" v="18" actId="20577"/>
+          <ac:spMkLst>
+            <pc:docMk/>
+            <pc:sldMk cId="0" sldId="256"/>
+            <ac:spMk id="5" creationId="{00000000-0000-0000-0000-000000000000}"/>
+          </ac:spMkLst>
+        </pc:spChg>
+      </pc:sldChg>
+      <pc:sldChg chg="modSp mod">
+        <pc:chgData name="Amberson Rogers Lindoso da Silva" userId="1e7355cac7a206dd" providerId="LiveId" clId="{F3CFAD84-59F1-4795-A6D8-6D79CCCB1EA4}" dt="2026-09-18T01:49:21.731" v="36" actId="123"/>
+        <pc:sldMkLst>
+          <pc:docMk/>
+          <pc:sldMk cId="0" sldId="257"/>
+        </pc:sldMkLst>
+        <pc:spChg chg="mod">
+          <ac:chgData name="Amberson Rogers Lindoso da Silva" userId="1e7355cac7a206dd" providerId="LiveId" clId="{F3CFAD84-59F1-4795-A6D8-6D79CCCB1EA4}" dt="2026-09-18T01:49:21.731" v="36" actId="123"/>
+          <ac:spMkLst>
+            <pc:docMk/>
+            <pc:sldMk cId="0" sldId="257"/>
+            <ac:spMk id="8" creationId="{00000000-0000-0000-0000-000000000000}"/>
+          </ac:spMkLst>
+        </pc:spChg>
+        <pc:spChg chg="mod">
+          <ac:chgData name="Amberson Rogers Lindoso da Silva" userId="1e7355cac7a206dd" providerId="LiveId" clId="{F3CFAD84-59F1-4795-A6D8-6D79CCCB1EA4}" dt="2026-09-18T01:49:16.728" v="35" actId="123"/>
+          <ac:spMkLst>
+            <pc:docMk/>
+            <pc:sldMk cId="0" sldId="257"/>
+            <ac:spMk id="11" creationId="{00000000-0000-0000-0000-000000000000}"/>
+          </ac:spMkLst>
+        </pc:spChg>
+        <pc:spChg chg="mod">
+          <ac:chgData name="Amberson Rogers Lindoso da Silva" userId="1e7355cac7a206dd" providerId="LiveId" clId="{F3CFAD84-59F1-4795-A6D8-6D79CCCB1EA4}" dt="2026-09-18T01:49:12.366" v="34" actId="123"/>
+          <ac:spMkLst>
+            <pc:docMk/>
+            <pc:sldMk cId="0" sldId="257"/>
+            <ac:spMk id="13" creationId="{00000000-0000-0000-0000-000000000000}"/>
+          </ac:spMkLst>
+        </pc:spChg>
+      </pc:sldChg>
+      <pc:sldChg chg="modSp mod">
+        <pc:chgData name="Amberson Rogers Lindoso da Silva" userId="1e7355cac7a206dd" providerId="LiveId" clId="{F3CFAD84-59F1-4795-A6D8-6D79CCCB1EA4}" dt="2026-09-18T01:49:05.764" v="33" actId="123"/>
+        <pc:sldMkLst>
+          <pc:docMk/>
+          <pc:sldMk cId="0" sldId="258"/>
+        </pc:sldMkLst>
+        <pc:spChg chg="mod">
+          <ac:chgData name="Amberson Rogers Lindoso da Silva" userId="1e7355cac7a206dd" providerId="LiveId" clId="{F3CFAD84-59F1-4795-A6D8-6D79CCCB1EA4}" dt="2026-09-18T01:49:05.764" v="33" actId="123"/>
+          <ac:spMkLst>
+            <pc:docMk/>
+            <pc:sldMk cId="0" sldId="258"/>
+            <ac:spMk id="8" creationId="{00000000-0000-0000-0000-000000000000}"/>
+          </ac:spMkLst>
+        </pc:spChg>
+        <pc:spChg chg="mod">
+          <ac:chgData name="Amberson Rogers Lindoso da Silva" userId="1e7355cac7a206dd" providerId="LiveId" clId="{F3CFAD84-59F1-4795-A6D8-6D79CCCB1EA4}" dt="2026-09-18T01:49:01.537" v="32" actId="123"/>
+          <ac:spMkLst>
+            <pc:docMk/>
+            <pc:sldMk cId="0" sldId="258"/>
+            <ac:spMk id="11" creationId="{00000000-0000-0000-0000-000000000000}"/>
+          </ac:spMkLst>
+        </pc:spChg>
+        <pc:spChg chg="mod">
+          <ac:chgData name="Amberson Rogers Lindoso da Silva" userId="1e7355cac7a206dd" providerId="LiveId" clId="{F3CFAD84-59F1-4795-A6D8-6D79CCCB1EA4}" dt="2026-09-18T01:48:56.405" v="31" actId="123"/>
+          <ac:spMkLst>
+            <pc:docMk/>
+            <pc:sldMk cId="0" sldId="258"/>
+            <ac:spMk id="13" creationId="{00000000-0000-0000-0000-000000000000}"/>
+          </ac:spMkLst>
+        </pc:spChg>
+      </pc:sldChg>
+      <pc:sldChg chg="modSp mod">
+        <pc:chgData name="Amberson Rogers Lindoso da Silva" userId="1e7355cac7a206dd" providerId="LiveId" clId="{F3CFAD84-59F1-4795-A6D8-6D79CCCB1EA4}" dt="2026-09-18T01:50:52.296" v="53" actId="403"/>
+        <pc:sldMkLst>
+          <pc:docMk/>
+          <pc:sldMk cId="0" sldId="259"/>
+        </pc:sldMkLst>
+        <pc:spChg chg="mod">
+          <ac:chgData name="Amberson Rogers Lindoso da Silva" userId="1e7355cac7a206dd" providerId="LiveId" clId="{F3CFAD84-59F1-4795-A6D8-6D79CCCB1EA4}" dt="2026-09-18T01:50:08.622" v="49" actId="403"/>
+          <ac:spMkLst>
+            <pc:docMk/>
+            <pc:sldMk cId="0" sldId="259"/>
+            <ac:spMk id="11" creationId="{00000000-0000-0000-0000-000000000000}"/>
+          </ac:spMkLst>
+        </pc:spChg>
+        <pc:spChg chg="mod">
+          <ac:chgData name="Amberson Rogers Lindoso da Silva" userId="1e7355cac7a206dd" providerId="LiveId" clId="{F3CFAD84-59F1-4795-A6D8-6D79CCCB1EA4}" dt="2026-09-18T01:50:52.296" v="53" actId="403"/>
+          <ac:spMkLst>
+            <pc:docMk/>
+            <pc:sldMk cId="0" sldId="259"/>
+            <ac:spMk id="12" creationId="{00000000-0000-0000-0000-000000000000}"/>
+          </ac:spMkLst>
+        </pc:spChg>
+        <pc:spChg chg="mod">
+          <ac:chgData name="Amberson Rogers Lindoso da Silva" userId="1e7355cac7a206dd" providerId="LiveId" clId="{F3CFAD84-59F1-4795-A6D8-6D79CCCB1EA4}" dt="2026-09-18T01:50:40.555" v="52" actId="2711"/>
+          <ac:spMkLst>
+            <pc:docMk/>
+            <pc:sldMk cId="0" sldId="259"/>
+            <ac:spMk id="14" creationId="{00000000-0000-0000-0000-000000000000}"/>
+          </ac:spMkLst>
+        </pc:spChg>
+      </pc:sldChg>
+    </pc:docChg>
+  </pc:docChgLst>
+</pc:chgInfo>
 </file>
 
 <file path=ppt/slideLayouts/slideLayout1.xml><?xml version="1.0" encoding="utf-8"?>
@@ -157,10 +303,9 @@
           <a:lstStyle/>
           <a:p>
             <a:r>
-              <a:rPr lang="en-US" smtClean="0"/>
+              <a:rPr lang="en-US"/>
               <a:t>Click to edit Master title style</a:t>
             </a:r>
-            <a:endParaRPr lang="en-US"/>
           </a:p>
         </p:txBody>
       </p:sp>
@@ -276,10 +421,9 @@
           </a:lstStyle>
           <a:p>
             <a:r>
-              <a:rPr lang="en-US" smtClean="0"/>
+              <a:rPr lang="en-US"/>
               <a:t>Click to edit Master subtitle style</a:t>
             </a:r>
-            <a:endParaRPr lang="en-US"/>
           </a:p>
         </p:txBody>
       </p:sp>
@@ -300,7 +444,7 @@
           <a:p>
             <a:fld id="{5BCAD085-E8A6-8845-BD4E-CB4CCA059FC4}" type="datetimeFigureOut">
               <a:rPr lang="en-US" smtClean="0"/>
-              <a:t>1/27/13</a:t>
+              <a:t>9/17/2026</a:t>
             </a:fld>
             <a:endParaRPr lang="en-US"/>
           </a:p>
@@ -342,7 +486,7 @@
           <a:p>
             <a:fld id="{C1FF6DA9-008F-8B48-92A6-B652298478BF}" type="slidenum">
               <a:rPr lang="en-US" smtClean="0"/>
-              <a:t>‹#›</a:t>
+              <a:t>‹nº›</a:t>
             </a:fld>
             <a:endParaRPr lang="en-US"/>
           </a:p>
@@ -394,10 +538,9 @@
           <a:lstStyle/>
           <a:p>
             <a:r>
-              <a:rPr lang="en-US" smtClean="0"/>
+              <a:rPr lang="en-US"/>
               <a:t>Click to edit Master title style</a:t>
             </a:r>
-            <a:endParaRPr lang="en-US"/>
           </a:p>
         </p:txBody>
       </p:sp>
@@ -418,38 +561,37 @@
           <a:p>
             <a:pPr lvl="0"/>
             <a:r>
-              <a:rPr lang="en-US" smtClean="0"/>
+              <a:rPr lang="en-US"/>
               <a:t>Click to edit Master text styles</a:t>
             </a:r>
           </a:p>
           <a:p>
             <a:pPr lvl="1"/>
             <a:r>
-              <a:rPr lang="en-US" smtClean="0"/>
+              <a:rPr lang="en-US"/>
               <a:t>Second level</a:t>
             </a:r>
           </a:p>
           <a:p>
             <a:pPr lvl="2"/>
             <a:r>
-              <a:rPr lang="en-US" smtClean="0"/>
+              <a:rPr lang="en-US"/>
               <a:t>Third level</a:t>
             </a:r>
           </a:p>
           <a:p>
             <a:pPr lvl="3"/>
             <a:r>
-              <a:rPr lang="en-US" smtClean="0"/>
+              <a:rPr lang="en-US"/>
               <a:t>Fourth level</a:t>
             </a:r>
           </a:p>
           <a:p>
             <a:pPr lvl="4"/>
             <a:r>
-              <a:rPr lang="en-US" smtClean="0"/>
+              <a:rPr lang="en-US"/>
               <a:t>Fifth level</a:t>
             </a:r>
-            <a:endParaRPr lang="en-US"/>
           </a:p>
         </p:txBody>
       </p:sp>
@@ -470,7 +612,7 @@
           <a:p>
             <a:fld id="{5BCAD085-E8A6-8845-BD4E-CB4CCA059FC4}" type="datetimeFigureOut">
               <a:rPr lang="en-US" smtClean="0"/>
-              <a:t>1/27/13</a:t>
+              <a:t>9/17/2026</a:t>
             </a:fld>
             <a:endParaRPr lang="en-US"/>
           </a:p>
@@ -512,7 +654,7 @@
           <a:p>
             <a:fld id="{C1FF6DA9-008F-8B48-92A6-B652298478BF}" type="slidenum">
               <a:rPr lang="en-US" smtClean="0"/>
-              <a:t>‹#›</a:t>
+              <a:t>‹nº›</a:t>
             </a:fld>
             <a:endParaRPr lang="en-US"/>
           </a:p>
@@ -569,10 +711,9 @@
           <a:lstStyle/>
           <a:p>
             <a:r>
-              <a:rPr lang="en-US" smtClean="0"/>
+              <a:rPr lang="en-US"/>
               <a:t>Click to edit Master title style</a:t>
             </a:r>
-            <a:endParaRPr lang="en-US"/>
           </a:p>
         </p:txBody>
       </p:sp>
@@ -598,38 +739,37 @@
           <a:p>
             <a:pPr lvl="0"/>
             <a:r>
-              <a:rPr lang="en-US" smtClean="0"/>
+              <a:rPr lang="en-US"/>
               <a:t>Click to edit Master text styles</a:t>
             </a:r>
           </a:p>
           <a:p>
             <a:pPr lvl="1"/>
             <a:r>
-              <a:rPr lang="en-US" smtClean="0"/>
+              <a:rPr lang="en-US"/>
               <a:t>Second level</a:t>
             </a:r>
           </a:p>
           <a:p>
             <a:pPr lvl="2"/>
             <a:r>
-              <a:rPr lang="en-US" smtClean="0"/>
+              <a:rPr lang="en-US"/>
               <a:t>Third level</a:t>
             </a:r>
           </a:p>
           <a:p>
             <a:pPr lvl="3"/>
             <a:r>
-              <a:rPr lang="en-US" smtClean="0"/>
+              <a:rPr lang="en-US"/>
               <a:t>Fourth level</a:t>
             </a:r>
           </a:p>
           <a:p>
             <a:pPr lvl="4"/>
             <a:r>
-              <a:rPr lang="en-US" smtClean="0"/>
+              <a:rPr lang="en-US"/>
               <a:t>Fifth level</a:t>
             </a:r>
-            <a:endParaRPr lang="en-US"/>
           </a:p>
         </p:txBody>
       </p:sp>
@@ -650,7 +790,7 @@
           <a:p>
             <a:fld id="{5BCAD085-E8A6-8845-BD4E-CB4CCA059FC4}" type="datetimeFigureOut">
               <a:rPr lang="en-US" smtClean="0"/>
-              <a:t>1/27/13</a:t>
+              <a:t>9/17/2026</a:t>
             </a:fld>
             <a:endParaRPr lang="en-US"/>
           </a:p>
@@ -692,7 +832,7 @@
           <a:p>
             <a:fld id="{C1FF6DA9-008F-8B48-92A6-B652298478BF}" type="slidenum">
               <a:rPr lang="en-US" smtClean="0"/>
-              <a:t>‹#›</a:t>
+              <a:t>‹nº›</a:t>
             </a:fld>
             <a:endParaRPr lang="en-US"/>
           </a:p>
@@ -744,10 +884,9 @@
           <a:lstStyle/>
           <a:p>
             <a:r>
-              <a:rPr lang="en-US" smtClean="0"/>
+              <a:rPr lang="en-US"/>
               <a:t>Click to edit Master title style</a:t>
             </a:r>
-            <a:endParaRPr lang="en-US"/>
           </a:p>
         </p:txBody>
       </p:sp>
@@ -768,38 +907,37 @@
           <a:p>
             <a:pPr lvl="0"/>
             <a:r>
-              <a:rPr lang="en-US" smtClean="0"/>
+              <a:rPr lang="en-US"/>
               <a:t>Click to edit Master text styles</a:t>
             </a:r>
           </a:p>
           <a:p>
             <a:pPr lvl="1"/>
             <a:r>
-              <a:rPr lang="en-US" smtClean="0"/>
+              <a:rPr lang="en-US"/>
               <a:t>Second level</a:t>
             </a:r>
           </a:p>
           <a:p>
             <a:pPr lvl="2"/>
             <a:r>
-              <a:rPr lang="en-US" smtClean="0"/>
+              <a:rPr lang="en-US"/>
               <a:t>Third level</a:t>
             </a:r>
           </a:p>
           <a:p>
             <a:pPr lvl="3"/>
             <a:r>
-              <a:rPr lang="en-US" smtClean="0"/>
+              <a:rPr lang="en-US"/>
               <a:t>Fourth level</a:t>
             </a:r>
           </a:p>
           <a:p>
             <a:pPr lvl="4"/>
             <a:r>
-              <a:rPr lang="en-US" smtClean="0"/>
+              <a:rPr lang="en-US"/>
               <a:t>Fifth level</a:t>
             </a:r>
-            <a:endParaRPr lang="en-US"/>
           </a:p>
         </p:txBody>
       </p:sp>
@@ -820,7 +958,7 @@
           <a:p>
             <a:fld id="{5BCAD085-E8A6-8845-BD4E-CB4CCA059FC4}" type="datetimeFigureOut">
               <a:rPr lang="en-US" smtClean="0"/>
-              <a:t>1/27/13</a:t>
+              <a:t>9/17/2026</a:t>
             </a:fld>
             <a:endParaRPr lang="en-US"/>
           </a:p>
@@ -862,7 +1000,7 @@
           <a:p>
             <a:fld id="{C1FF6DA9-008F-8B48-92A6-B652298478BF}" type="slidenum">
               <a:rPr lang="en-US" smtClean="0"/>
-              <a:t>‹#›</a:t>
+              <a:t>‹nº›</a:t>
             </a:fld>
             <a:endParaRPr lang="en-US"/>
           </a:p>
@@ -923,10 +1061,9 @@
           </a:lstStyle>
           <a:p>
             <a:r>
-              <a:rPr lang="en-US" smtClean="0"/>
+              <a:rPr lang="en-US"/>
               <a:t>Click to edit Master title style</a:t>
             </a:r>
-            <a:endParaRPr lang="en-US"/>
           </a:p>
         </p:txBody>
       </p:sp>
@@ -1043,7 +1180,7 @@
           <a:p>
             <a:pPr lvl="0"/>
             <a:r>
-              <a:rPr lang="en-US" smtClean="0"/>
+              <a:rPr lang="en-US"/>
               <a:t>Click to edit Master text styles</a:t>
             </a:r>
           </a:p>
@@ -1066,7 +1203,7 @@
           <a:p>
             <a:fld id="{5BCAD085-E8A6-8845-BD4E-CB4CCA059FC4}" type="datetimeFigureOut">
               <a:rPr lang="en-US" smtClean="0"/>
-              <a:t>1/27/13</a:t>
+              <a:t>9/17/2026</a:t>
             </a:fld>
             <a:endParaRPr lang="en-US"/>
           </a:p>
@@ -1108,7 +1245,7 @@
           <a:p>
             <a:fld id="{C1FF6DA9-008F-8B48-92A6-B652298478BF}" type="slidenum">
               <a:rPr lang="en-US" smtClean="0"/>
-              <a:t>‹#›</a:t>
+              <a:t>‹nº›</a:t>
             </a:fld>
             <a:endParaRPr lang="en-US"/>
           </a:p>
@@ -1160,10 +1297,9 @@
           <a:lstStyle/>
           <a:p>
             <a:r>
-              <a:rPr lang="en-US" smtClean="0"/>
+              <a:rPr lang="en-US"/>
               <a:t>Click to edit Master title style</a:t>
             </a:r>
-            <a:endParaRPr lang="en-US"/>
           </a:p>
         </p:txBody>
       </p:sp>
@@ -1217,38 +1353,37 @@
           <a:p>
             <a:pPr lvl="0"/>
             <a:r>
-              <a:rPr lang="en-US" smtClean="0"/>
+              <a:rPr lang="en-US"/>
               <a:t>Click to edit Master text styles</a:t>
             </a:r>
           </a:p>
           <a:p>
             <a:pPr lvl="1"/>
             <a:r>
-              <a:rPr lang="en-US" smtClean="0"/>
+              <a:rPr lang="en-US"/>
               <a:t>Second level</a:t>
             </a:r>
           </a:p>
           <a:p>
             <a:pPr lvl="2"/>
             <a:r>
-              <a:rPr lang="en-US" smtClean="0"/>
+              <a:rPr lang="en-US"/>
               <a:t>Third level</a:t>
             </a:r>
           </a:p>
           <a:p>
             <a:pPr lvl="3"/>
             <a:r>
-              <a:rPr lang="en-US" smtClean="0"/>
+              <a:rPr lang="en-US"/>
               <a:t>Fourth level</a:t>
             </a:r>
           </a:p>
           <a:p>
             <a:pPr lvl="4"/>
             <a:r>
-              <a:rPr lang="en-US" smtClean="0"/>
+              <a:rPr lang="en-US"/>
               <a:t>Fifth level</a:t>
             </a:r>
-            <a:endParaRPr lang="en-US"/>
           </a:p>
         </p:txBody>
       </p:sp>
@@ -1302,38 +1437,37 @@
           <a:p>
             <a:pPr lvl="0"/>
             <a:r>
-              <a:rPr lang="en-US" smtClean="0"/>
+              <a:rPr lang="en-US"/>
               <a:t>Click to edit Master text styles</a:t>
             </a:r>
           </a:p>
           <a:p>
             <a:pPr lvl="1"/>
             <a:r>
-              <a:rPr lang="en-US" smtClean="0"/>
+              <a:rPr lang="en-US"/>
               <a:t>Second level</a:t>
             </a:r>
           </a:p>
           <a:p>
             <a:pPr lvl="2"/>
             <a:r>
-              <a:rPr lang="en-US" smtClean="0"/>
+              <a:rPr lang="en-US"/>
               <a:t>Third level</a:t>
             </a:r>
           </a:p>
           <a:p>
             <a:pPr lvl="3"/>
             <a:r>
-              <a:rPr lang="en-US" smtClean="0"/>
+              <a:rPr lang="en-US"/>
               <a:t>Fourth level</a:t>
             </a:r>
           </a:p>
           <a:p>
             <a:pPr lvl="4"/>
             <a:r>
-              <a:rPr lang="en-US" smtClean="0"/>
+              <a:rPr lang="en-US"/>
               <a:t>Fifth level</a:t>
             </a:r>
-            <a:endParaRPr lang="en-US"/>
           </a:p>
         </p:txBody>
       </p:sp>
@@ -1354,7 +1488,7 @@
           <a:p>
             <a:fld id="{5BCAD085-E8A6-8845-BD4E-CB4CCA059FC4}" type="datetimeFigureOut">
               <a:rPr lang="en-US" smtClean="0"/>
-              <a:t>1/27/13</a:t>
+              <a:t>9/17/2026</a:t>
             </a:fld>
             <a:endParaRPr lang="en-US"/>
           </a:p>
@@ -1396,7 +1530,7 @@
           <a:p>
             <a:fld id="{C1FF6DA9-008F-8B48-92A6-B652298478BF}" type="slidenum">
               <a:rPr lang="en-US" smtClean="0"/>
-              <a:t>‹#›</a:t>
+              <a:t>‹nº›</a:t>
             </a:fld>
             <a:endParaRPr lang="en-US"/>
           </a:p>
@@ -1452,10 +1586,9 @@
           </a:lstStyle>
           <a:p>
             <a:r>
-              <a:rPr lang="en-US" smtClean="0"/>
+              <a:rPr lang="en-US"/>
               <a:t>Click to edit Master title style</a:t>
             </a:r>
-            <a:endParaRPr lang="en-US"/>
           </a:p>
         </p:txBody>
       </p:sp>
@@ -1518,7 +1651,7 @@
           <a:p>
             <a:pPr lvl="0"/>
             <a:r>
-              <a:rPr lang="en-US" smtClean="0"/>
+              <a:rPr lang="en-US"/>
               <a:t>Click to edit Master text styles</a:t>
             </a:r>
           </a:p>
@@ -1574,38 +1707,37 @@
           <a:p>
             <a:pPr lvl="0"/>
             <a:r>
-              <a:rPr lang="en-US" smtClean="0"/>
+              <a:rPr lang="en-US"/>
               <a:t>Click to edit Master text styles</a:t>
             </a:r>
           </a:p>
           <a:p>
             <a:pPr lvl="1"/>
             <a:r>
-              <a:rPr lang="en-US" smtClean="0"/>
+              <a:rPr lang="en-US"/>
               <a:t>Second level</a:t>
             </a:r>
           </a:p>
           <a:p>
             <a:pPr lvl="2"/>
             <a:r>
-              <a:rPr lang="en-US" smtClean="0"/>
+              <a:rPr lang="en-US"/>
               <a:t>Third level</a:t>
             </a:r>
           </a:p>
           <a:p>
             <a:pPr lvl="3"/>
             <a:r>
-              <a:rPr lang="en-US" smtClean="0"/>
+              <a:rPr lang="en-US"/>
               <a:t>Fourth level</a:t>
             </a:r>
           </a:p>
           <a:p>
             <a:pPr lvl="4"/>
             <a:r>
-              <a:rPr lang="en-US" smtClean="0"/>
+              <a:rPr lang="en-US"/>
               <a:t>Fifth level</a:t>
             </a:r>
-            <a:endParaRPr lang="en-US"/>
           </a:p>
         </p:txBody>
       </p:sp>
@@ -1668,7 +1800,7 @@
           <a:p>
             <a:pPr lvl="0"/>
             <a:r>
-              <a:rPr lang="en-US" smtClean="0"/>
+              <a:rPr lang="en-US"/>
               <a:t>Click to edit Master text styles</a:t>
             </a:r>
           </a:p>
@@ -1724,38 +1856,37 @@
           <a:p>
             <a:pPr lvl="0"/>
             <a:r>
-              <a:rPr lang="en-US" smtClean="0"/>
+              <a:rPr lang="en-US"/>
               <a:t>Click to edit Master text styles</a:t>
             </a:r>
           </a:p>
           <a:p>
             <a:pPr lvl="1"/>
             <a:r>
-              <a:rPr lang="en-US" smtClean="0"/>
+              <a:rPr lang="en-US"/>
               <a:t>Second level</a:t>
             </a:r>
           </a:p>
           <a:p>
             <a:pPr lvl="2"/>
             <a:r>
-              <a:rPr lang="en-US" smtClean="0"/>
+              <a:rPr lang="en-US"/>
               <a:t>Third level</a:t>
             </a:r>
           </a:p>
           <a:p>
             <a:pPr lvl="3"/>
             <a:r>
-              <a:rPr lang="en-US" smtClean="0"/>
+              <a:rPr lang="en-US"/>
               <a:t>Fourth level</a:t>
             </a:r>
           </a:p>
           <a:p>
             <a:pPr lvl="4"/>
             <a:r>
-              <a:rPr lang="en-US" smtClean="0"/>
+              <a:rPr lang="en-US"/>
               <a:t>Fifth level</a:t>
             </a:r>
-            <a:endParaRPr lang="en-US"/>
           </a:p>
         </p:txBody>
       </p:sp>
@@ -1776,7 +1907,7 @@
           <a:p>
             <a:fld id="{5BCAD085-E8A6-8845-BD4E-CB4CCA059FC4}" type="datetimeFigureOut">
               <a:rPr lang="en-US" smtClean="0"/>
-              <a:t>1/27/13</a:t>
+              <a:t>9/17/2026</a:t>
             </a:fld>
             <a:endParaRPr lang="en-US"/>
           </a:p>
@@ -1818,7 +1949,7 @@
           <a:p>
             <a:fld id="{C1FF6DA9-008F-8B48-92A6-B652298478BF}" type="slidenum">
               <a:rPr lang="en-US" smtClean="0"/>
-              <a:t>‹#›</a:t>
+              <a:t>‹nº›</a:t>
             </a:fld>
             <a:endParaRPr lang="en-US"/>
           </a:p>
@@ -1870,10 +2001,9 @@
           <a:lstStyle/>
           <a:p>
             <a:r>
-              <a:rPr lang="en-US" smtClean="0"/>
+              <a:rPr lang="en-US"/>
               <a:t>Click to edit Master title style</a:t>
             </a:r>
-            <a:endParaRPr lang="en-US"/>
           </a:p>
         </p:txBody>
       </p:sp>
@@ -1894,7 +2024,7 @@
           <a:p>
             <a:fld id="{5BCAD085-E8A6-8845-BD4E-CB4CCA059FC4}" type="datetimeFigureOut">
               <a:rPr lang="en-US" smtClean="0"/>
-              <a:t>1/27/13</a:t>
+              <a:t>9/17/2026</a:t>
             </a:fld>
             <a:endParaRPr lang="en-US"/>
           </a:p>
@@ -1936,7 +2066,7 @@
           <a:p>
             <a:fld id="{C1FF6DA9-008F-8B48-92A6-B652298478BF}" type="slidenum">
               <a:rPr lang="en-US" smtClean="0"/>
-              <a:t>‹#›</a:t>
+              <a:t>‹nº›</a:t>
             </a:fld>
             <a:endParaRPr lang="en-US"/>
           </a:p>
@@ -1989,7 +2119,7 @@
           <a:p>
             <a:fld id="{5BCAD085-E8A6-8845-BD4E-CB4CCA059FC4}" type="datetimeFigureOut">
               <a:rPr lang="en-US" smtClean="0"/>
-              <a:t>1/27/13</a:t>
+              <a:t>9/17/2026</a:t>
             </a:fld>
             <a:endParaRPr lang="en-US"/>
           </a:p>
@@ -2031,7 +2161,7 @@
           <a:p>
             <a:fld id="{C1FF6DA9-008F-8B48-92A6-B652298478BF}" type="slidenum">
               <a:rPr lang="en-US" smtClean="0"/>
-              <a:t>‹#›</a:t>
+              <a:t>‹nº›</a:t>
             </a:fld>
             <a:endParaRPr lang="en-US"/>
           </a:p>
@@ -2092,10 +2222,9 @@
           </a:lstStyle>
           <a:p>
             <a:r>
-              <a:rPr lang="en-US" smtClean="0"/>
+              <a:rPr lang="en-US"/>
               <a:t>Click to edit Master title style</a:t>
             </a:r>
-            <a:endParaRPr lang="en-US"/>
           </a:p>
         </p:txBody>
       </p:sp>
@@ -2149,38 +2278,37 @@
           <a:p>
             <a:pPr lvl="0"/>
             <a:r>
-              <a:rPr lang="en-US" smtClean="0"/>
+              <a:rPr lang="en-US"/>
               <a:t>Click to edit Master text styles</a:t>
             </a:r>
           </a:p>
           <a:p>
             <a:pPr lvl="1"/>
             <a:r>
-              <a:rPr lang="en-US" smtClean="0"/>
+              <a:rPr lang="en-US"/>
               <a:t>Second level</a:t>
             </a:r>
           </a:p>
           <a:p>
             <a:pPr lvl="2"/>
             <a:r>
-              <a:rPr lang="en-US" smtClean="0"/>
+              <a:rPr lang="en-US"/>
               <a:t>Third level</a:t>
             </a:r>
           </a:p>
           <a:p>
             <a:pPr lvl="3"/>
             <a:r>
-              <a:rPr lang="en-US" smtClean="0"/>
+              <a:rPr lang="en-US"/>
               <a:t>Fourth level</a:t>
             </a:r>
           </a:p>
           <a:p>
             <a:pPr lvl="4"/>
             <a:r>
-              <a:rPr lang="en-US" smtClean="0"/>
+              <a:rPr lang="en-US"/>
               <a:t>Fifth level</a:t>
             </a:r>
-            <a:endParaRPr lang="en-US"/>
           </a:p>
         </p:txBody>
       </p:sp>
@@ -2243,7 +2371,7 @@
           <a:p>
             <a:pPr lvl="0"/>
             <a:r>
-              <a:rPr lang="en-US" smtClean="0"/>
+              <a:rPr lang="en-US"/>
               <a:t>Click to edit Master text styles</a:t>
             </a:r>
           </a:p>
@@ -2266,7 +2394,7 @@
           <a:p>
             <a:fld id="{5BCAD085-E8A6-8845-BD4E-CB4CCA059FC4}" type="datetimeFigureOut">
               <a:rPr lang="en-US" smtClean="0"/>
-              <a:t>1/27/13</a:t>
+              <a:t>9/17/2026</a:t>
             </a:fld>
             <a:endParaRPr lang="en-US"/>
           </a:p>
@@ -2308,7 +2436,7 @@
           <a:p>
             <a:fld id="{C1FF6DA9-008F-8B48-92A6-B652298478BF}" type="slidenum">
               <a:rPr lang="en-US" smtClean="0"/>
-              <a:t>‹#›</a:t>
+              <a:t>‹nº›</a:t>
             </a:fld>
             <a:endParaRPr lang="en-US"/>
           </a:p>
@@ -2369,10 +2497,9 @@
           </a:lstStyle>
           <a:p>
             <a:r>
-              <a:rPr lang="en-US" smtClean="0"/>
+              <a:rPr lang="en-US"/>
               <a:t>Click to edit Master title style</a:t>
             </a:r>
-            <a:endParaRPr lang="en-US"/>
           </a:p>
         </p:txBody>
       </p:sp>
@@ -2496,7 +2623,7 @@
           <a:p>
             <a:pPr lvl="0"/>
             <a:r>
-              <a:rPr lang="en-US" smtClean="0"/>
+              <a:rPr lang="en-US"/>
               <a:t>Click to edit Master text styles</a:t>
             </a:r>
           </a:p>
@@ -2519,7 +2646,7 @@
           <a:p>
             <a:fld id="{5BCAD085-E8A6-8845-BD4E-CB4CCA059FC4}" type="datetimeFigureOut">
               <a:rPr lang="en-US" smtClean="0"/>
-              <a:t>1/27/13</a:t>
+              <a:t>9/17/2026</a:t>
             </a:fld>
             <a:endParaRPr lang="en-US"/>
           </a:p>
@@ -2561,7 +2688,7 @@
           <a:p>
             <a:fld id="{C1FF6DA9-008F-8B48-92A6-B652298478BF}" type="slidenum">
               <a:rPr lang="en-US" smtClean="0"/>
-              <a:t>‹#›</a:t>
+              <a:t>‹nº›</a:t>
             </a:fld>
             <a:endParaRPr lang="en-US"/>
           </a:p>
@@ -2628,10 +2755,9 @@
           <a:lstStyle/>
           <a:p>
             <a:r>
-              <a:rPr lang="en-US" smtClean="0"/>
+              <a:rPr lang="en-US"/>
               <a:t>Click to edit Master title style</a:t>
             </a:r>
-            <a:endParaRPr lang="en-US"/>
           </a:p>
         </p:txBody>
       </p:sp>
@@ -2662,38 +2788,37 @@
           <a:p>
             <a:pPr lvl="0"/>
             <a:r>
-              <a:rPr lang="en-US" smtClean="0"/>
+              <a:rPr lang="en-US"/>
               <a:t>Click to edit Master text styles</a:t>
             </a:r>
           </a:p>
           <a:p>
             <a:pPr lvl="1"/>
             <a:r>
-              <a:rPr lang="en-US" smtClean="0"/>
+              <a:rPr lang="en-US"/>
               <a:t>Second level</a:t>
             </a:r>
           </a:p>
           <a:p>
             <a:pPr lvl="2"/>
             <a:r>
-              <a:rPr lang="en-US" smtClean="0"/>
+              <a:rPr lang="en-US"/>
               <a:t>Third level</a:t>
             </a:r>
           </a:p>
           <a:p>
             <a:pPr lvl="3"/>
             <a:r>
-              <a:rPr lang="en-US" smtClean="0"/>
+              <a:rPr lang="en-US"/>
               <a:t>Fourth level</a:t>
             </a:r>
           </a:p>
           <a:p>
             <a:pPr lvl="4"/>
             <a:r>
-              <a:rPr lang="en-US" smtClean="0"/>
+              <a:rPr lang="en-US"/>
               <a:t>Fifth level</a:t>
             </a:r>
-            <a:endParaRPr lang="en-US"/>
           </a:p>
         </p:txBody>
       </p:sp>
@@ -2732,7 +2857,7 @@
           <a:p>
             <a:fld id="{5BCAD085-E8A6-8845-BD4E-CB4CCA059FC4}" type="datetimeFigureOut">
               <a:rPr lang="en-US" smtClean="0"/>
-              <a:t>1/27/13</a:t>
+              <a:t>9/17/2026</a:t>
             </a:fld>
             <a:endParaRPr lang="en-US"/>
           </a:p>
@@ -2810,7 +2935,7 @@
           <a:p>
             <a:fld id="{C1FF6DA9-008F-8B48-92A6-B652298478BF}" type="slidenum">
               <a:rPr lang="en-US" smtClean="0"/>
-              <a:t>‹#›</a:t>
+              <a:t>‹nº›</a:t>
             </a:fld>
             <a:endParaRPr lang="en-US"/>
           </a:p>
@@ -3091,7 +3216,7 @@
 </file>
 
 <file path=ppt/slides/slide1.xml><?xml version="1.0" encoding="utf-8"?>
-<p:sld xmlns:a="http://schemas.openxmlformats.org/drawingml/2006/main" xmlns:p="http://schemas.openxmlformats.org/presentationml/2006/main" xmlns:r="http://schemas.openxmlformats.org/officeDocument/2006/relationships">
+<p:sld xmlns:a="http://schemas.openxmlformats.org/drawingml/2006/main" xmlns:r="http://schemas.openxmlformats.org/officeDocument/2006/relationships" xmlns:p="http://schemas.openxmlformats.org/presentationml/2006/main">
   <p:cSld>
     <p:spTree>
       <p:nvGrpSpPr>
@@ -3099,7 +3224,14 @@
         <p:cNvGrpSpPr/>
         <p:nvPr/>
       </p:nvGrpSpPr>
-      <p:grpSpPr/>
+      <p:grpSpPr>
+        <a:xfrm>
+          <a:off x="0" y="0"/>
+          <a:ext cx="0" cy="0"/>
+          <a:chOff x="0" y="0"/>
+          <a:chExt cx="0" cy="0"/>
+        </a:xfrm>
+      </p:grpSpPr>
       <p:sp>
         <p:nvSpPr>
           <p:cNvPr id="2" name="Rectangle 1"/>
@@ -3140,6 +3272,7 @@
           <a:lstStyle/>
           <a:p>
             <a:pPr algn="ctr"/>
+            <a:endParaRPr/>
           </a:p>
         </p:txBody>
       </p:sp>
@@ -3152,7 +3285,7 @@
         <p:spPr>
           <a:xfrm>
             <a:off x="822960" y="274320"/>
-            <a:ext cx="6858000" cy="1508760"/>
+            <a:ext cx="6858000" cy="1508105"/>
           </a:xfrm>
           <a:prstGeom prst="rect">
             <a:avLst/>
@@ -3165,7 +3298,7 @@
           </a:bodyPr>
           <a:lstStyle/>
           <a:p>
-            <a:pPr>
+            <a:pPr algn="just">
               <a:defRPr sz="1150" b="1">
                 <a:solidFill>
                   <a:srgbClr val="FFFFFF"/>
@@ -3174,11 +3307,16 @@
               </a:defRPr>
             </a:pPr>
             <a:r>
+              <a:rPr sz="1400" dirty="0">
+                <a:solidFill>
+                  <a:schemeClr val="bg1"/>
+                </a:solidFill>
+              </a:rPr>
               <a:t>UNIVERSIDADE ESTADUAL DO MARANHÃO – UEMA</a:t>
             </a:r>
           </a:p>
           <a:p>
-            <a:pPr>
+            <a:pPr algn="just">
               <a:defRPr sz="1050" b="1">
                 <a:solidFill>
                   <a:srgbClr val="4ADE80"/>
@@ -3187,11 +3325,16 @@
               </a:defRPr>
             </a:pPr>
             <a:r>
+              <a:rPr sz="1400" dirty="0">
+                <a:solidFill>
+                  <a:schemeClr val="bg1"/>
+                </a:solidFill>
+              </a:rPr>
               <a:t>NÚCLEO DE TECNOLOGIAS PARA EDUCAÇÃO – UEMANET</a:t>
             </a:r>
           </a:p>
           <a:p>
-            <a:pPr>
+            <a:pPr algn="just">
               <a:defRPr sz="950" b="1">
                 <a:solidFill>
                   <a:srgbClr val="E2E8F0"/>
@@ -3200,11 +3343,16 @@
               </a:defRPr>
             </a:pPr>
             <a:r>
+              <a:rPr sz="1400" dirty="0">
+                <a:solidFill>
+                  <a:schemeClr val="bg1"/>
+                </a:solidFill>
+              </a:rPr>
               <a:t>CURSO SUPERIOR DE TECNOLOGIA EM ANÁLISE E DESENVOLVIMENTO DE SISTEMAS</a:t>
             </a:r>
           </a:p>
           <a:p>
-            <a:pPr>
+            <a:pPr algn="just">
               <a:defRPr sz="900" b="1">
                 <a:solidFill>
                   <a:srgbClr val="CBD5E1"/>
@@ -3213,11 +3361,16 @@
               </a:defRPr>
             </a:pPr>
             <a:r>
+              <a:rPr sz="1400" dirty="0">
+                <a:solidFill>
+                  <a:schemeClr val="bg1"/>
+                </a:solidFill>
+              </a:rPr>
               <a:t>DISCIPLINA: DESENVOLVIMENTO WEB</a:t>
             </a:r>
           </a:p>
           <a:p>
-            <a:pPr>
+            <a:pPr algn="just">
               <a:defRPr sz="900" b="1">
                 <a:solidFill>
                   <a:srgbClr val="CBD5E1"/>
@@ -3226,11 +3379,16 @@
               </a:defRPr>
             </a:pPr>
             <a:r>
+              <a:rPr sz="1400" dirty="0">
+                <a:solidFill>
+                  <a:schemeClr val="bg1"/>
+                </a:solidFill>
+              </a:rPr>
               <a:t>DOCENTE: PROF. EDILSON CARLOS SILVA LIMA</a:t>
             </a:r>
           </a:p>
           <a:p>
-            <a:pPr>
+            <a:pPr algn="just">
               <a:defRPr sz="900" b="1">
                 <a:solidFill>
                   <a:srgbClr val="CBD5E1"/>
@@ -3239,6 +3397,11 @@
               </a:defRPr>
             </a:pPr>
             <a:r>
+              <a:rPr sz="1400" dirty="0">
+                <a:solidFill>
+                  <a:schemeClr val="bg1"/>
+                </a:solidFill>
+              </a:rPr>
               <a:t>TUTORA: PROF.ª SIMONE</a:t>
             </a:r>
           </a:p>
@@ -3284,6 +3447,7 @@
           <a:lstStyle/>
           <a:p>
             <a:pPr algn="ctr"/>
+            <a:endParaRPr/>
           </a:p>
         </p:txBody>
       </p:sp>
@@ -3325,7 +3489,7 @@
           </a:fontRef>
         </p:style>
         <p:txBody>
-          <a:bodyPr rtlCol="0" anchor="ctr" tIns="54864"/>
+          <a:bodyPr tIns="54864" rtlCol="0" anchor="ctr"/>
           <a:lstStyle/>
           <a:p>
             <a:pPr algn="ctr">
@@ -3337,7 +3501,8 @@
               </a:defRPr>
             </a:pPr>
             <a:r>
-              <a:t>TECNOLOGIA A SERVIÇO DA VIDA  •  ODS 2 &amp; ODS 11</a:t>
+              <a:rPr lang="pt-BR" dirty="0"/>
+              <a:t>TECNOLOGIA A SERVIÇO DA VIDA  •  ODS 2</a:t>
             </a:r>
           </a:p>
         </p:txBody>
@@ -3482,7 +3647,7 @@
           </a:fontRef>
         </p:style>
         <p:txBody>
-          <a:bodyPr rtlCol="0" anchor="ctr" tIns="164592"/>
+          <a:bodyPr tIns="164592" rtlCol="0" anchor="ctr"/>
           <a:lstStyle/>
           <a:p>
             <a:pPr algn="ctr">
@@ -3534,7 +3699,7 @@
 </file>
 
 <file path=ppt/slides/slide10.xml><?xml version="1.0" encoding="utf-8"?>
-<p:sld xmlns:a="http://schemas.openxmlformats.org/drawingml/2006/main" xmlns:p="http://schemas.openxmlformats.org/presentationml/2006/main" xmlns:r="http://schemas.openxmlformats.org/officeDocument/2006/relationships">
+<p:sld xmlns:a="http://schemas.openxmlformats.org/drawingml/2006/main" xmlns:r="http://schemas.openxmlformats.org/officeDocument/2006/relationships" xmlns:p="http://schemas.openxmlformats.org/presentationml/2006/main">
   <p:cSld>
     <p:spTree>
       <p:nvGrpSpPr>
@@ -3542,7 +3707,14 @@
         <p:cNvGrpSpPr/>
         <p:nvPr/>
       </p:nvGrpSpPr>
-      <p:grpSpPr/>
+      <p:grpSpPr>
+        <a:xfrm>
+          <a:off x="0" y="0"/>
+          <a:ext cx="0" cy="0"/>
+          <a:chOff x="0" y="0"/>
+          <a:chExt cx="0" cy="0"/>
+        </a:xfrm>
+      </p:grpSpPr>
       <p:sp>
         <p:nvSpPr>
           <p:cNvPr id="2" name="TextBox 1"/>
@@ -3617,7 +3789,7 @@
           </a:fontRef>
         </p:style>
         <p:txBody>
-          <a:bodyPr rtlCol="0" anchor="ctr" tIns="54864"/>
+          <a:bodyPr tIns="54864" rtlCol="0" anchor="ctr"/>
           <a:lstStyle/>
           <a:p>
             <a:pPr algn="ctr">
@@ -3674,6 +3846,7 @@
           <a:lstStyle/>
           <a:p>
             <a:pPr algn="ctr"/>
+            <a:endParaRPr/>
           </a:p>
         </p:txBody>
       </p:sp>
@@ -3717,6 +3890,7 @@
           <a:lstStyle/>
           <a:p>
             <a:pPr algn="ctr"/>
+            <a:endParaRPr/>
           </a:p>
         </p:txBody>
       </p:sp>
@@ -3834,6 +4008,7 @@
           <a:lstStyle/>
           <a:p>
             <a:pPr algn="ctr"/>
+            <a:endParaRPr/>
           </a:p>
         </p:txBody>
       </p:sp>
@@ -3975,6 +4150,7 @@
           <a:lstStyle/>
           <a:p>
             <a:pPr algn="ctr"/>
+            <a:endParaRPr/>
           </a:p>
         </p:txBody>
       </p:sp>
@@ -4083,7 +4259,7 @@
 </file>
 
 <file path=ppt/slides/slide11.xml><?xml version="1.0" encoding="utf-8"?>
-<p:sld xmlns:a="http://schemas.openxmlformats.org/drawingml/2006/main" xmlns:p="http://schemas.openxmlformats.org/presentationml/2006/main" xmlns:r="http://schemas.openxmlformats.org/officeDocument/2006/relationships">
+<p:sld xmlns:a="http://schemas.openxmlformats.org/drawingml/2006/main" xmlns:r="http://schemas.openxmlformats.org/officeDocument/2006/relationships" xmlns:p="http://schemas.openxmlformats.org/presentationml/2006/main">
   <p:cSld>
     <p:spTree>
       <p:nvGrpSpPr>
@@ -4091,7 +4267,14 @@
         <p:cNvGrpSpPr/>
         <p:nvPr/>
       </p:nvGrpSpPr>
-      <p:grpSpPr/>
+      <p:grpSpPr>
+        <a:xfrm>
+          <a:off x="0" y="0"/>
+          <a:ext cx="0" cy="0"/>
+          <a:chOff x="0" y="0"/>
+          <a:chExt cx="0" cy="0"/>
+        </a:xfrm>
+      </p:grpSpPr>
       <p:sp>
         <p:nvSpPr>
           <p:cNvPr id="2" name="TextBox 1"/>
@@ -4166,7 +4349,7 @@
           </a:fontRef>
         </p:style>
         <p:txBody>
-          <a:bodyPr rtlCol="0" anchor="ctr" tIns="54864"/>
+          <a:bodyPr tIns="54864" rtlCol="0" anchor="ctr"/>
           <a:lstStyle/>
           <a:p>
             <a:pPr algn="ctr">
@@ -4223,6 +4406,7 @@
           <a:lstStyle/>
           <a:p>
             <a:pPr algn="ctr"/>
+            <a:endParaRPr/>
           </a:p>
         </p:txBody>
       </p:sp>
@@ -4266,6 +4450,7 @@
           <a:lstStyle/>
           <a:p>
             <a:pPr algn="ctr"/>
+            <a:endParaRPr/>
           </a:p>
         </p:txBody>
       </p:sp>
@@ -4383,6 +4568,7 @@
           <a:lstStyle/>
           <a:p>
             <a:pPr algn="ctr"/>
+            <a:endParaRPr/>
           </a:p>
         </p:txBody>
       </p:sp>
@@ -4524,6 +4710,7 @@
           <a:lstStyle/>
           <a:p>
             <a:pPr algn="ctr"/>
+            <a:endParaRPr/>
           </a:p>
         </p:txBody>
       </p:sp>
@@ -4632,7 +4819,7 @@
 </file>
 
 <file path=ppt/slides/slide12.xml><?xml version="1.0" encoding="utf-8"?>
-<p:sld xmlns:a="http://schemas.openxmlformats.org/drawingml/2006/main" xmlns:p="http://schemas.openxmlformats.org/presentationml/2006/main" xmlns:r="http://schemas.openxmlformats.org/officeDocument/2006/relationships">
+<p:sld xmlns:a="http://schemas.openxmlformats.org/drawingml/2006/main" xmlns:r="http://schemas.openxmlformats.org/officeDocument/2006/relationships" xmlns:p="http://schemas.openxmlformats.org/presentationml/2006/main">
   <p:cSld>
     <p:spTree>
       <p:nvGrpSpPr>
@@ -4640,7 +4827,14 @@
         <p:cNvGrpSpPr/>
         <p:nvPr/>
       </p:nvGrpSpPr>
-      <p:grpSpPr/>
+      <p:grpSpPr>
+        <a:xfrm>
+          <a:off x="0" y="0"/>
+          <a:ext cx="0" cy="0"/>
+          <a:chOff x="0" y="0"/>
+          <a:chExt cx="0" cy="0"/>
+        </a:xfrm>
+      </p:grpSpPr>
       <p:sp>
         <p:nvSpPr>
           <p:cNvPr id="2" name="TextBox 1"/>
@@ -4715,7 +4909,7 @@
           </a:fontRef>
         </p:style>
         <p:txBody>
-          <a:bodyPr rtlCol="0" anchor="ctr" tIns="54864"/>
+          <a:bodyPr tIns="54864" rtlCol="0" anchor="ctr"/>
           <a:lstStyle/>
           <a:p>
             <a:pPr algn="ctr">
@@ -4772,6 +4966,7 @@
           <a:lstStyle/>
           <a:p>
             <a:pPr algn="ctr"/>
+            <a:endParaRPr/>
           </a:p>
         </p:txBody>
       </p:sp>
@@ -4815,6 +5010,7 @@
           <a:lstStyle/>
           <a:p>
             <a:pPr algn="ctr"/>
+            <a:endParaRPr/>
           </a:p>
         </p:txBody>
       </p:sp>
@@ -4932,6 +5128,7 @@
           <a:lstStyle/>
           <a:p>
             <a:pPr algn="ctr"/>
+            <a:endParaRPr/>
           </a:p>
         </p:txBody>
       </p:sp>
@@ -5122,6 +5319,7 @@
           <a:lstStyle/>
           <a:p>
             <a:pPr algn="ctr"/>
+            <a:endParaRPr/>
           </a:p>
         </p:txBody>
       </p:sp>
@@ -5165,6 +5363,7 @@
           <a:lstStyle/>
           <a:p>
             <a:pPr algn="ctr"/>
+            <a:endParaRPr/>
           </a:p>
         </p:txBody>
       </p:sp>
@@ -5259,6 +5458,7 @@
           <a:lstStyle/>
           <a:p>
             <a:pPr algn="ctr"/>
+            <a:endParaRPr/>
           </a:p>
         </p:txBody>
       </p:sp>
@@ -5302,6 +5502,7 @@
           <a:lstStyle/>
           <a:p>
             <a:pPr algn="ctr"/>
+            <a:endParaRPr/>
           </a:p>
         </p:txBody>
       </p:sp>
@@ -5396,6 +5597,7 @@
           <a:lstStyle/>
           <a:p>
             <a:pPr algn="ctr"/>
+            <a:endParaRPr/>
           </a:p>
         </p:txBody>
       </p:sp>
@@ -5439,6 +5641,7 @@
           <a:lstStyle/>
           <a:p>
             <a:pPr algn="ctr"/>
+            <a:endParaRPr/>
           </a:p>
         </p:txBody>
       </p:sp>
@@ -5533,6 +5736,7 @@
           <a:lstStyle/>
           <a:p>
             <a:pPr algn="ctr"/>
+            <a:endParaRPr/>
           </a:p>
         </p:txBody>
       </p:sp>
@@ -5576,6 +5780,7 @@
           <a:lstStyle/>
           <a:p>
             <a:pPr algn="ctr"/>
+            <a:endParaRPr/>
           </a:p>
         </p:txBody>
       </p:sp>
@@ -5637,7 +5842,7 @@
 </file>
 
 <file path=ppt/slides/slide13.xml><?xml version="1.0" encoding="utf-8"?>
-<p:sld xmlns:a="http://schemas.openxmlformats.org/drawingml/2006/main" xmlns:p="http://schemas.openxmlformats.org/presentationml/2006/main" xmlns:r="http://schemas.openxmlformats.org/officeDocument/2006/relationships">
+<p:sld xmlns:a="http://schemas.openxmlformats.org/drawingml/2006/main" xmlns:r="http://schemas.openxmlformats.org/officeDocument/2006/relationships" xmlns:p="http://schemas.openxmlformats.org/presentationml/2006/main">
   <p:cSld>
     <p:spTree>
       <p:nvGrpSpPr>
@@ -5645,7 +5850,14 @@
         <p:cNvGrpSpPr/>
         <p:nvPr/>
       </p:nvGrpSpPr>
-      <p:grpSpPr/>
+      <p:grpSpPr>
+        <a:xfrm>
+          <a:off x="0" y="0"/>
+          <a:ext cx="0" cy="0"/>
+          <a:chOff x="0" y="0"/>
+          <a:chExt cx="0" cy="0"/>
+        </a:xfrm>
+      </p:grpSpPr>
       <p:sp>
         <p:nvSpPr>
           <p:cNvPr id="2" name="TextBox 1"/>
@@ -5720,7 +5932,7 @@
           </a:fontRef>
         </p:style>
         <p:txBody>
-          <a:bodyPr rtlCol="0" anchor="ctr" tIns="54864"/>
+          <a:bodyPr tIns="54864" rtlCol="0" anchor="ctr"/>
           <a:lstStyle/>
           <a:p>
             <a:pPr algn="ctr">
@@ -5777,6 +5989,7 @@
           <a:lstStyle/>
           <a:p>
             <a:pPr algn="ctr"/>
+            <a:endParaRPr/>
           </a:p>
         </p:txBody>
       </p:sp>
@@ -5820,6 +6033,7 @@
           <a:lstStyle/>
           <a:p>
             <a:pPr algn="ctr"/>
+            <a:endParaRPr/>
           </a:p>
         </p:txBody>
       </p:sp>
@@ -5937,6 +6151,7 @@
           <a:lstStyle/>
           <a:p>
             <a:pPr algn="ctr"/>
+            <a:endParaRPr/>
           </a:p>
         </p:txBody>
       </p:sp>
@@ -5980,6 +6195,7 @@
           <a:lstStyle/>
           <a:p>
             <a:pPr algn="ctr"/>
+            <a:endParaRPr/>
           </a:p>
         </p:txBody>
       </p:sp>
@@ -6019,14 +6235,6 @@
           </a:p>
           <a:p>
             <a:br/>
-            <a:pPr algn="just">
-              <a:defRPr sz="1150">
-                <a:solidFill>
-                  <a:srgbClr val="1E293B"/>
-                </a:solidFill>
-                <a:latin typeface="Segoe UI"/>
-              </a:defRPr>
-            </a:pPr>
             <a:r>
               <a:t>Aprendemos que um framework moderno como o React ou uma API do governo só têm valor quando resolvem um problema humano real. O código ganha vida quando serve para combater a fome e valorizar a nossa terra.</a:t>
             </a:r>
@@ -6075,6 +6283,7 @@
           <a:lstStyle/>
           <a:p>
             <a:pPr algn="ctr"/>
+            <a:endParaRPr/>
           </a:p>
         </p:txBody>
       </p:sp>
@@ -6118,6 +6327,7 @@
           <a:lstStyle/>
           <a:p>
             <a:pPr algn="ctr"/>
+            <a:endParaRPr/>
           </a:p>
         </p:txBody>
       </p:sp>
@@ -6157,14 +6367,6 @@
           </a:p>
           <a:p>
             <a:br/>
-            <a:pPr algn="just">
-              <a:defRPr sz="1150">
-                <a:solidFill>
-                  <a:srgbClr val="1E293B"/>
-                </a:solidFill>
-                <a:latin typeface="Segoe UI"/>
-              </a:defRPr>
-            </a:pPr>
             <a:r>
               <a:t>A equipe conclui esta etapa com o sistema no ar, dados reais integrados e muito orgulho do que construímos. Estamos preparados e entusiasmados para a apresentação presencial no polo de Timbiras!</a:t>
             </a:r>
@@ -6213,6 +6415,7 @@
           <a:lstStyle/>
           <a:p>
             <a:pPr algn="ctr"/>
+            <a:endParaRPr/>
           </a:p>
         </p:txBody>
       </p:sp>
@@ -6252,84 +6455,36 @@
           </a:p>
           <a:p>
             <a:br/>
-            <a:pPr algn="just">
-              <a:defRPr sz="900">
-                <a:solidFill>
-                  <a:srgbClr val="64748B"/>
-                </a:solidFill>
-                <a:latin typeface="Segoe UI"/>
-              </a:defRPr>
-            </a:pPr>
             <a:r>
               <a:t>• BRASIL. Instituto Brasileiro de Geografia e Estatística (IBGE). API de Serviços de Dados: Localidades. Rio de Janeiro: IBGE, 2026. Disponível em: &lt;https://servicodados.ibge.gov.br/api/docs/localidades&gt;. Acesso em: 17 set. 2026.</a:t>
             </a:r>
           </a:p>
           <a:p>
             <a:br/>
-            <a:pPr algn="just">
-              <a:defRPr sz="900">
-                <a:solidFill>
-                  <a:srgbClr val="64748B"/>
-                </a:solidFill>
-                <a:latin typeface="Segoe UI"/>
-              </a:defRPr>
-            </a:pPr>
             <a:r>
               <a:t>• LENNON, John. Imagine. In: Imagine. Produção: John Lennon, Yoko Ono, Phil Spector. Ascot Sound Studios: Apple Records, 1971. 1 faixa musical (3 min 3 s). Uso pedagógico e cultural.</a:t>
             </a:r>
           </a:p>
           <a:p>
             <a:br/>
-            <a:pPr algn="just">
-              <a:defRPr sz="900">
-                <a:solidFill>
-                  <a:srgbClr val="64748B"/>
-                </a:solidFill>
-                <a:latin typeface="Segoe UI"/>
-              </a:defRPr>
-            </a:pPr>
             <a:r>
               <a:t>• MDN WEB DOCS. Fetch API. Mozilla Developer Network, 2026. Disponível em: &lt;https://developer.mozilla.org/pt-BR/docs/Web/API/Fetch_API&gt;. Acesso em: 17 set. 2026.</a:t>
             </a:r>
           </a:p>
           <a:p>
             <a:br/>
-            <a:pPr algn="just">
-              <a:defRPr sz="900">
-                <a:solidFill>
-                  <a:srgbClr val="64748B"/>
-                </a:solidFill>
-                <a:latin typeface="Segoe UI"/>
-              </a:defRPr>
-            </a:pPr>
             <a:r>
               <a:t>• ORGANIZAÇÃO DAS NAÇÕES UNIDAS (ONU). Objetivo de Desenvolvimento Sustentável 2: Fome Zero e Agricultura Sustentável. Brasília: Nações Unidas Brasil, 2015. Disponível em: &lt;https://brasil.un.org/pt-br/sdgs/2&gt;. Acesso em: 17 set. 2026.</a:t>
             </a:r>
           </a:p>
           <a:p>
             <a:br/>
-            <a:pPr algn="just">
-              <a:defRPr sz="900">
-                <a:solidFill>
-                  <a:srgbClr val="64748B"/>
-                </a:solidFill>
-                <a:latin typeface="Segoe UI"/>
-              </a:defRPr>
-            </a:pPr>
             <a:r>
               <a:t>• REACT. React — A JavaScript library for building user interfaces. Versão 19. Meta Open Source, 2026. Disponível em: &lt;https://react.dev/&gt;. Acesso em: 17 set. 2026.</a:t>
             </a:r>
           </a:p>
           <a:p>
             <a:br/>
-            <a:pPr algn="just">
-              <a:defRPr sz="900">
-                <a:solidFill>
-                  <a:srgbClr val="64748B"/>
-                </a:solidFill>
-                <a:latin typeface="Segoe UI"/>
-              </a:defRPr>
-            </a:pPr>
             <a:r>
               <a:t>• VITE. Next Generation Frontend Tooling. Evan You &amp; Vite Team, 2026. Disponível em: &lt;https://vitejs.dev/&gt;. Acesso em: 17 set. 2026.</a:t>
             </a:r>
@@ -6345,7 +6500,7 @@
 </file>
 
 <file path=ppt/slides/slide2.xml><?xml version="1.0" encoding="utf-8"?>
-<p:sld xmlns:a="http://schemas.openxmlformats.org/drawingml/2006/main" xmlns:p="http://schemas.openxmlformats.org/presentationml/2006/main" xmlns:r="http://schemas.openxmlformats.org/officeDocument/2006/relationships">
+<p:sld xmlns:a="http://schemas.openxmlformats.org/drawingml/2006/main" xmlns:r="http://schemas.openxmlformats.org/officeDocument/2006/relationships" xmlns:p="http://schemas.openxmlformats.org/presentationml/2006/main">
   <p:cSld>
     <p:spTree>
       <p:nvGrpSpPr>
@@ -6353,7 +6508,14 @@
         <p:cNvGrpSpPr/>
         <p:nvPr/>
       </p:nvGrpSpPr>
-      <p:grpSpPr/>
+      <p:grpSpPr>
+        <a:xfrm>
+          <a:off x="0" y="0"/>
+          <a:ext cx="0" cy="0"/>
+          <a:chOff x="0" y="0"/>
+          <a:chExt cx="0" cy="0"/>
+        </a:xfrm>
+      </p:grpSpPr>
       <p:sp>
         <p:nvSpPr>
           <p:cNvPr id="2" name="TextBox 1"/>
@@ -6428,7 +6590,7 @@
           </a:fontRef>
         </p:style>
         <p:txBody>
-          <a:bodyPr rtlCol="0" anchor="ctr" tIns="54864"/>
+          <a:bodyPr tIns="54864" rtlCol="0" anchor="ctr"/>
           <a:lstStyle/>
           <a:p>
             <a:pPr algn="ctr">
@@ -6485,6 +6647,7 @@
           <a:lstStyle/>
           <a:p>
             <a:pPr algn="ctr"/>
+            <a:endParaRPr/>
           </a:p>
         </p:txBody>
       </p:sp>
@@ -6528,6 +6691,7 @@
           <a:lstStyle/>
           <a:p>
             <a:pPr algn="ctr"/>
+            <a:endParaRPr/>
           </a:p>
         </p:txBody>
       </p:sp>
@@ -6612,7 +6776,7 @@
         <p:spPr>
           <a:xfrm>
             <a:off x="731520" y="1234440"/>
-            <a:ext cx="5943600" cy="2377440"/>
+            <a:ext cx="5943600" cy="2139047"/>
           </a:xfrm>
           <a:prstGeom prst="rect">
             <a:avLst/>
@@ -6634,21 +6798,322 @@
               </a:defRPr>
             </a:pPr>
             <a:r>
-              <a:t>A fome não é um número abstrato: ela tem nome, endereço e rosto nos bairros e na zona rural da nossa cidade.</a:t>
-            </a:r>
-          </a:p>
-          <a:p>
-            <a:br/>
-            <a:pPr algn="just">
-              <a:defRPr sz="1250">
-                <a:solidFill>
-                  <a:srgbClr val="64748B"/>
-                </a:solidFill>
-                <a:latin typeface="Segoe UI"/>
-              </a:defRPr>
-            </a:pPr>
-            <a:r>
-              <a:t>Timbiras é uma cidade acolhedora, forte e trabalhadora, banhada pelas águas do Rio Itapecuru. Mas, como tantas cidades do interior do Maranhão, muitas famílias de bairros como Forquilha, Mutirão, Alto Fogoso, Olaria e povoados rurais distantes enfrentam dias difíceis para garantir o básico na mesa.</a:t>
+              <a:rPr dirty="0"/>
+              <a:t>A </a:t>
+            </a:r>
+            <a:r>
+              <a:rPr dirty="0" err="1"/>
+              <a:t>fome</a:t>
+            </a:r>
+            <a:r>
+              <a:rPr dirty="0"/>
+              <a:t> </a:t>
+            </a:r>
+            <a:r>
+              <a:rPr dirty="0" err="1"/>
+              <a:t>não</a:t>
+            </a:r>
+            <a:r>
+              <a:rPr dirty="0"/>
+              <a:t> é um </a:t>
+            </a:r>
+            <a:r>
+              <a:rPr dirty="0" err="1"/>
+              <a:t>número</a:t>
+            </a:r>
+            <a:r>
+              <a:rPr dirty="0"/>
+              <a:t> </a:t>
+            </a:r>
+            <a:r>
+              <a:rPr dirty="0" err="1"/>
+              <a:t>abstrato</a:t>
+            </a:r>
+            <a:r>
+              <a:rPr dirty="0"/>
+              <a:t>: </a:t>
+            </a:r>
+            <a:r>
+              <a:rPr dirty="0" err="1"/>
+              <a:t>ela</a:t>
+            </a:r>
+            <a:r>
+              <a:rPr dirty="0"/>
+              <a:t> </a:t>
+            </a:r>
+            <a:r>
+              <a:rPr dirty="0" err="1"/>
+              <a:t>tem</a:t>
+            </a:r>
+            <a:r>
+              <a:rPr dirty="0"/>
+              <a:t> </a:t>
+            </a:r>
+            <a:r>
+              <a:rPr dirty="0" err="1"/>
+              <a:t>nome</a:t>
+            </a:r>
+            <a:r>
+              <a:rPr dirty="0"/>
+              <a:t>, </a:t>
+            </a:r>
+            <a:r>
+              <a:rPr dirty="0" err="1"/>
+              <a:t>endereço</a:t>
+            </a:r>
+            <a:r>
+              <a:rPr dirty="0"/>
+              <a:t> e </a:t>
+            </a:r>
+            <a:r>
+              <a:rPr dirty="0" err="1"/>
+              <a:t>rosto</a:t>
+            </a:r>
+            <a:r>
+              <a:rPr dirty="0"/>
+              <a:t> </a:t>
+            </a:r>
+            <a:r>
+              <a:rPr dirty="0" err="1"/>
+              <a:t>nos</a:t>
+            </a:r>
+            <a:r>
+              <a:rPr dirty="0"/>
+              <a:t> bairros e </a:t>
+            </a:r>
+            <a:r>
+              <a:rPr dirty="0" err="1"/>
+              <a:t>na</a:t>
+            </a:r>
+            <a:r>
+              <a:rPr dirty="0"/>
+              <a:t> zona rural da </a:t>
+            </a:r>
+            <a:r>
+              <a:rPr dirty="0" err="1"/>
+              <a:t>nossa</a:t>
+            </a:r>
+            <a:r>
+              <a:rPr dirty="0"/>
+              <a:t> </a:t>
+            </a:r>
+            <a:r>
+              <a:rPr dirty="0" err="1"/>
+              <a:t>cidade</a:t>
+            </a:r>
+            <a:r>
+              <a:rPr dirty="0"/>
+              <a:t>.</a:t>
+            </a:r>
+          </a:p>
+          <a:p>
+            <a:pPr algn="just"/>
+            <a:br>
+              <a:rPr dirty="0"/>
+            </a:br>
+            <a:r>
+              <a:rPr dirty="0"/>
+              <a:t>Timbiras é </a:t>
+            </a:r>
+            <a:r>
+              <a:rPr dirty="0" err="1"/>
+              <a:t>uma</a:t>
+            </a:r>
+            <a:r>
+              <a:rPr dirty="0"/>
+              <a:t> </a:t>
+            </a:r>
+            <a:r>
+              <a:rPr dirty="0" err="1"/>
+              <a:t>cidade</a:t>
+            </a:r>
+            <a:r>
+              <a:rPr dirty="0"/>
+              <a:t> </a:t>
+            </a:r>
+            <a:r>
+              <a:rPr dirty="0" err="1"/>
+              <a:t>acolhedora</a:t>
+            </a:r>
+            <a:r>
+              <a:rPr dirty="0"/>
+              <a:t>, forte e </a:t>
+            </a:r>
+            <a:r>
+              <a:rPr dirty="0" err="1"/>
+              <a:t>trabalhadora</a:t>
+            </a:r>
+            <a:r>
+              <a:rPr dirty="0"/>
+              <a:t>, </a:t>
+            </a:r>
+            <a:r>
+              <a:rPr dirty="0" err="1"/>
+              <a:t>banhada</a:t>
+            </a:r>
+            <a:r>
+              <a:rPr dirty="0"/>
+              <a:t> </a:t>
+            </a:r>
+            <a:r>
+              <a:rPr dirty="0" err="1"/>
+              <a:t>pelas</a:t>
+            </a:r>
+            <a:r>
+              <a:rPr dirty="0"/>
+              <a:t> </a:t>
+            </a:r>
+            <a:r>
+              <a:rPr dirty="0" err="1"/>
+              <a:t>águas</a:t>
+            </a:r>
+            <a:r>
+              <a:rPr dirty="0"/>
+              <a:t> do Rio </a:t>
+            </a:r>
+            <a:r>
+              <a:rPr dirty="0" err="1"/>
+              <a:t>Itapecuru</a:t>
+            </a:r>
+            <a:r>
+              <a:rPr dirty="0"/>
+              <a:t>. Mas, </a:t>
+            </a:r>
+            <a:r>
+              <a:rPr dirty="0" err="1"/>
+              <a:t>como</a:t>
+            </a:r>
+            <a:r>
+              <a:rPr dirty="0"/>
+              <a:t> </a:t>
+            </a:r>
+            <a:r>
+              <a:rPr dirty="0" err="1"/>
+              <a:t>tantas</a:t>
+            </a:r>
+            <a:r>
+              <a:rPr dirty="0"/>
+              <a:t> </a:t>
+            </a:r>
+            <a:r>
+              <a:rPr dirty="0" err="1"/>
+              <a:t>cidades</a:t>
+            </a:r>
+            <a:r>
+              <a:rPr dirty="0"/>
+              <a:t> do interior do Maranhão, </a:t>
+            </a:r>
+            <a:r>
+              <a:rPr dirty="0" err="1"/>
+              <a:t>muitas</a:t>
+            </a:r>
+            <a:r>
+              <a:rPr dirty="0"/>
+              <a:t> </a:t>
+            </a:r>
+            <a:r>
+              <a:rPr dirty="0" err="1"/>
+              <a:t>famílias</a:t>
+            </a:r>
+            <a:r>
+              <a:rPr dirty="0"/>
+              <a:t> de bairros </a:t>
+            </a:r>
+            <a:r>
+              <a:rPr dirty="0" err="1"/>
+              <a:t>como</a:t>
+            </a:r>
+            <a:r>
+              <a:rPr dirty="0"/>
+              <a:t> Forquilha, </a:t>
+            </a:r>
+            <a:r>
+              <a:rPr dirty="0" err="1"/>
+              <a:t>Mutirão</a:t>
+            </a:r>
+            <a:r>
+              <a:rPr dirty="0"/>
+              <a:t>, Alto </a:t>
+            </a:r>
+            <a:r>
+              <a:rPr dirty="0" err="1"/>
+              <a:t>Fogoso</a:t>
+            </a:r>
+            <a:r>
+              <a:rPr dirty="0"/>
+              <a:t>, Olaria e </a:t>
+            </a:r>
+            <a:r>
+              <a:rPr dirty="0" err="1"/>
+              <a:t>povoados</a:t>
+            </a:r>
+            <a:r>
+              <a:rPr dirty="0"/>
+              <a:t> </a:t>
+            </a:r>
+            <a:r>
+              <a:rPr dirty="0" err="1"/>
+              <a:t>rurais</a:t>
+            </a:r>
+            <a:r>
+              <a:rPr dirty="0"/>
+              <a:t> </a:t>
+            </a:r>
+            <a:r>
+              <a:rPr dirty="0" err="1"/>
+              <a:t>distantes</a:t>
+            </a:r>
+            <a:r>
+              <a:rPr dirty="0"/>
+              <a:t> </a:t>
+            </a:r>
+            <a:r>
+              <a:rPr dirty="0" err="1"/>
+              <a:t>enfrentam</a:t>
+            </a:r>
+            <a:r>
+              <a:rPr dirty="0"/>
+              <a:t> </a:t>
+            </a:r>
+            <a:r>
+              <a:rPr dirty="0" err="1"/>
+              <a:t>dias</a:t>
+            </a:r>
+            <a:r>
+              <a:rPr dirty="0"/>
+              <a:t> </a:t>
+            </a:r>
+            <a:r>
+              <a:rPr dirty="0" err="1"/>
+              <a:t>difíceis</a:t>
+            </a:r>
+            <a:r>
+              <a:rPr dirty="0"/>
+              <a:t> para </a:t>
+            </a:r>
+            <a:r>
+              <a:rPr dirty="0" err="1"/>
+              <a:t>garantir</a:t>
+            </a:r>
+            <a:r>
+              <a:rPr dirty="0"/>
+              <a:t> o </a:t>
+            </a:r>
+            <a:r>
+              <a:rPr dirty="0" err="1"/>
+              <a:t>básico</a:t>
+            </a:r>
+            <a:r>
+              <a:rPr dirty="0"/>
+              <a:t> </a:t>
+            </a:r>
+            <a:r>
+              <a:rPr dirty="0" err="1"/>
+              <a:t>na</a:t>
+            </a:r>
+            <a:r>
+              <a:rPr dirty="0"/>
+              <a:t> mesa.</a:t>
             </a:r>
           </a:p>
         </p:txBody>
@@ -6695,6 +7160,7 @@
           <a:lstStyle/>
           <a:p>
             <a:pPr algn="ctr"/>
+            <a:endParaRPr/>
           </a:p>
         </p:txBody>
       </p:sp>
@@ -6738,6 +7204,7 @@
           <a:lstStyle/>
           <a:p>
             <a:pPr algn="ctr"/>
+            <a:endParaRPr/>
           </a:p>
         </p:txBody>
       </p:sp>
@@ -6763,7 +7230,7 @@
           </a:bodyPr>
           <a:lstStyle/>
           <a:p>
-            <a:pPr>
+            <a:pPr algn="just">
               <a:defRPr sz="1400" b="1">
                 <a:solidFill>
                   <a:srgbClr val="00873E"/>
@@ -6772,21 +7239,199 @@
               </a:defRPr>
             </a:pPr>
             <a:r>
-              <a:t>O Encontro de Duas Realidades</a:t>
-            </a:r>
-          </a:p>
-          <a:p>
-            <a:br/>
-            <a:pPr algn="just">
-              <a:defRPr sz="1150">
-                <a:solidFill>
-                  <a:srgbClr val="1E293B"/>
-                </a:solidFill>
-                <a:latin typeface="Segoe UI"/>
-              </a:defRPr>
-            </a:pPr>
-            <a:r>
-              <a:t>De um lado, pequenos agricultores e comerciantes com vontade de ajudar e excedentes de colheita. Do outro, famílias precisando de auxílio imediato. O Timbiras Solidária nasceu para ser a ponte digital entre a generosidade de quem pode doar e a dignidade de quem precisa receber.</a:t>
+              <a:rPr dirty="0"/>
+              <a:t>O </a:t>
+            </a:r>
+            <a:r>
+              <a:rPr dirty="0" err="1"/>
+              <a:t>Encontro</a:t>
+            </a:r>
+            <a:r>
+              <a:rPr dirty="0"/>
+              <a:t> de Duas </a:t>
+            </a:r>
+            <a:r>
+              <a:rPr dirty="0" err="1"/>
+              <a:t>Realidades</a:t>
+            </a:r>
+            <a:endParaRPr dirty="0"/>
+          </a:p>
+          <a:p>
+            <a:pPr algn="just"/>
+            <a:br>
+              <a:rPr dirty="0"/>
+            </a:br>
+            <a:r>
+              <a:rPr dirty="0"/>
+              <a:t>De um </a:t>
+            </a:r>
+            <a:r>
+              <a:rPr dirty="0" err="1"/>
+              <a:t>lado</a:t>
+            </a:r>
+            <a:r>
+              <a:rPr dirty="0"/>
+              <a:t>, </a:t>
+            </a:r>
+            <a:r>
+              <a:rPr dirty="0" err="1"/>
+              <a:t>pequenos</a:t>
+            </a:r>
+            <a:r>
+              <a:rPr dirty="0"/>
+              <a:t> </a:t>
+            </a:r>
+            <a:r>
+              <a:rPr dirty="0" err="1"/>
+              <a:t>agricultores</a:t>
+            </a:r>
+            <a:r>
+              <a:rPr dirty="0"/>
+              <a:t> e </a:t>
+            </a:r>
+            <a:r>
+              <a:rPr dirty="0" err="1"/>
+              <a:t>comerciantes</a:t>
+            </a:r>
+            <a:r>
+              <a:rPr dirty="0"/>
+              <a:t> com </a:t>
+            </a:r>
+            <a:r>
+              <a:rPr dirty="0" err="1"/>
+              <a:t>vontade</a:t>
+            </a:r>
+            <a:r>
+              <a:rPr dirty="0"/>
+              <a:t> de </a:t>
+            </a:r>
+            <a:r>
+              <a:rPr dirty="0" err="1"/>
+              <a:t>ajudar</a:t>
+            </a:r>
+            <a:r>
+              <a:rPr dirty="0"/>
+              <a:t> e </a:t>
+            </a:r>
+            <a:r>
+              <a:rPr dirty="0" err="1"/>
+              <a:t>excedentes</a:t>
+            </a:r>
+            <a:r>
+              <a:rPr dirty="0"/>
+              <a:t> de </a:t>
+            </a:r>
+            <a:r>
+              <a:rPr dirty="0" err="1"/>
+              <a:t>colheita</a:t>
+            </a:r>
+            <a:r>
+              <a:rPr dirty="0"/>
+              <a:t>. Do outro, </a:t>
+            </a:r>
+            <a:r>
+              <a:rPr dirty="0" err="1"/>
+              <a:t>famílias</a:t>
+            </a:r>
+            <a:r>
+              <a:rPr dirty="0"/>
+              <a:t> </a:t>
+            </a:r>
+            <a:r>
+              <a:rPr dirty="0" err="1"/>
+              <a:t>precisando</a:t>
+            </a:r>
+            <a:r>
+              <a:rPr dirty="0"/>
+              <a:t> de </a:t>
+            </a:r>
+            <a:r>
+              <a:rPr dirty="0" err="1"/>
+              <a:t>auxílio</a:t>
+            </a:r>
+            <a:r>
+              <a:rPr dirty="0"/>
+              <a:t> </a:t>
+            </a:r>
+            <a:r>
+              <a:rPr dirty="0" err="1"/>
+              <a:t>imediato</a:t>
+            </a:r>
+            <a:r>
+              <a:rPr dirty="0"/>
+              <a:t>. O Timbiras </a:t>
+            </a:r>
+            <a:r>
+              <a:rPr dirty="0" err="1"/>
+              <a:t>Solidária</a:t>
+            </a:r>
+            <a:r>
+              <a:rPr dirty="0"/>
+              <a:t> </a:t>
+            </a:r>
+            <a:r>
+              <a:rPr dirty="0" err="1"/>
+              <a:t>nasceu</a:t>
+            </a:r>
+            <a:r>
+              <a:rPr dirty="0"/>
+              <a:t> para ser a </a:t>
+            </a:r>
+            <a:r>
+              <a:rPr dirty="0" err="1"/>
+              <a:t>ponte</a:t>
+            </a:r>
+            <a:r>
+              <a:rPr dirty="0"/>
+              <a:t> digital entre a </a:t>
+            </a:r>
+            <a:r>
+              <a:rPr dirty="0" err="1"/>
+              <a:t>generosidade</a:t>
+            </a:r>
+            <a:r>
+              <a:rPr dirty="0"/>
+              <a:t> de quem </a:t>
+            </a:r>
+            <a:r>
+              <a:rPr dirty="0" err="1"/>
+              <a:t>pode</a:t>
+            </a:r>
+            <a:r>
+              <a:rPr dirty="0"/>
+              <a:t> </a:t>
+            </a:r>
+            <a:r>
+              <a:rPr dirty="0" err="1"/>
+              <a:t>doar</a:t>
+            </a:r>
+            <a:r>
+              <a:rPr dirty="0"/>
+              <a:t> e a </a:t>
+            </a:r>
+            <a:r>
+              <a:rPr dirty="0" err="1"/>
+              <a:t>dignidade</a:t>
+            </a:r>
+            <a:r>
+              <a:rPr dirty="0"/>
+              <a:t> de quem </a:t>
+            </a:r>
+            <a:r>
+              <a:rPr dirty="0" err="1"/>
+              <a:t>precisa</a:t>
+            </a:r>
+            <a:r>
+              <a:rPr dirty="0"/>
+              <a:t> </a:t>
+            </a:r>
+            <a:r>
+              <a:rPr dirty="0" err="1"/>
+              <a:t>receber</a:t>
+            </a:r>
+            <a:r>
+              <a:rPr dirty="0"/>
+              <a:t>.</a:t>
             </a:r>
           </a:p>
         </p:txBody>
@@ -6833,6 +7478,7 @@
           <a:lstStyle/>
           <a:p>
             <a:pPr algn="ctr"/>
+            <a:endParaRPr/>
           </a:p>
         </p:txBody>
       </p:sp>
@@ -6845,7 +7491,7 @@
         <p:spPr>
           <a:xfrm>
             <a:off x="7223760" y="1417320"/>
-            <a:ext cx="3977639" cy="4434840"/>
+            <a:ext cx="3977639" cy="4216539"/>
           </a:xfrm>
           <a:prstGeom prst="rect">
             <a:avLst/>
@@ -6858,7 +7504,7 @@
           </a:bodyPr>
           <a:lstStyle/>
           <a:p>
-            <a:pPr>
+            <a:pPr algn="just">
               <a:defRPr sz="1550" b="1">
                 <a:solidFill>
                   <a:srgbClr val="00873E"/>
@@ -6867,7 +7513,12 @@
               </a:defRPr>
             </a:pPr>
             <a:r>
-              <a:t>Compromisso Real com o ODS 2</a:t>
+              <a:rPr sz="1600" dirty="0" err="1"/>
+              <a:t>Compromisso</a:t>
+            </a:r>
+            <a:r>
+              <a:rPr sz="1600" dirty="0"/>
+              <a:t> Real com o ODS 2</a:t>
             </a:r>
           </a:p>
           <a:p>
@@ -6880,21 +7531,118 @@
               </a:defRPr>
             </a:pPr>
             <a:r>
-              <a:t>Fome Zero e Agricultura Sustentável: nosso foco não é assistencialismo frio, mas mobilização comunitária com valorização do agricultor familiar local.</a:t>
-            </a:r>
-          </a:p>
-          <a:p>
-            <a:br/>
-            <a:pPr>
-              <a:defRPr sz="1300" b="1">
-                <a:solidFill>
-                  <a:srgbClr val="00873E"/>
-                </a:solidFill>
-                <a:latin typeface="Segoe UI"/>
-              </a:defRPr>
-            </a:pPr>
-            <a:r>
-              <a:t>Público-Alvo que Abraçamos:</a:t>
+              <a:rPr sz="1400" dirty="0" err="1"/>
+              <a:t>Fome</a:t>
+            </a:r>
+            <a:r>
+              <a:rPr sz="1400" dirty="0"/>
+              <a:t> Zero e Agricultura </a:t>
+            </a:r>
+            <a:r>
+              <a:rPr sz="1400" dirty="0" err="1"/>
+              <a:t>Sustentável</a:t>
+            </a:r>
+            <a:r>
+              <a:rPr sz="1400" dirty="0"/>
+              <a:t>: </a:t>
+            </a:r>
+            <a:r>
+              <a:rPr sz="1400" dirty="0" err="1"/>
+              <a:t>nosso</a:t>
+            </a:r>
+            <a:r>
+              <a:rPr sz="1400" dirty="0"/>
+              <a:t> </a:t>
+            </a:r>
+            <a:r>
+              <a:rPr sz="1400" dirty="0" err="1"/>
+              <a:t>foco</a:t>
+            </a:r>
+            <a:r>
+              <a:rPr sz="1400" dirty="0"/>
+              <a:t> </a:t>
+            </a:r>
+            <a:r>
+              <a:rPr sz="1400" dirty="0" err="1"/>
+              <a:t>não</a:t>
+            </a:r>
+            <a:r>
+              <a:rPr sz="1400" dirty="0"/>
+              <a:t> é </a:t>
+            </a:r>
+            <a:r>
+              <a:rPr sz="1400" dirty="0" err="1"/>
+              <a:t>assistencialismo</a:t>
+            </a:r>
+            <a:r>
+              <a:rPr sz="1400" dirty="0"/>
+              <a:t> </a:t>
+            </a:r>
+            <a:r>
+              <a:rPr sz="1400" dirty="0" err="1"/>
+              <a:t>frio</a:t>
+            </a:r>
+            <a:r>
+              <a:rPr sz="1400" dirty="0"/>
+              <a:t>, mas </a:t>
+            </a:r>
+            <a:r>
+              <a:rPr sz="1400" dirty="0" err="1"/>
+              <a:t>mobilização</a:t>
+            </a:r>
+            <a:r>
+              <a:rPr sz="1400" dirty="0"/>
+              <a:t> </a:t>
+            </a:r>
+            <a:r>
+              <a:rPr sz="1400" dirty="0" err="1"/>
+              <a:t>comunitária</a:t>
+            </a:r>
+            <a:r>
+              <a:rPr sz="1400" dirty="0"/>
+              <a:t> com </a:t>
+            </a:r>
+            <a:r>
+              <a:rPr sz="1400" dirty="0" err="1"/>
+              <a:t>valorização</a:t>
+            </a:r>
+            <a:r>
+              <a:rPr sz="1400" dirty="0"/>
+              <a:t> do </a:t>
+            </a:r>
+            <a:r>
+              <a:rPr sz="1400" dirty="0" err="1"/>
+              <a:t>agricultor</a:t>
+            </a:r>
+            <a:r>
+              <a:rPr sz="1400" dirty="0"/>
+              <a:t> familiar local.</a:t>
+            </a:r>
+          </a:p>
+          <a:p>
+            <a:pPr algn="just"/>
+            <a:br>
+              <a:rPr sz="2400" dirty="0"/>
+            </a:br>
+            <a:r>
+              <a:rPr sz="2400" dirty="0"/>
+              <a:t>Público-Alvo </a:t>
+            </a:r>
+            <a:r>
+              <a:rPr sz="2400" dirty="0" err="1"/>
+              <a:t>que</a:t>
+            </a:r>
+            <a:r>
+              <a:rPr sz="2400" dirty="0"/>
+              <a:t> </a:t>
+            </a:r>
+            <a:r>
+              <a:rPr sz="2400" dirty="0" err="1"/>
+              <a:t>Abraçamos</a:t>
+            </a:r>
+            <a:r>
+              <a:rPr sz="2400" dirty="0"/>
+              <a:t>:</a:t>
             </a:r>
           </a:p>
           <a:p>
@@ -6907,8 +7655,66 @@
               </a:defRPr>
             </a:pPr>
             <a:r>
-              <a:t>• Cidadãos comuns:  Que querem doar 1 cesta ou 1 kg de alimento;</a:t>
-            </a:r>
+              <a:rPr sz="1400" dirty="0"/>
+              <a:t>• </a:t>
+            </a:r>
+            <a:r>
+              <a:rPr sz="1400" dirty="0" err="1"/>
+              <a:t>Cidadãos</a:t>
+            </a:r>
+            <a:r>
+              <a:rPr sz="1400" dirty="0"/>
+              <a:t> </a:t>
+            </a:r>
+            <a:r>
+              <a:rPr sz="1400" dirty="0" err="1"/>
+              <a:t>comuns</a:t>
+            </a:r>
+            <a:r>
+              <a:rPr sz="1400" dirty="0"/>
+              <a:t>:  </a:t>
+            </a:r>
+            <a:r>
+              <a:rPr sz="1400" dirty="0" err="1"/>
+              <a:t>Que</a:t>
+            </a:r>
+            <a:r>
+              <a:rPr sz="1400" dirty="0"/>
+              <a:t> </a:t>
+            </a:r>
+            <a:r>
+              <a:rPr sz="1400" dirty="0" err="1"/>
+              <a:t>querem</a:t>
+            </a:r>
+            <a:r>
+              <a:rPr sz="1400" dirty="0"/>
+              <a:t> </a:t>
+            </a:r>
+            <a:r>
+              <a:rPr sz="1400" dirty="0" err="1"/>
+              <a:t>doar</a:t>
+            </a:r>
+            <a:r>
+              <a:rPr sz="1400" dirty="0"/>
+              <a:t> 1 cesta </a:t>
+            </a:r>
+            <a:r>
+              <a:rPr sz="1400" dirty="0" err="1"/>
+              <a:t>ou</a:t>
+            </a:r>
+            <a:r>
+              <a:rPr sz="1400" dirty="0"/>
+              <a:t> 1 kg de </a:t>
+            </a:r>
+            <a:r>
+              <a:rPr sz="1400" dirty="0" err="1"/>
+              <a:t>alimento</a:t>
+            </a:r>
+            <a:r>
+              <a:rPr sz="1400" dirty="0"/>
+              <a:t>;</a:t>
+            </a:r>
+            <a:endParaRPr lang="pt-BR" sz="1400" dirty="0"/>
           </a:p>
           <a:p>
             <a:pPr algn="just">
@@ -6919,9 +7725,7 @@
                 <a:latin typeface="Segoe UI"/>
               </a:defRPr>
             </a:pPr>
-            <a:r>
-              <a:t>• Comércio e feirantes:  Que exercem cidadania ativa;</a:t>
-            </a:r>
+            <a:endParaRPr sz="1400" dirty="0"/>
           </a:p>
           <a:p>
             <a:pPr algn="just">
@@ -6933,8 +7737,50 @@
               </a:defRPr>
             </a:pPr>
             <a:r>
-              <a:t>• Agricultura familiar:  Que abastece a cidade com alimentos frescos;</a:t>
-            </a:r>
+              <a:rPr sz="1400" dirty="0"/>
+              <a:t>• Comércio e </a:t>
+            </a:r>
+            <a:r>
+              <a:rPr sz="1400" dirty="0" err="1"/>
+              <a:t>feirantes</a:t>
+            </a:r>
+            <a:r>
+              <a:rPr sz="1400" dirty="0"/>
+              <a:t>:  </a:t>
+            </a:r>
+            <a:r>
+              <a:rPr sz="1400" dirty="0" err="1"/>
+              <a:t>Que</a:t>
+            </a:r>
+            <a:r>
+              <a:rPr sz="1400" dirty="0"/>
+              <a:t> </a:t>
+            </a:r>
+            <a:r>
+              <a:rPr sz="1400" dirty="0" err="1"/>
+              <a:t>exercem</a:t>
+            </a:r>
+            <a:r>
+              <a:rPr sz="1400" dirty="0"/>
+              <a:t> </a:t>
+            </a:r>
+            <a:r>
+              <a:rPr sz="1400" dirty="0" err="1"/>
+              <a:t>cidadania</a:t>
+            </a:r>
+            <a:r>
+              <a:rPr sz="1400" dirty="0"/>
+              <a:t> </a:t>
+            </a:r>
+            <a:r>
+              <a:rPr sz="1400" dirty="0" err="1"/>
+              <a:t>ativa</a:t>
+            </a:r>
+            <a:r>
+              <a:rPr sz="1400" dirty="0"/>
+              <a:t>;</a:t>
+            </a:r>
+            <a:endParaRPr lang="pt-BR" sz="1400" dirty="0"/>
           </a:p>
           <a:p>
             <a:pPr algn="just">
@@ -6945,8 +7791,110 @@
                 <a:latin typeface="Segoe UI"/>
               </a:defRPr>
             </a:pPr>
-            <a:r>
-              <a:t>• Poder público &amp; voluntários:  Para transparência e logística.</a:t>
+            <a:endParaRPr sz="1400" dirty="0"/>
+          </a:p>
+          <a:p>
+            <a:pPr algn="just">
+              <a:defRPr sz="1100">
+                <a:solidFill>
+                  <a:srgbClr val="1E293B"/>
+                </a:solidFill>
+                <a:latin typeface="Segoe UI"/>
+              </a:defRPr>
+            </a:pPr>
+            <a:r>
+              <a:rPr sz="1400" dirty="0"/>
+              <a:t>• Agricultura familiar:  </a:t>
+            </a:r>
+            <a:r>
+              <a:rPr sz="1400" dirty="0" err="1"/>
+              <a:t>Que</a:t>
+            </a:r>
+            <a:r>
+              <a:rPr sz="1400" dirty="0"/>
+              <a:t> </a:t>
+            </a:r>
+            <a:r>
+              <a:rPr sz="1400" dirty="0" err="1"/>
+              <a:t>abastece</a:t>
+            </a:r>
+            <a:r>
+              <a:rPr sz="1400" dirty="0"/>
+              <a:t> a </a:t>
+            </a:r>
+            <a:r>
+              <a:rPr sz="1400" dirty="0" err="1"/>
+              <a:t>cidade</a:t>
+            </a:r>
+            <a:r>
+              <a:rPr sz="1400" dirty="0"/>
+              <a:t> com </a:t>
+            </a:r>
+            <a:r>
+              <a:rPr sz="1400" dirty="0" err="1"/>
+              <a:t>alimentos</a:t>
+            </a:r>
+            <a:r>
+              <a:rPr sz="1400" dirty="0"/>
+              <a:t> frescos;</a:t>
+            </a:r>
+            <a:endParaRPr lang="pt-BR" sz="1400" dirty="0"/>
+          </a:p>
+          <a:p>
+            <a:pPr algn="just">
+              <a:defRPr sz="1100">
+                <a:solidFill>
+                  <a:srgbClr val="1E293B"/>
+                </a:solidFill>
+                <a:latin typeface="Segoe UI"/>
+              </a:defRPr>
+            </a:pPr>
+            <a:endParaRPr sz="1400" dirty="0"/>
+          </a:p>
+          <a:p>
+            <a:pPr algn="just">
+              <a:defRPr sz="1100">
+                <a:solidFill>
+                  <a:srgbClr val="1E293B"/>
+                </a:solidFill>
+                <a:latin typeface="Segoe UI"/>
+              </a:defRPr>
+            </a:pPr>
+            <a:r>
+              <a:rPr sz="1400" dirty="0"/>
+              <a:t>• Poder </a:t>
+            </a:r>
+            <a:r>
+              <a:rPr sz="1400" dirty="0" err="1"/>
+              <a:t>público</a:t>
+            </a:r>
+            <a:r>
+              <a:rPr sz="1400" dirty="0"/>
+              <a:t> &amp; </a:t>
+            </a:r>
+            <a:r>
+              <a:rPr sz="1400" dirty="0" err="1"/>
+              <a:t>voluntários</a:t>
+            </a:r>
+            <a:r>
+              <a:rPr sz="1400" dirty="0"/>
+              <a:t>:  Para </a:t>
+            </a:r>
+            <a:r>
+              <a:rPr sz="1400" dirty="0" err="1"/>
+              <a:t>transparência</a:t>
+            </a:r>
+            <a:r>
+              <a:rPr sz="1400" dirty="0"/>
+              <a:t> e </a:t>
+            </a:r>
+            <a:r>
+              <a:rPr sz="1400" dirty="0" err="1"/>
+              <a:t>logística</a:t>
+            </a:r>
+            <a:r>
+              <a:rPr sz="1400" dirty="0"/>
+              <a:t>.</a:t>
             </a:r>
           </a:p>
         </p:txBody>
@@ -6960,7 +7908,7 @@
 </file>
 
 <file path=ppt/slides/slide3.xml><?xml version="1.0" encoding="utf-8"?>
-<p:sld xmlns:a="http://schemas.openxmlformats.org/drawingml/2006/main" xmlns:p="http://schemas.openxmlformats.org/presentationml/2006/main" xmlns:r="http://schemas.openxmlformats.org/officeDocument/2006/relationships">
+<p:sld xmlns:a="http://schemas.openxmlformats.org/drawingml/2006/main" xmlns:r="http://schemas.openxmlformats.org/officeDocument/2006/relationships" xmlns:p="http://schemas.openxmlformats.org/presentationml/2006/main">
   <p:cSld>
     <p:spTree>
       <p:nvGrpSpPr>
@@ -6968,7 +7916,14 @@
         <p:cNvGrpSpPr/>
         <p:nvPr/>
       </p:nvGrpSpPr>
-      <p:grpSpPr/>
+      <p:grpSpPr>
+        <a:xfrm>
+          <a:off x="0" y="0"/>
+          <a:ext cx="0" cy="0"/>
+          <a:chOff x="0" y="0"/>
+          <a:chExt cx="0" cy="0"/>
+        </a:xfrm>
+      </p:grpSpPr>
       <p:sp>
         <p:nvSpPr>
           <p:cNvPr id="2" name="TextBox 1"/>
@@ -7043,7 +7998,7 @@
           </a:fontRef>
         </p:style>
         <p:txBody>
-          <a:bodyPr rtlCol="0" anchor="ctr" tIns="54864"/>
+          <a:bodyPr tIns="54864" rtlCol="0" anchor="ctr"/>
           <a:lstStyle/>
           <a:p>
             <a:pPr algn="ctr">
@@ -7100,6 +8055,7 @@
           <a:lstStyle/>
           <a:p>
             <a:pPr algn="ctr"/>
+            <a:endParaRPr/>
           </a:p>
         </p:txBody>
       </p:sp>
@@ -7143,6 +8099,7 @@
           <a:lstStyle/>
           <a:p>
             <a:pPr algn="ctr"/>
+            <a:endParaRPr/>
           </a:p>
         </p:txBody>
       </p:sp>
@@ -7227,7 +8184,7 @@
         <p:spPr>
           <a:xfrm>
             <a:off x="731520" y="1234440"/>
-            <a:ext cx="5166360" cy="2743200"/>
+            <a:ext cx="5166360" cy="2485296"/>
           </a:xfrm>
           <a:prstGeom prst="rect">
             <a:avLst/>
@@ -7240,7 +8197,7 @@
           </a:bodyPr>
           <a:lstStyle/>
           <a:p>
-            <a:pPr>
+            <a:pPr algn="just">
               <a:defRPr sz="1550" b="1">
                 <a:solidFill>
                   <a:srgbClr val="00873E"/>
@@ -7249,35 +8206,332 @@
               </a:defRPr>
             </a:pPr>
             <a:r>
-              <a:t>O Salto da Primeira para a Segunda Etapa</a:t>
-            </a:r>
-          </a:p>
-          <a:p>
-            <a:br/>
-            <a:pPr algn="just">
-              <a:defRPr sz="1200">
-                <a:solidFill>
-                  <a:srgbClr val="64748B"/>
-                </a:solidFill>
-                <a:latin typeface="Segoe UI"/>
-              </a:defRPr>
-            </a:pPr>
-            <a:r>
-              <a:t>Na Nota 1, criamos uma interface estática em HTML5, CSS3 e Bootstrap. Era bonita e organizada, mas funcionava como um panfleto digital: parada, passiva e sem diálogo direto com quem acessava.</a:t>
-            </a:r>
-          </a:p>
-          <a:p>
-            <a:br/>
-            <a:pPr algn="just">
-              <a:defRPr sz="1200">
-                <a:solidFill>
-                  <a:srgbClr val="64748B"/>
-                </a:solidFill>
-                <a:latin typeface="Segoe UI"/>
-              </a:defRPr>
-            </a:pPr>
-            <a:r>
-              <a:t>Na Nota 2, nossa missão foi dar vida e coração ao projeto: quando alguém preenche uma doação, precisa sentir que aquele ato gerou uma resposta no mundo real.</a:t>
+              <a:rPr dirty="0"/>
+              <a:t>O Salto da </a:t>
+            </a:r>
+            <a:r>
+              <a:rPr dirty="0" err="1"/>
+              <a:t>Primeira</a:t>
+            </a:r>
+            <a:r>
+              <a:rPr dirty="0"/>
+              <a:t> para a Segunda Etapa</a:t>
+            </a:r>
+          </a:p>
+          <a:p>
+            <a:pPr algn="just"/>
+            <a:br>
+              <a:rPr dirty="0"/>
+            </a:br>
+            <a:r>
+              <a:rPr sz="1600" dirty="0"/>
+              <a:t>Na Nota 1, </a:t>
+            </a:r>
+            <a:r>
+              <a:rPr sz="1600" dirty="0" err="1"/>
+              <a:t>criamos</a:t>
+            </a:r>
+            <a:r>
+              <a:rPr sz="1600" dirty="0"/>
+              <a:t> </a:t>
+            </a:r>
+            <a:r>
+              <a:rPr sz="1600" dirty="0" err="1"/>
+              <a:t>uma</a:t>
+            </a:r>
+            <a:r>
+              <a:rPr sz="1600" dirty="0"/>
+              <a:t> interface </a:t>
+            </a:r>
+            <a:r>
+              <a:rPr sz="1600" dirty="0" err="1"/>
+              <a:t>estática</a:t>
+            </a:r>
+            <a:r>
+              <a:rPr sz="1600" dirty="0"/>
+              <a:t> </a:t>
+            </a:r>
+            <a:r>
+              <a:rPr sz="1600" dirty="0" err="1"/>
+              <a:t>em</a:t>
+            </a:r>
+            <a:r>
+              <a:rPr sz="1600" dirty="0"/>
+              <a:t> HTML5, CSS3 e Bootstrap. Era </a:t>
+            </a:r>
+            <a:r>
+              <a:rPr sz="1600" dirty="0" err="1"/>
+              <a:t>bonita</a:t>
+            </a:r>
+            <a:r>
+              <a:rPr sz="1600" dirty="0"/>
+              <a:t> e </a:t>
+            </a:r>
+            <a:r>
+              <a:rPr sz="1600" dirty="0" err="1"/>
+              <a:t>organizada</a:t>
+            </a:r>
+            <a:r>
+              <a:rPr sz="1600" dirty="0"/>
+              <a:t>, mas </a:t>
+            </a:r>
+            <a:r>
+              <a:rPr sz="1600" dirty="0" err="1"/>
+              <a:t>funcionava</a:t>
+            </a:r>
+            <a:r>
+              <a:rPr sz="1600" dirty="0"/>
+              <a:t> </a:t>
+            </a:r>
+            <a:r>
+              <a:rPr sz="1600" dirty="0" err="1"/>
+              <a:t>como</a:t>
+            </a:r>
+            <a:r>
+              <a:rPr sz="1600" dirty="0"/>
+              <a:t> um </a:t>
+            </a:r>
+            <a:r>
+              <a:rPr sz="1600" dirty="0" err="1"/>
+              <a:t>panfleto</a:t>
+            </a:r>
+            <a:r>
+              <a:rPr sz="1600" dirty="0"/>
+              <a:t> digital: </a:t>
+            </a:r>
+            <a:r>
+              <a:rPr sz="1600" dirty="0" err="1"/>
+              <a:t>parada</a:t>
+            </a:r>
+            <a:r>
+              <a:rPr sz="1600" dirty="0"/>
+              <a:t>, </a:t>
+            </a:r>
+            <a:r>
+              <a:rPr sz="1600" dirty="0" err="1"/>
+              <a:t>passiva</a:t>
+            </a:r>
+            <a:r>
+              <a:rPr sz="1600" dirty="0"/>
+              <a:t> e </a:t>
+            </a:r>
+            <a:r>
+              <a:rPr sz="1600" dirty="0" err="1"/>
+              <a:t>sem</a:t>
+            </a:r>
+            <a:r>
+              <a:rPr sz="1600" dirty="0"/>
+              <a:t> </a:t>
+            </a:r>
+            <a:r>
+              <a:rPr sz="1600" dirty="0" err="1"/>
+              <a:t>diálogo</a:t>
+            </a:r>
+            <a:r>
+              <a:rPr sz="1600" dirty="0"/>
+              <a:t> </a:t>
+            </a:r>
+            <a:r>
+              <a:rPr sz="1600" dirty="0" err="1"/>
+              <a:t>direto</a:t>
+            </a:r>
+            <a:r>
+              <a:rPr sz="1600" dirty="0"/>
+              <a:t> com quem </a:t>
+            </a:r>
+            <a:r>
+              <a:rPr sz="1600" dirty="0" err="1"/>
+              <a:t>acessava</a:t>
+            </a:r>
+            <a:r>
+              <a:rPr sz="1600" dirty="0"/>
+              <a:t>.</a:t>
+            </a:r>
+          </a:p>
+          <a:p>
+            <a:pPr algn="just"/>
+            <a:br>
+              <a:rPr sz="1600" dirty="0"/>
+            </a:br>
+            <a:r>
+              <a:rPr sz="1600" dirty="0"/>
+              <a:t>Na Nota 2, </a:t>
+            </a:r>
+            <a:r>
+              <a:rPr sz="1600" dirty="0" err="1"/>
+              <a:t>nossa</a:t>
+            </a:r>
+            <a:r>
+              <a:rPr sz="1600" dirty="0"/>
+              <a:t> </a:t>
+            </a:r>
+            <a:r>
+              <a:rPr sz="1600" dirty="0" err="1"/>
+              <a:t>missão</a:t>
+            </a:r>
+            <a:r>
+              <a:rPr sz="1600" dirty="0"/>
+              <a:t> </a:t>
+            </a:r>
+            <a:r>
+              <a:rPr sz="1600" dirty="0" err="1"/>
+              <a:t>foi</a:t>
+            </a:r>
+            <a:r>
+              <a:rPr sz="1600" dirty="0"/>
+              <a:t> </a:t>
+            </a:r>
+            <a:r>
+              <a:rPr sz="1600" dirty="0" err="1"/>
+              <a:t>dar</a:t>
+            </a:r>
+            <a:r>
+              <a:rPr sz="1600" dirty="0"/>
+              <a:t> </a:t>
+            </a:r>
+            <a:r>
+              <a:rPr sz="1600" dirty="0" err="1"/>
+              <a:t>vida</a:t>
+            </a:r>
+            <a:r>
+              <a:rPr sz="1600" dirty="0"/>
+              <a:t> e </a:t>
+            </a:r>
+            <a:r>
+              <a:rPr sz="1600" dirty="0" err="1"/>
+              <a:t>coração</a:t>
+            </a:r>
+            <a:r>
+              <a:rPr sz="1600" dirty="0"/>
+              <a:t> </a:t>
+            </a:r>
+            <a:r>
+              <a:rPr sz="1600" dirty="0" err="1"/>
+              <a:t>ao</a:t>
+            </a:r>
+            <a:r>
+              <a:rPr sz="1600" dirty="0"/>
+              <a:t> </a:t>
+            </a:r>
+            <a:r>
+              <a:rPr sz="1600" dirty="0" err="1"/>
+              <a:t>projeto</a:t>
+            </a:r>
+            <a:r>
+              <a:rPr sz="1600" dirty="0"/>
+              <a:t>: </a:t>
+            </a:r>
+            <a:r>
+              <a:rPr sz="1600" dirty="0" err="1"/>
+              <a:t>quando</a:t>
+            </a:r>
+            <a:r>
+              <a:rPr sz="1600" dirty="0"/>
+              <a:t> </a:t>
+            </a:r>
+            <a:r>
+              <a:rPr sz="1600" dirty="0" err="1"/>
+              <a:t>alguém</a:t>
+            </a:r>
+            <a:r>
+              <a:rPr sz="1600" dirty="0"/>
+              <a:t> </a:t>
+            </a:r>
+            <a:r>
+              <a:rPr sz="1600" dirty="0" err="1"/>
+              <a:t>preenche</a:t>
+            </a:r>
+            <a:r>
+              <a:rPr sz="1600" dirty="0"/>
+              <a:t> </a:t>
+            </a:r>
+            <a:r>
+              <a:rPr sz="1600" dirty="0" err="1"/>
+              <a:t>uma</a:t>
+            </a:r>
+            <a:r>
+              <a:rPr sz="1600" dirty="0"/>
+              <a:t> </a:t>
+            </a:r>
+            <a:r>
+              <a:rPr sz="1600" dirty="0" err="1"/>
+              <a:t>doação</a:t>
+            </a:r>
+            <a:r>
+              <a:rPr sz="1600" dirty="0"/>
+              <a:t>, </a:t>
+            </a:r>
+            <a:r>
+              <a:rPr sz="1600" dirty="0" err="1"/>
+              <a:t>precisa</a:t>
+            </a:r>
+            <a:r>
+              <a:rPr sz="1600" dirty="0"/>
+              <a:t> </a:t>
+            </a:r>
+            <a:r>
+              <a:rPr sz="1600" dirty="0" err="1"/>
+              <a:t>sentir</a:t>
+            </a:r>
+            <a:r>
+              <a:rPr sz="1600" dirty="0"/>
+              <a:t> </a:t>
+            </a:r>
+            <a:r>
+              <a:rPr sz="1600" dirty="0" err="1"/>
+              <a:t>que</a:t>
+            </a:r>
+            <a:r>
+              <a:rPr sz="1600" dirty="0"/>
+              <a:t> </a:t>
+            </a:r>
+            <a:r>
+              <a:rPr sz="1600" dirty="0" err="1"/>
+              <a:t>aquele</a:t>
+            </a:r>
+            <a:r>
+              <a:rPr sz="1600" dirty="0"/>
+              <a:t> </a:t>
+            </a:r>
+            <a:r>
+              <a:rPr sz="1600" dirty="0" err="1"/>
+              <a:t>ato</a:t>
+            </a:r>
+            <a:r>
+              <a:rPr sz="1600" dirty="0"/>
+              <a:t> </a:t>
+            </a:r>
+            <a:r>
+              <a:rPr sz="1600" dirty="0" err="1"/>
+              <a:t>gerou</a:t>
+            </a:r>
+            <a:r>
+              <a:rPr sz="1600" dirty="0"/>
+              <a:t> </a:t>
+            </a:r>
+            <a:r>
+              <a:rPr sz="1600" dirty="0" err="1"/>
+              <a:t>uma</a:t>
+            </a:r>
+            <a:r>
+              <a:rPr sz="1600" dirty="0"/>
+              <a:t> </a:t>
+            </a:r>
+            <a:r>
+              <a:rPr sz="1600" dirty="0" err="1"/>
+              <a:t>resposta</a:t>
+            </a:r>
+            <a:r>
+              <a:rPr sz="1600" dirty="0"/>
+              <a:t> no </a:t>
+            </a:r>
+            <a:r>
+              <a:rPr sz="1600" dirty="0" err="1"/>
+              <a:t>mundo</a:t>
+            </a:r>
+            <a:r>
+              <a:rPr sz="1600" dirty="0"/>
+              <a:t> real.</a:t>
             </a:r>
           </a:p>
         </p:txBody>
@@ -7324,6 +8578,7 @@
           <a:lstStyle/>
           <a:p>
             <a:pPr algn="ctr"/>
+            <a:endParaRPr/>
           </a:p>
         </p:txBody>
       </p:sp>
@@ -7367,6 +8622,7 @@
           <a:lstStyle/>
           <a:p>
             <a:pPr algn="ctr"/>
+            <a:endParaRPr/>
           </a:p>
         </p:txBody>
       </p:sp>
@@ -7392,7 +8648,7 @@
           </a:bodyPr>
           <a:lstStyle/>
           <a:p>
-            <a:pPr>
+            <a:pPr algn="just">
               <a:defRPr sz="1400" b="1">
                 <a:solidFill>
                   <a:srgbClr val="B45309"/>
@@ -7401,21 +8657,175 @@
               </a:defRPr>
             </a:pPr>
             <a:r>
-              <a:t>Interação que Acolhe</a:t>
-            </a:r>
-          </a:p>
-          <a:p>
-            <a:br/>
-            <a:pPr algn="just">
-              <a:defRPr sz="1150">
-                <a:solidFill>
-                  <a:srgbClr val="1E293B"/>
-                </a:solidFill>
-                <a:latin typeface="Segoe UI"/>
-              </a:defRPr>
-            </a:pPr>
-            <a:r>
-              <a:t>Abraçamos o React 19 para que cada elemento na tela reaja imediatamente aos sentimentos e intenções do usuário, sem recarregar a página e sem travar a navegação.</a:t>
+              <a:rPr dirty="0" err="1"/>
+              <a:t>Interação</a:t>
+            </a:r>
+            <a:r>
+              <a:rPr dirty="0"/>
+              <a:t> </a:t>
+            </a:r>
+            <a:r>
+              <a:rPr dirty="0" err="1"/>
+              <a:t>que</a:t>
+            </a:r>
+            <a:r>
+              <a:rPr dirty="0"/>
+              <a:t> </a:t>
+            </a:r>
+            <a:r>
+              <a:rPr dirty="0" err="1"/>
+              <a:t>Acolhe</a:t>
+            </a:r>
+            <a:endParaRPr dirty="0"/>
+          </a:p>
+          <a:p>
+            <a:pPr algn="just"/>
+            <a:br>
+              <a:rPr dirty="0"/>
+            </a:br>
+            <a:r>
+              <a:rPr dirty="0" err="1"/>
+              <a:t>Abraçamos</a:t>
+            </a:r>
+            <a:r>
+              <a:rPr dirty="0"/>
+              <a:t> o React 19 para </a:t>
+            </a:r>
+            <a:r>
+              <a:rPr dirty="0" err="1"/>
+              <a:t>que</a:t>
+            </a:r>
+            <a:r>
+              <a:rPr dirty="0"/>
+              <a:t> </a:t>
+            </a:r>
+            <a:r>
+              <a:rPr dirty="0" err="1"/>
+              <a:t>cada</a:t>
+            </a:r>
+            <a:r>
+              <a:rPr dirty="0"/>
+              <a:t> </a:t>
+            </a:r>
+            <a:r>
+              <a:rPr dirty="0" err="1"/>
+              <a:t>elemento</a:t>
+            </a:r>
+            <a:r>
+              <a:rPr dirty="0"/>
+              <a:t> </a:t>
+            </a:r>
+            <a:r>
+              <a:rPr dirty="0" err="1"/>
+              <a:t>na</a:t>
+            </a:r>
+            <a:r>
+              <a:rPr dirty="0"/>
+              <a:t> </a:t>
+            </a:r>
+            <a:r>
+              <a:rPr dirty="0" err="1"/>
+              <a:t>tela</a:t>
+            </a:r>
+            <a:r>
+              <a:rPr dirty="0"/>
+              <a:t> </a:t>
+            </a:r>
+            <a:r>
+              <a:rPr dirty="0" err="1"/>
+              <a:t>reaja</a:t>
+            </a:r>
+            <a:r>
+              <a:rPr dirty="0"/>
+              <a:t> </a:t>
+            </a:r>
+            <a:r>
+              <a:rPr dirty="0" err="1"/>
+              <a:t>imediatamente</a:t>
+            </a:r>
+            <a:r>
+              <a:rPr dirty="0"/>
+              <a:t> </a:t>
+            </a:r>
+            <a:r>
+              <a:rPr dirty="0" err="1"/>
+              <a:t>aos</a:t>
+            </a:r>
+            <a:r>
+              <a:rPr dirty="0"/>
+              <a:t> </a:t>
+            </a:r>
+            <a:r>
+              <a:rPr dirty="0" err="1"/>
+              <a:t>sentimentos</a:t>
+            </a:r>
+            <a:r>
+              <a:rPr dirty="0"/>
+              <a:t> e </a:t>
+            </a:r>
+            <a:r>
+              <a:rPr dirty="0" err="1"/>
+              <a:t>intenções</a:t>
+            </a:r>
+            <a:r>
+              <a:rPr dirty="0"/>
+              <a:t> do </a:t>
+            </a:r>
+            <a:r>
+              <a:rPr dirty="0" err="1"/>
+              <a:t>usuário</a:t>
+            </a:r>
+            <a:r>
+              <a:rPr dirty="0"/>
+              <a:t>, </a:t>
+            </a:r>
+            <a:r>
+              <a:rPr dirty="0" err="1"/>
+              <a:t>sem</a:t>
+            </a:r>
+            <a:r>
+              <a:rPr dirty="0"/>
+              <a:t> </a:t>
+            </a:r>
+            <a:r>
+              <a:rPr dirty="0" err="1"/>
+              <a:t>recarregar</a:t>
+            </a:r>
+            <a:r>
+              <a:rPr dirty="0"/>
+              <a:t> a </a:t>
+            </a:r>
+            <a:r>
+              <a:rPr dirty="0" err="1"/>
+              <a:t>página</a:t>
+            </a:r>
+            <a:r>
+              <a:rPr dirty="0"/>
+              <a:t> e </a:t>
+            </a:r>
+            <a:r>
+              <a:rPr dirty="0" err="1"/>
+              <a:t>sem</a:t>
+            </a:r>
+            <a:r>
+              <a:rPr dirty="0"/>
+              <a:t> </a:t>
+            </a:r>
+            <a:r>
+              <a:rPr dirty="0" err="1"/>
+              <a:t>travar</a:t>
+            </a:r>
+            <a:r>
+              <a:rPr dirty="0"/>
+              <a:t> a </a:t>
+            </a:r>
+            <a:r>
+              <a:rPr dirty="0" err="1"/>
+              <a:t>navegação</a:t>
+            </a:r>
+            <a:r>
+              <a:rPr dirty="0"/>
+              <a:t>.</a:t>
             </a:r>
           </a:p>
         </p:txBody>
@@ -7462,6 +8872,7 @@
           <a:lstStyle/>
           <a:p>
             <a:pPr algn="ctr"/>
+            <a:endParaRPr/>
           </a:p>
         </p:txBody>
       </p:sp>
@@ -7474,7 +8885,7 @@
         <p:spPr>
           <a:xfrm>
             <a:off x="6537960" y="1417320"/>
-            <a:ext cx="4617720" cy="4434840"/>
+            <a:ext cx="4617720" cy="4424288"/>
           </a:xfrm>
           <a:prstGeom prst="rect">
             <a:avLst/>
@@ -7487,7 +8898,7 @@
           </a:bodyPr>
           <a:lstStyle/>
           <a:p>
-            <a:pPr>
+            <a:pPr algn="just">
               <a:defRPr sz="1550" b="1">
                 <a:solidFill>
                   <a:srgbClr val="00873E"/>
@@ -7496,63 +8907,408 @@
               </a:defRPr>
             </a:pPr>
             <a:r>
-              <a:t>O Que Mudou na Experiência de Quem Usa</a:t>
-            </a:r>
-          </a:p>
-          <a:p>
-            <a:br/>
-            <a:pPr algn="just">
-              <a:defRPr sz="1150">
-                <a:solidFill>
-                  <a:srgbClr val="1E293B"/>
-                </a:solidFill>
-                <a:latin typeface="Segoe UI"/>
-              </a:defRPr>
-            </a:pPr>
-            <a:r>
-              <a:t>• Retorno Imediato: Ao enviar uma doação, a meta comunitária sobe na mesma hora no topo do site e um Recibo Solidário com código único surge na tela.</a:t>
-            </a:r>
-          </a:p>
-          <a:p>
-            <a:br/>
-            <a:pPr algn="just">
-              <a:defRPr sz="1150">
-                <a:solidFill>
-                  <a:srgbClr val="1E293B"/>
-                </a:solidFill>
-                <a:latin typeface="Segoe UI"/>
-              </a:defRPr>
-            </a:pPr>
-            <a:r>
-              <a:t>• Menos Esforço para Fazer o Bem: Botões de clique rápido ('1 Cesta', '2 Cestas', '5 Cestas') evitam digitação demorada no celular.</a:t>
-            </a:r>
-          </a:p>
-          <a:p>
-            <a:br/>
-            <a:pPr algn="just">
-              <a:defRPr sz="1150">
-                <a:solidFill>
-                  <a:srgbClr val="1E293B"/>
-                </a:solidFill>
-                <a:latin typeface="Segoe UI"/>
-              </a:defRPr>
-            </a:pPr>
-            <a:r>
-              <a:t>• Chave PIX com 1 Toque: Cópia instantânea da chave institucional com aviso de confirmação na tela via Clipboard API.</a:t>
-            </a:r>
-          </a:p>
-          <a:p>
-            <a:br/>
-            <a:pPr algn="just">
-              <a:defRPr sz="1150">
-                <a:solidFill>
-                  <a:srgbClr val="1E293B"/>
-                </a:solidFill>
-                <a:latin typeface="Segoe UI"/>
-              </a:defRPr>
-            </a:pPr>
-            <a:r>
-              <a:t>• Trilha Sonora Emocionante: Player com a canção 'Imagine' (John Lennon, 1971), que respeita a privacidade do usuário e pode ser pausado, mutado ou recolhido a qualquer momento.</a:t>
+              <a:rPr dirty="0"/>
+              <a:t>O </a:t>
+            </a:r>
+            <a:r>
+              <a:rPr dirty="0" err="1"/>
+              <a:t>Que</a:t>
+            </a:r>
+            <a:r>
+              <a:rPr dirty="0"/>
+              <a:t> </a:t>
+            </a:r>
+            <a:r>
+              <a:rPr dirty="0" err="1"/>
+              <a:t>Mudou</a:t>
+            </a:r>
+            <a:r>
+              <a:rPr dirty="0"/>
+              <a:t> </a:t>
+            </a:r>
+            <a:r>
+              <a:rPr dirty="0" err="1"/>
+              <a:t>na</a:t>
+            </a:r>
+            <a:r>
+              <a:rPr dirty="0"/>
+              <a:t> </a:t>
+            </a:r>
+            <a:r>
+              <a:rPr dirty="0" err="1"/>
+              <a:t>Experiência</a:t>
+            </a:r>
+            <a:r>
+              <a:rPr dirty="0"/>
+              <a:t> de Quem Usa</a:t>
+            </a:r>
+          </a:p>
+          <a:p>
+            <a:pPr algn="just"/>
+            <a:br>
+              <a:rPr sz="1600" dirty="0"/>
+            </a:br>
+            <a:r>
+              <a:rPr sz="1600" dirty="0"/>
+              <a:t>• </a:t>
+            </a:r>
+            <a:r>
+              <a:rPr sz="1600" dirty="0" err="1"/>
+              <a:t>Retorno</a:t>
+            </a:r>
+            <a:r>
+              <a:rPr sz="1600" dirty="0"/>
+              <a:t> </a:t>
+            </a:r>
+            <a:r>
+              <a:rPr sz="1600" dirty="0" err="1"/>
+              <a:t>Imediato</a:t>
+            </a:r>
+            <a:r>
+              <a:rPr sz="1600" dirty="0"/>
+              <a:t>: Ao </a:t>
+            </a:r>
+            <a:r>
+              <a:rPr sz="1600" dirty="0" err="1"/>
+              <a:t>enviar</a:t>
+            </a:r>
+            <a:r>
+              <a:rPr sz="1600" dirty="0"/>
+              <a:t> </a:t>
+            </a:r>
+            <a:r>
+              <a:rPr sz="1600" dirty="0" err="1"/>
+              <a:t>uma</a:t>
+            </a:r>
+            <a:r>
+              <a:rPr sz="1600" dirty="0"/>
+              <a:t> </a:t>
+            </a:r>
+            <a:r>
+              <a:rPr sz="1600" dirty="0" err="1"/>
+              <a:t>doação</a:t>
+            </a:r>
+            <a:r>
+              <a:rPr sz="1600" dirty="0"/>
+              <a:t>, a meta </a:t>
+            </a:r>
+            <a:r>
+              <a:rPr sz="1600" dirty="0" err="1"/>
+              <a:t>comunitária</a:t>
+            </a:r>
+            <a:r>
+              <a:rPr sz="1600" dirty="0"/>
+              <a:t> </a:t>
+            </a:r>
+            <a:r>
+              <a:rPr sz="1600" dirty="0" err="1"/>
+              <a:t>sobe</a:t>
+            </a:r>
+            <a:r>
+              <a:rPr sz="1600" dirty="0"/>
+              <a:t> </a:t>
+            </a:r>
+            <a:r>
+              <a:rPr sz="1600" dirty="0" err="1"/>
+              <a:t>na</a:t>
+            </a:r>
+            <a:r>
+              <a:rPr sz="1600" dirty="0"/>
+              <a:t> </a:t>
+            </a:r>
+            <a:r>
+              <a:rPr sz="1600" dirty="0" err="1"/>
+              <a:t>mesma</a:t>
+            </a:r>
+            <a:r>
+              <a:rPr sz="1600" dirty="0"/>
+              <a:t> hora no topo do site e um </a:t>
+            </a:r>
+            <a:r>
+              <a:rPr sz="1600" dirty="0" err="1"/>
+              <a:t>Recibo</a:t>
+            </a:r>
+            <a:r>
+              <a:rPr sz="1600" dirty="0"/>
+              <a:t> </a:t>
+            </a:r>
+            <a:r>
+              <a:rPr sz="1600" dirty="0" err="1"/>
+              <a:t>Solidário</a:t>
+            </a:r>
+            <a:r>
+              <a:rPr sz="1600" dirty="0"/>
+              <a:t> com </a:t>
+            </a:r>
+            <a:r>
+              <a:rPr sz="1600" dirty="0" err="1"/>
+              <a:t>código</a:t>
+            </a:r>
+            <a:r>
+              <a:rPr sz="1600" dirty="0"/>
+              <a:t> </a:t>
+            </a:r>
+            <a:r>
+              <a:rPr sz="1600" dirty="0" err="1"/>
+              <a:t>único</a:t>
+            </a:r>
+            <a:r>
+              <a:rPr sz="1600" dirty="0"/>
+              <a:t> surge </a:t>
+            </a:r>
+            <a:r>
+              <a:rPr sz="1600" dirty="0" err="1"/>
+              <a:t>na</a:t>
+            </a:r>
+            <a:r>
+              <a:rPr sz="1600" dirty="0"/>
+              <a:t> </a:t>
+            </a:r>
+            <a:r>
+              <a:rPr sz="1600" dirty="0" err="1"/>
+              <a:t>tela</a:t>
+            </a:r>
+            <a:r>
+              <a:rPr sz="1600" dirty="0"/>
+              <a:t>.</a:t>
+            </a:r>
+          </a:p>
+          <a:p>
+            <a:pPr algn="just"/>
+            <a:br>
+              <a:rPr sz="1600" dirty="0"/>
+            </a:br>
+            <a:r>
+              <a:rPr sz="1600" dirty="0"/>
+              <a:t>• Menos </a:t>
+            </a:r>
+            <a:r>
+              <a:rPr sz="1600" dirty="0" err="1"/>
+              <a:t>Esforço</a:t>
+            </a:r>
+            <a:r>
+              <a:rPr sz="1600" dirty="0"/>
+              <a:t> para Fazer o Bem: </a:t>
+            </a:r>
+            <a:r>
+              <a:rPr sz="1600" dirty="0" err="1"/>
+              <a:t>Botões</a:t>
+            </a:r>
+            <a:r>
+              <a:rPr sz="1600" dirty="0"/>
+              <a:t> de clique </a:t>
+            </a:r>
+            <a:r>
+              <a:rPr sz="1600" dirty="0" err="1"/>
+              <a:t>rápido</a:t>
+            </a:r>
+            <a:r>
+              <a:rPr sz="1600" dirty="0"/>
+              <a:t> ('1 Cesta', '2 Cestas', '5 Cestas') </a:t>
+            </a:r>
+            <a:r>
+              <a:rPr sz="1600" dirty="0" err="1"/>
+              <a:t>evitam</a:t>
+            </a:r>
+            <a:r>
+              <a:rPr sz="1600" dirty="0"/>
+              <a:t> </a:t>
+            </a:r>
+            <a:r>
+              <a:rPr sz="1600" dirty="0" err="1"/>
+              <a:t>digitação</a:t>
+            </a:r>
+            <a:r>
+              <a:rPr sz="1600" dirty="0"/>
+              <a:t> </a:t>
+            </a:r>
+            <a:r>
+              <a:rPr sz="1600" dirty="0" err="1"/>
+              <a:t>demorada</a:t>
+            </a:r>
+            <a:r>
+              <a:rPr sz="1600" dirty="0"/>
+              <a:t> no </a:t>
+            </a:r>
+            <a:r>
+              <a:rPr sz="1600" dirty="0" err="1"/>
+              <a:t>celular</a:t>
+            </a:r>
+            <a:r>
+              <a:rPr sz="1600" dirty="0"/>
+              <a:t>.</a:t>
+            </a:r>
+          </a:p>
+          <a:p>
+            <a:pPr algn="just"/>
+            <a:br>
+              <a:rPr sz="1600" dirty="0"/>
+            </a:br>
+            <a:r>
+              <a:rPr sz="1600" dirty="0"/>
+              <a:t>• Chave PIX com 1 Toque: </a:t>
+            </a:r>
+            <a:r>
+              <a:rPr sz="1600" dirty="0" err="1"/>
+              <a:t>Cópia</a:t>
+            </a:r>
+            <a:r>
+              <a:rPr sz="1600" dirty="0"/>
+              <a:t> </a:t>
+            </a:r>
+            <a:r>
+              <a:rPr sz="1600" dirty="0" err="1"/>
+              <a:t>instantânea</a:t>
+            </a:r>
+            <a:r>
+              <a:rPr sz="1600" dirty="0"/>
+              <a:t> da </a:t>
+            </a:r>
+            <a:r>
+              <a:rPr sz="1600" dirty="0" err="1"/>
+              <a:t>chave</a:t>
+            </a:r>
+            <a:r>
+              <a:rPr sz="1600" dirty="0"/>
+              <a:t> </a:t>
+            </a:r>
+            <a:r>
+              <a:rPr sz="1600" dirty="0" err="1"/>
+              <a:t>institucional</a:t>
+            </a:r>
+            <a:r>
+              <a:rPr sz="1600" dirty="0"/>
+              <a:t> com aviso de </a:t>
+            </a:r>
+            <a:r>
+              <a:rPr sz="1600" dirty="0" err="1"/>
+              <a:t>confirmação</a:t>
+            </a:r>
+            <a:r>
+              <a:rPr sz="1600" dirty="0"/>
+              <a:t> </a:t>
+            </a:r>
+            <a:r>
+              <a:rPr sz="1600" dirty="0" err="1"/>
+              <a:t>na</a:t>
+            </a:r>
+            <a:r>
+              <a:rPr sz="1600" dirty="0"/>
+              <a:t> </a:t>
+            </a:r>
+            <a:r>
+              <a:rPr sz="1600" dirty="0" err="1"/>
+              <a:t>tela</a:t>
+            </a:r>
+            <a:r>
+              <a:rPr sz="1600" dirty="0"/>
+              <a:t> via Clipboard API.</a:t>
+            </a:r>
+          </a:p>
+          <a:p>
+            <a:pPr algn="just"/>
+            <a:br>
+              <a:rPr sz="1600" dirty="0"/>
+            </a:br>
+            <a:r>
+              <a:rPr sz="1600" dirty="0"/>
+              <a:t>• Trilha Sonora Emocionante: Player com a </a:t>
+            </a:r>
+            <a:r>
+              <a:rPr sz="1600" dirty="0" err="1"/>
+              <a:t>canção</a:t>
+            </a:r>
+            <a:r>
+              <a:rPr sz="1600" dirty="0"/>
+              <a:t> 'Imagine' (John Lennon, 1971), </a:t>
+            </a:r>
+            <a:r>
+              <a:rPr sz="1600" dirty="0" err="1"/>
+              <a:t>que</a:t>
+            </a:r>
+            <a:r>
+              <a:rPr sz="1600" dirty="0"/>
+              <a:t> </a:t>
+            </a:r>
+            <a:r>
+              <a:rPr sz="1600" dirty="0" err="1"/>
+              <a:t>respeita</a:t>
+            </a:r>
+            <a:r>
+              <a:rPr sz="1600" dirty="0"/>
+              <a:t> a </a:t>
+            </a:r>
+            <a:r>
+              <a:rPr sz="1600" dirty="0" err="1"/>
+              <a:t>privacidade</a:t>
+            </a:r>
+            <a:r>
+              <a:rPr sz="1600" dirty="0"/>
+              <a:t> do </a:t>
+            </a:r>
+            <a:r>
+              <a:rPr sz="1600" dirty="0" err="1"/>
+              <a:t>usuário</a:t>
+            </a:r>
+            <a:r>
+              <a:rPr sz="1600" dirty="0"/>
+              <a:t> e </a:t>
+            </a:r>
+            <a:r>
+              <a:rPr sz="1600" dirty="0" err="1"/>
+              <a:t>pode</a:t>
+            </a:r>
+            <a:r>
+              <a:rPr sz="1600" dirty="0"/>
+              <a:t> ser </a:t>
+            </a:r>
+            <a:r>
+              <a:rPr sz="1600" dirty="0" err="1"/>
+              <a:t>pausado</a:t>
+            </a:r>
+            <a:r>
+              <a:rPr sz="1600" dirty="0"/>
+              <a:t>, </a:t>
+            </a:r>
+            <a:r>
+              <a:rPr sz="1600" dirty="0" err="1"/>
+              <a:t>mutado</a:t>
+            </a:r>
+            <a:r>
+              <a:rPr sz="1600" dirty="0"/>
+              <a:t> </a:t>
+            </a:r>
+            <a:r>
+              <a:rPr sz="1600" dirty="0" err="1"/>
+              <a:t>ou</a:t>
+            </a:r>
+            <a:r>
+              <a:rPr sz="1600" dirty="0"/>
+              <a:t> </a:t>
+            </a:r>
+            <a:r>
+              <a:rPr sz="1600" dirty="0" err="1"/>
+              <a:t>recolhido</a:t>
+            </a:r>
+            <a:r>
+              <a:rPr sz="1600" dirty="0"/>
+              <a:t> a </a:t>
+            </a:r>
+            <a:r>
+              <a:rPr sz="1600" dirty="0" err="1"/>
+              <a:t>qualquer</a:t>
+            </a:r>
+            <a:r>
+              <a:rPr sz="1600" dirty="0"/>
+              <a:t> </a:t>
+            </a:r>
+            <a:r>
+              <a:rPr sz="1600" dirty="0" err="1"/>
+              <a:t>momento</a:t>
+            </a:r>
+            <a:r>
+              <a:rPr sz="1600" dirty="0"/>
+              <a:t>.</a:t>
             </a:r>
           </a:p>
         </p:txBody>
@@ -7566,7 +9322,7 @@
 </file>
 
 <file path=ppt/slides/slide4.xml><?xml version="1.0" encoding="utf-8"?>
-<p:sld xmlns:a="http://schemas.openxmlformats.org/drawingml/2006/main" xmlns:p="http://schemas.openxmlformats.org/presentationml/2006/main" xmlns:r="http://schemas.openxmlformats.org/officeDocument/2006/relationships">
+<p:sld xmlns:a="http://schemas.openxmlformats.org/drawingml/2006/main" xmlns:r="http://schemas.openxmlformats.org/officeDocument/2006/relationships" xmlns:p="http://schemas.openxmlformats.org/presentationml/2006/main">
   <p:cSld>
     <p:spTree>
       <p:nvGrpSpPr>
@@ -7574,7 +9330,14 @@
         <p:cNvGrpSpPr/>
         <p:nvPr/>
       </p:nvGrpSpPr>
-      <p:grpSpPr/>
+      <p:grpSpPr>
+        <a:xfrm>
+          <a:off x="0" y="0"/>
+          <a:ext cx="0" cy="0"/>
+          <a:chOff x="0" y="0"/>
+          <a:chExt cx="0" cy="0"/>
+        </a:xfrm>
+      </p:grpSpPr>
       <p:sp>
         <p:nvSpPr>
           <p:cNvPr id="2" name="TextBox 1"/>
@@ -7649,7 +9412,7 @@
           </a:fontRef>
         </p:style>
         <p:txBody>
-          <a:bodyPr rtlCol="0" anchor="ctr" tIns="54864"/>
+          <a:bodyPr tIns="54864" rtlCol="0" anchor="ctr"/>
           <a:lstStyle/>
           <a:p>
             <a:pPr algn="ctr">
@@ -7706,6 +9469,7 @@
           <a:lstStyle/>
           <a:p>
             <a:pPr algn="ctr"/>
+            <a:endParaRPr/>
           </a:p>
         </p:txBody>
       </p:sp>
@@ -7749,6 +9513,7 @@
           <a:lstStyle/>
           <a:p>
             <a:pPr algn="ctr"/>
+            <a:endParaRPr/>
           </a:p>
         </p:txBody>
       </p:sp>
@@ -7855,7 +9620,36 @@
               </a:defRPr>
             </a:pPr>
             <a:r>
-              <a:t>Os Sentidos da Aplicação (Eventos JavaScript)</a:t>
+              <a:rPr dirty="0" err="1"/>
+              <a:t>Os</a:t>
+            </a:r>
+            <a:r>
+              <a:rPr dirty="0"/>
+              <a:t> </a:t>
+            </a:r>
+            <a:r>
+              <a:rPr dirty="0" err="1"/>
+              <a:t>Sentidos</a:t>
+            </a:r>
+            <a:r>
+              <a:rPr dirty="0"/>
+              <a:t> da </a:t>
+            </a:r>
+            <a:r>
+              <a:rPr dirty="0" err="1"/>
+              <a:t>Aplicação</a:t>
+            </a:r>
+            <a:r>
+              <a:rPr dirty="0"/>
+              <a:t> (</a:t>
+            </a:r>
+            <a:r>
+              <a:rPr dirty="0" err="1"/>
+              <a:t>Eventos</a:t>
+            </a:r>
+            <a:r>
+              <a:rPr dirty="0"/>
+              <a:t> JavaScript)</a:t>
             </a:r>
           </a:p>
           <a:p>
@@ -7868,7 +9662,60 @@
               </a:defRPr>
             </a:pPr>
             <a:r>
-              <a:t>Tratamento de eventos pensado para ser acolhedor e intuitivo, sem burocracias:</a:t>
+              <a:rPr dirty="0" err="1"/>
+              <a:t>Tratamento</a:t>
+            </a:r>
+            <a:r>
+              <a:rPr dirty="0"/>
+              <a:t> de </a:t>
+            </a:r>
+            <a:r>
+              <a:rPr dirty="0" err="1"/>
+              <a:t>eventos</a:t>
+            </a:r>
+            <a:r>
+              <a:rPr dirty="0"/>
+              <a:t> </a:t>
+            </a:r>
+            <a:r>
+              <a:rPr dirty="0" err="1"/>
+              <a:t>pensado</a:t>
+            </a:r>
+            <a:r>
+              <a:rPr dirty="0"/>
+              <a:t> para ser </a:t>
+            </a:r>
+            <a:r>
+              <a:rPr dirty="0" err="1"/>
+              <a:t>acolhedor</a:t>
+            </a:r>
+            <a:r>
+              <a:rPr dirty="0"/>
+              <a:t> e </a:t>
+            </a:r>
+            <a:r>
+              <a:rPr dirty="0" err="1"/>
+              <a:t>intuitivo</a:t>
+            </a:r>
+            <a:r>
+              <a:rPr dirty="0"/>
+              <a:t>, </a:t>
+            </a:r>
+            <a:r>
+              <a:rPr dirty="0" err="1"/>
+              <a:t>sem</a:t>
+            </a:r>
+            <a:r>
+              <a:rPr dirty="0"/>
+              <a:t> </a:t>
+            </a:r>
+            <a:r>
+              <a:rPr dirty="0" err="1"/>
+              <a:t>burocracias</a:t>
+            </a:r>
+            <a:r>
+              <a:rPr dirty="0"/>
+              <a:t>:</a:t>
             </a:r>
           </a:p>
         </p:txBody>
@@ -7915,6 +9762,7 @@
           <a:lstStyle/>
           <a:p>
             <a:pPr algn="ctr"/>
+            <a:endParaRPr/>
           </a:p>
         </p:txBody>
       </p:sp>
@@ -7958,6 +9806,7 @@
           <a:lstStyle/>
           <a:p>
             <a:pPr algn="ctr"/>
+            <a:endParaRPr/>
           </a:p>
         </p:txBody>
       </p:sp>
@@ -7970,7 +9819,7 @@
         <p:spPr>
           <a:xfrm>
             <a:off x="960120" y="2651760"/>
-            <a:ext cx="4800600" cy="3246120"/>
+            <a:ext cx="4800600" cy="3046988"/>
           </a:xfrm>
           <a:prstGeom prst="rect">
             <a:avLst/>
@@ -7983,7 +9832,7 @@
           </a:bodyPr>
           <a:lstStyle/>
           <a:p>
-            <a:pPr>
+            <a:pPr algn="just">
               <a:defRPr sz="1300" b="1">
                 <a:solidFill>
                   <a:srgbClr val="00873E"/>
@@ -7992,7 +9841,20 @@
               </a:defRPr>
             </a:pPr>
             <a:r>
-              <a:t>Eventos Centrais Implementados:</a:t>
+              <a:rPr sz="1600" dirty="0" err="1"/>
+              <a:t>Eventos</a:t>
+            </a:r>
+            <a:r>
+              <a:rPr sz="1600" dirty="0"/>
+              <a:t> Centrais </a:t>
+            </a:r>
+            <a:r>
+              <a:rPr sz="1600" dirty="0" err="1"/>
+              <a:t>Implementados</a:t>
+            </a:r>
+            <a:r>
+              <a:rPr sz="1600" dirty="0"/>
+              <a:t>:</a:t>
             </a:r>
           </a:p>
           <a:p>
@@ -8005,8 +9867,114 @@
               </a:defRPr>
             </a:pPr>
             <a:r>
-              <a:t>• onSubmit (Doar.jsx): Interrompe o recarregamento brusco, valida campos, grava no localStorage e emite Recibo Solidário com código rastreável (REC-XXXXXX).</a:t>
-            </a:r>
+              <a:rPr sz="1400" dirty="0"/>
+              <a:t>• </a:t>
+            </a:r>
+            <a:r>
+              <a:rPr sz="1400" dirty="0" err="1"/>
+              <a:t>onSubmit</a:t>
+            </a:r>
+            <a:r>
+              <a:rPr sz="1400" dirty="0"/>
+              <a:t> (</a:t>
+            </a:r>
+            <a:r>
+              <a:rPr sz="1400" dirty="0" err="1"/>
+              <a:t>Doar.jsx</a:t>
+            </a:r>
+            <a:r>
+              <a:rPr sz="1400" dirty="0"/>
+              <a:t>): </a:t>
+            </a:r>
+            <a:r>
+              <a:rPr sz="1400" dirty="0" err="1"/>
+              <a:t>Interrompe</a:t>
+            </a:r>
+            <a:r>
+              <a:rPr sz="1400" dirty="0"/>
+              <a:t> o </a:t>
+            </a:r>
+            <a:r>
+              <a:rPr sz="1400" dirty="0" err="1"/>
+              <a:t>recarregamento</a:t>
+            </a:r>
+            <a:r>
+              <a:rPr sz="1400" dirty="0"/>
+              <a:t> </a:t>
+            </a:r>
+            <a:r>
+              <a:rPr sz="1400" dirty="0" err="1"/>
+              <a:t>brusco</a:t>
+            </a:r>
+            <a:r>
+              <a:rPr sz="1400" dirty="0"/>
+              <a:t>, </a:t>
+            </a:r>
+            <a:r>
+              <a:rPr sz="1400" dirty="0" err="1"/>
+              <a:t>valida</a:t>
+            </a:r>
+            <a:r>
+              <a:rPr sz="1400" dirty="0"/>
+              <a:t> campos, </a:t>
+            </a:r>
+            <a:r>
+              <a:rPr sz="1400" dirty="0" err="1"/>
+              <a:t>grava</a:t>
+            </a:r>
+            <a:r>
+              <a:rPr sz="1400" dirty="0"/>
+              <a:t> no </a:t>
+            </a:r>
+            <a:r>
+              <a:rPr sz="1400" dirty="0" err="1"/>
+              <a:t>localStorage</a:t>
+            </a:r>
+            <a:r>
+              <a:rPr sz="1400" dirty="0"/>
+              <a:t> e </a:t>
+            </a:r>
+            <a:r>
+              <a:rPr sz="1400" dirty="0" err="1"/>
+              <a:t>emite</a:t>
+            </a:r>
+            <a:r>
+              <a:rPr sz="1400" dirty="0"/>
+              <a:t> </a:t>
+            </a:r>
+            <a:r>
+              <a:rPr sz="1400" dirty="0" err="1"/>
+              <a:t>Recibo</a:t>
+            </a:r>
+            <a:r>
+              <a:rPr sz="1400" dirty="0"/>
+              <a:t> </a:t>
+            </a:r>
+            <a:r>
+              <a:rPr sz="1400" dirty="0" err="1"/>
+              <a:t>Solidário</a:t>
+            </a:r>
+            <a:r>
+              <a:rPr sz="1400" dirty="0"/>
+              <a:t> com </a:t>
+            </a:r>
+            <a:r>
+              <a:rPr sz="1400" dirty="0" err="1"/>
+              <a:t>código</a:t>
+            </a:r>
+            <a:r>
+              <a:rPr sz="1400" dirty="0"/>
+              <a:t> </a:t>
+            </a:r>
+            <a:r>
+              <a:rPr sz="1400" dirty="0" err="1"/>
+              <a:t>rastreável</a:t>
+            </a:r>
+            <a:r>
+              <a:rPr sz="1400" dirty="0"/>
+              <a:t> (REC-XXXXXX).</a:t>
+            </a:r>
+            <a:endParaRPr lang="pt-BR" sz="1400" dirty="0"/>
           </a:p>
           <a:p>
             <a:pPr algn="just">
@@ -8017,9 +9985,7 @@
                 <a:latin typeface="Segoe UI"/>
               </a:defRPr>
             </a:pPr>
-            <a:r>
-              <a:t>• onChange (PrestacaoContas.jsx): Filtra os 13 bairros e a Zona Rural enquanto o morador digita, normalizando acentos sem travamentos.</a:t>
-            </a:r>
+            <a:endParaRPr sz="1400" dirty="0"/>
           </a:p>
           <a:p>
             <a:pPr algn="just">
@@ -8031,8 +9997,90 @@
               </a:defRPr>
             </a:pPr>
             <a:r>
-              <a:t>• onClick na Navbar: Menu móvel que abre e fecha sozinho ao tocar em qualquer link.</a:t>
-            </a:r>
+              <a:rPr sz="1400" dirty="0"/>
+              <a:t>• </a:t>
+            </a:r>
+            <a:r>
+              <a:rPr sz="1400" dirty="0" err="1"/>
+              <a:t>onChange</a:t>
+            </a:r>
+            <a:r>
+              <a:rPr sz="1400" dirty="0"/>
+              <a:t> (</a:t>
+            </a:r>
+            <a:r>
+              <a:rPr sz="1400" dirty="0" err="1"/>
+              <a:t>PrestacaoContas.jsx</a:t>
+            </a:r>
+            <a:r>
+              <a:rPr sz="1400" dirty="0"/>
+              <a:t>): Filtra </a:t>
+            </a:r>
+            <a:r>
+              <a:rPr sz="1400" dirty="0" err="1"/>
+              <a:t>os</a:t>
+            </a:r>
+            <a:r>
+              <a:rPr sz="1400" dirty="0"/>
+              <a:t> 13 bairros e a Zona Rural </a:t>
+            </a:r>
+            <a:r>
+              <a:rPr sz="1400" dirty="0" err="1"/>
+              <a:t>enquanto</a:t>
+            </a:r>
+            <a:r>
+              <a:rPr sz="1400" dirty="0"/>
+              <a:t> o </a:t>
+            </a:r>
+            <a:r>
+              <a:rPr sz="1400" dirty="0" err="1"/>
+              <a:t>morador</a:t>
+            </a:r>
+            <a:r>
+              <a:rPr sz="1400" dirty="0"/>
+              <a:t> </a:t>
+            </a:r>
+            <a:r>
+              <a:rPr sz="1400" dirty="0" err="1"/>
+              <a:t>digita</a:t>
+            </a:r>
+            <a:r>
+              <a:rPr sz="1400" dirty="0"/>
+              <a:t>, </a:t>
+            </a:r>
+            <a:r>
+              <a:rPr sz="1400" dirty="0" err="1"/>
+              <a:t>normalizando</a:t>
+            </a:r>
+            <a:r>
+              <a:rPr sz="1400" dirty="0"/>
+              <a:t> </a:t>
+            </a:r>
+            <a:r>
+              <a:rPr sz="1400" dirty="0" err="1"/>
+              <a:t>acentos</a:t>
+            </a:r>
+            <a:r>
+              <a:rPr sz="1400" dirty="0"/>
+              <a:t> </a:t>
+            </a:r>
+            <a:r>
+              <a:rPr sz="1400" dirty="0" err="1"/>
+              <a:t>sem</a:t>
+            </a:r>
+            <a:r>
+              <a:rPr sz="1400" dirty="0"/>
+              <a:t> </a:t>
+            </a:r>
+            <a:r>
+              <a:rPr sz="1400" dirty="0" err="1"/>
+              <a:t>travamentos</a:t>
+            </a:r>
+            <a:r>
+              <a:rPr sz="1400" dirty="0"/>
+              <a:t>.</a:t>
+            </a:r>
+            <a:endParaRPr lang="pt-BR" sz="1400" dirty="0"/>
           </a:p>
           <a:p>
             <a:pPr algn="just">
@@ -8043,8 +10091,174 @@
                 <a:latin typeface="Segoe UI"/>
               </a:defRPr>
             </a:pPr>
-            <a:r>
-              <a:t>• Clipboard API: Cópia suave da chave PIX sem selecionar texto.</a:t>
+            <a:endParaRPr sz="1400" dirty="0"/>
+          </a:p>
+          <a:p>
+            <a:pPr algn="just">
+              <a:defRPr sz="1050">
+                <a:solidFill>
+                  <a:srgbClr val="1E293B"/>
+                </a:solidFill>
+                <a:latin typeface="Segoe UI"/>
+              </a:defRPr>
+            </a:pPr>
+            <a:r>
+              <a:rPr sz="1400" dirty="0"/>
+              <a:t>• </a:t>
+            </a:r>
+            <a:r>
+              <a:rPr sz="1400" dirty="0" err="1"/>
+              <a:t>onClick</a:t>
+            </a:r>
+            <a:r>
+              <a:rPr sz="1400" dirty="0"/>
+              <a:t> </a:t>
+            </a:r>
+            <a:r>
+              <a:rPr sz="1400" dirty="0" err="1"/>
+              <a:t>na</a:t>
+            </a:r>
+            <a:r>
+              <a:rPr sz="1400" dirty="0"/>
+              <a:t> Navbar: Menu </a:t>
+            </a:r>
+            <a:r>
+              <a:rPr sz="1400" dirty="0" err="1"/>
+              <a:t>móvel</a:t>
+            </a:r>
+            <a:r>
+              <a:rPr sz="1400" dirty="0"/>
+              <a:t> </a:t>
+            </a:r>
+            <a:r>
+              <a:rPr sz="1400" dirty="0" err="1"/>
+              <a:t>que</a:t>
+            </a:r>
+            <a:r>
+              <a:rPr sz="1400" dirty="0"/>
+              <a:t> </a:t>
+            </a:r>
+            <a:r>
+              <a:rPr sz="1400" dirty="0" err="1"/>
+              <a:t>abre</a:t>
+            </a:r>
+            <a:r>
+              <a:rPr sz="1400" dirty="0"/>
+              <a:t> e </a:t>
+            </a:r>
+            <a:r>
+              <a:rPr sz="1400" dirty="0" err="1"/>
+              <a:t>fecha</a:t>
+            </a:r>
+            <a:r>
+              <a:rPr sz="1400" dirty="0"/>
+              <a:t> </a:t>
+            </a:r>
+            <a:r>
+              <a:rPr sz="1400" dirty="0" err="1"/>
+              <a:t>sozinho</a:t>
+            </a:r>
+            <a:r>
+              <a:rPr sz="1400" dirty="0"/>
+              <a:t> </a:t>
+            </a:r>
+            <a:r>
+              <a:rPr sz="1400" dirty="0" err="1"/>
+              <a:t>ao</a:t>
+            </a:r>
+            <a:r>
+              <a:rPr sz="1400" dirty="0"/>
+              <a:t> </a:t>
+            </a:r>
+            <a:r>
+              <a:rPr sz="1400" dirty="0" err="1"/>
+              <a:t>tocar</a:t>
+            </a:r>
+            <a:r>
+              <a:rPr sz="1400" dirty="0"/>
+              <a:t> </a:t>
+            </a:r>
+            <a:r>
+              <a:rPr sz="1400" dirty="0" err="1"/>
+              <a:t>em</a:t>
+            </a:r>
+            <a:r>
+              <a:rPr sz="1400" dirty="0"/>
+              <a:t> </a:t>
+            </a:r>
+            <a:r>
+              <a:rPr sz="1400" dirty="0" err="1"/>
+              <a:t>qualquer</a:t>
+            </a:r>
+            <a:r>
+              <a:rPr sz="1400" dirty="0"/>
+              <a:t> link.</a:t>
+            </a:r>
+            <a:endParaRPr lang="pt-BR" sz="1400" dirty="0"/>
+          </a:p>
+          <a:p>
+            <a:pPr algn="just">
+              <a:defRPr sz="1050">
+                <a:solidFill>
+                  <a:srgbClr val="1E293B"/>
+                </a:solidFill>
+                <a:latin typeface="Segoe UI"/>
+              </a:defRPr>
+            </a:pPr>
+            <a:endParaRPr sz="1400" dirty="0"/>
+          </a:p>
+          <a:p>
+            <a:pPr algn="just">
+              <a:defRPr sz="1050">
+                <a:solidFill>
+                  <a:srgbClr val="1E293B"/>
+                </a:solidFill>
+                <a:latin typeface="Segoe UI"/>
+              </a:defRPr>
+            </a:pPr>
+            <a:r>
+              <a:rPr sz="1400" dirty="0"/>
+              <a:t>• Clipboard API: </a:t>
+            </a:r>
+            <a:r>
+              <a:rPr sz="1400" dirty="0" err="1"/>
+              <a:t>Cópia</a:t>
+            </a:r>
+            <a:r>
+              <a:rPr sz="1400" dirty="0"/>
+              <a:t> suave da </a:t>
+            </a:r>
+            <a:r>
+              <a:rPr sz="1400" dirty="0" err="1"/>
+              <a:t>chave</a:t>
+            </a:r>
+            <a:r>
+              <a:rPr sz="1400" dirty="0"/>
+              <a:t> PIX </a:t>
+            </a:r>
+            <a:r>
+              <a:rPr sz="1400" dirty="0" err="1"/>
+              <a:t>sem</a:t>
+            </a:r>
+            <a:r>
+              <a:rPr sz="1400" dirty="0"/>
+              <a:t> </a:t>
+            </a:r>
+            <a:r>
+              <a:rPr sz="1400" dirty="0" err="1"/>
+              <a:t>selecionar</a:t>
+            </a:r>
+            <a:r>
+              <a:rPr sz="1400" dirty="0"/>
+              <a:t> </a:t>
+            </a:r>
+            <a:r>
+              <a:rPr sz="1400" dirty="0" err="1"/>
+              <a:t>texto</a:t>
+            </a:r>
+            <a:r>
+              <a:rPr sz="1400" dirty="0"/>
+              <a:t>.</a:t>
             </a:r>
           </a:p>
         </p:txBody>
@@ -8058,7 +10272,7 @@
         <p:spPr>
           <a:xfrm>
             <a:off x="6263640" y="1234440"/>
-            <a:ext cx="5166360" cy="1188720"/>
+            <a:ext cx="5166360" cy="1015663"/>
           </a:xfrm>
           <a:prstGeom prst="rect">
             <a:avLst/>
@@ -8080,7 +10294,32 @@
               </a:defRPr>
             </a:pPr>
             <a:r>
-              <a:t>A Música que Conecta Gerações (Imagine — John Lennon, 1971)</a:t>
+              <a:rPr dirty="0"/>
+              <a:t>A Música </a:t>
+            </a:r>
+            <a:r>
+              <a:rPr dirty="0" err="1"/>
+              <a:t>que</a:t>
+            </a:r>
+            <a:r>
+              <a:rPr dirty="0"/>
+              <a:t> </a:t>
+            </a:r>
+            <a:r>
+              <a:rPr dirty="0" err="1"/>
+              <a:t>Conecta</a:t>
+            </a:r>
+            <a:r>
+              <a:rPr dirty="0"/>
+              <a:t> </a:t>
+            </a:r>
+            <a:r>
+              <a:rPr dirty="0" err="1"/>
+              <a:t>Gerações</a:t>
+            </a:r>
+            <a:r>
+              <a:rPr dirty="0"/>
+              <a:t> (Imagine — John Lennon, 1971)</a:t>
             </a:r>
           </a:p>
           <a:p>
@@ -8093,7 +10332,140 @@
               </a:defRPr>
             </a:pPr>
             <a:r>
-              <a:t>Nenhum projeto comunitário vive só de botões; ele vive de sentimento. A trilha sonora traz a clássica canção 'Imagine' para sensibilização pedagógica e acolhimento.</a:t>
+              <a:rPr sz="1200" dirty="0" err="1"/>
+              <a:t>Nenhum</a:t>
+            </a:r>
+            <a:r>
+              <a:rPr sz="1200" dirty="0"/>
+              <a:t> </a:t>
+            </a:r>
+            <a:r>
+              <a:rPr sz="1200" dirty="0" err="1"/>
+              <a:t>projeto</a:t>
+            </a:r>
+            <a:r>
+              <a:rPr sz="1200" dirty="0"/>
+              <a:t> </a:t>
+            </a:r>
+            <a:r>
+              <a:rPr sz="1200" dirty="0" err="1"/>
+              <a:t>comunitário</a:t>
+            </a:r>
+            <a:r>
+              <a:rPr sz="1200" dirty="0"/>
+              <a:t> </a:t>
+            </a:r>
+            <a:r>
+              <a:rPr sz="1200" dirty="0" err="1"/>
+              <a:t>vive</a:t>
+            </a:r>
+            <a:r>
+              <a:rPr sz="1200" dirty="0"/>
+              <a:t> </a:t>
+            </a:r>
+            <a:r>
+              <a:rPr sz="1200" dirty="0" err="1"/>
+              <a:t>só</a:t>
+            </a:r>
+            <a:r>
+              <a:rPr sz="1200" dirty="0"/>
+              <a:t> de </a:t>
+            </a:r>
+            <a:r>
+              <a:rPr sz="1200" dirty="0" err="1"/>
+              <a:t>botões</a:t>
+            </a:r>
+            <a:r>
+              <a:rPr sz="1200" dirty="0"/>
+              <a:t>; </a:t>
+            </a:r>
+            <a:r>
+              <a:rPr sz="1200" dirty="0" err="1"/>
+              <a:t>ele</a:t>
+            </a:r>
+            <a:r>
+              <a:rPr sz="1200" dirty="0"/>
+              <a:t> </a:t>
+            </a:r>
+            <a:r>
+              <a:rPr sz="1200" dirty="0" err="1"/>
+              <a:t>vive</a:t>
+            </a:r>
+            <a:r>
+              <a:rPr sz="1200" dirty="0"/>
+              <a:t> de </a:t>
+            </a:r>
+            <a:r>
+              <a:rPr sz="1200" dirty="0" err="1"/>
+              <a:t>sentimento</a:t>
+            </a:r>
+            <a:r>
+              <a:rPr sz="1200" dirty="0"/>
+              <a:t>. A </a:t>
+            </a:r>
+            <a:r>
+              <a:rPr sz="1200" dirty="0" err="1"/>
+              <a:t>trilha</a:t>
+            </a:r>
+            <a:r>
+              <a:rPr sz="1200" dirty="0"/>
+              <a:t> </a:t>
+            </a:r>
+            <a:r>
+              <a:rPr sz="1200" dirty="0" err="1"/>
+              <a:t>sonora</a:t>
+            </a:r>
+            <a:r>
+              <a:rPr sz="1200" dirty="0"/>
+              <a:t> </a:t>
+            </a:r>
+            <a:r>
+              <a:rPr sz="1200" dirty="0" err="1"/>
+              <a:t>traz</a:t>
+            </a:r>
+            <a:r>
+              <a:rPr sz="1200" dirty="0"/>
+              <a:t> a </a:t>
+            </a:r>
+            <a:r>
+              <a:rPr sz="1200" dirty="0" err="1"/>
+              <a:t>clássica</a:t>
+            </a:r>
+            <a:r>
+              <a:rPr sz="1200" dirty="0"/>
+              <a:t> </a:t>
+            </a:r>
+            <a:r>
+              <a:rPr sz="1200" dirty="0" err="1"/>
+              <a:t>canção</a:t>
+            </a:r>
+            <a:r>
+              <a:rPr sz="1200" dirty="0"/>
+              <a:t> 'Imagine' para </a:t>
+            </a:r>
+            <a:r>
+              <a:rPr sz="1200" dirty="0" err="1"/>
+              <a:t>sensibilização</a:t>
+            </a:r>
+            <a:r>
+              <a:rPr sz="1200" dirty="0"/>
+              <a:t> </a:t>
+            </a:r>
+            <a:r>
+              <a:rPr sz="1200" dirty="0" err="1"/>
+              <a:t>pedagógica</a:t>
+            </a:r>
+            <a:r>
+              <a:rPr sz="1200" dirty="0"/>
+              <a:t> e </a:t>
+            </a:r>
+            <a:r>
+              <a:rPr sz="1200" dirty="0" err="1"/>
+              <a:t>acolhimento</a:t>
+            </a:r>
+            <a:r>
+              <a:rPr sz="1200" dirty="0"/>
+              <a:t>.</a:t>
             </a:r>
           </a:p>
         </p:txBody>
@@ -8140,6 +10512,7 @@
           <a:lstStyle/>
           <a:p>
             <a:pPr algn="ctr"/>
+            <a:endParaRPr/>
           </a:p>
         </p:txBody>
       </p:sp>
@@ -8152,7 +10525,7 @@
         <p:spPr>
           <a:xfrm>
             <a:off x="6537960" y="2651760"/>
-            <a:ext cx="4663440" cy="3246120"/>
+            <a:ext cx="4663440" cy="2431435"/>
           </a:xfrm>
           <a:prstGeom prst="rect">
             <a:avLst/>
@@ -8165,7 +10538,7 @@
           </a:bodyPr>
           <a:lstStyle/>
           <a:p>
-            <a:pPr>
+            <a:pPr algn="just">
               <a:defRPr sz="1300" b="1">
                 <a:solidFill>
                   <a:srgbClr val="00873E"/>
@@ -8174,35 +10547,312 @@
               </a:defRPr>
             </a:pPr>
             <a:r>
-              <a:t>Tratamento Cuidadoso de Áudio:</a:t>
-            </a:r>
-          </a:p>
-          <a:p>
-            <a:br/>
-            <a:pPr algn="just">
-              <a:defRPr sz="1100">
-                <a:solidFill>
-                  <a:srgbClr val="1E293B"/>
-                </a:solidFill>
-                <a:latin typeface="Segoe UI"/>
-              </a:defRPr>
-            </a:pPr>
-            <a:r>
-              <a:t>• Respeito ao Usuário (Anti-Autoplay Invasivo): Navegadores modernos bloqueiam reprodução automática. Criamos escutadores de evento (window.addEventListener('click') e rolagem) para iniciar suavemente quando o visitante demonstra interesse pelo site.</a:t>
-            </a:r>
-          </a:p>
-          <a:p>
-            <a:br/>
-            <a:pPr algn="just">
-              <a:defRPr sz="1100">
-                <a:solidFill>
-                  <a:srgbClr val="1E293B"/>
-                </a:solidFill>
-                <a:latin typeface="Segoe UI"/>
-              </a:defRPr>
-            </a:pPr>
-            <a:r>
-              <a:t>• Controles Completos: Slider de volume contínuo, botão de silenciar (mute), equalizador com 3 barras animadas em CSS e botão para recolher o tocador para um canto discreto da tela.</a:t>
+              <a:rPr sz="1600" dirty="0" err="1"/>
+              <a:t>Tratamento</a:t>
+            </a:r>
+            <a:r>
+              <a:rPr sz="1600" dirty="0"/>
+              <a:t> </a:t>
+            </a:r>
+            <a:r>
+              <a:rPr sz="1600" dirty="0" err="1"/>
+              <a:t>Cuidadoso</a:t>
+            </a:r>
+            <a:r>
+              <a:rPr sz="1600" dirty="0"/>
+              <a:t> de </a:t>
+            </a:r>
+            <a:r>
+              <a:rPr sz="1600" dirty="0" err="1"/>
+              <a:t>Áudio</a:t>
+            </a:r>
+            <a:r>
+              <a:rPr sz="1600" dirty="0"/>
+              <a:t>:</a:t>
+            </a:r>
+          </a:p>
+          <a:p>
+            <a:pPr algn="just"/>
+            <a:br>
+              <a:rPr sz="1600" dirty="0"/>
+            </a:br>
+            <a:r>
+              <a:rPr sz="1400" dirty="0"/>
+              <a:t>• </a:t>
+            </a:r>
+            <a:r>
+              <a:rPr sz="1400" dirty="0" err="1"/>
+              <a:t>Respeito</a:t>
+            </a:r>
+            <a:r>
+              <a:rPr sz="1400" dirty="0"/>
+              <a:t> </a:t>
+            </a:r>
+            <a:r>
+              <a:rPr sz="1400" dirty="0" err="1"/>
+              <a:t>ao</a:t>
+            </a:r>
+            <a:r>
+              <a:rPr sz="1400" dirty="0"/>
+              <a:t> </a:t>
+            </a:r>
+            <a:r>
+              <a:rPr sz="1400" dirty="0" err="1"/>
+              <a:t>Usuário</a:t>
+            </a:r>
+            <a:r>
+              <a:rPr sz="1400" dirty="0"/>
+              <a:t> (Anti-Autoplay </a:t>
+            </a:r>
+            <a:r>
+              <a:rPr sz="1400" dirty="0" err="1"/>
+              <a:t>Invasivo</a:t>
+            </a:r>
+            <a:r>
+              <a:rPr sz="1400" dirty="0"/>
+              <a:t>): </a:t>
+            </a:r>
+            <a:r>
+              <a:rPr sz="1400" dirty="0" err="1"/>
+              <a:t>Navegadores</a:t>
+            </a:r>
+            <a:r>
+              <a:rPr sz="1400" dirty="0"/>
+              <a:t> </a:t>
+            </a:r>
+            <a:r>
+              <a:rPr sz="1400" dirty="0" err="1"/>
+              <a:t>modernos</a:t>
+            </a:r>
+            <a:r>
+              <a:rPr sz="1400" dirty="0"/>
+              <a:t> </a:t>
+            </a:r>
+            <a:r>
+              <a:rPr sz="1400" dirty="0" err="1"/>
+              <a:t>bloqueiam</a:t>
+            </a:r>
+            <a:r>
+              <a:rPr sz="1400" dirty="0"/>
+              <a:t> </a:t>
+            </a:r>
+            <a:r>
+              <a:rPr sz="1400" dirty="0" err="1"/>
+              <a:t>reprodução</a:t>
+            </a:r>
+            <a:r>
+              <a:rPr sz="1400" dirty="0"/>
+              <a:t> </a:t>
+            </a:r>
+            <a:r>
+              <a:rPr sz="1400" dirty="0" err="1"/>
+              <a:t>automática</a:t>
+            </a:r>
+            <a:r>
+              <a:rPr sz="1400" dirty="0"/>
+              <a:t>. </a:t>
+            </a:r>
+            <a:r>
+              <a:rPr sz="1400" dirty="0" err="1"/>
+              <a:t>Criamos</a:t>
+            </a:r>
+            <a:r>
+              <a:rPr sz="1400" dirty="0"/>
+              <a:t> </a:t>
+            </a:r>
+            <a:r>
+              <a:rPr sz="1400" dirty="0" err="1"/>
+              <a:t>escutadores</a:t>
+            </a:r>
+            <a:r>
+              <a:rPr sz="1400" dirty="0"/>
+              <a:t> de </a:t>
+            </a:r>
+            <a:r>
+              <a:rPr sz="1400" dirty="0" err="1"/>
+              <a:t>evento</a:t>
+            </a:r>
+            <a:r>
+              <a:rPr sz="1400" dirty="0"/>
+              <a:t> (</a:t>
+            </a:r>
+            <a:r>
+              <a:rPr sz="1400" dirty="0" err="1"/>
+              <a:t>window.addEventListener</a:t>
+            </a:r>
+            <a:r>
+              <a:rPr sz="1400" dirty="0"/>
+              <a:t>('click') e </a:t>
+            </a:r>
+            <a:r>
+              <a:rPr sz="1400" dirty="0" err="1"/>
+              <a:t>rolagem</a:t>
+            </a:r>
+            <a:r>
+              <a:rPr sz="1400" dirty="0"/>
+              <a:t>) para </a:t>
+            </a:r>
+            <a:r>
+              <a:rPr sz="1400" dirty="0" err="1"/>
+              <a:t>iniciar</a:t>
+            </a:r>
+            <a:r>
+              <a:rPr sz="1400" dirty="0"/>
+              <a:t> </a:t>
+            </a:r>
+            <a:r>
+              <a:rPr sz="1400" dirty="0" err="1"/>
+              <a:t>suavemente</a:t>
+            </a:r>
+            <a:r>
+              <a:rPr sz="1400" dirty="0"/>
+              <a:t> </a:t>
+            </a:r>
+            <a:r>
+              <a:rPr sz="1400" dirty="0" err="1"/>
+              <a:t>quando</a:t>
+            </a:r>
+            <a:r>
+              <a:rPr sz="1400" dirty="0"/>
+              <a:t> o </a:t>
+            </a:r>
+            <a:r>
+              <a:rPr sz="1400" dirty="0" err="1"/>
+              <a:t>visitante</a:t>
+            </a:r>
+            <a:r>
+              <a:rPr sz="1400" dirty="0"/>
+              <a:t> </a:t>
+            </a:r>
+            <a:r>
+              <a:rPr sz="1400" dirty="0" err="1"/>
+              <a:t>demonstra</a:t>
+            </a:r>
+            <a:r>
+              <a:rPr sz="1400" dirty="0"/>
+              <a:t> interesse </a:t>
+            </a:r>
+            <a:r>
+              <a:rPr sz="1400" dirty="0" err="1"/>
+              <a:t>pelo</a:t>
+            </a:r>
+            <a:r>
+              <a:rPr sz="1400" dirty="0"/>
+              <a:t> site.</a:t>
+            </a:r>
+          </a:p>
+          <a:p>
+            <a:pPr algn="just"/>
+            <a:br>
+              <a:rPr sz="1400" dirty="0"/>
+            </a:br>
+            <a:r>
+              <a:rPr sz="1400" dirty="0"/>
+              <a:t>• </a:t>
+            </a:r>
+            <a:r>
+              <a:rPr sz="1400" dirty="0" err="1"/>
+              <a:t>Controles</a:t>
+            </a:r>
+            <a:r>
+              <a:rPr sz="1400" dirty="0"/>
+              <a:t> </a:t>
+            </a:r>
+            <a:r>
+              <a:rPr sz="1400" dirty="0" err="1"/>
+              <a:t>Completos</a:t>
+            </a:r>
+            <a:r>
+              <a:rPr sz="1400" dirty="0"/>
+              <a:t>: Slider de volume </a:t>
+            </a:r>
+            <a:r>
+              <a:rPr sz="1400" dirty="0" err="1"/>
+              <a:t>contínuo</a:t>
+            </a:r>
+            <a:r>
+              <a:rPr sz="1400" dirty="0"/>
+              <a:t>, </a:t>
+            </a:r>
+            <a:r>
+              <a:rPr sz="1400" dirty="0" err="1"/>
+              <a:t>botão</a:t>
+            </a:r>
+            <a:r>
+              <a:rPr sz="1400" dirty="0"/>
+              <a:t> de </a:t>
+            </a:r>
+            <a:r>
+              <a:rPr sz="1400" dirty="0" err="1"/>
+              <a:t>silenciar</a:t>
+            </a:r>
+            <a:r>
+              <a:rPr sz="1400" dirty="0"/>
+              <a:t> (mute), </a:t>
+            </a:r>
+            <a:r>
+              <a:rPr sz="1400" dirty="0" err="1"/>
+              <a:t>equalizador</a:t>
+            </a:r>
+            <a:r>
+              <a:rPr sz="1400" dirty="0"/>
+              <a:t> com 3 barras </a:t>
+            </a:r>
+            <a:r>
+              <a:rPr sz="1400" dirty="0" err="1"/>
+              <a:t>animadas</a:t>
+            </a:r>
+            <a:r>
+              <a:rPr sz="1400" dirty="0"/>
+              <a:t> </a:t>
+            </a:r>
+            <a:r>
+              <a:rPr sz="1400" dirty="0" err="1"/>
+              <a:t>em</a:t>
+            </a:r>
+            <a:r>
+              <a:rPr sz="1400" dirty="0"/>
+              <a:t> CSS e </a:t>
+            </a:r>
+            <a:r>
+              <a:rPr sz="1400" dirty="0" err="1"/>
+              <a:t>botão</a:t>
+            </a:r>
+            <a:r>
+              <a:rPr sz="1400" dirty="0"/>
+              <a:t> para </a:t>
+            </a:r>
+            <a:r>
+              <a:rPr sz="1400" dirty="0" err="1"/>
+              <a:t>recolher</a:t>
+            </a:r>
+            <a:r>
+              <a:rPr sz="1400" dirty="0"/>
+              <a:t> o </a:t>
+            </a:r>
+            <a:r>
+              <a:rPr sz="1400" dirty="0" err="1"/>
+              <a:t>tocador</a:t>
+            </a:r>
+            <a:r>
+              <a:rPr sz="1400" dirty="0"/>
+              <a:t> para um canto </a:t>
+            </a:r>
+            <a:r>
+              <a:rPr sz="1400" dirty="0" err="1"/>
+              <a:t>discreto</a:t>
+            </a:r>
+            <a:r>
+              <a:rPr sz="1400" dirty="0"/>
+              <a:t> da </a:t>
+            </a:r>
+            <a:r>
+              <a:rPr sz="1400" dirty="0" err="1"/>
+              <a:t>tela</a:t>
+            </a:r>
+            <a:r>
+              <a:rPr sz="1400" dirty="0"/>
+              <a:t>.</a:t>
             </a:r>
           </a:p>
         </p:txBody>
@@ -8216,7 +10866,7 @@
 </file>
 
 <file path=ppt/slides/slide5.xml><?xml version="1.0" encoding="utf-8"?>
-<p:sld xmlns:a="http://schemas.openxmlformats.org/drawingml/2006/main" xmlns:p="http://schemas.openxmlformats.org/presentationml/2006/main" xmlns:r="http://schemas.openxmlformats.org/officeDocument/2006/relationships">
+<p:sld xmlns:a="http://schemas.openxmlformats.org/drawingml/2006/main" xmlns:r="http://schemas.openxmlformats.org/officeDocument/2006/relationships" xmlns:p="http://schemas.openxmlformats.org/presentationml/2006/main">
   <p:cSld>
     <p:spTree>
       <p:nvGrpSpPr>
@@ -8224,7 +10874,14 @@
         <p:cNvGrpSpPr/>
         <p:nvPr/>
       </p:nvGrpSpPr>
-      <p:grpSpPr/>
+      <p:grpSpPr>
+        <a:xfrm>
+          <a:off x="0" y="0"/>
+          <a:ext cx="0" cy="0"/>
+          <a:chOff x="0" y="0"/>
+          <a:chExt cx="0" cy="0"/>
+        </a:xfrm>
+      </p:grpSpPr>
       <p:sp>
         <p:nvSpPr>
           <p:cNvPr id="2" name="TextBox 1"/>
@@ -8299,7 +10956,7 @@
           </a:fontRef>
         </p:style>
         <p:txBody>
-          <a:bodyPr rtlCol="0" anchor="ctr" tIns="54864"/>
+          <a:bodyPr tIns="54864" rtlCol="0" anchor="ctr"/>
           <a:lstStyle/>
           <a:p>
             <a:pPr algn="ctr">
@@ -8356,6 +11013,7 @@
           <a:lstStyle/>
           <a:p>
             <a:pPr algn="ctr"/>
+            <a:endParaRPr/>
           </a:p>
         </p:txBody>
       </p:sp>
@@ -8399,6 +11057,7 @@
           <a:lstStyle/>
           <a:p>
             <a:pPr algn="ctr"/>
+            <a:endParaRPr/>
           </a:p>
         </p:txBody>
       </p:sp>
@@ -8510,14 +11169,6 @@
           </a:p>
           <a:p>
             <a:br/>
-            <a:pPr algn="just">
-              <a:defRPr sz="1200">
-                <a:solidFill>
-                  <a:srgbClr val="64748B"/>
-                </a:solidFill>
-                <a:latin typeface="Segoe UI"/>
-              </a:defRPr>
-            </a:pPr>
             <a:r>
               <a:t>Poderíamos ter inventado nomes em um arquivo fixo, mas a disciplina nos desafiou a trabalhar como desenvolvedores profissionais trabalham: consumindo dados reais de servidores públicos em tempo real.</a:t>
             </a:r>
@@ -8566,6 +11217,7 @@
           <a:lstStyle/>
           <a:p>
             <a:pPr algn="ctr"/>
+            <a:endParaRPr/>
           </a:p>
         </p:txBody>
       </p:sp>
@@ -8683,6 +11335,7 @@
           <a:lstStyle/>
           <a:p>
             <a:pPr algn="ctr"/>
+            <a:endParaRPr/>
           </a:p>
         </p:txBody>
       </p:sp>
@@ -8722,14 +11375,6 @@
           </a:p>
           <a:p>
             <a:br/>
-            <a:pPr algn="just">
-              <a:defRPr sz="1100">
-                <a:solidFill>
-                  <a:srgbClr val="1E293B"/>
-                </a:solidFill>
-                <a:latin typeface="Segoe UI"/>
-              </a:defRPr>
-            </a:pPr>
             <a:r>
               <a:t>1. Momento da Espera (Loading):</a:t>
             </a:r>
@@ -8740,14 +11385,6 @@
           </a:p>
           <a:p>
             <a:br/>
-            <a:pPr algn="just">
-              <a:defRPr sz="1100">
-                <a:solidFill>
-                  <a:srgbClr val="1E293B"/>
-                </a:solidFill>
-                <a:latin typeface="Segoe UI"/>
-              </a:defRPr>
-            </a:pPr>
             <a:r>
               <a:t>2. Quando a Conexão Falha (Error):</a:t>
             </a:r>
@@ -8758,14 +11395,6 @@
           </a:p>
           <a:p>
             <a:br/>
-            <a:pPr algn="just">
-              <a:defRPr sz="1100">
-                <a:solidFill>
-                  <a:srgbClr val="1E293B"/>
-                </a:solidFill>
-                <a:latin typeface="Segoe UI"/>
-              </a:defRPr>
-            </a:pPr>
             <a:r>
               <a:t>3. Quando os Dados Chegam (Success):</a:t>
             </a:r>
@@ -8785,7 +11414,7 @@
 </file>
 
 <file path=ppt/slides/slide6.xml><?xml version="1.0" encoding="utf-8"?>
-<p:sld xmlns:a="http://schemas.openxmlformats.org/drawingml/2006/main" xmlns:p="http://schemas.openxmlformats.org/presentationml/2006/main" xmlns:r="http://schemas.openxmlformats.org/officeDocument/2006/relationships">
+<p:sld xmlns:a="http://schemas.openxmlformats.org/drawingml/2006/main" xmlns:r="http://schemas.openxmlformats.org/officeDocument/2006/relationships" xmlns:p="http://schemas.openxmlformats.org/presentationml/2006/main">
   <p:cSld>
     <p:spTree>
       <p:nvGrpSpPr>
@@ -8793,7 +11422,14 @@
         <p:cNvGrpSpPr/>
         <p:nvPr/>
       </p:nvGrpSpPr>
-      <p:grpSpPr/>
+      <p:grpSpPr>
+        <a:xfrm>
+          <a:off x="0" y="0"/>
+          <a:ext cx="0" cy="0"/>
+          <a:chOff x="0" y="0"/>
+          <a:chExt cx="0" cy="0"/>
+        </a:xfrm>
+      </p:grpSpPr>
       <p:sp>
         <p:nvSpPr>
           <p:cNvPr id="2" name="TextBox 1"/>
@@ -8868,7 +11504,7 @@
           </a:fontRef>
         </p:style>
         <p:txBody>
-          <a:bodyPr rtlCol="0" anchor="ctr" tIns="54864"/>
+          <a:bodyPr tIns="54864" rtlCol="0" anchor="ctr"/>
           <a:lstStyle/>
           <a:p>
             <a:pPr algn="ctr">
@@ -8925,6 +11561,7 @@
           <a:lstStyle/>
           <a:p>
             <a:pPr algn="ctr"/>
+            <a:endParaRPr/>
           </a:p>
         </p:txBody>
       </p:sp>
@@ -8968,6 +11605,7 @@
           <a:lstStyle/>
           <a:p>
             <a:pPr algn="ctr"/>
+            <a:endParaRPr/>
           </a:p>
         </p:txBody>
       </p:sp>
@@ -9085,6 +11723,7 @@
           <a:lstStyle/>
           <a:p>
             <a:pPr algn="ctr"/>
+            <a:endParaRPr/>
           </a:p>
         </p:txBody>
       </p:sp>
@@ -9124,14 +11763,6 @@
           </a:p>
           <a:p>
             <a:br/>
-            <a:pPr algn="l">
-              <a:defRPr sz="1050">
-                <a:solidFill>
-                  <a:srgbClr val="E2E8F0"/>
-                </a:solidFill>
-                <a:latin typeface="Consolas"/>
-              </a:defRPr>
-            </a:pPr>
             <a:r>
               <a:t>useEffect(() =&gt; {</a:t>
             </a:r>
@@ -9246,6 +11877,7 @@
           <a:lstStyle/>
           <a:p>
             <a:pPr algn="ctr"/>
+            <a:endParaRPr/>
           </a:p>
         </p:txBody>
       </p:sp>
@@ -9289,6 +11921,7 @@
           <a:lstStyle/>
           <a:p>
             <a:pPr algn="ctr"/>
+            <a:endParaRPr/>
           </a:p>
         </p:txBody>
       </p:sp>
@@ -9328,14 +11961,6 @@
           </a:p>
           <a:p>
             <a:br/>
-            <a:pPr algn="just">
-              <a:defRPr sz="1150">
-                <a:solidFill>
-                  <a:srgbClr val="1E293B"/>
-                </a:solidFill>
-                <a:latin typeface="Segoe UI"/>
-              </a:defRPr>
-            </a:pPr>
             <a:r>
               <a:t>Usamos o hook useMemo para cruzar a lista oficial do IBGE com as coordenadas geográficas de cada cidade parceira. Ao clicar no card de Coroatá ou Codó, o mapa faz uma transição suave de câmera até a cidade, com marcador e detalhes da distância de Timbiras.</a:t>
             </a:r>
@@ -9384,6 +12009,7 @@
           <a:lstStyle/>
           <a:p>
             <a:pPr algn="ctr"/>
+            <a:endParaRPr/>
           </a:p>
         </p:txBody>
       </p:sp>
@@ -9427,6 +12053,7 @@
           <a:lstStyle/>
           <a:p>
             <a:pPr algn="ctr"/>
+            <a:endParaRPr/>
           </a:p>
         </p:txBody>
       </p:sp>
@@ -9466,14 +12093,6 @@
           </a:p>
           <a:p>
             <a:br/>
-            <a:pPr algn="just">
-              <a:defRPr sz="1150">
-                <a:solidFill>
-                  <a:srgbClr val="1E293B"/>
-                </a:solidFill>
-                <a:latin typeface="Segoe UI"/>
-              </a:defRPr>
-            </a:pPr>
             <a:r>
               <a:t>Além das cidades dos Cocais, o usuário pode selecionar qualquer município do Maranhão no dropdown dinâmico para localizar e planejar novos polos de expansão solidária.</a:t>
             </a:r>
@@ -9489,7 +12108,7 @@
 </file>
 
 <file path=ppt/slides/slide7.xml><?xml version="1.0" encoding="utf-8"?>
-<p:sld xmlns:a="http://schemas.openxmlformats.org/drawingml/2006/main" xmlns:p="http://schemas.openxmlformats.org/presentationml/2006/main" xmlns:r="http://schemas.openxmlformats.org/officeDocument/2006/relationships">
+<p:sld xmlns:a="http://schemas.openxmlformats.org/drawingml/2006/main" xmlns:r="http://schemas.openxmlformats.org/officeDocument/2006/relationships" xmlns:p="http://schemas.openxmlformats.org/presentationml/2006/main">
   <p:cSld>
     <p:spTree>
       <p:nvGrpSpPr>
@@ -9497,7 +12116,14 @@
         <p:cNvGrpSpPr/>
         <p:nvPr/>
       </p:nvGrpSpPr>
-      <p:grpSpPr/>
+      <p:grpSpPr>
+        <a:xfrm>
+          <a:off x="0" y="0"/>
+          <a:ext cx="0" cy="0"/>
+          <a:chOff x="0" y="0"/>
+          <a:chExt cx="0" cy="0"/>
+        </a:xfrm>
+      </p:grpSpPr>
       <p:sp>
         <p:nvSpPr>
           <p:cNvPr id="2" name="TextBox 1"/>
@@ -9572,7 +12198,7 @@
           </a:fontRef>
         </p:style>
         <p:txBody>
-          <a:bodyPr rtlCol="0" anchor="ctr" tIns="54864"/>
+          <a:bodyPr tIns="54864" rtlCol="0" anchor="ctr"/>
           <a:lstStyle/>
           <a:p>
             <a:pPr algn="ctr">
@@ -9629,6 +12255,7 @@
           <a:lstStyle/>
           <a:p>
             <a:pPr algn="ctr"/>
+            <a:endParaRPr/>
           </a:p>
         </p:txBody>
       </p:sp>
@@ -9672,6 +12299,7 @@
           <a:lstStyle/>
           <a:p>
             <a:pPr algn="ctr"/>
+            <a:endParaRPr/>
           </a:p>
         </p:txBody>
       </p:sp>
@@ -9789,6 +12417,7 @@
           <a:lstStyle/>
           <a:p>
             <a:pPr algn="ctr"/>
+            <a:endParaRPr/>
           </a:p>
         </p:txBody>
       </p:sp>
@@ -9828,14 +12457,6 @@
           </a:p>
           <a:p>
             <a:br/>
-            <a:pPr algn="l">
-              <a:defRPr sz="1000">
-                <a:solidFill>
-                  <a:srgbClr val="1E293B"/>
-                </a:solidFill>
-                <a:latin typeface="Consolas"/>
-              </a:defRPr>
-            </a:pPr>
             <a:r>
               <a:t>App.jsx (Orquestrador Global)</a:t>
             </a:r>
@@ -9928,6 +12549,7 @@
           <a:lstStyle/>
           <a:p>
             <a:pPr algn="ctr"/>
+            <a:endParaRPr/>
           </a:p>
         </p:txBody>
       </p:sp>
@@ -9971,6 +12593,7 @@
           <a:lstStyle/>
           <a:p>
             <a:pPr algn="ctr"/>
+            <a:endParaRPr/>
           </a:p>
         </p:txBody>
       </p:sp>
@@ -10010,14 +12633,6 @@
           </a:p>
           <a:p>
             <a:br/>
-            <a:pPr algn="just">
-              <a:defRPr sz="1150">
-                <a:solidFill>
-                  <a:srgbClr val="1E293B"/>
-                </a:solidFill>
-                <a:latin typeface="Segoe UI"/>
-              </a:defRPr>
-            </a:pPr>
             <a:r>
               <a:t>Como uma Single Page Application (SPA), a navegação ocorre por rolagem suave (smooth scroll), mantendo a música tocando sem cortes e os dados preenchidos no formulário preservados.</a:t>
             </a:r>
@@ -10066,6 +12681,7 @@
           <a:lstStyle/>
           <a:p>
             <a:pPr algn="ctr"/>
+            <a:endParaRPr/>
           </a:p>
         </p:txBody>
       </p:sp>
@@ -10166,7 +12782,7 @@
 </file>
 
 <file path=ppt/slides/slide8.xml><?xml version="1.0" encoding="utf-8"?>
-<p:sld xmlns:a="http://schemas.openxmlformats.org/drawingml/2006/main" xmlns:p="http://schemas.openxmlformats.org/presentationml/2006/main" xmlns:r="http://schemas.openxmlformats.org/officeDocument/2006/relationships">
+<p:sld xmlns:a="http://schemas.openxmlformats.org/drawingml/2006/main" xmlns:r="http://schemas.openxmlformats.org/officeDocument/2006/relationships" xmlns:p="http://schemas.openxmlformats.org/presentationml/2006/main">
   <p:cSld>
     <p:spTree>
       <p:nvGrpSpPr>
@@ -10174,7 +12790,14 @@
         <p:cNvGrpSpPr/>
         <p:nvPr/>
       </p:nvGrpSpPr>
-      <p:grpSpPr/>
+      <p:grpSpPr>
+        <a:xfrm>
+          <a:off x="0" y="0"/>
+          <a:ext cx="0" cy="0"/>
+          <a:chOff x="0" y="0"/>
+          <a:chExt cx="0" cy="0"/>
+        </a:xfrm>
+      </p:grpSpPr>
       <p:sp>
         <p:nvSpPr>
           <p:cNvPr id="2" name="TextBox 1"/>
@@ -10249,7 +12872,7 @@
           </a:fontRef>
         </p:style>
         <p:txBody>
-          <a:bodyPr rtlCol="0" anchor="ctr" tIns="54864"/>
+          <a:bodyPr tIns="54864" rtlCol="0" anchor="ctr"/>
           <a:lstStyle/>
           <a:p>
             <a:pPr algn="ctr">
@@ -10306,6 +12929,7 @@
           <a:lstStyle/>
           <a:p>
             <a:pPr algn="ctr"/>
+            <a:endParaRPr/>
           </a:p>
         </p:txBody>
       </p:sp>
@@ -10349,6 +12973,7 @@
           <a:lstStyle/>
           <a:p>
             <a:pPr algn="ctr"/>
+            <a:endParaRPr/>
           </a:p>
         </p:txBody>
       </p:sp>
@@ -10502,6 +13127,7 @@
           <a:lstStyle/>
           <a:p>
             <a:pPr algn="ctr"/>
+            <a:endParaRPr/>
           </a:p>
         </p:txBody>
       </p:sp>
@@ -10545,6 +13171,7 @@
           <a:lstStyle/>
           <a:p>
             <a:pPr algn="ctr"/>
+            <a:endParaRPr/>
           </a:p>
         </p:txBody>
       </p:sp>
@@ -10639,6 +13266,7 @@
           <a:lstStyle/>
           <a:p>
             <a:pPr algn="ctr"/>
+            <a:endParaRPr/>
           </a:p>
         </p:txBody>
       </p:sp>
@@ -10682,6 +13310,7 @@
           <a:lstStyle/>
           <a:p>
             <a:pPr algn="ctr"/>
+            <a:endParaRPr/>
           </a:p>
         </p:txBody>
       </p:sp>
@@ -10776,6 +13405,7 @@
           <a:lstStyle/>
           <a:p>
             <a:pPr algn="ctr"/>
+            <a:endParaRPr/>
           </a:p>
         </p:txBody>
       </p:sp>
@@ -10819,6 +13449,7 @@
           <a:lstStyle/>
           <a:p>
             <a:pPr algn="ctr"/>
+            <a:endParaRPr/>
           </a:p>
         </p:txBody>
       </p:sp>
@@ -10913,6 +13544,7 @@
           <a:lstStyle/>
           <a:p>
             <a:pPr algn="ctr"/>
+            <a:endParaRPr/>
           </a:p>
         </p:txBody>
       </p:sp>
@@ -10952,56 +13584,24 @@
           </a:p>
           <a:p>
             <a:br/>
-            <a:pPr algn="just">
-              <a:defRPr sz="1150">
-                <a:solidFill>
-                  <a:srgbClr val="1E293B"/>
-                </a:solidFill>
-                <a:latin typeface="Segoe UI"/>
-              </a:defRPr>
-            </a:pPr>
             <a:r>
               <a:t>• Build de Produção com Vite: Compilado em menos de 800ms, gerando código minificado e assets otimizados na pasta dist/.</a:t>
             </a:r>
           </a:p>
           <a:p>
             <a:br/>
-            <a:pPr algn="just">
-              <a:defRPr sz="1150">
-                <a:solidFill>
-                  <a:srgbClr val="1E293B"/>
-                </a:solidFill>
-                <a:latin typeface="Segoe UI"/>
-              </a:defRPr>
-            </a:pPr>
             <a:r>
               <a:t>• Análise Estática com Oxlint: Zero erros de sintaxe, zero alertas de React e conformidade estrita com padrões modernos de código.</a:t>
             </a:r>
           </a:p>
           <a:p>
             <a:br/>
-            <a:pPr algn="just">
-              <a:defRPr sz="1150">
-                <a:solidFill>
-                  <a:srgbClr val="1E293B"/>
-                </a:solidFill>
-                <a:latin typeface="Segoe UI"/>
-              </a:defRPr>
-            </a:pPr>
             <a:r>
               <a:t>• Teste de Formulários em Branco: O navegador bloqueia submissão vazia e orienta o usuário de forma amigável.</a:t>
             </a:r>
           </a:p>
           <a:p>
             <a:br/>
-            <a:pPr algn="just">
-              <a:defRPr sz="1150">
-                <a:solidFill>
-                  <a:srgbClr val="1E293B"/>
-                </a:solidFill>
-                <a:latin typeface="Segoe UI"/>
-              </a:defRPr>
-            </a:pPr>
             <a:r>
               <a:t>• Teste em Celulares Reais: Testamos botões de toque, teclado numérico e rolagem suave em dispositivos Android e iOS dos membros da equipe.</a:t>
             </a:r>
@@ -11017,7 +13617,7 @@
 </file>
 
 <file path=ppt/slides/slide9.xml><?xml version="1.0" encoding="utf-8"?>
-<p:sld xmlns:a="http://schemas.openxmlformats.org/drawingml/2006/main" xmlns:p="http://schemas.openxmlformats.org/presentationml/2006/main" xmlns:r="http://schemas.openxmlformats.org/officeDocument/2006/relationships">
+<p:sld xmlns:a="http://schemas.openxmlformats.org/drawingml/2006/main" xmlns:r="http://schemas.openxmlformats.org/officeDocument/2006/relationships" xmlns:p="http://schemas.openxmlformats.org/presentationml/2006/main">
   <p:cSld>
     <p:spTree>
       <p:nvGrpSpPr>
@@ -11025,7 +13625,14 @@
         <p:cNvGrpSpPr/>
         <p:nvPr/>
       </p:nvGrpSpPr>
-      <p:grpSpPr/>
+      <p:grpSpPr>
+        <a:xfrm>
+          <a:off x="0" y="0"/>
+          <a:ext cx="0" cy="0"/>
+          <a:chOff x="0" y="0"/>
+          <a:chExt cx="0" cy="0"/>
+        </a:xfrm>
+      </p:grpSpPr>
       <p:sp>
         <p:nvSpPr>
           <p:cNvPr id="2" name="TextBox 1"/>
@@ -11100,7 +13707,7 @@
           </a:fontRef>
         </p:style>
         <p:txBody>
-          <a:bodyPr rtlCol="0" anchor="ctr" tIns="54864"/>
+          <a:bodyPr tIns="54864" rtlCol="0" anchor="ctr"/>
           <a:lstStyle/>
           <a:p>
             <a:pPr algn="ctr">
@@ -11157,6 +13764,7 @@
           <a:lstStyle/>
           <a:p>
             <a:pPr algn="ctr"/>
+            <a:endParaRPr/>
           </a:p>
         </p:txBody>
       </p:sp>
@@ -11200,6 +13808,7 @@
           <a:lstStyle/>
           <a:p>
             <a:pPr algn="ctr"/>
+            <a:endParaRPr/>
           </a:p>
         </p:txBody>
       </p:sp>
@@ -11353,6 +13962,7 @@
           <a:lstStyle/>
           <a:p>
             <a:pPr algn="ctr"/>
+            <a:endParaRPr/>
           </a:p>
         </p:txBody>
       </p:sp>
@@ -11392,28 +14002,12 @@
           </a:p>
           <a:p>
             <a:br/>
-            <a:pPr algn="ctr">
-              <a:defRPr sz="1150">
-                <a:solidFill>
-                  <a:srgbClr val="64748B"/>
-                </a:solidFill>
-                <a:latin typeface="Segoe UI"/>
-              </a:defRPr>
-            </a:pPr>
             <a:r>
               <a:t>Histórico completo de versões, commits explicativos da equipe, componentes React e instruções de execução.</a:t>
             </a:r>
           </a:p>
           <a:p>
             <a:br/>
-            <a:pPr algn="l">
-              <a:defRPr sz="1050" b="1">
-                <a:solidFill>
-                  <a:srgbClr val="00873E"/>
-                </a:solidFill>
-                <a:latin typeface="Consolas"/>
-              </a:defRPr>
-            </a:pPr>
             <a:r>
               <a:t>https://github.com/ambersonrogers/timbiras-solidaria</a:t>
             </a:r>
@@ -11462,6 +14056,7 @@
           <a:lstStyle/>
           <a:p>
             <a:pPr algn="ctr"/>
+            <a:endParaRPr/>
           </a:p>
         </p:txBody>
       </p:sp>
@@ -11501,28 +14096,12 @@
           </a:p>
           <a:p>
             <a:br/>
-            <a:pPr algn="ctr">
-              <a:defRPr sz="1150">
-                <a:solidFill>
-                  <a:srgbClr val="64748B"/>
-                </a:solidFill>
-                <a:latin typeface="Segoe UI"/>
-              </a:defRPr>
-            </a:pPr>
             <a:r>
               <a:t>Deploy em nuvem de alta velocidade, com roteamento de SPA configurado via vercel.json e acesso mundial.</a:t>
             </a:r>
           </a:p>
           <a:p>
             <a:br/>
-            <a:pPr algn="l">
-              <a:defRPr sz="1050" b="1">
-                <a:solidFill>
-                  <a:srgbClr val="0284C7"/>
-                </a:solidFill>
-                <a:latin typeface="Consolas"/>
-              </a:defRPr>
-            </a:pPr>
             <a:r>
               <a:t>https://timbiras-solidaria.vercel.app</a:t>
             </a:r>
@@ -11571,6 +14150,7 @@
           <a:lstStyle/>
           <a:p>
             <a:pPr algn="ctr"/>
+            <a:endParaRPr/>
           </a:p>
         </p:txBody>
       </p:sp>
